--- a/capacitacion-riesgos-2025/CAPACITACION_RIESGOS_2025.pptx
+++ b/capacitacion-riesgos-2025/CAPACITACION_RIESGOS_2025.pptx
@@ -548,7 +548,7 @@
           <a:p>
             <a:r>
               <a:rPr lang="en-US" dirty="0"/>
-              <a:t/>
+              <a:t>Da la bienvenida al grupo. Explica que el objetivo de hoy no es memorizar definiciones, sino construir una cultura real de gestión de riesgos: que cada persona salga pensando "yo también soy responsable". Menciona que habrá dinámicas, preguntas y casos prácticos durante toda la sesión.</a:t>
             </a:r>
             <a:endParaRPr lang="en-US" dirty="0"/>
           </a:p>
@@ -636,7 +636,7 @@
           <a:p>
             <a:r>
               <a:rPr lang="en-US" dirty="0"/>
-              <a:t/>
+              <a:t>Lee la situación en voz alta y da un minuto para que el grupo vote por A, B o C (a mano alzada) antes de avanzar a la respuesta. No reveles todavía cuál es la correcta.</a:t>
             </a:r>
             <a:endParaRPr lang="en-US" dirty="0"/>
           </a:p>
@@ -724,7 +724,7 @@
           <a:p>
             <a:r>
               <a:rPr lang="en-US" dirty="0"/>
-              <a:t/>
+              <a:t>Revela la respuesta y compárala con la votación del grupo. Asegúrate de que todos vean y recuerden el canal institucional de reporte del recuadro inferior: es el dato más importante de esta diapositiva.</a:t>
             </a:r>
             <a:endParaRPr lang="en-US" dirty="0"/>
           </a:p>
@@ -812,7 +812,7 @@
           <a:p>
             <a:r>
               <a:rPr lang="en-US" dirty="0"/>
-              <a:t/>
+              <a:t>Introduce el riesgo operativo como algo cotidiano y concreto, no como un concepto técnico abstracto. Todos en la sala conviven con él a diario, aunque no lo llamen así.</a:t>
             </a:r>
             <a:endParaRPr lang="en-US" dirty="0"/>
           </a:p>
@@ -900,7 +900,7 @@
           <a:p>
             <a:r>
               <a:rPr lang="en-US" dirty="0"/>
-              <a:t/>
+              <a:t>Pide un ejemplo real de cada categoría, vivido por alguien del grupo o de la Cooperativa. No hace falta profundizar mucho en cada una: el objetivo es que reconozcan las cuatro fuentes, no memorizarlas.</a:t>
             </a:r>
             <a:endParaRPr lang="en-US" dirty="0"/>
           </a:p>
@@ -988,7 +988,7 @@
           <a:p>
             <a:r>
               <a:rPr lang="en-US" dirty="0"/>
-              <a:t/>
+              <a:t>Refuerza que los pequeños descuidos diarios son el origen más común del riesgo operativo. Pausa unos segundos antes de avanzar al Tema 4.</a:t>
             </a:r>
             <a:endParaRPr lang="en-US" dirty="0"/>
           </a:p>
@@ -1076,7 +1076,7 @@
           <a:p>
             <a:r>
               <a:rPr lang="en-US" dirty="0"/>
-              <a:t/>
+              <a:t>Presenta la reputación como un activo que se construye o se pierde con cada interacción, no como un tema exclusivo de comunicaciones o gerencia.</a:t>
             </a:r>
             <a:endParaRPr lang="en-US" dirty="0"/>
           </a:p>
@@ -1164,7 +1164,7 @@
           <a:p>
             <a:r>
               <a:rPr lang="en-US" dirty="0"/>
-              <a:t/>
+              <a:t>Recorre los 8 elementos y pregunta al grupo cuál consideran más vulnerable en su área de trabajo. No es necesario detenerte por igual en los 8; prioriza los que generen más discusión.</a:t>
             </a:r>
             <a:endParaRPr lang="en-US" dirty="0"/>
           </a:p>
@@ -1252,7 +1252,7 @@
           <a:p>
             <a:r>
               <a:rPr lang="en-US" dirty="0"/>
-              <a:t/>
+              <a:t>Deja la frase en pantalla unos segundos antes de pasar al caso; es el punto emocional del tema.</a:t>
             </a:r>
             <a:endParaRPr lang="en-US" dirty="0"/>
           </a:p>
@@ -1340,7 +1340,7 @@
           <a:p>
             <a:r>
               <a:rPr lang="en-US" dirty="0"/>
-              <a:t/>
+              <a:t>Presenta el caso y pide una votación rápida (A, B o C) antes de revelar la respuesta. Pregunta si alguien ha vivido una situación similar con un asociado.</a:t>
             </a:r>
             <a:endParaRPr lang="en-US" dirty="0"/>
           </a:p>
@@ -1428,7 +1428,7 @@
           <a:p>
             <a:r>
               <a:rPr lang="en-US" dirty="0"/>
-              <a:t/>
+              <a:t>Explica por qué ignorar o responder a título personal agrava el problema. Cierra conectando con la idea de canalizar los casos por los canales adecuados de la Cooperativa, sin dar detalles de un procedimiento específico si no está definido.</a:t>
             </a:r>
             <a:endParaRPr lang="en-US" dirty="0"/>
           </a:p>
@@ -1516,7 +1516,7 @@
           <a:p>
             <a:r>
               <a:rPr lang="en-US" dirty="0"/>
-              <a:t/>
+              <a:t>Presenta el recorrido de los 8 temas sin entrar en detalle todavía. Aclara que al final habrá casos integradores y una gran actividad final, y que la sesión es participativa: se espera que el grupo opine, vote y responda preguntas durante toda la capacitación.</a:t>
             </a:r>
             <a:endParaRPr lang="en-US" dirty="0"/>
           </a:p>
@@ -1604,7 +1604,7 @@
           <a:p>
             <a:r>
               <a:rPr lang="en-US" dirty="0"/>
-              <a:t/>
+              <a:t>Introduce la diferencia entre error y fraude como el eje central de este tema. Aclara desde ya que ambos deben reportarse, aunque el trasfondo sea distinto.</a:t>
             </a:r>
             <a:endParaRPr lang="en-US" dirty="0"/>
           </a:p>
@@ -1692,7 +1692,7 @@
           <a:p>
             <a:r>
               <a:rPr lang="en-US" dirty="0"/>
-              <a:t/>
+              <a:t>Explica que la diferencia clave es la intención. Aclara que la responsabilidad del colaborador no es "juzgar" cuál es cuál, sino documentar y reportar en ambos casos.</a:t>
             </a:r>
             <a:endParaRPr lang="en-US" dirty="0"/>
           </a:p>
@@ -1780,7 +1780,7 @@
           <a:p>
             <a:r>
               <a:rPr lang="en-US" dirty="0"/>
-              <a:t/>
+              <a:t>Lee cada situación y pide que el grupo vote ERROR o FRAUDE (a mano alzada) antes de pasar a la diapositiva de respuestas. No confirmes ni corrijas todavía.</a:t>
             </a:r>
             <a:endParaRPr lang="en-US" dirty="0"/>
           </a:p>
@@ -1868,7 +1868,7 @@
           <a:p>
             <a:r>
               <a:rPr lang="en-US" dirty="0"/>
-              <a:t/>
+              <a:t>Revisa cada respuesta comparándola con la votación del grupo y explica brevemente el razonamiento (¿hubo intención de obtener un beneficio u ocultar algo, o fue una equivocación?).</a:t>
             </a:r>
             <a:endParaRPr lang="en-US" dirty="0"/>
           </a:p>
@@ -1956,7 +1956,7 @@
           <a:p>
             <a:r>
               <a:rPr lang="en-US" dirty="0"/>
-              <a:t/>
+              <a:t>Pide ejemplos adicionales de señales de alerta que el grupo haya visto u oído (sin señalar a nadie en específico). Cierra el tema reforzando: documentar y reportar siempre, encubrir nunca.</a:t>
             </a:r>
             <a:endParaRPr lang="en-US" dirty="0"/>
           </a:p>
@@ -2044,7 +2044,7 @@
           <a:p>
             <a:r>
               <a:rPr lang="en-US" dirty="0"/>
-              <a:t/>
+              <a:t>Aclara desde el inicio que este tema busca corresponsabilidad, no señalar al área de Créditos. El mensaje es que todos los que tocan el proceso —aunque sea en un solo paso— influyen en el riesgo final.</a:t>
             </a:r>
             <a:endParaRPr lang="en-US" dirty="0"/>
           </a:p>
@@ -2132,7 +2132,7 @@
           <a:p>
             <a:r>
               <a:rPr lang="en-US" dirty="0"/>
-              <a:t/>
+              <a:t>Recorre brevemente las 8 etapas. Pregunta al grupo en qué etapa creen que ellos mismos participan o influyen, aunque no trabajen directamente en Créditos (por ejemplo, verificando datos o atendiendo al asociado).</a:t>
             </a:r>
             <a:endParaRPr lang="en-US" dirty="0"/>
           </a:p>
@@ -2220,7 +2220,7 @@
           <a:p>
             <a:r>
               <a:rPr lang="en-US" dirty="0"/>
-              <a:t/>
+              <a:t>Deja que la respuesta impacte antes de explicarla. Es el mensaje central del tema: no hay una sola etapa "responsable" del riesgo crediticio.</a:t>
             </a:r>
             <a:endParaRPr lang="en-US" dirty="0"/>
           </a:p>
@@ -2308,7 +2308,7 @@
           <a:p>
             <a:r>
               <a:rPr lang="en-US" dirty="0"/>
-              <a:t/>
+              <a:t>Cierra el tema reforzando los tres pilares: corresponsabilidad, prevención y calidad del proceso. Evita que el cierre suene como una crítica al área de Créditos.</a:t>
             </a:r>
             <a:endParaRPr lang="en-US" dirty="0"/>
           </a:p>
@@ -2396,7 +2396,7 @@
           <a:p>
             <a:r>
               <a:rPr lang="en-US" dirty="0"/>
-              <a:t/>
+              <a:t>Presenta este tema como una aclaración simple de roles, no como una explicación burocrática. El mensaje debe quedar corto y memorable.</a:t>
             </a:r>
             <a:endParaRPr lang="en-US" dirty="0"/>
           </a:p>
@@ -2484,7 +2484,7 @@
           <a:p>
             <a:r>
               <a:rPr lang="en-US" dirty="0"/>
-              <a:t/>
+              <a:t>Da 30 segundos reales, con un cronómetro visible si es posible. Pide que levanten la mano o griten en voz alta conforme identifiquen riesgos, sin revelar todavía cuáles son. Genera expectativa antes de pasar a la siguiente diapositiva con las respuestas.</a:t>
             </a:r>
             <a:endParaRPr lang="en-US" dirty="0"/>
           </a:p>
@@ -2572,7 +2572,7 @@
           <a:p>
             <a:r>
               <a:rPr lang="en-US" dirty="0"/>
-              <a:t/>
+              <a:t>Recorre cada rol alrededor de "TODOS" con una frase corta sobre su función. No te extiendas demasiado en ninguno: el punto es que el grupo se vea reflejado en el centro del diagrama.</a:t>
             </a:r>
             <a:endParaRPr lang="en-US" dirty="0"/>
           </a:p>
@@ -2660,7 +2660,7 @@
           <a:p>
             <a:r>
               <a:rPr lang="en-US" dirty="0"/>
-              <a:t/>
+              <a:t>Conecta este último tema con la sostenibilidad de la Cooperativa a largo plazo: lo ambiental y lo social no son temas aparte de las finanzas, son parte de la misma cadena de riesgo.</a:t>
             </a:r>
             <a:endParaRPr lang="en-US" dirty="0"/>
           </a:p>
@@ -2748,7 +2748,7 @@
           <a:p>
             <a:r>
               <a:rPr lang="en-US" dirty="0"/>
-              <a:t/>
+              <a:t>Usa un ejemplo concreto (un terremoto, una tormenta, una epidemia) y recorre la cadena completa paso a paso hasta llegar al impacto financiero.</a:t>
             </a:r>
             <a:endParaRPr lang="en-US" dirty="0"/>
           </a:p>
@@ -2836,7 +2836,7 @@
           <a:p>
             <a:r>
               <a:rPr lang="en-US" dirty="0"/>
-              <a:t/>
+              <a:t>Pregunta si alguien en el grupo ha vivido una interrupción operativa por alguno de estos eventos. Cierra el bloque de los 8 temas: lo que sigue son los casos integradores.</a:t>
             </a:r>
             <a:endParaRPr lang="en-US" dirty="0"/>
           </a:p>
@@ -2924,7 +2924,7 @@
           <a:p>
             <a:r>
               <a:rPr lang="en-US" dirty="0"/>
-              <a:t/>
+              <a:t>Explica que estos 4 casos integran todos los temas vistos. Si el tiempo lo permite, divide al grupo en equipos pequeños para discutir cada caso antes de revisar la respuesta en plenaria.</a:t>
             </a:r>
             <a:endParaRPr lang="en-US" dirty="0"/>
           </a:p>
@@ -3012,7 +3012,7 @@
           <a:p>
             <a:r>
               <a:rPr lang="en-US" dirty="0"/>
-              <a:t/>
+              <a:t>Da 2-3 minutos para que el grupo (o equipos pequeños) discuta las 4 preguntas antes de pasar a la respuesta. No reveles todavía la solución.</a:t>
             </a:r>
             <a:endParaRPr lang="en-US" dirty="0"/>
           </a:p>
@@ -3100,7 +3100,7 @@
           <a:p>
             <a:r>
               <a:rPr lang="en-US" dirty="0"/>
-              <a:t/>
+              <a:t>Compara la respuesta con lo que discutió el grupo. Resalta que este caso conecta el Tema 3 (riesgo operativo) con la importancia de reportar del Tema 2.</a:t>
             </a:r>
             <a:endParaRPr lang="en-US" dirty="0"/>
           </a:p>
@@ -3188,7 +3188,7 @@
           <a:p>
             <a:r>
               <a:rPr lang="en-US" dirty="0"/>
-              <a:t/>
+              <a:t>Repite la dinámica: da tiempo de discusión en equipos antes de revelar la respuesta.</a:t>
             </a:r>
             <a:endParaRPr lang="en-US" dirty="0"/>
           </a:p>
@@ -3276,7 +3276,7 @@
           <a:p>
             <a:r>
               <a:rPr lang="en-US" dirty="0"/>
-              <a:t/>
+              <a:t>Conecta esta respuesta con el Tema 4 (reputación) visto anteriormente.</a:t>
             </a:r>
             <a:endParaRPr lang="en-US" dirty="0"/>
           </a:p>
@@ -3364,7 +3364,7 @@
           <a:p>
             <a:r>
               <a:rPr lang="en-US" dirty="0"/>
-              <a:t/>
+              <a:t>Este caso es ambiguo a propósito: motiva al grupo a discutir qué harían ante la incertidumbre de no saber si es error o algo más.</a:t>
             </a:r>
             <a:endParaRPr lang="en-US" dirty="0"/>
           </a:p>
@@ -3452,7 +3452,7 @@
           <a:p>
             <a:r>
               <a:rPr lang="en-US" dirty="0"/>
-              <a:t/>
+              <a:t>Repasa los 8 riesgos uno por uno. Pregunta cuántos identificó el grupo y felicita a quien más encontró. Cierra la apertura conectando: este mismo ejercicio de observación es el que deben aplicar todos los días en su puesto de trabajo.</a:t>
             </a:r>
             <a:endParaRPr lang="en-US" dirty="0"/>
           </a:p>
@@ -3540,7 +3540,7 @@
           <a:p>
             <a:r>
               <a:rPr lang="en-US" dirty="0"/>
-              <a:t/>
+              <a:t>Refuerza la idea clave del Tema 5: no le corresponde al colaborador decidir si es error o fraude, solo documentar y reportar.</a:t>
             </a:r>
             <a:endParaRPr lang="en-US" dirty="0"/>
           </a:p>
@@ -3628,7 +3628,7 @@
           <a:p>
             <a:r>
               <a:rPr lang="en-US" dirty="0"/>
-              <a:t/>
+              <a:t>Conecta este caso con el Tema 6 (riesgo crediticio) y su idea de corresponsabilidad a lo largo del proceso.</a:t>
             </a:r>
             <a:endParaRPr lang="en-US" dirty="0"/>
           </a:p>
@@ -3716,7 +3716,7 @@
           <a:p>
             <a:r>
               <a:rPr lang="en-US" dirty="0"/>
-              <a:t/>
+              <a:t>Cierra la sección de casos integradores. Pregunta si el grupo tiene algún caso real propio (sin mencionar nombres) que quiera compartir antes de pasar a la actividad final.</a:t>
             </a:r>
             <a:endParaRPr lang="en-US" dirty="0"/>
           </a:p>
@@ -3804,7 +3804,7 @@
           <a:p>
             <a:r>
               <a:rPr lang="en-US" dirty="0"/>
-              <a:t/>
+              <a:t>Presenta esta como la gran actividad de cierre. Genera energía y expectativa antes de iniciar el cronómetro en la siguiente diapositiva.</a:t>
             </a:r>
             <a:endParaRPr lang="en-US" dirty="0"/>
           </a:p>
@@ -3892,7 +3892,7 @@
           <a:p>
             <a:r>
               <a:rPr lang="en-US" dirty="0"/>
-              <a:t/>
+              <a:t>Da 30 segundos reales con un cronómetro visible. Motiva a que compitan entre sí por encontrar más riesgos que en la actividad de apertura del inicio de la sesión.</a:t>
             </a:r>
             <a:endParaRPr lang="en-US" dirty="0"/>
           </a:p>
@@ -3980,7 +3980,7 @@
           <a:p>
             <a:r>
               <a:rPr lang="en-US" dirty="0"/>
-              <a:t/>
+              <a:t>Revisa los 9 riesgos uno por uno. Pregunta cuántos identificó cada persona y felicita a quien más encontró. Compara con el resultado de la actividad de apertura si el grupo lo recuerda.</a:t>
             </a:r>
             <a:endParaRPr lang="en-US" dirty="0"/>
           </a:p>
@@ -4068,7 +4068,7 @@
           <a:p>
             <a:r>
               <a:rPr lang="en-US" dirty="0"/>
-              <a:t/>
+              <a:t>Recorre la secuencia VEO-IDENTIFICO-PREVENGO-ACTÚO-REPORTO en voz alta junto con el grupo, casi como un compromiso colectivo. Es el resumen de toda la capacitación en cinco palabras.</a:t>
             </a:r>
             <a:endParaRPr lang="en-US" dirty="0"/>
           </a:p>
@@ -4156,7 +4156,7 @@
           <a:p>
             <a:r>
               <a:rPr lang="en-US" dirty="0"/>
-              <a:t/>
+              <a:t>Cierra con la frase final y agradece la participación del grupo. Recuerda una vez más el canal institucional de reporte antes de terminar la sesión, y resuelve cualquier duda pendiente.</a:t>
             </a:r>
             <a:endParaRPr lang="en-US" dirty="0"/>
           </a:p>
@@ -4244,7 +4244,7 @@
           <a:p>
             <a:r>
               <a:rPr lang="en-US" dirty="0"/>
-              <a:t/>
+              <a:t>Introduce el primer tema con la idea central de toda la capacitación: la gestión de riesgos no es tarea exclusiva de Administración de Riesgos, sino de cada colaborador, sin importar su puesto.</a:t>
             </a:r>
             <a:endParaRPr lang="en-US" dirty="0"/>
           </a:p>
@@ -4332,7 +4332,7 @@
           <a:p>
             <a:r>
               <a:rPr lang="en-US" dirty="0"/>
-              <a:t/>
+              <a:t>Ve verbo por verbo y pide un ejemplo concreto de cada uno aplicado al puesto de alguien en la sala (no tiene que ser de Administración de Riesgos). El objetivo es que el grupo vea que estas seis acciones ya las puede aplicar hoy mismo.</a:t>
             </a:r>
             <a:endParaRPr lang="en-US" dirty="0"/>
           </a:p>
@@ -4420,7 +4420,7 @@
           <a:p>
             <a:r>
               <a:rPr lang="en-US" dirty="0"/>
-              <a:t/>
+              <a:t>Deja que el mensaje respire unos segundos en silencio antes de continuar. Es el cierre emocional del Tema 1 — no lo expliques de más, solo pausa y avanza.</a:t>
             </a:r>
             <a:endParaRPr lang="en-US" dirty="0"/>
           </a:p>
@@ -4508,7 +4508,7 @@
           <a:p>
             <a:r>
               <a:rPr lang="en-US" dirty="0"/>
-              <a:t/>
+              <a:t>Presenta este tema como uno de los más importantes de toda la capacitación: no basta con identificar un riesgo, hay que reportarlo. Aclara que reportar no es "delatar", es proteger a la Cooperativa y a los asociados.</a:t>
             </a:r>
             <a:endParaRPr lang="en-US" dirty="0"/>
           </a:p>
@@ -4596,7 +4596,7 @@
           <a:p>
             <a:r>
               <a:rPr lang="en-US" dirty="0"/>
-              <a:t/>
+              <a:t>Explica cada paso con un ejemplo breve y cotidiano. Enfatiza que los cuatro pasos ocurren en segundos: ver algo, reconocerlo como riesgo, actuar de inmediato y avisar. Ninguno se puede saltar.</a:t>
             </a:r>
             <a:endParaRPr lang="en-US" dirty="0"/>
           </a:p>
@@ -4971,7 +4971,7 @@
       </p:grpSpPr>
       <p:sp>
         <p:nvSpPr>
-          <p:cNvPr id="2" name="Shape 0"/>
+          <p:cNvPr id="3" name="Shape 0"/>
           <p:cNvSpPr/>
           <p:nvPr/>
         </p:nvSpPr>
@@ -4991,7 +4991,7 @@
       </p:sp>
       <p:sp>
         <p:nvSpPr>
-          <p:cNvPr id="3" name="Shape 1"/>
+          <p:cNvPr id="4" name="Shape 1"/>
           <p:cNvSpPr/>
           <p:nvPr/>
         </p:nvSpPr>
@@ -5011,7 +5011,7 @@
       </p:sp>
       <p:sp>
         <p:nvSpPr>
-          <p:cNvPr id="4" name="Text 2"/>
+          <p:cNvPr id="5" name="Text 2"/>
           <p:cNvSpPr txBox="1"/>
           <p:nvPr/>
         </p:nvSpPr>
@@ -5050,7 +5050,7 @@
       </p:sp>
       <p:sp>
         <p:nvSpPr>
-          <p:cNvPr id="5" name="Text 3"/>
+          <p:cNvPr id="6" name="Text 3"/>
           <p:cNvSpPr txBox="1"/>
           <p:nvPr/>
         </p:nvSpPr>
@@ -5112,7 +5112,7 @@
       </p:sp>
       <p:sp>
         <p:nvSpPr>
-          <p:cNvPr id="6" name="Text 4"/>
+          <p:cNvPr id="7" name="Text 4"/>
           <p:cNvSpPr txBox="1"/>
           <p:nvPr/>
         </p:nvSpPr>
@@ -5151,7 +5151,7 @@
       </p:sp>
       <p:sp>
         <p:nvSpPr>
-          <p:cNvPr id="7" name="Text 5"/>
+          <p:cNvPr id="8" name="Text 5"/>
           <p:cNvSpPr txBox="1"/>
           <p:nvPr/>
         </p:nvSpPr>
@@ -5190,7 +5190,7 @@
       </p:sp>
       <p:sp>
         <p:nvSpPr>
-          <p:cNvPr id="8" name="Text 6"/>
+          <p:cNvPr id="9" name="Text 6"/>
           <p:cNvSpPr txBox="1"/>
           <p:nvPr/>
         </p:nvSpPr>
@@ -5229,7 +5229,7 @@
       </p:sp>
       <p:sp>
         <p:nvSpPr>
-          <p:cNvPr id="9" name="Shape 7"/>
+          <p:cNvPr id="10" name="Shape 7"/>
           <p:cNvSpPr/>
           <p:nvPr/>
         </p:nvSpPr>
@@ -5252,7 +5252,7 @@
       </p:sp>
       <p:sp>
         <p:nvSpPr>
-          <p:cNvPr id="10" name="Shape 8"/>
+          <p:cNvPr id="11" name="Shape 8"/>
           <p:cNvSpPr/>
           <p:nvPr/>
         </p:nvSpPr>
@@ -5275,7 +5275,7 @@
       </p:sp>
       <p:sp>
         <p:nvSpPr>
-          <p:cNvPr id="11" name="Shape 9"/>
+          <p:cNvPr id="12" name="Shape 9"/>
           <p:cNvSpPr/>
           <p:nvPr/>
         </p:nvSpPr>
@@ -5298,7 +5298,7 @@
       </p:sp>
       <p:sp>
         <p:nvSpPr>
-          <p:cNvPr id="12" name="Shape 10"/>
+          <p:cNvPr id="13" name="Shape 10"/>
           <p:cNvSpPr/>
           <p:nvPr/>
         </p:nvSpPr>
@@ -5321,7 +5321,7 @@
       </p:sp>
       <p:sp>
         <p:nvSpPr>
-          <p:cNvPr id="13" name="Shape 11"/>
+          <p:cNvPr id="14" name="Shape 11"/>
           <p:cNvSpPr/>
           <p:nvPr/>
         </p:nvSpPr>
@@ -5344,7 +5344,7 @@
       </p:sp>
       <p:sp>
         <p:nvSpPr>
-          <p:cNvPr id="14" name="Shape 12"/>
+          <p:cNvPr id="15" name="Shape 12"/>
           <p:cNvSpPr/>
           <p:nvPr/>
         </p:nvSpPr>
@@ -5364,7 +5364,7 @@
       </p:sp>
       <p:pic>
         <p:nvPicPr>
-          <p:cNvPr id="15" name="Image 0" descr="/tmp/claude-0/-home-user-riesgo/0ff9ff46-1396-5bd8-b3ac-2280dfbbbc55/scratchpad/work/gen/icons/person_white.png">    </p:cNvPr>
+          <p:cNvPr id="16" name="Image 0" descr="/tmp/claude-0/-home-user-riesgo/0ff9ff46-1396-5bd8-b3ac-2280dfbbbc55/scratchpad/work/gen/icons/person_white.png">    </p:cNvPr>
           <p:cNvPicPr>
             <a:picLocks noChangeAspect="1"/>
           </p:cNvPicPr>
@@ -5388,7 +5388,7 @@
       </p:pic>
       <p:sp>
         <p:nvSpPr>
-          <p:cNvPr id="16" name="Shape 13"/>
+          <p:cNvPr id="17" name="Shape 13"/>
           <p:cNvSpPr/>
           <p:nvPr/>
         </p:nvSpPr>
@@ -5408,7 +5408,7 @@
       </p:sp>
       <p:pic>
         <p:nvPicPr>
-          <p:cNvPr id="17" name="Image 1" descr="/tmp/claude-0/-home-user-riesgo/0ff9ff46-1396-5bd8-b3ac-2280dfbbbc55/scratchpad/work/gen/icons/briefcase_white.png">    </p:cNvPr>
+          <p:cNvPr id="18" name="Image 1" descr="/tmp/claude-0/-home-user-riesgo/0ff9ff46-1396-5bd8-b3ac-2280dfbbbc55/scratchpad/work/gen/icons/briefcase_white.png">    </p:cNvPr>
           <p:cNvPicPr>
             <a:picLocks noChangeAspect="1"/>
           </p:cNvPicPr>
@@ -5432,7 +5432,7 @@
       </p:pic>
       <p:sp>
         <p:nvSpPr>
-          <p:cNvPr id="18" name="Shape 14"/>
+          <p:cNvPr id="19" name="Shape 14"/>
           <p:cNvSpPr/>
           <p:nvPr/>
         </p:nvSpPr>
@@ -5452,7 +5452,7 @@
       </p:sp>
       <p:pic>
         <p:nvPicPr>
-          <p:cNvPr id="19" name="Image 2" descr="/tmp/claude-0/-home-user-riesgo/0ff9ff46-1396-5bd8-b3ac-2280dfbbbc55/scratchpad/work/gen/icons/handshake_white.png">    </p:cNvPr>
+          <p:cNvPr id="20" name="Image 2" descr="/tmp/claude-0/-home-user-riesgo/0ff9ff46-1396-5bd8-b3ac-2280dfbbbc55/scratchpad/work/gen/icons/handshake_white.png">    </p:cNvPr>
           <p:cNvPicPr>
             <a:picLocks noChangeAspect="1"/>
           </p:cNvPicPr>
@@ -5476,7 +5476,7 @@
       </p:pic>
       <p:sp>
         <p:nvSpPr>
-          <p:cNvPr id="20" name="Shape 15"/>
+          <p:cNvPr id="21" name="Shape 15"/>
           <p:cNvSpPr/>
           <p:nvPr/>
         </p:nvSpPr>
@@ -5496,7 +5496,7 @@
       </p:sp>
       <p:pic>
         <p:nvPicPr>
-          <p:cNvPr id="21" name="Image 3" descr="/tmp/claude-0/-home-user-riesgo/0ff9ff46-1396-5bd8-b3ac-2280dfbbbc55/scratchpad/work/gen/icons/clipboard_check_white.png">    </p:cNvPr>
+          <p:cNvPr id="22" name="Image 3" descr="/tmp/claude-0/-home-user-riesgo/0ff9ff46-1396-5bd8-b3ac-2280dfbbbc55/scratchpad/work/gen/icons/clipboard_check_white.png">    </p:cNvPr>
           <p:cNvPicPr>
             <a:picLocks noChangeAspect="1"/>
           </p:cNvPicPr>
@@ -5520,7 +5520,7 @@
       </p:pic>
       <p:sp>
         <p:nvSpPr>
-          <p:cNvPr id="22" name="Shape 16"/>
+          <p:cNvPr id="23" name="Shape 16"/>
           <p:cNvSpPr/>
           <p:nvPr/>
         </p:nvSpPr>
@@ -5540,7 +5540,7 @@
       </p:sp>
       <p:pic>
         <p:nvPicPr>
-          <p:cNvPr id="23" name="Image 4" descr="/tmp/claude-0/-home-user-riesgo/0ff9ff46-1396-5bd8-b3ac-2280dfbbbc55/scratchpad/work/gen/icons/megaphone_white.png">    </p:cNvPr>
+          <p:cNvPr id="24" name="Image 4" descr="/tmp/claude-0/-home-user-riesgo/0ff9ff46-1396-5bd8-b3ac-2280dfbbbc55/scratchpad/work/gen/icons/megaphone_white.png">    </p:cNvPr>
           <p:cNvPicPr>
             <a:picLocks noChangeAspect="1"/>
           </p:cNvPicPr>
@@ -5564,7 +5564,7 @@
       </p:pic>
       <p:sp>
         <p:nvSpPr>
-          <p:cNvPr id="24" name="Shape 17"/>
+          <p:cNvPr id="25" name="Shape 17"/>
           <p:cNvSpPr/>
           <p:nvPr/>
         </p:nvSpPr>
@@ -5584,7 +5584,7 @@
       </p:sp>
       <p:pic>
         <p:nvPicPr>
-          <p:cNvPr id="25" name="Image 5" descr="/tmp/claude-0/-home-user-riesgo/0ff9ff46-1396-5bd8-b3ac-2280dfbbbc55/scratchpad/work/gen/icons/shield_check_navy.png">    </p:cNvPr>
+          <p:cNvPr id="26" name="Image 5" descr="/tmp/claude-0/-home-user-riesgo/0ff9ff46-1396-5bd8-b3ac-2280dfbbbc55/scratchpad/work/gen/icons/shield_check_navy.png">    </p:cNvPr>
           <p:cNvPicPr>
             <a:picLocks noChangeAspect="1"/>
           </p:cNvPicPr>
@@ -5608,7 +5608,7 @@
       </p:pic>
       <p:pic>
         <p:nvPicPr>
-          <p:cNvPr id="26" name="Image 6" descr="/tmp/claude-0/-home-user-riesgo/0ff9ff46-1396-5bd8-b3ac-2280dfbbbc55/scratchpad/work/gen/logo_white.png">    </p:cNvPr>
+          <p:cNvPr id="27" name="Image 6" descr="/tmp/claude-0/-home-user-riesgo/0ff9ff46-1396-5bd8-b3ac-2280dfbbbc55/scratchpad/work/gen/logo_white.png">    </p:cNvPr>
           <p:cNvPicPr>
             <a:picLocks noChangeAspect="1"/>
           </p:cNvPicPr>
@@ -5632,7 +5632,7 @@
       </p:pic>
       <p:sp>
         <p:nvSpPr>
-          <p:cNvPr id="27" name="Text 18"/>
+          <p:cNvPr id="28" name="Text 18"/>
           <p:cNvSpPr txBox="1"/>
           <p:nvPr/>
         </p:nvSpPr>
@@ -5671,7 +5671,7 @@
       </p:sp>
       <p:sp>
         <p:nvSpPr>
-          <p:cNvPr id="28" name="Text 19"/>
+          <p:cNvPr id="29" name="Text 19"/>
           <p:cNvSpPr txBox="1"/>
           <p:nvPr/>
         </p:nvSpPr>
@@ -5742,7 +5742,7 @@
       </p:grpSpPr>
       <p:sp>
         <p:nvSpPr>
-          <p:cNvPr id="2" name="Text 0"/>
+          <p:cNvPr id="3" name="Text 0"/>
           <p:cNvSpPr txBox="1"/>
           <p:nvPr/>
         </p:nvSpPr>
@@ -5781,7 +5781,7 @@
       </p:sp>
       <p:sp>
         <p:nvSpPr>
-          <p:cNvPr id="3" name="Text 1"/>
+          <p:cNvPr id="4" name="Text 1"/>
           <p:cNvSpPr txBox="1"/>
           <p:nvPr/>
         </p:nvSpPr>
@@ -5823,7 +5823,7 @@
       </p:sp>
       <p:sp>
         <p:nvSpPr>
-          <p:cNvPr id="4" name="Shape 2"/>
+          <p:cNvPr id="5" name="Shape 2"/>
           <p:cNvSpPr/>
           <p:nvPr/>
         </p:nvSpPr>
@@ -5845,7 +5845,7 @@
       </p:sp>
       <p:sp>
         <p:nvSpPr>
-          <p:cNvPr id="5" name="Shape 3"/>
+          <p:cNvPr id="6" name="Shape 3"/>
           <p:cNvSpPr/>
           <p:nvPr/>
         </p:nvSpPr>
@@ -5865,7 +5865,7 @@
       </p:sp>
       <p:pic>
         <p:nvPicPr>
-          <p:cNvPr id="6" name="Image 0" descr="/tmp/claude-0/-home-user-riesgo/0ff9ff46-1396-5bd8-b3ac-2280dfbbbc55/scratchpad/work/gen/icons/document_lock_navy.png">    </p:cNvPr>
+          <p:cNvPr id="7" name="Image 0" descr="/tmp/claude-0/-home-user-riesgo/0ff9ff46-1396-5bd8-b3ac-2280dfbbbc55/scratchpad/work/gen/icons/document_lock_navy.png">    </p:cNvPr>
           <p:cNvPicPr>
             <a:picLocks noChangeAspect="1"/>
           </p:cNvPicPr>
@@ -5889,7 +5889,7 @@
       </p:pic>
       <p:sp>
         <p:nvSpPr>
-          <p:cNvPr id="7" name="Text 4"/>
+          <p:cNvPr id="8" name="Text 4"/>
           <p:cNvSpPr txBox="1"/>
           <p:nvPr/>
         </p:nvSpPr>
@@ -5928,7 +5928,7 @@
       </p:sp>
       <p:sp>
         <p:nvSpPr>
-          <p:cNvPr id="8" name="Text 5"/>
+          <p:cNvPr id="9" name="Text 5"/>
           <p:cNvSpPr txBox="1"/>
           <p:nvPr/>
         </p:nvSpPr>
@@ -5970,7 +5970,7 @@
       </p:sp>
       <p:sp>
         <p:nvSpPr>
-          <p:cNvPr id="9" name="Text 6"/>
+          <p:cNvPr id="10" name="Text 6"/>
           <p:cNvSpPr txBox="1"/>
           <p:nvPr/>
         </p:nvSpPr>
@@ -6009,7 +6009,7 @@
       </p:sp>
       <p:sp>
         <p:nvSpPr>
-          <p:cNvPr id="10" name="Shape 7"/>
+          <p:cNvPr id="11" name="Shape 7"/>
           <p:cNvSpPr/>
           <p:nvPr/>
         </p:nvSpPr>
@@ -6031,7 +6031,7 @@
       </p:sp>
       <p:sp>
         <p:nvSpPr>
-          <p:cNvPr id="11" name="Shape 8"/>
+          <p:cNvPr id="12" name="Shape 8"/>
           <p:cNvSpPr/>
           <p:nvPr/>
         </p:nvSpPr>
@@ -6051,7 +6051,7 @@
       </p:sp>
       <p:sp>
         <p:nvSpPr>
-          <p:cNvPr id="12" name="Text 9"/>
+          <p:cNvPr id="13" name="Text 9"/>
           <p:cNvSpPr txBox="1"/>
           <p:nvPr/>
         </p:nvSpPr>
@@ -6090,7 +6090,7 @@
       </p:sp>
       <p:sp>
         <p:nvSpPr>
-          <p:cNvPr id="13" name="Text 10"/>
+          <p:cNvPr id="14" name="Text 10"/>
           <p:cNvSpPr txBox="1"/>
           <p:nvPr/>
         </p:nvSpPr>
@@ -6132,7 +6132,7 @@
       </p:sp>
       <p:sp>
         <p:nvSpPr>
-          <p:cNvPr id="14" name="Shape 11"/>
+          <p:cNvPr id="15" name="Shape 11"/>
           <p:cNvSpPr/>
           <p:nvPr/>
         </p:nvSpPr>
@@ -6154,7 +6154,7 @@
       </p:sp>
       <p:sp>
         <p:nvSpPr>
-          <p:cNvPr id="15" name="Shape 12"/>
+          <p:cNvPr id="16" name="Shape 12"/>
           <p:cNvSpPr/>
           <p:nvPr/>
         </p:nvSpPr>
@@ -6174,7 +6174,7 @@
       </p:sp>
       <p:sp>
         <p:nvSpPr>
-          <p:cNvPr id="16" name="Text 13"/>
+          <p:cNvPr id="17" name="Text 13"/>
           <p:cNvSpPr txBox="1"/>
           <p:nvPr/>
         </p:nvSpPr>
@@ -6213,7 +6213,7 @@
       </p:sp>
       <p:sp>
         <p:nvSpPr>
-          <p:cNvPr id="17" name="Text 14"/>
+          <p:cNvPr id="18" name="Text 14"/>
           <p:cNvSpPr txBox="1"/>
           <p:nvPr/>
         </p:nvSpPr>
@@ -6255,7 +6255,7 @@
       </p:sp>
       <p:sp>
         <p:nvSpPr>
-          <p:cNvPr id="18" name="Shape 15"/>
+          <p:cNvPr id="19" name="Shape 15"/>
           <p:cNvSpPr/>
           <p:nvPr/>
         </p:nvSpPr>
@@ -6277,7 +6277,7 @@
       </p:sp>
       <p:sp>
         <p:nvSpPr>
-          <p:cNvPr id="19" name="Shape 16"/>
+          <p:cNvPr id="20" name="Shape 16"/>
           <p:cNvSpPr/>
           <p:nvPr/>
         </p:nvSpPr>
@@ -6297,7 +6297,7 @@
       </p:sp>
       <p:sp>
         <p:nvSpPr>
-          <p:cNvPr id="20" name="Text 17"/>
+          <p:cNvPr id="21" name="Text 17"/>
           <p:cNvSpPr txBox="1"/>
           <p:nvPr/>
         </p:nvSpPr>
@@ -6336,7 +6336,7 @@
       </p:sp>
       <p:sp>
         <p:nvSpPr>
-          <p:cNvPr id="21" name="Text 18"/>
+          <p:cNvPr id="22" name="Text 18"/>
           <p:cNvSpPr txBox="1"/>
           <p:nvPr/>
         </p:nvSpPr>
@@ -6378,7 +6378,7 @@
       </p:sp>
       <p:sp>
         <p:nvSpPr>
-          <p:cNvPr id="22" name="Text 19"/>
+          <p:cNvPr id="23" name="Text 19"/>
           <p:cNvSpPr txBox="1"/>
           <p:nvPr/>
         </p:nvSpPr>
@@ -6417,7 +6417,7 @@
       </p:sp>
       <p:sp>
         <p:nvSpPr>
-          <p:cNvPr id="23" name="Text 20"/>
+          <p:cNvPr id="24" name="Text 20"/>
           <p:cNvSpPr txBox="1"/>
           <p:nvPr/>
         </p:nvSpPr>
@@ -6488,7 +6488,7 @@
       </p:grpSpPr>
       <p:sp>
         <p:nvSpPr>
-          <p:cNvPr id="2" name="Text 0"/>
+          <p:cNvPr id="3" name="Text 0"/>
           <p:cNvSpPr txBox="1"/>
           <p:nvPr/>
         </p:nvSpPr>
@@ -6527,7 +6527,7 @@
       </p:sp>
       <p:sp>
         <p:nvSpPr>
-          <p:cNvPr id="3" name="Text 1"/>
+          <p:cNvPr id="4" name="Text 1"/>
           <p:cNvSpPr txBox="1"/>
           <p:nvPr/>
         </p:nvSpPr>
@@ -6569,7 +6569,7 @@
       </p:sp>
       <p:sp>
         <p:nvSpPr>
-          <p:cNvPr id="4" name="Shape 2"/>
+          <p:cNvPr id="5" name="Shape 2"/>
           <p:cNvSpPr/>
           <p:nvPr/>
         </p:nvSpPr>
@@ -6591,7 +6591,7 @@
       </p:sp>
       <p:sp>
         <p:nvSpPr>
-          <p:cNvPr id="5" name="Shape 3"/>
+          <p:cNvPr id="6" name="Shape 3"/>
           <p:cNvSpPr/>
           <p:nvPr/>
         </p:nvSpPr>
@@ -6611,7 +6611,7 @@
       </p:sp>
       <p:pic>
         <p:nvPicPr>
-          <p:cNvPr id="6" name="Image 0" descr="/tmp/claude-0/-home-user-riesgo/0ff9ff46-1396-5bd8-b3ac-2280dfbbbc55/scratchpad/work/gen/icons/check_circle_green.png">    </p:cNvPr>
+          <p:cNvPr id="7" name="Image 0" descr="/tmp/claude-0/-home-user-riesgo/0ff9ff46-1396-5bd8-b3ac-2280dfbbbc55/scratchpad/work/gen/icons/check_circle_green.png">    </p:cNvPr>
           <p:cNvPicPr>
             <a:picLocks noChangeAspect="1"/>
           </p:cNvPicPr>
@@ -6635,7 +6635,7 @@
       </p:pic>
       <p:sp>
         <p:nvSpPr>
-          <p:cNvPr id="7" name="Text 4"/>
+          <p:cNvPr id="8" name="Text 4"/>
           <p:cNvSpPr txBox="1"/>
           <p:nvPr/>
         </p:nvSpPr>
@@ -6674,7 +6674,7 @@
       </p:sp>
       <p:sp>
         <p:nvSpPr>
-          <p:cNvPr id="8" name="Text 5"/>
+          <p:cNvPr id="9" name="Text 5"/>
           <p:cNvSpPr txBox="1"/>
           <p:nvPr/>
         </p:nvSpPr>
@@ -6716,7 +6716,7 @@
       </p:sp>
       <p:sp>
         <p:nvSpPr>
-          <p:cNvPr id="9" name="Text 6"/>
+          <p:cNvPr id="10" name="Text 6"/>
           <p:cNvSpPr txBox="1"/>
           <p:nvPr/>
         </p:nvSpPr>
@@ -6755,7 +6755,7 @@
       </p:sp>
       <p:sp>
         <p:nvSpPr>
-          <p:cNvPr id="10" name="Shape 7"/>
+          <p:cNvPr id="11" name="Shape 7"/>
           <p:cNvSpPr/>
           <p:nvPr/>
         </p:nvSpPr>
@@ -6777,7 +6777,7 @@
       </p:sp>
       <p:sp>
         <p:nvSpPr>
-          <p:cNvPr id="11" name="Text 8"/>
+          <p:cNvPr id="12" name="Text 8"/>
           <p:cNvSpPr txBox="1"/>
           <p:nvPr/>
         </p:nvSpPr>
@@ -6819,7 +6819,7 @@
       </p:sp>
       <p:sp>
         <p:nvSpPr>
-          <p:cNvPr id="12" name="Shape 9"/>
+          <p:cNvPr id="13" name="Shape 9"/>
           <p:cNvSpPr/>
           <p:nvPr/>
         </p:nvSpPr>
@@ -6841,7 +6841,7 @@
       </p:sp>
       <p:sp>
         <p:nvSpPr>
-          <p:cNvPr id="13" name="Shape 10"/>
+          <p:cNvPr id="14" name="Shape 10"/>
           <p:cNvSpPr/>
           <p:nvPr/>
         </p:nvSpPr>
@@ -6861,7 +6861,7 @@
       </p:sp>
       <p:pic>
         <p:nvPicPr>
-          <p:cNvPr id="14" name="Image 1" descr="/tmp/claude-0/-home-user-riesgo/0ff9ff46-1396-5bd8-b3ac-2280dfbbbc55/scratchpad/work/gen/icons/mail_navy.png">    </p:cNvPr>
+          <p:cNvPr id="15" name="Image 1" descr="/tmp/claude-0/-home-user-riesgo/0ff9ff46-1396-5bd8-b3ac-2280dfbbbc55/scratchpad/work/gen/icons/mail_navy.png">    </p:cNvPr>
           <p:cNvPicPr>
             <a:picLocks noChangeAspect="1"/>
           </p:cNvPicPr>
@@ -6885,7 +6885,7 @@
       </p:pic>
       <p:sp>
         <p:nvSpPr>
-          <p:cNvPr id="15" name="Text 11"/>
+          <p:cNvPr id="16" name="Text 11"/>
           <p:cNvSpPr txBox="1"/>
           <p:nvPr/>
         </p:nvSpPr>
@@ -6927,7 +6927,7 @@
       </p:sp>
       <p:sp>
         <p:nvSpPr>
-          <p:cNvPr id="16" name="Text 12"/>
+          <p:cNvPr id="17" name="Text 12"/>
           <p:cNvSpPr txBox="1"/>
           <p:nvPr/>
         </p:nvSpPr>
@@ -6966,7 +6966,7 @@
       </p:sp>
       <p:sp>
         <p:nvSpPr>
-          <p:cNvPr id="17" name="Text 13"/>
+          <p:cNvPr id="18" name="Text 13"/>
           <p:cNvSpPr txBox="1"/>
           <p:nvPr/>
         </p:nvSpPr>
@@ -7037,7 +7037,7 @@
       </p:grpSpPr>
       <p:sp>
         <p:nvSpPr>
-          <p:cNvPr id="2" name="Shape 0"/>
+          <p:cNvPr id="3" name="Shape 0"/>
           <p:cNvSpPr/>
           <p:nvPr/>
         </p:nvSpPr>
@@ -7057,7 +7057,7 @@
       </p:sp>
       <p:sp>
         <p:nvSpPr>
-          <p:cNvPr id="3" name="Text 1"/>
+          <p:cNvPr id="4" name="Text 1"/>
           <p:cNvSpPr txBox="1"/>
           <p:nvPr/>
         </p:nvSpPr>
@@ -7096,7 +7096,7 @@
       </p:sp>
       <p:sp>
         <p:nvSpPr>
-          <p:cNvPr id="4" name="Shape 2"/>
+          <p:cNvPr id="5" name="Shape 2"/>
           <p:cNvSpPr/>
           <p:nvPr/>
         </p:nvSpPr>
@@ -7116,7 +7116,7 @@
       </p:sp>
       <p:pic>
         <p:nvPicPr>
-          <p:cNvPr id="5" name="Image 0" descr="/tmp/claude-0/-home-user-riesgo/0ff9ff46-1396-5bd8-b3ac-2280dfbbbc55/scratchpad/work/gen/icons/gears_navy.png">    </p:cNvPr>
+          <p:cNvPr id="6" name="Image 0" descr="/tmp/claude-0/-home-user-riesgo/0ff9ff46-1396-5bd8-b3ac-2280dfbbbc55/scratchpad/work/gen/icons/gears_navy.png">    </p:cNvPr>
           <p:cNvPicPr>
             <a:picLocks noChangeAspect="1"/>
           </p:cNvPicPr>
@@ -7140,7 +7140,7 @@
       </p:pic>
       <p:sp>
         <p:nvSpPr>
-          <p:cNvPr id="6" name="Text 3"/>
+          <p:cNvPr id="7" name="Text 3"/>
           <p:cNvSpPr txBox="1"/>
           <p:nvPr/>
         </p:nvSpPr>
@@ -7179,7 +7179,7 @@
       </p:sp>
       <p:sp>
         <p:nvSpPr>
-          <p:cNvPr id="7" name="Text 4"/>
+          <p:cNvPr id="8" name="Text 4"/>
           <p:cNvSpPr txBox="1"/>
           <p:nvPr/>
         </p:nvSpPr>
@@ -7241,7 +7241,7 @@
       </p:sp>
       <p:sp>
         <p:nvSpPr>
-          <p:cNvPr id="8" name="Text 5"/>
+          <p:cNvPr id="9" name="Text 5"/>
           <p:cNvSpPr txBox="1"/>
           <p:nvPr/>
         </p:nvSpPr>
@@ -7283,7 +7283,7 @@
       </p:sp>
       <p:pic>
         <p:nvPicPr>
-          <p:cNvPr id="9" name="Image 1" descr="/tmp/claude-0/-home-user-riesgo/0ff9ff46-1396-5bd8-b3ac-2280dfbbbc55/scratchpad/work/gen/logo_white.png">    </p:cNvPr>
+          <p:cNvPr id="10" name="Image 1" descr="/tmp/claude-0/-home-user-riesgo/0ff9ff46-1396-5bd8-b3ac-2280dfbbbc55/scratchpad/work/gen/logo_white.png">    </p:cNvPr>
           <p:cNvPicPr>
             <a:picLocks noChangeAspect="1"/>
           </p:cNvPicPr>
@@ -7307,7 +7307,7 @@
       </p:pic>
       <p:sp>
         <p:nvSpPr>
-          <p:cNvPr id="10" name="Text 6"/>
+          <p:cNvPr id="11" name="Text 6"/>
           <p:cNvSpPr txBox="1"/>
           <p:nvPr/>
         </p:nvSpPr>
@@ -7346,7 +7346,7 @@
       </p:sp>
       <p:sp>
         <p:nvSpPr>
-          <p:cNvPr id="11" name="Text 7"/>
+          <p:cNvPr id="12" name="Text 7"/>
           <p:cNvSpPr txBox="1"/>
           <p:nvPr/>
         </p:nvSpPr>
@@ -7417,7 +7417,7 @@
       </p:grpSpPr>
       <p:sp>
         <p:nvSpPr>
-          <p:cNvPr id="2" name="Text 0"/>
+          <p:cNvPr id="3" name="Text 0"/>
           <p:cNvSpPr txBox="1"/>
           <p:nvPr/>
         </p:nvSpPr>
@@ -7456,7 +7456,7 @@
       </p:sp>
       <p:sp>
         <p:nvSpPr>
-          <p:cNvPr id="3" name="Text 1"/>
+          <p:cNvPr id="4" name="Text 1"/>
           <p:cNvSpPr txBox="1"/>
           <p:nvPr/>
         </p:nvSpPr>
@@ -7498,7 +7498,7 @@
       </p:sp>
       <p:sp>
         <p:nvSpPr>
-          <p:cNvPr id="4" name="Text 2"/>
+          <p:cNvPr id="5" name="Text 2"/>
           <p:cNvSpPr txBox="1"/>
           <p:nvPr/>
         </p:nvSpPr>
@@ -7537,7 +7537,7 @@
       </p:sp>
       <p:sp>
         <p:nvSpPr>
-          <p:cNvPr id="5" name="Shape 3"/>
+          <p:cNvPr id="6" name="Shape 3"/>
           <p:cNvSpPr/>
           <p:nvPr/>
         </p:nvSpPr>
@@ -7559,7 +7559,7 @@
       </p:sp>
       <p:sp>
         <p:nvSpPr>
-          <p:cNvPr id="6" name="Shape 4"/>
+          <p:cNvPr id="7" name="Shape 4"/>
           <p:cNvSpPr/>
           <p:nvPr/>
         </p:nvSpPr>
@@ -7579,7 +7579,7 @@
       </p:sp>
       <p:pic>
         <p:nvPicPr>
-          <p:cNvPr id="7" name="Image 0" descr="/tmp/claude-0/-home-user-riesgo/0ff9ff46-1396-5bd8-b3ac-2280dfbbbc55/scratchpad/work/gen/icons/person_white.png">    </p:cNvPr>
+          <p:cNvPr id="8" name="Image 0" descr="/tmp/claude-0/-home-user-riesgo/0ff9ff46-1396-5bd8-b3ac-2280dfbbbc55/scratchpad/work/gen/icons/person_white.png">    </p:cNvPr>
           <p:cNvPicPr>
             <a:picLocks noChangeAspect="1"/>
           </p:cNvPicPr>
@@ -7603,7 +7603,7 @@
       </p:pic>
       <p:sp>
         <p:nvSpPr>
-          <p:cNvPr id="8" name="Text 5"/>
+          <p:cNvPr id="9" name="Text 5"/>
           <p:cNvSpPr txBox="1"/>
           <p:nvPr/>
         </p:nvSpPr>
@@ -7645,7 +7645,7 @@
       </p:sp>
       <p:sp>
         <p:nvSpPr>
-          <p:cNvPr id="9" name="Text 6"/>
+          <p:cNvPr id="10" name="Text 6"/>
           <p:cNvSpPr txBox="1"/>
           <p:nvPr/>
         </p:nvSpPr>
@@ -7687,7 +7687,7 @@
       </p:sp>
       <p:sp>
         <p:nvSpPr>
-          <p:cNvPr id="10" name="Shape 7"/>
+          <p:cNvPr id="11" name="Shape 7"/>
           <p:cNvSpPr/>
           <p:nvPr/>
         </p:nvSpPr>
@@ -7709,7 +7709,7 @@
       </p:sp>
       <p:sp>
         <p:nvSpPr>
-          <p:cNvPr id="11" name="Shape 8"/>
+          <p:cNvPr id="12" name="Shape 8"/>
           <p:cNvSpPr/>
           <p:nvPr/>
         </p:nvSpPr>
@@ -7729,7 +7729,7 @@
       </p:sp>
       <p:pic>
         <p:nvPicPr>
-          <p:cNvPr id="12" name="Image 1" descr="/tmp/claude-0/-home-user-riesgo/0ff9ff46-1396-5bd8-b3ac-2280dfbbbc55/scratchpad/work/gen/icons/gear_white.png">    </p:cNvPr>
+          <p:cNvPr id="13" name="Image 1" descr="/tmp/claude-0/-home-user-riesgo/0ff9ff46-1396-5bd8-b3ac-2280dfbbbc55/scratchpad/work/gen/icons/gear_white.png">    </p:cNvPr>
           <p:cNvPicPr>
             <a:picLocks noChangeAspect="1"/>
           </p:cNvPicPr>
@@ -7753,7 +7753,7 @@
       </p:pic>
       <p:sp>
         <p:nvSpPr>
-          <p:cNvPr id="13" name="Text 9"/>
+          <p:cNvPr id="14" name="Text 9"/>
           <p:cNvSpPr txBox="1"/>
           <p:nvPr/>
         </p:nvSpPr>
@@ -7795,7 +7795,7 @@
       </p:sp>
       <p:sp>
         <p:nvSpPr>
-          <p:cNvPr id="14" name="Text 10"/>
+          <p:cNvPr id="15" name="Text 10"/>
           <p:cNvSpPr txBox="1"/>
           <p:nvPr/>
         </p:nvSpPr>
@@ -7837,7 +7837,7 @@
       </p:sp>
       <p:sp>
         <p:nvSpPr>
-          <p:cNvPr id="15" name="Shape 11"/>
+          <p:cNvPr id="16" name="Shape 11"/>
           <p:cNvSpPr/>
           <p:nvPr/>
         </p:nvSpPr>
@@ -7859,7 +7859,7 @@
       </p:sp>
       <p:sp>
         <p:nvSpPr>
-          <p:cNvPr id="16" name="Shape 12"/>
+          <p:cNvPr id="17" name="Shape 12"/>
           <p:cNvSpPr/>
           <p:nvPr/>
         </p:nvSpPr>
@@ -7879,7 +7879,7 @@
       </p:sp>
       <p:pic>
         <p:nvPicPr>
-          <p:cNvPr id="17" name="Image 2" descr="/tmp/claude-0/-home-user-riesgo/0ff9ff46-1396-5bd8-b3ac-2280dfbbbc55/scratchpad/work/gen/icons/server_white.png">    </p:cNvPr>
+          <p:cNvPr id="18" name="Image 2" descr="/tmp/claude-0/-home-user-riesgo/0ff9ff46-1396-5bd8-b3ac-2280dfbbbc55/scratchpad/work/gen/icons/server_white.png">    </p:cNvPr>
           <p:cNvPicPr>
             <a:picLocks noChangeAspect="1"/>
           </p:cNvPicPr>
@@ -7903,7 +7903,7 @@
       </p:pic>
       <p:sp>
         <p:nvSpPr>
-          <p:cNvPr id="18" name="Text 13"/>
+          <p:cNvPr id="19" name="Text 13"/>
           <p:cNvSpPr txBox="1"/>
           <p:nvPr/>
         </p:nvSpPr>
@@ -7945,7 +7945,7 @@
       </p:sp>
       <p:sp>
         <p:nvSpPr>
-          <p:cNvPr id="19" name="Text 14"/>
+          <p:cNvPr id="20" name="Text 14"/>
           <p:cNvSpPr txBox="1"/>
           <p:nvPr/>
         </p:nvSpPr>
@@ -7987,7 +7987,7 @@
       </p:sp>
       <p:sp>
         <p:nvSpPr>
-          <p:cNvPr id="20" name="Shape 15"/>
+          <p:cNvPr id="21" name="Shape 15"/>
           <p:cNvSpPr/>
           <p:nvPr/>
         </p:nvSpPr>
@@ -8009,7 +8009,7 @@
       </p:sp>
       <p:sp>
         <p:nvSpPr>
-          <p:cNvPr id="21" name="Shape 16"/>
+          <p:cNvPr id="22" name="Shape 16"/>
           <p:cNvSpPr/>
           <p:nvPr/>
         </p:nvSpPr>
@@ -8029,7 +8029,7 @@
       </p:sp>
       <p:pic>
         <p:nvPicPr>
-          <p:cNvPr id="22" name="Image 3" descr="/tmp/claude-0/-home-user-riesgo/0ff9ff46-1396-5bd8-b3ac-2280dfbbbc55/scratchpad/work/gen/icons/globe_white.png">    </p:cNvPr>
+          <p:cNvPr id="23" name="Image 3" descr="/tmp/claude-0/-home-user-riesgo/0ff9ff46-1396-5bd8-b3ac-2280dfbbbc55/scratchpad/work/gen/icons/globe_white.png">    </p:cNvPr>
           <p:cNvPicPr>
             <a:picLocks noChangeAspect="1"/>
           </p:cNvPicPr>
@@ -8053,7 +8053,7 @@
       </p:pic>
       <p:sp>
         <p:nvSpPr>
-          <p:cNvPr id="23" name="Text 17"/>
+          <p:cNvPr id="24" name="Text 17"/>
           <p:cNvSpPr txBox="1"/>
           <p:nvPr/>
         </p:nvSpPr>
@@ -8095,7 +8095,7 @@
       </p:sp>
       <p:sp>
         <p:nvSpPr>
-          <p:cNvPr id="24" name="Text 18"/>
+          <p:cNvPr id="25" name="Text 18"/>
           <p:cNvSpPr txBox="1"/>
           <p:nvPr/>
         </p:nvSpPr>
@@ -8137,7 +8137,7 @@
       </p:sp>
       <p:sp>
         <p:nvSpPr>
-          <p:cNvPr id="25" name="Text 19"/>
+          <p:cNvPr id="26" name="Text 19"/>
           <p:cNvSpPr txBox="1"/>
           <p:nvPr/>
         </p:nvSpPr>
@@ -8176,7 +8176,7 @@
       </p:sp>
       <p:sp>
         <p:nvSpPr>
-          <p:cNvPr id="26" name="Text 20"/>
+          <p:cNvPr id="27" name="Text 20"/>
           <p:cNvSpPr txBox="1"/>
           <p:nvPr/>
         </p:nvSpPr>
@@ -8247,7 +8247,7 @@
       </p:grpSpPr>
       <p:sp>
         <p:nvSpPr>
-          <p:cNvPr id="2" name="Shape 0"/>
+          <p:cNvPr id="3" name="Shape 0"/>
           <p:cNvSpPr/>
           <p:nvPr/>
         </p:nvSpPr>
@@ -8267,7 +8267,7 @@
       </p:sp>
       <p:sp>
         <p:nvSpPr>
-          <p:cNvPr id="3" name="Text 1"/>
+          <p:cNvPr id="4" name="Text 1"/>
           <p:cNvSpPr txBox="1"/>
           <p:nvPr/>
         </p:nvSpPr>
@@ -8369,7 +8369,7 @@
       </p:sp>
       <p:sp>
         <p:nvSpPr>
-          <p:cNvPr id="4" name="Text 2"/>
+          <p:cNvPr id="5" name="Text 2"/>
           <p:cNvSpPr txBox="1"/>
           <p:nvPr/>
         </p:nvSpPr>
@@ -8408,7 +8408,7 @@
       </p:sp>
       <p:sp>
         <p:nvSpPr>
-          <p:cNvPr id="5" name="Text 3"/>
+          <p:cNvPr id="6" name="Text 3"/>
           <p:cNvSpPr txBox="1"/>
           <p:nvPr/>
         </p:nvSpPr>
@@ -8479,7 +8479,7 @@
       </p:grpSpPr>
       <p:sp>
         <p:nvSpPr>
-          <p:cNvPr id="2" name="Shape 0"/>
+          <p:cNvPr id="3" name="Shape 0"/>
           <p:cNvSpPr/>
           <p:nvPr/>
         </p:nvSpPr>
@@ -8499,7 +8499,7 @@
       </p:sp>
       <p:sp>
         <p:nvSpPr>
-          <p:cNvPr id="3" name="Text 1"/>
+          <p:cNvPr id="4" name="Text 1"/>
           <p:cNvSpPr txBox="1"/>
           <p:nvPr/>
         </p:nvSpPr>
@@ -8538,7 +8538,7 @@
       </p:sp>
       <p:sp>
         <p:nvSpPr>
-          <p:cNvPr id="4" name="Shape 2"/>
+          <p:cNvPr id="5" name="Shape 2"/>
           <p:cNvSpPr/>
           <p:nvPr/>
         </p:nvSpPr>
@@ -8558,7 +8558,7 @@
       </p:sp>
       <p:pic>
         <p:nvPicPr>
-          <p:cNvPr id="5" name="Image 0" descr="/tmp/claude-0/-home-user-riesgo/0ff9ff46-1396-5bd8-b3ac-2280dfbbbc55/scratchpad/work/gen/icons/star_navy.png">    </p:cNvPr>
+          <p:cNvPr id="6" name="Image 0" descr="/tmp/claude-0/-home-user-riesgo/0ff9ff46-1396-5bd8-b3ac-2280dfbbbc55/scratchpad/work/gen/icons/star_navy.png">    </p:cNvPr>
           <p:cNvPicPr>
             <a:picLocks noChangeAspect="1"/>
           </p:cNvPicPr>
@@ -8582,7 +8582,7 @@
       </p:pic>
       <p:sp>
         <p:nvSpPr>
-          <p:cNvPr id="6" name="Text 3"/>
+          <p:cNvPr id="7" name="Text 3"/>
           <p:cNvSpPr txBox="1"/>
           <p:nvPr/>
         </p:nvSpPr>
@@ -8621,7 +8621,7 @@
       </p:sp>
       <p:sp>
         <p:nvSpPr>
-          <p:cNvPr id="7" name="Text 4"/>
+          <p:cNvPr id="8" name="Text 4"/>
           <p:cNvSpPr txBox="1"/>
           <p:nvPr/>
         </p:nvSpPr>
@@ -8683,7 +8683,7 @@
       </p:sp>
       <p:sp>
         <p:nvSpPr>
-          <p:cNvPr id="8" name="Text 5"/>
+          <p:cNvPr id="9" name="Text 5"/>
           <p:cNvSpPr txBox="1"/>
           <p:nvPr/>
         </p:nvSpPr>
@@ -8725,7 +8725,7 @@
       </p:sp>
       <p:pic>
         <p:nvPicPr>
-          <p:cNvPr id="9" name="Image 1" descr="/tmp/claude-0/-home-user-riesgo/0ff9ff46-1396-5bd8-b3ac-2280dfbbbc55/scratchpad/work/gen/logo_white.png">    </p:cNvPr>
+          <p:cNvPr id="10" name="Image 1" descr="/tmp/claude-0/-home-user-riesgo/0ff9ff46-1396-5bd8-b3ac-2280dfbbbc55/scratchpad/work/gen/logo_white.png">    </p:cNvPr>
           <p:cNvPicPr>
             <a:picLocks noChangeAspect="1"/>
           </p:cNvPicPr>
@@ -8749,7 +8749,7 @@
       </p:pic>
       <p:sp>
         <p:nvSpPr>
-          <p:cNvPr id="10" name="Text 6"/>
+          <p:cNvPr id="11" name="Text 6"/>
           <p:cNvSpPr txBox="1"/>
           <p:nvPr/>
         </p:nvSpPr>
@@ -8788,7 +8788,7 @@
       </p:sp>
       <p:sp>
         <p:nvSpPr>
-          <p:cNvPr id="11" name="Text 7"/>
+          <p:cNvPr id="12" name="Text 7"/>
           <p:cNvSpPr txBox="1"/>
           <p:nvPr/>
         </p:nvSpPr>
@@ -8859,7 +8859,7 @@
       </p:grpSpPr>
       <p:sp>
         <p:nvSpPr>
-          <p:cNvPr id="2" name="Text 0"/>
+          <p:cNvPr id="3" name="Text 0"/>
           <p:cNvSpPr txBox="1"/>
           <p:nvPr/>
         </p:nvSpPr>
@@ -8898,7 +8898,7 @@
       </p:sp>
       <p:sp>
         <p:nvSpPr>
-          <p:cNvPr id="3" name="Text 1"/>
+          <p:cNvPr id="4" name="Text 1"/>
           <p:cNvSpPr txBox="1"/>
           <p:nvPr/>
         </p:nvSpPr>
@@ -8940,7 +8940,7 @@
       </p:sp>
       <p:sp>
         <p:nvSpPr>
-          <p:cNvPr id="4" name="Text 2"/>
+          <p:cNvPr id="5" name="Text 2"/>
           <p:cNvSpPr txBox="1"/>
           <p:nvPr/>
         </p:nvSpPr>
@@ -8979,7 +8979,7 @@
       </p:sp>
       <p:sp>
         <p:nvSpPr>
-          <p:cNvPr id="5" name="Shape 3"/>
+          <p:cNvPr id="6" name="Shape 3"/>
           <p:cNvSpPr/>
           <p:nvPr/>
         </p:nvSpPr>
@@ -9001,7 +9001,7 @@
       </p:sp>
       <p:sp>
         <p:nvSpPr>
-          <p:cNvPr id="6" name="Shape 4"/>
+          <p:cNvPr id="7" name="Shape 4"/>
           <p:cNvSpPr/>
           <p:nvPr/>
         </p:nvSpPr>
@@ -9021,7 +9021,7 @@
       </p:sp>
       <p:pic>
         <p:nvPicPr>
-          <p:cNvPr id="7" name="Image 0" descr="/tmp/claude-0/-home-user-riesgo/0ff9ff46-1396-5bd8-b3ac-2280dfbbbc55/scratchpad/work/gen/icons/handshake_white.png">    </p:cNvPr>
+          <p:cNvPr id="8" name="Image 0" descr="/tmp/claude-0/-home-user-riesgo/0ff9ff46-1396-5bd8-b3ac-2280dfbbbc55/scratchpad/work/gen/icons/handshake_white.png">    </p:cNvPr>
           <p:cNvPicPr>
             <a:picLocks noChangeAspect="1"/>
           </p:cNvPicPr>
@@ -9045,7 +9045,7 @@
       </p:pic>
       <p:sp>
         <p:nvSpPr>
-          <p:cNvPr id="8" name="Text 5"/>
+          <p:cNvPr id="9" name="Text 5"/>
           <p:cNvSpPr txBox="1"/>
           <p:nvPr/>
         </p:nvSpPr>
@@ -9087,7 +9087,7 @@
       </p:sp>
       <p:sp>
         <p:nvSpPr>
-          <p:cNvPr id="9" name="Shape 6"/>
+          <p:cNvPr id="10" name="Shape 6"/>
           <p:cNvSpPr/>
           <p:nvPr/>
         </p:nvSpPr>
@@ -9109,7 +9109,7 @@
       </p:sp>
       <p:sp>
         <p:nvSpPr>
-          <p:cNvPr id="10" name="Shape 7"/>
+          <p:cNvPr id="11" name="Shape 7"/>
           <p:cNvSpPr/>
           <p:nvPr/>
         </p:nvSpPr>
@@ -9129,7 +9129,7 @@
       </p:sp>
       <p:pic>
         <p:nvPicPr>
-          <p:cNvPr id="11" name="Image 1" descr="/tmp/claude-0/-home-user-riesgo/0ff9ff46-1396-5bd8-b3ac-2280dfbbbc55/scratchpad/work/gen/icons/scale_white.png">    </p:cNvPr>
+          <p:cNvPr id="12" name="Image 1" descr="/tmp/claude-0/-home-user-riesgo/0ff9ff46-1396-5bd8-b3ac-2280dfbbbc55/scratchpad/work/gen/icons/scale_white.png">    </p:cNvPr>
           <p:cNvPicPr>
             <a:picLocks noChangeAspect="1"/>
           </p:cNvPicPr>
@@ -9153,7 +9153,7 @@
       </p:pic>
       <p:sp>
         <p:nvSpPr>
-          <p:cNvPr id="12" name="Text 8"/>
+          <p:cNvPr id="13" name="Text 8"/>
           <p:cNvSpPr txBox="1"/>
           <p:nvPr/>
         </p:nvSpPr>
@@ -9195,7 +9195,7 @@
       </p:sp>
       <p:sp>
         <p:nvSpPr>
-          <p:cNvPr id="13" name="Shape 9"/>
+          <p:cNvPr id="14" name="Shape 9"/>
           <p:cNvSpPr/>
           <p:nvPr/>
         </p:nvSpPr>
@@ -9217,7 +9217,7 @@
       </p:sp>
       <p:sp>
         <p:nvSpPr>
-          <p:cNvPr id="14" name="Shape 10"/>
+          <p:cNvPr id="15" name="Shape 10"/>
           <p:cNvSpPr/>
           <p:nvPr/>
         </p:nvSpPr>
@@ -9237,7 +9237,7 @@
       </p:sp>
       <p:pic>
         <p:nvPicPr>
-          <p:cNvPr id="15" name="Image 2" descr="/tmp/claude-0/-home-user-riesgo/0ff9ff46-1396-5bd8-b3ac-2280dfbbbc55/scratchpad/work/gen/icons/lock_white.png">    </p:cNvPr>
+          <p:cNvPr id="16" name="Image 2" descr="/tmp/claude-0/-home-user-riesgo/0ff9ff46-1396-5bd8-b3ac-2280dfbbbc55/scratchpad/work/gen/icons/lock_white.png">    </p:cNvPr>
           <p:cNvPicPr>
             <a:picLocks noChangeAspect="1"/>
           </p:cNvPicPr>
@@ -9261,7 +9261,7 @@
       </p:pic>
       <p:sp>
         <p:nvSpPr>
-          <p:cNvPr id="16" name="Text 11"/>
+          <p:cNvPr id="17" name="Text 11"/>
           <p:cNvSpPr txBox="1"/>
           <p:nvPr/>
         </p:nvSpPr>
@@ -9303,7 +9303,7 @@
       </p:sp>
       <p:sp>
         <p:nvSpPr>
-          <p:cNvPr id="17" name="Shape 12"/>
+          <p:cNvPr id="18" name="Shape 12"/>
           <p:cNvSpPr/>
           <p:nvPr/>
         </p:nvSpPr>
@@ -9325,7 +9325,7 @@
       </p:sp>
       <p:sp>
         <p:nvSpPr>
-          <p:cNvPr id="18" name="Shape 13"/>
+          <p:cNvPr id="19" name="Shape 13"/>
           <p:cNvSpPr/>
           <p:nvPr/>
         </p:nvSpPr>
@@ -9345,7 +9345,7 @@
       </p:sp>
       <p:pic>
         <p:nvPicPr>
-          <p:cNvPr id="19" name="Image 3" descr="/tmp/claude-0/-home-user-riesgo/0ff9ff46-1396-5bd8-b3ac-2280dfbbbc55/scratchpad/work/gen/icons/person_white.png">    </p:cNvPr>
+          <p:cNvPr id="20" name="Image 3" descr="/tmp/claude-0/-home-user-riesgo/0ff9ff46-1396-5bd8-b3ac-2280dfbbbc55/scratchpad/work/gen/icons/person_white.png">    </p:cNvPr>
           <p:cNvPicPr>
             <a:picLocks noChangeAspect="1"/>
           </p:cNvPicPr>
@@ -9369,7 +9369,7 @@
       </p:pic>
       <p:sp>
         <p:nvSpPr>
-          <p:cNvPr id="20" name="Text 14"/>
+          <p:cNvPr id="21" name="Text 14"/>
           <p:cNvSpPr txBox="1"/>
           <p:nvPr/>
         </p:nvSpPr>
@@ -9411,7 +9411,7 @@
       </p:sp>
       <p:sp>
         <p:nvSpPr>
-          <p:cNvPr id="21" name="Shape 15"/>
+          <p:cNvPr id="22" name="Shape 15"/>
           <p:cNvSpPr/>
           <p:nvPr/>
         </p:nvSpPr>
@@ -9433,7 +9433,7 @@
       </p:sp>
       <p:sp>
         <p:nvSpPr>
-          <p:cNvPr id="22" name="Shape 16"/>
+          <p:cNvPr id="23" name="Shape 16"/>
           <p:cNvSpPr/>
           <p:nvPr/>
         </p:nvSpPr>
@@ -9453,7 +9453,7 @@
       </p:sp>
       <p:pic>
         <p:nvPicPr>
-          <p:cNvPr id="23" name="Image 4" descr="/tmp/claude-0/-home-user-riesgo/0ff9ff46-1396-5bd8-b3ac-2280dfbbbc55/scratchpad/work/gen/icons/social_white.png">    </p:cNvPr>
+          <p:cNvPr id="24" name="Image 4" descr="/tmp/claude-0/-home-user-riesgo/0ff9ff46-1396-5bd8-b3ac-2280dfbbbc55/scratchpad/work/gen/icons/social_white.png">    </p:cNvPr>
           <p:cNvPicPr>
             <a:picLocks noChangeAspect="1"/>
           </p:cNvPicPr>
@@ -9477,7 +9477,7 @@
       </p:pic>
       <p:sp>
         <p:nvSpPr>
-          <p:cNvPr id="24" name="Text 17"/>
+          <p:cNvPr id="25" name="Text 17"/>
           <p:cNvSpPr txBox="1"/>
           <p:nvPr/>
         </p:nvSpPr>
@@ -9519,7 +9519,7 @@
       </p:sp>
       <p:sp>
         <p:nvSpPr>
-          <p:cNvPr id="25" name="Shape 18"/>
+          <p:cNvPr id="26" name="Shape 18"/>
           <p:cNvSpPr/>
           <p:nvPr/>
         </p:nvSpPr>
@@ -9541,7 +9541,7 @@
       </p:sp>
       <p:sp>
         <p:nvSpPr>
-          <p:cNvPr id="26" name="Shape 19"/>
+          <p:cNvPr id="27" name="Shape 19"/>
           <p:cNvSpPr/>
           <p:nvPr/>
         </p:nvSpPr>
@@ -9561,7 +9561,7 @@
       </p:sp>
       <p:pic>
         <p:nvPicPr>
-          <p:cNvPr id="27" name="Image 5" descr="/tmp/claude-0/-home-user-riesgo/0ff9ff46-1396-5bd8-b3ac-2280dfbbbc55/scratchpad/work/gen/icons/people_group_white.png">    </p:cNvPr>
+          <p:cNvPr id="28" name="Image 5" descr="/tmp/claude-0/-home-user-riesgo/0ff9ff46-1396-5bd8-b3ac-2280dfbbbc55/scratchpad/work/gen/icons/people_group_white.png">    </p:cNvPr>
           <p:cNvPicPr>
             <a:picLocks noChangeAspect="1"/>
           </p:cNvPicPr>
@@ -9585,7 +9585,7 @@
       </p:pic>
       <p:sp>
         <p:nvSpPr>
-          <p:cNvPr id="28" name="Text 20"/>
+          <p:cNvPr id="29" name="Text 20"/>
           <p:cNvSpPr txBox="1"/>
           <p:nvPr/>
         </p:nvSpPr>
@@ -9627,7 +9627,7 @@
       </p:sp>
       <p:sp>
         <p:nvSpPr>
-          <p:cNvPr id="29" name="Shape 21"/>
+          <p:cNvPr id="30" name="Shape 21"/>
           <p:cNvSpPr/>
           <p:nvPr/>
         </p:nvSpPr>
@@ -9649,7 +9649,7 @@
       </p:sp>
       <p:sp>
         <p:nvSpPr>
-          <p:cNvPr id="30" name="Shape 22"/>
+          <p:cNvPr id="31" name="Shape 22"/>
           <p:cNvSpPr/>
           <p:nvPr/>
         </p:nvSpPr>
@@ -9669,7 +9669,7 @@
       </p:sp>
       <p:pic>
         <p:nvPicPr>
-          <p:cNvPr id="31" name="Image 6" descr="/tmp/claude-0/-home-user-riesgo/0ff9ff46-1396-5bd8-b3ac-2280dfbbbc55/scratchpad/work/gen/icons/target_white.png">    </p:cNvPr>
+          <p:cNvPr id="32" name="Image 6" descr="/tmp/claude-0/-home-user-riesgo/0ff9ff46-1396-5bd8-b3ac-2280dfbbbc55/scratchpad/work/gen/icons/target_white.png">    </p:cNvPr>
           <p:cNvPicPr>
             <a:picLocks noChangeAspect="1"/>
           </p:cNvPicPr>
@@ -9693,7 +9693,7 @@
       </p:pic>
       <p:sp>
         <p:nvSpPr>
-          <p:cNvPr id="32" name="Text 23"/>
+          <p:cNvPr id="33" name="Text 23"/>
           <p:cNvSpPr txBox="1"/>
           <p:nvPr/>
         </p:nvSpPr>
@@ -9735,7 +9735,7 @@
       </p:sp>
       <p:sp>
         <p:nvSpPr>
-          <p:cNvPr id="33" name="Shape 24"/>
+          <p:cNvPr id="34" name="Shape 24"/>
           <p:cNvSpPr/>
           <p:nvPr/>
         </p:nvSpPr>
@@ -9757,7 +9757,7 @@
       </p:sp>
       <p:sp>
         <p:nvSpPr>
-          <p:cNvPr id="34" name="Shape 25"/>
+          <p:cNvPr id="35" name="Shape 25"/>
           <p:cNvSpPr/>
           <p:nvPr/>
         </p:nvSpPr>
@@ -9777,7 +9777,7 @@
       </p:sp>
       <p:pic>
         <p:nvPicPr>
-          <p:cNvPr id="35" name="Image 7" descr="/tmp/claude-0/-home-user-riesgo/0ff9ff46-1396-5bd8-b3ac-2280dfbbbc55/scratchpad/work/gen/icons/globe_white.png">    </p:cNvPr>
+          <p:cNvPr id="36" name="Image 7" descr="/tmp/claude-0/-home-user-riesgo/0ff9ff46-1396-5bd8-b3ac-2280dfbbbc55/scratchpad/work/gen/icons/globe_white.png">    </p:cNvPr>
           <p:cNvPicPr>
             <a:picLocks noChangeAspect="1"/>
           </p:cNvPicPr>
@@ -9801,7 +9801,7 @@
       </p:pic>
       <p:sp>
         <p:nvSpPr>
-          <p:cNvPr id="36" name="Text 26"/>
+          <p:cNvPr id="37" name="Text 26"/>
           <p:cNvSpPr txBox="1"/>
           <p:nvPr/>
         </p:nvSpPr>
@@ -9843,7 +9843,7 @@
       </p:sp>
       <p:sp>
         <p:nvSpPr>
-          <p:cNvPr id="37" name="Text 27"/>
+          <p:cNvPr id="38" name="Text 27"/>
           <p:cNvSpPr txBox="1"/>
           <p:nvPr/>
         </p:nvSpPr>
@@ -9882,7 +9882,7 @@
       </p:sp>
       <p:sp>
         <p:nvSpPr>
-          <p:cNvPr id="38" name="Text 28"/>
+          <p:cNvPr id="39" name="Text 28"/>
           <p:cNvSpPr txBox="1"/>
           <p:nvPr/>
         </p:nvSpPr>
@@ -9953,7 +9953,7 @@
       </p:grpSpPr>
       <p:sp>
         <p:nvSpPr>
-          <p:cNvPr id="2" name="Shape 0"/>
+          <p:cNvPr id="3" name="Shape 0"/>
           <p:cNvSpPr/>
           <p:nvPr/>
         </p:nvSpPr>
@@ -9973,7 +9973,7 @@
       </p:sp>
       <p:sp>
         <p:nvSpPr>
-          <p:cNvPr id="3" name="Text 1"/>
+          <p:cNvPr id="4" name="Text 1"/>
           <p:cNvSpPr txBox="1"/>
           <p:nvPr/>
         </p:nvSpPr>
@@ -10055,7 +10055,7 @@
       </p:sp>
       <p:sp>
         <p:nvSpPr>
-          <p:cNvPr id="4" name="Text 2"/>
+          <p:cNvPr id="5" name="Text 2"/>
           <p:cNvSpPr txBox="1"/>
           <p:nvPr/>
         </p:nvSpPr>
@@ -10094,7 +10094,7 @@
       </p:sp>
       <p:sp>
         <p:nvSpPr>
-          <p:cNvPr id="5" name="Text 3"/>
+          <p:cNvPr id="6" name="Text 3"/>
           <p:cNvSpPr txBox="1"/>
           <p:nvPr/>
         </p:nvSpPr>
@@ -10165,7 +10165,7 @@
       </p:grpSpPr>
       <p:sp>
         <p:nvSpPr>
-          <p:cNvPr id="2" name="Text 0"/>
+          <p:cNvPr id="3" name="Text 0"/>
           <p:cNvSpPr txBox="1"/>
           <p:nvPr/>
         </p:nvSpPr>
@@ -10204,7 +10204,7 @@
       </p:sp>
       <p:sp>
         <p:nvSpPr>
-          <p:cNvPr id="3" name="Text 1"/>
+          <p:cNvPr id="4" name="Text 1"/>
           <p:cNvSpPr txBox="1"/>
           <p:nvPr/>
         </p:nvSpPr>
@@ -10246,7 +10246,7 @@
       </p:sp>
       <p:sp>
         <p:nvSpPr>
-          <p:cNvPr id="4" name="Shape 2"/>
+          <p:cNvPr id="5" name="Shape 2"/>
           <p:cNvSpPr/>
           <p:nvPr/>
         </p:nvSpPr>
@@ -10268,7 +10268,7 @@
       </p:sp>
       <p:sp>
         <p:nvSpPr>
-          <p:cNvPr id="5" name="Shape 3"/>
+          <p:cNvPr id="6" name="Shape 3"/>
           <p:cNvSpPr/>
           <p:nvPr/>
         </p:nvSpPr>
@@ -10288,7 +10288,7 @@
       </p:sp>
       <p:pic>
         <p:nvPicPr>
-          <p:cNvPr id="6" name="Image 0" descr="/tmp/claude-0/-home-user-riesgo/0ff9ff46-1396-5bd8-b3ac-2280dfbbbc55/scratchpad/work/gen/icons/heart_crack_navy.png">    </p:cNvPr>
+          <p:cNvPr id="7" name="Image 0" descr="/tmp/claude-0/-home-user-riesgo/0ff9ff46-1396-5bd8-b3ac-2280dfbbbc55/scratchpad/work/gen/icons/heart_crack_navy.png">    </p:cNvPr>
           <p:cNvPicPr>
             <a:picLocks noChangeAspect="1"/>
           </p:cNvPicPr>
@@ -10312,7 +10312,7 @@
       </p:pic>
       <p:sp>
         <p:nvSpPr>
-          <p:cNvPr id="7" name="Text 4"/>
+          <p:cNvPr id="8" name="Text 4"/>
           <p:cNvSpPr txBox="1"/>
           <p:nvPr/>
         </p:nvSpPr>
@@ -10351,7 +10351,7 @@
       </p:sp>
       <p:sp>
         <p:nvSpPr>
-          <p:cNvPr id="8" name="Text 5"/>
+          <p:cNvPr id="9" name="Text 5"/>
           <p:cNvSpPr txBox="1"/>
           <p:nvPr/>
         </p:nvSpPr>
@@ -10393,7 +10393,7 @@
       </p:sp>
       <p:sp>
         <p:nvSpPr>
-          <p:cNvPr id="9" name="Text 6"/>
+          <p:cNvPr id="10" name="Text 6"/>
           <p:cNvSpPr txBox="1"/>
           <p:nvPr/>
         </p:nvSpPr>
@@ -10432,7 +10432,7 @@
       </p:sp>
       <p:sp>
         <p:nvSpPr>
-          <p:cNvPr id="10" name="Shape 7"/>
+          <p:cNvPr id="11" name="Shape 7"/>
           <p:cNvSpPr/>
           <p:nvPr/>
         </p:nvSpPr>
@@ -10454,7 +10454,7 @@
       </p:sp>
       <p:sp>
         <p:nvSpPr>
-          <p:cNvPr id="11" name="Shape 8"/>
+          <p:cNvPr id="12" name="Shape 8"/>
           <p:cNvSpPr/>
           <p:nvPr/>
         </p:nvSpPr>
@@ -10474,7 +10474,7 @@
       </p:sp>
       <p:sp>
         <p:nvSpPr>
-          <p:cNvPr id="12" name="Text 9"/>
+          <p:cNvPr id="13" name="Text 9"/>
           <p:cNvSpPr txBox="1"/>
           <p:nvPr/>
         </p:nvSpPr>
@@ -10513,7 +10513,7 @@
       </p:sp>
       <p:sp>
         <p:nvSpPr>
-          <p:cNvPr id="13" name="Text 10"/>
+          <p:cNvPr id="14" name="Text 10"/>
           <p:cNvSpPr txBox="1"/>
           <p:nvPr/>
         </p:nvSpPr>
@@ -10555,7 +10555,7 @@
       </p:sp>
       <p:sp>
         <p:nvSpPr>
-          <p:cNvPr id="14" name="Shape 11"/>
+          <p:cNvPr id="15" name="Shape 11"/>
           <p:cNvSpPr/>
           <p:nvPr/>
         </p:nvSpPr>
@@ -10577,7 +10577,7 @@
       </p:sp>
       <p:sp>
         <p:nvSpPr>
-          <p:cNvPr id="15" name="Shape 12"/>
+          <p:cNvPr id="16" name="Shape 12"/>
           <p:cNvSpPr/>
           <p:nvPr/>
         </p:nvSpPr>
@@ -10597,7 +10597,7 @@
       </p:sp>
       <p:sp>
         <p:nvSpPr>
-          <p:cNvPr id="16" name="Text 13"/>
+          <p:cNvPr id="17" name="Text 13"/>
           <p:cNvSpPr txBox="1"/>
           <p:nvPr/>
         </p:nvSpPr>
@@ -10636,7 +10636,7 @@
       </p:sp>
       <p:sp>
         <p:nvSpPr>
-          <p:cNvPr id="17" name="Text 14"/>
+          <p:cNvPr id="18" name="Text 14"/>
           <p:cNvSpPr txBox="1"/>
           <p:nvPr/>
         </p:nvSpPr>
@@ -10678,7 +10678,7 @@
       </p:sp>
       <p:sp>
         <p:nvSpPr>
-          <p:cNvPr id="18" name="Shape 15"/>
+          <p:cNvPr id="19" name="Shape 15"/>
           <p:cNvSpPr/>
           <p:nvPr/>
         </p:nvSpPr>
@@ -10700,7 +10700,7 @@
       </p:sp>
       <p:sp>
         <p:nvSpPr>
-          <p:cNvPr id="19" name="Shape 16"/>
+          <p:cNvPr id="20" name="Shape 16"/>
           <p:cNvSpPr/>
           <p:nvPr/>
         </p:nvSpPr>
@@ -10720,7 +10720,7 @@
       </p:sp>
       <p:sp>
         <p:nvSpPr>
-          <p:cNvPr id="20" name="Text 17"/>
+          <p:cNvPr id="21" name="Text 17"/>
           <p:cNvSpPr txBox="1"/>
           <p:nvPr/>
         </p:nvSpPr>
@@ -10759,7 +10759,7 @@
       </p:sp>
       <p:sp>
         <p:nvSpPr>
-          <p:cNvPr id="21" name="Text 18"/>
+          <p:cNvPr id="22" name="Text 18"/>
           <p:cNvSpPr txBox="1"/>
           <p:nvPr/>
         </p:nvSpPr>
@@ -10801,7 +10801,7 @@
       </p:sp>
       <p:sp>
         <p:nvSpPr>
-          <p:cNvPr id="22" name="Text 19"/>
+          <p:cNvPr id="23" name="Text 19"/>
           <p:cNvSpPr txBox="1"/>
           <p:nvPr/>
         </p:nvSpPr>
@@ -10840,7 +10840,7 @@
       </p:sp>
       <p:sp>
         <p:nvSpPr>
-          <p:cNvPr id="23" name="Text 20"/>
+          <p:cNvPr id="24" name="Text 20"/>
           <p:cNvSpPr txBox="1"/>
           <p:nvPr/>
         </p:nvSpPr>
@@ -10911,7 +10911,7 @@
       </p:grpSpPr>
       <p:sp>
         <p:nvSpPr>
-          <p:cNvPr id="2" name="Text 0"/>
+          <p:cNvPr id="3" name="Text 0"/>
           <p:cNvSpPr txBox="1"/>
           <p:nvPr/>
         </p:nvSpPr>
@@ -10950,7 +10950,7 @@
       </p:sp>
       <p:sp>
         <p:nvSpPr>
-          <p:cNvPr id="3" name="Text 1"/>
+          <p:cNvPr id="4" name="Text 1"/>
           <p:cNvSpPr txBox="1"/>
           <p:nvPr/>
         </p:nvSpPr>
@@ -10992,7 +10992,7 @@
       </p:sp>
       <p:sp>
         <p:nvSpPr>
-          <p:cNvPr id="4" name="Shape 2"/>
+          <p:cNvPr id="5" name="Shape 2"/>
           <p:cNvSpPr/>
           <p:nvPr/>
         </p:nvSpPr>
@@ -11014,7 +11014,7 @@
       </p:sp>
       <p:sp>
         <p:nvSpPr>
-          <p:cNvPr id="5" name="Shape 3"/>
+          <p:cNvPr id="6" name="Shape 3"/>
           <p:cNvSpPr/>
           <p:nvPr/>
         </p:nvSpPr>
@@ -11034,7 +11034,7 @@
       </p:sp>
       <p:pic>
         <p:nvPicPr>
-          <p:cNvPr id="6" name="Image 0" descr="/tmp/claude-0/-home-user-riesgo/0ff9ff46-1396-5bd8-b3ac-2280dfbbbc55/scratchpad/work/gen/icons/check_circle_green.png">    </p:cNvPr>
+          <p:cNvPr id="7" name="Image 0" descr="/tmp/claude-0/-home-user-riesgo/0ff9ff46-1396-5bd8-b3ac-2280dfbbbc55/scratchpad/work/gen/icons/check_circle_green.png">    </p:cNvPr>
           <p:cNvPicPr>
             <a:picLocks noChangeAspect="1"/>
           </p:cNvPicPr>
@@ -11058,7 +11058,7 @@
       </p:pic>
       <p:sp>
         <p:nvSpPr>
-          <p:cNvPr id="7" name="Text 4"/>
+          <p:cNvPr id="8" name="Text 4"/>
           <p:cNvSpPr txBox="1"/>
           <p:nvPr/>
         </p:nvSpPr>
@@ -11097,7 +11097,7 @@
       </p:sp>
       <p:sp>
         <p:nvSpPr>
-          <p:cNvPr id="8" name="Text 5"/>
+          <p:cNvPr id="9" name="Text 5"/>
           <p:cNvSpPr txBox="1"/>
           <p:nvPr/>
         </p:nvSpPr>
@@ -11139,7 +11139,7 @@
       </p:sp>
       <p:sp>
         <p:nvSpPr>
-          <p:cNvPr id="9" name="Text 6"/>
+          <p:cNvPr id="10" name="Text 6"/>
           <p:cNvSpPr txBox="1"/>
           <p:nvPr/>
         </p:nvSpPr>
@@ -11178,7 +11178,7 @@
       </p:sp>
       <p:sp>
         <p:nvSpPr>
-          <p:cNvPr id="10" name="Shape 7"/>
+          <p:cNvPr id="11" name="Shape 7"/>
           <p:cNvSpPr/>
           <p:nvPr/>
         </p:nvSpPr>
@@ -11200,7 +11200,7 @@
       </p:sp>
       <p:sp>
         <p:nvSpPr>
-          <p:cNvPr id="11" name="Text 8"/>
+          <p:cNvPr id="12" name="Text 8"/>
           <p:cNvSpPr txBox="1"/>
           <p:nvPr/>
         </p:nvSpPr>
@@ -11242,7 +11242,7 @@
       </p:sp>
       <p:sp>
         <p:nvSpPr>
-          <p:cNvPr id="12" name="Text 9"/>
+          <p:cNvPr id="13" name="Text 9"/>
           <p:cNvSpPr txBox="1"/>
           <p:nvPr/>
         </p:nvSpPr>
@@ -11281,7 +11281,7 @@
       </p:sp>
       <p:sp>
         <p:nvSpPr>
-          <p:cNvPr id="13" name="Text 10"/>
+          <p:cNvPr id="14" name="Text 10"/>
           <p:cNvSpPr txBox="1"/>
           <p:nvPr/>
         </p:nvSpPr>
@@ -11352,7 +11352,7 @@
       </p:grpSpPr>
       <p:sp>
         <p:nvSpPr>
-          <p:cNvPr id="2" name="Text 0"/>
+          <p:cNvPr id="3" name="Text 0"/>
           <p:cNvSpPr txBox="1"/>
           <p:nvPr/>
         </p:nvSpPr>
@@ -11391,7 +11391,7 @@
       </p:sp>
       <p:sp>
         <p:nvSpPr>
-          <p:cNvPr id="3" name="Text 1"/>
+          <p:cNvPr id="4" name="Text 1"/>
           <p:cNvSpPr txBox="1"/>
           <p:nvPr/>
         </p:nvSpPr>
@@ -11433,7 +11433,7 @@
       </p:sp>
       <p:sp>
         <p:nvSpPr>
-          <p:cNvPr id="4" name="Text 2"/>
+          <p:cNvPr id="5" name="Text 2"/>
           <p:cNvSpPr txBox="1"/>
           <p:nvPr/>
         </p:nvSpPr>
@@ -11472,7 +11472,7 @@
       </p:sp>
       <p:sp>
         <p:nvSpPr>
-          <p:cNvPr id="5" name="Shape 3"/>
+          <p:cNvPr id="6" name="Shape 3"/>
           <p:cNvSpPr/>
           <p:nvPr/>
         </p:nvSpPr>
@@ -11494,7 +11494,7 @@
       </p:sp>
       <p:sp>
         <p:nvSpPr>
-          <p:cNvPr id="6" name="Shape 4"/>
+          <p:cNvPr id="7" name="Shape 4"/>
           <p:cNvSpPr/>
           <p:nvPr/>
         </p:nvSpPr>
@@ -11514,7 +11514,7 @@
       </p:sp>
       <p:pic>
         <p:nvPicPr>
-          <p:cNvPr id="7" name="Image 0" descr="/tmp/claude-0/-home-user-riesgo/0ff9ff46-1396-5bd8-b3ac-2280dfbbbc55/scratchpad/work/gen/icons/people_group_white.png">    </p:cNvPr>
+          <p:cNvPr id="8" name="Image 0" descr="/tmp/claude-0/-home-user-riesgo/0ff9ff46-1396-5bd8-b3ac-2280dfbbbc55/scratchpad/work/gen/icons/people_group_white.png">    </p:cNvPr>
           <p:cNvPicPr>
             <a:picLocks noChangeAspect="1"/>
           </p:cNvPicPr>
@@ -11538,7 +11538,7 @@
       </p:pic>
       <p:sp>
         <p:nvSpPr>
-          <p:cNvPr id="8" name="Text 5"/>
+          <p:cNvPr id="9" name="Text 5"/>
           <p:cNvSpPr txBox="1"/>
           <p:nvPr/>
         </p:nvSpPr>
@@ -11577,7 +11577,7 @@
       </p:sp>
       <p:sp>
         <p:nvSpPr>
-          <p:cNvPr id="9" name="Text 6"/>
+          <p:cNvPr id="10" name="Text 6"/>
           <p:cNvSpPr txBox="1"/>
           <p:nvPr/>
         </p:nvSpPr>
@@ -11619,7 +11619,7 @@
       </p:sp>
       <p:sp>
         <p:nvSpPr>
-          <p:cNvPr id="10" name="Shape 7"/>
+          <p:cNvPr id="11" name="Shape 7"/>
           <p:cNvSpPr/>
           <p:nvPr/>
         </p:nvSpPr>
@@ -11641,7 +11641,7 @@
       </p:sp>
       <p:sp>
         <p:nvSpPr>
-          <p:cNvPr id="11" name="Shape 8"/>
+          <p:cNvPr id="12" name="Shape 8"/>
           <p:cNvSpPr/>
           <p:nvPr/>
         </p:nvSpPr>
@@ -11661,7 +11661,7 @@
       </p:sp>
       <p:pic>
         <p:nvPicPr>
-          <p:cNvPr id="12" name="Image 1" descr="/tmp/claude-0/-home-user-riesgo/0ff9ff46-1396-5bd8-b3ac-2280dfbbbc55/scratchpad/work/gen/icons/megaphone_white.png">    </p:cNvPr>
+          <p:cNvPr id="13" name="Image 1" descr="/tmp/claude-0/-home-user-riesgo/0ff9ff46-1396-5bd8-b3ac-2280dfbbbc55/scratchpad/work/gen/icons/megaphone_white.png">    </p:cNvPr>
           <p:cNvPicPr>
             <a:picLocks noChangeAspect="1"/>
           </p:cNvPicPr>
@@ -11685,7 +11685,7 @@
       </p:pic>
       <p:sp>
         <p:nvSpPr>
-          <p:cNvPr id="13" name="Text 9"/>
+          <p:cNvPr id="14" name="Text 9"/>
           <p:cNvSpPr txBox="1"/>
           <p:nvPr/>
         </p:nvSpPr>
@@ -11724,7 +11724,7 @@
       </p:sp>
       <p:sp>
         <p:nvSpPr>
-          <p:cNvPr id="14" name="Text 10"/>
+          <p:cNvPr id="15" name="Text 10"/>
           <p:cNvSpPr txBox="1"/>
           <p:nvPr/>
         </p:nvSpPr>
@@ -11766,7 +11766,7 @@
       </p:sp>
       <p:sp>
         <p:nvSpPr>
-          <p:cNvPr id="15" name="Shape 11"/>
+          <p:cNvPr id="16" name="Shape 11"/>
           <p:cNvSpPr/>
           <p:nvPr/>
         </p:nvSpPr>
@@ -11788,7 +11788,7 @@
       </p:sp>
       <p:sp>
         <p:nvSpPr>
-          <p:cNvPr id="16" name="Shape 12"/>
+          <p:cNvPr id="17" name="Shape 12"/>
           <p:cNvSpPr/>
           <p:nvPr/>
         </p:nvSpPr>
@@ -11808,7 +11808,7 @@
       </p:sp>
       <p:pic>
         <p:nvPicPr>
-          <p:cNvPr id="17" name="Image 2" descr="/tmp/claude-0/-home-user-riesgo/0ff9ff46-1396-5bd8-b3ac-2280dfbbbc55/scratchpad/work/gen/icons/gears_white.png">    </p:cNvPr>
+          <p:cNvPr id="18" name="Image 2" descr="/tmp/claude-0/-home-user-riesgo/0ff9ff46-1396-5bd8-b3ac-2280dfbbbc55/scratchpad/work/gen/icons/gears_white.png">    </p:cNvPr>
           <p:cNvPicPr>
             <a:picLocks noChangeAspect="1"/>
           </p:cNvPicPr>
@@ -11832,7 +11832,7 @@
       </p:pic>
       <p:sp>
         <p:nvSpPr>
-          <p:cNvPr id="18" name="Text 13"/>
+          <p:cNvPr id="19" name="Text 13"/>
           <p:cNvSpPr txBox="1"/>
           <p:nvPr/>
         </p:nvSpPr>
@@ -11871,7 +11871,7 @@
       </p:sp>
       <p:sp>
         <p:nvSpPr>
-          <p:cNvPr id="19" name="Text 14"/>
+          <p:cNvPr id="20" name="Text 14"/>
           <p:cNvSpPr txBox="1"/>
           <p:nvPr/>
         </p:nvSpPr>
@@ -11913,7 +11913,7 @@
       </p:sp>
       <p:sp>
         <p:nvSpPr>
-          <p:cNvPr id="20" name="Shape 15"/>
+          <p:cNvPr id="21" name="Shape 15"/>
           <p:cNvSpPr/>
           <p:nvPr/>
         </p:nvSpPr>
@@ -11935,7 +11935,7 @@
       </p:sp>
       <p:sp>
         <p:nvSpPr>
-          <p:cNvPr id="21" name="Shape 16"/>
+          <p:cNvPr id="22" name="Shape 16"/>
           <p:cNvSpPr/>
           <p:nvPr/>
         </p:nvSpPr>
@@ -11955,7 +11955,7 @@
       </p:sp>
       <p:pic>
         <p:nvPicPr>
-          <p:cNvPr id="22" name="Image 3" descr="/tmp/claude-0/-home-user-riesgo/0ff9ff46-1396-5bd8-b3ac-2280dfbbbc55/scratchpad/work/gen/icons/star_white.png">    </p:cNvPr>
+          <p:cNvPr id="23" name="Image 3" descr="/tmp/claude-0/-home-user-riesgo/0ff9ff46-1396-5bd8-b3ac-2280dfbbbc55/scratchpad/work/gen/icons/star_white.png">    </p:cNvPr>
           <p:cNvPicPr>
             <a:picLocks noChangeAspect="1"/>
           </p:cNvPicPr>
@@ -11979,7 +11979,7 @@
       </p:pic>
       <p:sp>
         <p:nvSpPr>
-          <p:cNvPr id="23" name="Text 17"/>
+          <p:cNvPr id="24" name="Text 17"/>
           <p:cNvSpPr txBox="1"/>
           <p:nvPr/>
         </p:nvSpPr>
@@ -12018,7 +12018,7 @@
       </p:sp>
       <p:sp>
         <p:nvSpPr>
-          <p:cNvPr id="24" name="Text 18"/>
+          <p:cNvPr id="25" name="Text 18"/>
           <p:cNvSpPr txBox="1"/>
           <p:nvPr/>
         </p:nvSpPr>
@@ -12060,7 +12060,7 @@
       </p:sp>
       <p:sp>
         <p:nvSpPr>
-          <p:cNvPr id="25" name="Shape 19"/>
+          <p:cNvPr id="26" name="Shape 19"/>
           <p:cNvSpPr/>
           <p:nvPr/>
         </p:nvSpPr>
@@ -12082,7 +12082,7 @@
       </p:sp>
       <p:sp>
         <p:nvSpPr>
-          <p:cNvPr id="26" name="Shape 20"/>
+          <p:cNvPr id="27" name="Shape 20"/>
           <p:cNvSpPr/>
           <p:nvPr/>
         </p:nvSpPr>
@@ -12102,7 +12102,7 @@
       </p:sp>
       <p:pic>
         <p:nvPicPr>
-          <p:cNvPr id="27" name="Image 4" descr="/tmp/claude-0/-home-user-riesgo/0ff9ff46-1396-5bd8-b3ac-2280dfbbbc55/scratchpad/work/gen/icons/shield_warning_white.png">    </p:cNvPr>
+          <p:cNvPr id="28" name="Image 4" descr="/tmp/claude-0/-home-user-riesgo/0ff9ff46-1396-5bd8-b3ac-2280dfbbbc55/scratchpad/work/gen/icons/shield_warning_white.png">    </p:cNvPr>
           <p:cNvPicPr>
             <a:picLocks noChangeAspect="1"/>
           </p:cNvPicPr>
@@ -12126,7 +12126,7 @@
       </p:pic>
       <p:sp>
         <p:nvSpPr>
-          <p:cNvPr id="28" name="Text 21"/>
+          <p:cNvPr id="29" name="Text 21"/>
           <p:cNvSpPr txBox="1"/>
           <p:nvPr/>
         </p:nvSpPr>
@@ -12165,7 +12165,7 @@
       </p:sp>
       <p:sp>
         <p:nvSpPr>
-          <p:cNvPr id="29" name="Text 22"/>
+          <p:cNvPr id="30" name="Text 22"/>
           <p:cNvSpPr txBox="1"/>
           <p:nvPr/>
         </p:nvSpPr>
@@ -12207,7 +12207,7 @@
       </p:sp>
       <p:sp>
         <p:nvSpPr>
-          <p:cNvPr id="30" name="Shape 23"/>
+          <p:cNvPr id="31" name="Shape 23"/>
           <p:cNvSpPr/>
           <p:nvPr/>
         </p:nvSpPr>
@@ -12229,7 +12229,7 @@
       </p:sp>
       <p:sp>
         <p:nvSpPr>
-          <p:cNvPr id="31" name="Shape 24"/>
+          <p:cNvPr id="32" name="Shape 24"/>
           <p:cNvSpPr/>
           <p:nvPr/>
         </p:nvSpPr>
@@ -12249,7 +12249,7 @@
       </p:sp>
       <p:pic>
         <p:nvPicPr>
-          <p:cNvPr id="32" name="Image 5" descr="/tmp/claude-0/-home-user-riesgo/0ff9ff46-1396-5bd8-b3ac-2280dfbbbc55/scratchpad/work/gen/icons/bank_white.png">    </p:cNvPr>
+          <p:cNvPr id="33" name="Image 5" descr="/tmp/claude-0/-home-user-riesgo/0ff9ff46-1396-5bd8-b3ac-2280dfbbbc55/scratchpad/work/gen/icons/bank_white.png">    </p:cNvPr>
           <p:cNvPicPr>
             <a:picLocks noChangeAspect="1"/>
           </p:cNvPicPr>
@@ -12273,7 +12273,7 @@
       </p:pic>
       <p:sp>
         <p:nvSpPr>
-          <p:cNvPr id="33" name="Text 25"/>
+          <p:cNvPr id="34" name="Text 25"/>
           <p:cNvSpPr txBox="1"/>
           <p:nvPr/>
         </p:nvSpPr>
@@ -12312,7 +12312,7 @@
       </p:sp>
       <p:sp>
         <p:nvSpPr>
-          <p:cNvPr id="34" name="Text 26"/>
+          <p:cNvPr id="35" name="Text 26"/>
           <p:cNvSpPr txBox="1"/>
           <p:nvPr/>
         </p:nvSpPr>
@@ -12354,7 +12354,7 @@
       </p:sp>
       <p:sp>
         <p:nvSpPr>
-          <p:cNvPr id="35" name="Shape 27"/>
+          <p:cNvPr id="36" name="Shape 27"/>
           <p:cNvSpPr/>
           <p:nvPr/>
         </p:nvSpPr>
@@ -12376,7 +12376,7 @@
       </p:sp>
       <p:sp>
         <p:nvSpPr>
-          <p:cNvPr id="36" name="Shape 28"/>
+          <p:cNvPr id="37" name="Shape 28"/>
           <p:cNvSpPr/>
           <p:nvPr/>
         </p:nvSpPr>
@@ -12396,7 +12396,7 @@
       </p:sp>
       <p:pic>
         <p:nvPicPr>
-          <p:cNvPr id="37" name="Image 6" descr="/tmp/claude-0/-home-user-riesgo/0ff9ff46-1396-5bd8-b3ac-2280dfbbbc55/scratchpad/work/gen/icons/handshake_white.png">    </p:cNvPr>
+          <p:cNvPr id="38" name="Image 6" descr="/tmp/claude-0/-home-user-riesgo/0ff9ff46-1396-5bd8-b3ac-2280dfbbbc55/scratchpad/work/gen/icons/handshake_white.png">    </p:cNvPr>
           <p:cNvPicPr>
             <a:picLocks noChangeAspect="1"/>
           </p:cNvPicPr>
@@ -12420,7 +12420,7 @@
       </p:pic>
       <p:sp>
         <p:nvSpPr>
-          <p:cNvPr id="38" name="Text 29"/>
+          <p:cNvPr id="39" name="Text 29"/>
           <p:cNvSpPr txBox="1"/>
           <p:nvPr/>
         </p:nvSpPr>
@@ -12459,7 +12459,7 @@
       </p:sp>
       <p:sp>
         <p:nvSpPr>
-          <p:cNvPr id="39" name="Text 30"/>
+          <p:cNvPr id="40" name="Text 30"/>
           <p:cNvSpPr txBox="1"/>
           <p:nvPr/>
         </p:nvSpPr>
@@ -12501,7 +12501,7 @@
       </p:sp>
       <p:sp>
         <p:nvSpPr>
-          <p:cNvPr id="40" name="Shape 31"/>
+          <p:cNvPr id="41" name="Shape 31"/>
           <p:cNvSpPr/>
           <p:nvPr/>
         </p:nvSpPr>
@@ -12523,7 +12523,7 @@
       </p:sp>
       <p:sp>
         <p:nvSpPr>
-          <p:cNvPr id="41" name="Shape 32"/>
+          <p:cNvPr id="42" name="Shape 32"/>
           <p:cNvSpPr/>
           <p:nvPr/>
         </p:nvSpPr>
@@ -12543,7 +12543,7 @@
       </p:sp>
       <p:pic>
         <p:nvPicPr>
-          <p:cNvPr id="42" name="Image 7" descr="/tmp/claude-0/-home-user-riesgo/0ff9ff46-1396-5bd8-b3ac-2280dfbbbc55/scratchpad/work/gen/icons/globe_white.png">    </p:cNvPr>
+          <p:cNvPr id="43" name="Image 7" descr="/tmp/claude-0/-home-user-riesgo/0ff9ff46-1396-5bd8-b3ac-2280dfbbbc55/scratchpad/work/gen/icons/globe_white.png">    </p:cNvPr>
           <p:cNvPicPr>
             <a:picLocks noChangeAspect="1"/>
           </p:cNvPicPr>
@@ -12567,7 +12567,7 @@
       </p:pic>
       <p:sp>
         <p:nvSpPr>
-          <p:cNvPr id="43" name="Text 33"/>
+          <p:cNvPr id="44" name="Text 33"/>
           <p:cNvSpPr txBox="1"/>
           <p:nvPr/>
         </p:nvSpPr>
@@ -12606,7 +12606,7 @@
       </p:sp>
       <p:sp>
         <p:nvSpPr>
-          <p:cNvPr id="44" name="Text 34"/>
+          <p:cNvPr id="45" name="Text 34"/>
           <p:cNvSpPr txBox="1"/>
           <p:nvPr/>
         </p:nvSpPr>
@@ -12648,7 +12648,7 @@
       </p:sp>
       <p:sp>
         <p:nvSpPr>
-          <p:cNvPr id="45" name="Text 35"/>
+          <p:cNvPr id="46" name="Text 35"/>
           <p:cNvSpPr txBox="1"/>
           <p:nvPr/>
         </p:nvSpPr>
@@ -12687,7 +12687,7 @@
       </p:sp>
       <p:sp>
         <p:nvSpPr>
-          <p:cNvPr id="46" name="Text 36"/>
+          <p:cNvPr id="47" name="Text 36"/>
           <p:cNvSpPr txBox="1"/>
           <p:nvPr/>
         </p:nvSpPr>
@@ -12726,7 +12726,7 @@
       </p:sp>
       <p:sp>
         <p:nvSpPr>
-          <p:cNvPr id="47" name="Text 37"/>
+          <p:cNvPr id="48" name="Text 37"/>
           <p:cNvSpPr txBox="1"/>
           <p:nvPr/>
         </p:nvSpPr>
@@ -12797,7 +12797,7 @@
       </p:grpSpPr>
       <p:sp>
         <p:nvSpPr>
-          <p:cNvPr id="2" name="Shape 0"/>
+          <p:cNvPr id="3" name="Shape 0"/>
           <p:cNvSpPr/>
           <p:nvPr/>
         </p:nvSpPr>
@@ -12817,7 +12817,7 @@
       </p:sp>
       <p:sp>
         <p:nvSpPr>
-          <p:cNvPr id="3" name="Text 1"/>
+          <p:cNvPr id="4" name="Text 1"/>
           <p:cNvSpPr txBox="1"/>
           <p:nvPr/>
         </p:nvSpPr>
@@ -12856,7 +12856,7 @@
       </p:sp>
       <p:sp>
         <p:nvSpPr>
-          <p:cNvPr id="4" name="Shape 2"/>
+          <p:cNvPr id="5" name="Shape 2"/>
           <p:cNvSpPr/>
           <p:nvPr/>
         </p:nvSpPr>
@@ -12876,7 +12876,7 @@
       </p:sp>
       <p:pic>
         <p:nvPicPr>
-          <p:cNvPr id="5" name="Image 0" descr="/tmp/claude-0/-home-user-riesgo/0ff9ff46-1396-5bd8-b3ac-2280dfbbbc55/scratchpad/work/gen/icons/shield_warning_navy.png">    </p:cNvPr>
+          <p:cNvPr id="6" name="Image 0" descr="/tmp/claude-0/-home-user-riesgo/0ff9ff46-1396-5bd8-b3ac-2280dfbbbc55/scratchpad/work/gen/icons/shield_warning_navy.png">    </p:cNvPr>
           <p:cNvPicPr>
             <a:picLocks noChangeAspect="1"/>
           </p:cNvPicPr>
@@ -12900,7 +12900,7 @@
       </p:pic>
       <p:sp>
         <p:nvSpPr>
-          <p:cNvPr id="6" name="Text 3"/>
+          <p:cNvPr id="7" name="Text 3"/>
           <p:cNvSpPr txBox="1"/>
           <p:nvPr/>
         </p:nvSpPr>
@@ -12939,7 +12939,7 @@
       </p:sp>
       <p:sp>
         <p:nvSpPr>
-          <p:cNvPr id="7" name="Text 4"/>
+          <p:cNvPr id="8" name="Text 4"/>
           <p:cNvSpPr txBox="1"/>
           <p:nvPr/>
         </p:nvSpPr>
@@ -13001,7 +13001,7 @@
       </p:sp>
       <p:sp>
         <p:nvSpPr>
-          <p:cNvPr id="8" name="Text 5"/>
+          <p:cNvPr id="9" name="Text 5"/>
           <p:cNvSpPr txBox="1"/>
           <p:nvPr/>
         </p:nvSpPr>
@@ -13043,7 +13043,7 @@
       </p:sp>
       <p:pic>
         <p:nvPicPr>
-          <p:cNvPr id="9" name="Image 1" descr="/tmp/claude-0/-home-user-riesgo/0ff9ff46-1396-5bd8-b3ac-2280dfbbbc55/scratchpad/work/gen/logo_white.png">    </p:cNvPr>
+          <p:cNvPr id="10" name="Image 1" descr="/tmp/claude-0/-home-user-riesgo/0ff9ff46-1396-5bd8-b3ac-2280dfbbbc55/scratchpad/work/gen/logo_white.png">    </p:cNvPr>
           <p:cNvPicPr>
             <a:picLocks noChangeAspect="1"/>
           </p:cNvPicPr>
@@ -13067,7 +13067,7 @@
       </p:pic>
       <p:sp>
         <p:nvSpPr>
-          <p:cNvPr id="10" name="Text 6"/>
+          <p:cNvPr id="11" name="Text 6"/>
           <p:cNvSpPr txBox="1"/>
           <p:nvPr/>
         </p:nvSpPr>
@@ -13106,7 +13106,7 @@
       </p:sp>
       <p:sp>
         <p:nvSpPr>
-          <p:cNvPr id="11" name="Text 7"/>
+          <p:cNvPr id="12" name="Text 7"/>
           <p:cNvSpPr txBox="1"/>
           <p:nvPr/>
         </p:nvSpPr>
@@ -13177,7 +13177,7 @@
       </p:grpSpPr>
       <p:sp>
         <p:nvSpPr>
-          <p:cNvPr id="2" name="Text 0"/>
+          <p:cNvPr id="3" name="Text 0"/>
           <p:cNvSpPr txBox="1"/>
           <p:nvPr/>
         </p:nvSpPr>
@@ -13216,7 +13216,7 @@
       </p:sp>
       <p:sp>
         <p:nvSpPr>
-          <p:cNvPr id="3" name="Text 1"/>
+          <p:cNvPr id="4" name="Text 1"/>
           <p:cNvSpPr txBox="1"/>
           <p:nvPr/>
         </p:nvSpPr>
@@ -13258,7 +13258,7 @@
       </p:sp>
       <p:sp>
         <p:nvSpPr>
-          <p:cNvPr id="4" name="Shape 2"/>
+          <p:cNvPr id="5" name="Shape 2"/>
           <p:cNvSpPr/>
           <p:nvPr/>
         </p:nvSpPr>
@@ -13280,7 +13280,7 @@
       </p:sp>
       <p:sp>
         <p:nvSpPr>
-          <p:cNvPr id="5" name="Shape 3"/>
+          <p:cNvPr id="6" name="Shape 3"/>
           <p:cNvSpPr/>
           <p:nvPr/>
         </p:nvSpPr>
@@ -13302,7 +13302,7 @@
       </p:sp>
       <p:sp>
         <p:nvSpPr>
-          <p:cNvPr id="6" name="Shape 4"/>
+          <p:cNvPr id="7" name="Shape 4"/>
           <p:cNvSpPr/>
           <p:nvPr/>
         </p:nvSpPr>
@@ -13322,7 +13322,7 @@
       </p:sp>
       <p:sp>
         <p:nvSpPr>
-          <p:cNvPr id="7" name="Shape 5"/>
+          <p:cNvPr id="8" name="Shape 5"/>
           <p:cNvSpPr/>
           <p:nvPr/>
         </p:nvSpPr>
@@ -13342,7 +13342,7 @@
       </p:sp>
       <p:pic>
         <p:nvPicPr>
-          <p:cNvPr id="8" name="Image 0" descr="/tmp/claude-0/-home-user-riesgo/0ff9ff46-1396-5bd8-b3ac-2280dfbbbc55/scratchpad/work/gen/icons/x_circle_white.png">    </p:cNvPr>
+          <p:cNvPr id="9" name="Image 0" descr="/tmp/claude-0/-home-user-riesgo/0ff9ff46-1396-5bd8-b3ac-2280dfbbbc55/scratchpad/work/gen/icons/x_circle_white.png">    </p:cNvPr>
           <p:cNvPicPr>
             <a:picLocks noChangeAspect="1"/>
           </p:cNvPicPr>
@@ -13366,7 +13366,7 @@
       </p:pic>
       <p:sp>
         <p:nvSpPr>
-          <p:cNvPr id="9" name="Text 6"/>
+          <p:cNvPr id="10" name="Text 6"/>
           <p:cNvSpPr txBox="1"/>
           <p:nvPr/>
         </p:nvSpPr>
@@ -13405,7 +13405,7 @@
       </p:sp>
       <p:sp>
         <p:nvSpPr>
-          <p:cNvPr id="10" name="Text 7"/>
+          <p:cNvPr id="11" name="Text 7"/>
           <p:cNvSpPr txBox="1"/>
           <p:nvPr/>
         </p:nvSpPr>
@@ -13444,7 +13444,7 @@
       </p:sp>
       <p:sp>
         <p:nvSpPr>
-          <p:cNvPr id="11" name="Text 8"/>
+          <p:cNvPr id="12" name="Text 8"/>
           <p:cNvSpPr txBox="1"/>
           <p:nvPr/>
         </p:nvSpPr>
@@ -13486,7 +13486,7 @@
       </p:sp>
       <p:sp>
         <p:nvSpPr>
-          <p:cNvPr id="12" name="Shape 9"/>
+          <p:cNvPr id="13" name="Shape 9"/>
           <p:cNvSpPr/>
           <p:nvPr/>
         </p:nvSpPr>
@@ -13508,7 +13508,7 @@
       </p:sp>
       <p:sp>
         <p:nvSpPr>
-          <p:cNvPr id="13" name="Shape 10"/>
+          <p:cNvPr id="14" name="Shape 10"/>
           <p:cNvSpPr/>
           <p:nvPr/>
         </p:nvSpPr>
@@ -13530,7 +13530,7 @@
       </p:sp>
       <p:sp>
         <p:nvSpPr>
-          <p:cNvPr id="14" name="Shape 11"/>
+          <p:cNvPr id="15" name="Shape 11"/>
           <p:cNvSpPr/>
           <p:nvPr/>
         </p:nvSpPr>
@@ -13550,7 +13550,7 @@
       </p:sp>
       <p:sp>
         <p:nvSpPr>
-          <p:cNvPr id="15" name="Shape 12"/>
+          <p:cNvPr id="16" name="Shape 12"/>
           <p:cNvSpPr/>
           <p:nvPr/>
         </p:nvSpPr>
@@ -13570,7 +13570,7 @@
       </p:sp>
       <p:pic>
         <p:nvPicPr>
-          <p:cNvPr id="16" name="Image 1" descr="/tmp/claude-0/-home-user-riesgo/0ff9ff46-1396-5bd8-b3ac-2280dfbbbc55/scratchpad/work/gen/icons/shield_warning_white.png">    </p:cNvPr>
+          <p:cNvPr id="17" name="Image 1" descr="/tmp/claude-0/-home-user-riesgo/0ff9ff46-1396-5bd8-b3ac-2280dfbbbc55/scratchpad/work/gen/icons/shield_warning_white.png">    </p:cNvPr>
           <p:cNvPicPr>
             <a:picLocks noChangeAspect="1"/>
           </p:cNvPicPr>
@@ -13594,7 +13594,7 @@
       </p:pic>
       <p:sp>
         <p:nvSpPr>
-          <p:cNvPr id="17" name="Text 13"/>
+          <p:cNvPr id="18" name="Text 13"/>
           <p:cNvSpPr txBox="1"/>
           <p:nvPr/>
         </p:nvSpPr>
@@ -13633,7 +13633,7 @@
       </p:sp>
       <p:sp>
         <p:nvSpPr>
-          <p:cNvPr id="18" name="Text 14"/>
+          <p:cNvPr id="19" name="Text 14"/>
           <p:cNvSpPr txBox="1"/>
           <p:nvPr/>
         </p:nvSpPr>
@@ -13672,7 +13672,7 @@
       </p:sp>
       <p:sp>
         <p:nvSpPr>
-          <p:cNvPr id="19" name="Text 15"/>
+          <p:cNvPr id="20" name="Text 15"/>
           <p:cNvSpPr txBox="1"/>
           <p:nvPr/>
         </p:nvSpPr>
@@ -13714,7 +13714,7 @@
       </p:sp>
       <p:sp>
         <p:nvSpPr>
-          <p:cNvPr id="20" name="Shape 16"/>
+          <p:cNvPr id="21" name="Shape 16"/>
           <p:cNvSpPr/>
           <p:nvPr/>
         </p:nvSpPr>
@@ -13736,7 +13736,7 @@
       </p:sp>
       <p:sp>
         <p:nvSpPr>
-          <p:cNvPr id="21" name="Shape 17"/>
+          <p:cNvPr id="22" name="Shape 17"/>
           <p:cNvSpPr/>
           <p:nvPr/>
         </p:nvSpPr>
@@ -13756,7 +13756,7 @@
       </p:sp>
       <p:pic>
         <p:nvPicPr>
-          <p:cNvPr id="22" name="Image 2" descr="/tmp/claude-0/-home-user-riesgo/0ff9ff46-1396-5bd8-b3ac-2280dfbbbc55/scratchpad/work/gen/icons/lightbulb_navy.png">    </p:cNvPr>
+          <p:cNvPr id="23" name="Image 2" descr="/tmp/claude-0/-home-user-riesgo/0ff9ff46-1396-5bd8-b3ac-2280dfbbbc55/scratchpad/work/gen/icons/lightbulb_navy.png">    </p:cNvPr>
           <p:cNvPicPr>
             <a:picLocks noChangeAspect="1"/>
           </p:cNvPicPr>
@@ -13780,7 +13780,7 @@
       </p:pic>
       <p:sp>
         <p:nvSpPr>
-          <p:cNvPr id="23" name="Text 18"/>
+          <p:cNvPr id="24" name="Text 18"/>
           <p:cNvSpPr txBox="1"/>
           <p:nvPr/>
         </p:nvSpPr>
@@ -13822,7 +13822,7 @@
       </p:sp>
       <p:sp>
         <p:nvSpPr>
-          <p:cNvPr id="24" name="Text 19"/>
+          <p:cNvPr id="25" name="Text 19"/>
           <p:cNvSpPr txBox="1"/>
           <p:nvPr/>
         </p:nvSpPr>
@@ -13861,7 +13861,7 @@
       </p:sp>
       <p:sp>
         <p:nvSpPr>
-          <p:cNvPr id="25" name="Text 20"/>
+          <p:cNvPr id="26" name="Text 20"/>
           <p:cNvSpPr txBox="1"/>
           <p:nvPr/>
         </p:nvSpPr>
@@ -13932,7 +13932,7 @@
       </p:grpSpPr>
       <p:sp>
         <p:nvSpPr>
-          <p:cNvPr id="2" name="Text 0"/>
+          <p:cNvPr id="3" name="Text 0"/>
           <p:cNvSpPr txBox="1"/>
           <p:nvPr/>
         </p:nvSpPr>
@@ -13971,7 +13971,7 @@
       </p:sp>
       <p:sp>
         <p:nvSpPr>
-          <p:cNvPr id="3" name="Text 1"/>
+          <p:cNvPr id="4" name="Text 1"/>
           <p:cNvSpPr txBox="1"/>
           <p:nvPr/>
         </p:nvSpPr>
@@ -14013,7 +14013,7 @@
       </p:sp>
       <p:sp>
         <p:nvSpPr>
-          <p:cNvPr id="4" name="Text 2"/>
+          <p:cNvPr id="5" name="Text 2"/>
           <p:cNvSpPr txBox="1"/>
           <p:nvPr/>
         </p:nvSpPr>
@@ -14052,7 +14052,7 @@
       </p:sp>
       <p:sp>
         <p:nvSpPr>
-          <p:cNvPr id="5" name="Shape 3"/>
+          <p:cNvPr id="6" name="Shape 3"/>
           <p:cNvSpPr/>
           <p:nvPr/>
         </p:nvSpPr>
@@ -14074,7 +14074,7 @@
       </p:sp>
       <p:sp>
         <p:nvSpPr>
-          <p:cNvPr id="6" name="Shape 4"/>
+          <p:cNvPr id="7" name="Shape 4"/>
           <p:cNvSpPr/>
           <p:nvPr/>
         </p:nvSpPr>
@@ -14094,7 +14094,7 @@
       </p:sp>
       <p:sp>
         <p:nvSpPr>
-          <p:cNvPr id="7" name="Text 5"/>
+          <p:cNvPr id="8" name="Text 5"/>
           <p:cNvSpPr txBox="1"/>
           <p:nvPr/>
         </p:nvSpPr>
@@ -14133,7 +14133,7 @@
       </p:sp>
       <p:sp>
         <p:nvSpPr>
-          <p:cNvPr id="8" name="Text 6"/>
+          <p:cNvPr id="9" name="Text 6"/>
           <p:cNvSpPr txBox="1"/>
           <p:nvPr/>
         </p:nvSpPr>
@@ -14175,7 +14175,7 @@
       </p:sp>
       <p:sp>
         <p:nvSpPr>
-          <p:cNvPr id="9" name="Shape 7"/>
+          <p:cNvPr id="10" name="Shape 7"/>
           <p:cNvSpPr/>
           <p:nvPr/>
         </p:nvSpPr>
@@ -14197,7 +14197,7 @@
       </p:sp>
       <p:sp>
         <p:nvSpPr>
-          <p:cNvPr id="10" name="Text 8"/>
+          <p:cNvPr id="11" name="Text 8"/>
           <p:cNvSpPr txBox="1"/>
           <p:nvPr/>
         </p:nvSpPr>
@@ -14236,7 +14236,7 @@
       </p:sp>
       <p:sp>
         <p:nvSpPr>
-          <p:cNvPr id="11" name="Shape 9"/>
+          <p:cNvPr id="12" name="Shape 9"/>
           <p:cNvSpPr/>
           <p:nvPr/>
         </p:nvSpPr>
@@ -14258,7 +14258,7 @@
       </p:sp>
       <p:sp>
         <p:nvSpPr>
-          <p:cNvPr id="12" name="Text 10"/>
+          <p:cNvPr id="13" name="Text 10"/>
           <p:cNvSpPr txBox="1"/>
           <p:nvPr/>
         </p:nvSpPr>
@@ -14297,7 +14297,7 @@
       </p:sp>
       <p:sp>
         <p:nvSpPr>
-          <p:cNvPr id="13" name="Shape 11"/>
+          <p:cNvPr id="14" name="Shape 11"/>
           <p:cNvSpPr/>
           <p:nvPr/>
         </p:nvSpPr>
@@ -14319,7 +14319,7 @@
       </p:sp>
       <p:sp>
         <p:nvSpPr>
-          <p:cNvPr id="14" name="Shape 12"/>
+          <p:cNvPr id="15" name="Shape 12"/>
           <p:cNvSpPr/>
           <p:nvPr/>
         </p:nvSpPr>
@@ -14339,7 +14339,7 @@
       </p:sp>
       <p:sp>
         <p:nvSpPr>
-          <p:cNvPr id="15" name="Text 13"/>
+          <p:cNvPr id="16" name="Text 13"/>
           <p:cNvSpPr txBox="1"/>
           <p:nvPr/>
         </p:nvSpPr>
@@ -14378,7 +14378,7 @@
       </p:sp>
       <p:sp>
         <p:nvSpPr>
-          <p:cNvPr id="16" name="Text 14"/>
+          <p:cNvPr id="17" name="Text 14"/>
           <p:cNvSpPr txBox="1"/>
           <p:nvPr/>
         </p:nvSpPr>
@@ -14420,7 +14420,7 @@
       </p:sp>
       <p:sp>
         <p:nvSpPr>
-          <p:cNvPr id="17" name="Shape 15"/>
+          <p:cNvPr id="18" name="Shape 15"/>
           <p:cNvSpPr/>
           <p:nvPr/>
         </p:nvSpPr>
@@ -14442,7 +14442,7 @@
       </p:sp>
       <p:sp>
         <p:nvSpPr>
-          <p:cNvPr id="18" name="Text 16"/>
+          <p:cNvPr id="19" name="Text 16"/>
           <p:cNvSpPr txBox="1"/>
           <p:nvPr/>
         </p:nvSpPr>
@@ -14481,7 +14481,7 @@
       </p:sp>
       <p:sp>
         <p:nvSpPr>
-          <p:cNvPr id="19" name="Shape 17"/>
+          <p:cNvPr id="20" name="Shape 17"/>
           <p:cNvSpPr/>
           <p:nvPr/>
         </p:nvSpPr>
@@ -14503,7 +14503,7 @@
       </p:sp>
       <p:sp>
         <p:nvSpPr>
-          <p:cNvPr id="20" name="Text 18"/>
+          <p:cNvPr id="21" name="Text 18"/>
           <p:cNvSpPr txBox="1"/>
           <p:nvPr/>
         </p:nvSpPr>
@@ -14542,7 +14542,7 @@
       </p:sp>
       <p:sp>
         <p:nvSpPr>
-          <p:cNvPr id="21" name="Shape 19"/>
+          <p:cNvPr id="22" name="Shape 19"/>
           <p:cNvSpPr/>
           <p:nvPr/>
         </p:nvSpPr>
@@ -14564,7 +14564,7 @@
       </p:sp>
       <p:sp>
         <p:nvSpPr>
-          <p:cNvPr id="22" name="Shape 20"/>
+          <p:cNvPr id="23" name="Shape 20"/>
           <p:cNvSpPr/>
           <p:nvPr/>
         </p:nvSpPr>
@@ -14584,7 +14584,7 @@
       </p:sp>
       <p:sp>
         <p:nvSpPr>
-          <p:cNvPr id="23" name="Text 21"/>
+          <p:cNvPr id="24" name="Text 21"/>
           <p:cNvSpPr txBox="1"/>
           <p:nvPr/>
         </p:nvSpPr>
@@ -14623,7 +14623,7 @@
       </p:sp>
       <p:sp>
         <p:nvSpPr>
-          <p:cNvPr id="24" name="Text 22"/>
+          <p:cNvPr id="25" name="Text 22"/>
           <p:cNvSpPr txBox="1"/>
           <p:nvPr/>
         </p:nvSpPr>
@@ -14665,7 +14665,7 @@
       </p:sp>
       <p:sp>
         <p:nvSpPr>
-          <p:cNvPr id="25" name="Shape 23"/>
+          <p:cNvPr id="26" name="Shape 23"/>
           <p:cNvSpPr/>
           <p:nvPr/>
         </p:nvSpPr>
@@ -14687,7 +14687,7 @@
       </p:sp>
       <p:sp>
         <p:nvSpPr>
-          <p:cNvPr id="26" name="Text 24"/>
+          <p:cNvPr id="27" name="Text 24"/>
           <p:cNvSpPr txBox="1"/>
           <p:nvPr/>
         </p:nvSpPr>
@@ -14726,7 +14726,7 @@
       </p:sp>
       <p:sp>
         <p:nvSpPr>
-          <p:cNvPr id="27" name="Shape 25"/>
+          <p:cNvPr id="28" name="Shape 25"/>
           <p:cNvSpPr/>
           <p:nvPr/>
         </p:nvSpPr>
@@ -14748,7 +14748,7 @@
       </p:sp>
       <p:sp>
         <p:nvSpPr>
-          <p:cNvPr id="28" name="Text 26"/>
+          <p:cNvPr id="29" name="Text 26"/>
           <p:cNvSpPr txBox="1"/>
           <p:nvPr/>
         </p:nvSpPr>
@@ -14787,7 +14787,7 @@
       </p:sp>
       <p:sp>
         <p:nvSpPr>
-          <p:cNvPr id="29" name="Shape 27"/>
+          <p:cNvPr id="30" name="Shape 27"/>
           <p:cNvSpPr/>
           <p:nvPr/>
         </p:nvSpPr>
@@ -14809,7 +14809,7 @@
       </p:sp>
       <p:sp>
         <p:nvSpPr>
-          <p:cNvPr id="30" name="Shape 28"/>
+          <p:cNvPr id="31" name="Shape 28"/>
           <p:cNvSpPr/>
           <p:nvPr/>
         </p:nvSpPr>
@@ -14829,7 +14829,7 @@
       </p:sp>
       <p:sp>
         <p:nvSpPr>
-          <p:cNvPr id="31" name="Text 29"/>
+          <p:cNvPr id="32" name="Text 29"/>
           <p:cNvSpPr txBox="1"/>
           <p:nvPr/>
         </p:nvSpPr>
@@ -14868,7 +14868,7 @@
       </p:sp>
       <p:sp>
         <p:nvSpPr>
-          <p:cNvPr id="32" name="Text 30"/>
+          <p:cNvPr id="33" name="Text 30"/>
           <p:cNvSpPr txBox="1"/>
           <p:nvPr/>
         </p:nvSpPr>
@@ -14910,7 +14910,7 @@
       </p:sp>
       <p:sp>
         <p:nvSpPr>
-          <p:cNvPr id="33" name="Shape 31"/>
+          <p:cNvPr id="34" name="Shape 31"/>
           <p:cNvSpPr/>
           <p:nvPr/>
         </p:nvSpPr>
@@ -14932,7 +14932,7 @@
       </p:sp>
       <p:sp>
         <p:nvSpPr>
-          <p:cNvPr id="34" name="Text 32"/>
+          <p:cNvPr id="35" name="Text 32"/>
           <p:cNvSpPr txBox="1"/>
           <p:nvPr/>
         </p:nvSpPr>
@@ -14971,7 +14971,7 @@
       </p:sp>
       <p:sp>
         <p:nvSpPr>
-          <p:cNvPr id="35" name="Shape 33"/>
+          <p:cNvPr id="36" name="Shape 33"/>
           <p:cNvSpPr/>
           <p:nvPr/>
         </p:nvSpPr>
@@ -14993,7 +14993,7 @@
       </p:sp>
       <p:sp>
         <p:nvSpPr>
-          <p:cNvPr id="36" name="Text 34"/>
+          <p:cNvPr id="37" name="Text 34"/>
           <p:cNvSpPr txBox="1"/>
           <p:nvPr/>
         </p:nvSpPr>
@@ -15032,7 +15032,7 @@
       </p:sp>
       <p:sp>
         <p:nvSpPr>
-          <p:cNvPr id="37" name="Text 35"/>
+          <p:cNvPr id="38" name="Text 35"/>
           <p:cNvSpPr txBox="1"/>
           <p:nvPr/>
         </p:nvSpPr>
@@ -15071,7 +15071,7 @@
       </p:sp>
       <p:sp>
         <p:nvSpPr>
-          <p:cNvPr id="38" name="Text 36"/>
+          <p:cNvPr id="39" name="Text 36"/>
           <p:cNvSpPr txBox="1"/>
           <p:nvPr/>
         </p:nvSpPr>
@@ -15142,7 +15142,7 @@
       </p:grpSpPr>
       <p:sp>
         <p:nvSpPr>
-          <p:cNvPr id="2" name="Text 0"/>
+          <p:cNvPr id="3" name="Text 0"/>
           <p:cNvSpPr txBox="1"/>
           <p:nvPr/>
         </p:nvSpPr>
@@ -15181,7 +15181,7 @@
       </p:sp>
       <p:sp>
         <p:nvSpPr>
-          <p:cNvPr id="3" name="Text 1"/>
+          <p:cNvPr id="4" name="Text 1"/>
           <p:cNvSpPr txBox="1"/>
           <p:nvPr/>
         </p:nvSpPr>
@@ -15223,7 +15223,7 @@
       </p:sp>
       <p:sp>
         <p:nvSpPr>
-          <p:cNvPr id="4" name="Shape 2"/>
+          <p:cNvPr id="5" name="Shape 2"/>
           <p:cNvSpPr/>
           <p:nvPr/>
         </p:nvSpPr>
@@ -15245,7 +15245,7 @@
       </p:sp>
       <p:sp>
         <p:nvSpPr>
-          <p:cNvPr id="5" name="Text 3"/>
+          <p:cNvPr id="6" name="Text 3"/>
           <p:cNvSpPr txBox="1"/>
           <p:nvPr/>
         </p:nvSpPr>
@@ -15287,7 +15287,7 @@
       </p:sp>
       <p:sp>
         <p:nvSpPr>
-          <p:cNvPr id="6" name="Shape 4"/>
+          <p:cNvPr id="7" name="Shape 4"/>
           <p:cNvSpPr/>
           <p:nvPr/>
         </p:nvSpPr>
@@ -15309,7 +15309,7 @@
       </p:sp>
       <p:sp>
         <p:nvSpPr>
-          <p:cNvPr id="7" name="Text 5"/>
+          <p:cNvPr id="8" name="Text 5"/>
           <p:cNvSpPr txBox="1"/>
           <p:nvPr/>
         </p:nvSpPr>
@@ -15348,7 +15348,7 @@
       </p:sp>
       <p:sp>
         <p:nvSpPr>
-          <p:cNvPr id="8" name="Shape 6"/>
+          <p:cNvPr id="9" name="Shape 6"/>
           <p:cNvSpPr/>
           <p:nvPr/>
         </p:nvSpPr>
@@ -15370,7 +15370,7 @@
       </p:sp>
       <p:sp>
         <p:nvSpPr>
-          <p:cNvPr id="9" name="Text 7"/>
+          <p:cNvPr id="10" name="Text 7"/>
           <p:cNvSpPr txBox="1"/>
           <p:nvPr/>
         </p:nvSpPr>
@@ -15412,7 +15412,7 @@
       </p:sp>
       <p:sp>
         <p:nvSpPr>
-          <p:cNvPr id="10" name="Shape 8"/>
+          <p:cNvPr id="11" name="Shape 8"/>
           <p:cNvSpPr/>
           <p:nvPr/>
         </p:nvSpPr>
@@ -15434,7 +15434,7 @@
       </p:sp>
       <p:sp>
         <p:nvSpPr>
-          <p:cNvPr id="11" name="Text 9"/>
+          <p:cNvPr id="12" name="Text 9"/>
           <p:cNvSpPr txBox="1"/>
           <p:nvPr/>
         </p:nvSpPr>
@@ -15473,7 +15473,7 @@
       </p:sp>
       <p:sp>
         <p:nvSpPr>
-          <p:cNvPr id="12" name="Shape 10"/>
+          <p:cNvPr id="13" name="Shape 10"/>
           <p:cNvSpPr/>
           <p:nvPr/>
         </p:nvSpPr>
@@ -15495,7 +15495,7 @@
       </p:sp>
       <p:sp>
         <p:nvSpPr>
-          <p:cNvPr id="13" name="Text 11"/>
+          <p:cNvPr id="14" name="Text 11"/>
           <p:cNvSpPr txBox="1"/>
           <p:nvPr/>
         </p:nvSpPr>
@@ -15537,7 +15537,7 @@
       </p:sp>
       <p:sp>
         <p:nvSpPr>
-          <p:cNvPr id="14" name="Shape 12"/>
+          <p:cNvPr id="15" name="Shape 12"/>
           <p:cNvSpPr/>
           <p:nvPr/>
         </p:nvSpPr>
@@ -15559,7 +15559,7 @@
       </p:sp>
       <p:sp>
         <p:nvSpPr>
-          <p:cNvPr id="15" name="Text 13"/>
+          <p:cNvPr id="16" name="Text 13"/>
           <p:cNvSpPr txBox="1"/>
           <p:nvPr/>
         </p:nvSpPr>
@@ -15598,7 +15598,7 @@
       </p:sp>
       <p:sp>
         <p:nvSpPr>
-          <p:cNvPr id="16" name="Shape 14"/>
+          <p:cNvPr id="17" name="Shape 14"/>
           <p:cNvSpPr/>
           <p:nvPr/>
         </p:nvSpPr>
@@ -15620,7 +15620,7 @@
       </p:sp>
       <p:sp>
         <p:nvSpPr>
-          <p:cNvPr id="17" name="Text 15"/>
+          <p:cNvPr id="18" name="Text 15"/>
           <p:cNvSpPr txBox="1"/>
           <p:nvPr/>
         </p:nvSpPr>
@@ -15662,7 +15662,7 @@
       </p:sp>
       <p:sp>
         <p:nvSpPr>
-          <p:cNvPr id="18" name="Shape 16"/>
+          <p:cNvPr id="19" name="Shape 16"/>
           <p:cNvSpPr/>
           <p:nvPr/>
         </p:nvSpPr>
@@ -15684,7 +15684,7 @@
       </p:sp>
       <p:sp>
         <p:nvSpPr>
-          <p:cNvPr id="19" name="Text 17"/>
+          <p:cNvPr id="20" name="Text 17"/>
           <p:cNvSpPr txBox="1"/>
           <p:nvPr/>
         </p:nvSpPr>
@@ -15723,7 +15723,7 @@
       </p:sp>
       <p:sp>
         <p:nvSpPr>
-          <p:cNvPr id="20" name="Text 18"/>
+          <p:cNvPr id="21" name="Text 18"/>
           <p:cNvSpPr txBox="1"/>
           <p:nvPr/>
         </p:nvSpPr>
@@ -15762,7 +15762,7 @@
       </p:sp>
       <p:sp>
         <p:nvSpPr>
-          <p:cNvPr id="21" name="Text 19"/>
+          <p:cNvPr id="22" name="Text 19"/>
           <p:cNvSpPr txBox="1"/>
           <p:nvPr/>
         </p:nvSpPr>
@@ -15833,7 +15833,7 @@
       </p:grpSpPr>
       <p:sp>
         <p:nvSpPr>
-          <p:cNvPr id="2" name="Text 0"/>
+          <p:cNvPr id="3" name="Text 0"/>
           <p:cNvSpPr txBox="1"/>
           <p:nvPr/>
         </p:nvSpPr>
@@ -15872,7 +15872,7 @@
       </p:sp>
       <p:sp>
         <p:nvSpPr>
-          <p:cNvPr id="3" name="Text 1"/>
+          <p:cNvPr id="4" name="Text 1"/>
           <p:cNvSpPr txBox="1"/>
           <p:nvPr/>
         </p:nvSpPr>
@@ -15914,7 +15914,7 @@
       </p:sp>
       <p:sp>
         <p:nvSpPr>
-          <p:cNvPr id="4" name="Shape 2"/>
+          <p:cNvPr id="5" name="Shape 2"/>
           <p:cNvSpPr/>
           <p:nvPr/>
         </p:nvSpPr>
@@ -15936,7 +15936,7 @@
       </p:sp>
       <p:sp>
         <p:nvSpPr>
-          <p:cNvPr id="5" name="Shape 3"/>
+          <p:cNvPr id="6" name="Shape 3"/>
           <p:cNvSpPr/>
           <p:nvPr/>
         </p:nvSpPr>
@@ -15956,7 +15956,7 @@
       </p:sp>
       <p:pic>
         <p:nvPicPr>
-          <p:cNvPr id="6" name="Image 0" descr="/tmp/claude-0/-home-user-riesgo/0ff9ff46-1396-5bd8-b3ac-2280dfbbbc55/scratchpad/work/gen/icons/eye_slash_white.png">    </p:cNvPr>
+          <p:cNvPr id="7" name="Image 0" descr="/tmp/claude-0/-home-user-riesgo/0ff9ff46-1396-5bd8-b3ac-2280dfbbbc55/scratchpad/work/gen/icons/eye_slash_white.png">    </p:cNvPr>
           <p:cNvPicPr>
             <a:picLocks noChangeAspect="1"/>
           </p:cNvPicPr>
@@ -15980,7 +15980,7 @@
       </p:pic>
       <p:sp>
         <p:nvSpPr>
-          <p:cNvPr id="7" name="Text 4"/>
+          <p:cNvPr id="8" name="Text 4"/>
           <p:cNvSpPr txBox="1"/>
           <p:nvPr/>
         </p:nvSpPr>
@@ -16022,7 +16022,7 @@
       </p:sp>
       <p:sp>
         <p:nvSpPr>
-          <p:cNvPr id="8" name="Text 5"/>
+          <p:cNvPr id="9" name="Text 5"/>
           <p:cNvSpPr txBox="1"/>
           <p:nvPr/>
         </p:nvSpPr>
@@ -16064,7 +16064,7 @@
       </p:sp>
       <p:sp>
         <p:nvSpPr>
-          <p:cNvPr id="9" name="Shape 6"/>
+          <p:cNvPr id="10" name="Shape 6"/>
           <p:cNvSpPr/>
           <p:nvPr/>
         </p:nvSpPr>
@@ -16086,7 +16086,7 @@
       </p:sp>
       <p:sp>
         <p:nvSpPr>
-          <p:cNvPr id="10" name="Shape 7"/>
+          <p:cNvPr id="11" name="Shape 7"/>
           <p:cNvSpPr/>
           <p:nvPr/>
         </p:nvSpPr>
@@ -16106,7 +16106,7 @@
       </p:sp>
       <p:pic>
         <p:nvPicPr>
-          <p:cNvPr id="11" name="Image 1" descr="/tmp/claude-0/-home-user-riesgo/0ff9ff46-1396-5bd8-b3ac-2280dfbbbc55/scratchpad/work/gen/icons/warning_triangle_white.png">    </p:cNvPr>
+          <p:cNvPr id="12" name="Image 1" descr="/tmp/claude-0/-home-user-riesgo/0ff9ff46-1396-5bd8-b3ac-2280dfbbbc55/scratchpad/work/gen/icons/warning_triangle_white.png">    </p:cNvPr>
           <p:cNvPicPr>
             <a:picLocks noChangeAspect="1"/>
           </p:cNvPicPr>
@@ -16130,7 +16130,7 @@
       </p:pic>
       <p:sp>
         <p:nvSpPr>
-          <p:cNvPr id="12" name="Text 8"/>
+          <p:cNvPr id="13" name="Text 8"/>
           <p:cNvSpPr txBox="1"/>
           <p:nvPr/>
         </p:nvSpPr>
@@ -16172,7 +16172,7 @@
       </p:sp>
       <p:sp>
         <p:nvSpPr>
-          <p:cNvPr id="13" name="Text 9"/>
+          <p:cNvPr id="14" name="Text 9"/>
           <p:cNvSpPr txBox="1"/>
           <p:nvPr/>
         </p:nvSpPr>
@@ -16214,7 +16214,7 @@
       </p:sp>
       <p:sp>
         <p:nvSpPr>
-          <p:cNvPr id="14" name="Shape 10"/>
+          <p:cNvPr id="15" name="Shape 10"/>
           <p:cNvSpPr/>
           <p:nvPr/>
         </p:nvSpPr>
@@ -16236,7 +16236,7 @@
       </p:sp>
       <p:sp>
         <p:nvSpPr>
-          <p:cNvPr id="15" name="Shape 11"/>
+          <p:cNvPr id="16" name="Shape 11"/>
           <p:cNvSpPr/>
           <p:nvPr/>
         </p:nvSpPr>
@@ -16256,7 +16256,7 @@
       </p:sp>
       <p:pic>
         <p:nvPicPr>
-          <p:cNvPr id="16" name="Image 2" descr="/tmp/claude-0/-home-user-riesgo/0ff9ff46-1396-5bd8-b3ac-2280dfbbbc55/scratchpad/work/gen/icons/form_white.png">    </p:cNvPr>
+          <p:cNvPr id="17" name="Image 2" descr="/tmp/claude-0/-home-user-riesgo/0ff9ff46-1396-5bd8-b3ac-2280dfbbbc55/scratchpad/work/gen/icons/form_white.png">    </p:cNvPr>
           <p:cNvPicPr>
             <a:picLocks noChangeAspect="1"/>
           </p:cNvPicPr>
@@ -16280,7 +16280,7 @@
       </p:pic>
       <p:sp>
         <p:nvSpPr>
-          <p:cNvPr id="17" name="Text 12"/>
+          <p:cNvPr id="18" name="Text 12"/>
           <p:cNvSpPr txBox="1"/>
           <p:nvPr/>
         </p:nvSpPr>
@@ -16322,7 +16322,7 @@
       </p:sp>
       <p:sp>
         <p:nvSpPr>
-          <p:cNvPr id="18" name="Text 13"/>
+          <p:cNvPr id="19" name="Text 13"/>
           <p:cNvSpPr txBox="1"/>
           <p:nvPr/>
         </p:nvSpPr>
@@ -16364,7 +16364,7 @@
       </p:sp>
       <p:sp>
         <p:nvSpPr>
-          <p:cNvPr id="19" name="Shape 14"/>
+          <p:cNvPr id="20" name="Shape 14"/>
           <p:cNvSpPr/>
           <p:nvPr/>
         </p:nvSpPr>
@@ -16386,7 +16386,7 @@
       </p:sp>
       <p:sp>
         <p:nvSpPr>
-          <p:cNvPr id="20" name="Shape 15"/>
+          <p:cNvPr id="21" name="Shape 15"/>
           <p:cNvSpPr/>
           <p:nvPr/>
         </p:nvSpPr>
@@ -16406,7 +16406,7 @@
       </p:sp>
       <p:pic>
         <p:nvPicPr>
-          <p:cNvPr id="21" name="Image 3" descr="/tmp/claude-0/-home-user-riesgo/0ff9ff46-1396-5bd8-b3ac-2280dfbbbc55/scratchpad/work/gen/icons/megaphone_white.png">    </p:cNvPr>
+          <p:cNvPr id="22" name="Image 3" descr="/tmp/claude-0/-home-user-riesgo/0ff9ff46-1396-5bd8-b3ac-2280dfbbbc55/scratchpad/work/gen/icons/megaphone_white.png">    </p:cNvPr>
           <p:cNvPicPr>
             <a:picLocks noChangeAspect="1"/>
           </p:cNvPicPr>
@@ -16430,7 +16430,7 @@
       </p:pic>
       <p:sp>
         <p:nvSpPr>
-          <p:cNvPr id="22" name="Text 16"/>
+          <p:cNvPr id="23" name="Text 16"/>
           <p:cNvSpPr txBox="1"/>
           <p:nvPr/>
         </p:nvSpPr>
@@ -16472,7 +16472,7 @@
       </p:sp>
       <p:sp>
         <p:nvSpPr>
-          <p:cNvPr id="23" name="Text 17"/>
+          <p:cNvPr id="24" name="Text 17"/>
           <p:cNvSpPr txBox="1"/>
           <p:nvPr/>
         </p:nvSpPr>
@@ -16514,7 +16514,7 @@
       </p:sp>
       <p:sp>
         <p:nvSpPr>
-          <p:cNvPr id="24" name="Text 18"/>
+          <p:cNvPr id="25" name="Text 18"/>
           <p:cNvSpPr txBox="1"/>
           <p:nvPr/>
         </p:nvSpPr>
@@ -16553,7 +16553,7 @@
       </p:sp>
       <p:sp>
         <p:nvSpPr>
-          <p:cNvPr id="25" name="Text 19"/>
+          <p:cNvPr id="26" name="Text 19"/>
           <p:cNvSpPr txBox="1"/>
           <p:nvPr/>
         </p:nvSpPr>
@@ -16624,7 +16624,7 @@
       </p:grpSpPr>
       <p:sp>
         <p:nvSpPr>
-          <p:cNvPr id="2" name="Shape 0"/>
+          <p:cNvPr id="3" name="Shape 0"/>
           <p:cNvSpPr/>
           <p:nvPr/>
         </p:nvSpPr>
@@ -16644,7 +16644,7 @@
       </p:sp>
       <p:sp>
         <p:nvSpPr>
-          <p:cNvPr id="3" name="Text 1"/>
+          <p:cNvPr id="4" name="Text 1"/>
           <p:cNvSpPr txBox="1"/>
           <p:nvPr/>
         </p:nvSpPr>
@@ -16683,7 +16683,7 @@
       </p:sp>
       <p:sp>
         <p:nvSpPr>
-          <p:cNvPr id="4" name="Shape 2"/>
+          <p:cNvPr id="5" name="Shape 2"/>
           <p:cNvSpPr/>
           <p:nvPr/>
         </p:nvSpPr>
@@ -16703,7 +16703,7 @@
       </p:sp>
       <p:pic>
         <p:nvPicPr>
-          <p:cNvPr id="5" name="Image 0" descr="/tmp/claude-0/-home-user-riesgo/0ff9ff46-1396-5bd8-b3ac-2280dfbbbc55/scratchpad/work/gen/icons/bank_navy.png">    </p:cNvPr>
+          <p:cNvPr id="6" name="Image 0" descr="/tmp/claude-0/-home-user-riesgo/0ff9ff46-1396-5bd8-b3ac-2280dfbbbc55/scratchpad/work/gen/icons/bank_navy.png">    </p:cNvPr>
           <p:cNvPicPr>
             <a:picLocks noChangeAspect="1"/>
           </p:cNvPicPr>
@@ -16727,7 +16727,7 @@
       </p:pic>
       <p:sp>
         <p:nvSpPr>
-          <p:cNvPr id="6" name="Text 3"/>
+          <p:cNvPr id="7" name="Text 3"/>
           <p:cNvSpPr txBox="1"/>
           <p:nvPr/>
         </p:nvSpPr>
@@ -16766,7 +16766,7 @@
       </p:sp>
       <p:sp>
         <p:nvSpPr>
-          <p:cNvPr id="7" name="Text 4"/>
+          <p:cNvPr id="8" name="Text 4"/>
           <p:cNvSpPr txBox="1"/>
           <p:nvPr/>
         </p:nvSpPr>
@@ -16828,7 +16828,7 @@
       </p:sp>
       <p:sp>
         <p:nvSpPr>
-          <p:cNvPr id="8" name="Text 5"/>
+          <p:cNvPr id="9" name="Text 5"/>
           <p:cNvSpPr txBox="1"/>
           <p:nvPr/>
         </p:nvSpPr>
@@ -16870,7 +16870,7 @@
       </p:sp>
       <p:pic>
         <p:nvPicPr>
-          <p:cNvPr id="9" name="Image 1" descr="/tmp/claude-0/-home-user-riesgo/0ff9ff46-1396-5bd8-b3ac-2280dfbbbc55/scratchpad/work/gen/logo_white.png">    </p:cNvPr>
+          <p:cNvPr id="10" name="Image 1" descr="/tmp/claude-0/-home-user-riesgo/0ff9ff46-1396-5bd8-b3ac-2280dfbbbc55/scratchpad/work/gen/logo_white.png">    </p:cNvPr>
           <p:cNvPicPr>
             <a:picLocks noChangeAspect="1"/>
           </p:cNvPicPr>
@@ -16894,7 +16894,7 @@
       </p:pic>
       <p:sp>
         <p:nvSpPr>
-          <p:cNvPr id="10" name="Text 6"/>
+          <p:cNvPr id="11" name="Text 6"/>
           <p:cNvSpPr txBox="1"/>
           <p:nvPr/>
         </p:nvSpPr>
@@ -16933,7 +16933,7 @@
       </p:sp>
       <p:sp>
         <p:nvSpPr>
-          <p:cNvPr id="11" name="Text 7"/>
+          <p:cNvPr id="12" name="Text 7"/>
           <p:cNvSpPr txBox="1"/>
           <p:nvPr/>
         </p:nvSpPr>
@@ -17004,7 +17004,7 @@
       </p:grpSpPr>
       <p:sp>
         <p:nvSpPr>
-          <p:cNvPr id="2" name="Text 0"/>
+          <p:cNvPr id="3" name="Text 0"/>
           <p:cNvSpPr txBox="1"/>
           <p:nvPr/>
         </p:nvSpPr>
@@ -17043,7 +17043,7 @@
       </p:sp>
       <p:sp>
         <p:nvSpPr>
-          <p:cNvPr id="3" name="Text 1"/>
+          <p:cNvPr id="4" name="Text 1"/>
           <p:cNvSpPr txBox="1"/>
           <p:nvPr/>
         </p:nvSpPr>
@@ -17085,7 +17085,7 @@
       </p:sp>
       <p:sp>
         <p:nvSpPr>
-          <p:cNvPr id="4" name="Shape 2"/>
+          <p:cNvPr id="5" name="Shape 2"/>
           <p:cNvSpPr/>
           <p:nvPr/>
         </p:nvSpPr>
@@ -17105,7 +17105,7 @@
       </p:sp>
       <p:pic>
         <p:nvPicPr>
-          <p:cNvPr id="5" name="Image 0" descr="/tmp/claude-0/-home-user-riesgo/0ff9ff46-1396-5bd8-b3ac-2280dfbbbc55/scratchpad/work/gen/icons/form_white.png">    </p:cNvPr>
+          <p:cNvPr id="6" name="Image 0" descr="/tmp/claude-0/-home-user-riesgo/0ff9ff46-1396-5bd8-b3ac-2280dfbbbc55/scratchpad/work/gen/icons/form_white.png">    </p:cNvPr>
           <p:cNvPicPr>
             <a:picLocks noChangeAspect="1"/>
           </p:cNvPicPr>
@@ -17129,7 +17129,7 @@
       </p:pic>
       <p:sp>
         <p:nvSpPr>
-          <p:cNvPr id="6" name="Text 3"/>
+          <p:cNvPr id="7" name="Text 3"/>
           <p:cNvSpPr txBox="1"/>
           <p:nvPr/>
         </p:nvSpPr>
@@ -17171,7 +17171,7 @@
       </p:sp>
       <p:pic>
         <p:nvPicPr>
-          <p:cNvPr id="7" name="Image 1" descr="/tmp/claude-0/-home-user-riesgo/0ff9ff46-1396-5bd8-b3ac-2280dfbbbc55/scratchpad/work/gen/icons/arrow_right_gray.png">    </p:cNvPr>
+          <p:cNvPr id="8" name="Image 1" descr="/tmp/claude-0/-home-user-riesgo/0ff9ff46-1396-5bd8-b3ac-2280dfbbbc55/scratchpad/work/gen/icons/arrow_right_gray.png">    </p:cNvPr>
           <p:cNvPicPr>
             <a:picLocks noChangeAspect="1"/>
           </p:cNvPicPr>
@@ -17195,7 +17195,7 @@
       </p:pic>
       <p:sp>
         <p:nvSpPr>
-          <p:cNvPr id="8" name="Shape 4"/>
+          <p:cNvPr id="9" name="Shape 4"/>
           <p:cNvSpPr/>
           <p:nvPr/>
         </p:nvSpPr>
@@ -17215,7 +17215,7 @@
       </p:sp>
       <p:pic>
         <p:nvPicPr>
-          <p:cNvPr id="9" name="Image 2" descr="/tmp/claude-0/-home-user-riesgo/0ff9ff46-1396-5bd8-b3ac-2280dfbbbc55/scratchpad/work/gen/icons/document_white.png">    </p:cNvPr>
+          <p:cNvPr id="10" name="Image 2" descr="/tmp/claude-0/-home-user-riesgo/0ff9ff46-1396-5bd8-b3ac-2280dfbbbc55/scratchpad/work/gen/icons/document_white.png">    </p:cNvPr>
           <p:cNvPicPr>
             <a:picLocks noChangeAspect="1"/>
           </p:cNvPicPr>
@@ -17239,7 +17239,7 @@
       </p:pic>
       <p:sp>
         <p:nvSpPr>
-          <p:cNvPr id="10" name="Text 5"/>
+          <p:cNvPr id="11" name="Text 5"/>
           <p:cNvSpPr txBox="1"/>
           <p:nvPr/>
         </p:nvSpPr>
@@ -17281,7 +17281,7 @@
       </p:sp>
       <p:pic>
         <p:nvPicPr>
-          <p:cNvPr id="11" name="Image 3" descr="/tmp/claude-0/-home-user-riesgo/0ff9ff46-1396-5bd8-b3ac-2280dfbbbc55/scratchpad/work/gen/icons/arrow_right_gray.png">    </p:cNvPr>
+          <p:cNvPr id="12" name="Image 3" descr="/tmp/claude-0/-home-user-riesgo/0ff9ff46-1396-5bd8-b3ac-2280dfbbbc55/scratchpad/work/gen/icons/arrow_right_gray.png">    </p:cNvPr>
           <p:cNvPicPr>
             <a:picLocks noChangeAspect="1"/>
           </p:cNvPicPr>
@@ -17305,7 +17305,7 @@
       </p:pic>
       <p:sp>
         <p:nvSpPr>
-          <p:cNvPr id="12" name="Shape 6"/>
+          <p:cNvPr id="13" name="Shape 6"/>
           <p:cNvSpPr/>
           <p:nvPr/>
         </p:nvSpPr>
@@ -17325,7 +17325,7 @@
       </p:sp>
       <p:pic>
         <p:nvPicPr>
-          <p:cNvPr id="13" name="Image 4" descr="/tmp/claude-0/-home-user-riesgo/0ff9ff46-1396-5bd8-b3ac-2280dfbbbc55/scratchpad/work/gen/icons/search_doc_white.png">    </p:cNvPr>
+          <p:cNvPr id="14" name="Image 4" descr="/tmp/claude-0/-home-user-riesgo/0ff9ff46-1396-5bd8-b3ac-2280dfbbbc55/scratchpad/work/gen/icons/search_doc_white.png">    </p:cNvPr>
           <p:cNvPicPr>
             <a:picLocks noChangeAspect="1"/>
           </p:cNvPicPr>
@@ -17349,7 +17349,7 @@
       </p:pic>
       <p:sp>
         <p:nvSpPr>
-          <p:cNvPr id="14" name="Text 7"/>
+          <p:cNvPr id="15" name="Text 7"/>
           <p:cNvSpPr txBox="1"/>
           <p:nvPr/>
         </p:nvSpPr>
@@ -17391,7 +17391,7 @@
       </p:sp>
       <p:pic>
         <p:nvPicPr>
-          <p:cNvPr id="15" name="Image 5" descr="/tmp/claude-0/-home-user-riesgo/0ff9ff46-1396-5bd8-b3ac-2280dfbbbc55/scratchpad/work/gen/icons/arrow_right_gray.png">    </p:cNvPr>
+          <p:cNvPr id="16" name="Image 5" descr="/tmp/claude-0/-home-user-riesgo/0ff9ff46-1396-5bd8-b3ac-2280dfbbbc55/scratchpad/work/gen/icons/arrow_right_gray.png">    </p:cNvPr>
           <p:cNvPicPr>
             <a:picLocks noChangeAspect="1"/>
           </p:cNvPicPr>
@@ -17415,7 +17415,7 @@
       </p:pic>
       <p:sp>
         <p:nvSpPr>
-          <p:cNvPr id="16" name="Shape 8"/>
+          <p:cNvPr id="17" name="Shape 8"/>
           <p:cNvSpPr/>
           <p:nvPr/>
         </p:nvSpPr>
@@ -17435,7 +17435,7 @@
       </p:sp>
       <p:pic>
         <p:nvPicPr>
-          <p:cNvPr id="17" name="Image 6" descr="/tmp/claude-0/-home-user-riesgo/0ff9ff46-1396-5bd8-b3ac-2280dfbbbc55/scratchpad/work/gen/icons/check_circle_white.png">    </p:cNvPr>
+          <p:cNvPr id="18" name="Image 6" descr="/tmp/claude-0/-home-user-riesgo/0ff9ff46-1396-5bd8-b3ac-2280dfbbbc55/scratchpad/work/gen/icons/check_circle_white.png">    </p:cNvPr>
           <p:cNvPicPr>
             <a:picLocks noChangeAspect="1"/>
           </p:cNvPicPr>
@@ -17459,7 +17459,7 @@
       </p:pic>
       <p:sp>
         <p:nvSpPr>
-          <p:cNvPr id="18" name="Text 9"/>
+          <p:cNvPr id="19" name="Text 9"/>
           <p:cNvSpPr txBox="1"/>
           <p:nvPr/>
         </p:nvSpPr>
@@ -17501,7 +17501,7 @@
       </p:sp>
       <p:pic>
         <p:nvPicPr>
-          <p:cNvPr id="19" name="Image 7" descr="/tmp/claude-0/-home-user-riesgo/0ff9ff46-1396-5bd8-b3ac-2280dfbbbc55/scratchpad/work/gen/icons/arrow_down_gray.png">    </p:cNvPr>
+          <p:cNvPr id="20" name="Image 7" descr="/tmp/claude-0/-home-user-riesgo/0ff9ff46-1396-5bd8-b3ac-2280dfbbbc55/scratchpad/work/gen/icons/arrow_down_gray.png">    </p:cNvPr>
           <p:cNvPicPr>
             <a:picLocks noChangeAspect="1"/>
           </p:cNvPicPr>
@@ -17525,7 +17525,7 @@
       </p:pic>
       <p:sp>
         <p:nvSpPr>
-          <p:cNvPr id="20" name="Shape 10"/>
+          <p:cNvPr id="21" name="Shape 10"/>
           <p:cNvSpPr/>
           <p:nvPr/>
         </p:nvSpPr>
@@ -17545,7 +17545,7 @@
       </p:sp>
       <p:pic>
         <p:nvPicPr>
-          <p:cNvPr id="21" name="Image 8" descr="/tmp/claude-0/-home-user-riesgo/0ff9ff46-1396-5bd8-b3ac-2280dfbbbc55/scratchpad/work/gen/icons/signature_white.png">    </p:cNvPr>
+          <p:cNvPr id="22" name="Image 8" descr="/tmp/claude-0/-home-user-riesgo/0ff9ff46-1396-5bd8-b3ac-2280dfbbbc55/scratchpad/work/gen/icons/signature_white.png">    </p:cNvPr>
           <p:cNvPicPr>
             <a:picLocks noChangeAspect="1"/>
           </p:cNvPicPr>
@@ -17569,7 +17569,7 @@
       </p:pic>
       <p:sp>
         <p:nvSpPr>
-          <p:cNvPr id="22" name="Text 11"/>
+          <p:cNvPr id="23" name="Text 11"/>
           <p:cNvSpPr txBox="1"/>
           <p:nvPr/>
         </p:nvSpPr>
@@ -17611,7 +17611,7 @@
       </p:sp>
       <p:pic>
         <p:nvPicPr>
-          <p:cNvPr id="23" name="Image 9" descr="/tmp/claude-0/-home-user-riesgo/0ff9ff46-1396-5bd8-b3ac-2280dfbbbc55/scratchpad/work/gen/icons/arrow_right_gray.png">    </p:cNvPr>
+          <p:cNvPr id="24" name="Image 9" descr="/tmp/claude-0/-home-user-riesgo/0ff9ff46-1396-5bd8-b3ac-2280dfbbbc55/scratchpad/work/gen/icons/arrow_right_gray.png">    </p:cNvPr>
           <p:cNvPicPr>
             <a:picLocks noChangeAspect="1"/>
           </p:cNvPicPr>
@@ -17635,7 +17635,7 @@
       </p:pic>
       <p:sp>
         <p:nvSpPr>
-          <p:cNvPr id="24" name="Shape 12"/>
+          <p:cNvPr id="25" name="Shape 12"/>
           <p:cNvSpPr/>
           <p:nvPr/>
         </p:nvSpPr>
@@ -17655,7 +17655,7 @@
       </p:sp>
       <p:pic>
         <p:nvPicPr>
-          <p:cNvPr id="25" name="Image 10" descr="/tmp/claude-0/-home-user-riesgo/0ff9ff46-1396-5bd8-b3ac-2280dfbbbc55/scratchpad/work/gen/icons/money_white.png">    </p:cNvPr>
+          <p:cNvPr id="26" name="Image 10" descr="/tmp/claude-0/-home-user-riesgo/0ff9ff46-1396-5bd8-b3ac-2280dfbbbc55/scratchpad/work/gen/icons/money_white.png">    </p:cNvPr>
           <p:cNvPicPr>
             <a:picLocks noChangeAspect="1"/>
           </p:cNvPicPr>
@@ -17679,7 +17679,7 @@
       </p:pic>
       <p:sp>
         <p:nvSpPr>
-          <p:cNvPr id="26" name="Text 13"/>
+          <p:cNvPr id="27" name="Text 13"/>
           <p:cNvSpPr txBox="1"/>
           <p:nvPr/>
         </p:nvSpPr>
@@ -17721,7 +17721,7 @@
       </p:sp>
       <p:pic>
         <p:nvPicPr>
-          <p:cNvPr id="27" name="Image 11" descr="/tmp/claude-0/-home-user-riesgo/0ff9ff46-1396-5bd8-b3ac-2280dfbbbc55/scratchpad/work/gen/icons/arrow_right_gray.png">    </p:cNvPr>
+          <p:cNvPr id="28" name="Image 11" descr="/tmp/claude-0/-home-user-riesgo/0ff9ff46-1396-5bd8-b3ac-2280dfbbbc55/scratchpad/work/gen/icons/arrow_right_gray.png">    </p:cNvPr>
           <p:cNvPicPr>
             <a:picLocks noChangeAspect="1"/>
           </p:cNvPicPr>
@@ -17745,7 +17745,7 @@
       </p:pic>
       <p:sp>
         <p:nvSpPr>
-          <p:cNvPr id="28" name="Shape 14"/>
+          <p:cNvPr id="29" name="Shape 14"/>
           <p:cNvSpPr/>
           <p:nvPr/>
         </p:nvSpPr>
@@ -17765,7 +17765,7 @@
       </p:sp>
       <p:pic>
         <p:nvPicPr>
-          <p:cNvPr id="29" name="Image 12" descr="/tmp/claude-0/-home-user-riesgo/0ff9ff46-1396-5bd8-b3ac-2280dfbbbc55/scratchpad/work/gen/icons/binoculars_white.png">    </p:cNvPr>
+          <p:cNvPr id="30" name="Image 12" descr="/tmp/claude-0/-home-user-riesgo/0ff9ff46-1396-5bd8-b3ac-2280dfbbbc55/scratchpad/work/gen/icons/binoculars_white.png">    </p:cNvPr>
           <p:cNvPicPr>
             <a:picLocks noChangeAspect="1"/>
           </p:cNvPicPr>
@@ -17789,7 +17789,7 @@
       </p:pic>
       <p:sp>
         <p:nvSpPr>
-          <p:cNvPr id="30" name="Text 15"/>
+          <p:cNvPr id="31" name="Text 15"/>
           <p:cNvSpPr txBox="1"/>
           <p:nvPr/>
         </p:nvSpPr>
@@ -17831,7 +17831,7 @@
       </p:sp>
       <p:pic>
         <p:nvPicPr>
-          <p:cNvPr id="31" name="Image 13" descr="/tmp/claude-0/-home-user-riesgo/0ff9ff46-1396-5bd8-b3ac-2280dfbbbc55/scratchpad/work/gen/icons/arrow_right_gray.png">    </p:cNvPr>
+          <p:cNvPr id="32" name="Image 13" descr="/tmp/claude-0/-home-user-riesgo/0ff9ff46-1396-5bd8-b3ac-2280dfbbbc55/scratchpad/work/gen/icons/arrow_right_gray.png">    </p:cNvPr>
           <p:cNvPicPr>
             <a:picLocks noChangeAspect="1"/>
           </p:cNvPicPr>
@@ -17855,7 +17855,7 @@
       </p:pic>
       <p:sp>
         <p:nvSpPr>
-          <p:cNvPr id="32" name="Shape 16"/>
+          <p:cNvPr id="33" name="Shape 16"/>
           <p:cNvSpPr/>
           <p:nvPr/>
         </p:nvSpPr>
@@ -17875,7 +17875,7 @@
       </p:sp>
       <p:pic>
         <p:nvPicPr>
-          <p:cNvPr id="33" name="Image 14" descr="/tmp/claude-0/-home-user-riesgo/0ff9ff46-1396-5bd8-b3ac-2280dfbbbc55/scratchpad/work/gen/icons/coins_white.png">    </p:cNvPr>
+          <p:cNvPr id="34" name="Image 14" descr="/tmp/claude-0/-home-user-riesgo/0ff9ff46-1396-5bd8-b3ac-2280dfbbbc55/scratchpad/work/gen/icons/coins_white.png">    </p:cNvPr>
           <p:cNvPicPr>
             <a:picLocks noChangeAspect="1"/>
           </p:cNvPicPr>
@@ -17899,7 +17899,7 @@
       </p:pic>
       <p:sp>
         <p:nvSpPr>
-          <p:cNvPr id="34" name="Text 17"/>
+          <p:cNvPr id="35" name="Text 17"/>
           <p:cNvSpPr txBox="1"/>
           <p:nvPr/>
         </p:nvSpPr>
@@ -17941,7 +17941,7 @@
       </p:sp>
       <p:sp>
         <p:nvSpPr>
-          <p:cNvPr id="35" name="Text 18"/>
+          <p:cNvPr id="36" name="Text 18"/>
           <p:cNvSpPr txBox="1"/>
           <p:nvPr/>
         </p:nvSpPr>
@@ -17980,7 +17980,7 @@
       </p:sp>
       <p:sp>
         <p:nvSpPr>
-          <p:cNvPr id="36" name="Text 19"/>
+          <p:cNvPr id="37" name="Text 19"/>
           <p:cNvSpPr txBox="1"/>
           <p:nvPr/>
         </p:nvSpPr>
@@ -18051,7 +18051,7 @@
       </p:grpSpPr>
       <p:sp>
         <p:nvSpPr>
-          <p:cNvPr id="2" name="Shape 0"/>
+          <p:cNvPr id="3" name="Shape 0"/>
           <p:cNvSpPr/>
           <p:nvPr/>
         </p:nvSpPr>
@@ -18071,7 +18071,7 @@
       </p:sp>
       <p:sp>
         <p:nvSpPr>
-          <p:cNvPr id="3" name="Text 1"/>
+          <p:cNvPr id="4" name="Text 1"/>
           <p:cNvSpPr txBox="1"/>
           <p:nvPr/>
         </p:nvSpPr>
@@ -18110,7 +18110,7 @@
       </p:sp>
       <p:sp>
         <p:nvSpPr>
-          <p:cNvPr id="4" name="Text 2"/>
+          <p:cNvPr id="5" name="Text 2"/>
           <p:cNvSpPr txBox="1"/>
           <p:nvPr/>
         </p:nvSpPr>
@@ -18152,7 +18152,7 @@
       </p:sp>
       <p:sp>
         <p:nvSpPr>
-          <p:cNvPr id="5" name="Text 3"/>
+          <p:cNvPr id="6" name="Text 3"/>
           <p:cNvSpPr txBox="1"/>
           <p:nvPr/>
         </p:nvSpPr>
@@ -18191,7 +18191,7 @@
       </p:sp>
       <p:sp>
         <p:nvSpPr>
-          <p:cNvPr id="6" name="Text 4"/>
+          <p:cNvPr id="7" name="Text 4"/>
           <p:cNvSpPr txBox="1"/>
           <p:nvPr/>
         </p:nvSpPr>
@@ -18230,7 +18230,7 @@
       </p:sp>
       <p:sp>
         <p:nvSpPr>
-          <p:cNvPr id="7" name="Text 5"/>
+          <p:cNvPr id="8" name="Text 5"/>
           <p:cNvSpPr txBox="1"/>
           <p:nvPr/>
         </p:nvSpPr>
@@ -18301,7 +18301,7 @@
       </p:grpSpPr>
       <p:sp>
         <p:nvSpPr>
-          <p:cNvPr id="2" name="Text 0"/>
+          <p:cNvPr id="3" name="Text 0"/>
           <p:cNvSpPr txBox="1"/>
           <p:nvPr/>
         </p:nvSpPr>
@@ -18340,7 +18340,7 @@
       </p:sp>
       <p:sp>
         <p:nvSpPr>
-          <p:cNvPr id="3" name="Text 1"/>
+          <p:cNvPr id="4" name="Text 1"/>
           <p:cNvSpPr txBox="1"/>
           <p:nvPr/>
         </p:nvSpPr>
@@ -18382,7 +18382,7 @@
       </p:sp>
       <p:sp>
         <p:nvSpPr>
-          <p:cNvPr id="4" name="Text 2"/>
+          <p:cNvPr id="5" name="Text 2"/>
           <p:cNvSpPr txBox="1"/>
           <p:nvPr/>
         </p:nvSpPr>
@@ -18421,7 +18421,7 @@
       </p:sp>
       <p:sp>
         <p:nvSpPr>
-          <p:cNvPr id="5" name="Shape 3"/>
+          <p:cNvPr id="6" name="Shape 3"/>
           <p:cNvSpPr/>
           <p:nvPr/>
         </p:nvSpPr>
@@ -18443,7 +18443,7 @@
       </p:sp>
       <p:sp>
         <p:nvSpPr>
-          <p:cNvPr id="6" name="Shape 4"/>
+          <p:cNvPr id="7" name="Shape 4"/>
           <p:cNvSpPr/>
           <p:nvPr/>
         </p:nvSpPr>
@@ -18463,7 +18463,7 @@
       </p:sp>
       <p:pic>
         <p:nvPicPr>
-          <p:cNvPr id="7" name="Image 0" descr="/tmp/claude-0/-home-user-riesgo/0ff9ff46-1396-5bd8-b3ac-2280dfbbbc55/scratchpad/work/gen/icons/people_group_white.png">    </p:cNvPr>
+          <p:cNvPr id="8" name="Image 0" descr="/tmp/claude-0/-home-user-riesgo/0ff9ff46-1396-5bd8-b3ac-2280dfbbbc55/scratchpad/work/gen/icons/people_group_white.png">    </p:cNvPr>
           <p:cNvPicPr>
             <a:picLocks noChangeAspect="1"/>
           </p:cNvPicPr>
@@ -18487,7 +18487,7 @@
       </p:pic>
       <p:sp>
         <p:nvSpPr>
-          <p:cNvPr id="8" name="Text 5"/>
+          <p:cNvPr id="9" name="Text 5"/>
           <p:cNvSpPr txBox="1"/>
           <p:nvPr/>
         </p:nvSpPr>
@@ -18529,7 +18529,7 @@
       </p:sp>
       <p:sp>
         <p:nvSpPr>
-          <p:cNvPr id="9" name="Text 6"/>
+          <p:cNvPr id="10" name="Text 6"/>
           <p:cNvSpPr txBox="1"/>
           <p:nvPr/>
         </p:nvSpPr>
@@ -18571,7 +18571,7 @@
       </p:sp>
       <p:sp>
         <p:nvSpPr>
-          <p:cNvPr id="10" name="Shape 7"/>
+          <p:cNvPr id="11" name="Shape 7"/>
           <p:cNvSpPr/>
           <p:nvPr/>
         </p:nvSpPr>
@@ -18593,7 +18593,7 @@
       </p:sp>
       <p:sp>
         <p:nvSpPr>
-          <p:cNvPr id="11" name="Shape 8"/>
+          <p:cNvPr id="12" name="Shape 8"/>
           <p:cNvSpPr/>
           <p:nvPr/>
         </p:nvSpPr>
@@ -18613,7 +18613,7 @@
       </p:sp>
       <p:pic>
         <p:nvPicPr>
-          <p:cNvPr id="12" name="Image 1" descr="/tmp/claude-0/-home-user-riesgo/0ff9ff46-1396-5bd8-b3ac-2280dfbbbc55/scratchpad/work/gen/icons/shield_check_white.png">    </p:cNvPr>
+          <p:cNvPr id="13" name="Image 1" descr="/tmp/claude-0/-home-user-riesgo/0ff9ff46-1396-5bd8-b3ac-2280dfbbbc55/scratchpad/work/gen/icons/shield_check_white.png">    </p:cNvPr>
           <p:cNvPicPr>
             <a:picLocks noChangeAspect="1"/>
           </p:cNvPicPr>
@@ -18637,7 +18637,7 @@
       </p:pic>
       <p:sp>
         <p:nvSpPr>
-          <p:cNvPr id="13" name="Text 9"/>
+          <p:cNvPr id="14" name="Text 9"/>
           <p:cNvSpPr txBox="1"/>
           <p:nvPr/>
         </p:nvSpPr>
@@ -18679,7 +18679,7 @@
       </p:sp>
       <p:sp>
         <p:nvSpPr>
-          <p:cNvPr id="14" name="Text 10"/>
+          <p:cNvPr id="15" name="Text 10"/>
           <p:cNvSpPr txBox="1"/>
           <p:nvPr/>
         </p:nvSpPr>
@@ -18721,7 +18721,7 @@
       </p:sp>
       <p:sp>
         <p:nvSpPr>
-          <p:cNvPr id="15" name="Shape 11"/>
+          <p:cNvPr id="16" name="Shape 11"/>
           <p:cNvSpPr/>
           <p:nvPr/>
         </p:nvSpPr>
@@ -18743,7 +18743,7 @@
       </p:sp>
       <p:sp>
         <p:nvSpPr>
-          <p:cNvPr id="16" name="Shape 12"/>
+          <p:cNvPr id="17" name="Shape 12"/>
           <p:cNvSpPr/>
           <p:nvPr/>
         </p:nvSpPr>
@@ -18763,7 +18763,7 @@
       </p:sp>
       <p:pic>
         <p:nvPicPr>
-          <p:cNvPr id="17" name="Image 2" descr="/tmp/claude-0/-home-user-riesgo/0ff9ff46-1396-5bd8-b3ac-2280dfbbbc55/scratchpad/work/gen/icons/medal_white.png">    </p:cNvPr>
+          <p:cNvPr id="18" name="Image 2" descr="/tmp/claude-0/-home-user-riesgo/0ff9ff46-1396-5bd8-b3ac-2280dfbbbc55/scratchpad/work/gen/icons/medal_white.png">    </p:cNvPr>
           <p:cNvPicPr>
             <a:picLocks noChangeAspect="1"/>
           </p:cNvPicPr>
@@ -18787,7 +18787,7 @@
       </p:pic>
       <p:sp>
         <p:nvSpPr>
-          <p:cNvPr id="18" name="Text 13"/>
+          <p:cNvPr id="19" name="Text 13"/>
           <p:cNvSpPr txBox="1"/>
           <p:nvPr/>
         </p:nvSpPr>
@@ -18829,7 +18829,7 @@
       </p:sp>
       <p:sp>
         <p:nvSpPr>
-          <p:cNvPr id="19" name="Text 14"/>
+          <p:cNvPr id="20" name="Text 14"/>
           <p:cNvSpPr txBox="1"/>
           <p:nvPr/>
         </p:nvSpPr>
@@ -18871,7 +18871,7 @@
       </p:sp>
       <p:sp>
         <p:nvSpPr>
-          <p:cNvPr id="20" name="Text 15"/>
+          <p:cNvPr id="21" name="Text 15"/>
           <p:cNvSpPr txBox="1"/>
           <p:nvPr/>
         </p:nvSpPr>
@@ -18910,7 +18910,7 @@
       </p:sp>
       <p:sp>
         <p:nvSpPr>
-          <p:cNvPr id="21" name="Text 16"/>
+          <p:cNvPr id="22" name="Text 16"/>
           <p:cNvSpPr txBox="1"/>
           <p:nvPr/>
         </p:nvSpPr>
@@ -18981,7 +18981,7 @@
       </p:grpSpPr>
       <p:sp>
         <p:nvSpPr>
-          <p:cNvPr id="2" name="Shape 0"/>
+          <p:cNvPr id="3" name="Shape 0"/>
           <p:cNvSpPr/>
           <p:nvPr/>
         </p:nvSpPr>
@@ -19001,7 +19001,7 @@
       </p:sp>
       <p:sp>
         <p:nvSpPr>
-          <p:cNvPr id="3" name="Text 1"/>
+          <p:cNvPr id="4" name="Text 1"/>
           <p:cNvSpPr txBox="1"/>
           <p:nvPr/>
         </p:nvSpPr>
@@ -19040,7 +19040,7 @@
       </p:sp>
       <p:sp>
         <p:nvSpPr>
-          <p:cNvPr id="4" name="Shape 2"/>
+          <p:cNvPr id="5" name="Shape 2"/>
           <p:cNvSpPr/>
           <p:nvPr/>
         </p:nvSpPr>
@@ -19060,7 +19060,7 @@
       </p:sp>
       <p:pic>
         <p:nvPicPr>
-          <p:cNvPr id="5" name="Image 0" descr="/tmp/claude-0/-home-user-riesgo/0ff9ff46-1396-5bd8-b3ac-2280dfbbbc55/scratchpad/work/gen/icons/handshake_navy.png">    </p:cNvPr>
+          <p:cNvPr id="6" name="Image 0" descr="/tmp/claude-0/-home-user-riesgo/0ff9ff46-1396-5bd8-b3ac-2280dfbbbc55/scratchpad/work/gen/icons/handshake_navy.png">    </p:cNvPr>
           <p:cNvPicPr>
             <a:picLocks noChangeAspect="1"/>
           </p:cNvPicPr>
@@ -19084,7 +19084,7 @@
       </p:pic>
       <p:sp>
         <p:nvSpPr>
-          <p:cNvPr id="6" name="Text 3"/>
+          <p:cNvPr id="7" name="Text 3"/>
           <p:cNvSpPr txBox="1"/>
           <p:nvPr/>
         </p:nvSpPr>
@@ -19123,7 +19123,7 @@
       </p:sp>
       <p:sp>
         <p:nvSpPr>
-          <p:cNvPr id="7" name="Text 4"/>
+          <p:cNvPr id="8" name="Text 4"/>
           <p:cNvSpPr txBox="1"/>
           <p:nvPr/>
         </p:nvSpPr>
@@ -19185,7 +19185,7 @@
       </p:sp>
       <p:sp>
         <p:nvSpPr>
-          <p:cNvPr id="8" name="Text 5"/>
+          <p:cNvPr id="9" name="Text 5"/>
           <p:cNvSpPr txBox="1"/>
           <p:nvPr/>
         </p:nvSpPr>
@@ -19227,7 +19227,7 @@
       </p:sp>
       <p:pic>
         <p:nvPicPr>
-          <p:cNvPr id="9" name="Image 1" descr="/tmp/claude-0/-home-user-riesgo/0ff9ff46-1396-5bd8-b3ac-2280dfbbbc55/scratchpad/work/gen/logo_white.png">    </p:cNvPr>
+          <p:cNvPr id="10" name="Image 1" descr="/tmp/claude-0/-home-user-riesgo/0ff9ff46-1396-5bd8-b3ac-2280dfbbbc55/scratchpad/work/gen/logo_white.png">    </p:cNvPr>
           <p:cNvPicPr>
             <a:picLocks noChangeAspect="1"/>
           </p:cNvPicPr>
@@ -19251,7 +19251,7 @@
       </p:pic>
       <p:sp>
         <p:nvSpPr>
-          <p:cNvPr id="10" name="Text 6"/>
+          <p:cNvPr id="11" name="Text 6"/>
           <p:cNvSpPr txBox="1"/>
           <p:nvPr/>
         </p:nvSpPr>
@@ -19290,7 +19290,7 @@
       </p:sp>
       <p:sp>
         <p:nvSpPr>
-          <p:cNvPr id="11" name="Text 7"/>
+          <p:cNvPr id="12" name="Text 7"/>
           <p:cNvSpPr txBox="1"/>
           <p:nvPr/>
         </p:nvSpPr>
@@ -19361,7 +19361,7 @@
       </p:grpSpPr>
       <p:sp>
         <p:nvSpPr>
-          <p:cNvPr id="2" name="Text 0"/>
+          <p:cNvPr id="3" name="Text 0"/>
           <p:cNvSpPr txBox="1"/>
           <p:nvPr/>
         </p:nvSpPr>
@@ -19400,7 +19400,7 @@
       </p:sp>
       <p:sp>
         <p:nvSpPr>
-          <p:cNvPr id="3" name="Text 1"/>
+          <p:cNvPr id="4" name="Text 1"/>
           <p:cNvSpPr txBox="1"/>
           <p:nvPr/>
         </p:nvSpPr>
@@ -19442,7 +19442,7 @@
       </p:sp>
       <p:sp>
         <p:nvSpPr>
-          <p:cNvPr id="4" name="Text 2"/>
+          <p:cNvPr id="5" name="Text 2"/>
           <p:cNvSpPr txBox="1"/>
           <p:nvPr/>
         </p:nvSpPr>
@@ -19481,7 +19481,7 @@
       </p:sp>
       <p:sp>
         <p:nvSpPr>
-          <p:cNvPr id="5" name="Shape 3"/>
+          <p:cNvPr id="6" name="Shape 3"/>
           <p:cNvSpPr/>
           <p:nvPr/>
         </p:nvSpPr>
@@ -19503,7 +19503,7 @@
       </p:sp>
       <p:sp>
         <p:nvSpPr>
-          <p:cNvPr id="6" name="Shape 4"/>
+          <p:cNvPr id="7" name="Shape 4"/>
           <p:cNvSpPr/>
           <p:nvPr/>
         </p:nvSpPr>
@@ -19523,7 +19523,7 @@
       </p:sp>
       <p:pic>
         <p:nvPicPr>
-          <p:cNvPr id="7" name="Image 0" descr="/tmp/claude-0/-home-user-riesgo/0ff9ff46-1396-5bd8-b3ac-2280dfbbbc55/scratchpad/work/gen/icons/document_navy.png">    </p:cNvPr>
+          <p:cNvPr id="8" name="Image 0" descr="/tmp/claude-0/-home-user-riesgo/0ff9ff46-1396-5bd8-b3ac-2280dfbbbc55/scratchpad/work/gen/icons/document_navy.png">    </p:cNvPr>
           <p:cNvPicPr>
             <a:picLocks noChangeAspect="1"/>
           </p:cNvPicPr>
@@ -19547,7 +19547,7 @@
       </p:pic>
       <p:sp>
         <p:nvSpPr>
-          <p:cNvPr id="8" name="Shape 5"/>
+          <p:cNvPr id="9" name="Shape 5"/>
           <p:cNvSpPr/>
           <p:nvPr/>
         </p:nvSpPr>
@@ -19567,7 +19567,7 @@
       </p:sp>
       <p:sp>
         <p:nvSpPr>
-          <p:cNvPr id="9" name="Text 6"/>
+          <p:cNvPr id="10" name="Text 6"/>
           <p:cNvSpPr txBox="1"/>
           <p:nvPr/>
         </p:nvSpPr>
@@ -19606,7 +19606,7 @@
       </p:sp>
       <p:sp>
         <p:nvSpPr>
-          <p:cNvPr id="10" name="Shape 7"/>
+          <p:cNvPr id="11" name="Shape 7"/>
           <p:cNvSpPr/>
           <p:nvPr/>
         </p:nvSpPr>
@@ -19626,7 +19626,7 @@
       </p:sp>
       <p:pic>
         <p:nvPicPr>
-          <p:cNvPr id="11" name="Image 1" descr="/tmp/claude-0/-home-user-riesgo/0ff9ff46-1396-5bd8-b3ac-2280dfbbbc55/scratchpad/work/gen/icons/cable_navy.png">    </p:cNvPr>
+          <p:cNvPr id="12" name="Image 1" descr="/tmp/claude-0/-home-user-riesgo/0ff9ff46-1396-5bd8-b3ac-2280dfbbbc55/scratchpad/work/gen/icons/cable_navy.png">    </p:cNvPr>
           <p:cNvPicPr>
             <a:picLocks noChangeAspect="1"/>
           </p:cNvPicPr>
@@ -19650,7 +19650,7 @@
       </p:pic>
       <p:sp>
         <p:nvSpPr>
-          <p:cNvPr id="12" name="Shape 8"/>
+          <p:cNvPr id="13" name="Shape 8"/>
           <p:cNvSpPr/>
           <p:nvPr/>
         </p:nvSpPr>
@@ -19670,7 +19670,7 @@
       </p:sp>
       <p:sp>
         <p:nvSpPr>
-          <p:cNvPr id="13" name="Text 9"/>
+          <p:cNvPr id="14" name="Text 9"/>
           <p:cNvSpPr txBox="1"/>
           <p:nvPr/>
         </p:nvSpPr>
@@ -19709,7 +19709,7 @@
       </p:sp>
       <p:sp>
         <p:nvSpPr>
-          <p:cNvPr id="14" name="Shape 10"/>
+          <p:cNvPr id="15" name="Shape 10"/>
           <p:cNvSpPr/>
           <p:nvPr/>
         </p:nvSpPr>
@@ -19729,7 +19729,7 @@
       </p:sp>
       <p:pic>
         <p:nvPicPr>
-          <p:cNvPr id="15" name="Image 2" descr="/tmp/claude-0/-home-user-riesgo/0ff9ff46-1396-5bd8-b3ac-2280dfbbbc55/scratchpad/work/gen/icons/password_navy.png">    </p:cNvPr>
+          <p:cNvPr id="16" name="Image 2" descr="/tmp/claude-0/-home-user-riesgo/0ff9ff46-1396-5bd8-b3ac-2280dfbbbc55/scratchpad/work/gen/icons/password_navy.png">    </p:cNvPr>
           <p:cNvPicPr>
             <a:picLocks noChangeAspect="1"/>
           </p:cNvPicPr>
@@ -19753,7 +19753,7 @@
       </p:pic>
       <p:sp>
         <p:nvSpPr>
-          <p:cNvPr id="16" name="Shape 11"/>
+          <p:cNvPr id="17" name="Shape 11"/>
           <p:cNvSpPr/>
           <p:nvPr/>
         </p:nvSpPr>
@@ -19773,7 +19773,7 @@
       </p:sp>
       <p:sp>
         <p:nvSpPr>
-          <p:cNvPr id="17" name="Text 12"/>
+          <p:cNvPr id="18" name="Text 12"/>
           <p:cNvSpPr txBox="1"/>
           <p:nvPr/>
         </p:nvSpPr>
@@ -19812,7 +19812,7 @@
       </p:sp>
       <p:sp>
         <p:nvSpPr>
-          <p:cNvPr id="18" name="Shape 13"/>
+          <p:cNvPr id="19" name="Shape 13"/>
           <p:cNvSpPr/>
           <p:nvPr/>
         </p:nvSpPr>
@@ -19832,7 +19832,7 @@
       </p:sp>
       <p:pic>
         <p:nvPicPr>
-          <p:cNvPr id="19" name="Image 3" descr="/tmp/claude-0/-home-user-riesgo/0ff9ff46-1396-5bd8-b3ac-2280dfbbbc55/scratchpad/work/gen/icons/door_open_navy.png">    </p:cNvPr>
+          <p:cNvPr id="20" name="Image 3" descr="/tmp/claude-0/-home-user-riesgo/0ff9ff46-1396-5bd8-b3ac-2280dfbbbc55/scratchpad/work/gen/icons/door_open_navy.png">    </p:cNvPr>
           <p:cNvPicPr>
             <a:picLocks noChangeAspect="1"/>
           </p:cNvPicPr>
@@ -19856,7 +19856,7 @@
       </p:pic>
       <p:sp>
         <p:nvSpPr>
-          <p:cNvPr id="20" name="Shape 14"/>
+          <p:cNvPr id="21" name="Shape 14"/>
           <p:cNvSpPr/>
           <p:nvPr/>
         </p:nvSpPr>
@@ -19876,7 +19876,7 @@
       </p:sp>
       <p:sp>
         <p:nvSpPr>
-          <p:cNvPr id="21" name="Text 15"/>
+          <p:cNvPr id="22" name="Text 15"/>
           <p:cNvSpPr txBox="1"/>
           <p:nvPr/>
         </p:nvSpPr>
@@ -19915,7 +19915,7 @@
       </p:sp>
       <p:sp>
         <p:nvSpPr>
-          <p:cNvPr id="22" name="Shape 16"/>
+          <p:cNvPr id="23" name="Shape 16"/>
           <p:cNvSpPr/>
           <p:nvPr/>
         </p:nvSpPr>
@@ -19935,7 +19935,7 @@
       </p:sp>
       <p:pic>
         <p:nvPicPr>
-          <p:cNvPr id="23" name="Image 4" descr="/tmp/claude-0/-home-user-riesgo/0ff9ff46-1396-5bd8-b3ac-2280dfbbbc55/scratchpad/work/gen/icons/x_circle_navy.png">    </p:cNvPr>
+          <p:cNvPr id="24" name="Image 4" descr="/tmp/claude-0/-home-user-riesgo/0ff9ff46-1396-5bd8-b3ac-2280dfbbbc55/scratchpad/work/gen/icons/x_circle_navy.png">    </p:cNvPr>
           <p:cNvPicPr>
             <a:picLocks noChangeAspect="1"/>
           </p:cNvPicPr>
@@ -19959,7 +19959,7 @@
       </p:pic>
       <p:sp>
         <p:nvSpPr>
-          <p:cNvPr id="24" name="Shape 17"/>
+          <p:cNvPr id="25" name="Shape 17"/>
           <p:cNvSpPr/>
           <p:nvPr/>
         </p:nvSpPr>
@@ -19979,7 +19979,7 @@
       </p:sp>
       <p:sp>
         <p:nvSpPr>
-          <p:cNvPr id="25" name="Text 18"/>
+          <p:cNvPr id="26" name="Text 18"/>
           <p:cNvSpPr txBox="1"/>
           <p:nvPr/>
         </p:nvSpPr>
@@ -20018,7 +20018,7 @@
       </p:sp>
       <p:sp>
         <p:nvSpPr>
-          <p:cNvPr id="26" name="Shape 19"/>
+          <p:cNvPr id="27" name="Shape 19"/>
           <p:cNvSpPr/>
           <p:nvPr/>
         </p:nvSpPr>
@@ -20038,7 +20038,7 @@
       </p:sp>
       <p:pic>
         <p:nvPicPr>
-          <p:cNvPr id="27" name="Image 5" descr="/tmp/claude-0/-home-user-riesgo/0ff9ff46-1396-5bd8-b3ac-2280dfbbbc55/scratchpad/work/gen/icons/computer_navy.png">    </p:cNvPr>
+          <p:cNvPr id="28" name="Image 5" descr="/tmp/claude-0/-home-user-riesgo/0ff9ff46-1396-5bd8-b3ac-2280dfbbbc55/scratchpad/work/gen/icons/computer_navy.png">    </p:cNvPr>
           <p:cNvPicPr>
             <a:picLocks noChangeAspect="1"/>
           </p:cNvPicPr>
@@ -20062,7 +20062,7 @@
       </p:pic>
       <p:sp>
         <p:nvSpPr>
-          <p:cNvPr id="28" name="Shape 20"/>
+          <p:cNvPr id="29" name="Shape 20"/>
           <p:cNvSpPr/>
           <p:nvPr/>
         </p:nvSpPr>
@@ -20082,7 +20082,7 @@
       </p:sp>
       <p:sp>
         <p:nvSpPr>
-          <p:cNvPr id="29" name="Text 21"/>
+          <p:cNvPr id="30" name="Text 21"/>
           <p:cNvSpPr txBox="1"/>
           <p:nvPr/>
         </p:nvSpPr>
@@ -20121,7 +20121,7 @@
       </p:sp>
       <p:sp>
         <p:nvSpPr>
-          <p:cNvPr id="30" name="Shape 22"/>
+          <p:cNvPr id="31" name="Shape 22"/>
           <p:cNvSpPr/>
           <p:nvPr/>
         </p:nvSpPr>
@@ -20141,7 +20141,7 @@
       </p:sp>
       <p:pic>
         <p:nvPicPr>
-          <p:cNvPr id="31" name="Image 6" descr="/tmp/claude-0/-home-user-riesgo/0ff9ff46-1396-5bd8-b3ac-2280dfbbbc55/scratchpad/work/gen/icons/chat_navy.png">    </p:cNvPr>
+          <p:cNvPr id="32" name="Image 6" descr="/tmp/claude-0/-home-user-riesgo/0ff9ff46-1396-5bd8-b3ac-2280dfbbbc55/scratchpad/work/gen/icons/chat_navy.png">    </p:cNvPr>
           <p:cNvPicPr>
             <a:picLocks noChangeAspect="1"/>
           </p:cNvPicPr>
@@ -20165,7 +20165,7 @@
       </p:pic>
       <p:sp>
         <p:nvSpPr>
-          <p:cNvPr id="32" name="Shape 23"/>
+          <p:cNvPr id="33" name="Shape 23"/>
           <p:cNvSpPr/>
           <p:nvPr/>
         </p:nvSpPr>
@@ -20185,7 +20185,7 @@
       </p:sp>
       <p:sp>
         <p:nvSpPr>
-          <p:cNvPr id="33" name="Text 24"/>
+          <p:cNvPr id="34" name="Text 24"/>
           <p:cNvSpPr txBox="1"/>
           <p:nvPr/>
         </p:nvSpPr>
@@ -20224,7 +20224,7 @@
       </p:sp>
       <p:sp>
         <p:nvSpPr>
-          <p:cNvPr id="34" name="Shape 25"/>
+          <p:cNvPr id="35" name="Shape 25"/>
           <p:cNvSpPr/>
           <p:nvPr/>
         </p:nvSpPr>
@@ -20244,7 +20244,7 @@
       </p:sp>
       <p:pic>
         <p:nvPicPr>
-          <p:cNvPr id="35" name="Image 7" descr="/tmp/claude-0/-home-user-riesgo/0ff9ff46-1396-5bd8-b3ac-2280dfbbbc55/scratchpad/work/gen/icons/id_card_navy.png">    </p:cNvPr>
+          <p:cNvPr id="36" name="Image 7" descr="/tmp/claude-0/-home-user-riesgo/0ff9ff46-1396-5bd8-b3ac-2280dfbbbc55/scratchpad/work/gen/icons/id_card_navy.png">    </p:cNvPr>
           <p:cNvPicPr>
             <a:picLocks noChangeAspect="1"/>
           </p:cNvPicPr>
@@ -20268,7 +20268,7 @@
       </p:pic>
       <p:sp>
         <p:nvSpPr>
-          <p:cNvPr id="36" name="Shape 26"/>
+          <p:cNvPr id="37" name="Shape 26"/>
           <p:cNvSpPr/>
           <p:nvPr/>
         </p:nvSpPr>
@@ -20288,7 +20288,7 @@
       </p:sp>
       <p:sp>
         <p:nvSpPr>
-          <p:cNvPr id="37" name="Text 27"/>
+          <p:cNvPr id="38" name="Text 27"/>
           <p:cNvSpPr txBox="1"/>
           <p:nvPr/>
         </p:nvSpPr>
@@ -20327,7 +20327,7 @@
       </p:sp>
       <p:sp>
         <p:nvSpPr>
-          <p:cNvPr id="38" name="Text 28"/>
+          <p:cNvPr id="39" name="Text 28"/>
           <p:cNvSpPr txBox="1"/>
           <p:nvPr/>
         </p:nvSpPr>
@@ -20366,7 +20366,7 @@
       </p:sp>
       <p:sp>
         <p:nvSpPr>
-          <p:cNvPr id="39" name="Text 29"/>
+          <p:cNvPr id="40" name="Text 29"/>
           <p:cNvSpPr txBox="1"/>
           <p:nvPr/>
         </p:nvSpPr>
@@ -20405,7 +20405,7 @@
       </p:sp>
       <p:sp>
         <p:nvSpPr>
-          <p:cNvPr id="40" name="Text 30"/>
+          <p:cNvPr id="41" name="Text 30"/>
           <p:cNvSpPr txBox="1"/>
           <p:nvPr/>
         </p:nvSpPr>
@@ -20476,7 +20476,7 @@
       </p:grpSpPr>
       <p:sp>
         <p:nvSpPr>
-          <p:cNvPr id="2" name="Text 0"/>
+          <p:cNvPr id="3" name="Text 0"/>
           <p:cNvSpPr txBox="1"/>
           <p:nvPr/>
         </p:nvSpPr>
@@ -20515,7 +20515,7 @@
       </p:sp>
       <p:sp>
         <p:nvSpPr>
-          <p:cNvPr id="3" name="Text 1"/>
+          <p:cNvPr id="4" name="Text 1"/>
           <p:cNvSpPr txBox="1"/>
           <p:nvPr/>
         </p:nvSpPr>
@@ -20557,7 +20557,7 @@
       </p:sp>
       <p:sp>
         <p:nvSpPr>
-          <p:cNvPr id="4" name="Shape 2"/>
+          <p:cNvPr id="5" name="Shape 2"/>
           <p:cNvSpPr/>
           <p:nvPr/>
         </p:nvSpPr>
@@ -20580,7 +20580,7 @@
       </p:sp>
       <p:sp>
         <p:nvSpPr>
-          <p:cNvPr id="5" name="Shape 3"/>
+          <p:cNvPr id="6" name="Shape 3"/>
           <p:cNvSpPr/>
           <p:nvPr/>
         </p:nvSpPr>
@@ -20603,7 +20603,7 @@
       </p:sp>
       <p:sp>
         <p:nvSpPr>
-          <p:cNvPr id="6" name="Shape 4"/>
+          <p:cNvPr id="7" name="Shape 4"/>
           <p:cNvSpPr/>
           <p:nvPr/>
         </p:nvSpPr>
@@ -20626,7 +20626,7 @@
       </p:sp>
       <p:sp>
         <p:nvSpPr>
-          <p:cNvPr id="7" name="Shape 5"/>
+          <p:cNvPr id="8" name="Shape 5"/>
           <p:cNvSpPr/>
           <p:nvPr/>
         </p:nvSpPr>
@@ -20649,7 +20649,7 @@
       </p:sp>
       <p:sp>
         <p:nvSpPr>
-          <p:cNvPr id="8" name="Shape 6"/>
+          <p:cNvPr id="9" name="Shape 6"/>
           <p:cNvSpPr/>
           <p:nvPr/>
         </p:nvSpPr>
@@ -20672,7 +20672,7 @@
       </p:sp>
       <p:sp>
         <p:nvSpPr>
-          <p:cNvPr id="9" name="Shape 7"/>
+          <p:cNvPr id="10" name="Shape 7"/>
           <p:cNvSpPr/>
           <p:nvPr/>
         </p:nvSpPr>
@@ -20692,7 +20692,7 @@
       </p:sp>
       <p:pic>
         <p:nvPicPr>
-          <p:cNvPr id="10" name="Image 0" descr="/tmp/claude-0/-home-user-riesgo/0ff9ff46-1396-5bd8-b3ac-2280dfbbbc55/scratchpad/work/gen/icons/person_white.png">    </p:cNvPr>
+          <p:cNvPr id="11" name="Image 0" descr="/tmp/claude-0/-home-user-riesgo/0ff9ff46-1396-5bd8-b3ac-2280dfbbbc55/scratchpad/work/gen/icons/person_white.png">    </p:cNvPr>
           <p:cNvPicPr>
             <a:picLocks noChangeAspect="1"/>
           </p:cNvPicPr>
@@ -20716,7 +20716,7 @@
       </p:pic>
       <p:sp>
         <p:nvSpPr>
-          <p:cNvPr id="11" name="Text 8"/>
+          <p:cNvPr id="12" name="Text 8"/>
           <p:cNvSpPr txBox="1"/>
           <p:nvPr/>
         </p:nvSpPr>
@@ -20758,7 +20758,7 @@
       </p:sp>
       <p:sp>
         <p:nvSpPr>
-          <p:cNvPr id="12" name="Shape 9"/>
+          <p:cNvPr id="13" name="Shape 9"/>
           <p:cNvSpPr/>
           <p:nvPr/>
         </p:nvSpPr>
@@ -20778,7 +20778,7 @@
       </p:sp>
       <p:pic>
         <p:nvPicPr>
-          <p:cNvPr id="13" name="Image 1" descr="/tmp/claude-0/-home-user-riesgo/0ff9ff46-1396-5bd8-b3ac-2280dfbbbc55/scratchpad/work/gen/icons/briefcase_white.png">    </p:cNvPr>
+          <p:cNvPr id="14" name="Image 1" descr="/tmp/claude-0/-home-user-riesgo/0ff9ff46-1396-5bd8-b3ac-2280dfbbbc55/scratchpad/work/gen/icons/briefcase_white.png">    </p:cNvPr>
           <p:cNvPicPr>
             <a:picLocks noChangeAspect="1"/>
           </p:cNvPicPr>
@@ -20802,7 +20802,7 @@
       </p:pic>
       <p:sp>
         <p:nvSpPr>
-          <p:cNvPr id="14" name="Text 10"/>
+          <p:cNvPr id="15" name="Text 10"/>
           <p:cNvSpPr txBox="1"/>
           <p:nvPr/>
         </p:nvSpPr>
@@ -20844,7 +20844,7 @@
       </p:sp>
       <p:sp>
         <p:nvSpPr>
-          <p:cNvPr id="15" name="Shape 11"/>
+          <p:cNvPr id="16" name="Shape 11"/>
           <p:cNvSpPr/>
           <p:nvPr/>
         </p:nvSpPr>
@@ -20864,7 +20864,7 @@
       </p:sp>
       <p:pic>
         <p:nvPicPr>
-          <p:cNvPr id="16" name="Image 2" descr="/tmp/claude-0/-home-user-riesgo/0ff9ff46-1396-5bd8-b3ac-2280dfbbbc55/scratchpad/work/gen/icons/crown_white.png">    </p:cNvPr>
+          <p:cNvPr id="17" name="Image 2" descr="/tmp/claude-0/-home-user-riesgo/0ff9ff46-1396-5bd8-b3ac-2280dfbbbc55/scratchpad/work/gen/icons/crown_white.png">    </p:cNvPr>
           <p:cNvPicPr>
             <a:picLocks noChangeAspect="1"/>
           </p:cNvPicPr>
@@ -20888,7 +20888,7 @@
       </p:pic>
       <p:sp>
         <p:nvSpPr>
-          <p:cNvPr id="17" name="Text 12"/>
+          <p:cNvPr id="18" name="Text 12"/>
           <p:cNvSpPr txBox="1"/>
           <p:nvPr/>
         </p:nvSpPr>
@@ -20930,7 +20930,7 @@
       </p:sp>
       <p:sp>
         <p:nvSpPr>
-          <p:cNvPr id="18" name="Shape 13"/>
+          <p:cNvPr id="19" name="Shape 13"/>
           <p:cNvSpPr/>
           <p:nvPr/>
         </p:nvSpPr>
@@ -20950,7 +20950,7 @@
       </p:sp>
       <p:pic>
         <p:nvPicPr>
-          <p:cNvPr id="19" name="Image 3" descr="/tmp/claude-0/-home-user-riesgo/0ff9ff46-1396-5bd8-b3ac-2280dfbbbc55/scratchpad/work/gen/icons/shield_check_white.png">    </p:cNvPr>
+          <p:cNvPr id="20" name="Image 3" descr="/tmp/claude-0/-home-user-riesgo/0ff9ff46-1396-5bd8-b3ac-2280dfbbbc55/scratchpad/work/gen/icons/shield_check_white.png">    </p:cNvPr>
           <p:cNvPicPr>
             <a:picLocks noChangeAspect="1"/>
           </p:cNvPicPr>
@@ -20974,7 +20974,7 @@
       </p:pic>
       <p:sp>
         <p:nvSpPr>
-          <p:cNvPr id="20" name="Text 14"/>
+          <p:cNvPr id="21" name="Text 14"/>
           <p:cNvSpPr txBox="1"/>
           <p:nvPr/>
         </p:nvSpPr>
@@ -21016,7 +21016,7 @@
       </p:sp>
       <p:sp>
         <p:nvSpPr>
-          <p:cNvPr id="21" name="Shape 15"/>
+          <p:cNvPr id="22" name="Shape 15"/>
           <p:cNvSpPr/>
           <p:nvPr/>
         </p:nvSpPr>
@@ -21036,7 +21036,7 @@
       </p:sp>
       <p:pic>
         <p:nvPicPr>
-          <p:cNvPr id="22" name="Image 4" descr="/tmp/claude-0/-home-user-riesgo/0ff9ff46-1396-5bd8-b3ac-2280dfbbbc55/scratchpad/work/gen/icons/clipboard_check_white.png">    </p:cNvPr>
+          <p:cNvPr id="23" name="Image 4" descr="/tmp/claude-0/-home-user-riesgo/0ff9ff46-1396-5bd8-b3ac-2280dfbbbc55/scratchpad/work/gen/icons/clipboard_check_white.png">    </p:cNvPr>
           <p:cNvPicPr>
             <a:picLocks noChangeAspect="1"/>
           </p:cNvPicPr>
@@ -21060,7 +21060,7 @@
       </p:pic>
       <p:sp>
         <p:nvSpPr>
-          <p:cNvPr id="23" name="Text 16"/>
+          <p:cNvPr id="24" name="Text 16"/>
           <p:cNvSpPr txBox="1"/>
           <p:nvPr/>
         </p:nvSpPr>
@@ -21102,7 +21102,7 @@
       </p:sp>
       <p:sp>
         <p:nvSpPr>
-          <p:cNvPr id="24" name="Shape 17"/>
+          <p:cNvPr id="25" name="Shape 17"/>
           <p:cNvSpPr/>
           <p:nvPr/>
         </p:nvSpPr>
@@ -21129,7 +21129,7 @@
       </p:sp>
       <p:sp>
         <p:nvSpPr>
-          <p:cNvPr id="25" name="Text 18"/>
+          <p:cNvPr id="26" name="Text 18"/>
           <p:cNvSpPr txBox="1"/>
           <p:nvPr/>
         </p:nvSpPr>
@@ -21168,7 +21168,7 @@
       </p:sp>
       <p:sp>
         <p:nvSpPr>
-          <p:cNvPr id="26" name="Text 19"/>
+          <p:cNvPr id="27" name="Text 19"/>
           <p:cNvSpPr txBox="1"/>
           <p:nvPr/>
         </p:nvSpPr>
@@ -21207,7 +21207,7 @@
       </p:sp>
       <p:sp>
         <p:nvSpPr>
-          <p:cNvPr id="27" name="Text 20"/>
+          <p:cNvPr id="28" name="Text 20"/>
           <p:cNvSpPr txBox="1"/>
           <p:nvPr/>
         </p:nvSpPr>
@@ -21246,7 +21246,7 @@
       </p:sp>
       <p:sp>
         <p:nvSpPr>
-          <p:cNvPr id="28" name="Text 21"/>
+          <p:cNvPr id="29" name="Text 21"/>
           <p:cNvSpPr txBox="1"/>
           <p:nvPr/>
         </p:nvSpPr>
@@ -21317,7 +21317,7 @@
       </p:grpSpPr>
       <p:sp>
         <p:nvSpPr>
-          <p:cNvPr id="2" name="Shape 0"/>
+          <p:cNvPr id="3" name="Shape 0"/>
           <p:cNvSpPr/>
           <p:nvPr/>
         </p:nvSpPr>
@@ -21337,7 +21337,7 @@
       </p:sp>
       <p:sp>
         <p:nvSpPr>
-          <p:cNvPr id="3" name="Text 1"/>
+          <p:cNvPr id="4" name="Text 1"/>
           <p:cNvSpPr txBox="1"/>
           <p:nvPr/>
         </p:nvSpPr>
@@ -21376,7 +21376,7 @@
       </p:sp>
       <p:sp>
         <p:nvSpPr>
-          <p:cNvPr id="4" name="Shape 2"/>
+          <p:cNvPr id="5" name="Shape 2"/>
           <p:cNvSpPr/>
           <p:nvPr/>
         </p:nvSpPr>
@@ -21396,7 +21396,7 @@
       </p:sp>
       <p:pic>
         <p:nvPicPr>
-          <p:cNvPr id="5" name="Image 0" descr="/tmp/claude-0/-home-user-riesgo/0ff9ff46-1396-5bd8-b3ac-2280dfbbbc55/scratchpad/work/gen/icons/globe_navy.png">    </p:cNvPr>
+          <p:cNvPr id="6" name="Image 0" descr="/tmp/claude-0/-home-user-riesgo/0ff9ff46-1396-5bd8-b3ac-2280dfbbbc55/scratchpad/work/gen/icons/globe_navy.png">    </p:cNvPr>
           <p:cNvPicPr>
             <a:picLocks noChangeAspect="1"/>
           </p:cNvPicPr>
@@ -21420,7 +21420,7 @@
       </p:pic>
       <p:sp>
         <p:nvSpPr>
-          <p:cNvPr id="6" name="Text 3"/>
+          <p:cNvPr id="7" name="Text 3"/>
           <p:cNvSpPr txBox="1"/>
           <p:nvPr/>
         </p:nvSpPr>
@@ -21459,7 +21459,7 @@
       </p:sp>
       <p:sp>
         <p:nvSpPr>
-          <p:cNvPr id="7" name="Text 4"/>
+          <p:cNvPr id="8" name="Text 4"/>
           <p:cNvSpPr txBox="1"/>
           <p:nvPr/>
         </p:nvSpPr>
@@ -21521,7 +21521,7 @@
       </p:sp>
       <p:sp>
         <p:nvSpPr>
-          <p:cNvPr id="8" name="Text 5"/>
+          <p:cNvPr id="9" name="Text 5"/>
           <p:cNvSpPr txBox="1"/>
           <p:nvPr/>
         </p:nvSpPr>
@@ -21563,7 +21563,7 @@
       </p:sp>
       <p:pic>
         <p:nvPicPr>
-          <p:cNvPr id="9" name="Image 1" descr="/tmp/claude-0/-home-user-riesgo/0ff9ff46-1396-5bd8-b3ac-2280dfbbbc55/scratchpad/work/gen/logo_white.png">    </p:cNvPr>
+          <p:cNvPr id="10" name="Image 1" descr="/tmp/claude-0/-home-user-riesgo/0ff9ff46-1396-5bd8-b3ac-2280dfbbbc55/scratchpad/work/gen/logo_white.png">    </p:cNvPr>
           <p:cNvPicPr>
             <a:picLocks noChangeAspect="1"/>
           </p:cNvPicPr>
@@ -21587,7 +21587,7 @@
       </p:pic>
       <p:sp>
         <p:nvSpPr>
-          <p:cNvPr id="10" name="Text 6"/>
+          <p:cNvPr id="11" name="Text 6"/>
           <p:cNvSpPr txBox="1"/>
           <p:nvPr/>
         </p:nvSpPr>
@@ -21626,7 +21626,7 @@
       </p:sp>
       <p:sp>
         <p:nvSpPr>
-          <p:cNvPr id="11" name="Text 7"/>
+          <p:cNvPr id="12" name="Text 7"/>
           <p:cNvSpPr txBox="1"/>
           <p:nvPr/>
         </p:nvSpPr>
@@ -21697,7 +21697,7 @@
       </p:grpSpPr>
       <p:sp>
         <p:nvSpPr>
-          <p:cNvPr id="2" name="Text 0"/>
+          <p:cNvPr id="3" name="Text 0"/>
           <p:cNvSpPr txBox="1"/>
           <p:nvPr/>
         </p:nvSpPr>
@@ -21736,7 +21736,7 @@
       </p:sp>
       <p:sp>
         <p:nvSpPr>
-          <p:cNvPr id="3" name="Text 1"/>
+          <p:cNvPr id="4" name="Text 1"/>
           <p:cNvSpPr txBox="1"/>
           <p:nvPr/>
         </p:nvSpPr>
@@ -21778,7 +21778,7 @@
       </p:sp>
       <p:sp>
         <p:nvSpPr>
-          <p:cNvPr id="4" name="Text 2"/>
+          <p:cNvPr id="5" name="Text 2"/>
           <p:cNvSpPr txBox="1"/>
           <p:nvPr/>
         </p:nvSpPr>
@@ -21817,7 +21817,7 @@
       </p:sp>
       <p:sp>
         <p:nvSpPr>
-          <p:cNvPr id="5" name="Shape 3"/>
+          <p:cNvPr id="6" name="Shape 3"/>
           <p:cNvSpPr/>
           <p:nvPr/>
         </p:nvSpPr>
@@ -21837,7 +21837,7 @@
       </p:sp>
       <p:pic>
         <p:nvPicPr>
-          <p:cNvPr id="6" name="Image 0" descr="/tmp/claude-0/-home-user-riesgo/0ff9ff46-1396-5bd8-b3ac-2280dfbbbc55/scratchpad/work/gen/icons/cloud_rain_white.png">    </p:cNvPr>
+          <p:cNvPr id="7" name="Image 0" descr="/tmp/claude-0/-home-user-riesgo/0ff9ff46-1396-5bd8-b3ac-2280dfbbbc55/scratchpad/work/gen/icons/cloud_rain_white.png">    </p:cNvPr>
           <p:cNvPicPr>
             <a:picLocks noChangeAspect="1"/>
           </p:cNvPicPr>
@@ -21861,7 +21861,7 @@
       </p:pic>
       <p:sp>
         <p:nvSpPr>
-          <p:cNvPr id="7" name="Text 4"/>
+          <p:cNvPr id="8" name="Text 4"/>
           <p:cNvSpPr txBox="1"/>
           <p:nvPr/>
         </p:nvSpPr>
@@ -21903,7 +21903,7 @@
       </p:sp>
       <p:pic>
         <p:nvPicPr>
-          <p:cNvPr id="8" name="Image 1" descr="/tmp/claude-0/-home-user-riesgo/0ff9ff46-1396-5bd8-b3ac-2280dfbbbc55/scratchpad/work/gen/icons/arrow_right_gray.png">    </p:cNvPr>
+          <p:cNvPr id="9" name="Image 1" descr="/tmp/claude-0/-home-user-riesgo/0ff9ff46-1396-5bd8-b3ac-2280dfbbbc55/scratchpad/work/gen/icons/arrow_right_gray.png">    </p:cNvPr>
           <p:cNvPicPr>
             <a:picLocks noChangeAspect="1"/>
           </p:cNvPicPr>
@@ -21927,7 +21927,7 @@
       </p:pic>
       <p:sp>
         <p:nvSpPr>
-          <p:cNvPr id="9" name="Shape 5"/>
+          <p:cNvPr id="10" name="Shape 5"/>
           <p:cNvSpPr/>
           <p:nvPr/>
         </p:nvSpPr>
@@ -21947,7 +21947,7 @@
       </p:sp>
       <p:pic>
         <p:nvPicPr>
-          <p:cNvPr id="10" name="Image 2" descr="/tmp/claude-0/-home-user-riesgo/0ff9ff46-1396-5bd8-b3ac-2280dfbbbc55/scratchpad/work/gen/icons/people_group_white.png">    </p:cNvPr>
+          <p:cNvPr id="11" name="Image 2" descr="/tmp/claude-0/-home-user-riesgo/0ff9ff46-1396-5bd8-b3ac-2280dfbbbc55/scratchpad/work/gen/icons/people_group_white.png">    </p:cNvPr>
           <p:cNvPicPr>
             <a:picLocks noChangeAspect="1"/>
           </p:cNvPicPr>
@@ -21971,7 +21971,7 @@
       </p:pic>
       <p:sp>
         <p:nvSpPr>
-          <p:cNvPr id="11" name="Text 6"/>
+          <p:cNvPr id="12" name="Text 6"/>
           <p:cNvSpPr txBox="1"/>
           <p:nvPr/>
         </p:nvSpPr>
@@ -22013,7 +22013,7 @@
       </p:sp>
       <p:pic>
         <p:nvPicPr>
-          <p:cNvPr id="12" name="Image 3" descr="/tmp/claude-0/-home-user-riesgo/0ff9ff46-1396-5bd8-b3ac-2280dfbbbc55/scratchpad/work/gen/icons/arrow_right_gray.png">    </p:cNvPr>
+          <p:cNvPr id="13" name="Image 3" descr="/tmp/claude-0/-home-user-riesgo/0ff9ff46-1396-5bd8-b3ac-2280dfbbbc55/scratchpad/work/gen/icons/arrow_right_gray.png">    </p:cNvPr>
           <p:cNvPicPr>
             <a:picLocks noChangeAspect="1"/>
           </p:cNvPicPr>
@@ -22037,7 +22037,7 @@
       </p:pic>
       <p:sp>
         <p:nvSpPr>
-          <p:cNvPr id="13" name="Shape 7"/>
+          <p:cNvPr id="14" name="Shape 7"/>
           <p:cNvSpPr/>
           <p:nvPr/>
         </p:nvSpPr>
@@ -22057,7 +22057,7 @@
       </p:sp>
       <p:pic>
         <p:nvPicPr>
-          <p:cNvPr id="14" name="Image 4" descr="/tmp/claude-0/-home-user-riesgo/0ff9ff46-1396-5bd8-b3ac-2280dfbbbc55/scratchpad/work/gen/icons/x_circle_white.png">    </p:cNvPr>
+          <p:cNvPr id="15" name="Image 4" descr="/tmp/claude-0/-home-user-riesgo/0ff9ff46-1396-5bd8-b3ac-2280dfbbbc55/scratchpad/work/gen/icons/x_circle_white.png">    </p:cNvPr>
           <p:cNvPicPr>
             <a:picLocks noChangeAspect="1"/>
           </p:cNvPicPr>
@@ -22081,7 +22081,7 @@
       </p:pic>
       <p:sp>
         <p:nvSpPr>
-          <p:cNvPr id="15" name="Text 8"/>
+          <p:cNvPr id="16" name="Text 8"/>
           <p:cNvSpPr txBox="1"/>
           <p:nvPr/>
         </p:nvSpPr>
@@ -22123,7 +22123,7 @@
       </p:sp>
       <p:pic>
         <p:nvPicPr>
-          <p:cNvPr id="16" name="Image 5" descr="/tmp/claude-0/-home-user-riesgo/0ff9ff46-1396-5bd8-b3ac-2280dfbbbc55/scratchpad/work/gen/icons/arrow_right_gray.png">    </p:cNvPr>
+          <p:cNvPr id="17" name="Image 5" descr="/tmp/claude-0/-home-user-riesgo/0ff9ff46-1396-5bd8-b3ac-2280dfbbbc55/scratchpad/work/gen/icons/arrow_right_gray.png">    </p:cNvPr>
           <p:cNvPicPr>
             <a:picLocks noChangeAspect="1"/>
           </p:cNvPicPr>
@@ -22147,7 +22147,7 @@
       </p:pic>
       <p:sp>
         <p:nvSpPr>
-          <p:cNvPr id="17" name="Shape 9"/>
+          <p:cNvPr id="18" name="Shape 9"/>
           <p:cNvSpPr/>
           <p:nvPr/>
         </p:nvSpPr>
@@ -22167,7 +22167,7 @@
       </p:sp>
       <p:pic>
         <p:nvPicPr>
-          <p:cNvPr id="18" name="Image 6" descr="/tmp/claude-0/-home-user-riesgo/0ff9ff46-1396-5bd8-b3ac-2280dfbbbc55/scratchpad/work/gen/icons/chart_down_white.png">    </p:cNvPr>
+          <p:cNvPr id="19" name="Image 6" descr="/tmp/claude-0/-home-user-riesgo/0ff9ff46-1396-5bd8-b3ac-2280dfbbbc55/scratchpad/work/gen/icons/chart_down_white.png">    </p:cNvPr>
           <p:cNvPicPr>
             <a:picLocks noChangeAspect="1"/>
           </p:cNvPicPr>
@@ -22191,7 +22191,7 @@
       </p:pic>
       <p:sp>
         <p:nvSpPr>
-          <p:cNvPr id="19" name="Text 10"/>
+          <p:cNvPr id="20" name="Text 10"/>
           <p:cNvSpPr txBox="1"/>
           <p:nvPr/>
         </p:nvSpPr>
@@ -22233,7 +22233,7 @@
       </p:sp>
       <p:pic>
         <p:nvPicPr>
-          <p:cNvPr id="20" name="Image 7" descr="/tmp/claude-0/-home-user-riesgo/0ff9ff46-1396-5bd8-b3ac-2280dfbbbc55/scratchpad/work/gen/icons/arrow_right_gray.png">    </p:cNvPr>
+          <p:cNvPr id="21" name="Image 7" descr="/tmp/claude-0/-home-user-riesgo/0ff9ff46-1396-5bd8-b3ac-2280dfbbbc55/scratchpad/work/gen/icons/arrow_right_gray.png">    </p:cNvPr>
           <p:cNvPicPr>
             <a:picLocks noChangeAspect="1"/>
           </p:cNvPicPr>
@@ -22257,7 +22257,7 @@
       </p:pic>
       <p:sp>
         <p:nvSpPr>
-          <p:cNvPr id="21" name="Shape 11"/>
+          <p:cNvPr id="22" name="Shape 11"/>
           <p:cNvSpPr/>
           <p:nvPr/>
         </p:nvSpPr>
@@ -22277,7 +22277,7 @@
       </p:sp>
       <p:pic>
         <p:nvPicPr>
-          <p:cNvPr id="22" name="Image 8" descr="/tmp/claude-0/-home-user-riesgo/0ff9ff46-1396-5bd8-b3ac-2280dfbbbc55/scratchpad/work/gen/icons/bank_white.png">    </p:cNvPr>
+          <p:cNvPr id="23" name="Image 8" descr="/tmp/claude-0/-home-user-riesgo/0ff9ff46-1396-5bd8-b3ac-2280dfbbbc55/scratchpad/work/gen/icons/bank_white.png">    </p:cNvPr>
           <p:cNvPicPr>
             <a:picLocks noChangeAspect="1"/>
           </p:cNvPicPr>
@@ -22301,7 +22301,7 @@
       </p:pic>
       <p:sp>
         <p:nvSpPr>
-          <p:cNvPr id="23" name="Text 12"/>
+          <p:cNvPr id="24" name="Text 12"/>
           <p:cNvSpPr txBox="1"/>
           <p:nvPr/>
         </p:nvSpPr>
@@ -22343,7 +22343,7 @@
       </p:sp>
       <p:sp>
         <p:nvSpPr>
-          <p:cNvPr id="24" name="Text 13"/>
+          <p:cNvPr id="25" name="Text 13"/>
           <p:cNvSpPr txBox="1"/>
           <p:nvPr/>
         </p:nvSpPr>
@@ -22382,7 +22382,7 @@
       </p:sp>
       <p:sp>
         <p:nvSpPr>
-          <p:cNvPr id="25" name="Text 14"/>
+          <p:cNvPr id="26" name="Text 14"/>
           <p:cNvSpPr txBox="1"/>
           <p:nvPr/>
         </p:nvSpPr>
@@ -22453,7 +22453,7 @@
       </p:grpSpPr>
       <p:sp>
         <p:nvSpPr>
-          <p:cNvPr id="2" name="Text 0"/>
+          <p:cNvPr id="3" name="Text 0"/>
           <p:cNvSpPr txBox="1"/>
           <p:nvPr/>
         </p:nvSpPr>
@@ -22492,7 +22492,7 @@
       </p:sp>
       <p:sp>
         <p:nvSpPr>
-          <p:cNvPr id="3" name="Text 1"/>
+          <p:cNvPr id="4" name="Text 1"/>
           <p:cNvSpPr txBox="1"/>
           <p:nvPr/>
         </p:nvSpPr>
@@ -22534,7 +22534,7 @@
       </p:sp>
       <p:sp>
         <p:nvSpPr>
-          <p:cNvPr id="4" name="Shape 2"/>
+          <p:cNvPr id="5" name="Shape 2"/>
           <p:cNvSpPr/>
           <p:nvPr/>
         </p:nvSpPr>
@@ -22556,7 +22556,7 @@
       </p:sp>
       <p:sp>
         <p:nvSpPr>
-          <p:cNvPr id="5" name="Shape 3"/>
+          <p:cNvPr id="6" name="Shape 3"/>
           <p:cNvSpPr/>
           <p:nvPr/>
         </p:nvSpPr>
@@ -22576,7 +22576,7 @@
       </p:sp>
       <p:pic>
         <p:nvPicPr>
-          <p:cNvPr id="6" name="Image 0" descr="/tmp/claude-0/-home-user-riesgo/0ff9ff46-1396-5bd8-b3ac-2280dfbbbc55/scratchpad/work/gen/icons/earthquake_white.png">    </p:cNvPr>
+          <p:cNvPr id="7" name="Image 0" descr="/tmp/claude-0/-home-user-riesgo/0ff9ff46-1396-5bd8-b3ac-2280dfbbbc55/scratchpad/work/gen/icons/earthquake_white.png">    </p:cNvPr>
           <p:cNvPicPr>
             <a:picLocks noChangeAspect="1"/>
           </p:cNvPicPr>
@@ -22600,7 +22600,7 @@
       </p:pic>
       <p:sp>
         <p:nvSpPr>
-          <p:cNvPr id="7" name="Text 4"/>
+          <p:cNvPr id="8" name="Text 4"/>
           <p:cNvSpPr txBox="1"/>
           <p:nvPr/>
         </p:nvSpPr>
@@ -22642,7 +22642,7 @@
       </p:sp>
       <p:sp>
         <p:nvSpPr>
-          <p:cNvPr id="8" name="Shape 5"/>
+          <p:cNvPr id="9" name="Shape 5"/>
           <p:cNvSpPr/>
           <p:nvPr/>
         </p:nvSpPr>
@@ -22664,7 +22664,7 @@
       </p:sp>
       <p:sp>
         <p:nvSpPr>
-          <p:cNvPr id="9" name="Shape 6"/>
+          <p:cNvPr id="10" name="Shape 6"/>
           <p:cNvSpPr/>
           <p:nvPr/>
         </p:nvSpPr>
@@ -22684,7 +22684,7 @@
       </p:sp>
       <p:pic>
         <p:nvPicPr>
-          <p:cNvPr id="10" name="Image 1" descr="/tmp/claude-0/-home-user-riesgo/0ff9ff46-1396-5bd8-b3ac-2280dfbbbc55/scratchpad/work/gen/icons/flood_white.png">    </p:cNvPr>
+          <p:cNvPr id="11" name="Image 1" descr="/tmp/claude-0/-home-user-riesgo/0ff9ff46-1396-5bd8-b3ac-2280dfbbbc55/scratchpad/work/gen/icons/flood_white.png">    </p:cNvPr>
           <p:cNvPicPr>
             <a:picLocks noChangeAspect="1"/>
           </p:cNvPicPr>
@@ -22708,7 +22708,7 @@
       </p:pic>
       <p:sp>
         <p:nvSpPr>
-          <p:cNvPr id="11" name="Text 7"/>
+          <p:cNvPr id="12" name="Text 7"/>
           <p:cNvSpPr txBox="1"/>
           <p:nvPr/>
         </p:nvSpPr>
@@ -22750,7 +22750,7 @@
       </p:sp>
       <p:sp>
         <p:nvSpPr>
-          <p:cNvPr id="12" name="Shape 8"/>
+          <p:cNvPr id="13" name="Shape 8"/>
           <p:cNvSpPr/>
           <p:nvPr/>
         </p:nvSpPr>
@@ -22772,7 +22772,7 @@
       </p:sp>
       <p:sp>
         <p:nvSpPr>
-          <p:cNvPr id="13" name="Shape 9"/>
+          <p:cNvPr id="14" name="Shape 9"/>
           <p:cNvSpPr/>
           <p:nvPr/>
         </p:nvSpPr>
@@ -22792,7 +22792,7 @@
       </p:sp>
       <p:pic>
         <p:nvPicPr>
-          <p:cNvPr id="14" name="Image 2" descr="/tmp/claude-0/-home-user-riesgo/0ff9ff46-1396-5bd8-b3ac-2280dfbbbc55/scratchpad/work/gen/icons/wind_white.png">    </p:cNvPr>
+          <p:cNvPr id="15" name="Image 2" descr="/tmp/claude-0/-home-user-riesgo/0ff9ff46-1396-5bd8-b3ac-2280dfbbbc55/scratchpad/work/gen/icons/wind_white.png">    </p:cNvPr>
           <p:cNvPicPr>
             <a:picLocks noChangeAspect="1"/>
           </p:cNvPicPr>
@@ -22816,7 +22816,7 @@
       </p:pic>
       <p:sp>
         <p:nvSpPr>
-          <p:cNvPr id="15" name="Text 10"/>
+          <p:cNvPr id="16" name="Text 10"/>
           <p:cNvSpPr txBox="1"/>
           <p:nvPr/>
         </p:nvSpPr>
@@ -22858,7 +22858,7 @@
       </p:sp>
       <p:sp>
         <p:nvSpPr>
-          <p:cNvPr id="16" name="Shape 11"/>
+          <p:cNvPr id="17" name="Shape 11"/>
           <p:cNvSpPr/>
           <p:nvPr/>
         </p:nvSpPr>
@@ -22880,7 +22880,7 @@
       </p:sp>
       <p:sp>
         <p:nvSpPr>
-          <p:cNvPr id="17" name="Shape 12"/>
+          <p:cNvPr id="18" name="Shape 12"/>
           <p:cNvSpPr/>
           <p:nvPr/>
         </p:nvSpPr>
@@ -22900,7 +22900,7 @@
       </p:sp>
       <p:pic>
         <p:nvPicPr>
-          <p:cNvPr id="18" name="Image 3" descr="/tmp/claude-0/-home-user-riesgo/0ff9ff46-1396-5bd8-b3ac-2280dfbbbc55/scratchpad/work/gen/icons/virus_white.png">    </p:cNvPr>
+          <p:cNvPr id="19" name="Image 3" descr="/tmp/claude-0/-home-user-riesgo/0ff9ff46-1396-5bd8-b3ac-2280dfbbbc55/scratchpad/work/gen/icons/virus_white.png">    </p:cNvPr>
           <p:cNvPicPr>
             <a:picLocks noChangeAspect="1"/>
           </p:cNvPicPr>
@@ -22924,7 +22924,7 @@
       </p:pic>
       <p:sp>
         <p:nvSpPr>
-          <p:cNvPr id="19" name="Text 13"/>
+          <p:cNvPr id="20" name="Text 13"/>
           <p:cNvSpPr txBox="1"/>
           <p:nvPr/>
         </p:nvSpPr>
@@ -22966,7 +22966,7 @@
       </p:sp>
       <p:sp>
         <p:nvSpPr>
-          <p:cNvPr id="20" name="Shape 14"/>
+          <p:cNvPr id="21" name="Shape 14"/>
           <p:cNvSpPr/>
           <p:nvPr/>
         </p:nvSpPr>
@@ -22988,7 +22988,7 @@
       </p:sp>
       <p:sp>
         <p:nvSpPr>
-          <p:cNvPr id="21" name="Shape 15"/>
+          <p:cNvPr id="22" name="Shape 15"/>
           <p:cNvSpPr/>
           <p:nvPr/>
         </p:nvSpPr>
@@ -23008,7 +23008,7 @@
       </p:sp>
       <p:pic>
         <p:nvPicPr>
-          <p:cNvPr id="22" name="Image 4" descr="/tmp/claude-0/-home-user-riesgo/0ff9ff46-1396-5bd8-b3ac-2280dfbbbc55/scratchpad/work/gen/icons/fire_white.png">    </p:cNvPr>
+          <p:cNvPr id="23" name="Image 4" descr="/tmp/claude-0/-home-user-riesgo/0ff9ff46-1396-5bd8-b3ac-2280dfbbbc55/scratchpad/work/gen/icons/fire_white.png">    </p:cNvPr>
           <p:cNvPicPr>
             <a:picLocks noChangeAspect="1"/>
           </p:cNvPicPr>
@@ -23032,7 +23032,7 @@
       </p:pic>
       <p:sp>
         <p:nvSpPr>
-          <p:cNvPr id="23" name="Text 16"/>
+          <p:cNvPr id="24" name="Text 16"/>
           <p:cNvSpPr txBox="1"/>
           <p:nvPr/>
         </p:nvSpPr>
@@ -23074,7 +23074,7 @@
       </p:sp>
       <p:sp>
         <p:nvSpPr>
-          <p:cNvPr id="24" name="Text 17"/>
+          <p:cNvPr id="25" name="Text 17"/>
           <p:cNvSpPr txBox="1"/>
           <p:nvPr/>
         </p:nvSpPr>
@@ -23113,7 +23113,7 @@
       </p:sp>
       <p:sp>
         <p:nvSpPr>
-          <p:cNvPr id="25" name="Text 18"/>
+          <p:cNvPr id="26" name="Text 18"/>
           <p:cNvSpPr txBox="1"/>
           <p:nvPr/>
         </p:nvSpPr>
@@ -23184,7 +23184,7 @@
       </p:grpSpPr>
       <p:sp>
         <p:nvSpPr>
-          <p:cNvPr id="2" name="Shape 0"/>
+          <p:cNvPr id="3" name="Shape 0"/>
           <p:cNvSpPr/>
           <p:nvPr/>
         </p:nvSpPr>
@@ -23204,7 +23204,7 @@
       </p:sp>
       <p:sp>
         <p:nvSpPr>
-          <p:cNvPr id="3" name="Shape 1"/>
+          <p:cNvPr id="4" name="Shape 1"/>
           <p:cNvSpPr/>
           <p:nvPr/>
         </p:nvSpPr>
@@ -23224,7 +23224,7 @@
       </p:sp>
       <p:pic>
         <p:nvPicPr>
-          <p:cNvPr id="4" name="Image 0" descr="/tmp/claude-0/-home-user-riesgo/0ff9ff46-1396-5bd8-b3ac-2280dfbbbc55/scratchpad/work/gen/icons/clipboard_check_navy.png">    </p:cNvPr>
+          <p:cNvPr id="5" name="Image 0" descr="/tmp/claude-0/-home-user-riesgo/0ff9ff46-1396-5bd8-b3ac-2280dfbbbc55/scratchpad/work/gen/icons/clipboard_check_navy.png">    </p:cNvPr>
           <p:cNvPicPr>
             <a:picLocks noChangeAspect="1"/>
           </p:cNvPicPr>
@@ -23248,7 +23248,7 @@
       </p:pic>
       <p:sp>
         <p:nvSpPr>
-          <p:cNvPr id="5" name="Text 2"/>
+          <p:cNvPr id="6" name="Text 2"/>
           <p:cNvSpPr txBox="1"/>
           <p:nvPr/>
         </p:nvSpPr>
@@ -23287,7 +23287,7 @@
       </p:sp>
       <p:sp>
         <p:nvSpPr>
-          <p:cNvPr id="6" name="Text 3"/>
+          <p:cNvPr id="7" name="Text 3"/>
           <p:cNvSpPr txBox="1"/>
           <p:nvPr/>
         </p:nvSpPr>
@@ -23329,7 +23329,7 @@
       </p:sp>
       <p:sp>
         <p:nvSpPr>
-          <p:cNvPr id="7" name="Text 4"/>
+          <p:cNvPr id="8" name="Text 4"/>
           <p:cNvSpPr txBox="1"/>
           <p:nvPr/>
         </p:nvSpPr>
@@ -23371,7 +23371,7 @@
       </p:sp>
       <p:pic>
         <p:nvPicPr>
-          <p:cNvPr id="8" name="Image 1" descr="/tmp/claude-0/-home-user-riesgo/0ff9ff46-1396-5bd8-b3ac-2280dfbbbc55/scratchpad/work/gen/logo_white.png">    </p:cNvPr>
+          <p:cNvPr id="9" name="Image 1" descr="/tmp/claude-0/-home-user-riesgo/0ff9ff46-1396-5bd8-b3ac-2280dfbbbc55/scratchpad/work/gen/logo_white.png">    </p:cNvPr>
           <p:cNvPicPr>
             <a:picLocks noChangeAspect="1"/>
           </p:cNvPicPr>
@@ -23395,7 +23395,7 @@
       </p:pic>
       <p:sp>
         <p:nvSpPr>
-          <p:cNvPr id="9" name="Text 5"/>
+          <p:cNvPr id="10" name="Text 5"/>
           <p:cNvSpPr txBox="1"/>
           <p:nvPr/>
         </p:nvSpPr>
@@ -23434,7 +23434,7 @@
       </p:sp>
       <p:sp>
         <p:nvSpPr>
-          <p:cNvPr id="10" name="Text 6"/>
+          <p:cNvPr id="11" name="Text 6"/>
           <p:cNvSpPr txBox="1"/>
           <p:nvPr/>
         </p:nvSpPr>
@@ -23505,7 +23505,7 @@
       </p:grpSpPr>
       <p:sp>
         <p:nvSpPr>
-          <p:cNvPr id="2" name="Text 0"/>
+          <p:cNvPr id="3" name="Text 0"/>
           <p:cNvSpPr txBox="1"/>
           <p:nvPr/>
         </p:nvSpPr>
@@ -23544,7 +23544,7 @@
       </p:sp>
       <p:sp>
         <p:nvSpPr>
-          <p:cNvPr id="3" name="Text 1"/>
+          <p:cNvPr id="4" name="Text 1"/>
           <p:cNvSpPr txBox="1"/>
           <p:nvPr/>
         </p:nvSpPr>
@@ -23586,7 +23586,7 @@
       </p:sp>
       <p:sp>
         <p:nvSpPr>
-          <p:cNvPr id="4" name="Shape 2"/>
+          <p:cNvPr id="5" name="Shape 2"/>
           <p:cNvSpPr/>
           <p:nvPr/>
         </p:nvSpPr>
@@ -23608,7 +23608,7 @@
       </p:sp>
       <p:sp>
         <p:nvSpPr>
-          <p:cNvPr id="5" name="Shape 3"/>
+          <p:cNvPr id="6" name="Shape 3"/>
           <p:cNvSpPr/>
           <p:nvPr/>
         </p:nvSpPr>
@@ -23628,7 +23628,7 @@
       </p:sp>
       <p:pic>
         <p:nvPicPr>
-          <p:cNvPr id="6" name="Image 0" descr="/tmp/claude-0/-home-user-riesgo/0ff9ff46-1396-5bd8-b3ac-2280dfbbbc55/scratchpad/work/gen/icons/server_navy.png">    </p:cNvPr>
+          <p:cNvPr id="7" name="Image 0" descr="/tmp/claude-0/-home-user-riesgo/0ff9ff46-1396-5bd8-b3ac-2280dfbbbc55/scratchpad/work/gen/icons/server_navy.png">    </p:cNvPr>
           <p:cNvPicPr>
             <a:picLocks noChangeAspect="1"/>
           </p:cNvPicPr>
@@ -23652,7 +23652,7 @@
       </p:pic>
       <p:sp>
         <p:nvSpPr>
-          <p:cNvPr id="7" name="Text 4"/>
+          <p:cNvPr id="8" name="Text 4"/>
           <p:cNvSpPr txBox="1"/>
           <p:nvPr/>
         </p:nvSpPr>
@@ -23691,7 +23691,7 @@
       </p:sp>
       <p:sp>
         <p:nvSpPr>
-          <p:cNvPr id="8" name="Text 5"/>
+          <p:cNvPr id="9" name="Text 5"/>
           <p:cNvSpPr txBox="1"/>
           <p:nvPr/>
         </p:nvSpPr>
@@ -23733,7 +23733,7 @@
       </p:sp>
       <p:sp>
         <p:nvSpPr>
-          <p:cNvPr id="9" name="Shape 6"/>
+          <p:cNvPr id="10" name="Shape 6"/>
           <p:cNvSpPr/>
           <p:nvPr/>
         </p:nvSpPr>
@@ -23755,7 +23755,7 @@
       </p:sp>
       <p:sp>
         <p:nvSpPr>
-          <p:cNvPr id="10" name="Shape 7"/>
+          <p:cNvPr id="11" name="Shape 7"/>
           <p:cNvSpPr/>
           <p:nvPr/>
         </p:nvSpPr>
@@ -23775,7 +23775,7 @@
       </p:sp>
       <p:pic>
         <p:nvPicPr>
-          <p:cNvPr id="11" name="Image 1" descr="/tmp/claude-0/-home-user-riesgo/0ff9ff46-1396-5bd8-b3ac-2280dfbbbc55/scratchpad/work/gen/icons/question_white.png">    </p:cNvPr>
+          <p:cNvPr id="12" name="Image 1" descr="/tmp/claude-0/-home-user-riesgo/0ff9ff46-1396-5bd8-b3ac-2280dfbbbc55/scratchpad/work/gen/icons/question_white.png">    </p:cNvPr>
           <p:cNvPicPr>
             <a:picLocks noChangeAspect="1"/>
           </p:cNvPicPr>
@@ -23799,7 +23799,7 @@
       </p:pic>
       <p:sp>
         <p:nvSpPr>
-          <p:cNvPr id="12" name="Text 8"/>
+          <p:cNvPr id="13" name="Text 8"/>
           <p:cNvSpPr txBox="1"/>
           <p:nvPr/>
         </p:nvSpPr>
@@ -23841,7 +23841,7 @@
       </p:sp>
       <p:sp>
         <p:nvSpPr>
-          <p:cNvPr id="13" name="Shape 9"/>
+          <p:cNvPr id="14" name="Shape 9"/>
           <p:cNvSpPr/>
           <p:nvPr/>
         </p:nvSpPr>
@@ -23863,7 +23863,7 @@
       </p:sp>
       <p:sp>
         <p:nvSpPr>
-          <p:cNvPr id="14" name="Shape 10"/>
+          <p:cNvPr id="15" name="Shape 10"/>
           <p:cNvSpPr/>
           <p:nvPr/>
         </p:nvSpPr>
@@ -23883,7 +23883,7 @@
       </p:sp>
       <p:pic>
         <p:nvPicPr>
-          <p:cNvPr id="15" name="Image 2" descr="/tmp/claude-0/-home-user-riesgo/0ff9ff46-1396-5bd8-b3ac-2280dfbbbc55/scratchpad/work/gen/icons/question_white.png">    </p:cNvPr>
+          <p:cNvPr id="16" name="Image 2" descr="/tmp/claude-0/-home-user-riesgo/0ff9ff46-1396-5bd8-b3ac-2280dfbbbc55/scratchpad/work/gen/icons/question_white.png">    </p:cNvPr>
           <p:cNvPicPr>
             <a:picLocks noChangeAspect="1"/>
           </p:cNvPicPr>
@@ -23907,7 +23907,7 @@
       </p:pic>
       <p:sp>
         <p:nvSpPr>
-          <p:cNvPr id="16" name="Text 11"/>
+          <p:cNvPr id="17" name="Text 11"/>
           <p:cNvSpPr txBox="1"/>
           <p:nvPr/>
         </p:nvSpPr>
@@ -23949,7 +23949,7 @@
       </p:sp>
       <p:sp>
         <p:nvSpPr>
-          <p:cNvPr id="17" name="Shape 12"/>
+          <p:cNvPr id="18" name="Shape 12"/>
           <p:cNvSpPr/>
           <p:nvPr/>
         </p:nvSpPr>
@@ -23971,7 +23971,7 @@
       </p:sp>
       <p:sp>
         <p:nvSpPr>
-          <p:cNvPr id="18" name="Shape 13"/>
+          <p:cNvPr id="19" name="Shape 13"/>
           <p:cNvSpPr/>
           <p:nvPr/>
         </p:nvSpPr>
@@ -23991,7 +23991,7 @@
       </p:sp>
       <p:pic>
         <p:nvPicPr>
-          <p:cNvPr id="19" name="Image 3" descr="/tmp/claude-0/-home-user-riesgo/0ff9ff46-1396-5bd8-b3ac-2280dfbbbc55/scratchpad/work/gen/icons/question_white.png">    </p:cNvPr>
+          <p:cNvPr id="20" name="Image 3" descr="/tmp/claude-0/-home-user-riesgo/0ff9ff46-1396-5bd8-b3ac-2280dfbbbc55/scratchpad/work/gen/icons/question_white.png">    </p:cNvPr>
           <p:cNvPicPr>
             <a:picLocks noChangeAspect="1"/>
           </p:cNvPicPr>
@@ -24015,7 +24015,7 @@
       </p:pic>
       <p:sp>
         <p:nvSpPr>
-          <p:cNvPr id="20" name="Text 14"/>
+          <p:cNvPr id="21" name="Text 14"/>
           <p:cNvSpPr txBox="1"/>
           <p:nvPr/>
         </p:nvSpPr>
@@ -24057,7 +24057,7 @@
       </p:sp>
       <p:sp>
         <p:nvSpPr>
-          <p:cNvPr id="21" name="Shape 15"/>
+          <p:cNvPr id="22" name="Shape 15"/>
           <p:cNvSpPr/>
           <p:nvPr/>
         </p:nvSpPr>
@@ -24079,7 +24079,7 @@
       </p:sp>
       <p:sp>
         <p:nvSpPr>
-          <p:cNvPr id="22" name="Shape 16"/>
+          <p:cNvPr id="23" name="Shape 16"/>
           <p:cNvSpPr/>
           <p:nvPr/>
         </p:nvSpPr>
@@ -24099,7 +24099,7 @@
       </p:sp>
       <p:pic>
         <p:nvPicPr>
-          <p:cNvPr id="23" name="Image 4" descr="/tmp/claude-0/-home-user-riesgo/0ff9ff46-1396-5bd8-b3ac-2280dfbbbc55/scratchpad/work/gen/icons/question_white.png">    </p:cNvPr>
+          <p:cNvPr id="24" name="Image 4" descr="/tmp/claude-0/-home-user-riesgo/0ff9ff46-1396-5bd8-b3ac-2280dfbbbc55/scratchpad/work/gen/icons/question_white.png">    </p:cNvPr>
           <p:cNvPicPr>
             <a:picLocks noChangeAspect="1"/>
           </p:cNvPicPr>
@@ -24123,7 +24123,7 @@
       </p:pic>
       <p:sp>
         <p:nvSpPr>
-          <p:cNvPr id="24" name="Text 17"/>
+          <p:cNvPr id="25" name="Text 17"/>
           <p:cNvSpPr txBox="1"/>
           <p:nvPr/>
         </p:nvSpPr>
@@ -24165,7 +24165,7 @@
       </p:sp>
       <p:sp>
         <p:nvSpPr>
-          <p:cNvPr id="25" name="Text 18"/>
+          <p:cNvPr id="26" name="Text 18"/>
           <p:cNvSpPr txBox="1"/>
           <p:nvPr/>
         </p:nvSpPr>
@@ -24204,7 +24204,7 @@
       </p:sp>
       <p:sp>
         <p:nvSpPr>
-          <p:cNvPr id="26" name="Text 19"/>
+          <p:cNvPr id="27" name="Text 19"/>
           <p:cNvSpPr txBox="1"/>
           <p:nvPr/>
         </p:nvSpPr>
@@ -24275,7 +24275,7 @@
       </p:grpSpPr>
       <p:sp>
         <p:nvSpPr>
-          <p:cNvPr id="2" name="Text 0"/>
+          <p:cNvPr id="3" name="Text 0"/>
           <p:cNvSpPr txBox="1"/>
           <p:nvPr/>
         </p:nvSpPr>
@@ -24314,7 +24314,7 @@
       </p:sp>
       <p:sp>
         <p:nvSpPr>
-          <p:cNvPr id="3" name="Text 1"/>
+          <p:cNvPr id="4" name="Text 1"/>
           <p:cNvSpPr txBox="1"/>
           <p:nvPr/>
         </p:nvSpPr>
@@ -24356,7 +24356,7 @@
       </p:sp>
       <p:sp>
         <p:nvSpPr>
-          <p:cNvPr id="4" name="Text 2"/>
+          <p:cNvPr id="5" name="Text 2"/>
           <p:cNvSpPr txBox="1"/>
           <p:nvPr/>
         </p:nvSpPr>
@@ -24395,7 +24395,7 @@
       </p:sp>
       <p:sp>
         <p:nvSpPr>
-          <p:cNvPr id="5" name="Shape 3"/>
+          <p:cNvPr id="6" name="Shape 3"/>
           <p:cNvSpPr/>
           <p:nvPr/>
         </p:nvSpPr>
@@ -24417,7 +24417,7 @@
       </p:sp>
       <p:sp>
         <p:nvSpPr>
-          <p:cNvPr id="6" name="Text 4"/>
+          <p:cNvPr id="7" name="Text 4"/>
           <p:cNvSpPr txBox="1"/>
           <p:nvPr/>
         </p:nvSpPr>
@@ -24456,7 +24456,7 @@
       </p:sp>
       <p:sp>
         <p:nvSpPr>
-          <p:cNvPr id="7" name="Shape 5"/>
+          <p:cNvPr id="8" name="Shape 5"/>
           <p:cNvSpPr/>
           <p:nvPr/>
         </p:nvSpPr>
@@ -24478,7 +24478,7 @@
       </p:sp>
       <p:sp>
         <p:nvSpPr>
-          <p:cNvPr id="8" name="Text 6"/>
+          <p:cNvPr id="9" name="Text 6"/>
           <p:cNvSpPr txBox="1"/>
           <p:nvPr/>
         </p:nvSpPr>
@@ -24517,7 +24517,7 @@
       </p:sp>
       <p:sp>
         <p:nvSpPr>
-          <p:cNvPr id="9" name="Shape 7"/>
+          <p:cNvPr id="10" name="Shape 7"/>
           <p:cNvSpPr/>
           <p:nvPr/>
         </p:nvSpPr>
@@ -24539,7 +24539,7 @@
       </p:sp>
       <p:sp>
         <p:nvSpPr>
-          <p:cNvPr id="10" name="Shape 8"/>
+          <p:cNvPr id="11" name="Shape 8"/>
           <p:cNvSpPr/>
           <p:nvPr/>
         </p:nvSpPr>
@@ -24559,7 +24559,7 @@
       </p:sp>
       <p:pic>
         <p:nvPicPr>
-          <p:cNvPr id="11" name="Image 0" descr="/tmp/claude-0/-home-user-riesgo/0ff9ff46-1396-5bd8-b3ac-2280dfbbbc55/scratchpad/work/gen/icons/check_circle_white.png">    </p:cNvPr>
+          <p:cNvPr id="12" name="Image 0" descr="/tmp/claude-0/-home-user-riesgo/0ff9ff46-1396-5bd8-b3ac-2280dfbbbc55/scratchpad/work/gen/icons/check_circle_white.png">    </p:cNvPr>
           <p:cNvPicPr>
             <a:picLocks noChangeAspect="1"/>
           </p:cNvPicPr>
@@ -24583,7 +24583,7 @@
       </p:pic>
       <p:sp>
         <p:nvSpPr>
-          <p:cNvPr id="12" name="Text 9"/>
+          <p:cNvPr id="13" name="Text 9"/>
           <p:cNvSpPr txBox="1"/>
           <p:nvPr/>
         </p:nvSpPr>
@@ -24622,7 +24622,7 @@
       </p:sp>
       <p:sp>
         <p:nvSpPr>
-          <p:cNvPr id="13" name="Text 10"/>
+          <p:cNvPr id="14" name="Text 10"/>
           <p:cNvSpPr txBox="1"/>
           <p:nvPr/>
         </p:nvSpPr>
@@ -24664,7 +24664,7 @@
       </p:sp>
       <p:sp>
         <p:nvSpPr>
-          <p:cNvPr id="14" name="Shape 11"/>
+          <p:cNvPr id="15" name="Shape 11"/>
           <p:cNvSpPr/>
           <p:nvPr/>
         </p:nvSpPr>
@@ -24686,7 +24686,7 @@
       </p:sp>
       <p:sp>
         <p:nvSpPr>
-          <p:cNvPr id="15" name="Shape 12"/>
+          <p:cNvPr id="16" name="Shape 12"/>
           <p:cNvSpPr/>
           <p:nvPr/>
         </p:nvSpPr>
@@ -24706,7 +24706,7 @@
       </p:sp>
       <p:pic>
         <p:nvPicPr>
-          <p:cNvPr id="16" name="Image 1" descr="/tmp/claude-0/-home-user-riesgo/0ff9ff46-1396-5bd8-b3ac-2280dfbbbc55/scratchpad/work/gen/icons/people_group_white.png">    </p:cNvPr>
+          <p:cNvPr id="17" name="Image 1" descr="/tmp/claude-0/-home-user-riesgo/0ff9ff46-1396-5bd8-b3ac-2280dfbbbc55/scratchpad/work/gen/icons/people_group_white.png">    </p:cNvPr>
           <p:cNvPicPr>
             <a:picLocks noChangeAspect="1"/>
           </p:cNvPicPr>
@@ -24730,7 +24730,7 @@
       </p:pic>
       <p:sp>
         <p:nvSpPr>
-          <p:cNvPr id="17" name="Text 13"/>
+          <p:cNvPr id="18" name="Text 13"/>
           <p:cNvSpPr txBox="1"/>
           <p:nvPr/>
         </p:nvSpPr>
@@ -24769,7 +24769,7 @@
       </p:sp>
       <p:sp>
         <p:nvSpPr>
-          <p:cNvPr id="18" name="Text 14"/>
+          <p:cNvPr id="19" name="Text 14"/>
           <p:cNvSpPr txBox="1"/>
           <p:nvPr/>
         </p:nvSpPr>
@@ -24811,7 +24811,7 @@
       </p:sp>
       <p:sp>
         <p:nvSpPr>
-          <p:cNvPr id="19" name="Shape 15"/>
+          <p:cNvPr id="20" name="Shape 15"/>
           <p:cNvSpPr/>
           <p:nvPr/>
         </p:nvSpPr>
@@ -24833,7 +24833,7 @@
       </p:sp>
       <p:sp>
         <p:nvSpPr>
-          <p:cNvPr id="20" name="Shape 16"/>
+          <p:cNvPr id="21" name="Shape 16"/>
           <p:cNvSpPr/>
           <p:nvPr/>
         </p:nvSpPr>
@@ -24853,7 +24853,7 @@
       </p:sp>
       <p:pic>
         <p:nvPicPr>
-          <p:cNvPr id="21" name="Image 2" descr="/tmp/claude-0/-home-user-riesgo/0ff9ff46-1396-5bd8-b3ac-2280dfbbbc55/scratchpad/work/gen/icons/warning_triangle_white.png">    </p:cNvPr>
+          <p:cNvPr id="22" name="Image 2" descr="/tmp/claude-0/-home-user-riesgo/0ff9ff46-1396-5bd8-b3ac-2280dfbbbc55/scratchpad/work/gen/icons/warning_triangle_white.png">    </p:cNvPr>
           <p:cNvPicPr>
             <a:picLocks noChangeAspect="1"/>
           </p:cNvPicPr>
@@ -24877,7 +24877,7 @@
       </p:pic>
       <p:sp>
         <p:nvSpPr>
-          <p:cNvPr id="22" name="Text 17"/>
+          <p:cNvPr id="23" name="Text 17"/>
           <p:cNvSpPr txBox="1"/>
           <p:nvPr/>
         </p:nvSpPr>
@@ -24916,7 +24916,7 @@
       </p:sp>
       <p:sp>
         <p:nvSpPr>
-          <p:cNvPr id="23" name="Text 18"/>
+          <p:cNvPr id="24" name="Text 18"/>
           <p:cNvSpPr txBox="1"/>
           <p:nvPr/>
         </p:nvSpPr>
@@ -24958,7 +24958,7 @@
       </p:sp>
       <p:sp>
         <p:nvSpPr>
-          <p:cNvPr id="24" name="Text 19"/>
+          <p:cNvPr id="25" name="Text 19"/>
           <p:cNvSpPr txBox="1"/>
           <p:nvPr/>
         </p:nvSpPr>
@@ -24997,7 +24997,7 @@
       </p:sp>
       <p:sp>
         <p:nvSpPr>
-          <p:cNvPr id="25" name="Text 20"/>
+          <p:cNvPr id="26" name="Text 20"/>
           <p:cNvSpPr txBox="1"/>
           <p:nvPr/>
         </p:nvSpPr>
@@ -25068,7 +25068,7 @@
       </p:grpSpPr>
       <p:sp>
         <p:nvSpPr>
-          <p:cNvPr id="2" name="Text 0"/>
+          <p:cNvPr id="3" name="Text 0"/>
           <p:cNvSpPr txBox="1"/>
           <p:nvPr/>
         </p:nvSpPr>
@@ -25107,7 +25107,7 @@
       </p:sp>
       <p:sp>
         <p:nvSpPr>
-          <p:cNvPr id="3" name="Text 1"/>
+          <p:cNvPr id="4" name="Text 1"/>
           <p:cNvSpPr txBox="1"/>
           <p:nvPr/>
         </p:nvSpPr>
@@ -25149,7 +25149,7 @@
       </p:sp>
       <p:sp>
         <p:nvSpPr>
-          <p:cNvPr id="4" name="Shape 2"/>
+          <p:cNvPr id="5" name="Shape 2"/>
           <p:cNvSpPr/>
           <p:nvPr/>
         </p:nvSpPr>
@@ -25171,7 +25171,7 @@
       </p:sp>
       <p:sp>
         <p:nvSpPr>
-          <p:cNvPr id="5" name="Shape 3"/>
+          <p:cNvPr id="6" name="Shape 3"/>
           <p:cNvSpPr/>
           <p:nvPr/>
         </p:nvSpPr>
@@ -25191,7 +25191,7 @@
       </p:sp>
       <p:pic>
         <p:nvPicPr>
-          <p:cNvPr id="6" name="Image 0" descr="/tmp/claude-0/-home-user-riesgo/0ff9ff46-1396-5bd8-b3ac-2280dfbbbc55/scratchpad/work/gen/icons/social_navy.png">    </p:cNvPr>
+          <p:cNvPr id="7" name="Image 0" descr="/tmp/claude-0/-home-user-riesgo/0ff9ff46-1396-5bd8-b3ac-2280dfbbbc55/scratchpad/work/gen/icons/social_navy.png">    </p:cNvPr>
           <p:cNvPicPr>
             <a:picLocks noChangeAspect="1"/>
           </p:cNvPicPr>
@@ -25215,7 +25215,7 @@
       </p:pic>
       <p:sp>
         <p:nvSpPr>
-          <p:cNvPr id="7" name="Text 4"/>
+          <p:cNvPr id="8" name="Text 4"/>
           <p:cNvSpPr txBox="1"/>
           <p:nvPr/>
         </p:nvSpPr>
@@ -25254,7 +25254,7 @@
       </p:sp>
       <p:sp>
         <p:nvSpPr>
-          <p:cNvPr id="8" name="Text 5"/>
+          <p:cNvPr id="9" name="Text 5"/>
           <p:cNvSpPr txBox="1"/>
           <p:nvPr/>
         </p:nvSpPr>
@@ -25296,7 +25296,7 @@
       </p:sp>
       <p:sp>
         <p:nvSpPr>
-          <p:cNvPr id="9" name="Shape 6"/>
+          <p:cNvPr id="10" name="Shape 6"/>
           <p:cNvSpPr/>
           <p:nvPr/>
         </p:nvSpPr>
@@ -25318,7 +25318,7 @@
       </p:sp>
       <p:sp>
         <p:nvSpPr>
-          <p:cNvPr id="10" name="Shape 7"/>
+          <p:cNvPr id="11" name="Shape 7"/>
           <p:cNvSpPr/>
           <p:nvPr/>
         </p:nvSpPr>
@@ -25338,7 +25338,7 @@
       </p:sp>
       <p:pic>
         <p:nvPicPr>
-          <p:cNvPr id="11" name="Image 1" descr="/tmp/claude-0/-home-user-riesgo/0ff9ff46-1396-5bd8-b3ac-2280dfbbbc55/scratchpad/work/gen/icons/question_white.png">    </p:cNvPr>
+          <p:cNvPr id="12" name="Image 1" descr="/tmp/claude-0/-home-user-riesgo/0ff9ff46-1396-5bd8-b3ac-2280dfbbbc55/scratchpad/work/gen/icons/question_white.png">    </p:cNvPr>
           <p:cNvPicPr>
             <a:picLocks noChangeAspect="1"/>
           </p:cNvPicPr>
@@ -25362,7 +25362,7 @@
       </p:pic>
       <p:sp>
         <p:nvSpPr>
-          <p:cNvPr id="12" name="Text 8"/>
+          <p:cNvPr id="13" name="Text 8"/>
           <p:cNvSpPr txBox="1"/>
           <p:nvPr/>
         </p:nvSpPr>
@@ -25404,7 +25404,7 @@
       </p:sp>
       <p:sp>
         <p:nvSpPr>
-          <p:cNvPr id="13" name="Shape 9"/>
+          <p:cNvPr id="14" name="Shape 9"/>
           <p:cNvSpPr/>
           <p:nvPr/>
         </p:nvSpPr>
@@ -25426,7 +25426,7 @@
       </p:sp>
       <p:sp>
         <p:nvSpPr>
-          <p:cNvPr id="14" name="Shape 10"/>
+          <p:cNvPr id="15" name="Shape 10"/>
           <p:cNvSpPr/>
           <p:nvPr/>
         </p:nvSpPr>
@@ -25446,7 +25446,7 @@
       </p:sp>
       <p:pic>
         <p:nvPicPr>
-          <p:cNvPr id="15" name="Image 2" descr="/tmp/claude-0/-home-user-riesgo/0ff9ff46-1396-5bd8-b3ac-2280dfbbbc55/scratchpad/work/gen/icons/question_white.png">    </p:cNvPr>
+          <p:cNvPr id="16" name="Image 2" descr="/tmp/claude-0/-home-user-riesgo/0ff9ff46-1396-5bd8-b3ac-2280dfbbbc55/scratchpad/work/gen/icons/question_white.png">    </p:cNvPr>
           <p:cNvPicPr>
             <a:picLocks noChangeAspect="1"/>
           </p:cNvPicPr>
@@ -25470,7 +25470,7 @@
       </p:pic>
       <p:sp>
         <p:nvSpPr>
-          <p:cNvPr id="16" name="Text 11"/>
+          <p:cNvPr id="17" name="Text 11"/>
           <p:cNvSpPr txBox="1"/>
           <p:nvPr/>
         </p:nvSpPr>
@@ -25512,7 +25512,7 @@
       </p:sp>
       <p:sp>
         <p:nvSpPr>
-          <p:cNvPr id="17" name="Shape 12"/>
+          <p:cNvPr id="18" name="Shape 12"/>
           <p:cNvSpPr/>
           <p:nvPr/>
         </p:nvSpPr>
@@ -25534,7 +25534,7 @@
       </p:sp>
       <p:sp>
         <p:nvSpPr>
-          <p:cNvPr id="18" name="Shape 13"/>
+          <p:cNvPr id="19" name="Shape 13"/>
           <p:cNvSpPr/>
           <p:nvPr/>
         </p:nvSpPr>
@@ -25554,7 +25554,7 @@
       </p:sp>
       <p:pic>
         <p:nvPicPr>
-          <p:cNvPr id="19" name="Image 3" descr="/tmp/claude-0/-home-user-riesgo/0ff9ff46-1396-5bd8-b3ac-2280dfbbbc55/scratchpad/work/gen/icons/question_white.png">    </p:cNvPr>
+          <p:cNvPr id="20" name="Image 3" descr="/tmp/claude-0/-home-user-riesgo/0ff9ff46-1396-5bd8-b3ac-2280dfbbbc55/scratchpad/work/gen/icons/question_white.png">    </p:cNvPr>
           <p:cNvPicPr>
             <a:picLocks noChangeAspect="1"/>
           </p:cNvPicPr>
@@ -25578,7 +25578,7 @@
       </p:pic>
       <p:sp>
         <p:nvSpPr>
-          <p:cNvPr id="20" name="Text 14"/>
+          <p:cNvPr id="21" name="Text 14"/>
           <p:cNvSpPr txBox="1"/>
           <p:nvPr/>
         </p:nvSpPr>
@@ -25620,7 +25620,7 @@
       </p:sp>
       <p:sp>
         <p:nvSpPr>
-          <p:cNvPr id="21" name="Shape 15"/>
+          <p:cNvPr id="22" name="Shape 15"/>
           <p:cNvSpPr/>
           <p:nvPr/>
         </p:nvSpPr>
@@ -25642,7 +25642,7 @@
       </p:sp>
       <p:sp>
         <p:nvSpPr>
-          <p:cNvPr id="22" name="Shape 16"/>
+          <p:cNvPr id="23" name="Shape 16"/>
           <p:cNvSpPr/>
           <p:nvPr/>
         </p:nvSpPr>
@@ -25662,7 +25662,7 @@
       </p:sp>
       <p:pic>
         <p:nvPicPr>
-          <p:cNvPr id="23" name="Image 4" descr="/tmp/claude-0/-home-user-riesgo/0ff9ff46-1396-5bd8-b3ac-2280dfbbbc55/scratchpad/work/gen/icons/question_white.png">    </p:cNvPr>
+          <p:cNvPr id="24" name="Image 4" descr="/tmp/claude-0/-home-user-riesgo/0ff9ff46-1396-5bd8-b3ac-2280dfbbbc55/scratchpad/work/gen/icons/question_white.png">    </p:cNvPr>
           <p:cNvPicPr>
             <a:picLocks noChangeAspect="1"/>
           </p:cNvPicPr>
@@ -25686,7 +25686,7 @@
       </p:pic>
       <p:sp>
         <p:nvSpPr>
-          <p:cNvPr id="24" name="Text 17"/>
+          <p:cNvPr id="25" name="Text 17"/>
           <p:cNvSpPr txBox="1"/>
           <p:nvPr/>
         </p:nvSpPr>
@@ -25728,7 +25728,7 @@
       </p:sp>
       <p:sp>
         <p:nvSpPr>
-          <p:cNvPr id="25" name="Text 18"/>
+          <p:cNvPr id="26" name="Text 18"/>
           <p:cNvSpPr txBox="1"/>
           <p:nvPr/>
         </p:nvSpPr>
@@ -25767,7 +25767,7 @@
       </p:sp>
       <p:sp>
         <p:nvSpPr>
-          <p:cNvPr id="26" name="Text 19"/>
+          <p:cNvPr id="27" name="Text 19"/>
           <p:cNvSpPr txBox="1"/>
           <p:nvPr/>
         </p:nvSpPr>
@@ -25838,7 +25838,7 @@
       </p:grpSpPr>
       <p:sp>
         <p:nvSpPr>
-          <p:cNvPr id="2" name="Text 0"/>
+          <p:cNvPr id="3" name="Text 0"/>
           <p:cNvSpPr txBox="1"/>
           <p:nvPr/>
         </p:nvSpPr>
@@ -25877,7 +25877,7 @@
       </p:sp>
       <p:sp>
         <p:nvSpPr>
-          <p:cNvPr id="3" name="Text 1"/>
+          <p:cNvPr id="4" name="Text 1"/>
           <p:cNvSpPr txBox="1"/>
           <p:nvPr/>
         </p:nvSpPr>
@@ -25919,7 +25919,7 @@
       </p:sp>
       <p:sp>
         <p:nvSpPr>
-          <p:cNvPr id="4" name="Text 2"/>
+          <p:cNvPr id="5" name="Text 2"/>
           <p:cNvSpPr txBox="1"/>
           <p:nvPr/>
         </p:nvSpPr>
@@ -25958,7 +25958,7 @@
       </p:sp>
       <p:sp>
         <p:nvSpPr>
-          <p:cNvPr id="5" name="Shape 3"/>
+          <p:cNvPr id="6" name="Shape 3"/>
           <p:cNvSpPr/>
           <p:nvPr/>
         </p:nvSpPr>
@@ -25980,7 +25980,7 @@
       </p:sp>
       <p:sp>
         <p:nvSpPr>
-          <p:cNvPr id="6" name="Text 4"/>
+          <p:cNvPr id="7" name="Text 4"/>
           <p:cNvSpPr txBox="1"/>
           <p:nvPr/>
         </p:nvSpPr>
@@ -26019,7 +26019,7 @@
       </p:sp>
       <p:sp>
         <p:nvSpPr>
-          <p:cNvPr id="7" name="Shape 5"/>
+          <p:cNvPr id="8" name="Shape 5"/>
           <p:cNvSpPr/>
           <p:nvPr/>
         </p:nvSpPr>
@@ -26041,7 +26041,7 @@
       </p:sp>
       <p:sp>
         <p:nvSpPr>
-          <p:cNvPr id="8" name="Shape 6"/>
+          <p:cNvPr id="9" name="Shape 6"/>
           <p:cNvSpPr/>
           <p:nvPr/>
         </p:nvSpPr>
@@ -26061,7 +26061,7 @@
       </p:sp>
       <p:pic>
         <p:nvPicPr>
-          <p:cNvPr id="9" name="Image 0" descr="/tmp/claude-0/-home-user-riesgo/0ff9ff46-1396-5bd8-b3ac-2280dfbbbc55/scratchpad/work/gen/icons/check_circle_white.png">    </p:cNvPr>
+          <p:cNvPr id="10" name="Image 0" descr="/tmp/claude-0/-home-user-riesgo/0ff9ff46-1396-5bd8-b3ac-2280dfbbbc55/scratchpad/work/gen/icons/check_circle_white.png">    </p:cNvPr>
           <p:cNvPicPr>
             <a:picLocks noChangeAspect="1"/>
           </p:cNvPicPr>
@@ -26085,7 +26085,7 @@
       </p:pic>
       <p:sp>
         <p:nvSpPr>
-          <p:cNvPr id="10" name="Text 7"/>
+          <p:cNvPr id="11" name="Text 7"/>
           <p:cNvSpPr txBox="1"/>
           <p:nvPr/>
         </p:nvSpPr>
@@ -26124,7 +26124,7 @@
       </p:sp>
       <p:sp>
         <p:nvSpPr>
-          <p:cNvPr id="11" name="Text 8"/>
+          <p:cNvPr id="12" name="Text 8"/>
           <p:cNvSpPr txBox="1"/>
           <p:nvPr/>
         </p:nvSpPr>
@@ -26166,7 +26166,7 @@
       </p:sp>
       <p:sp>
         <p:nvSpPr>
-          <p:cNvPr id="12" name="Shape 9"/>
+          <p:cNvPr id="13" name="Shape 9"/>
           <p:cNvSpPr/>
           <p:nvPr/>
         </p:nvSpPr>
@@ -26188,7 +26188,7 @@
       </p:sp>
       <p:sp>
         <p:nvSpPr>
-          <p:cNvPr id="13" name="Shape 10"/>
+          <p:cNvPr id="14" name="Shape 10"/>
           <p:cNvSpPr/>
           <p:nvPr/>
         </p:nvSpPr>
@@ -26208,7 +26208,7 @@
       </p:sp>
       <p:pic>
         <p:nvPicPr>
-          <p:cNvPr id="14" name="Image 1" descr="/tmp/claude-0/-home-user-riesgo/0ff9ff46-1396-5bd8-b3ac-2280dfbbbc55/scratchpad/work/gen/icons/people_group_white.png">    </p:cNvPr>
+          <p:cNvPr id="15" name="Image 1" descr="/tmp/claude-0/-home-user-riesgo/0ff9ff46-1396-5bd8-b3ac-2280dfbbbc55/scratchpad/work/gen/icons/people_group_white.png">    </p:cNvPr>
           <p:cNvPicPr>
             <a:picLocks noChangeAspect="1"/>
           </p:cNvPicPr>
@@ -26232,7 +26232,7 @@
       </p:pic>
       <p:sp>
         <p:nvSpPr>
-          <p:cNvPr id="15" name="Text 11"/>
+          <p:cNvPr id="16" name="Text 11"/>
           <p:cNvSpPr txBox="1"/>
           <p:nvPr/>
         </p:nvSpPr>
@@ -26271,7 +26271,7 @@
       </p:sp>
       <p:sp>
         <p:nvSpPr>
-          <p:cNvPr id="16" name="Text 12"/>
+          <p:cNvPr id="17" name="Text 12"/>
           <p:cNvSpPr txBox="1"/>
           <p:nvPr/>
         </p:nvSpPr>
@@ -26313,7 +26313,7 @@
       </p:sp>
       <p:sp>
         <p:nvSpPr>
-          <p:cNvPr id="17" name="Shape 13"/>
+          <p:cNvPr id="18" name="Shape 13"/>
           <p:cNvSpPr/>
           <p:nvPr/>
         </p:nvSpPr>
@@ -26335,7 +26335,7 @@
       </p:sp>
       <p:sp>
         <p:nvSpPr>
-          <p:cNvPr id="18" name="Shape 14"/>
+          <p:cNvPr id="19" name="Shape 14"/>
           <p:cNvSpPr/>
           <p:nvPr/>
         </p:nvSpPr>
@@ -26355,7 +26355,7 @@
       </p:sp>
       <p:pic>
         <p:nvPicPr>
-          <p:cNvPr id="19" name="Image 2" descr="/tmp/claude-0/-home-user-riesgo/0ff9ff46-1396-5bd8-b3ac-2280dfbbbc55/scratchpad/work/gen/icons/warning_triangle_white.png">    </p:cNvPr>
+          <p:cNvPr id="20" name="Image 2" descr="/tmp/claude-0/-home-user-riesgo/0ff9ff46-1396-5bd8-b3ac-2280dfbbbc55/scratchpad/work/gen/icons/warning_triangle_white.png">    </p:cNvPr>
           <p:cNvPicPr>
             <a:picLocks noChangeAspect="1"/>
           </p:cNvPicPr>
@@ -26379,7 +26379,7 @@
       </p:pic>
       <p:sp>
         <p:nvSpPr>
-          <p:cNvPr id="20" name="Text 15"/>
+          <p:cNvPr id="21" name="Text 15"/>
           <p:cNvSpPr txBox="1"/>
           <p:nvPr/>
         </p:nvSpPr>
@@ -26418,7 +26418,7 @@
       </p:sp>
       <p:sp>
         <p:nvSpPr>
-          <p:cNvPr id="21" name="Text 16"/>
+          <p:cNvPr id="22" name="Text 16"/>
           <p:cNvSpPr txBox="1"/>
           <p:nvPr/>
         </p:nvSpPr>
@@ -26460,7 +26460,7 @@
       </p:sp>
       <p:sp>
         <p:nvSpPr>
-          <p:cNvPr id="22" name="Text 17"/>
+          <p:cNvPr id="23" name="Text 17"/>
           <p:cNvSpPr txBox="1"/>
           <p:nvPr/>
         </p:nvSpPr>
@@ -26499,7 +26499,7 @@
       </p:sp>
       <p:sp>
         <p:nvSpPr>
-          <p:cNvPr id="23" name="Text 18"/>
+          <p:cNvPr id="24" name="Text 18"/>
           <p:cNvSpPr txBox="1"/>
           <p:nvPr/>
         </p:nvSpPr>
@@ -26570,7 +26570,7 @@
       </p:grpSpPr>
       <p:sp>
         <p:nvSpPr>
-          <p:cNvPr id="2" name="Text 0"/>
+          <p:cNvPr id="3" name="Text 0"/>
           <p:cNvSpPr txBox="1"/>
           <p:nvPr/>
         </p:nvSpPr>
@@ -26609,7 +26609,7 @@
       </p:sp>
       <p:sp>
         <p:nvSpPr>
-          <p:cNvPr id="3" name="Text 1"/>
+          <p:cNvPr id="4" name="Text 1"/>
           <p:cNvSpPr txBox="1"/>
           <p:nvPr/>
         </p:nvSpPr>
@@ -26651,7 +26651,7 @@
       </p:sp>
       <p:sp>
         <p:nvSpPr>
-          <p:cNvPr id="4" name="Shape 2"/>
+          <p:cNvPr id="5" name="Shape 2"/>
           <p:cNvSpPr/>
           <p:nvPr/>
         </p:nvSpPr>
@@ -26673,7 +26673,7 @@
       </p:sp>
       <p:sp>
         <p:nvSpPr>
-          <p:cNvPr id="5" name="Shape 3"/>
+          <p:cNvPr id="6" name="Shape 3"/>
           <p:cNvSpPr/>
           <p:nvPr/>
         </p:nvSpPr>
@@ -26693,7 +26693,7 @@
       </p:sp>
       <p:pic>
         <p:nvPicPr>
-          <p:cNvPr id="6" name="Image 0" descr="/tmp/claude-0/-home-user-riesgo/0ff9ff46-1396-5bd8-b3ac-2280dfbbbc55/scratchpad/work/gen/icons/search_doc_navy.png">    </p:cNvPr>
+          <p:cNvPr id="7" name="Image 0" descr="/tmp/claude-0/-home-user-riesgo/0ff9ff46-1396-5bd8-b3ac-2280dfbbbc55/scratchpad/work/gen/icons/search_doc_navy.png">    </p:cNvPr>
           <p:cNvPicPr>
             <a:picLocks noChangeAspect="1"/>
           </p:cNvPicPr>
@@ -26717,7 +26717,7 @@
       </p:pic>
       <p:sp>
         <p:nvSpPr>
-          <p:cNvPr id="7" name="Text 4"/>
+          <p:cNvPr id="8" name="Text 4"/>
           <p:cNvSpPr txBox="1"/>
           <p:nvPr/>
         </p:nvSpPr>
@@ -26756,7 +26756,7 @@
       </p:sp>
       <p:sp>
         <p:nvSpPr>
-          <p:cNvPr id="8" name="Text 5"/>
+          <p:cNvPr id="9" name="Text 5"/>
           <p:cNvSpPr txBox="1"/>
           <p:nvPr/>
         </p:nvSpPr>
@@ -26798,7 +26798,7 @@
       </p:sp>
       <p:sp>
         <p:nvSpPr>
-          <p:cNvPr id="9" name="Shape 6"/>
+          <p:cNvPr id="10" name="Shape 6"/>
           <p:cNvSpPr/>
           <p:nvPr/>
         </p:nvSpPr>
@@ -26820,7 +26820,7 @@
       </p:sp>
       <p:sp>
         <p:nvSpPr>
-          <p:cNvPr id="10" name="Shape 7"/>
+          <p:cNvPr id="11" name="Shape 7"/>
           <p:cNvSpPr/>
           <p:nvPr/>
         </p:nvSpPr>
@@ -26840,7 +26840,7 @@
       </p:sp>
       <p:pic>
         <p:nvPicPr>
-          <p:cNvPr id="11" name="Image 1" descr="/tmp/claude-0/-home-user-riesgo/0ff9ff46-1396-5bd8-b3ac-2280dfbbbc55/scratchpad/work/gen/icons/question_white.png">    </p:cNvPr>
+          <p:cNvPr id="12" name="Image 1" descr="/tmp/claude-0/-home-user-riesgo/0ff9ff46-1396-5bd8-b3ac-2280dfbbbc55/scratchpad/work/gen/icons/question_white.png">    </p:cNvPr>
           <p:cNvPicPr>
             <a:picLocks noChangeAspect="1"/>
           </p:cNvPicPr>
@@ -26864,7 +26864,7 @@
       </p:pic>
       <p:sp>
         <p:nvSpPr>
-          <p:cNvPr id="12" name="Text 8"/>
+          <p:cNvPr id="13" name="Text 8"/>
           <p:cNvSpPr txBox="1"/>
           <p:nvPr/>
         </p:nvSpPr>
@@ -26906,7 +26906,7 @@
       </p:sp>
       <p:sp>
         <p:nvSpPr>
-          <p:cNvPr id="13" name="Shape 9"/>
+          <p:cNvPr id="14" name="Shape 9"/>
           <p:cNvSpPr/>
           <p:nvPr/>
         </p:nvSpPr>
@@ -26928,7 +26928,7 @@
       </p:sp>
       <p:sp>
         <p:nvSpPr>
-          <p:cNvPr id="14" name="Shape 10"/>
+          <p:cNvPr id="15" name="Shape 10"/>
           <p:cNvSpPr/>
           <p:nvPr/>
         </p:nvSpPr>
@@ -26948,7 +26948,7 @@
       </p:sp>
       <p:pic>
         <p:nvPicPr>
-          <p:cNvPr id="15" name="Image 2" descr="/tmp/claude-0/-home-user-riesgo/0ff9ff46-1396-5bd8-b3ac-2280dfbbbc55/scratchpad/work/gen/icons/question_white.png">    </p:cNvPr>
+          <p:cNvPr id="16" name="Image 2" descr="/tmp/claude-0/-home-user-riesgo/0ff9ff46-1396-5bd8-b3ac-2280dfbbbc55/scratchpad/work/gen/icons/question_white.png">    </p:cNvPr>
           <p:cNvPicPr>
             <a:picLocks noChangeAspect="1"/>
           </p:cNvPicPr>
@@ -26972,7 +26972,7 @@
       </p:pic>
       <p:sp>
         <p:nvSpPr>
-          <p:cNvPr id="16" name="Text 11"/>
+          <p:cNvPr id="17" name="Text 11"/>
           <p:cNvSpPr txBox="1"/>
           <p:nvPr/>
         </p:nvSpPr>
@@ -27014,7 +27014,7 @@
       </p:sp>
       <p:sp>
         <p:nvSpPr>
-          <p:cNvPr id="17" name="Shape 12"/>
+          <p:cNvPr id="18" name="Shape 12"/>
           <p:cNvSpPr/>
           <p:nvPr/>
         </p:nvSpPr>
@@ -27036,7 +27036,7 @@
       </p:sp>
       <p:sp>
         <p:nvSpPr>
-          <p:cNvPr id="18" name="Shape 13"/>
+          <p:cNvPr id="19" name="Shape 13"/>
           <p:cNvSpPr/>
           <p:nvPr/>
         </p:nvSpPr>
@@ -27056,7 +27056,7 @@
       </p:sp>
       <p:pic>
         <p:nvPicPr>
-          <p:cNvPr id="19" name="Image 3" descr="/tmp/claude-0/-home-user-riesgo/0ff9ff46-1396-5bd8-b3ac-2280dfbbbc55/scratchpad/work/gen/icons/question_white.png">    </p:cNvPr>
+          <p:cNvPr id="20" name="Image 3" descr="/tmp/claude-0/-home-user-riesgo/0ff9ff46-1396-5bd8-b3ac-2280dfbbbc55/scratchpad/work/gen/icons/question_white.png">    </p:cNvPr>
           <p:cNvPicPr>
             <a:picLocks noChangeAspect="1"/>
           </p:cNvPicPr>
@@ -27080,7 +27080,7 @@
       </p:pic>
       <p:sp>
         <p:nvSpPr>
-          <p:cNvPr id="20" name="Text 14"/>
+          <p:cNvPr id="21" name="Text 14"/>
           <p:cNvSpPr txBox="1"/>
           <p:nvPr/>
         </p:nvSpPr>
@@ -27122,7 +27122,7 @@
       </p:sp>
       <p:sp>
         <p:nvSpPr>
-          <p:cNvPr id="21" name="Shape 15"/>
+          <p:cNvPr id="22" name="Shape 15"/>
           <p:cNvSpPr/>
           <p:nvPr/>
         </p:nvSpPr>
@@ -27144,7 +27144,7 @@
       </p:sp>
       <p:sp>
         <p:nvSpPr>
-          <p:cNvPr id="22" name="Shape 16"/>
+          <p:cNvPr id="23" name="Shape 16"/>
           <p:cNvSpPr/>
           <p:nvPr/>
         </p:nvSpPr>
@@ -27164,7 +27164,7 @@
       </p:sp>
       <p:pic>
         <p:nvPicPr>
-          <p:cNvPr id="23" name="Image 4" descr="/tmp/claude-0/-home-user-riesgo/0ff9ff46-1396-5bd8-b3ac-2280dfbbbc55/scratchpad/work/gen/icons/question_white.png">    </p:cNvPr>
+          <p:cNvPr id="24" name="Image 4" descr="/tmp/claude-0/-home-user-riesgo/0ff9ff46-1396-5bd8-b3ac-2280dfbbbc55/scratchpad/work/gen/icons/question_white.png">    </p:cNvPr>
           <p:cNvPicPr>
             <a:picLocks noChangeAspect="1"/>
           </p:cNvPicPr>
@@ -27188,7 +27188,7 @@
       </p:pic>
       <p:sp>
         <p:nvSpPr>
-          <p:cNvPr id="24" name="Text 17"/>
+          <p:cNvPr id="25" name="Text 17"/>
           <p:cNvSpPr txBox="1"/>
           <p:nvPr/>
         </p:nvSpPr>
@@ -27230,7 +27230,7 @@
       </p:sp>
       <p:sp>
         <p:nvSpPr>
-          <p:cNvPr id="25" name="Text 18"/>
+          <p:cNvPr id="26" name="Text 18"/>
           <p:cNvSpPr txBox="1"/>
           <p:nvPr/>
         </p:nvSpPr>
@@ -27269,7 +27269,7 @@
       </p:sp>
       <p:sp>
         <p:nvSpPr>
-          <p:cNvPr id="26" name="Text 19"/>
+          <p:cNvPr id="27" name="Text 19"/>
           <p:cNvSpPr txBox="1"/>
           <p:nvPr/>
         </p:nvSpPr>
@@ -27340,7 +27340,7 @@
       </p:grpSpPr>
       <p:sp>
         <p:nvSpPr>
-          <p:cNvPr id="2" name="Text 0"/>
+          <p:cNvPr id="3" name="Text 0"/>
           <p:cNvSpPr txBox="1"/>
           <p:nvPr/>
         </p:nvSpPr>
@@ -27379,7 +27379,7 @@
       </p:sp>
       <p:sp>
         <p:nvSpPr>
-          <p:cNvPr id="3" name="Text 1"/>
+          <p:cNvPr id="4" name="Text 1"/>
           <p:cNvSpPr txBox="1"/>
           <p:nvPr/>
         </p:nvSpPr>
@@ -27421,7 +27421,7 @@
       </p:sp>
       <p:sp>
         <p:nvSpPr>
-          <p:cNvPr id="4" name="Text 2"/>
+          <p:cNvPr id="5" name="Text 2"/>
           <p:cNvSpPr txBox="1"/>
           <p:nvPr/>
         </p:nvSpPr>
@@ -27460,7 +27460,7 @@
       </p:sp>
       <p:sp>
         <p:nvSpPr>
-          <p:cNvPr id="5" name="Shape 3"/>
+          <p:cNvPr id="6" name="Shape 3"/>
           <p:cNvSpPr/>
           <p:nvPr/>
         </p:nvSpPr>
@@ -27489,7 +27489,7 @@
       </p:sp>
       <p:sp>
         <p:nvSpPr>
-          <p:cNvPr id="6" name="Shape 4"/>
+          <p:cNvPr id="7" name="Shape 4"/>
           <p:cNvSpPr/>
           <p:nvPr/>
         </p:nvSpPr>
@@ -27509,7 +27509,7 @@
       </p:sp>
       <p:pic>
         <p:nvPicPr>
-          <p:cNvPr id="7" name="Image 0" descr="/tmp/claude-0/-home-user-riesgo/0ff9ff46-1396-5bd8-b3ac-2280dfbbbc55/scratchpad/work/gen/icons/document_navy.png">    </p:cNvPr>
+          <p:cNvPr id="8" name="Image 0" descr="/tmp/claude-0/-home-user-riesgo/0ff9ff46-1396-5bd8-b3ac-2280dfbbbc55/scratchpad/work/gen/icons/document_navy.png">    </p:cNvPr>
           <p:cNvPicPr>
             <a:picLocks noChangeAspect="1"/>
           </p:cNvPicPr>
@@ -27533,7 +27533,7 @@
       </p:pic>
       <p:sp>
         <p:nvSpPr>
-          <p:cNvPr id="8" name="Text 5"/>
+          <p:cNvPr id="9" name="Text 5"/>
           <p:cNvSpPr txBox="1"/>
           <p:nvPr/>
         </p:nvSpPr>
@@ -27572,7 +27572,7 @@
       </p:sp>
       <p:sp>
         <p:nvSpPr>
-          <p:cNvPr id="9" name="Text 6"/>
+          <p:cNvPr id="10" name="Text 6"/>
           <p:cNvSpPr txBox="1"/>
           <p:nvPr/>
         </p:nvSpPr>
@@ -27614,7 +27614,7 @@
       </p:sp>
       <p:sp>
         <p:nvSpPr>
-          <p:cNvPr id="10" name="Shape 7"/>
+          <p:cNvPr id="11" name="Shape 7"/>
           <p:cNvSpPr/>
           <p:nvPr/>
         </p:nvSpPr>
@@ -27643,7 +27643,7 @@
       </p:sp>
       <p:sp>
         <p:nvSpPr>
-          <p:cNvPr id="11" name="Shape 8"/>
+          <p:cNvPr id="12" name="Shape 8"/>
           <p:cNvSpPr/>
           <p:nvPr/>
         </p:nvSpPr>
@@ -27663,7 +27663,7 @@
       </p:sp>
       <p:pic>
         <p:nvPicPr>
-          <p:cNvPr id="12" name="Image 1" descr="/tmp/claude-0/-home-user-riesgo/0ff9ff46-1396-5bd8-b3ac-2280dfbbbc55/scratchpad/work/gen/icons/cable_navy.png">    </p:cNvPr>
+          <p:cNvPr id="13" name="Image 1" descr="/tmp/claude-0/-home-user-riesgo/0ff9ff46-1396-5bd8-b3ac-2280dfbbbc55/scratchpad/work/gen/icons/cable_navy.png">    </p:cNvPr>
           <p:cNvPicPr>
             <a:picLocks noChangeAspect="1"/>
           </p:cNvPicPr>
@@ -27687,7 +27687,7 @@
       </p:pic>
       <p:sp>
         <p:nvSpPr>
-          <p:cNvPr id="13" name="Text 9"/>
+          <p:cNvPr id="14" name="Text 9"/>
           <p:cNvSpPr txBox="1"/>
           <p:nvPr/>
         </p:nvSpPr>
@@ -27726,7 +27726,7 @@
       </p:sp>
       <p:sp>
         <p:nvSpPr>
-          <p:cNvPr id="14" name="Text 10"/>
+          <p:cNvPr id="15" name="Text 10"/>
           <p:cNvSpPr txBox="1"/>
           <p:nvPr/>
         </p:nvSpPr>
@@ -27768,7 +27768,7 @@
       </p:sp>
       <p:sp>
         <p:nvSpPr>
-          <p:cNvPr id="15" name="Shape 11"/>
+          <p:cNvPr id="16" name="Shape 11"/>
           <p:cNvSpPr/>
           <p:nvPr/>
         </p:nvSpPr>
@@ -27797,7 +27797,7 @@
       </p:sp>
       <p:sp>
         <p:nvSpPr>
-          <p:cNvPr id="16" name="Shape 12"/>
+          <p:cNvPr id="17" name="Shape 12"/>
           <p:cNvSpPr/>
           <p:nvPr/>
         </p:nvSpPr>
@@ -27817,7 +27817,7 @@
       </p:sp>
       <p:pic>
         <p:nvPicPr>
-          <p:cNvPr id="17" name="Image 2" descr="/tmp/claude-0/-home-user-riesgo/0ff9ff46-1396-5bd8-b3ac-2280dfbbbc55/scratchpad/work/gen/icons/password_navy.png">    </p:cNvPr>
+          <p:cNvPr id="18" name="Image 2" descr="/tmp/claude-0/-home-user-riesgo/0ff9ff46-1396-5bd8-b3ac-2280dfbbbc55/scratchpad/work/gen/icons/password_navy.png">    </p:cNvPr>
           <p:cNvPicPr>
             <a:picLocks noChangeAspect="1"/>
           </p:cNvPicPr>
@@ -27841,7 +27841,7 @@
       </p:pic>
       <p:sp>
         <p:nvSpPr>
-          <p:cNvPr id="18" name="Text 13"/>
+          <p:cNvPr id="19" name="Text 13"/>
           <p:cNvSpPr txBox="1"/>
           <p:nvPr/>
         </p:nvSpPr>
@@ -27880,7 +27880,7 @@
       </p:sp>
       <p:sp>
         <p:nvSpPr>
-          <p:cNvPr id="19" name="Text 14"/>
+          <p:cNvPr id="20" name="Text 14"/>
           <p:cNvSpPr txBox="1"/>
           <p:nvPr/>
         </p:nvSpPr>
@@ -27922,7 +27922,7 @@
       </p:sp>
       <p:sp>
         <p:nvSpPr>
-          <p:cNvPr id="20" name="Shape 15"/>
+          <p:cNvPr id="21" name="Shape 15"/>
           <p:cNvSpPr/>
           <p:nvPr/>
         </p:nvSpPr>
@@ -27951,7 +27951,7 @@
       </p:sp>
       <p:sp>
         <p:nvSpPr>
-          <p:cNvPr id="21" name="Shape 16"/>
+          <p:cNvPr id="22" name="Shape 16"/>
           <p:cNvSpPr/>
           <p:nvPr/>
         </p:nvSpPr>
@@ -27971,7 +27971,7 @@
       </p:sp>
       <p:pic>
         <p:nvPicPr>
-          <p:cNvPr id="22" name="Image 3" descr="/tmp/claude-0/-home-user-riesgo/0ff9ff46-1396-5bd8-b3ac-2280dfbbbc55/scratchpad/work/gen/icons/door_open_navy.png">    </p:cNvPr>
+          <p:cNvPr id="23" name="Image 3" descr="/tmp/claude-0/-home-user-riesgo/0ff9ff46-1396-5bd8-b3ac-2280dfbbbc55/scratchpad/work/gen/icons/door_open_navy.png">    </p:cNvPr>
           <p:cNvPicPr>
             <a:picLocks noChangeAspect="1"/>
           </p:cNvPicPr>
@@ -27995,7 +27995,7 @@
       </p:pic>
       <p:sp>
         <p:nvSpPr>
-          <p:cNvPr id="23" name="Text 17"/>
+          <p:cNvPr id="24" name="Text 17"/>
           <p:cNvSpPr txBox="1"/>
           <p:nvPr/>
         </p:nvSpPr>
@@ -28034,7 +28034,7 @@
       </p:sp>
       <p:sp>
         <p:nvSpPr>
-          <p:cNvPr id="24" name="Text 18"/>
+          <p:cNvPr id="25" name="Text 18"/>
           <p:cNvSpPr txBox="1"/>
           <p:nvPr/>
         </p:nvSpPr>
@@ -28076,7 +28076,7 @@
       </p:sp>
       <p:sp>
         <p:nvSpPr>
-          <p:cNvPr id="25" name="Shape 19"/>
+          <p:cNvPr id="26" name="Shape 19"/>
           <p:cNvSpPr/>
           <p:nvPr/>
         </p:nvSpPr>
@@ -28105,7 +28105,7 @@
       </p:sp>
       <p:sp>
         <p:nvSpPr>
-          <p:cNvPr id="26" name="Shape 20"/>
+          <p:cNvPr id="27" name="Shape 20"/>
           <p:cNvSpPr/>
           <p:nvPr/>
         </p:nvSpPr>
@@ -28125,7 +28125,7 @@
       </p:sp>
       <p:pic>
         <p:nvPicPr>
-          <p:cNvPr id="27" name="Image 4" descr="/tmp/claude-0/-home-user-riesgo/0ff9ff46-1396-5bd8-b3ac-2280dfbbbc55/scratchpad/work/gen/icons/x_circle_navy.png">    </p:cNvPr>
+          <p:cNvPr id="28" name="Image 4" descr="/tmp/claude-0/-home-user-riesgo/0ff9ff46-1396-5bd8-b3ac-2280dfbbbc55/scratchpad/work/gen/icons/x_circle_navy.png">    </p:cNvPr>
           <p:cNvPicPr>
             <a:picLocks noChangeAspect="1"/>
           </p:cNvPicPr>
@@ -28149,7 +28149,7 @@
       </p:pic>
       <p:sp>
         <p:nvSpPr>
-          <p:cNvPr id="28" name="Text 21"/>
+          <p:cNvPr id="29" name="Text 21"/>
           <p:cNvSpPr txBox="1"/>
           <p:nvPr/>
         </p:nvSpPr>
@@ -28188,7 +28188,7 @@
       </p:sp>
       <p:sp>
         <p:nvSpPr>
-          <p:cNvPr id="29" name="Text 22"/>
+          <p:cNvPr id="30" name="Text 22"/>
           <p:cNvSpPr txBox="1"/>
           <p:nvPr/>
         </p:nvSpPr>
@@ -28230,7 +28230,7 @@
       </p:sp>
       <p:sp>
         <p:nvSpPr>
-          <p:cNvPr id="30" name="Shape 23"/>
+          <p:cNvPr id="31" name="Shape 23"/>
           <p:cNvSpPr/>
           <p:nvPr/>
         </p:nvSpPr>
@@ -28259,7 +28259,7 @@
       </p:sp>
       <p:sp>
         <p:nvSpPr>
-          <p:cNvPr id="31" name="Shape 24"/>
+          <p:cNvPr id="32" name="Shape 24"/>
           <p:cNvSpPr/>
           <p:nvPr/>
         </p:nvSpPr>
@@ -28279,7 +28279,7 @@
       </p:sp>
       <p:pic>
         <p:nvPicPr>
-          <p:cNvPr id="32" name="Image 5" descr="/tmp/claude-0/-home-user-riesgo/0ff9ff46-1396-5bd8-b3ac-2280dfbbbc55/scratchpad/work/gen/icons/computer_navy.png">    </p:cNvPr>
+          <p:cNvPr id="33" name="Image 5" descr="/tmp/claude-0/-home-user-riesgo/0ff9ff46-1396-5bd8-b3ac-2280dfbbbc55/scratchpad/work/gen/icons/computer_navy.png">    </p:cNvPr>
           <p:cNvPicPr>
             <a:picLocks noChangeAspect="1"/>
           </p:cNvPicPr>
@@ -28303,7 +28303,7 @@
       </p:pic>
       <p:sp>
         <p:nvSpPr>
-          <p:cNvPr id="33" name="Text 25"/>
+          <p:cNvPr id="34" name="Text 25"/>
           <p:cNvSpPr txBox="1"/>
           <p:nvPr/>
         </p:nvSpPr>
@@ -28342,7 +28342,7 @@
       </p:sp>
       <p:sp>
         <p:nvSpPr>
-          <p:cNvPr id="34" name="Text 26"/>
+          <p:cNvPr id="35" name="Text 26"/>
           <p:cNvSpPr txBox="1"/>
           <p:nvPr/>
         </p:nvSpPr>
@@ -28384,7 +28384,7 @@
       </p:sp>
       <p:sp>
         <p:nvSpPr>
-          <p:cNvPr id="35" name="Shape 27"/>
+          <p:cNvPr id="36" name="Shape 27"/>
           <p:cNvSpPr/>
           <p:nvPr/>
         </p:nvSpPr>
@@ -28413,7 +28413,7 @@
       </p:sp>
       <p:sp>
         <p:nvSpPr>
-          <p:cNvPr id="36" name="Shape 28"/>
+          <p:cNvPr id="37" name="Shape 28"/>
           <p:cNvSpPr/>
           <p:nvPr/>
         </p:nvSpPr>
@@ -28433,7 +28433,7 @@
       </p:sp>
       <p:pic>
         <p:nvPicPr>
-          <p:cNvPr id="37" name="Image 6" descr="/tmp/claude-0/-home-user-riesgo/0ff9ff46-1396-5bd8-b3ac-2280dfbbbc55/scratchpad/work/gen/icons/chat_navy.png">    </p:cNvPr>
+          <p:cNvPr id="38" name="Image 6" descr="/tmp/claude-0/-home-user-riesgo/0ff9ff46-1396-5bd8-b3ac-2280dfbbbc55/scratchpad/work/gen/icons/chat_navy.png">    </p:cNvPr>
           <p:cNvPicPr>
             <a:picLocks noChangeAspect="1"/>
           </p:cNvPicPr>
@@ -28457,7 +28457,7 @@
       </p:pic>
       <p:sp>
         <p:nvSpPr>
-          <p:cNvPr id="38" name="Text 29"/>
+          <p:cNvPr id="39" name="Text 29"/>
           <p:cNvSpPr txBox="1"/>
           <p:nvPr/>
         </p:nvSpPr>
@@ -28496,7 +28496,7 @@
       </p:sp>
       <p:sp>
         <p:nvSpPr>
-          <p:cNvPr id="39" name="Text 30"/>
+          <p:cNvPr id="40" name="Text 30"/>
           <p:cNvSpPr txBox="1"/>
           <p:nvPr/>
         </p:nvSpPr>
@@ -28538,7 +28538,7 @@
       </p:sp>
       <p:sp>
         <p:nvSpPr>
-          <p:cNvPr id="40" name="Shape 31"/>
+          <p:cNvPr id="41" name="Shape 31"/>
           <p:cNvSpPr/>
           <p:nvPr/>
         </p:nvSpPr>
@@ -28567,7 +28567,7 @@
       </p:sp>
       <p:sp>
         <p:nvSpPr>
-          <p:cNvPr id="41" name="Shape 32"/>
+          <p:cNvPr id="42" name="Shape 32"/>
           <p:cNvSpPr/>
           <p:nvPr/>
         </p:nvSpPr>
@@ -28587,7 +28587,7 @@
       </p:sp>
       <p:pic>
         <p:nvPicPr>
-          <p:cNvPr id="42" name="Image 7" descr="/tmp/claude-0/-home-user-riesgo/0ff9ff46-1396-5bd8-b3ac-2280dfbbbc55/scratchpad/work/gen/icons/id_card_navy.png">    </p:cNvPr>
+          <p:cNvPr id="43" name="Image 7" descr="/tmp/claude-0/-home-user-riesgo/0ff9ff46-1396-5bd8-b3ac-2280dfbbbc55/scratchpad/work/gen/icons/id_card_navy.png">    </p:cNvPr>
           <p:cNvPicPr>
             <a:picLocks noChangeAspect="1"/>
           </p:cNvPicPr>
@@ -28611,7 +28611,7 @@
       </p:pic>
       <p:sp>
         <p:nvSpPr>
-          <p:cNvPr id="43" name="Text 33"/>
+          <p:cNvPr id="44" name="Text 33"/>
           <p:cNvSpPr txBox="1"/>
           <p:nvPr/>
         </p:nvSpPr>
@@ -28650,7 +28650,7 @@
       </p:sp>
       <p:sp>
         <p:nvSpPr>
-          <p:cNvPr id="44" name="Text 34"/>
+          <p:cNvPr id="45" name="Text 34"/>
           <p:cNvSpPr txBox="1"/>
           <p:nvPr/>
         </p:nvSpPr>
@@ -28692,7 +28692,7 @@
       </p:sp>
       <p:sp>
         <p:nvSpPr>
-          <p:cNvPr id="45" name="Text 35"/>
+          <p:cNvPr id="46" name="Text 35"/>
           <p:cNvSpPr txBox="1"/>
           <p:nvPr/>
         </p:nvSpPr>
@@ -28731,7 +28731,7 @@
       </p:sp>
       <p:sp>
         <p:nvSpPr>
-          <p:cNvPr id="46" name="Text 36"/>
+          <p:cNvPr id="47" name="Text 36"/>
           <p:cNvSpPr txBox="1"/>
           <p:nvPr/>
         </p:nvSpPr>
@@ -28802,7 +28802,7 @@
       </p:grpSpPr>
       <p:sp>
         <p:nvSpPr>
-          <p:cNvPr id="2" name="Text 0"/>
+          <p:cNvPr id="3" name="Text 0"/>
           <p:cNvSpPr txBox="1"/>
           <p:nvPr/>
         </p:nvSpPr>
@@ -28841,7 +28841,7 @@
       </p:sp>
       <p:sp>
         <p:nvSpPr>
-          <p:cNvPr id="3" name="Text 1"/>
+          <p:cNvPr id="4" name="Text 1"/>
           <p:cNvSpPr txBox="1"/>
           <p:nvPr/>
         </p:nvSpPr>
@@ -28883,7 +28883,7 @@
       </p:sp>
       <p:sp>
         <p:nvSpPr>
-          <p:cNvPr id="4" name="Text 2"/>
+          <p:cNvPr id="5" name="Text 2"/>
           <p:cNvSpPr txBox="1"/>
           <p:nvPr/>
         </p:nvSpPr>
@@ -28922,7 +28922,7 @@
       </p:sp>
       <p:sp>
         <p:nvSpPr>
-          <p:cNvPr id="5" name="Shape 3"/>
+          <p:cNvPr id="6" name="Shape 3"/>
           <p:cNvSpPr/>
           <p:nvPr/>
         </p:nvSpPr>
@@ -28944,7 +28944,7 @@
       </p:sp>
       <p:sp>
         <p:nvSpPr>
-          <p:cNvPr id="6" name="Text 4"/>
+          <p:cNvPr id="7" name="Text 4"/>
           <p:cNvSpPr txBox="1"/>
           <p:nvPr/>
         </p:nvSpPr>
@@ -28983,7 +28983,7 @@
       </p:sp>
       <p:sp>
         <p:nvSpPr>
-          <p:cNvPr id="7" name="Shape 5"/>
+          <p:cNvPr id="8" name="Shape 5"/>
           <p:cNvSpPr/>
           <p:nvPr/>
         </p:nvSpPr>
@@ -29005,7 +29005,7 @@
       </p:sp>
       <p:sp>
         <p:nvSpPr>
-          <p:cNvPr id="8" name="Text 6"/>
+          <p:cNvPr id="9" name="Text 6"/>
           <p:cNvSpPr txBox="1"/>
           <p:nvPr/>
         </p:nvSpPr>
@@ -29044,7 +29044,7 @@
       </p:sp>
       <p:sp>
         <p:nvSpPr>
-          <p:cNvPr id="9" name="Shape 7"/>
+          <p:cNvPr id="10" name="Shape 7"/>
           <p:cNvSpPr/>
           <p:nvPr/>
         </p:nvSpPr>
@@ -29066,7 +29066,7 @@
       </p:sp>
       <p:sp>
         <p:nvSpPr>
-          <p:cNvPr id="10" name="Shape 8"/>
+          <p:cNvPr id="11" name="Shape 8"/>
           <p:cNvSpPr/>
           <p:nvPr/>
         </p:nvSpPr>
@@ -29086,7 +29086,7 @@
       </p:sp>
       <p:pic>
         <p:nvPicPr>
-          <p:cNvPr id="11" name="Image 0" descr="/tmp/claude-0/-home-user-riesgo/0ff9ff46-1396-5bd8-b3ac-2280dfbbbc55/scratchpad/work/gen/icons/check_circle_white.png">    </p:cNvPr>
+          <p:cNvPr id="12" name="Image 0" descr="/tmp/claude-0/-home-user-riesgo/0ff9ff46-1396-5bd8-b3ac-2280dfbbbc55/scratchpad/work/gen/icons/check_circle_white.png">    </p:cNvPr>
           <p:cNvPicPr>
             <a:picLocks noChangeAspect="1"/>
           </p:cNvPicPr>
@@ -29110,7 +29110,7 @@
       </p:pic>
       <p:sp>
         <p:nvSpPr>
-          <p:cNvPr id="12" name="Text 9"/>
+          <p:cNvPr id="13" name="Text 9"/>
           <p:cNvSpPr txBox="1"/>
           <p:nvPr/>
         </p:nvSpPr>
@@ -29149,7 +29149,7 @@
       </p:sp>
       <p:sp>
         <p:nvSpPr>
-          <p:cNvPr id="13" name="Text 10"/>
+          <p:cNvPr id="14" name="Text 10"/>
           <p:cNvSpPr txBox="1"/>
           <p:nvPr/>
         </p:nvSpPr>
@@ -29191,7 +29191,7 @@
       </p:sp>
       <p:sp>
         <p:nvSpPr>
-          <p:cNvPr id="14" name="Shape 11"/>
+          <p:cNvPr id="15" name="Shape 11"/>
           <p:cNvSpPr/>
           <p:nvPr/>
         </p:nvSpPr>
@@ -29213,7 +29213,7 @@
       </p:sp>
       <p:sp>
         <p:nvSpPr>
-          <p:cNvPr id="15" name="Shape 12"/>
+          <p:cNvPr id="16" name="Shape 12"/>
           <p:cNvSpPr/>
           <p:nvPr/>
         </p:nvSpPr>
@@ -29233,7 +29233,7 @@
       </p:sp>
       <p:pic>
         <p:nvPicPr>
-          <p:cNvPr id="16" name="Image 1" descr="/tmp/claude-0/-home-user-riesgo/0ff9ff46-1396-5bd8-b3ac-2280dfbbbc55/scratchpad/work/gen/icons/people_group_white.png">    </p:cNvPr>
+          <p:cNvPr id="17" name="Image 1" descr="/tmp/claude-0/-home-user-riesgo/0ff9ff46-1396-5bd8-b3ac-2280dfbbbc55/scratchpad/work/gen/icons/people_group_white.png">    </p:cNvPr>
           <p:cNvPicPr>
             <a:picLocks noChangeAspect="1"/>
           </p:cNvPicPr>
@@ -29257,7 +29257,7 @@
       </p:pic>
       <p:sp>
         <p:nvSpPr>
-          <p:cNvPr id="17" name="Text 13"/>
+          <p:cNvPr id="18" name="Text 13"/>
           <p:cNvSpPr txBox="1"/>
           <p:nvPr/>
         </p:nvSpPr>
@@ -29296,7 +29296,7 @@
       </p:sp>
       <p:sp>
         <p:nvSpPr>
-          <p:cNvPr id="18" name="Text 14"/>
+          <p:cNvPr id="19" name="Text 14"/>
           <p:cNvSpPr txBox="1"/>
           <p:nvPr/>
         </p:nvSpPr>
@@ -29338,7 +29338,7 @@
       </p:sp>
       <p:sp>
         <p:nvSpPr>
-          <p:cNvPr id="19" name="Shape 15"/>
+          <p:cNvPr id="20" name="Shape 15"/>
           <p:cNvSpPr/>
           <p:nvPr/>
         </p:nvSpPr>
@@ -29360,7 +29360,7 @@
       </p:sp>
       <p:sp>
         <p:nvSpPr>
-          <p:cNvPr id="20" name="Shape 16"/>
+          <p:cNvPr id="21" name="Shape 16"/>
           <p:cNvSpPr/>
           <p:nvPr/>
         </p:nvSpPr>
@@ -29380,7 +29380,7 @@
       </p:sp>
       <p:pic>
         <p:nvPicPr>
-          <p:cNvPr id="21" name="Image 2" descr="/tmp/claude-0/-home-user-riesgo/0ff9ff46-1396-5bd8-b3ac-2280dfbbbc55/scratchpad/work/gen/icons/warning_triangle_white.png">    </p:cNvPr>
+          <p:cNvPr id="22" name="Image 2" descr="/tmp/claude-0/-home-user-riesgo/0ff9ff46-1396-5bd8-b3ac-2280dfbbbc55/scratchpad/work/gen/icons/warning_triangle_white.png">    </p:cNvPr>
           <p:cNvPicPr>
             <a:picLocks noChangeAspect="1"/>
           </p:cNvPicPr>
@@ -29404,7 +29404,7 @@
       </p:pic>
       <p:sp>
         <p:nvSpPr>
-          <p:cNvPr id="22" name="Text 17"/>
+          <p:cNvPr id="23" name="Text 17"/>
           <p:cNvSpPr txBox="1"/>
           <p:nvPr/>
         </p:nvSpPr>
@@ -29443,7 +29443,7 @@
       </p:sp>
       <p:sp>
         <p:nvSpPr>
-          <p:cNvPr id="23" name="Text 18"/>
+          <p:cNvPr id="24" name="Text 18"/>
           <p:cNvSpPr txBox="1"/>
           <p:nvPr/>
         </p:nvSpPr>
@@ -29485,7 +29485,7 @@
       </p:sp>
       <p:sp>
         <p:nvSpPr>
-          <p:cNvPr id="24" name="Text 19"/>
+          <p:cNvPr id="25" name="Text 19"/>
           <p:cNvSpPr txBox="1"/>
           <p:nvPr/>
         </p:nvSpPr>
@@ -29524,7 +29524,7 @@
       </p:sp>
       <p:sp>
         <p:nvSpPr>
-          <p:cNvPr id="25" name="Text 20"/>
+          <p:cNvPr id="26" name="Text 20"/>
           <p:cNvSpPr txBox="1"/>
           <p:nvPr/>
         </p:nvSpPr>
@@ -29595,7 +29595,7 @@
       </p:grpSpPr>
       <p:sp>
         <p:nvSpPr>
-          <p:cNvPr id="2" name="Text 0"/>
+          <p:cNvPr id="3" name="Text 0"/>
           <p:cNvSpPr txBox="1"/>
           <p:nvPr/>
         </p:nvSpPr>
@@ -29634,7 +29634,7 @@
       </p:sp>
       <p:sp>
         <p:nvSpPr>
-          <p:cNvPr id="3" name="Text 1"/>
+          <p:cNvPr id="4" name="Text 1"/>
           <p:cNvSpPr txBox="1"/>
           <p:nvPr/>
         </p:nvSpPr>
@@ -29676,7 +29676,7 @@
       </p:sp>
       <p:sp>
         <p:nvSpPr>
-          <p:cNvPr id="4" name="Shape 2"/>
+          <p:cNvPr id="5" name="Shape 2"/>
           <p:cNvSpPr/>
           <p:nvPr/>
         </p:nvSpPr>
@@ -29698,7 +29698,7 @@
       </p:sp>
       <p:sp>
         <p:nvSpPr>
-          <p:cNvPr id="5" name="Shape 3"/>
+          <p:cNvPr id="6" name="Shape 3"/>
           <p:cNvSpPr/>
           <p:nvPr/>
         </p:nvSpPr>
@@ -29718,7 +29718,7 @@
       </p:sp>
       <p:pic>
         <p:nvPicPr>
-          <p:cNvPr id="6" name="Image 0" descr="/tmp/claude-0/-home-user-riesgo/0ff9ff46-1396-5bd8-b3ac-2280dfbbbc55/scratchpad/work/gen/icons/form_navy.png">    </p:cNvPr>
+          <p:cNvPr id="7" name="Image 0" descr="/tmp/claude-0/-home-user-riesgo/0ff9ff46-1396-5bd8-b3ac-2280dfbbbc55/scratchpad/work/gen/icons/form_navy.png">    </p:cNvPr>
           <p:cNvPicPr>
             <a:picLocks noChangeAspect="1"/>
           </p:cNvPicPr>
@@ -29742,7 +29742,7 @@
       </p:pic>
       <p:sp>
         <p:nvSpPr>
-          <p:cNvPr id="7" name="Text 4"/>
+          <p:cNvPr id="8" name="Text 4"/>
           <p:cNvSpPr txBox="1"/>
           <p:nvPr/>
         </p:nvSpPr>
@@ -29781,7 +29781,7 @@
       </p:sp>
       <p:sp>
         <p:nvSpPr>
-          <p:cNvPr id="8" name="Text 5"/>
+          <p:cNvPr id="9" name="Text 5"/>
           <p:cNvSpPr txBox="1"/>
           <p:nvPr/>
         </p:nvSpPr>
@@ -29823,7 +29823,7 @@
       </p:sp>
       <p:sp>
         <p:nvSpPr>
-          <p:cNvPr id="9" name="Shape 6"/>
+          <p:cNvPr id="10" name="Shape 6"/>
           <p:cNvSpPr/>
           <p:nvPr/>
         </p:nvSpPr>
@@ -29845,7 +29845,7 @@
       </p:sp>
       <p:sp>
         <p:nvSpPr>
-          <p:cNvPr id="10" name="Shape 7"/>
+          <p:cNvPr id="11" name="Shape 7"/>
           <p:cNvSpPr/>
           <p:nvPr/>
         </p:nvSpPr>
@@ -29865,7 +29865,7 @@
       </p:sp>
       <p:pic>
         <p:nvPicPr>
-          <p:cNvPr id="11" name="Image 1" descr="/tmp/claude-0/-home-user-riesgo/0ff9ff46-1396-5bd8-b3ac-2280dfbbbc55/scratchpad/work/gen/icons/question_white.png">    </p:cNvPr>
+          <p:cNvPr id="12" name="Image 1" descr="/tmp/claude-0/-home-user-riesgo/0ff9ff46-1396-5bd8-b3ac-2280dfbbbc55/scratchpad/work/gen/icons/question_white.png">    </p:cNvPr>
           <p:cNvPicPr>
             <a:picLocks noChangeAspect="1"/>
           </p:cNvPicPr>
@@ -29889,7 +29889,7 @@
       </p:pic>
       <p:sp>
         <p:nvSpPr>
-          <p:cNvPr id="12" name="Text 8"/>
+          <p:cNvPr id="13" name="Text 8"/>
           <p:cNvSpPr txBox="1"/>
           <p:nvPr/>
         </p:nvSpPr>
@@ -29931,7 +29931,7 @@
       </p:sp>
       <p:sp>
         <p:nvSpPr>
-          <p:cNvPr id="13" name="Shape 9"/>
+          <p:cNvPr id="14" name="Shape 9"/>
           <p:cNvSpPr/>
           <p:nvPr/>
         </p:nvSpPr>
@@ -29953,7 +29953,7 @@
       </p:sp>
       <p:sp>
         <p:nvSpPr>
-          <p:cNvPr id="14" name="Shape 10"/>
+          <p:cNvPr id="15" name="Shape 10"/>
           <p:cNvSpPr/>
           <p:nvPr/>
         </p:nvSpPr>
@@ -29973,7 +29973,7 @@
       </p:sp>
       <p:pic>
         <p:nvPicPr>
-          <p:cNvPr id="15" name="Image 2" descr="/tmp/claude-0/-home-user-riesgo/0ff9ff46-1396-5bd8-b3ac-2280dfbbbc55/scratchpad/work/gen/icons/question_white.png">    </p:cNvPr>
+          <p:cNvPr id="16" name="Image 2" descr="/tmp/claude-0/-home-user-riesgo/0ff9ff46-1396-5bd8-b3ac-2280dfbbbc55/scratchpad/work/gen/icons/question_white.png">    </p:cNvPr>
           <p:cNvPicPr>
             <a:picLocks noChangeAspect="1"/>
           </p:cNvPicPr>
@@ -29997,7 +29997,7 @@
       </p:pic>
       <p:sp>
         <p:nvSpPr>
-          <p:cNvPr id="16" name="Text 11"/>
+          <p:cNvPr id="17" name="Text 11"/>
           <p:cNvSpPr txBox="1"/>
           <p:nvPr/>
         </p:nvSpPr>
@@ -30039,7 +30039,7 @@
       </p:sp>
       <p:sp>
         <p:nvSpPr>
-          <p:cNvPr id="17" name="Shape 12"/>
+          <p:cNvPr id="18" name="Shape 12"/>
           <p:cNvSpPr/>
           <p:nvPr/>
         </p:nvSpPr>
@@ -30061,7 +30061,7 @@
       </p:sp>
       <p:sp>
         <p:nvSpPr>
-          <p:cNvPr id="18" name="Shape 13"/>
+          <p:cNvPr id="19" name="Shape 13"/>
           <p:cNvSpPr/>
           <p:nvPr/>
         </p:nvSpPr>
@@ -30081,7 +30081,7 @@
       </p:sp>
       <p:pic>
         <p:nvPicPr>
-          <p:cNvPr id="19" name="Image 3" descr="/tmp/claude-0/-home-user-riesgo/0ff9ff46-1396-5bd8-b3ac-2280dfbbbc55/scratchpad/work/gen/icons/question_white.png">    </p:cNvPr>
+          <p:cNvPr id="20" name="Image 3" descr="/tmp/claude-0/-home-user-riesgo/0ff9ff46-1396-5bd8-b3ac-2280dfbbbc55/scratchpad/work/gen/icons/question_white.png">    </p:cNvPr>
           <p:cNvPicPr>
             <a:picLocks noChangeAspect="1"/>
           </p:cNvPicPr>
@@ -30105,7 +30105,7 @@
       </p:pic>
       <p:sp>
         <p:nvSpPr>
-          <p:cNvPr id="20" name="Text 14"/>
+          <p:cNvPr id="21" name="Text 14"/>
           <p:cNvSpPr txBox="1"/>
           <p:nvPr/>
         </p:nvSpPr>
@@ -30147,7 +30147,7 @@
       </p:sp>
       <p:sp>
         <p:nvSpPr>
-          <p:cNvPr id="21" name="Shape 15"/>
+          <p:cNvPr id="22" name="Shape 15"/>
           <p:cNvSpPr/>
           <p:nvPr/>
         </p:nvSpPr>
@@ -30169,7 +30169,7 @@
       </p:sp>
       <p:sp>
         <p:nvSpPr>
-          <p:cNvPr id="22" name="Shape 16"/>
+          <p:cNvPr id="23" name="Shape 16"/>
           <p:cNvSpPr/>
           <p:nvPr/>
         </p:nvSpPr>
@@ -30189,7 +30189,7 @@
       </p:sp>
       <p:pic>
         <p:nvPicPr>
-          <p:cNvPr id="23" name="Image 4" descr="/tmp/claude-0/-home-user-riesgo/0ff9ff46-1396-5bd8-b3ac-2280dfbbbc55/scratchpad/work/gen/icons/question_white.png">    </p:cNvPr>
+          <p:cNvPr id="24" name="Image 4" descr="/tmp/claude-0/-home-user-riesgo/0ff9ff46-1396-5bd8-b3ac-2280dfbbbc55/scratchpad/work/gen/icons/question_white.png">    </p:cNvPr>
           <p:cNvPicPr>
             <a:picLocks noChangeAspect="1"/>
           </p:cNvPicPr>
@@ -30213,7 +30213,7 @@
       </p:pic>
       <p:sp>
         <p:nvSpPr>
-          <p:cNvPr id="24" name="Text 17"/>
+          <p:cNvPr id="25" name="Text 17"/>
           <p:cNvSpPr txBox="1"/>
           <p:nvPr/>
         </p:nvSpPr>
@@ -30255,7 +30255,7 @@
       </p:sp>
       <p:sp>
         <p:nvSpPr>
-          <p:cNvPr id="25" name="Text 18"/>
+          <p:cNvPr id="26" name="Text 18"/>
           <p:cNvSpPr txBox="1"/>
           <p:nvPr/>
         </p:nvSpPr>
@@ -30294,7 +30294,7 @@
       </p:sp>
       <p:sp>
         <p:nvSpPr>
-          <p:cNvPr id="26" name="Text 19"/>
+          <p:cNvPr id="27" name="Text 19"/>
           <p:cNvSpPr txBox="1"/>
           <p:nvPr/>
         </p:nvSpPr>
@@ -30365,7 +30365,7 @@
       </p:grpSpPr>
       <p:sp>
         <p:nvSpPr>
-          <p:cNvPr id="2" name="Text 0"/>
+          <p:cNvPr id="3" name="Text 0"/>
           <p:cNvSpPr txBox="1"/>
           <p:nvPr/>
         </p:nvSpPr>
@@ -30404,7 +30404,7 @@
       </p:sp>
       <p:sp>
         <p:nvSpPr>
-          <p:cNvPr id="3" name="Text 1"/>
+          <p:cNvPr id="4" name="Text 1"/>
           <p:cNvSpPr txBox="1"/>
           <p:nvPr/>
         </p:nvSpPr>
@@ -30446,7 +30446,7 @@
       </p:sp>
       <p:sp>
         <p:nvSpPr>
-          <p:cNvPr id="4" name="Text 2"/>
+          <p:cNvPr id="5" name="Text 2"/>
           <p:cNvSpPr txBox="1"/>
           <p:nvPr/>
         </p:nvSpPr>
@@ -30485,7 +30485,7 @@
       </p:sp>
       <p:sp>
         <p:nvSpPr>
-          <p:cNvPr id="5" name="Shape 3"/>
+          <p:cNvPr id="6" name="Shape 3"/>
           <p:cNvSpPr/>
           <p:nvPr/>
         </p:nvSpPr>
@@ -30507,7 +30507,7 @@
       </p:sp>
       <p:sp>
         <p:nvSpPr>
-          <p:cNvPr id="6" name="Text 4"/>
+          <p:cNvPr id="7" name="Text 4"/>
           <p:cNvSpPr txBox="1"/>
           <p:nvPr/>
         </p:nvSpPr>
@@ -30546,7 +30546,7 @@
       </p:sp>
       <p:sp>
         <p:nvSpPr>
-          <p:cNvPr id="7" name="Shape 5"/>
+          <p:cNvPr id="8" name="Shape 5"/>
           <p:cNvSpPr/>
           <p:nvPr/>
         </p:nvSpPr>
@@ -30568,7 +30568,7 @@
       </p:sp>
       <p:sp>
         <p:nvSpPr>
-          <p:cNvPr id="8" name="Text 6"/>
+          <p:cNvPr id="9" name="Text 6"/>
           <p:cNvSpPr txBox="1"/>
           <p:nvPr/>
         </p:nvSpPr>
@@ -30607,7 +30607,7 @@
       </p:sp>
       <p:sp>
         <p:nvSpPr>
-          <p:cNvPr id="9" name="Shape 7"/>
+          <p:cNvPr id="10" name="Shape 7"/>
           <p:cNvSpPr/>
           <p:nvPr/>
         </p:nvSpPr>
@@ -30629,7 +30629,7 @@
       </p:sp>
       <p:sp>
         <p:nvSpPr>
-          <p:cNvPr id="10" name="Shape 8"/>
+          <p:cNvPr id="11" name="Shape 8"/>
           <p:cNvSpPr/>
           <p:nvPr/>
         </p:nvSpPr>
@@ -30649,7 +30649,7 @@
       </p:sp>
       <p:pic>
         <p:nvPicPr>
-          <p:cNvPr id="11" name="Image 0" descr="/tmp/claude-0/-home-user-riesgo/0ff9ff46-1396-5bd8-b3ac-2280dfbbbc55/scratchpad/work/gen/icons/check_circle_white.png">    </p:cNvPr>
+          <p:cNvPr id="12" name="Image 0" descr="/tmp/claude-0/-home-user-riesgo/0ff9ff46-1396-5bd8-b3ac-2280dfbbbc55/scratchpad/work/gen/icons/check_circle_white.png">    </p:cNvPr>
           <p:cNvPicPr>
             <a:picLocks noChangeAspect="1"/>
           </p:cNvPicPr>
@@ -30673,7 +30673,7 @@
       </p:pic>
       <p:sp>
         <p:nvSpPr>
-          <p:cNvPr id="12" name="Text 9"/>
+          <p:cNvPr id="13" name="Text 9"/>
           <p:cNvSpPr txBox="1"/>
           <p:nvPr/>
         </p:nvSpPr>
@@ -30712,7 +30712,7 @@
       </p:sp>
       <p:sp>
         <p:nvSpPr>
-          <p:cNvPr id="13" name="Text 10"/>
+          <p:cNvPr id="14" name="Text 10"/>
           <p:cNvSpPr txBox="1"/>
           <p:nvPr/>
         </p:nvSpPr>
@@ -30754,7 +30754,7 @@
       </p:sp>
       <p:sp>
         <p:nvSpPr>
-          <p:cNvPr id="14" name="Shape 11"/>
+          <p:cNvPr id="15" name="Shape 11"/>
           <p:cNvSpPr/>
           <p:nvPr/>
         </p:nvSpPr>
@@ -30776,7 +30776,7 @@
       </p:sp>
       <p:sp>
         <p:nvSpPr>
-          <p:cNvPr id="15" name="Shape 12"/>
+          <p:cNvPr id="16" name="Shape 12"/>
           <p:cNvSpPr/>
           <p:nvPr/>
         </p:nvSpPr>
@@ -30796,7 +30796,7 @@
       </p:sp>
       <p:pic>
         <p:nvPicPr>
-          <p:cNvPr id="16" name="Image 1" descr="/tmp/claude-0/-home-user-riesgo/0ff9ff46-1396-5bd8-b3ac-2280dfbbbc55/scratchpad/work/gen/icons/people_group_white.png">    </p:cNvPr>
+          <p:cNvPr id="17" name="Image 1" descr="/tmp/claude-0/-home-user-riesgo/0ff9ff46-1396-5bd8-b3ac-2280dfbbbc55/scratchpad/work/gen/icons/people_group_white.png">    </p:cNvPr>
           <p:cNvPicPr>
             <a:picLocks noChangeAspect="1"/>
           </p:cNvPicPr>
@@ -30820,7 +30820,7 @@
       </p:pic>
       <p:sp>
         <p:nvSpPr>
-          <p:cNvPr id="17" name="Text 13"/>
+          <p:cNvPr id="18" name="Text 13"/>
           <p:cNvSpPr txBox="1"/>
           <p:nvPr/>
         </p:nvSpPr>
@@ -30859,7 +30859,7 @@
       </p:sp>
       <p:sp>
         <p:nvSpPr>
-          <p:cNvPr id="18" name="Text 14"/>
+          <p:cNvPr id="19" name="Text 14"/>
           <p:cNvSpPr txBox="1"/>
           <p:nvPr/>
         </p:nvSpPr>
@@ -30901,7 +30901,7 @@
       </p:sp>
       <p:sp>
         <p:nvSpPr>
-          <p:cNvPr id="19" name="Shape 15"/>
+          <p:cNvPr id="20" name="Shape 15"/>
           <p:cNvSpPr/>
           <p:nvPr/>
         </p:nvSpPr>
@@ -30923,7 +30923,7 @@
       </p:sp>
       <p:sp>
         <p:nvSpPr>
-          <p:cNvPr id="20" name="Shape 16"/>
+          <p:cNvPr id="21" name="Shape 16"/>
           <p:cNvSpPr/>
           <p:nvPr/>
         </p:nvSpPr>
@@ -30943,7 +30943,7 @@
       </p:sp>
       <p:pic>
         <p:nvPicPr>
-          <p:cNvPr id="21" name="Image 2" descr="/tmp/claude-0/-home-user-riesgo/0ff9ff46-1396-5bd8-b3ac-2280dfbbbc55/scratchpad/work/gen/icons/warning_triangle_white.png">    </p:cNvPr>
+          <p:cNvPr id="22" name="Image 2" descr="/tmp/claude-0/-home-user-riesgo/0ff9ff46-1396-5bd8-b3ac-2280dfbbbc55/scratchpad/work/gen/icons/warning_triangle_white.png">    </p:cNvPr>
           <p:cNvPicPr>
             <a:picLocks noChangeAspect="1"/>
           </p:cNvPicPr>
@@ -30967,7 +30967,7 @@
       </p:pic>
       <p:sp>
         <p:nvSpPr>
-          <p:cNvPr id="22" name="Text 17"/>
+          <p:cNvPr id="23" name="Text 17"/>
           <p:cNvSpPr txBox="1"/>
           <p:nvPr/>
         </p:nvSpPr>
@@ -31006,7 +31006,7 @@
       </p:sp>
       <p:sp>
         <p:nvSpPr>
-          <p:cNvPr id="23" name="Text 18"/>
+          <p:cNvPr id="24" name="Text 18"/>
           <p:cNvSpPr txBox="1"/>
           <p:nvPr/>
         </p:nvSpPr>
@@ -31048,7 +31048,7 @@
       </p:sp>
       <p:sp>
         <p:nvSpPr>
-          <p:cNvPr id="24" name="Text 19"/>
+          <p:cNvPr id="25" name="Text 19"/>
           <p:cNvSpPr txBox="1"/>
           <p:nvPr/>
         </p:nvSpPr>
@@ -31087,7 +31087,7 @@
       </p:sp>
       <p:sp>
         <p:nvSpPr>
-          <p:cNvPr id="25" name="Text 20"/>
+          <p:cNvPr id="26" name="Text 20"/>
           <p:cNvSpPr txBox="1"/>
           <p:nvPr/>
         </p:nvSpPr>
@@ -31158,7 +31158,7 @@
       </p:grpSpPr>
       <p:sp>
         <p:nvSpPr>
-          <p:cNvPr id="2" name="Shape 0"/>
+          <p:cNvPr id="3" name="Shape 0"/>
           <p:cNvSpPr/>
           <p:nvPr/>
         </p:nvSpPr>
@@ -31178,7 +31178,7 @@
       </p:sp>
       <p:sp>
         <p:nvSpPr>
-          <p:cNvPr id="3" name="Shape 1"/>
+          <p:cNvPr id="4" name="Shape 1"/>
           <p:cNvSpPr/>
           <p:nvPr/>
         </p:nvSpPr>
@@ -31198,7 +31198,7 @@
       </p:sp>
       <p:pic>
         <p:nvPicPr>
-          <p:cNvPr id="4" name="Image 0" descr="/tmp/claude-0/-home-user-riesgo/0ff9ff46-1396-5bd8-b3ac-2280dfbbbc55/scratchpad/work/gen/icons/timer30_navy.png">    </p:cNvPr>
+          <p:cNvPr id="5" name="Image 0" descr="/tmp/claude-0/-home-user-riesgo/0ff9ff46-1396-5bd8-b3ac-2280dfbbbc55/scratchpad/work/gen/icons/timer30_navy.png">    </p:cNvPr>
           <p:cNvPicPr>
             <a:picLocks noChangeAspect="1"/>
           </p:cNvPicPr>
@@ -31222,7 +31222,7 @@
       </p:pic>
       <p:sp>
         <p:nvSpPr>
-          <p:cNvPr id="5" name="Text 2"/>
+          <p:cNvPr id="6" name="Text 2"/>
           <p:cNvSpPr txBox="1"/>
           <p:nvPr/>
         </p:nvSpPr>
@@ -31261,7 +31261,7 @@
       </p:sp>
       <p:sp>
         <p:nvSpPr>
-          <p:cNvPr id="6" name="Text 3"/>
+          <p:cNvPr id="7" name="Text 3"/>
           <p:cNvSpPr txBox="1"/>
           <p:nvPr/>
         </p:nvSpPr>
@@ -31303,7 +31303,7 @@
       </p:sp>
       <p:sp>
         <p:nvSpPr>
-          <p:cNvPr id="7" name="Text 4"/>
+          <p:cNvPr id="8" name="Text 4"/>
           <p:cNvSpPr txBox="1"/>
           <p:nvPr/>
         </p:nvSpPr>
@@ -31345,7 +31345,7 @@
       </p:sp>
       <p:pic>
         <p:nvPicPr>
-          <p:cNvPr id="8" name="Image 1" descr="/tmp/claude-0/-home-user-riesgo/0ff9ff46-1396-5bd8-b3ac-2280dfbbbc55/scratchpad/work/gen/logo_white.png">    </p:cNvPr>
+          <p:cNvPr id="9" name="Image 1" descr="/tmp/claude-0/-home-user-riesgo/0ff9ff46-1396-5bd8-b3ac-2280dfbbbc55/scratchpad/work/gen/logo_white.png">    </p:cNvPr>
           <p:cNvPicPr>
             <a:picLocks noChangeAspect="1"/>
           </p:cNvPicPr>
@@ -31369,7 +31369,7 @@
       </p:pic>
       <p:sp>
         <p:nvSpPr>
-          <p:cNvPr id="9" name="Text 5"/>
+          <p:cNvPr id="10" name="Text 5"/>
           <p:cNvSpPr txBox="1"/>
           <p:nvPr/>
         </p:nvSpPr>
@@ -31408,7 +31408,7 @@
       </p:sp>
       <p:sp>
         <p:nvSpPr>
-          <p:cNvPr id="10" name="Text 6"/>
+          <p:cNvPr id="11" name="Text 6"/>
           <p:cNvSpPr txBox="1"/>
           <p:nvPr/>
         </p:nvSpPr>
@@ -31479,7 +31479,7 @@
       </p:grpSpPr>
       <p:sp>
         <p:nvSpPr>
-          <p:cNvPr id="2" name="Text 0"/>
+          <p:cNvPr id="3" name="Text 0"/>
           <p:cNvSpPr txBox="1"/>
           <p:nvPr/>
         </p:nvSpPr>
@@ -31518,7 +31518,7 @@
       </p:sp>
       <p:sp>
         <p:nvSpPr>
-          <p:cNvPr id="3" name="Text 1"/>
+          <p:cNvPr id="4" name="Text 1"/>
           <p:cNvSpPr txBox="1"/>
           <p:nvPr/>
         </p:nvSpPr>
@@ -31560,7 +31560,7 @@
       </p:sp>
       <p:sp>
         <p:nvSpPr>
-          <p:cNvPr id="4" name="Text 2"/>
+          <p:cNvPr id="5" name="Text 2"/>
           <p:cNvSpPr txBox="1"/>
           <p:nvPr/>
         </p:nvSpPr>
@@ -31599,7 +31599,7 @@
       </p:sp>
       <p:sp>
         <p:nvSpPr>
-          <p:cNvPr id="5" name="Shape 3"/>
+          <p:cNvPr id="6" name="Shape 3"/>
           <p:cNvSpPr/>
           <p:nvPr/>
         </p:nvSpPr>
@@ -31621,7 +31621,7 @@
       </p:sp>
       <p:sp>
         <p:nvSpPr>
-          <p:cNvPr id="6" name="Shape 4"/>
+          <p:cNvPr id="7" name="Shape 4"/>
           <p:cNvSpPr/>
           <p:nvPr/>
         </p:nvSpPr>
@@ -31641,7 +31641,7 @@
       </p:sp>
       <p:pic>
         <p:nvPicPr>
-          <p:cNvPr id="7" name="Image 0" descr="/tmp/claude-0/-home-user-riesgo/0ff9ff46-1396-5bd8-b3ac-2280dfbbbc55/scratchpad/work/gen/icons/lock_open_navy.png">    </p:cNvPr>
+          <p:cNvPr id="8" name="Image 0" descr="/tmp/claude-0/-home-user-riesgo/0ff9ff46-1396-5bd8-b3ac-2280dfbbbc55/scratchpad/work/gen/icons/lock_open_navy.png">    </p:cNvPr>
           <p:cNvPicPr>
             <a:picLocks noChangeAspect="1"/>
           </p:cNvPicPr>
@@ -31665,7 +31665,7 @@
       </p:pic>
       <p:sp>
         <p:nvSpPr>
-          <p:cNvPr id="8" name="Shape 5"/>
+          <p:cNvPr id="9" name="Shape 5"/>
           <p:cNvSpPr/>
           <p:nvPr/>
         </p:nvSpPr>
@@ -31685,7 +31685,7 @@
       </p:sp>
       <p:sp>
         <p:nvSpPr>
-          <p:cNvPr id="9" name="Text 6"/>
+          <p:cNvPr id="10" name="Text 6"/>
           <p:cNvSpPr txBox="1"/>
           <p:nvPr/>
         </p:nvSpPr>
@@ -31724,7 +31724,7 @@
       </p:sp>
       <p:sp>
         <p:nvSpPr>
-          <p:cNvPr id="10" name="Shape 7"/>
+          <p:cNvPr id="11" name="Shape 7"/>
           <p:cNvSpPr/>
           <p:nvPr/>
         </p:nvSpPr>
@@ -31744,7 +31744,7 @@
       </p:sp>
       <p:pic>
         <p:nvPicPr>
-          <p:cNvPr id="11" name="Image 1" descr="/tmp/claude-0/-home-user-riesgo/0ff9ff46-1396-5bd8-b3ac-2280dfbbbc55/scratchpad/work/gen/icons/usb_navy.png">    </p:cNvPr>
+          <p:cNvPr id="12" name="Image 1" descr="/tmp/claude-0/-home-user-riesgo/0ff9ff46-1396-5bd8-b3ac-2280dfbbbc55/scratchpad/work/gen/icons/usb_navy.png">    </p:cNvPr>
           <p:cNvPicPr>
             <a:picLocks noChangeAspect="1"/>
           </p:cNvPicPr>
@@ -31768,7 +31768,7 @@
       </p:pic>
       <p:sp>
         <p:nvSpPr>
-          <p:cNvPr id="12" name="Shape 8"/>
+          <p:cNvPr id="13" name="Shape 8"/>
           <p:cNvSpPr/>
           <p:nvPr/>
         </p:nvSpPr>
@@ -31788,7 +31788,7 @@
       </p:sp>
       <p:sp>
         <p:nvSpPr>
-          <p:cNvPr id="13" name="Text 9"/>
+          <p:cNvPr id="14" name="Text 9"/>
           <p:cNvSpPr txBox="1"/>
           <p:nvPr/>
         </p:nvSpPr>
@@ -31827,7 +31827,7 @@
       </p:sp>
       <p:sp>
         <p:nvSpPr>
-          <p:cNvPr id="14" name="Shape 10"/>
+          <p:cNvPr id="15" name="Shape 10"/>
           <p:cNvSpPr/>
           <p:nvPr/>
         </p:nvSpPr>
@@ -31847,7 +31847,7 @@
       </p:sp>
       <p:pic>
         <p:nvPicPr>
-          <p:cNvPr id="15" name="Image 2" descr="/tmp/claude-0/-home-user-riesgo/0ff9ff46-1396-5bd8-b3ac-2280dfbbbc55/scratchpad/work/gen/icons/wifi_off_navy.png">    </p:cNvPr>
+          <p:cNvPr id="16" name="Image 2" descr="/tmp/claude-0/-home-user-riesgo/0ff9ff46-1396-5bd8-b3ac-2280dfbbbc55/scratchpad/work/gen/icons/wifi_off_navy.png">    </p:cNvPr>
           <p:cNvPicPr>
             <a:picLocks noChangeAspect="1"/>
           </p:cNvPicPr>
@@ -31871,7 +31871,7 @@
       </p:pic>
       <p:sp>
         <p:nvSpPr>
-          <p:cNvPr id="16" name="Shape 11"/>
+          <p:cNvPr id="17" name="Shape 11"/>
           <p:cNvSpPr/>
           <p:nvPr/>
         </p:nvSpPr>
@@ -31891,7 +31891,7 @@
       </p:sp>
       <p:sp>
         <p:nvSpPr>
-          <p:cNvPr id="17" name="Text 12"/>
+          <p:cNvPr id="18" name="Text 12"/>
           <p:cNvSpPr txBox="1"/>
           <p:nvPr/>
         </p:nvSpPr>
@@ -31930,7 +31930,7 @@
       </p:sp>
       <p:sp>
         <p:nvSpPr>
-          <p:cNvPr id="18" name="Shape 13"/>
+          <p:cNvPr id="19" name="Shape 13"/>
           <p:cNvSpPr/>
           <p:nvPr/>
         </p:nvSpPr>
@@ -31950,7 +31950,7 @@
       </p:sp>
       <p:pic>
         <p:nvPicPr>
-          <p:cNvPr id="19" name="Image 3" descr="/tmp/claude-0/-home-user-riesgo/0ff9ff46-1396-5bd8-b3ac-2280dfbbbc55/scratchpad/work/gen/icons/trash_navy.png">    </p:cNvPr>
+          <p:cNvPr id="20" name="Image 3" descr="/tmp/claude-0/-home-user-riesgo/0ff9ff46-1396-5bd8-b3ac-2280dfbbbc55/scratchpad/work/gen/icons/trash_navy.png">    </p:cNvPr>
           <p:cNvPicPr>
             <a:picLocks noChangeAspect="1"/>
           </p:cNvPicPr>
@@ -31974,7 +31974,7 @@
       </p:pic>
       <p:sp>
         <p:nvSpPr>
-          <p:cNvPr id="20" name="Shape 14"/>
+          <p:cNvPr id="21" name="Shape 14"/>
           <p:cNvSpPr/>
           <p:nvPr/>
         </p:nvSpPr>
@@ -31994,7 +31994,7 @@
       </p:sp>
       <p:sp>
         <p:nvSpPr>
-          <p:cNvPr id="21" name="Text 15"/>
+          <p:cNvPr id="22" name="Text 15"/>
           <p:cNvSpPr txBox="1"/>
           <p:nvPr/>
         </p:nvSpPr>
@@ -32033,7 +32033,7 @@
       </p:sp>
       <p:sp>
         <p:nvSpPr>
-          <p:cNvPr id="22" name="Shape 16"/>
+          <p:cNvPr id="23" name="Shape 16"/>
           <p:cNvSpPr/>
           <p:nvPr/>
         </p:nvSpPr>
@@ -32053,7 +32053,7 @@
       </p:sp>
       <p:pic>
         <p:nvPicPr>
-          <p:cNvPr id="23" name="Image 4" descr="/tmp/claude-0/-home-user-riesgo/0ff9ff46-1396-5bd8-b3ac-2280dfbbbc55/scratchpad/work/gen/icons/bell_alert_navy.png">    </p:cNvPr>
+          <p:cNvPr id="24" name="Image 4" descr="/tmp/claude-0/-home-user-riesgo/0ff9ff46-1396-5bd8-b3ac-2280dfbbbc55/scratchpad/work/gen/icons/bell_alert_navy.png">    </p:cNvPr>
           <p:cNvPicPr>
             <a:picLocks noChangeAspect="1"/>
           </p:cNvPicPr>
@@ -32077,7 +32077,7 @@
       </p:pic>
       <p:sp>
         <p:nvSpPr>
-          <p:cNvPr id="24" name="Shape 17"/>
+          <p:cNvPr id="25" name="Shape 17"/>
           <p:cNvSpPr/>
           <p:nvPr/>
         </p:nvSpPr>
@@ -32097,7 +32097,7 @@
       </p:sp>
       <p:sp>
         <p:nvSpPr>
-          <p:cNvPr id="25" name="Text 18"/>
+          <p:cNvPr id="26" name="Text 18"/>
           <p:cNvSpPr txBox="1"/>
           <p:nvPr/>
         </p:nvSpPr>
@@ -32136,7 +32136,7 @@
       </p:sp>
       <p:sp>
         <p:nvSpPr>
-          <p:cNvPr id="26" name="Shape 19"/>
+          <p:cNvPr id="27" name="Shape 19"/>
           <p:cNvSpPr/>
           <p:nvPr/>
         </p:nvSpPr>
@@ -32156,7 +32156,7 @@
       </p:sp>
       <p:pic>
         <p:nvPicPr>
-          <p:cNvPr id="27" name="Image 5" descr="/tmp/claude-0/-home-user-riesgo/0ff9ff46-1396-5bd8-b3ac-2280dfbbbc55/scratchpad/work/gen/icons/hand_stop_navy.png">    </p:cNvPr>
+          <p:cNvPr id="28" name="Image 5" descr="/tmp/claude-0/-home-user-riesgo/0ff9ff46-1396-5bd8-b3ac-2280dfbbbc55/scratchpad/work/gen/icons/hand_stop_navy.png">    </p:cNvPr>
           <p:cNvPicPr>
             <a:picLocks noChangeAspect="1"/>
           </p:cNvPicPr>
@@ -32180,7 +32180,7 @@
       </p:pic>
       <p:sp>
         <p:nvSpPr>
-          <p:cNvPr id="28" name="Shape 20"/>
+          <p:cNvPr id="29" name="Shape 20"/>
           <p:cNvSpPr/>
           <p:nvPr/>
         </p:nvSpPr>
@@ -32200,7 +32200,7 @@
       </p:sp>
       <p:sp>
         <p:nvSpPr>
-          <p:cNvPr id="29" name="Text 21"/>
+          <p:cNvPr id="30" name="Text 21"/>
           <p:cNvSpPr txBox="1"/>
           <p:nvPr/>
         </p:nvSpPr>
@@ -32239,7 +32239,7 @@
       </p:sp>
       <p:sp>
         <p:nvSpPr>
-          <p:cNvPr id="30" name="Shape 22"/>
+          <p:cNvPr id="31" name="Shape 22"/>
           <p:cNvSpPr/>
           <p:nvPr/>
         </p:nvSpPr>
@@ -32259,7 +32259,7 @@
       </p:sp>
       <p:pic>
         <p:nvPicPr>
-          <p:cNvPr id="31" name="Image 6" descr="/tmp/claude-0/-home-user-riesgo/0ff9ff46-1396-5bd8-b3ac-2280dfbbbc55/scratchpad/work/gen/icons/cctv_navy.png">    </p:cNvPr>
+          <p:cNvPr id="32" name="Image 6" descr="/tmp/claude-0/-home-user-riesgo/0ff9ff46-1396-5bd8-b3ac-2280dfbbbc55/scratchpad/work/gen/icons/cctv_navy.png">    </p:cNvPr>
           <p:cNvPicPr>
             <a:picLocks noChangeAspect="1"/>
           </p:cNvPicPr>
@@ -32283,7 +32283,7 @@
       </p:pic>
       <p:sp>
         <p:nvSpPr>
-          <p:cNvPr id="32" name="Shape 23"/>
+          <p:cNvPr id="33" name="Shape 23"/>
           <p:cNvSpPr/>
           <p:nvPr/>
         </p:nvSpPr>
@@ -32303,7 +32303,7 @@
       </p:sp>
       <p:sp>
         <p:nvSpPr>
-          <p:cNvPr id="33" name="Text 24"/>
+          <p:cNvPr id="34" name="Text 24"/>
           <p:cNvSpPr txBox="1"/>
           <p:nvPr/>
         </p:nvSpPr>
@@ -32342,7 +32342,7 @@
       </p:sp>
       <p:sp>
         <p:nvSpPr>
-          <p:cNvPr id="34" name="Shape 25"/>
+          <p:cNvPr id="35" name="Shape 25"/>
           <p:cNvSpPr/>
           <p:nvPr/>
         </p:nvSpPr>
@@ -32362,7 +32362,7 @@
       </p:sp>
       <p:pic>
         <p:nvPicPr>
-          <p:cNvPr id="35" name="Image 7" descr="/tmp/claude-0/-home-user-riesgo/0ff9ff46-1396-5bd8-b3ac-2280dfbbbc55/scratchpad/work/gen/icons/key_navy.png">    </p:cNvPr>
+          <p:cNvPr id="36" name="Image 7" descr="/tmp/claude-0/-home-user-riesgo/0ff9ff46-1396-5bd8-b3ac-2280dfbbbc55/scratchpad/work/gen/icons/key_navy.png">    </p:cNvPr>
           <p:cNvPicPr>
             <a:picLocks noChangeAspect="1"/>
           </p:cNvPicPr>
@@ -32386,7 +32386,7 @@
       </p:pic>
       <p:sp>
         <p:nvSpPr>
-          <p:cNvPr id="36" name="Shape 26"/>
+          <p:cNvPr id="37" name="Shape 26"/>
           <p:cNvSpPr/>
           <p:nvPr/>
         </p:nvSpPr>
@@ -32406,7 +32406,7 @@
       </p:sp>
       <p:sp>
         <p:nvSpPr>
-          <p:cNvPr id="37" name="Text 27"/>
+          <p:cNvPr id="38" name="Text 27"/>
           <p:cNvSpPr txBox="1"/>
           <p:nvPr/>
         </p:nvSpPr>
@@ -32445,7 +32445,7 @@
       </p:sp>
       <p:sp>
         <p:nvSpPr>
-          <p:cNvPr id="38" name="Shape 28"/>
+          <p:cNvPr id="39" name="Shape 28"/>
           <p:cNvSpPr/>
           <p:nvPr/>
         </p:nvSpPr>
@@ -32465,7 +32465,7 @@
       </p:sp>
       <p:pic>
         <p:nvPicPr>
-          <p:cNvPr id="39" name="Image 8" descr="/tmp/claude-0/-home-user-riesgo/0ff9ff46-1396-5bd8-b3ac-2280dfbbbc55/scratchpad/work/gen/icons/social_navy.png">    </p:cNvPr>
+          <p:cNvPr id="40" name="Image 8" descr="/tmp/claude-0/-home-user-riesgo/0ff9ff46-1396-5bd8-b3ac-2280dfbbbc55/scratchpad/work/gen/icons/social_navy.png">    </p:cNvPr>
           <p:cNvPicPr>
             <a:picLocks noChangeAspect="1"/>
           </p:cNvPicPr>
@@ -32489,7 +32489,7 @@
       </p:pic>
       <p:sp>
         <p:nvSpPr>
-          <p:cNvPr id="40" name="Shape 29"/>
+          <p:cNvPr id="41" name="Shape 29"/>
           <p:cNvSpPr/>
           <p:nvPr/>
         </p:nvSpPr>
@@ -32509,7 +32509,7 @@
       </p:sp>
       <p:sp>
         <p:nvSpPr>
-          <p:cNvPr id="41" name="Text 30"/>
+          <p:cNvPr id="42" name="Text 30"/>
           <p:cNvSpPr txBox="1"/>
           <p:nvPr/>
         </p:nvSpPr>
@@ -32548,7 +32548,7 @@
       </p:sp>
       <p:sp>
         <p:nvSpPr>
-          <p:cNvPr id="42" name="Text 31"/>
+          <p:cNvPr id="43" name="Text 31"/>
           <p:cNvSpPr txBox="1"/>
           <p:nvPr/>
         </p:nvSpPr>
@@ -32587,7 +32587,7 @@
       </p:sp>
       <p:sp>
         <p:nvSpPr>
-          <p:cNvPr id="43" name="Text 32"/>
+          <p:cNvPr id="44" name="Text 32"/>
           <p:cNvSpPr txBox="1"/>
           <p:nvPr/>
         </p:nvSpPr>
@@ -32626,7 +32626,7 @@
       </p:sp>
       <p:sp>
         <p:nvSpPr>
-          <p:cNvPr id="44" name="Text 33"/>
+          <p:cNvPr id="45" name="Text 33"/>
           <p:cNvSpPr txBox="1"/>
           <p:nvPr/>
         </p:nvSpPr>
@@ -32697,7 +32697,7 @@
       </p:grpSpPr>
       <p:sp>
         <p:nvSpPr>
-          <p:cNvPr id="2" name="Text 0"/>
+          <p:cNvPr id="3" name="Text 0"/>
           <p:cNvSpPr txBox="1"/>
           <p:nvPr/>
         </p:nvSpPr>
@@ -32736,7 +32736,7 @@
       </p:sp>
       <p:sp>
         <p:nvSpPr>
-          <p:cNvPr id="3" name="Text 1"/>
+          <p:cNvPr id="4" name="Text 1"/>
           <p:cNvSpPr txBox="1"/>
           <p:nvPr/>
         </p:nvSpPr>
@@ -32778,7 +32778,7 @@
       </p:sp>
       <p:sp>
         <p:nvSpPr>
-          <p:cNvPr id="4" name="Shape 2"/>
+          <p:cNvPr id="5" name="Shape 2"/>
           <p:cNvSpPr/>
           <p:nvPr/>
         </p:nvSpPr>
@@ -32807,7 +32807,7 @@
       </p:sp>
       <p:sp>
         <p:nvSpPr>
-          <p:cNvPr id="5" name="Shape 3"/>
+          <p:cNvPr id="6" name="Shape 3"/>
           <p:cNvSpPr/>
           <p:nvPr/>
         </p:nvSpPr>
@@ -32827,7 +32827,7 @@
       </p:sp>
       <p:pic>
         <p:nvPicPr>
-          <p:cNvPr id="6" name="Image 0" descr="/tmp/claude-0/-home-user-riesgo/0ff9ff46-1396-5bd8-b3ac-2280dfbbbc55/scratchpad/work/gen/icons/lock_open_navy.png">    </p:cNvPr>
+          <p:cNvPr id="7" name="Image 0" descr="/tmp/claude-0/-home-user-riesgo/0ff9ff46-1396-5bd8-b3ac-2280dfbbbc55/scratchpad/work/gen/icons/lock_open_navy.png">    </p:cNvPr>
           <p:cNvPicPr>
             <a:picLocks noChangeAspect="1"/>
           </p:cNvPicPr>
@@ -32851,7 +32851,7 @@
       </p:pic>
       <p:sp>
         <p:nvSpPr>
-          <p:cNvPr id="7" name="Text 4"/>
+          <p:cNvPr id="8" name="Text 4"/>
           <p:cNvSpPr txBox="1"/>
           <p:nvPr/>
         </p:nvSpPr>
@@ -32890,7 +32890,7 @@
       </p:sp>
       <p:sp>
         <p:nvSpPr>
-          <p:cNvPr id="8" name="Text 5"/>
+          <p:cNvPr id="9" name="Text 5"/>
           <p:cNvSpPr txBox="1"/>
           <p:nvPr/>
         </p:nvSpPr>
@@ -32932,7 +32932,7 @@
       </p:sp>
       <p:sp>
         <p:nvSpPr>
-          <p:cNvPr id="9" name="Shape 6"/>
+          <p:cNvPr id="10" name="Shape 6"/>
           <p:cNvSpPr/>
           <p:nvPr/>
         </p:nvSpPr>
@@ -32961,7 +32961,7 @@
       </p:sp>
       <p:sp>
         <p:nvSpPr>
-          <p:cNvPr id="10" name="Shape 7"/>
+          <p:cNvPr id="11" name="Shape 7"/>
           <p:cNvSpPr/>
           <p:nvPr/>
         </p:nvSpPr>
@@ -32981,7 +32981,7 @@
       </p:sp>
       <p:pic>
         <p:nvPicPr>
-          <p:cNvPr id="11" name="Image 1" descr="/tmp/claude-0/-home-user-riesgo/0ff9ff46-1396-5bd8-b3ac-2280dfbbbc55/scratchpad/work/gen/icons/usb_navy.png">    </p:cNvPr>
+          <p:cNvPr id="12" name="Image 1" descr="/tmp/claude-0/-home-user-riesgo/0ff9ff46-1396-5bd8-b3ac-2280dfbbbc55/scratchpad/work/gen/icons/usb_navy.png">    </p:cNvPr>
           <p:cNvPicPr>
             <a:picLocks noChangeAspect="1"/>
           </p:cNvPicPr>
@@ -33005,7 +33005,7 @@
       </p:pic>
       <p:sp>
         <p:nvSpPr>
-          <p:cNvPr id="12" name="Text 8"/>
+          <p:cNvPr id="13" name="Text 8"/>
           <p:cNvSpPr txBox="1"/>
           <p:nvPr/>
         </p:nvSpPr>
@@ -33044,7 +33044,7 @@
       </p:sp>
       <p:sp>
         <p:nvSpPr>
-          <p:cNvPr id="13" name="Text 9"/>
+          <p:cNvPr id="14" name="Text 9"/>
           <p:cNvSpPr txBox="1"/>
           <p:nvPr/>
         </p:nvSpPr>
@@ -33086,7 +33086,7 @@
       </p:sp>
       <p:sp>
         <p:nvSpPr>
-          <p:cNvPr id="14" name="Shape 10"/>
+          <p:cNvPr id="15" name="Shape 10"/>
           <p:cNvSpPr/>
           <p:nvPr/>
         </p:nvSpPr>
@@ -33115,7 +33115,7 @@
       </p:sp>
       <p:sp>
         <p:nvSpPr>
-          <p:cNvPr id="15" name="Shape 11"/>
+          <p:cNvPr id="16" name="Shape 11"/>
           <p:cNvSpPr/>
           <p:nvPr/>
         </p:nvSpPr>
@@ -33135,7 +33135,7 @@
       </p:sp>
       <p:pic>
         <p:nvPicPr>
-          <p:cNvPr id="16" name="Image 2" descr="/tmp/claude-0/-home-user-riesgo/0ff9ff46-1396-5bd8-b3ac-2280dfbbbc55/scratchpad/work/gen/icons/wifi_off_navy.png">    </p:cNvPr>
+          <p:cNvPr id="17" name="Image 2" descr="/tmp/claude-0/-home-user-riesgo/0ff9ff46-1396-5bd8-b3ac-2280dfbbbc55/scratchpad/work/gen/icons/wifi_off_navy.png">    </p:cNvPr>
           <p:cNvPicPr>
             <a:picLocks noChangeAspect="1"/>
           </p:cNvPicPr>
@@ -33159,7 +33159,7 @@
       </p:pic>
       <p:sp>
         <p:nvSpPr>
-          <p:cNvPr id="17" name="Text 12"/>
+          <p:cNvPr id="18" name="Text 12"/>
           <p:cNvSpPr txBox="1"/>
           <p:nvPr/>
         </p:nvSpPr>
@@ -33198,7 +33198,7 @@
       </p:sp>
       <p:sp>
         <p:nvSpPr>
-          <p:cNvPr id="18" name="Text 13"/>
+          <p:cNvPr id="19" name="Text 13"/>
           <p:cNvSpPr txBox="1"/>
           <p:nvPr/>
         </p:nvSpPr>
@@ -33240,7 +33240,7 @@
       </p:sp>
       <p:sp>
         <p:nvSpPr>
-          <p:cNvPr id="19" name="Shape 14"/>
+          <p:cNvPr id="20" name="Shape 14"/>
           <p:cNvSpPr/>
           <p:nvPr/>
         </p:nvSpPr>
@@ -33269,7 +33269,7 @@
       </p:sp>
       <p:sp>
         <p:nvSpPr>
-          <p:cNvPr id="20" name="Shape 15"/>
+          <p:cNvPr id="21" name="Shape 15"/>
           <p:cNvSpPr/>
           <p:nvPr/>
         </p:nvSpPr>
@@ -33289,7 +33289,7 @@
       </p:sp>
       <p:pic>
         <p:nvPicPr>
-          <p:cNvPr id="21" name="Image 3" descr="/tmp/claude-0/-home-user-riesgo/0ff9ff46-1396-5bd8-b3ac-2280dfbbbc55/scratchpad/work/gen/icons/trash_navy.png">    </p:cNvPr>
+          <p:cNvPr id="22" name="Image 3" descr="/tmp/claude-0/-home-user-riesgo/0ff9ff46-1396-5bd8-b3ac-2280dfbbbc55/scratchpad/work/gen/icons/trash_navy.png">    </p:cNvPr>
           <p:cNvPicPr>
             <a:picLocks noChangeAspect="1"/>
           </p:cNvPicPr>
@@ -33313,7 +33313,7 @@
       </p:pic>
       <p:sp>
         <p:nvSpPr>
-          <p:cNvPr id="22" name="Text 16"/>
+          <p:cNvPr id="23" name="Text 16"/>
           <p:cNvSpPr txBox="1"/>
           <p:nvPr/>
         </p:nvSpPr>
@@ -33352,7 +33352,7 @@
       </p:sp>
       <p:sp>
         <p:nvSpPr>
-          <p:cNvPr id="23" name="Text 17"/>
+          <p:cNvPr id="24" name="Text 17"/>
           <p:cNvSpPr txBox="1"/>
           <p:nvPr/>
         </p:nvSpPr>
@@ -33394,7 +33394,7 @@
       </p:sp>
       <p:sp>
         <p:nvSpPr>
-          <p:cNvPr id="24" name="Shape 18"/>
+          <p:cNvPr id="25" name="Shape 18"/>
           <p:cNvSpPr/>
           <p:nvPr/>
         </p:nvSpPr>
@@ -33423,7 +33423,7 @@
       </p:sp>
       <p:sp>
         <p:nvSpPr>
-          <p:cNvPr id="25" name="Shape 19"/>
+          <p:cNvPr id="26" name="Shape 19"/>
           <p:cNvSpPr/>
           <p:nvPr/>
         </p:nvSpPr>
@@ -33443,7 +33443,7 @@
       </p:sp>
       <p:pic>
         <p:nvPicPr>
-          <p:cNvPr id="26" name="Image 4" descr="/tmp/claude-0/-home-user-riesgo/0ff9ff46-1396-5bd8-b3ac-2280dfbbbc55/scratchpad/work/gen/icons/bell_alert_navy.png">    </p:cNvPr>
+          <p:cNvPr id="27" name="Image 4" descr="/tmp/claude-0/-home-user-riesgo/0ff9ff46-1396-5bd8-b3ac-2280dfbbbc55/scratchpad/work/gen/icons/bell_alert_navy.png">    </p:cNvPr>
           <p:cNvPicPr>
             <a:picLocks noChangeAspect="1"/>
           </p:cNvPicPr>
@@ -33467,7 +33467,7 @@
       </p:pic>
       <p:sp>
         <p:nvSpPr>
-          <p:cNvPr id="27" name="Text 20"/>
+          <p:cNvPr id="28" name="Text 20"/>
           <p:cNvSpPr txBox="1"/>
           <p:nvPr/>
         </p:nvSpPr>
@@ -33506,7 +33506,7 @@
       </p:sp>
       <p:sp>
         <p:nvSpPr>
-          <p:cNvPr id="28" name="Text 21"/>
+          <p:cNvPr id="29" name="Text 21"/>
           <p:cNvSpPr txBox="1"/>
           <p:nvPr/>
         </p:nvSpPr>
@@ -33548,7 +33548,7 @@
       </p:sp>
       <p:sp>
         <p:nvSpPr>
-          <p:cNvPr id="29" name="Shape 22"/>
+          <p:cNvPr id="30" name="Shape 22"/>
           <p:cNvSpPr/>
           <p:nvPr/>
         </p:nvSpPr>
@@ -33577,7 +33577,7 @@
       </p:sp>
       <p:sp>
         <p:nvSpPr>
-          <p:cNvPr id="30" name="Shape 23"/>
+          <p:cNvPr id="31" name="Shape 23"/>
           <p:cNvSpPr/>
           <p:nvPr/>
         </p:nvSpPr>
@@ -33597,7 +33597,7 @@
       </p:sp>
       <p:pic>
         <p:nvPicPr>
-          <p:cNvPr id="31" name="Image 5" descr="/tmp/claude-0/-home-user-riesgo/0ff9ff46-1396-5bd8-b3ac-2280dfbbbc55/scratchpad/work/gen/icons/hand_stop_navy.png">    </p:cNvPr>
+          <p:cNvPr id="32" name="Image 5" descr="/tmp/claude-0/-home-user-riesgo/0ff9ff46-1396-5bd8-b3ac-2280dfbbbc55/scratchpad/work/gen/icons/hand_stop_navy.png">    </p:cNvPr>
           <p:cNvPicPr>
             <a:picLocks noChangeAspect="1"/>
           </p:cNvPicPr>
@@ -33621,7 +33621,7 @@
       </p:pic>
       <p:sp>
         <p:nvSpPr>
-          <p:cNvPr id="32" name="Text 24"/>
+          <p:cNvPr id="33" name="Text 24"/>
           <p:cNvSpPr txBox="1"/>
           <p:nvPr/>
         </p:nvSpPr>
@@ -33660,7 +33660,7 @@
       </p:sp>
       <p:sp>
         <p:nvSpPr>
-          <p:cNvPr id="33" name="Text 25"/>
+          <p:cNvPr id="34" name="Text 25"/>
           <p:cNvSpPr txBox="1"/>
           <p:nvPr/>
         </p:nvSpPr>
@@ -33702,7 +33702,7 @@
       </p:sp>
       <p:sp>
         <p:nvSpPr>
-          <p:cNvPr id="34" name="Shape 26"/>
+          <p:cNvPr id="35" name="Shape 26"/>
           <p:cNvSpPr/>
           <p:nvPr/>
         </p:nvSpPr>
@@ -33731,7 +33731,7 @@
       </p:sp>
       <p:sp>
         <p:nvSpPr>
-          <p:cNvPr id="35" name="Shape 27"/>
+          <p:cNvPr id="36" name="Shape 27"/>
           <p:cNvSpPr/>
           <p:nvPr/>
         </p:nvSpPr>
@@ -33751,7 +33751,7 @@
       </p:sp>
       <p:pic>
         <p:nvPicPr>
-          <p:cNvPr id="36" name="Image 6" descr="/tmp/claude-0/-home-user-riesgo/0ff9ff46-1396-5bd8-b3ac-2280dfbbbc55/scratchpad/work/gen/icons/cctv_navy.png">    </p:cNvPr>
+          <p:cNvPr id="37" name="Image 6" descr="/tmp/claude-0/-home-user-riesgo/0ff9ff46-1396-5bd8-b3ac-2280dfbbbc55/scratchpad/work/gen/icons/cctv_navy.png">    </p:cNvPr>
           <p:cNvPicPr>
             <a:picLocks noChangeAspect="1"/>
           </p:cNvPicPr>
@@ -33775,7 +33775,7 @@
       </p:pic>
       <p:sp>
         <p:nvSpPr>
-          <p:cNvPr id="37" name="Text 28"/>
+          <p:cNvPr id="38" name="Text 28"/>
           <p:cNvSpPr txBox="1"/>
           <p:nvPr/>
         </p:nvSpPr>
@@ -33814,7 +33814,7 @@
       </p:sp>
       <p:sp>
         <p:nvSpPr>
-          <p:cNvPr id="38" name="Text 29"/>
+          <p:cNvPr id="39" name="Text 29"/>
           <p:cNvSpPr txBox="1"/>
           <p:nvPr/>
         </p:nvSpPr>
@@ -33856,7 +33856,7 @@
       </p:sp>
       <p:sp>
         <p:nvSpPr>
-          <p:cNvPr id="39" name="Shape 30"/>
+          <p:cNvPr id="40" name="Shape 30"/>
           <p:cNvSpPr/>
           <p:nvPr/>
         </p:nvSpPr>
@@ -33885,7 +33885,7 @@
       </p:sp>
       <p:sp>
         <p:nvSpPr>
-          <p:cNvPr id="40" name="Shape 31"/>
+          <p:cNvPr id="41" name="Shape 31"/>
           <p:cNvSpPr/>
           <p:nvPr/>
         </p:nvSpPr>
@@ -33905,7 +33905,7 @@
       </p:sp>
       <p:pic>
         <p:nvPicPr>
-          <p:cNvPr id="41" name="Image 7" descr="/tmp/claude-0/-home-user-riesgo/0ff9ff46-1396-5bd8-b3ac-2280dfbbbc55/scratchpad/work/gen/icons/key_navy.png">    </p:cNvPr>
+          <p:cNvPr id="42" name="Image 7" descr="/tmp/claude-0/-home-user-riesgo/0ff9ff46-1396-5bd8-b3ac-2280dfbbbc55/scratchpad/work/gen/icons/key_navy.png">    </p:cNvPr>
           <p:cNvPicPr>
             <a:picLocks noChangeAspect="1"/>
           </p:cNvPicPr>
@@ -33929,7 +33929,7 @@
       </p:pic>
       <p:sp>
         <p:nvSpPr>
-          <p:cNvPr id="42" name="Text 32"/>
+          <p:cNvPr id="43" name="Text 32"/>
           <p:cNvSpPr txBox="1"/>
           <p:nvPr/>
         </p:nvSpPr>
@@ -33968,7 +33968,7 @@
       </p:sp>
       <p:sp>
         <p:nvSpPr>
-          <p:cNvPr id="43" name="Text 33"/>
+          <p:cNvPr id="44" name="Text 33"/>
           <p:cNvSpPr txBox="1"/>
           <p:nvPr/>
         </p:nvSpPr>
@@ -34010,7 +34010,7 @@
       </p:sp>
       <p:sp>
         <p:nvSpPr>
-          <p:cNvPr id="44" name="Shape 34"/>
+          <p:cNvPr id="45" name="Shape 34"/>
           <p:cNvSpPr/>
           <p:nvPr/>
         </p:nvSpPr>
@@ -34039,7 +34039,7 @@
       </p:sp>
       <p:sp>
         <p:nvSpPr>
-          <p:cNvPr id="45" name="Shape 35"/>
+          <p:cNvPr id="46" name="Shape 35"/>
           <p:cNvSpPr/>
           <p:nvPr/>
         </p:nvSpPr>
@@ -34059,7 +34059,7 @@
       </p:sp>
       <p:pic>
         <p:nvPicPr>
-          <p:cNvPr id="46" name="Image 8" descr="/tmp/claude-0/-home-user-riesgo/0ff9ff46-1396-5bd8-b3ac-2280dfbbbc55/scratchpad/work/gen/icons/social_navy.png">    </p:cNvPr>
+          <p:cNvPr id="47" name="Image 8" descr="/tmp/claude-0/-home-user-riesgo/0ff9ff46-1396-5bd8-b3ac-2280dfbbbc55/scratchpad/work/gen/icons/social_navy.png">    </p:cNvPr>
           <p:cNvPicPr>
             <a:picLocks noChangeAspect="1"/>
           </p:cNvPicPr>
@@ -34083,7 +34083,7 @@
       </p:pic>
       <p:sp>
         <p:nvSpPr>
-          <p:cNvPr id="47" name="Text 36"/>
+          <p:cNvPr id="48" name="Text 36"/>
           <p:cNvSpPr txBox="1"/>
           <p:nvPr/>
         </p:nvSpPr>
@@ -34122,7 +34122,7 @@
       </p:sp>
       <p:sp>
         <p:nvSpPr>
-          <p:cNvPr id="48" name="Text 37"/>
+          <p:cNvPr id="49" name="Text 37"/>
           <p:cNvSpPr txBox="1"/>
           <p:nvPr/>
         </p:nvSpPr>
@@ -34164,7 +34164,7 @@
       </p:sp>
       <p:sp>
         <p:nvSpPr>
-          <p:cNvPr id="49" name="Text 38"/>
+          <p:cNvPr id="50" name="Text 38"/>
           <p:cNvSpPr txBox="1"/>
           <p:nvPr/>
         </p:nvSpPr>
@@ -34203,7 +34203,7 @@
       </p:sp>
       <p:sp>
         <p:nvSpPr>
-          <p:cNvPr id="50" name="Text 39"/>
+          <p:cNvPr id="51" name="Text 39"/>
           <p:cNvSpPr txBox="1"/>
           <p:nvPr/>
         </p:nvSpPr>
@@ -34274,7 +34274,7 @@
       </p:grpSpPr>
       <p:sp>
         <p:nvSpPr>
-          <p:cNvPr id="2" name="Shape 0"/>
+          <p:cNvPr id="3" name="Shape 0"/>
           <p:cNvSpPr/>
           <p:nvPr/>
         </p:nvSpPr>
@@ -34294,7 +34294,7 @@
       </p:sp>
       <p:sp>
         <p:nvSpPr>
-          <p:cNvPr id="3" name="Text 1"/>
+          <p:cNvPr id="4" name="Text 1"/>
           <p:cNvSpPr txBox="1"/>
           <p:nvPr/>
         </p:nvSpPr>
@@ -34333,7 +34333,7 @@
       </p:sp>
       <p:sp>
         <p:nvSpPr>
-          <p:cNvPr id="4" name="Text 2"/>
+          <p:cNvPr id="5" name="Text 2"/>
           <p:cNvSpPr txBox="1"/>
           <p:nvPr/>
         </p:nvSpPr>
@@ -34372,7 +34372,7 @@
       </p:sp>
       <p:sp>
         <p:nvSpPr>
-          <p:cNvPr id="5" name="Shape 3"/>
+          <p:cNvPr id="6" name="Shape 3"/>
           <p:cNvSpPr/>
           <p:nvPr/>
         </p:nvSpPr>
@@ -34392,7 +34392,7 @@
       </p:sp>
       <p:pic>
         <p:nvPicPr>
-          <p:cNvPr id="6" name="Image 0" descr="/tmp/claude-0/-home-user-riesgo/0ff9ff46-1396-5bd8-b3ac-2280dfbbbc55/scratchpad/work/gen/icons/eye_navy.png">    </p:cNvPr>
+          <p:cNvPr id="7" name="Image 0" descr="/tmp/claude-0/-home-user-riesgo/0ff9ff46-1396-5bd8-b3ac-2280dfbbbc55/scratchpad/work/gen/icons/eye_navy.png">    </p:cNvPr>
           <p:cNvPicPr>
             <a:picLocks noChangeAspect="1"/>
           </p:cNvPicPr>
@@ -34416,7 +34416,7 @@
       </p:pic>
       <p:sp>
         <p:nvSpPr>
-          <p:cNvPr id="7" name="Text 4"/>
+          <p:cNvPr id="8" name="Text 4"/>
           <p:cNvSpPr txBox="1"/>
           <p:nvPr/>
         </p:nvSpPr>
@@ -34455,7 +34455,7 @@
       </p:sp>
       <p:pic>
         <p:nvPicPr>
-          <p:cNvPr id="8" name="Image 1" descr="/tmp/claude-0/-home-user-riesgo/0ff9ff46-1396-5bd8-b3ac-2280dfbbbc55/scratchpad/work/gen/icons/arrow_right_gold.png">    </p:cNvPr>
+          <p:cNvPr id="9" name="Image 1" descr="/tmp/claude-0/-home-user-riesgo/0ff9ff46-1396-5bd8-b3ac-2280dfbbbc55/scratchpad/work/gen/icons/arrow_right_gold.png">    </p:cNvPr>
           <p:cNvPicPr>
             <a:picLocks noChangeAspect="1"/>
           </p:cNvPicPr>
@@ -34479,7 +34479,7 @@
       </p:pic>
       <p:sp>
         <p:nvSpPr>
-          <p:cNvPr id="9" name="Shape 5"/>
+          <p:cNvPr id="10" name="Shape 5"/>
           <p:cNvSpPr/>
           <p:nvPr/>
         </p:nvSpPr>
@@ -34499,7 +34499,7 @@
       </p:sp>
       <p:pic>
         <p:nvPicPr>
-          <p:cNvPr id="10" name="Image 2" descr="/tmp/claude-0/-home-user-riesgo/0ff9ff46-1396-5bd8-b3ac-2280dfbbbc55/scratchpad/work/gen/icons/magnifier_navy.png">    </p:cNvPr>
+          <p:cNvPr id="11" name="Image 2" descr="/tmp/claude-0/-home-user-riesgo/0ff9ff46-1396-5bd8-b3ac-2280dfbbbc55/scratchpad/work/gen/icons/magnifier_navy.png">    </p:cNvPr>
           <p:cNvPicPr>
             <a:picLocks noChangeAspect="1"/>
           </p:cNvPicPr>
@@ -34523,7 +34523,7 @@
       </p:pic>
       <p:sp>
         <p:nvSpPr>
-          <p:cNvPr id="11" name="Text 6"/>
+          <p:cNvPr id="12" name="Text 6"/>
           <p:cNvSpPr txBox="1"/>
           <p:nvPr/>
         </p:nvSpPr>
@@ -34562,7 +34562,7 @@
       </p:sp>
       <p:pic>
         <p:nvPicPr>
-          <p:cNvPr id="12" name="Image 3" descr="/tmp/claude-0/-home-user-riesgo/0ff9ff46-1396-5bd8-b3ac-2280dfbbbc55/scratchpad/work/gen/icons/arrow_right_gold.png">    </p:cNvPr>
+          <p:cNvPr id="13" name="Image 3" descr="/tmp/claude-0/-home-user-riesgo/0ff9ff46-1396-5bd8-b3ac-2280dfbbbc55/scratchpad/work/gen/icons/arrow_right_gold.png">    </p:cNvPr>
           <p:cNvPicPr>
             <a:picLocks noChangeAspect="1"/>
           </p:cNvPicPr>
@@ -34586,7 +34586,7 @@
       </p:pic>
       <p:sp>
         <p:nvSpPr>
-          <p:cNvPr id="13" name="Shape 7"/>
+          <p:cNvPr id="14" name="Shape 7"/>
           <p:cNvSpPr/>
           <p:nvPr/>
         </p:nvSpPr>
@@ -34606,7 +34606,7 @@
       </p:sp>
       <p:pic>
         <p:nvPicPr>
-          <p:cNvPr id="14" name="Image 4" descr="/tmp/claude-0/-home-user-riesgo/0ff9ff46-1396-5bd8-b3ac-2280dfbbbc55/scratchpad/work/gen/icons/shield_check_navy.png">    </p:cNvPr>
+          <p:cNvPr id="15" name="Image 4" descr="/tmp/claude-0/-home-user-riesgo/0ff9ff46-1396-5bd8-b3ac-2280dfbbbc55/scratchpad/work/gen/icons/shield_check_navy.png">    </p:cNvPr>
           <p:cNvPicPr>
             <a:picLocks noChangeAspect="1"/>
           </p:cNvPicPr>
@@ -34630,7 +34630,7 @@
       </p:pic>
       <p:sp>
         <p:nvSpPr>
-          <p:cNvPr id="15" name="Text 8"/>
+          <p:cNvPr id="16" name="Text 8"/>
           <p:cNvSpPr txBox="1"/>
           <p:nvPr/>
         </p:nvSpPr>
@@ -34669,7 +34669,7 @@
       </p:sp>
       <p:pic>
         <p:nvPicPr>
-          <p:cNvPr id="16" name="Image 5" descr="/tmp/claude-0/-home-user-riesgo/0ff9ff46-1396-5bd8-b3ac-2280dfbbbc55/scratchpad/work/gen/icons/arrow_right_gold.png">    </p:cNvPr>
+          <p:cNvPr id="17" name="Image 5" descr="/tmp/claude-0/-home-user-riesgo/0ff9ff46-1396-5bd8-b3ac-2280dfbbbc55/scratchpad/work/gen/icons/arrow_right_gold.png">    </p:cNvPr>
           <p:cNvPicPr>
             <a:picLocks noChangeAspect="1"/>
           </p:cNvPicPr>
@@ -34693,7 +34693,7 @@
       </p:pic>
       <p:sp>
         <p:nvSpPr>
-          <p:cNvPr id="17" name="Shape 9"/>
+          <p:cNvPr id="18" name="Shape 9"/>
           <p:cNvSpPr/>
           <p:nvPr/>
         </p:nvSpPr>
@@ -34713,7 +34713,7 @@
       </p:sp>
       <p:pic>
         <p:nvPicPr>
-          <p:cNvPr id="18" name="Image 6" descr="/tmp/claude-0/-home-user-riesgo/0ff9ff46-1396-5bd8-b3ac-2280dfbbbc55/scratchpad/work/gen/icons/lightbulb_navy.png">    </p:cNvPr>
+          <p:cNvPr id="19" name="Image 6" descr="/tmp/claude-0/-home-user-riesgo/0ff9ff46-1396-5bd8-b3ac-2280dfbbbc55/scratchpad/work/gen/icons/lightbulb_navy.png">    </p:cNvPr>
           <p:cNvPicPr>
             <a:picLocks noChangeAspect="1"/>
           </p:cNvPicPr>
@@ -34737,7 +34737,7 @@
       </p:pic>
       <p:sp>
         <p:nvSpPr>
-          <p:cNvPr id="19" name="Text 10"/>
+          <p:cNvPr id="20" name="Text 10"/>
           <p:cNvSpPr txBox="1"/>
           <p:nvPr/>
         </p:nvSpPr>
@@ -34776,7 +34776,7 @@
       </p:sp>
       <p:pic>
         <p:nvPicPr>
-          <p:cNvPr id="20" name="Image 7" descr="/tmp/claude-0/-home-user-riesgo/0ff9ff46-1396-5bd8-b3ac-2280dfbbbc55/scratchpad/work/gen/icons/arrow_right_gold.png">    </p:cNvPr>
+          <p:cNvPr id="21" name="Image 7" descr="/tmp/claude-0/-home-user-riesgo/0ff9ff46-1396-5bd8-b3ac-2280dfbbbc55/scratchpad/work/gen/icons/arrow_right_gold.png">    </p:cNvPr>
           <p:cNvPicPr>
             <a:picLocks noChangeAspect="1"/>
           </p:cNvPicPr>
@@ -34800,7 +34800,7 @@
       </p:pic>
       <p:sp>
         <p:nvSpPr>
-          <p:cNvPr id="21" name="Shape 11"/>
+          <p:cNvPr id="22" name="Shape 11"/>
           <p:cNvSpPr/>
           <p:nvPr/>
         </p:nvSpPr>
@@ -34820,7 +34820,7 @@
       </p:sp>
       <p:pic>
         <p:nvPicPr>
-          <p:cNvPr id="22" name="Image 8" descr="/tmp/claude-0/-home-user-riesgo/0ff9ff46-1396-5bd8-b3ac-2280dfbbbc55/scratchpad/work/gen/icons/megaphone_navy.png">    </p:cNvPr>
+          <p:cNvPr id="23" name="Image 8" descr="/tmp/claude-0/-home-user-riesgo/0ff9ff46-1396-5bd8-b3ac-2280dfbbbc55/scratchpad/work/gen/icons/megaphone_navy.png">    </p:cNvPr>
           <p:cNvPicPr>
             <a:picLocks noChangeAspect="1"/>
           </p:cNvPicPr>
@@ -34844,7 +34844,7 @@
       </p:pic>
       <p:sp>
         <p:nvSpPr>
-          <p:cNvPr id="23" name="Text 12"/>
+          <p:cNvPr id="24" name="Text 12"/>
           <p:cNvSpPr txBox="1"/>
           <p:nvPr/>
         </p:nvSpPr>
@@ -34883,7 +34883,7 @@
       </p:sp>
       <p:sp>
         <p:nvSpPr>
-          <p:cNvPr id="24" name="Text 13"/>
+          <p:cNvPr id="25" name="Text 13"/>
           <p:cNvSpPr txBox="1"/>
           <p:nvPr/>
         </p:nvSpPr>
@@ -34922,7 +34922,7 @@
       </p:sp>
       <p:pic>
         <p:nvPicPr>
-          <p:cNvPr id="25" name="Image 9" descr="/tmp/claude-0/-home-user-riesgo/0ff9ff46-1396-5bd8-b3ac-2280dfbbbc55/scratchpad/work/gen/logo_white.png">    </p:cNvPr>
+          <p:cNvPr id="26" name="Image 9" descr="/tmp/claude-0/-home-user-riesgo/0ff9ff46-1396-5bd8-b3ac-2280dfbbbc55/scratchpad/work/gen/logo_white.png">    </p:cNvPr>
           <p:cNvPicPr>
             <a:picLocks noChangeAspect="1"/>
           </p:cNvPicPr>
@@ -34946,7 +34946,7 @@
       </p:pic>
       <p:sp>
         <p:nvSpPr>
-          <p:cNvPr id="26" name="Text 14"/>
+          <p:cNvPr id="27" name="Text 14"/>
           <p:cNvSpPr txBox="1"/>
           <p:nvPr/>
         </p:nvSpPr>
@@ -34985,7 +34985,7 @@
       </p:sp>
       <p:sp>
         <p:nvSpPr>
-          <p:cNvPr id="27" name="Text 15"/>
+          <p:cNvPr id="28" name="Text 15"/>
           <p:cNvSpPr txBox="1"/>
           <p:nvPr/>
         </p:nvSpPr>
@@ -35056,7 +35056,7 @@
       </p:grpSpPr>
       <p:sp>
         <p:nvSpPr>
-          <p:cNvPr id="2" name="Shape 0"/>
+          <p:cNvPr id="3" name="Shape 0"/>
           <p:cNvSpPr/>
           <p:nvPr/>
         </p:nvSpPr>
@@ -35076,7 +35076,7 @@
       </p:sp>
       <p:sp>
         <p:nvSpPr>
-          <p:cNvPr id="3" name="Text 1"/>
+          <p:cNvPr id="4" name="Text 1"/>
           <p:cNvSpPr txBox="1"/>
           <p:nvPr/>
         </p:nvSpPr>
@@ -35115,7 +35115,7 @@
       </p:sp>
       <p:sp>
         <p:nvSpPr>
-          <p:cNvPr id="4" name="Text 2"/>
+          <p:cNvPr id="5" name="Text 2"/>
           <p:cNvSpPr txBox="1"/>
           <p:nvPr/>
         </p:nvSpPr>
@@ -35177,7 +35177,7 @@
       </p:sp>
       <p:sp>
         <p:nvSpPr>
-          <p:cNvPr id="5" name="Text 3"/>
+          <p:cNvPr id="6" name="Text 3"/>
           <p:cNvSpPr txBox="1"/>
           <p:nvPr/>
         </p:nvSpPr>
@@ -35216,7 +35216,7 @@
       </p:sp>
       <p:pic>
         <p:nvPicPr>
-          <p:cNvPr id="6" name="Image 0" descr="/tmp/claude-0/-home-user-riesgo/0ff9ff46-1396-5bd8-b3ac-2280dfbbbc55/scratchpad/work/gen/logo_white.png">    </p:cNvPr>
+          <p:cNvPr id="7" name="Image 0" descr="/tmp/claude-0/-home-user-riesgo/0ff9ff46-1396-5bd8-b3ac-2280dfbbbc55/scratchpad/work/gen/logo_white.png">    </p:cNvPr>
           <p:cNvPicPr>
             <a:picLocks noChangeAspect="1"/>
           </p:cNvPicPr>
@@ -35240,7 +35240,7 @@
       </p:pic>
       <p:sp>
         <p:nvSpPr>
-          <p:cNvPr id="7" name="Text 4"/>
+          <p:cNvPr id="8" name="Text 4"/>
           <p:cNvSpPr txBox="1"/>
           <p:nvPr/>
         </p:nvSpPr>
@@ -35311,7 +35311,7 @@
       </p:grpSpPr>
       <p:sp>
         <p:nvSpPr>
-          <p:cNvPr id="2" name="Shape 0"/>
+          <p:cNvPr id="3" name="Shape 0"/>
           <p:cNvSpPr/>
           <p:nvPr/>
         </p:nvSpPr>
@@ -35331,7 +35331,7 @@
       </p:sp>
       <p:sp>
         <p:nvSpPr>
-          <p:cNvPr id="3" name="Text 1"/>
+          <p:cNvPr id="4" name="Text 1"/>
           <p:cNvSpPr txBox="1"/>
           <p:nvPr/>
         </p:nvSpPr>
@@ -35370,7 +35370,7 @@
       </p:sp>
       <p:sp>
         <p:nvSpPr>
-          <p:cNvPr id="4" name="Shape 2"/>
+          <p:cNvPr id="5" name="Shape 2"/>
           <p:cNvSpPr/>
           <p:nvPr/>
         </p:nvSpPr>
@@ -35390,7 +35390,7 @@
       </p:sp>
       <p:pic>
         <p:nvPicPr>
-          <p:cNvPr id="5" name="Image 0" descr="/tmp/claude-0/-home-user-riesgo/0ff9ff46-1396-5bd8-b3ac-2280dfbbbc55/scratchpad/work/gen/icons/people_group_navy.png">    </p:cNvPr>
+          <p:cNvPr id="6" name="Image 0" descr="/tmp/claude-0/-home-user-riesgo/0ff9ff46-1396-5bd8-b3ac-2280dfbbbc55/scratchpad/work/gen/icons/people_group_navy.png">    </p:cNvPr>
           <p:cNvPicPr>
             <a:picLocks noChangeAspect="1"/>
           </p:cNvPicPr>
@@ -35414,7 +35414,7 @@
       </p:pic>
       <p:sp>
         <p:nvSpPr>
-          <p:cNvPr id="6" name="Text 3"/>
+          <p:cNvPr id="7" name="Text 3"/>
           <p:cNvSpPr txBox="1"/>
           <p:nvPr/>
         </p:nvSpPr>
@@ -35453,7 +35453,7 @@
       </p:sp>
       <p:sp>
         <p:nvSpPr>
-          <p:cNvPr id="7" name="Text 4"/>
+          <p:cNvPr id="8" name="Text 4"/>
           <p:cNvSpPr txBox="1"/>
           <p:nvPr/>
         </p:nvSpPr>
@@ -35515,7 +35515,7 @@
       </p:sp>
       <p:sp>
         <p:nvSpPr>
-          <p:cNvPr id="8" name="Text 5"/>
+          <p:cNvPr id="9" name="Text 5"/>
           <p:cNvSpPr txBox="1"/>
           <p:nvPr/>
         </p:nvSpPr>
@@ -35557,7 +35557,7 @@
       </p:sp>
       <p:pic>
         <p:nvPicPr>
-          <p:cNvPr id="9" name="Image 1" descr="/tmp/claude-0/-home-user-riesgo/0ff9ff46-1396-5bd8-b3ac-2280dfbbbc55/scratchpad/work/gen/logo_white.png">    </p:cNvPr>
+          <p:cNvPr id="10" name="Image 1" descr="/tmp/claude-0/-home-user-riesgo/0ff9ff46-1396-5bd8-b3ac-2280dfbbbc55/scratchpad/work/gen/logo_white.png">    </p:cNvPr>
           <p:cNvPicPr>
             <a:picLocks noChangeAspect="1"/>
           </p:cNvPicPr>
@@ -35581,7 +35581,7 @@
       </p:pic>
       <p:sp>
         <p:nvSpPr>
-          <p:cNvPr id="10" name="Text 6"/>
+          <p:cNvPr id="11" name="Text 6"/>
           <p:cNvSpPr txBox="1"/>
           <p:nvPr/>
         </p:nvSpPr>
@@ -35620,7 +35620,7 @@
       </p:sp>
       <p:sp>
         <p:nvSpPr>
-          <p:cNvPr id="11" name="Text 7"/>
+          <p:cNvPr id="12" name="Text 7"/>
           <p:cNvSpPr txBox="1"/>
           <p:nvPr/>
         </p:nvSpPr>
@@ -35691,7 +35691,7 @@
       </p:grpSpPr>
       <p:sp>
         <p:nvSpPr>
-          <p:cNvPr id="2" name="Text 0"/>
+          <p:cNvPr id="3" name="Text 0"/>
           <p:cNvSpPr txBox="1"/>
           <p:nvPr/>
         </p:nvSpPr>
@@ -35730,7 +35730,7 @@
       </p:sp>
       <p:sp>
         <p:nvSpPr>
-          <p:cNvPr id="3" name="Text 1"/>
+          <p:cNvPr id="4" name="Text 1"/>
           <p:cNvSpPr txBox="1"/>
           <p:nvPr/>
         </p:nvSpPr>
@@ -35772,7 +35772,7 @@
       </p:sp>
       <p:sp>
         <p:nvSpPr>
-          <p:cNvPr id="4" name="Text 2"/>
+          <p:cNvPr id="5" name="Text 2"/>
           <p:cNvSpPr txBox="1"/>
           <p:nvPr/>
         </p:nvSpPr>
@@ -35811,7 +35811,7 @@
       </p:sp>
       <p:sp>
         <p:nvSpPr>
-          <p:cNvPr id="5" name="Shape 3"/>
+          <p:cNvPr id="6" name="Shape 3"/>
           <p:cNvSpPr/>
           <p:nvPr/>
         </p:nvSpPr>
@@ -35833,7 +35833,7 @@
       </p:sp>
       <p:sp>
         <p:nvSpPr>
-          <p:cNvPr id="6" name="Shape 4"/>
+          <p:cNvPr id="7" name="Shape 4"/>
           <p:cNvSpPr/>
           <p:nvPr/>
         </p:nvSpPr>
@@ -35853,7 +35853,7 @@
       </p:sp>
       <p:pic>
         <p:nvPicPr>
-          <p:cNvPr id="7" name="Image 0" descr="/tmp/claude-0/-home-user-riesgo/0ff9ff46-1396-5bd8-b3ac-2280dfbbbc55/scratchpad/work/gen/icons/magnifier_white.png">    </p:cNvPr>
+          <p:cNvPr id="8" name="Image 0" descr="/tmp/claude-0/-home-user-riesgo/0ff9ff46-1396-5bd8-b3ac-2280dfbbbc55/scratchpad/work/gen/icons/magnifier_white.png">    </p:cNvPr>
           <p:cNvPicPr>
             <a:picLocks noChangeAspect="1"/>
           </p:cNvPicPr>
@@ -35877,7 +35877,7 @@
       </p:pic>
       <p:sp>
         <p:nvSpPr>
-          <p:cNvPr id="8" name="Text 5"/>
+          <p:cNvPr id="9" name="Text 5"/>
           <p:cNvSpPr txBox="1"/>
           <p:nvPr/>
         </p:nvSpPr>
@@ -35919,7 +35919,7 @@
       </p:sp>
       <p:sp>
         <p:nvSpPr>
-          <p:cNvPr id="9" name="Shape 6"/>
+          <p:cNvPr id="10" name="Shape 6"/>
           <p:cNvSpPr/>
           <p:nvPr/>
         </p:nvSpPr>
@@ -35941,7 +35941,7 @@
       </p:sp>
       <p:sp>
         <p:nvSpPr>
-          <p:cNvPr id="10" name="Shape 7"/>
+          <p:cNvPr id="11" name="Shape 7"/>
           <p:cNvSpPr/>
           <p:nvPr/>
         </p:nvSpPr>
@@ -35961,7 +35961,7 @@
       </p:sp>
       <p:pic>
         <p:nvPicPr>
-          <p:cNvPr id="11" name="Image 1" descr="/tmp/claude-0/-home-user-riesgo/0ff9ff46-1396-5bd8-b3ac-2280dfbbbc55/scratchpad/work/gen/icons/shield_check_white.png">    </p:cNvPr>
+          <p:cNvPr id="12" name="Image 1" descr="/tmp/claude-0/-home-user-riesgo/0ff9ff46-1396-5bd8-b3ac-2280dfbbbc55/scratchpad/work/gen/icons/shield_check_white.png">    </p:cNvPr>
           <p:cNvPicPr>
             <a:picLocks noChangeAspect="1"/>
           </p:cNvPicPr>
@@ -35985,7 +35985,7 @@
       </p:pic>
       <p:sp>
         <p:nvSpPr>
-          <p:cNvPr id="12" name="Text 8"/>
+          <p:cNvPr id="13" name="Text 8"/>
           <p:cNvSpPr txBox="1"/>
           <p:nvPr/>
         </p:nvSpPr>
@@ -36027,7 +36027,7 @@
       </p:sp>
       <p:sp>
         <p:nvSpPr>
-          <p:cNvPr id="13" name="Shape 9"/>
+          <p:cNvPr id="14" name="Shape 9"/>
           <p:cNvSpPr/>
           <p:nvPr/>
         </p:nvSpPr>
@@ -36049,7 +36049,7 @@
       </p:sp>
       <p:sp>
         <p:nvSpPr>
-          <p:cNvPr id="14" name="Shape 10"/>
+          <p:cNvPr id="15" name="Shape 10"/>
           <p:cNvSpPr/>
           <p:nvPr/>
         </p:nvSpPr>
@@ -36069,7 +36069,7 @@
       </p:sp>
       <p:pic>
         <p:nvPicPr>
-          <p:cNvPr id="15" name="Image 2" descr="/tmp/claude-0/-home-user-riesgo/0ff9ff46-1396-5bd8-b3ac-2280dfbbbc55/scratchpad/work/gen/icons/gear_white.png">    </p:cNvPr>
+          <p:cNvPr id="16" name="Image 2" descr="/tmp/claude-0/-home-user-riesgo/0ff9ff46-1396-5bd8-b3ac-2280dfbbbc55/scratchpad/work/gen/icons/gear_white.png">    </p:cNvPr>
           <p:cNvPicPr>
             <a:picLocks noChangeAspect="1"/>
           </p:cNvPicPr>
@@ -36093,7 +36093,7 @@
       </p:pic>
       <p:sp>
         <p:nvSpPr>
-          <p:cNvPr id="16" name="Text 11"/>
+          <p:cNvPr id="17" name="Text 11"/>
           <p:cNvSpPr txBox="1"/>
           <p:nvPr/>
         </p:nvSpPr>
@@ -36135,7 +36135,7 @@
       </p:sp>
       <p:sp>
         <p:nvSpPr>
-          <p:cNvPr id="17" name="Shape 12"/>
+          <p:cNvPr id="18" name="Shape 12"/>
           <p:cNvSpPr/>
           <p:nvPr/>
         </p:nvSpPr>
@@ -36157,7 +36157,7 @@
       </p:sp>
       <p:sp>
         <p:nvSpPr>
-          <p:cNvPr id="18" name="Shape 13"/>
+          <p:cNvPr id="19" name="Shape 13"/>
           <p:cNvSpPr/>
           <p:nvPr/>
         </p:nvSpPr>
@@ -36177,7 +36177,7 @@
       </p:sp>
       <p:pic>
         <p:nvPicPr>
-          <p:cNvPr id="19" name="Image 3" descr="/tmp/claude-0/-home-user-riesgo/0ff9ff46-1396-5bd8-b3ac-2280dfbbbc55/scratchpad/work/gen/icons/chat_white.png">    </p:cNvPr>
+          <p:cNvPr id="20" name="Image 3" descr="/tmp/claude-0/-home-user-riesgo/0ff9ff46-1396-5bd8-b3ac-2280dfbbbc55/scratchpad/work/gen/icons/chat_white.png">    </p:cNvPr>
           <p:cNvPicPr>
             <a:picLocks noChangeAspect="1"/>
           </p:cNvPicPr>
@@ -36201,7 +36201,7 @@
       </p:pic>
       <p:sp>
         <p:nvSpPr>
-          <p:cNvPr id="20" name="Text 14"/>
+          <p:cNvPr id="21" name="Text 14"/>
           <p:cNvSpPr txBox="1"/>
           <p:nvPr/>
         </p:nvSpPr>
@@ -36243,7 +36243,7 @@
       </p:sp>
       <p:sp>
         <p:nvSpPr>
-          <p:cNvPr id="21" name="Shape 15"/>
+          <p:cNvPr id="22" name="Shape 15"/>
           <p:cNvSpPr/>
           <p:nvPr/>
         </p:nvSpPr>
@@ -36265,7 +36265,7 @@
       </p:sp>
       <p:sp>
         <p:nvSpPr>
-          <p:cNvPr id="22" name="Shape 16"/>
+          <p:cNvPr id="23" name="Shape 16"/>
           <p:cNvSpPr/>
           <p:nvPr/>
         </p:nvSpPr>
@@ -36285,7 +36285,7 @@
       </p:sp>
       <p:pic>
         <p:nvPicPr>
-          <p:cNvPr id="23" name="Image 4" descr="/tmp/claude-0/-home-user-riesgo/0ff9ff46-1396-5bd8-b3ac-2280dfbbbc55/scratchpad/work/gen/icons/megaphone_white.png">    </p:cNvPr>
+          <p:cNvPr id="24" name="Image 4" descr="/tmp/claude-0/-home-user-riesgo/0ff9ff46-1396-5bd8-b3ac-2280dfbbbc55/scratchpad/work/gen/icons/megaphone_white.png">    </p:cNvPr>
           <p:cNvPicPr>
             <a:picLocks noChangeAspect="1"/>
           </p:cNvPicPr>
@@ -36309,7 +36309,7 @@
       </p:pic>
       <p:sp>
         <p:nvSpPr>
-          <p:cNvPr id="24" name="Text 17"/>
+          <p:cNvPr id="25" name="Text 17"/>
           <p:cNvSpPr txBox="1"/>
           <p:nvPr/>
         </p:nvSpPr>
@@ -36351,7 +36351,7 @@
       </p:sp>
       <p:sp>
         <p:nvSpPr>
-          <p:cNvPr id="25" name="Shape 18"/>
+          <p:cNvPr id="26" name="Shape 18"/>
           <p:cNvSpPr/>
           <p:nvPr/>
         </p:nvSpPr>
@@ -36373,7 +36373,7 @@
       </p:sp>
       <p:sp>
         <p:nvSpPr>
-          <p:cNvPr id="26" name="Shape 19"/>
+          <p:cNvPr id="27" name="Shape 19"/>
           <p:cNvSpPr/>
           <p:nvPr/>
         </p:nvSpPr>
@@ -36393,7 +36393,7 @@
       </p:sp>
       <p:pic>
         <p:nvPicPr>
-          <p:cNvPr id="27" name="Image 5" descr="/tmp/claude-0/-home-user-riesgo/0ff9ff46-1396-5bd8-b3ac-2280dfbbbc55/scratchpad/work/gen/icons/check_circle_white.png">    </p:cNvPr>
+          <p:cNvPr id="28" name="Image 5" descr="/tmp/claude-0/-home-user-riesgo/0ff9ff46-1396-5bd8-b3ac-2280dfbbbc55/scratchpad/work/gen/icons/check_circle_white.png">    </p:cNvPr>
           <p:cNvPicPr>
             <a:picLocks noChangeAspect="1"/>
           </p:cNvPicPr>
@@ -36417,7 +36417,7 @@
       </p:pic>
       <p:sp>
         <p:nvSpPr>
-          <p:cNvPr id="28" name="Text 20"/>
+          <p:cNvPr id="29" name="Text 20"/>
           <p:cNvSpPr txBox="1"/>
           <p:nvPr/>
         </p:nvSpPr>
@@ -36459,7 +36459,7 @@
       </p:sp>
       <p:sp>
         <p:nvSpPr>
-          <p:cNvPr id="29" name="Text 21"/>
+          <p:cNvPr id="30" name="Text 21"/>
           <p:cNvSpPr txBox="1"/>
           <p:nvPr/>
         </p:nvSpPr>
@@ -36498,7 +36498,7 @@
       </p:sp>
       <p:sp>
         <p:nvSpPr>
-          <p:cNvPr id="30" name="Text 22"/>
+          <p:cNvPr id="31" name="Text 22"/>
           <p:cNvSpPr txBox="1"/>
           <p:nvPr/>
         </p:nvSpPr>
@@ -36569,7 +36569,7 @@
       </p:grpSpPr>
       <p:sp>
         <p:nvSpPr>
-          <p:cNvPr id="2" name="Shape 0"/>
+          <p:cNvPr id="3" name="Shape 0"/>
           <p:cNvSpPr/>
           <p:nvPr/>
         </p:nvSpPr>
@@ -36589,7 +36589,7 @@
       </p:sp>
       <p:sp>
         <p:nvSpPr>
-          <p:cNvPr id="3" name="Text 1"/>
+          <p:cNvPr id="4" name="Text 1"/>
           <p:cNvSpPr txBox="1"/>
           <p:nvPr/>
         </p:nvSpPr>
@@ -36671,7 +36671,7 @@
       </p:sp>
       <p:sp>
         <p:nvSpPr>
-          <p:cNvPr id="4" name="Text 2"/>
+          <p:cNvPr id="5" name="Text 2"/>
           <p:cNvSpPr txBox="1"/>
           <p:nvPr/>
         </p:nvSpPr>
@@ -36710,7 +36710,7 @@
       </p:sp>
       <p:sp>
         <p:nvSpPr>
-          <p:cNvPr id="5" name="Text 3"/>
+          <p:cNvPr id="6" name="Text 3"/>
           <p:cNvSpPr txBox="1"/>
           <p:nvPr/>
         </p:nvSpPr>
@@ -36781,7 +36781,7 @@
       </p:grpSpPr>
       <p:sp>
         <p:nvSpPr>
-          <p:cNvPr id="2" name="Shape 0"/>
+          <p:cNvPr id="3" name="Shape 0"/>
           <p:cNvSpPr/>
           <p:nvPr/>
         </p:nvSpPr>
@@ -36801,7 +36801,7 @@
       </p:sp>
       <p:sp>
         <p:nvSpPr>
-          <p:cNvPr id="3" name="Text 1"/>
+          <p:cNvPr id="4" name="Text 1"/>
           <p:cNvSpPr txBox="1"/>
           <p:nvPr/>
         </p:nvSpPr>
@@ -36840,7 +36840,7 @@
       </p:sp>
       <p:sp>
         <p:nvSpPr>
-          <p:cNvPr id="4" name="Shape 2"/>
+          <p:cNvPr id="5" name="Shape 2"/>
           <p:cNvSpPr/>
           <p:nvPr/>
         </p:nvSpPr>
@@ -36860,7 +36860,7 @@
       </p:sp>
       <p:pic>
         <p:nvPicPr>
-          <p:cNvPr id="5" name="Image 0" descr="/tmp/claude-0/-home-user-riesgo/0ff9ff46-1396-5bd8-b3ac-2280dfbbbc55/scratchpad/work/gen/icons/megaphone_navy.png">    </p:cNvPr>
+          <p:cNvPr id="6" name="Image 0" descr="/tmp/claude-0/-home-user-riesgo/0ff9ff46-1396-5bd8-b3ac-2280dfbbbc55/scratchpad/work/gen/icons/megaphone_navy.png">    </p:cNvPr>
           <p:cNvPicPr>
             <a:picLocks noChangeAspect="1"/>
           </p:cNvPicPr>
@@ -36884,7 +36884,7 @@
       </p:pic>
       <p:sp>
         <p:nvSpPr>
-          <p:cNvPr id="6" name="Text 3"/>
+          <p:cNvPr id="7" name="Text 3"/>
           <p:cNvSpPr txBox="1"/>
           <p:nvPr/>
         </p:nvSpPr>
@@ -36923,7 +36923,7 @@
       </p:sp>
       <p:sp>
         <p:nvSpPr>
-          <p:cNvPr id="7" name="Text 4"/>
+          <p:cNvPr id="8" name="Text 4"/>
           <p:cNvSpPr txBox="1"/>
           <p:nvPr/>
         </p:nvSpPr>
@@ -36985,7 +36985,7 @@
       </p:sp>
       <p:sp>
         <p:nvSpPr>
-          <p:cNvPr id="8" name="Text 5"/>
+          <p:cNvPr id="9" name="Text 5"/>
           <p:cNvSpPr txBox="1"/>
           <p:nvPr/>
         </p:nvSpPr>
@@ -37027,7 +37027,7 @@
       </p:sp>
       <p:pic>
         <p:nvPicPr>
-          <p:cNvPr id="9" name="Image 1" descr="/tmp/claude-0/-home-user-riesgo/0ff9ff46-1396-5bd8-b3ac-2280dfbbbc55/scratchpad/work/gen/logo_white.png">    </p:cNvPr>
+          <p:cNvPr id="10" name="Image 1" descr="/tmp/claude-0/-home-user-riesgo/0ff9ff46-1396-5bd8-b3ac-2280dfbbbc55/scratchpad/work/gen/logo_white.png">    </p:cNvPr>
           <p:cNvPicPr>
             <a:picLocks noChangeAspect="1"/>
           </p:cNvPicPr>
@@ -37051,7 +37051,7 @@
       </p:pic>
       <p:sp>
         <p:nvSpPr>
-          <p:cNvPr id="10" name="Text 6"/>
+          <p:cNvPr id="11" name="Text 6"/>
           <p:cNvSpPr txBox="1"/>
           <p:nvPr/>
         </p:nvSpPr>
@@ -37090,7 +37090,7 @@
       </p:sp>
       <p:sp>
         <p:nvSpPr>
-          <p:cNvPr id="11" name="Text 7"/>
+          <p:cNvPr id="12" name="Text 7"/>
           <p:cNvSpPr txBox="1"/>
           <p:nvPr/>
         </p:nvSpPr>
@@ -37161,7 +37161,7 @@
       </p:grpSpPr>
       <p:sp>
         <p:nvSpPr>
-          <p:cNvPr id="2" name="Text 0"/>
+          <p:cNvPr id="3" name="Text 0"/>
           <p:cNvSpPr txBox="1"/>
           <p:nvPr/>
         </p:nvSpPr>
@@ -37200,7 +37200,7 @@
       </p:sp>
       <p:sp>
         <p:nvSpPr>
-          <p:cNvPr id="3" name="Text 1"/>
+          <p:cNvPr id="4" name="Text 1"/>
           <p:cNvSpPr txBox="1"/>
           <p:nvPr/>
         </p:nvSpPr>
@@ -37242,7 +37242,7 @@
       </p:sp>
       <p:sp>
         <p:nvSpPr>
-          <p:cNvPr id="4" name="Shape 2"/>
+          <p:cNvPr id="5" name="Shape 2"/>
           <p:cNvSpPr/>
           <p:nvPr/>
         </p:nvSpPr>
@@ -37262,7 +37262,7 @@
       </p:sp>
       <p:pic>
         <p:nvPicPr>
-          <p:cNvPr id="5" name="Image 0" descr="/tmp/claude-0/-home-user-riesgo/0ff9ff46-1396-5bd8-b3ac-2280dfbbbc55/scratchpad/work/gen/icons/eye_white.png">    </p:cNvPr>
+          <p:cNvPr id="6" name="Image 0" descr="/tmp/claude-0/-home-user-riesgo/0ff9ff46-1396-5bd8-b3ac-2280dfbbbc55/scratchpad/work/gen/icons/eye_white.png">    </p:cNvPr>
           <p:cNvPicPr>
             <a:picLocks noChangeAspect="1"/>
           </p:cNvPicPr>
@@ -37286,7 +37286,7 @@
       </p:pic>
       <p:sp>
         <p:nvSpPr>
-          <p:cNvPr id="6" name="Text 3"/>
+          <p:cNvPr id="7" name="Text 3"/>
           <p:cNvSpPr txBox="1"/>
           <p:nvPr/>
         </p:nvSpPr>
@@ -37328,7 +37328,7 @@
       </p:sp>
       <p:sp>
         <p:nvSpPr>
-          <p:cNvPr id="7" name="Text 4"/>
+          <p:cNvPr id="8" name="Text 4"/>
           <p:cNvSpPr txBox="1"/>
           <p:nvPr/>
         </p:nvSpPr>
@@ -37370,7 +37370,7 @@
       </p:sp>
       <p:pic>
         <p:nvPicPr>
-          <p:cNvPr id="8" name="Image 1" descr="/tmp/claude-0/-home-user-riesgo/0ff9ff46-1396-5bd8-b3ac-2280dfbbbc55/scratchpad/work/gen/icons/arrow_right_gray.png">    </p:cNvPr>
+          <p:cNvPr id="9" name="Image 1" descr="/tmp/claude-0/-home-user-riesgo/0ff9ff46-1396-5bd8-b3ac-2280dfbbbc55/scratchpad/work/gen/icons/arrow_right_gray.png">    </p:cNvPr>
           <p:cNvPicPr>
             <a:picLocks noChangeAspect="1"/>
           </p:cNvPicPr>
@@ -37394,7 +37394,7 @@
       </p:pic>
       <p:sp>
         <p:nvSpPr>
-          <p:cNvPr id="9" name="Shape 5"/>
+          <p:cNvPr id="10" name="Shape 5"/>
           <p:cNvSpPr/>
           <p:nvPr/>
         </p:nvSpPr>
@@ -37414,7 +37414,7 @@
       </p:sp>
       <p:pic>
         <p:nvPicPr>
-          <p:cNvPr id="10" name="Image 2" descr="/tmp/claude-0/-home-user-riesgo/0ff9ff46-1396-5bd8-b3ac-2280dfbbbc55/scratchpad/work/gen/icons/magnifier_white.png">    </p:cNvPr>
+          <p:cNvPr id="11" name="Image 2" descr="/tmp/claude-0/-home-user-riesgo/0ff9ff46-1396-5bd8-b3ac-2280dfbbbc55/scratchpad/work/gen/icons/magnifier_white.png">    </p:cNvPr>
           <p:cNvPicPr>
             <a:picLocks noChangeAspect="1"/>
           </p:cNvPicPr>
@@ -37438,7 +37438,7 @@
       </p:pic>
       <p:sp>
         <p:nvSpPr>
-          <p:cNvPr id="11" name="Text 6"/>
+          <p:cNvPr id="12" name="Text 6"/>
           <p:cNvSpPr txBox="1"/>
           <p:nvPr/>
         </p:nvSpPr>
@@ -37480,7 +37480,7 @@
       </p:sp>
       <p:sp>
         <p:nvSpPr>
-          <p:cNvPr id="12" name="Text 7"/>
+          <p:cNvPr id="13" name="Text 7"/>
           <p:cNvSpPr txBox="1"/>
           <p:nvPr/>
         </p:nvSpPr>
@@ -37522,7 +37522,7 @@
       </p:sp>
       <p:pic>
         <p:nvPicPr>
-          <p:cNvPr id="13" name="Image 3" descr="/tmp/claude-0/-home-user-riesgo/0ff9ff46-1396-5bd8-b3ac-2280dfbbbc55/scratchpad/work/gen/icons/arrow_right_gray.png">    </p:cNvPr>
+          <p:cNvPr id="14" name="Image 3" descr="/tmp/claude-0/-home-user-riesgo/0ff9ff46-1396-5bd8-b3ac-2280dfbbbc55/scratchpad/work/gen/icons/arrow_right_gray.png">    </p:cNvPr>
           <p:cNvPicPr>
             <a:picLocks noChangeAspect="1"/>
           </p:cNvPicPr>
@@ -37546,7 +37546,7 @@
       </p:pic>
       <p:sp>
         <p:nvSpPr>
-          <p:cNvPr id="14" name="Shape 8"/>
+          <p:cNvPr id="15" name="Shape 8"/>
           <p:cNvSpPr/>
           <p:nvPr/>
         </p:nvSpPr>
@@ -37566,7 +37566,7 @@
       </p:sp>
       <p:pic>
         <p:nvPicPr>
-          <p:cNvPr id="15" name="Image 4" descr="/tmp/claude-0/-home-user-riesgo/0ff9ff46-1396-5bd8-b3ac-2280dfbbbc55/scratchpad/work/gen/icons/check_circle_white.png">    </p:cNvPr>
+          <p:cNvPr id="16" name="Image 4" descr="/tmp/claude-0/-home-user-riesgo/0ff9ff46-1396-5bd8-b3ac-2280dfbbbc55/scratchpad/work/gen/icons/check_circle_white.png">    </p:cNvPr>
           <p:cNvPicPr>
             <a:picLocks noChangeAspect="1"/>
           </p:cNvPicPr>
@@ -37590,7 +37590,7 @@
       </p:pic>
       <p:sp>
         <p:nvSpPr>
-          <p:cNvPr id="16" name="Text 9"/>
+          <p:cNvPr id="17" name="Text 9"/>
           <p:cNvSpPr txBox="1"/>
           <p:nvPr/>
         </p:nvSpPr>
@@ -37632,7 +37632,7 @@
       </p:sp>
       <p:sp>
         <p:nvSpPr>
-          <p:cNvPr id="17" name="Text 10"/>
+          <p:cNvPr id="18" name="Text 10"/>
           <p:cNvSpPr txBox="1"/>
           <p:nvPr/>
         </p:nvSpPr>
@@ -37674,7 +37674,7 @@
       </p:sp>
       <p:pic>
         <p:nvPicPr>
-          <p:cNvPr id="18" name="Image 5" descr="/tmp/claude-0/-home-user-riesgo/0ff9ff46-1396-5bd8-b3ac-2280dfbbbc55/scratchpad/work/gen/icons/arrow_right_gray.png">    </p:cNvPr>
+          <p:cNvPr id="19" name="Image 5" descr="/tmp/claude-0/-home-user-riesgo/0ff9ff46-1396-5bd8-b3ac-2280dfbbbc55/scratchpad/work/gen/icons/arrow_right_gray.png">    </p:cNvPr>
           <p:cNvPicPr>
             <a:picLocks noChangeAspect="1"/>
           </p:cNvPicPr>
@@ -37698,7 +37698,7 @@
       </p:pic>
       <p:sp>
         <p:nvSpPr>
-          <p:cNvPr id="19" name="Shape 11"/>
+          <p:cNvPr id="20" name="Shape 11"/>
           <p:cNvSpPr/>
           <p:nvPr/>
         </p:nvSpPr>
@@ -37718,7 +37718,7 @@
       </p:sp>
       <p:pic>
         <p:nvPicPr>
-          <p:cNvPr id="20" name="Image 6" descr="/tmp/claude-0/-home-user-riesgo/0ff9ff46-1396-5bd8-b3ac-2280dfbbbc55/scratchpad/work/gen/icons/megaphone_white.png">    </p:cNvPr>
+          <p:cNvPr id="21" name="Image 6" descr="/tmp/claude-0/-home-user-riesgo/0ff9ff46-1396-5bd8-b3ac-2280dfbbbc55/scratchpad/work/gen/icons/megaphone_white.png">    </p:cNvPr>
           <p:cNvPicPr>
             <a:picLocks noChangeAspect="1"/>
           </p:cNvPicPr>
@@ -37742,7 +37742,7 @@
       </p:pic>
       <p:sp>
         <p:nvSpPr>
-          <p:cNvPr id="21" name="Text 12"/>
+          <p:cNvPr id="22" name="Text 12"/>
           <p:cNvSpPr txBox="1"/>
           <p:nvPr/>
         </p:nvSpPr>
@@ -37784,7 +37784,7 @@
       </p:sp>
       <p:sp>
         <p:nvSpPr>
-          <p:cNvPr id="22" name="Text 13"/>
+          <p:cNvPr id="23" name="Text 13"/>
           <p:cNvSpPr txBox="1"/>
           <p:nvPr/>
         </p:nvSpPr>
@@ -37826,7 +37826,7 @@
       </p:sp>
       <p:sp>
         <p:nvSpPr>
-          <p:cNvPr id="23" name="Text 14"/>
+          <p:cNvPr id="24" name="Text 14"/>
           <p:cNvSpPr txBox="1"/>
           <p:nvPr/>
         </p:nvSpPr>
@@ -37865,7 +37865,7 @@
       </p:sp>
       <p:sp>
         <p:nvSpPr>
-          <p:cNvPr id="24" name="Text 15"/>
+          <p:cNvPr id="25" name="Text 15"/>
           <p:cNvSpPr txBox="1"/>
           <p:nvPr/>
         </p:nvSpPr>

--- a/capacitacion-riesgos-2025/CAPACITACION_RIESGOS_2025.pptx
+++ b/capacitacion-riesgos-2025/CAPACITACION_RIESGOS_2025.pptx
@@ -5004,7 +5004,7 @@
             <a:avLst/>
           </a:prstGeom>
           <a:solidFill>
-            <a:srgbClr val="E3A73B"/>
+            <a:srgbClr val="F0AD35"/>
           </a:solidFill>
           <a:ln/>
         </p:spPr>
@@ -5036,7 +5036,7 @@
             <a:r>
               <a:rPr lang="en-US" sz="1500" b="1" spc="300" kern="0" dirty="0">
                 <a:solidFill>
-                  <a:srgbClr val="E3A73B"/>
+                  <a:srgbClr val="F0AD35"/>
                 </a:solidFill>
                 <a:latin typeface="Calibri" pitchFamily="34" charset="0"/>
                 <a:ea typeface="Calibri" pitchFamily="34" charset="-122"/>
@@ -5215,7 +5215,7 @@
             <a:r>
               <a:rPr lang="en-US" sz="1300" i="1" dirty="0">
                 <a:solidFill>
-                  <a:srgbClr val="E3A73B"/>
+                  <a:srgbClr val="F0AD35"/>
                 </a:solidFill>
                 <a:latin typeface="Calibri" pitchFamily="34" charset="0"/>
                 <a:ea typeface="Calibri" pitchFamily="34" charset="-122"/>
@@ -5577,7 +5577,7 @@
             <a:avLst/>
           </a:prstGeom>
           <a:solidFill>
-            <a:srgbClr val="E3A73B"/>
+            <a:srgbClr val="F0AD35"/>
           </a:solidFill>
           <a:ln/>
         </p:spPr>
@@ -5767,7 +5767,7 @@
             <a:r>
               <a:rPr lang="en-US" sz="1300" b="1" spc="200" kern="0" dirty="0">
                 <a:solidFill>
-                  <a:srgbClr val="E3A73B"/>
+                  <a:srgbClr val="E8543E"/>
                 </a:solidFill>
                 <a:latin typeface="Calibri" pitchFamily="34" charset="0"/>
                 <a:ea typeface="Calibri" pitchFamily="34" charset="-122"/>
@@ -5858,14 +5858,14 @@
             <a:avLst/>
           </a:prstGeom>
           <a:solidFill>
-            <a:srgbClr val="E3A73B"/>
+            <a:srgbClr val="E8543E"/>
           </a:solidFill>
           <a:ln/>
         </p:spPr>
       </p:sp>
       <p:pic>
         <p:nvPicPr>
-          <p:cNvPr id="7" name="Image 0" descr="/tmp/claude-0/-home-user-riesgo/0ff9ff46-1396-5bd8-b3ac-2280dfbbbc55/scratchpad/work/gen/icons/document_lock_navy.png">    </p:cNvPr>
+          <p:cNvPr id="7" name="Image 0" descr="/tmp/claude-0/-home-user-riesgo/0ff9ff46-1396-5bd8-b3ac-2280dfbbbc55/scratchpad/work/gen/icons/document_lock_white.png">    </p:cNvPr>
           <p:cNvPicPr>
             <a:picLocks noChangeAspect="1"/>
           </p:cNvPicPr>
@@ -5914,7 +5914,7 @@
             <a:r>
               <a:rPr lang="en-US" sz="1200" b="1" spc="200" kern="0" dirty="0">
                 <a:solidFill>
-                  <a:srgbClr val="E3A73B"/>
+                  <a:srgbClr val="E8543E"/>
                 </a:solidFill>
                 <a:latin typeface="Calibri" pitchFamily="34" charset="0"/>
                 <a:ea typeface="Calibri" pitchFamily="34" charset="-122"/>
@@ -6403,7 +6403,7 @@
             <a:r>
               <a:rPr lang="en-US" sz="900" dirty="0">
                 <a:solidFill>
-                  <a:srgbClr val="8FA0B5"/>
+                  <a:srgbClr val="5B6B82"/>
                 </a:solidFill>
                 <a:latin typeface="Calibri" pitchFamily="34" charset="0"/>
                 <a:ea typeface="Calibri" pitchFamily="34" charset="-122"/>
@@ -6442,7 +6442,7 @@
             <a:r>
               <a:rPr lang="en-US" sz="900" dirty="0">
                 <a:solidFill>
-                  <a:srgbClr val="8FA0B5"/>
+                  <a:srgbClr val="5B6B82"/>
                 </a:solidFill>
                 <a:latin typeface="Calibri" pitchFamily="34" charset="0"/>
                 <a:ea typeface="Calibri" pitchFamily="34" charset="-122"/>
@@ -6513,7 +6513,7 @@
             <a:r>
               <a:rPr lang="en-US" sz="1300" b="1" spc="200" kern="0" dirty="0">
                 <a:solidFill>
-                  <a:srgbClr val="E3A73B"/>
+                  <a:srgbClr val="E8543E"/>
                 </a:solidFill>
                 <a:latin typeface="Calibri" pitchFamily="34" charset="0"/>
                 <a:ea typeface="Calibri" pitchFamily="34" charset="-122"/>
@@ -6584,7 +6584,7 @@
             </a:avLst>
           </a:prstGeom>
           <a:solidFill>
-            <a:srgbClr val="2E9E5B"/>
+            <a:srgbClr val="2FAE60"/>
           </a:solidFill>
           <a:ln/>
         </p:spPr>
@@ -6854,7 +6854,7 @@
             <a:avLst/>
           </a:prstGeom>
           <a:solidFill>
-            <a:srgbClr val="E3A73B"/>
+            <a:srgbClr val="F0AD35"/>
           </a:solidFill>
           <a:ln/>
         </p:spPr>
@@ -6952,7 +6952,7 @@
             <a:r>
               <a:rPr lang="en-US" sz="900" dirty="0">
                 <a:solidFill>
-                  <a:srgbClr val="8FA0B5"/>
+                  <a:srgbClr val="5B6B82"/>
                 </a:solidFill>
                 <a:latin typeface="Calibri" pitchFamily="34" charset="0"/>
                 <a:ea typeface="Calibri" pitchFamily="34" charset="-122"/>
@@ -6991,7 +6991,7 @@
             <a:r>
               <a:rPr lang="en-US" sz="900" dirty="0">
                 <a:solidFill>
-                  <a:srgbClr val="8FA0B5"/>
+                  <a:srgbClr val="5B6B82"/>
                 </a:solidFill>
                 <a:latin typeface="Calibri" pitchFamily="34" charset="0"/>
                 <a:ea typeface="Calibri" pitchFamily="34" charset="-122"/>
@@ -7042,9 +7042,49 @@
           <p:nvPr/>
         </p:nvSpPr>
         <p:spPr>
-          <a:xfrm>
-            <a:off x="-2926080" y="2926080"/>
-            <a:ext cx="7772400" cy="7772400"/>
+          <a:xfrm rot="720000">
+            <a:off x="7955280" y="-457200"/>
+            <a:ext cx="5669280" cy="7772400"/>
+          </a:xfrm>
+          <a:prstGeom prst="rect">
+            <a:avLst/>
+          </a:prstGeom>
+          <a:solidFill>
+            <a:srgbClr val="0EA5A0"/>
+          </a:solidFill>
+          <a:ln/>
+        </p:spPr>
+      </p:sp>
+      <p:sp>
+        <p:nvSpPr>
+          <p:cNvPr id="4" name="Shape 1"/>
+          <p:cNvSpPr/>
+          <p:nvPr/>
+        </p:nvSpPr>
+        <p:spPr>
+          <a:xfrm>
+            <a:off x="0" y="0"/>
+            <a:ext cx="8275320" cy="6858000"/>
+          </a:xfrm>
+          <a:prstGeom prst="rect">
+            <a:avLst/>
+          </a:prstGeom>
+          <a:solidFill>
+            <a:srgbClr val="0A1F3B"/>
+          </a:solidFill>
+          <a:ln/>
+        </p:spPr>
+      </p:sp>
+      <p:sp>
+        <p:nvSpPr>
+          <p:cNvPr id="5" name="Shape 2"/>
+          <p:cNvSpPr/>
+          <p:nvPr/>
+        </p:nvSpPr>
+        <p:spPr>
+          <a:xfrm>
+            <a:off x="-3108960" y="3291840"/>
+            <a:ext cx="7498080" cy="7498080"/>
           </a:xfrm>
           <a:prstGeom prst="ellipse">
             <a:avLst/>
@@ -7057,14 +7097,14 @@
       </p:sp>
       <p:sp>
         <p:nvSpPr>
-          <p:cNvPr id="4" name="Text 1"/>
-          <p:cNvSpPr txBox="1"/>
-          <p:nvPr/>
-        </p:nvSpPr>
-        <p:spPr>
-          <a:xfrm>
-            <a:off x="7498080" y="-777240"/>
-            <a:ext cx="5120640" cy="3840480"/>
+          <p:cNvPr id="6" name="Text 3"/>
+          <p:cNvSpPr txBox="1"/>
+          <p:nvPr/>
+        </p:nvSpPr>
+        <p:spPr>
+          <a:xfrm>
+            <a:off x="-274320" y="-914400"/>
+            <a:ext cx="5852160" cy="4023360"/>
           </a:xfrm>
           <a:prstGeom prst="rect">
             <a:avLst/>
@@ -7076,13 +7116,13 @@
           <a:bodyPr wrap="square" lIns="0" tIns="0" rIns="0" bIns="0" rtlCol="0" anchor="ctr"/>
           <a:lstStyle/>
           <a:p>
-            <a:pPr algn="r" indent="0" marL="0">
+            <a:pPr algn="l" indent="0" marL="0">
               <a:buNone/>
             </a:pPr>
             <a:r>
               <a:rPr lang="en-US" sz="26000" b="1" dirty="0">
                 <a:solidFill>
-                  <a:srgbClr val="15294A"/>
+                  <a:srgbClr val="133B6C"/>
                 </a:solidFill>
                 <a:latin typeface="Cambria" pitchFamily="34" charset="0"/>
                 <a:ea typeface="Cambria" pitchFamily="34" charset="-122"/>
@@ -7096,27 +7136,87 @@
       </p:sp>
       <p:sp>
         <p:nvSpPr>
-          <p:cNvPr id="5" name="Shape 2"/>
-          <p:cNvSpPr/>
-          <p:nvPr/>
-        </p:nvSpPr>
-        <p:spPr>
-          <a:xfrm>
-            <a:off x="566928" y="1828800"/>
-            <a:ext cx="1188720" cy="1188720"/>
+          <p:cNvPr id="7" name="Shape 4"/>
+          <p:cNvSpPr/>
+          <p:nvPr/>
+        </p:nvSpPr>
+        <p:spPr>
+          <a:xfrm>
+            <a:off x="8686800" y="2011680"/>
+            <a:ext cx="2834640" cy="2834640"/>
           </a:xfrm>
           <a:prstGeom prst="ellipse">
             <a:avLst/>
           </a:prstGeom>
           <a:solidFill>
-            <a:srgbClr val="E3A73B"/>
+            <a:srgbClr val="0A1F3B"/>
+          </a:solidFill>
+          <a:ln/>
+        </p:spPr>
+      </p:sp>
+      <p:sp>
+        <p:nvSpPr>
+          <p:cNvPr id="8" name="Shape 5"/>
+          <p:cNvSpPr/>
+          <p:nvPr/>
+        </p:nvSpPr>
+        <p:spPr>
+          <a:xfrm>
+            <a:off x="9784080" y="3931920"/>
+            <a:ext cx="1371600" cy="1371600"/>
+          </a:xfrm>
+          <a:prstGeom prst="ellipse">
+            <a:avLst/>
+          </a:prstGeom>
+          <a:solidFill>
+            <a:srgbClr val="FFFFFF"/>
+          </a:solidFill>
+          <a:ln/>
+        </p:spPr>
+      </p:sp>
+      <p:sp>
+        <p:nvSpPr>
+          <p:cNvPr id="9" name="Shape 6"/>
+          <p:cNvSpPr/>
+          <p:nvPr/>
+        </p:nvSpPr>
+        <p:spPr>
+          <a:xfrm>
+            <a:off x="10698480" y="2011680"/>
+            <a:ext cx="960120" cy="960120"/>
+          </a:xfrm>
+          <a:prstGeom prst="ellipse">
+            <a:avLst/>
+          </a:prstGeom>
+          <a:solidFill>
+            <a:srgbClr val="0D2847"/>
+          </a:solidFill>
+          <a:ln/>
+        </p:spPr>
+      </p:sp>
+      <p:sp>
+        <p:nvSpPr>
+          <p:cNvPr id="10" name="Shape 7"/>
+          <p:cNvSpPr/>
+          <p:nvPr/>
+        </p:nvSpPr>
+        <p:spPr>
+          <a:xfrm>
+            <a:off x="9075420" y="2217420"/>
+            <a:ext cx="1051560" cy="1051560"/>
+          </a:xfrm>
+          <a:prstGeom prst="ellipse">
+            <a:avLst/>
+          </a:prstGeom>
+          <a:solidFill>
+            <a:srgbClr val="FFFFFF"/>
           </a:solidFill>
           <a:ln/>
         </p:spPr>
       </p:sp>
       <p:pic>
         <p:nvPicPr>
-          <p:cNvPr id="6" name="Image 0" descr="/tmp/claude-0/-home-user-riesgo/0ff9ff46-1396-5bd8-b3ac-2280dfbbbc55/scratchpad/work/gen/icons/gears_navy.png">    </p:cNvPr>
+          <p:cNvPr id="11" name="Image 0" descr="/tmp/claude-0/-home-user-riesgo/0ff9ff46-1396-5bd8-b3ac-2280dfbbbc55/scratchpad/work/gen/icons/gear_teal.png">    </p:cNvPr>
           <p:cNvPicPr>
             <a:picLocks noChangeAspect="1"/>
           </p:cNvPicPr>
@@ -7130,8 +7230,8 @@
         </p:blipFill>
         <p:spPr>
           <a:xfrm>
-            <a:off x="852221" y="2114093"/>
-            <a:ext cx="618134" cy="618134"/>
+            <a:off x="9338310" y="2480310"/>
+            <a:ext cx="525780" cy="525780"/>
           </a:xfrm>
           <a:prstGeom prst="rect">
             <a:avLst/>
@@ -7140,150 +7240,27 @@
       </p:pic>
       <p:sp>
         <p:nvSpPr>
-          <p:cNvPr id="7" name="Text 3"/>
-          <p:cNvSpPr txBox="1"/>
-          <p:nvPr/>
-        </p:nvSpPr>
-        <p:spPr>
-          <a:xfrm>
-            <a:off x="566928" y="2880360"/>
-            <a:ext cx="9601200" cy="365760"/>
-          </a:xfrm>
-          <a:prstGeom prst="rect">
-            <a:avLst/>
-          </a:prstGeom>
-          <a:noFill/>
-          <a:ln/>
-        </p:spPr>
-        <p:txBody>
-          <a:bodyPr wrap="square" lIns="0" tIns="0" rIns="0" bIns="0" rtlCol="0" anchor="ctr"/>
-          <a:lstStyle/>
-          <a:p>
-            <a:pPr indent="0" marL="0">
-              <a:buNone/>
-            </a:pPr>
-            <a:r>
-              <a:rPr lang="en-US" sz="1500" b="1" spc="300" kern="0" dirty="0">
-                <a:solidFill>
-                  <a:srgbClr val="E3A73B"/>
-                </a:solidFill>
-                <a:latin typeface="Calibri" pitchFamily="34" charset="0"/>
-                <a:ea typeface="Calibri" pitchFamily="34" charset="-122"/>
-                <a:cs typeface="Calibri" pitchFamily="34" charset="-120"/>
-              </a:rPr>
-              <a:t>TEMA 3</a:t>
-            </a:r>
-            <a:endParaRPr lang="en-US" sz="1500" dirty="0"/>
-          </a:p>
-        </p:txBody>
-      </p:sp>
-      <p:sp>
-        <p:nvSpPr>
-          <p:cNvPr id="8" name="Text 4"/>
-          <p:cNvSpPr txBox="1"/>
-          <p:nvPr/>
-        </p:nvSpPr>
-        <p:spPr>
-          <a:xfrm>
-            <a:off x="566928" y="3246120"/>
-            <a:ext cx="10424160" cy="1554480"/>
-          </a:xfrm>
-          <a:prstGeom prst="rect">
-            <a:avLst/>
-          </a:prstGeom>
-          <a:noFill/>
-          <a:ln/>
-        </p:spPr>
-        <p:txBody>
-          <a:bodyPr wrap="square" lIns="0" tIns="0" rIns="0" bIns="0" rtlCol="0" anchor="ctr"/>
-          <a:lstStyle/>
-          <a:p>
-            <a:pPr indent="0" marL="0">
-              <a:lnSpc>
-                <a:spcPct val="105000"/>
-              </a:lnSpc>
-              <a:buNone/>
-            </a:pPr>
-            <a:r>
-              <a:rPr lang="en-US" sz="3400" b="1" dirty="0">
-                <a:solidFill>
-                  <a:srgbClr val="FFFFFF"/>
-                </a:solidFill>
-                <a:latin typeface="Cambria" pitchFamily="34" charset="0"/>
-                <a:ea typeface="Cambria" pitchFamily="34" charset="-122"/>
-                <a:cs typeface="Cambria" pitchFamily="34" charset="-120"/>
-              </a:rPr>
-              <a:t>LOS RIESGOS OPERATIVOS ESTÁN</a:t>
-            </a:r>
-            <a:endParaRPr lang="en-US" sz="3400" dirty="0"/>
-          </a:p>
-          <a:p>
-            <a:pPr indent="0" marL="0">
-              <a:lnSpc>
-                <a:spcPct val="105000"/>
-              </a:lnSpc>
-              <a:buNone/>
-            </a:pPr>
-            <a:r>
-              <a:rPr lang="en-US" sz="3400" b="1" dirty="0">
-                <a:solidFill>
-                  <a:srgbClr val="FFFFFF"/>
-                </a:solidFill>
-                <a:latin typeface="Cambria" pitchFamily="34" charset="0"/>
-                <a:ea typeface="Cambria" pitchFamily="34" charset="-122"/>
-                <a:cs typeface="Cambria" pitchFamily="34" charset="-120"/>
-              </a:rPr>
-              <a:t>EN NUESTRO DÍA A DÍA</a:t>
-            </a:r>
-            <a:endParaRPr lang="en-US" sz="3400" dirty="0"/>
-          </a:p>
-        </p:txBody>
-      </p:sp>
-      <p:sp>
-        <p:nvSpPr>
-          <p:cNvPr id="9" name="Text 5"/>
-          <p:cNvSpPr txBox="1"/>
-          <p:nvPr/>
-        </p:nvSpPr>
-        <p:spPr>
-          <a:xfrm>
-            <a:off x="566928" y="4663440"/>
-            <a:ext cx="9692640" cy="822960"/>
-          </a:xfrm>
-          <a:prstGeom prst="rect">
-            <a:avLst/>
-          </a:prstGeom>
-          <a:noFill/>
-          <a:ln/>
-        </p:spPr>
-        <p:txBody>
-          <a:bodyPr wrap="square" lIns="0" tIns="0" rIns="0" bIns="0" rtlCol="0" anchor="ctr"/>
-          <a:lstStyle/>
-          <a:p>
-            <a:pPr indent="0" marL="0">
-              <a:lnSpc>
-                <a:spcPct val="115000"/>
-              </a:lnSpc>
-              <a:buNone/>
-            </a:pPr>
-            <a:r>
-              <a:rPr lang="en-US" sz="1600" i="1" dirty="0">
-                <a:solidFill>
-                  <a:srgbClr val="C7D3E5"/>
-                </a:solidFill>
-                <a:latin typeface="Calibri" pitchFamily="34" charset="0"/>
-                <a:ea typeface="Calibri" pitchFamily="34" charset="-122"/>
-                <a:cs typeface="Calibri" pitchFamily="34" charset="-120"/>
-              </a:rPr>
-              <a:t>Personas, procesos, sistemas y eventos externos: así se presenta el riesgo operativo.</a:t>
-            </a:r>
-            <a:endParaRPr lang="en-US" sz="1600" dirty="0"/>
-          </a:p>
-        </p:txBody>
+          <p:cNvPr id="12" name="Shape 8"/>
+          <p:cNvSpPr/>
+          <p:nvPr/>
+        </p:nvSpPr>
+        <p:spPr>
+          <a:xfrm>
+            <a:off x="10447020" y="2948940"/>
+            <a:ext cx="868680" cy="868680"/>
+          </a:xfrm>
+          <a:prstGeom prst="ellipse">
+            <a:avLst/>
+          </a:prstGeom>
+          <a:solidFill>
+            <a:srgbClr val="0A1F3B"/>
+          </a:solidFill>
+          <a:ln/>
+        </p:spPr>
       </p:sp>
       <p:pic>
         <p:nvPicPr>
-          <p:cNvPr id="10" name="Image 1" descr="/tmp/claude-0/-home-user-riesgo/0ff9ff46-1396-5bd8-b3ac-2280dfbbbc55/scratchpad/work/gen/logo_white.png">    </p:cNvPr>
+          <p:cNvPr id="13" name="Image 1" descr="/tmp/claude-0/-home-user-riesgo/0ff9ff46-1396-5bd8-b3ac-2280dfbbbc55/scratchpad/work/gen/icons/server_white.png">    </p:cNvPr>
           <p:cNvPicPr>
             <a:picLocks noChangeAspect="1"/>
           </p:cNvPicPr>
@@ -7297,8 +7274,8 @@
         </p:blipFill>
         <p:spPr>
           <a:xfrm>
-            <a:off x="10161727" y="5961888"/>
-            <a:ext cx="1463040" cy="411114"/>
+            <a:off x="10664190" y="3166110"/>
+            <a:ext cx="434340" cy="434340"/>
           </a:xfrm>
           <a:prstGeom prst="rect">
             <a:avLst/>
@@ -7307,14 +7284,102 @@
       </p:pic>
       <p:sp>
         <p:nvSpPr>
-          <p:cNvPr id="11" name="Text 6"/>
-          <p:cNvSpPr txBox="1"/>
-          <p:nvPr/>
-        </p:nvSpPr>
-        <p:spPr>
-          <a:xfrm>
-            <a:off x="566928" y="6473952"/>
-            <a:ext cx="7315200" cy="274320"/>
+          <p:cNvPr id="14" name="Shape 9"/>
+          <p:cNvSpPr/>
+          <p:nvPr/>
+        </p:nvSpPr>
+        <p:spPr>
+          <a:xfrm>
+            <a:off x="9578340" y="3909060"/>
+            <a:ext cx="777240" cy="777240"/>
+          </a:xfrm>
+          <a:prstGeom prst="ellipse">
+            <a:avLst/>
+          </a:prstGeom>
+          <a:solidFill>
+            <a:srgbClr val="FFFFFF"/>
+          </a:solidFill>
+          <a:ln/>
+        </p:spPr>
+      </p:sp>
+      <p:pic>
+        <p:nvPicPr>
+          <p:cNvPr id="15" name="Image 2" descr="/tmp/claude-0/-home-user-riesgo/0ff9ff46-1396-5bd8-b3ac-2280dfbbbc55/scratchpad/work/gen/icons/person_navy.png">    </p:cNvPr>
+          <p:cNvPicPr>
+            <a:picLocks noChangeAspect="1"/>
+          </p:cNvPicPr>
+          <p:nvPr/>
+        </p:nvPicPr>
+        <p:blipFill>
+          <a:blip r:embed="rId3"/>
+          <a:stretch>
+            <a:fillRect/>
+          </a:stretch>
+        </p:blipFill>
+        <p:spPr>
+          <a:xfrm>
+            <a:off x="9772650" y="4103370"/>
+            <a:ext cx="388620" cy="388620"/>
+          </a:xfrm>
+          <a:prstGeom prst="rect">
+            <a:avLst/>
+          </a:prstGeom>
+        </p:spPr>
+      </p:pic>
+      <p:sp>
+        <p:nvSpPr>
+          <p:cNvPr id="16" name="Shape 10"/>
+          <p:cNvSpPr/>
+          <p:nvPr/>
+        </p:nvSpPr>
+        <p:spPr>
+          <a:xfrm>
+            <a:off x="10689336" y="4105656"/>
+            <a:ext cx="658368" cy="658368"/>
+          </a:xfrm>
+          <a:prstGeom prst="ellipse">
+            <a:avLst/>
+          </a:prstGeom>
+          <a:solidFill>
+            <a:srgbClr val="0A1F3B"/>
+          </a:solidFill>
+          <a:ln/>
+        </p:spPr>
+      </p:sp>
+      <p:pic>
+        <p:nvPicPr>
+          <p:cNvPr id="17" name="Image 3" descr="/tmp/claude-0/-home-user-riesgo/0ff9ff46-1396-5bd8-b3ac-2280dfbbbc55/scratchpad/work/gen/icons/computer_teal.png">    </p:cNvPr>
+          <p:cNvPicPr>
+            <a:picLocks noChangeAspect="1"/>
+          </p:cNvPicPr>
+          <p:nvPr/>
+        </p:nvPicPr>
+        <p:blipFill>
+          <a:blip r:embed="rId4"/>
+          <a:stretch>
+            <a:fillRect/>
+          </a:stretch>
+        </p:blipFill>
+        <p:spPr>
+          <a:xfrm>
+            <a:off x="10853928" y="4270248"/>
+            <a:ext cx="329184" cy="329184"/>
+          </a:xfrm>
+          <a:prstGeom prst="rect">
+            <a:avLst/>
+          </a:prstGeom>
+        </p:spPr>
+      </p:pic>
+      <p:sp>
+        <p:nvSpPr>
+          <p:cNvPr id="18" name="Text 11"/>
+          <p:cNvSpPr txBox="1"/>
+          <p:nvPr/>
+        </p:nvSpPr>
+        <p:spPr>
+          <a:xfrm>
+            <a:off x="566928" y="2423160"/>
+            <a:ext cx="7315200" cy="365760"/>
           </a:xfrm>
           <a:prstGeom prst="rect">
             <a:avLst/>
@@ -7326,18 +7391,185 @@
           <a:bodyPr wrap="square" lIns="0" tIns="0" rIns="0" bIns="0" rtlCol="0" anchor="ctr"/>
           <a:lstStyle/>
           <a:p>
-            <a:pPr algn="l" indent="0" marL="0">
-              <a:buNone/>
-            </a:pPr>
-            <a:r>
-              <a:rPr lang="en-US" sz="900" dirty="0">
-                <a:solidFill>
-                  <a:srgbClr val="AEC0DA"/>
+            <a:pPr indent="0" marL="0">
+              <a:buNone/>
+            </a:pPr>
+            <a:r>
+              <a:rPr lang="en-US" sz="1500" b="1" spc="300" kern="0" dirty="0">
+                <a:solidFill>
+                  <a:srgbClr val="0EA5A0"/>
                 </a:solidFill>
                 <a:latin typeface="Calibri" pitchFamily="34" charset="0"/>
                 <a:ea typeface="Calibri" pitchFamily="34" charset="-122"/>
                 <a:cs typeface="Calibri" pitchFamily="34" charset="-120"/>
               </a:rPr>
+              <a:t>TEMA 3</a:t>
+            </a:r>
+            <a:endParaRPr lang="en-US" sz="1500" dirty="0"/>
+          </a:p>
+        </p:txBody>
+      </p:sp>
+      <p:sp>
+        <p:nvSpPr>
+          <p:cNvPr id="19" name="Text 12"/>
+          <p:cNvSpPr txBox="1"/>
+          <p:nvPr/>
+        </p:nvSpPr>
+        <p:spPr>
+          <a:xfrm>
+            <a:off x="566928" y="2788920"/>
+            <a:ext cx="7406640" cy="1554480"/>
+          </a:xfrm>
+          <a:prstGeom prst="rect">
+            <a:avLst/>
+          </a:prstGeom>
+          <a:noFill/>
+          <a:ln/>
+        </p:spPr>
+        <p:txBody>
+          <a:bodyPr wrap="square" lIns="0" tIns="0" rIns="0" bIns="0" rtlCol="0" anchor="ctr"/>
+          <a:lstStyle/>
+          <a:p>
+            <a:pPr indent="0" marL="0">
+              <a:lnSpc>
+                <a:spcPct val="105000"/>
+              </a:lnSpc>
+              <a:buNone/>
+            </a:pPr>
+            <a:r>
+              <a:rPr lang="en-US" sz="3200" b="1" dirty="0">
+                <a:solidFill>
+                  <a:srgbClr val="FFFFFF"/>
+                </a:solidFill>
+                <a:latin typeface="Cambria" pitchFamily="34" charset="0"/>
+                <a:ea typeface="Cambria" pitchFamily="34" charset="-122"/>
+                <a:cs typeface="Cambria" pitchFamily="34" charset="-120"/>
+              </a:rPr>
+              <a:t>LOS RIESGOS OPERATIVOS ESTÁN</a:t>
+            </a:r>
+            <a:endParaRPr lang="en-US" sz="3200" dirty="0"/>
+          </a:p>
+          <a:p>
+            <a:pPr indent="0" marL="0">
+              <a:lnSpc>
+                <a:spcPct val="105000"/>
+              </a:lnSpc>
+              <a:buNone/>
+            </a:pPr>
+            <a:r>
+              <a:rPr lang="en-US" sz="3200" b="1" dirty="0">
+                <a:solidFill>
+                  <a:srgbClr val="FFFFFF"/>
+                </a:solidFill>
+                <a:latin typeface="Cambria" pitchFamily="34" charset="0"/>
+                <a:ea typeface="Cambria" pitchFamily="34" charset="-122"/>
+                <a:cs typeface="Cambria" pitchFamily="34" charset="-120"/>
+              </a:rPr>
+              <a:t>EN NUESTRO DÍA A DÍA</a:t>
+            </a:r>
+            <a:endParaRPr lang="en-US" sz="3200" dirty="0"/>
+          </a:p>
+        </p:txBody>
+      </p:sp>
+      <p:sp>
+        <p:nvSpPr>
+          <p:cNvPr id="20" name="Text 13"/>
+          <p:cNvSpPr txBox="1"/>
+          <p:nvPr/>
+        </p:nvSpPr>
+        <p:spPr>
+          <a:xfrm>
+            <a:off x="566928" y="4206240"/>
+            <a:ext cx="7223760" cy="822960"/>
+          </a:xfrm>
+          <a:prstGeom prst="rect">
+            <a:avLst/>
+          </a:prstGeom>
+          <a:noFill/>
+          <a:ln/>
+        </p:spPr>
+        <p:txBody>
+          <a:bodyPr wrap="square" lIns="0" tIns="0" rIns="0" bIns="0" rtlCol="0" anchor="ctr"/>
+          <a:lstStyle/>
+          <a:p>
+            <a:pPr indent="0" marL="0">
+              <a:lnSpc>
+                <a:spcPct val="118000"/>
+              </a:lnSpc>
+              <a:buNone/>
+            </a:pPr>
+            <a:r>
+              <a:rPr lang="en-US" sz="1550" i="1" dirty="0">
+                <a:solidFill>
+                  <a:srgbClr val="D7E1F0"/>
+                </a:solidFill>
+                <a:latin typeface="Calibri" pitchFamily="34" charset="0"/>
+                <a:ea typeface="Calibri" pitchFamily="34" charset="-122"/>
+                <a:cs typeface="Calibri" pitchFamily="34" charset="-120"/>
+              </a:rPr>
+              <a:t>Personas, procesos, sistemas y eventos externos: así se presenta el riesgo operativo.</a:t>
+            </a:r>
+            <a:endParaRPr lang="en-US" sz="1550" dirty="0"/>
+          </a:p>
+        </p:txBody>
+      </p:sp>
+      <p:pic>
+        <p:nvPicPr>
+          <p:cNvPr id="21" name="Image 4" descr="/tmp/claude-0/-home-user-riesgo/0ff9ff46-1396-5bd8-b3ac-2280dfbbbc55/scratchpad/work/gen/logo_white.png">    </p:cNvPr>
+          <p:cNvPicPr>
+            <a:picLocks noChangeAspect="1"/>
+          </p:cNvPicPr>
+          <p:nvPr/>
+        </p:nvPicPr>
+        <p:blipFill>
+          <a:blip r:embed="rId5"/>
+          <a:stretch>
+            <a:fillRect/>
+          </a:stretch>
+        </p:blipFill>
+        <p:spPr>
+          <a:xfrm>
+            <a:off x="566928" y="5989320"/>
+            <a:ext cx="1417320" cy="398267"/>
+          </a:xfrm>
+          <a:prstGeom prst="rect">
+            <a:avLst/>
+          </a:prstGeom>
+        </p:spPr>
+      </p:pic>
+      <p:sp>
+        <p:nvSpPr>
+          <p:cNvPr id="22" name="Text 14"/>
+          <p:cNvSpPr txBox="1"/>
+          <p:nvPr/>
+        </p:nvSpPr>
+        <p:spPr>
+          <a:xfrm>
+            <a:off x="566928" y="6473952"/>
+            <a:ext cx="7315200" cy="274320"/>
+          </a:xfrm>
+          <a:prstGeom prst="rect">
+            <a:avLst/>
+          </a:prstGeom>
+          <a:noFill/>
+          <a:ln/>
+        </p:spPr>
+        <p:txBody>
+          <a:bodyPr wrap="square" lIns="0" tIns="0" rIns="0" bIns="0" rtlCol="0" anchor="ctr"/>
+          <a:lstStyle/>
+          <a:p>
+            <a:pPr algn="l" indent="0" marL="0">
+              <a:buNone/>
+            </a:pPr>
+            <a:r>
+              <a:rPr lang="en-US" sz="900" dirty="0">
+                <a:solidFill>
+                  <a:srgbClr val="AEC0DA"/>
+                </a:solidFill>
+                <a:latin typeface="Calibri" pitchFamily="34" charset="0"/>
+                <a:ea typeface="Calibri" pitchFamily="34" charset="-122"/>
+                <a:cs typeface="Calibri" pitchFamily="34" charset="-120"/>
+              </a:rPr>
               <a:t>GESTIÓN INTEGRAL DE RIESGOS  ·  COMEDICA DE R.L.</a:t>
             </a:r>
             <a:endParaRPr lang="en-US" sz="900" dirty="0"/>
@@ -7346,7 +7578,7 @@
       </p:sp>
       <p:sp>
         <p:nvSpPr>
-          <p:cNvPr id="12" name="Text 7"/>
+          <p:cNvPr id="23" name="Text 15"/>
           <p:cNvSpPr txBox="1"/>
           <p:nvPr/>
         </p:nvSpPr>
@@ -7442,7 +7674,7 @@
             <a:r>
               <a:rPr lang="en-US" sz="1300" b="1" spc="200" kern="0" dirty="0">
                 <a:solidFill>
-                  <a:srgbClr val="E3A73B"/>
+                  <a:srgbClr val="0EA5A0"/>
                 </a:solidFill>
                 <a:latin typeface="Calibri" pitchFamily="34" charset="0"/>
                 <a:ea typeface="Calibri" pitchFamily="34" charset="-122"/>
@@ -7572,7 +7804,7 @@
             <a:avLst/>
           </a:prstGeom>
           <a:solidFill>
-            <a:srgbClr val="133B6C"/>
+            <a:srgbClr val="0EA5A0"/>
           </a:solidFill>
           <a:ln/>
         </p:spPr>
@@ -7722,7 +7954,7 @@
             <a:avLst/>
           </a:prstGeom>
           <a:solidFill>
-            <a:srgbClr val="133B6C"/>
+            <a:srgbClr val="0EA5A0"/>
           </a:solidFill>
           <a:ln/>
         </p:spPr>
@@ -7872,7 +8104,7 @@
             <a:avLst/>
           </a:prstGeom>
           <a:solidFill>
-            <a:srgbClr val="133B6C"/>
+            <a:srgbClr val="0EA5A0"/>
           </a:solidFill>
           <a:ln/>
         </p:spPr>
@@ -8022,7 +8254,7 @@
             <a:avLst/>
           </a:prstGeom>
           <a:solidFill>
-            <a:srgbClr val="133B6C"/>
+            <a:srgbClr val="0EA5A0"/>
           </a:solidFill>
           <a:ln/>
         </p:spPr>
@@ -8162,7 +8394,7 @@
             <a:r>
               <a:rPr lang="en-US" sz="900" dirty="0">
                 <a:solidFill>
-                  <a:srgbClr val="8FA0B5"/>
+                  <a:srgbClr val="5B6B82"/>
                 </a:solidFill>
                 <a:latin typeface="Calibri" pitchFamily="34" charset="0"/>
                 <a:ea typeface="Calibri" pitchFamily="34" charset="-122"/>
@@ -8201,7 +8433,7 @@
             <a:r>
               <a:rPr lang="en-US" sz="900" dirty="0">
                 <a:solidFill>
-                  <a:srgbClr val="8FA0B5"/>
+                  <a:srgbClr val="5B6B82"/>
                 </a:solidFill>
                 <a:latin typeface="Calibri" pitchFamily="34" charset="0"/>
                 <a:ea typeface="Calibri" pitchFamily="34" charset="-122"/>
@@ -8355,7 +8587,7 @@
             <a:r>
               <a:rPr lang="en-US" sz="3000" b="1" dirty="0">
                 <a:solidFill>
-                  <a:srgbClr val="E3A73B"/>
+                  <a:srgbClr val="0EA5A0"/>
                 </a:solidFill>
                 <a:latin typeface="Cambria" pitchFamily="34" charset="0"/>
                 <a:ea typeface="Cambria" pitchFamily="34" charset="-122"/>
@@ -8484,9 +8716,49 @@
           <p:nvPr/>
         </p:nvSpPr>
         <p:spPr>
-          <a:xfrm>
-            <a:off x="-2926080" y="2926080"/>
-            <a:ext cx="7772400" cy="7772400"/>
+          <a:xfrm rot="720000">
+            <a:off x="7955280" y="-457200"/>
+            <a:ext cx="5669280" cy="7772400"/>
+          </a:xfrm>
+          <a:prstGeom prst="rect">
+            <a:avLst/>
+          </a:prstGeom>
+          <a:solidFill>
+            <a:srgbClr val="C2185B"/>
+          </a:solidFill>
+          <a:ln/>
+        </p:spPr>
+      </p:sp>
+      <p:sp>
+        <p:nvSpPr>
+          <p:cNvPr id="4" name="Shape 1"/>
+          <p:cNvSpPr/>
+          <p:nvPr/>
+        </p:nvSpPr>
+        <p:spPr>
+          <a:xfrm>
+            <a:off x="0" y="0"/>
+            <a:ext cx="8275320" cy="6858000"/>
+          </a:xfrm>
+          <a:prstGeom prst="rect">
+            <a:avLst/>
+          </a:prstGeom>
+          <a:solidFill>
+            <a:srgbClr val="0A1F3B"/>
+          </a:solidFill>
+          <a:ln/>
+        </p:spPr>
+      </p:sp>
+      <p:sp>
+        <p:nvSpPr>
+          <p:cNvPr id="5" name="Shape 2"/>
+          <p:cNvSpPr/>
+          <p:nvPr/>
+        </p:nvSpPr>
+        <p:spPr>
+          <a:xfrm>
+            <a:off x="-3108960" y="3291840"/>
+            <a:ext cx="7498080" cy="7498080"/>
           </a:xfrm>
           <a:prstGeom prst="ellipse">
             <a:avLst/>
@@ -8499,14 +8771,14 @@
       </p:sp>
       <p:sp>
         <p:nvSpPr>
-          <p:cNvPr id="4" name="Text 1"/>
-          <p:cNvSpPr txBox="1"/>
-          <p:nvPr/>
-        </p:nvSpPr>
-        <p:spPr>
-          <a:xfrm>
-            <a:off x="7498080" y="-777240"/>
-            <a:ext cx="5120640" cy="3840480"/>
+          <p:cNvPr id="6" name="Text 3"/>
+          <p:cNvSpPr txBox="1"/>
+          <p:nvPr/>
+        </p:nvSpPr>
+        <p:spPr>
+          <a:xfrm>
+            <a:off x="-274320" y="-914400"/>
+            <a:ext cx="5852160" cy="4023360"/>
           </a:xfrm>
           <a:prstGeom prst="rect">
             <a:avLst/>
@@ -8518,13 +8790,13 @@
           <a:bodyPr wrap="square" lIns="0" tIns="0" rIns="0" bIns="0" rtlCol="0" anchor="ctr"/>
           <a:lstStyle/>
           <a:p>
-            <a:pPr algn="r" indent="0" marL="0">
+            <a:pPr algn="l" indent="0" marL="0">
               <a:buNone/>
             </a:pPr>
             <a:r>
               <a:rPr lang="en-US" sz="26000" b="1" dirty="0">
                 <a:solidFill>
-                  <a:srgbClr val="15294A"/>
+                  <a:srgbClr val="133B6C"/>
                 </a:solidFill>
                 <a:latin typeface="Cambria" pitchFamily="34" charset="0"/>
                 <a:ea typeface="Cambria" pitchFamily="34" charset="-122"/>
@@ -8538,27 +8810,87 @@
       </p:sp>
       <p:sp>
         <p:nvSpPr>
-          <p:cNvPr id="5" name="Shape 2"/>
-          <p:cNvSpPr/>
-          <p:nvPr/>
-        </p:nvSpPr>
-        <p:spPr>
-          <a:xfrm>
-            <a:off x="566928" y="1828800"/>
-            <a:ext cx="1188720" cy="1188720"/>
+          <p:cNvPr id="7" name="Shape 4"/>
+          <p:cNvSpPr/>
+          <p:nvPr/>
+        </p:nvSpPr>
+        <p:spPr>
+          <a:xfrm>
+            <a:off x="8686800" y="2011680"/>
+            <a:ext cx="2834640" cy="2834640"/>
           </a:xfrm>
           <a:prstGeom prst="ellipse">
             <a:avLst/>
           </a:prstGeom>
           <a:solidFill>
-            <a:srgbClr val="E3A73B"/>
+            <a:srgbClr val="0A1F3B"/>
+          </a:solidFill>
+          <a:ln/>
+        </p:spPr>
+      </p:sp>
+      <p:sp>
+        <p:nvSpPr>
+          <p:cNvPr id="8" name="Shape 5"/>
+          <p:cNvSpPr/>
+          <p:nvPr/>
+        </p:nvSpPr>
+        <p:spPr>
+          <a:xfrm>
+            <a:off x="9784080" y="3931920"/>
+            <a:ext cx="1371600" cy="1371600"/>
+          </a:xfrm>
+          <a:prstGeom prst="ellipse">
+            <a:avLst/>
+          </a:prstGeom>
+          <a:solidFill>
+            <a:srgbClr val="FFFFFF"/>
+          </a:solidFill>
+          <a:ln/>
+        </p:spPr>
+      </p:sp>
+      <p:sp>
+        <p:nvSpPr>
+          <p:cNvPr id="9" name="Shape 6"/>
+          <p:cNvSpPr/>
+          <p:nvPr/>
+        </p:nvSpPr>
+        <p:spPr>
+          <a:xfrm>
+            <a:off x="10698480" y="2011680"/>
+            <a:ext cx="960120" cy="960120"/>
+          </a:xfrm>
+          <a:prstGeom prst="ellipse">
+            <a:avLst/>
+          </a:prstGeom>
+          <a:solidFill>
+            <a:srgbClr val="0D2847"/>
+          </a:solidFill>
+          <a:ln/>
+        </p:spPr>
+      </p:sp>
+      <p:sp>
+        <p:nvSpPr>
+          <p:cNvPr id="10" name="Shape 7"/>
+          <p:cNvSpPr/>
+          <p:nvPr/>
+        </p:nvSpPr>
+        <p:spPr>
+          <a:xfrm>
+            <a:off x="9075420" y="2217420"/>
+            <a:ext cx="1051560" cy="1051560"/>
+          </a:xfrm>
+          <a:prstGeom prst="ellipse">
+            <a:avLst/>
+          </a:prstGeom>
+          <a:solidFill>
+            <a:srgbClr val="FFFFFF"/>
           </a:solidFill>
           <a:ln/>
         </p:spPr>
       </p:sp>
       <p:pic>
         <p:nvPicPr>
-          <p:cNvPr id="6" name="Image 0" descr="/tmp/claude-0/-home-user-riesgo/0ff9ff46-1396-5bd8-b3ac-2280dfbbbc55/scratchpad/work/gen/icons/star_navy.png">    </p:cNvPr>
+          <p:cNvPr id="11" name="Image 0" descr="/tmp/claude-0/-home-user-riesgo/0ff9ff46-1396-5bd8-b3ac-2280dfbbbc55/scratchpad/work/gen/icons/star_rose.png">    </p:cNvPr>
           <p:cNvPicPr>
             <a:picLocks noChangeAspect="1"/>
           </p:cNvPicPr>
@@ -8572,8 +8904,8 @@
         </p:blipFill>
         <p:spPr>
           <a:xfrm>
-            <a:off x="852221" y="2114093"/>
-            <a:ext cx="618134" cy="618134"/>
+            <a:off x="9338310" y="2480310"/>
+            <a:ext cx="525780" cy="525780"/>
           </a:xfrm>
           <a:prstGeom prst="rect">
             <a:avLst/>
@@ -8582,150 +8914,27 @@
       </p:pic>
       <p:sp>
         <p:nvSpPr>
-          <p:cNvPr id="7" name="Text 3"/>
-          <p:cNvSpPr txBox="1"/>
-          <p:nvPr/>
-        </p:nvSpPr>
-        <p:spPr>
-          <a:xfrm>
-            <a:off x="566928" y="2880360"/>
-            <a:ext cx="9601200" cy="365760"/>
-          </a:xfrm>
-          <a:prstGeom prst="rect">
-            <a:avLst/>
-          </a:prstGeom>
-          <a:noFill/>
-          <a:ln/>
-        </p:spPr>
-        <p:txBody>
-          <a:bodyPr wrap="square" lIns="0" tIns="0" rIns="0" bIns="0" rtlCol="0" anchor="ctr"/>
-          <a:lstStyle/>
-          <a:p>
-            <a:pPr indent="0" marL="0">
-              <a:buNone/>
-            </a:pPr>
-            <a:r>
-              <a:rPr lang="en-US" sz="1500" b="1" spc="300" kern="0" dirty="0">
-                <a:solidFill>
-                  <a:srgbClr val="E3A73B"/>
-                </a:solidFill>
-                <a:latin typeface="Calibri" pitchFamily="34" charset="0"/>
-                <a:ea typeface="Calibri" pitchFamily="34" charset="-122"/>
-                <a:cs typeface="Calibri" pitchFamily="34" charset="-120"/>
-              </a:rPr>
-              <a:t>TEMA 4</a:t>
-            </a:r>
-            <a:endParaRPr lang="en-US" sz="1500" dirty="0"/>
-          </a:p>
-        </p:txBody>
-      </p:sp>
-      <p:sp>
-        <p:nvSpPr>
-          <p:cNvPr id="8" name="Text 4"/>
-          <p:cNvSpPr txBox="1"/>
-          <p:nvPr/>
-        </p:nvSpPr>
-        <p:spPr>
-          <a:xfrm>
-            <a:off x="566928" y="3246120"/>
-            <a:ext cx="10424160" cy="1554480"/>
-          </a:xfrm>
-          <a:prstGeom prst="rect">
-            <a:avLst/>
-          </a:prstGeom>
-          <a:noFill/>
-          <a:ln/>
-        </p:spPr>
-        <p:txBody>
-          <a:bodyPr wrap="square" lIns="0" tIns="0" rIns="0" bIns="0" rtlCol="0" anchor="ctr"/>
-          <a:lstStyle/>
-          <a:p>
-            <a:pPr indent="0" marL="0">
-              <a:lnSpc>
-                <a:spcPct val="105000"/>
-              </a:lnSpc>
-              <a:buNone/>
-            </a:pPr>
-            <a:r>
-              <a:rPr lang="en-US" sz="3400" b="1" dirty="0">
-                <a:solidFill>
-                  <a:srgbClr val="FFFFFF"/>
-                </a:solidFill>
-                <a:latin typeface="Cambria" pitchFamily="34" charset="0"/>
-                <a:ea typeface="Cambria" pitchFamily="34" charset="-122"/>
-                <a:cs typeface="Cambria" pitchFamily="34" charset="-120"/>
-              </a:rPr>
-              <a:t>CUIDEMOS LA REPUTACIÓN</a:t>
-            </a:r>
-            <a:endParaRPr lang="en-US" sz="3400" dirty="0"/>
-          </a:p>
-          <a:p>
-            <a:pPr indent="0" marL="0">
-              <a:lnSpc>
-                <a:spcPct val="105000"/>
-              </a:lnSpc>
-              <a:buNone/>
-            </a:pPr>
-            <a:r>
-              <a:rPr lang="en-US" sz="3400" b="1" dirty="0">
-                <a:solidFill>
-                  <a:srgbClr val="FFFFFF"/>
-                </a:solidFill>
-                <a:latin typeface="Cambria" pitchFamily="34" charset="0"/>
-                <a:ea typeface="Cambria" pitchFamily="34" charset="-122"/>
-                <a:cs typeface="Cambria" pitchFamily="34" charset="-120"/>
-              </a:rPr>
-              <a:t>DE NUESTRA COOPERATIVA</a:t>
-            </a:r>
-            <a:endParaRPr lang="en-US" sz="3400" dirty="0"/>
-          </a:p>
-        </p:txBody>
-      </p:sp>
-      <p:sp>
-        <p:nvSpPr>
-          <p:cNvPr id="9" name="Text 5"/>
-          <p:cNvSpPr txBox="1"/>
-          <p:nvPr/>
-        </p:nvSpPr>
-        <p:spPr>
-          <a:xfrm>
-            <a:off x="566928" y="4663440"/>
-            <a:ext cx="9692640" cy="822960"/>
-          </a:xfrm>
-          <a:prstGeom prst="rect">
-            <a:avLst/>
-          </a:prstGeom>
-          <a:noFill/>
-          <a:ln/>
-        </p:spPr>
-        <p:txBody>
-          <a:bodyPr wrap="square" lIns="0" tIns="0" rIns="0" bIns="0" rtlCol="0" anchor="ctr"/>
-          <a:lstStyle/>
-          <a:p>
-            <a:pPr indent="0" marL="0">
-              <a:lnSpc>
-                <a:spcPct val="115000"/>
-              </a:lnSpc>
-              <a:buNone/>
-            </a:pPr>
-            <a:r>
-              <a:rPr lang="en-US" sz="1600" i="1" dirty="0">
-                <a:solidFill>
-                  <a:srgbClr val="C7D3E5"/>
-                </a:solidFill>
-                <a:latin typeface="Calibri" pitchFamily="34" charset="0"/>
-                <a:ea typeface="Calibri" pitchFamily="34" charset="-122"/>
-                <a:cs typeface="Calibri" pitchFamily="34" charset="-120"/>
-              </a:rPr>
-              <a:t>REPUTACIÓN = CONFIANZA. Y la confianza se construye todos los días.</a:t>
-            </a:r>
-            <a:endParaRPr lang="en-US" sz="1600" dirty="0"/>
-          </a:p>
-        </p:txBody>
+          <p:cNvPr id="12" name="Shape 8"/>
+          <p:cNvSpPr/>
+          <p:nvPr/>
+        </p:nvSpPr>
+        <p:spPr>
+          <a:xfrm>
+            <a:off x="10447020" y="2948940"/>
+            <a:ext cx="868680" cy="868680"/>
+          </a:xfrm>
+          <a:prstGeom prst="ellipse">
+            <a:avLst/>
+          </a:prstGeom>
+          <a:solidFill>
+            <a:srgbClr val="0A1F3B"/>
+          </a:solidFill>
+          <a:ln/>
+        </p:spPr>
       </p:sp>
       <p:pic>
         <p:nvPicPr>
-          <p:cNvPr id="10" name="Image 1" descr="/tmp/claude-0/-home-user-riesgo/0ff9ff46-1396-5bd8-b3ac-2280dfbbbc55/scratchpad/work/gen/logo_white.png">    </p:cNvPr>
+          <p:cNvPr id="13" name="Image 1" descr="/tmp/claude-0/-home-user-riesgo/0ff9ff46-1396-5bd8-b3ac-2280dfbbbc55/scratchpad/work/gen/icons/heart_white.png">    </p:cNvPr>
           <p:cNvPicPr>
             <a:picLocks noChangeAspect="1"/>
           </p:cNvPicPr>
@@ -8739,8 +8948,8 @@
         </p:blipFill>
         <p:spPr>
           <a:xfrm>
-            <a:off x="10161727" y="5961888"/>
-            <a:ext cx="1463040" cy="411114"/>
+            <a:off x="10664190" y="3166110"/>
+            <a:ext cx="434340" cy="434340"/>
           </a:xfrm>
           <a:prstGeom prst="rect">
             <a:avLst/>
@@ -8749,14 +8958,102 @@
       </p:pic>
       <p:sp>
         <p:nvSpPr>
-          <p:cNvPr id="11" name="Text 6"/>
-          <p:cNvSpPr txBox="1"/>
-          <p:nvPr/>
-        </p:nvSpPr>
-        <p:spPr>
-          <a:xfrm>
-            <a:off x="566928" y="6473952"/>
-            <a:ext cx="7315200" cy="274320"/>
+          <p:cNvPr id="14" name="Shape 9"/>
+          <p:cNvSpPr/>
+          <p:nvPr/>
+        </p:nvSpPr>
+        <p:spPr>
+          <a:xfrm>
+            <a:off x="9578340" y="3909060"/>
+            <a:ext cx="777240" cy="777240"/>
+          </a:xfrm>
+          <a:prstGeom prst="ellipse">
+            <a:avLst/>
+          </a:prstGeom>
+          <a:solidFill>
+            <a:srgbClr val="FFFFFF"/>
+          </a:solidFill>
+          <a:ln/>
+        </p:spPr>
+      </p:sp>
+      <p:pic>
+        <p:nvPicPr>
+          <p:cNvPr id="15" name="Image 2" descr="/tmp/claude-0/-home-user-riesgo/0ff9ff46-1396-5bd8-b3ac-2280dfbbbc55/scratchpad/work/gen/icons/social_navy.png">    </p:cNvPr>
+          <p:cNvPicPr>
+            <a:picLocks noChangeAspect="1"/>
+          </p:cNvPicPr>
+          <p:nvPr/>
+        </p:nvPicPr>
+        <p:blipFill>
+          <a:blip r:embed="rId3"/>
+          <a:stretch>
+            <a:fillRect/>
+          </a:stretch>
+        </p:blipFill>
+        <p:spPr>
+          <a:xfrm>
+            <a:off x="9772650" y="4103370"/>
+            <a:ext cx="388620" cy="388620"/>
+          </a:xfrm>
+          <a:prstGeom prst="rect">
+            <a:avLst/>
+          </a:prstGeom>
+        </p:spPr>
+      </p:pic>
+      <p:sp>
+        <p:nvSpPr>
+          <p:cNvPr id="16" name="Shape 10"/>
+          <p:cNvSpPr/>
+          <p:nvPr/>
+        </p:nvSpPr>
+        <p:spPr>
+          <a:xfrm>
+            <a:off x="10689336" y="4105656"/>
+            <a:ext cx="658368" cy="658368"/>
+          </a:xfrm>
+          <a:prstGeom prst="ellipse">
+            <a:avLst/>
+          </a:prstGeom>
+          <a:solidFill>
+            <a:srgbClr val="0A1F3B"/>
+          </a:solidFill>
+          <a:ln/>
+        </p:spPr>
+      </p:sp>
+      <p:pic>
+        <p:nvPicPr>
+          <p:cNvPr id="17" name="Image 3" descr="/tmp/claude-0/-home-user-riesgo/0ff9ff46-1396-5bd8-b3ac-2280dfbbbc55/scratchpad/work/gen/icons/handshake_rose.png">    </p:cNvPr>
+          <p:cNvPicPr>
+            <a:picLocks noChangeAspect="1"/>
+          </p:cNvPicPr>
+          <p:nvPr/>
+        </p:nvPicPr>
+        <p:blipFill>
+          <a:blip r:embed="rId4"/>
+          <a:stretch>
+            <a:fillRect/>
+          </a:stretch>
+        </p:blipFill>
+        <p:spPr>
+          <a:xfrm>
+            <a:off x="10853928" y="4270248"/>
+            <a:ext cx="329184" cy="329184"/>
+          </a:xfrm>
+          <a:prstGeom prst="rect">
+            <a:avLst/>
+          </a:prstGeom>
+        </p:spPr>
+      </p:pic>
+      <p:sp>
+        <p:nvSpPr>
+          <p:cNvPr id="18" name="Text 11"/>
+          <p:cNvSpPr txBox="1"/>
+          <p:nvPr/>
+        </p:nvSpPr>
+        <p:spPr>
+          <a:xfrm>
+            <a:off x="566928" y="2423160"/>
+            <a:ext cx="7315200" cy="365760"/>
           </a:xfrm>
           <a:prstGeom prst="rect">
             <a:avLst/>
@@ -8768,18 +9065,185 @@
           <a:bodyPr wrap="square" lIns="0" tIns="0" rIns="0" bIns="0" rtlCol="0" anchor="ctr"/>
           <a:lstStyle/>
           <a:p>
-            <a:pPr algn="l" indent="0" marL="0">
-              <a:buNone/>
-            </a:pPr>
-            <a:r>
-              <a:rPr lang="en-US" sz="900" dirty="0">
-                <a:solidFill>
-                  <a:srgbClr val="AEC0DA"/>
+            <a:pPr indent="0" marL="0">
+              <a:buNone/>
+            </a:pPr>
+            <a:r>
+              <a:rPr lang="en-US" sz="1500" b="1" spc="300" kern="0" dirty="0">
+                <a:solidFill>
+                  <a:srgbClr val="C2185B"/>
                 </a:solidFill>
                 <a:latin typeface="Calibri" pitchFamily="34" charset="0"/>
                 <a:ea typeface="Calibri" pitchFamily="34" charset="-122"/>
                 <a:cs typeface="Calibri" pitchFamily="34" charset="-120"/>
               </a:rPr>
+              <a:t>TEMA 4</a:t>
+            </a:r>
+            <a:endParaRPr lang="en-US" sz="1500" dirty="0"/>
+          </a:p>
+        </p:txBody>
+      </p:sp>
+      <p:sp>
+        <p:nvSpPr>
+          <p:cNvPr id="19" name="Text 12"/>
+          <p:cNvSpPr txBox="1"/>
+          <p:nvPr/>
+        </p:nvSpPr>
+        <p:spPr>
+          <a:xfrm>
+            <a:off x="566928" y="2788920"/>
+            <a:ext cx="7406640" cy="1554480"/>
+          </a:xfrm>
+          <a:prstGeom prst="rect">
+            <a:avLst/>
+          </a:prstGeom>
+          <a:noFill/>
+          <a:ln/>
+        </p:spPr>
+        <p:txBody>
+          <a:bodyPr wrap="square" lIns="0" tIns="0" rIns="0" bIns="0" rtlCol="0" anchor="ctr"/>
+          <a:lstStyle/>
+          <a:p>
+            <a:pPr indent="0" marL="0">
+              <a:lnSpc>
+                <a:spcPct val="105000"/>
+              </a:lnSpc>
+              <a:buNone/>
+            </a:pPr>
+            <a:r>
+              <a:rPr lang="en-US" sz="3200" b="1" dirty="0">
+                <a:solidFill>
+                  <a:srgbClr val="FFFFFF"/>
+                </a:solidFill>
+                <a:latin typeface="Cambria" pitchFamily="34" charset="0"/>
+                <a:ea typeface="Cambria" pitchFamily="34" charset="-122"/>
+                <a:cs typeface="Cambria" pitchFamily="34" charset="-120"/>
+              </a:rPr>
+              <a:t>CUIDEMOS LA REPUTACIÓN</a:t>
+            </a:r>
+            <a:endParaRPr lang="en-US" sz="3200" dirty="0"/>
+          </a:p>
+          <a:p>
+            <a:pPr indent="0" marL="0">
+              <a:lnSpc>
+                <a:spcPct val="105000"/>
+              </a:lnSpc>
+              <a:buNone/>
+            </a:pPr>
+            <a:r>
+              <a:rPr lang="en-US" sz="3200" b="1" dirty="0">
+                <a:solidFill>
+                  <a:srgbClr val="FFFFFF"/>
+                </a:solidFill>
+                <a:latin typeface="Cambria" pitchFamily="34" charset="0"/>
+                <a:ea typeface="Cambria" pitchFamily="34" charset="-122"/>
+                <a:cs typeface="Cambria" pitchFamily="34" charset="-120"/>
+              </a:rPr>
+              <a:t>DE NUESTRA COOPERATIVA</a:t>
+            </a:r>
+            <a:endParaRPr lang="en-US" sz="3200" dirty="0"/>
+          </a:p>
+        </p:txBody>
+      </p:sp>
+      <p:sp>
+        <p:nvSpPr>
+          <p:cNvPr id="20" name="Text 13"/>
+          <p:cNvSpPr txBox="1"/>
+          <p:nvPr/>
+        </p:nvSpPr>
+        <p:spPr>
+          <a:xfrm>
+            <a:off x="566928" y="4206240"/>
+            <a:ext cx="7223760" cy="822960"/>
+          </a:xfrm>
+          <a:prstGeom prst="rect">
+            <a:avLst/>
+          </a:prstGeom>
+          <a:noFill/>
+          <a:ln/>
+        </p:spPr>
+        <p:txBody>
+          <a:bodyPr wrap="square" lIns="0" tIns="0" rIns="0" bIns="0" rtlCol="0" anchor="ctr"/>
+          <a:lstStyle/>
+          <a:p>
+            <a:pPr indent="0" marL="0">
+              <a:lnSpc>
+                <a:spcPct val="118000"/>
+              </a:lnSpc>
+              <a:buNone/>
+            </a:pPr>
+            <a:r>
+              <a:rPr lang="en-US" sz="1550" i="1" dirty="0">
+                <a:solidFill>
+                  <a:srgbClr val="D7E1F0"/>
+                </a:solidFill>
+                <a:latin typeface="Calibri" pitchFamily="34" charset="0"/>
+                <a:ea typeface="Calibri" pitchFamily="34" charset="-122"/>
+                <a:cs typeface="Calibri" pitchFamily="34" charset="-120"/>
+              </a:rPr>
+              <a:t>REPUTACIÓN = CONFIANZA. Y la confianza se construye todos los días.</a:t>
+            </a:r>
+            <a:endParaRPr lang="en-US" sz="1550" dirty="0"/>
+          </a:p>
+        </p:txBody>
+      </p:sp>
+      <p:pic>
+        <p:nvPicPr>
+          <p:cNvPr id="21" name="Image 4" descr="/tmp/claude-0/-home-user-riesgo/0ff9ff46-1396-5bd8-b3ac-2280dfbbbc55/scratchpad/work/gen/logo_white.png">    </p:cNvPr>
+          <p:cNvPicPr>
+            <a:picLocks noChangeAspect="1"/>
+          </p:cNvPicPr>
+          <p:nvPr/>
+        </p:nvPicPr>
+        <p:blipFill>
+          <a:blip r:embed="rId5"/>
+          <a:stretch>
+            <a:fillRect/>
+          </a:stretch>
+        </p:blipFill>
+        <p:spPr>
+          <a:xfrm>
+            <a:off x="566928" y="5989320"/>
+            <a:ext cx="1417320" cy="398267"/>
+          </a:xfrm>
+          <a:prstGeom prst="rect">
+            <a:avLst/>
+          </a:prstGeom>
+        </p:spPr>
+      </p:pic>
+      <p:sp>
+        <p:nvSpPr>
+          <p:cNvPr id="22" name="Text 14"/>
+          <p:cNvSpPr txBox="1"/>
+          <p:nvPr/>
+        </p:nvSpPr>
+        <p:spPr>
+          <a:xfrm>
+            <a:off x="566928" y="6473952"/>
+            <a:ext cx="7315200" cy="274320"/>
+          </a:xfrm>
+          <a:prstGeom prst="rect">
+            <a:avLst/>
+          </a:prstGeom>
+          <a:noFill/>
+          <a:ln/>
+        </p:spPr>
+        <p:txBody>
+          <a:bodyPr wrap="square" lIns="0" tIns="0" rIns="0" bIns="0" rtlCol="0" anchor="ctr"/>
+          <a:lstStyle/>
+          <a:p>
+            <a:pPr algn="l" indent="0" marL="0">
+              <a:buNone/>
+            </a:pPr>
+            <a:r>
+              <a:rPr lang="en-US" sz="900" dirty="0">
+                <a:solidFill>
+                  <a:srgbClr val="AEC0DA"/>
+                </a:solidFill>
+                <a:latin typeface="Calibri" pitchFamily="34" charset="0"/>
+                <a:ea typeface="Calibri" pitchFamily="34" charset="-122"/>
+                <a:cs typeface="Calibri" pitchFamily="34" charset="-120"/>
+              </a:rPr>
               <a:t>GESTIÓN INTEGRAL DE RIESGOS  ·  COMEDICA DE R.L.</a:t>
             </a:r>
             <a:endParaRPr lang="en-US" sz="900" dirty="0"/>
@@ -8788,7 +9252,7 @@
       </p:sp>
       <p:sp>
         <p:nvSpPr>
-          <p:cNvPr id="12" name="Text 7"/>
+          <p:cNvPr id="23" name="Text 15"/>
           <p:cNvSpPr txBox="1"/>
           <p:nvPr/>
         </p:nvSpPr>
@@ -8884,7 +9348,7 @@
             <a:r>
               <a:rPr lang="en-US" sz="1300" b="1" spc="200" kern="0" dirty="0">
                 <a:solidFill>
-                  <a:srgbClr val="E3A73B"/>
+                  <a:srgbClr val="C2185B"/>
                 </a:solidFill>
                 <a:latin typeface="Calibri" pitchFamily="34" charset="0"/>
                 <a:ea typeface="Calibri" pitchFamily="34" charset="-122"/>
@@ -9014,7 +9478,7 @@
             <a:avLst/>
           </a:prstGeom>
           <a:solidFill>
-            <a:srgbClr val="133B6C"/>
+            <a:srgbClr val="C2185B"/>
           </a:solidFill>
           <a:ln/>
         </p:spPr>
@@ -9122,7 +9586,7 @@
             <a:avLst/>
           </a:prstGeom>
           <a:solidFill>
-            <a:srgbClr val="133B6C"/>
+            <a:srgbClr val="C2185B"/>
           </a:solidFill>
           <a:ln/>
         </p:spPr>
@@ -9230,7 +9694,7 @@
             <a:avLst/>
           </a:prstGeom>
           <a:solidFill>
-            <a:srgbClr val="133B6C"/>
+            <a:srgbClr val="C2185B"/>
           </a:solidFill>
           <a:ln/>
         </p:spPr>
@@ -9338,7 +9802,7 @@
             <a:avLst/>
           </a:prstGeom>
           <a:solidFill>
-            <a:srgbClr val="133B6C"/>
+            <a:srgbClr val="C2185B"/>
           </a:solidFill>
           <a:ln/>
         </p:spPr>
@@ -9446,7 +9910,7 @@
             <a:avLst/>
           </a:prstGeom>
           <a:solidFill>
-            <a:srgbClr val="133B6C"/>
+            <a:srgbClr val="C2185B"/>
           </a:solidFill>
           <a:ln/>
         </p:spPr>
@@ -9554,7 +10018,7 @@
             <a:avLst/>
           </a:prstGeom>
           <a:solidFill>
-            <a:srgbClr val="133B6C"/>
+            <a:srgbClr val="C2185B"/>
           </a:solidFill>
           <a:ln/>
         </p:spPr>
@@ -9662,7 +10126,7 @@
             <a:avLst/>
           </a:prstGeom>
           <a:solidFill>
-            <a:srgbClr val="133B6C"/>
+            <a:srgbClr val="C2185B"/>
           </a:solidFill>
           <a:ln/>
         </p:spPr>
@@ -9770,7 +10234,7 @@
             <a:avLst/>
           </a:prstGeom>
           <a:solidFill>
-            <a:srgbClr val="133B6C"/>
+            <a:srgbClr val="C2185B"/>
           </a:solidFill>
           <a:ln/>
         </p:spPr>
@@ -9868,7 +10332,7 @@
             <a:r>
               <a:rPr lang="en-US" sz="900" dirty="0">
                 <a:solidFill>
-                  <a:srgbClr val="8FA0B5"/>
+                  <a:srgbClr val="5B6B82"/>
                 </a:solidFill>
                 <a:latin typeface="Calibri" pitchFamily="34" charset="0"/>
                 <a:ea typeface="Calibri" pitchFamily="34" charset="-122"/>
@@ -9907,7 +10371,7 @@
             <a:r>
               <a:rPr lang="en-US" sz="900" dirty="0">
                 <a:solidFill>
-                  <a:srgbClr val="8FA0B5"/>
+                  <a:srgbClr val="5B6B82"/>
                 </a:solidFill>
                 <a:latin typeface="Calibri" pitchFamily="34" charset="0"/>
                 <a:ea typeface="Calibri" pitchFamily="34" charset="-122"/>
@@ -10041,7 +10505,7 @@
             <a:r>
               <a:rPr lang="en-US" sz="3000" b="1" dirty="0">
                 <a:solidFill>
-                  <a:srgbClr val="E3A73B"/>
+                  <a:srgbClr val="C2185B"/>
                 </a:solidFill>
                 <a:latin typeface="Cambria" pitchFamily="34" charset="0"/>
                 <a:ea typeface="Cambria" pitchFamily="34" charset="-122"/>
@@ -10190,7 +10654,7 @@
             <a:r>
               <a:rPr lang="en-US" sz="1300" b="1" spc="200" kern="0" dirty="0">
                 <a:solidFill>
-                  <a:srgbClr val="E3A73B"/>
+                  <a:srgbClr val="C2185B"/>
                 </a:solidFill>
                 <a:latin typeface="Calibri" pitchFamily="34" charset="0"/>
                 <a:ea typeface="Calibri" pitchFamily="34" charset="-122"/>
@@ -10281,14 +10745,14 @@
             <a:avLst/>
           </a:prstGeom>
           <a:solidFill>
-            <a:srgbClr val="E3A73B"/>
+            <a:srgbClr val="C2185B"/>
           </a:solidFill>
           <a:ln/>
         </p:spPr>
       </p:sp>
       <p:pic>
         <p:nvPicPr>
-          <p:cNvPr id="7" name="Image 0" descr="/tmp/claude-0/-home-user-riesgo/0ff9ff46-1396-5bd8-b3ac-2280dfbbbc55/scratchpad/work/gen/icons/heart_crack_navy.png">    </p:cNvPr>
+          <p:cNvPr id="7" name="Image 0" descr="/tmp/claude-0/-home-user-riesgo/0ff9ff46-1396-5bd8-b3ac-2280dfbbbc55/scratchpad/work/gen/icons/heart_crack_white.png">    </p:cNvPr>
           <p:cNvPicPr>
             <a:picLocks noChangeAspect="1"/>
           </p:cNvPicPr>
@@ -10337,7 +10801,7 @@
             <a:r>
               <a:rPr lang="en-US" sz="1200" b="1" spc="200" kern="0" dirty="0">
                 <a:solidFill>
-                  <a:srgbClr val="E3A73B"/>
+                  <a:srgbClr val="C2185B"/>
                 </a:solidFill>
                 <a:latin typeface="Calibri" pitchFamily="34" charset="0"/>
                 <a:ea typeface="Calibri" pitchFamily="34" charset="-122"/>
@@ -10826,7 +11290,7 @@
             <a:r>
               <a:rPr lang="en-US" sz="900" dirty="0">
                 <a:solidFill>
-                  <a:srgbClr val="8FA0B5"/>
+                  <a:srgbClr val="5B6B82"/>
                 </a:solidFill>
                 <a:latin typeface="Calibri" pitchFamily="34" charset="0"/>
                 <a:ea typeface="Calibri" pitchFamily="34" charset="-122"/>
@@ -10865,7 +11329,7 @@
             <a:r>
               <a:rPr lang="en-US" sz="900" dirty="0">
                 <a:solidFill>
-                  <a:srgbClr val="8FA0B5"/>
+                  <a:srgbClr val="5B6B82"/>
                 </a:solidFill>
                 <a:latin typeface="Calibri" pitchFamily="34" charset="0"/>
                 <a:ea typeface="Calibri" pitchFamily="34" charset="-122"/>
@@ -10936,7 +11400,7 @@
             <a:r>
               <a:rPr lang="en-US" sz="1300" b="1" spc="200" kern="0" dirty="0">
                 <a:solidFill>
-                  <a:srgbClr val="E3A73B"/>
+                  <a:srgbClr val="C2185B"/>
                 </a:solidFill>
                 <a:latin typeface="Calibri" pitchFamily="34" charset="0"/>
                 <a:ea typeface="Calibri" pitchFamily="34" charset="-122"/>
@@ -11007,7 +11471,7 @@
             </a:avLst>
           </a:prstGeom>
           <a:solidFill>
-            <a:srgbClr val="2E9E5B"/>
+            <a:srgbClr val="2FAE60"/>
           </a:solidFill>
           <a:ln/>
         </p:spPr>
@@ -11267,7 +11731,7 @@
             <a:r>
               <a:rPr lang="en-US" sz="900" dirty="0">
                 <a:solidFill>
-                  <a:srgbClr val="8FA0B5"/>
+                  <a:srgbClr val="5B6B82"/>
                 </a:solidFill>
                 <a:latin typeface="Calibri" pitchFamily="34" charset="0"/>
                 <a:ea typeface="Calibri" pitchFamily="34" charset="-122"/>
@@ -11306,7 +11770,7 @@
             <a:r>
               <a:rPr lang="en-US" sz="900" dirty="0">
                 <a:solidFill>
-                  <a:srgbClr val="8FA0B5"/>
+                  <a:srgbClr val="5B6B82"/>
                 </a:solidFill>
                 <a:latin typeface="Calibri" pitchFamily="34" charset="0"/>
                 <a:ea typeface="Calibri" pitchFamily="34" charset="-122"/>
@@ -11377,7 +11841,7 @@
             <a:r>
               <a:rPr lang="en-US" sz="1300" b="1" spc="200" kern="0" dirty="0">
                 <a:solidFill>
-                  <a:srgbClr val="E3A73B"/>
+                  <a:srgbClr val="F0AD35"/>
                 </a:solidFill>
                 <a:latin typeface="Calibri" pitchFamily="34" charset="0"/>
                 <a:ea typeface="Calibri" pitchFamily="34" charset="-122"/>
@@ -11507,7 +11971,7 @@
             <a:avLst/>
           </a:prstGeom>
           <a:solidFill>
-            <a:srgbClr val="133B6C"/>
+            <a:srgbClr val="F0AD35"/>
           </a:solidFill>
           <a:ln/>
         </p:spPr>
@@ -11563,7 +12027,7 @@
             <a:r>
               <a:rPr lang="en-US" sz="1300" b="1" dirty="0">
                 <a:solidFill>
-                  <a:srgbClr val="E3A73B"/>
+                  <a:srgbClr val="F0AD35"/>
                 </a:solidFill>
                 <a:latin typeface="Cambria" pitchFamily="34" charset="0"/>
                 <a:ea typeface="Cambria" pitchFamily="34" charset="-122"/>
@@ -11654,7 +12118,7 @@
             <a:avLst/>
           </a:prstGeom>
           <a:solidFill>
-            <a:srgbClr val="133B6C"/>
+            <a:srgbClr val="E8543E"/>
           </a:solidFill>
           <a:ln/>
         </p:spPr>
@@ -11710,7 +12174,7 @@
             <a:r>
               <a:rPr lang="en-US" sz="1300" b="1" dirty="0">
                 <a:solidFill>
-                  <a:srgbClr val="E3A73B"/>
+                  <a:srgbClr val="E8543E"/>
                 </a:solidFill>
                 <a:latin typeface="Cambria" pitchFamily="34" charset="0"/>
                 <a:ea typeface="Cambria" pitchFamily="34" charset="-122"/>
@@ -11801,7 +12265,7 @@
             <a:avLst/>
           </a:prstGeom>
           <a:solidFill>
-            <a:srgbClr val="133B6C"/>
+            <a:srgbClr val="0EA5A0"/>
           </a:solidFill>
           <a:ln/>
         </p:spPr>
@@ -11857,7 +12321,7 @@
             <a:r>
               <a:rPr lang="en-US" sz="1300" b="1" dirty="0">
                 <a:solidFill>
-                  <a:srgbClr val="E3A73B"/>
+                  <a:srgbClr val="0EA5A0"/>
                 </a:solidFill>
                 <a:latin typeface="Cambria" pitchFamily="34" charset="0"/>
                 <a:ea typeface="Cambria" pitchFamily="34" charset="-122"/>
@@ -11948,7 +12412,7 @@
             <a:avLst/>
           </a:prstGeom>
           <a:solidFill>
-            <a:srgbClr val="133B6C"/>
+            <a:srgbClr val="C2185B"/>
           </a:solidFill>
           <a:ln/>
         </p:spPr>
@@ -12004,7 +12468,7 @@
             <a:r>
               <a:rPr lang="en-US" sz="1300" b="1" dirty="0">
                 <a:solidFill>
-                  <a:srgbClr val="E3A73B"/>
+                  <a:srgbClr val="C2185B"/>
                 </a:solidFill>
                 <a:latin typeface="Cambria" pitchFamily="34" charset="0"/>
                 <a:ea typeface="Cambria" pitchFamily="34" charset="-122"/>
@@ -12095,7 +12559,7 @@
             <a:avLst/>
           </a:prstGeom>
           <a:solidFill>
-            <a:srgbClr val="133B6C"/>
+            <a:srgbClr val="E0392B"/>
           </a:solidFill>
           <a:ln/>
         </p:spPr>
@@ -12151,7 +12615,7 @@
             <a:r>
               <a:rPr lang="en-US" sz="1300" b="1" dirty="0">
                 <a:solidFill>
-                  <a:srgbClr val="E3A73B"/>
+                  <a:srgbClr val="E0392B"/>
                 </a:solidFill>
                 <a:latin typeface="Cambria" pitchFamily="34" charset="0"/>
                 <a:ea typeface="Cambria" pitchFamily="34" charset="-122"/>
@@ -12242,7 +12706,7 @@
             <a:avLst/>
           </a:prstGeom>
           <a:solidFill>
-            <a:srgbClr val="133B6C"/>
+            <a:srgbClr val="2E5EAA"/>
           </a:solidFill>
           <a:ln/>
         </p:spPr>
@@ -12298,7 +12762,7 @@
             <a:r>
               <a:rPr lang="en-US" sz="1300" b="1" dirty="0">
                 <a:solidFill>
-                  <a:srgbClr val="E3A73B"/>
+                  <a:srgbClr val="2E5EAA"/>
                 </a:solidFill>
                 <a:latin typeface="Cambria" pitchFamily="34" charset="0"/>
                 <a:ea typeface="Cambria" pitchFamily="34" charset="-122"/>
@@ -12389,7 +12853,7 @@
             <a:avLst/>
           </a:prstGeom>
           <a:solidFill>
-            <a:srgbClr val="133B6C"/>
+            <a:srgbClr val="2FAE60"/>
           </a:solidFill>
           <a:ln/>
         </p:spPr>
@@ -12445,7 +12909,7 @@
             <a:r>
               <a:rPr lang="en-US" sz="1300" b="1" dirty="0">
                 <a:solidFill>
-                  <a:srgbClr val="E3A73B"/>
+                  <a:srgbClr val="2FAE60"/>
                 </a:solidFill>
                 <a:latin typeface="Cambria" pitchFamily="34" charset="0"/>
                 <a:ea typeface="Cambria" pitchFamily="34" charset="-122"/>
@@ -12536,7 +13000,7 @@
             <a:avLst/>
           </a:prstGeom>
           <a:solidFill>
-            <a:srgbClr val="133B6C"/>
+            <a:srgbClr val="129E82"/>
           </a:solidFill>
           <a:ln/>
         </p:spPr>
@@ -12592,7 +13056,7 @@
             <a:r>
               <a:rPr lang="en-US" sz="1300" b="1" dirty="0">
                 <a:solidFill>
-                  <a:srgbClr val="E3A73B"/>
+                  <a:srgbClr val="129E82"/>
                 </a:solidFill>
                 <a:latin typeface="Cambria" pitchFamily="34" charset="0"/>
                 <a:ea typeface="Cambria" pitchFamily="34" charset="-122"/>
@@ -12712,7 +13176,7 @@
             <a:r>
               <a:rPr lang="en-US" sz="900" dirty="0">
                 <a:solidFill>
-                  <a:srgbClr val="8FA0B5"/>
+                  <a:srgbClr val="5B6B82"/>
                 </a:solidFill>
                 <a:latin typeface="Calibri" pitchFamily="34" charset="0"/>
                 <a:ea typeface="Calibri" pitchFamily="34" charset="-122"/>
@@ -12751,7 +13215,7 @@
             <a:r>
               <a:rPr lang="en-US" sz="900" dirty="0">
                 <a:solidFill>
-                  <a:srgbClr val="8FA0B5"/>
+                  <a:srgbClr val="5B6B82"/>
                 </a:solidFill>
                 <a:latin typeface="Calibri" pitchFamily="34" charset="0"/>
                 <a:ea typeface="Calibri" pitchFamily="34" charset="-122"/>
@@ -12802,9 +13266,49 @@
           <p:nvPr/>
         </p:nvSpPr>
         <p:spPr>
-          <a:xfrm>
-            <a:off x="-2926080" y="2926080"/>
-            <a:ext cx="7772400" cy="7772400"/>
+          <a:xfrm rot="720000">
+            <a:off x="7955280" y="-457200"/>
+            <a:ext cx="5669280" cy="7772400"/>
+          </a:xfrm>
+          <a:prstGeom prst="rect">
+            <a:avLst/>
+          </a:prstGeom>
+          <a:solidFill>
+            <a:srgbClr val="E0392B"/>
+          </a:solidFill>
+          <a:ln/>
+        </p:spPr>
+      </p:sp>
+      <p:sp>
+        <p:nvSpPr>
+          <p:cNvPr id="4" name="Shape 1"/>
+          <p:cNvSpPr/>
+          <p:nvPr/>
+        </p:nvSpPr>
+        <p:spPr>
+          <a:xfrm>
+            <a:off x="0" y="0"/>
+            <a:ext cx="8275320" cy="6858000"/>
+          </a:xfrm>
+          <a:prstGeom prst="rect">
+            <a:avLst/>
+          </a:prstGeom>
+          <a:solidFill>
+            <a:srgbClr val="0A1F3B"/>
+          </a:solidFill>
+          <a:ln/>
+        </p:spPr>
+      </p:sp>
+      <p:sp>
+        <p:nvSpPr>
+          <p:cNvPr id="5" name="Shape 2"/>
+          <p:cNvSpPr/>
+          <p:nvPr/>
+        </p:nvSpPr>
+        <p:spPr>
+          <a:xfrm>
+            <a:off x="-3108960" y="3291840"/>
+            <a:ext cx="7498080" cy="7498080"/>
           </a:xfrm>
           <a:prstGeom prst="ellipse">
             <a:avLst/>
@@ -12817,14 +13321,14 @@
       </p:sp>
       <p:sp>
         <p:nvSpPr>
-          <p:cNvPr id="4" name="Text 1"/>
-          <p:cNvSpPr txBox="1"/>
-          <p:nvPr/>
-        </p:nvSpPr>
-        <p:spPr>
-          <a:xfrm>
-            <a:off x="7498080" y="-777240"/>
-            <a:ext cx="5120640" cy="3840480"/>
+          <p:cNvPr id="6" name="Text 3"/>
+          <p:cNvSpPr txBox="1"/>
+          <p:nvPr/>
+        </p:nvSpPr>
+        <p:spPr>
+          <a:xfrm>
+            <a:off x="-274320" y="-914400"/>
+            <a:ext cx="5852160" cy="4023360"/>
           </a:xfrm>
           <a:prstGeom prst="rect">
             <a:avLst/>
@@ -12836,13 +13340,13 @@
           <a:bodyPr wrap="square" lIns="0" tIns="0" rIns="0" bIns="0" rtlCol="0" anchor="ctr"/>
           <a:lstStyle/>
           <a:p>
-            <a:pPr algn="r" indent="0" marL="0">
+            <a:pPr algn="l" indent="0" marL="0">
               <a:buNone/>
             </a:pPr>
             <a:r>
               <a:rPr lang="en-US" sz="26000" b="1" dirty="0">
                 <a:solidFill>
-                  <a:srgbClr val="15294A"/>
+                  <a:srgbClr val="133B6C"/>
                 </a:solidFill>
                 <a:latin typeface="Cambria" pitchFamily="34" charset="0"/>
                 <a:ea typeface="Cambria" pitchFamily="34" charset="-122"/>
@@ -12856,27 +13360,87 @@
       </p:sp>
       <p:sp>
         <p:nvSpPr>
-          <p:cNvPr id="5" name="Shape 2"/>
-          <p:cNvSpPr/>
-          <p:nvPr/>
-        </p:nvSpPr>
-        <p:spPr>
-          <a:xfrm>
-            <a:off x="566928" y="1828800"/>
-            <a:ext cx="1188720" cy="1188720"/>
+          <p:cNvPr id="7" name="Shape 4"/>
+          <p:cNvSpPr/>
+          <p:nvPr/>
+        </p:nvSpPr>
+        <p:spPr>
+          <a:xfrm>
+            <a:off x="8686800" y="2011680"/>
+            <a:ext cx="2834640" cy="2834640"/>
           </a:xfrm>
           <a:prstGeom prst="ellipse">
             <a:avLst/>
           </a:prstGeom>
           <a:solidFill>
-            <a:srgbClr val="E3A73B"/>
+            <a:srgbClr val="0A1F3B"/>
+          </a:solidFill>
+          <a:ln/>
+        </p:spPr>
+      </p:sp>
+      <p:sp>
+        <p:nvSpPr>
+          <p:cNvPr id="8" name="Shape 5"/>
+          <p:cNvSpPr/>
+          <p:nvPr/>
+        </p:nvSpPr>
+        <p:spPr>
+          <a:xfrm>
+            <a:off x="9784080" y="3931920"/>
+            <a:ext cx="1371600" cy="1371600"/>
+          </a:xfrm>
+          <a:prstGeom prst="ellipse">
+            <a:avLst/>
+          </a:prstGeom>
+          <a:solidFill>
+            <a:srgbClr val="FFFFFF"/>
+          </a:solidFill>
+          <a:ln/>
+        </p:spPr>
+      </p:sp>
+      <p:sp>
+        <p:nvSpPr>
+          <p:cNvPr id="9" name="Shape 6"/>
+          <p:cNvSpPr/>
+          <p:nvPr/>
+        </p:nvSpPr>
+        <p:spPr>
+          <a:xfrm>
+            <a:off x="10698480" y="2011680"/>
+            <a:ext cx="960120" cy="960120"/>
+          </a:xfrm>
+          <a:prstGeom prst="ellipse">
+            <a:avLst/>
+          </a:prstGeom>
+          <a:solidFill>
+            <a:srgbClr val="0D2847"/>
+          </a:solidFill>
+          <a:ln/>
+        </p:spPr>
+      </p:sp>
+      <p:sp>
+        <p:nvSpPr>
+          <p:cNvPr id="10" name="Shape 7"/>
+          <p:cNvSpPr/>
+          <p:nvPr/>
+        </p:nvSpPr>
+        <p:spPr>
+          <a:xfrm>
+            <a:off x="9075420" y="2217420"/>
+            <a:ext cx="1051560" cy="1051560"/>
+          </a:xfrm>
+          <a:prstGeom prst="ellipse">
+            <a:avLst/>
+          </a:prstGeom>
+          <a:solidFill>
+            <a:srgbClr val="FFFFFF"/>
           </a:solidFill>
           <a:ln/>
         </p:spPr>
       </p:sp>
       <p:pic>
         <p:nvPicPr>
-          <p:cNvPr id="6" name="Image 0" descr="/tmp/claude-0/-home-user-riesgo/0ff9ff46-1396-5bd8-b3ac-2280dfbbbc55/scratchpad/work/gen/icons/shield_warning_navy.png">    </p:cNvPr>
+          <p:cNvPr id="11" name="Image 0" descr="/tmp/claude-0/-home-user-riesgo/0ff9ff46-1396-5bd8-b3ac-2280dfbbbc55/scratchpad/work/gen/icons/shield_warning_red.png">    </p:cNvPr>
           <p:cNvPicPr>
             <a:picLocks noChangeAspect="1"/>
           </p:cNvPicPr>
@@ -12890,8 +13454,8 @@
         </p:blipFill>
         <p:spPr>
           <a:xfrm>
-            <a:off x="852221" y="2114093"/>
-            <a:ext cx="618134" cy="618134"/>
+            <a:off x="9338310" y="2480310"/>
+            <a:ext cx="525780" cy="525780"/>
           </a:xfrm>
           <a:prstGeom prst="rect">
             <a:avLst/>
@@ -12900,150 +13464,27 @@
       </p:pic>
       <p:sp>
         <p:nvSpPr>
-          <p:cNvPr id="7" name="Text 3"/>
-          <p:cNvSpPr txBox="1"/>
-          <p:nvPr/>
-        </p:nvSpPr>
-        <p:spPr>
-          <a:xfrm>
-            <a:off x="566928" y="2880360"/>
-            <a:ext cx="9601200" cy="365760"/>
-          </a:xfrm>
-          <a:prstGeom prst="rect">
-            <a:avLst/>
-          </a:prstGeom>
-          <a:noFill/>
-          <a:ln/>
-        </p:spPr>
-        <p:txBody>
-          <a:bodyPr wrap="square" lIns="0" tIns="0" rIns="0" bIns="0" rtlCol="0" anchor="ctr"/>
-          <a:lstStyle/>
-          <a:p>
-            <a:pPr indent="0" marL="0">
-              <a:buNone/>
-            </a:pPr>
-            <a:r>
-              <a:rPr lang="en-US" sz="1500" b="1" spc="300" kern="0" dirty="0">
-                <a:solidFill>
-                  <a:srgbClr val="E3A73B"/>
-                </a:solidFill>
-                <a:latin typeface="Calibri" pitchFamily="34" charset="0"/>
-                <a:ea typeface="Calibri" pitchFamily="34" charset="-122"/>
-                <a:cs typeface="Calibri" pitchFamily="34" charset="-120"/>
-              </a:rPr>
-              <a:t>TEMA 5</a:t>
-            </a:r>
-            <a:endParaRPr lang="en-US" sz="1500" dirty="0"/>
-          </a:p>
-        </p:txBody>
-      </p:sp>
-      <p:sp>
-        <p:nvSpPr>
-          <p:cNvPr id="8" name="Text 4"/>
-          <p:cNvSpPr txBox="1"/>
-          <p:nvPr/>
-        </p:nvSpPr>
-        <p:spPr>
-          <a:xfrm>
-            <a:off x="566928" y="3246120"/>
-            <a:ext cx="10424160" cy="1554480"/>
-          </a:xfrm>
-          <a:prstGeom prst="rect">
-            <a:avLst/>
-          </a:prstGeom>
-          <a:noFill/>
-          <a:ln/>
-        </p:spPr>
-        <p:txBody>
-          <a:bodyPr wrap="square" lIns="0" tIns="0" rIns="0" bIns="0" rtlCol="0" anchor="ctr"/>
-          <a:lstStyle/>
-          <a:p>
-            <a:pPr indent="0" marL="0">
-              <a:lnSpc>
-                <a:spcPct val="105000"/>
-              </a:lnSpc>
-              <a:buNone/>
-            </a:pPr>
-            <a:r>
-              <a:rPr lang="en-US" sz="3400" b="1" dirty="0">
-                <a:solidFill>
-                  <a:srgbClr val="FFFFFF"/>
-                </a:solidFill>
-                <a:latin typeface="Cambria" pitchFamily="34" charset="0"/>
-                <a:ea typeface="Cambria" pitchFamily="34" charset="-122"/>
-                <a:cs typeface="Cambria" pitchFamily="34" charset="-120"/>
-              </a:rPr>
-              <a:t>FRAUDE Y ERRORES:</a:t>
-            </a:r>
-            <a:endParaRPr lang="en-US" sz="3400" dirty="0"/>
-          </a:p>
-          <a:p>
-            <a:pPr indent="0" marL="0">
-              <a:lnSpc>
-                <a:spcPct val="105000"/>
-              </a:lnSpc>
-              <a:buNone/>
-            </a:pPr>
-            <a:r>
-              <a:rPr lang="en-US" sz="3400" b="1" dirty="0">
-                <a:solidFill>
-                  <a:srgbClr val="FFFFFF"/>
-                </a:solidFill>
-                <a:latin typeface="Cambria" pitchFamily="34" charset="0"/>
-                <a:ea typeface="Cambria" pitchFamily="34" charset="-122"/>
-                <a:cs typeface="Cambria" pitchFamily="34" charset="-120"/>
-              </a:rPr>
-              <a:t>APRENDAMOS A PREVENIRLOS</a:t>
-            </a:r>
-            <a:endParaRPr lang="en-US" sz="3400" dirty="0"/>
-          </a:p>
-        </p:txBody>
-      </p:sp>
-      <p:sp>
-        <p:nvSpPr>
-          <p:cNvPr id="9" name="Text 5"/>
-          <p:cNvSpPr txBox="1"/>
-          <p:nvPr/>
-        </p:nvSpPr>
-        <p:spPr>
-          <a:xfrm>
-            <a:off x="566928" y="4663440"/>
-            <a:ext cx="9692640" cy="822960"/>
-          </a:xfrm>
-          <a:prstGeom prst="rect">
-            <a:avLst/>
-          </a:prstGeom>
-          <a:noFill/>
-          <a:ln/>
-        </p:spPr>
-        <p:txBody>
-          <a:bodyPr wrap="square" lIns="0" tIns="0" rIns="0" bIns="0" rtlCol="0" anchor="ctr"/>
-          <a:lstStyle/>
-          <a:p>
-            <a:pPr indent="0" marL="0">
-              <a:lnSpc>
-                <a:spcPct val="115000"/>
-              </a:lnSpc>
-              <a:buNone/>
-            </a:pPr>
-            <a:r>
-              <a:rPr lang="en-US" sz="1600" i="1" dirty="0">
-                <a:solidFill>
-                  <a:srgbClr val="C7D3E5"/>
-                </a:solidFill>
-                <a:latin typeface="Calibri" pitchFamily="34" charset="0"/>
-                <a:ea typeface="Calibri" pitchFamily="34" charset="-122"/>
-                <a:cs typeface="Calibri" pitchFamily="34" charset="-120"/>
-              </a:rPr>
-              <a:t>Distinguirlos es el primer paso para prevenirlos.</a:t>
-            </a:r>
-            <a:endParaRPr lang="en-US" sz="1600" dirty="0"/>
-          </a:p>
-        </p:txBody>
+          <p:cNvPr id="12" name="Shape 8"/>
+          <p:cNvSpPr/>
+          <p:nvPr/>
+        </p:nvSpPr>
+        <p:spPr>
+          <a:xfrm>
+            <a:off x="10447020" y="2948940"/>
+            <a:ext cx="868680" cy="868680"/>
+          </a:xfrm>
+          <a:prstGeom prst="ellipse">
+            <a:avLst/>
+          </a:prstGeom>
+          <a:solidFill>
+            <a:srgbClr val="0A1F3B"/>
+          </a:solidFill>
+          <a:ln/>
+        </p:spPr>
       </p:sp>
       <p:pic>
         <p:nvPicPr>
-          <p:cNvPr id="10" name="Image 1" descr="/tmp/claude-0/-home-user-riesgo/0ff9ff46-1396-5bd8-b3ac-2280dfbbbc55/scratchpad/work/gen/logo_white.png">    </p:cNvPr>
+          <p:cNvPr id="13" name="Image 1" descr="/tmp/claude-0/-home-user-riesgo/0ff9ff46-1396-5bd8-b3ac-2280dfbbbc55/scratchpad/work/gen/icons/warning_triangle_white.png">    </p:cNvPr>
           <p:cNvPicPr>
             <a:picLocks noChangeAspect="1"/>
           </p:cNvPicPr>
@@ -13057,8 +13498,8 @@
         </p:blipFill>
         <p:spPr>
           <a:xfrm>
-            <a:off x="10161727" y="5961888"/>
-            <a:ext cx="1463040" cy="411114"/>
+            <a:off x="10664190" y="3166110"/>
+            <a:ext cx="434340" cy="434340"/>
           </a:xfrm>
           <a:prstGeom prst="rect">
             <a:avLst/>
@@ -13067,14 +13508,102 @@
       </p:pic>
       <p:sp>
         <p:nvSpPr>
-          <p:cNvPr id="11" name="Text 6"/>
-          <p:cNvSpPr txBox="1"/>
-          <p:nvPr/>
-        </p:nvSpPr>
-        <p:spPr>
-          <a:xfrm>
-            <a:off x="566928" y="6473952"/>
-            <a:ext cx="7315200" cy="274320"/>
+          <p:cNvPr id="14" name="Shape 9"/>
+          <p:cNvSpPr/>
+          <p:nvPr/>
+        </p:nvSpPr>
+        <p:spPr>
+          <a:xfrm>
+            <a:off x="9578340" y="3909060"/>
+            <a:ext cx="777240" cy="777240"/>
+          </a:xfrm>
+          <a:prstGeom prst="ellipse">
+            <a:avLst/>
+          </a:prstGeom>
+          <a:solidFill>
+            <a:srgbClr val="FFFFFF"/>
+          </a:solidFill>
+          <a:ln/>
+        </p:spPr>
+      </p:sp>
+      <p:pic>
+        <p:nvPicPr>
+          <p:cNvPr id="15" name="Image 2" descr="/tmp/claude-0/-home-user-riesgo/0ff9ff46-1396-5bd8-b3ac-2280dfbbbc55/scratchpad/work/gen/icons/magnifier_navy.png">    </p:cNvPr>
+          <p:cNvPicPr>
+            <a:picLocks noChangeAspect="1"/>
+          </p:cNvPicPr>
+          <p:nvPr/>
+        </p:nvPicPr>
+        <p:blipFill>
+          <a:blip r:embed="rId3"/>
+          <a:stretch>
+            <a:fillRect/>
+          </a:stretch>
+        </p:blipFill>
+        <p:spPr>
+          <a:xfrm>
+            <a:off x="9772650" y="4103370"/>
+            <a:ext cx="388620" cy="388620"/>
+          </a:xfrm>
+          <a:prstGeom prst="rect">
+            <a:avLst/>
+          </a:prstGeom>
+        </p:spPr>
+      </p:pic>
+      <p:sp>
+        <p:nvSpPr>
+          <p:cNvPr id="16" name="Shape 10"/>
+          <p:cNvSpPr/>
+          <p:nvPr/>
+        </p:nvSpPr>
+        <p:spPr>
+          <a:xfrm>
+            <a:off x="10689336" y="4105656"/>
+            <a:ext cx="658368" cy="658368"/>
+          </a:xfrm>
+          <a:prstGeom prst="ellipse">
+            <a:avLst/>
+          </a:prstGeom>
+          <a:solidFill>
+            <a:srgbClr val="0A1F3B"/>
+          </a:solidFill>
+          <a:ln/>
+        </p:spPr>
+      </p:sp>
+      <p:pic>
+        <p:nvPicPr>
+          <p:cNvPr id="17" name="Image 3" descr="/tmp/claude-0/-home-user-riesgo/0ff9ff46-1396-5bd8-b3ac-2280dfbbbc55/scratchpad/work/gen/icons/lock_red.png">    </p:cNvPr>
+          <p:cNvPicPr>
+            <a:picLocks noChangeAspect="1"/>
+          </p:cNvPicPr>
+          <p:nvPr/>
+        </p:nvPicPr>
+        <p:blipFill>
+          <a:blip r:embed="rId4"/>
+          <a:stretch>
+            <a:fillRect/>
+          </a:stretch>
+        </p:blipFill>
+        <p:spPr>
+          <a:xfrm>
+            <a:off x="10853928" y="4270248"/>
+            <a:ext cx="329184" cy="329184"/>
+          </a:xfrm>
+          <a:prstGeom prst="rect">
+            <a:avLst/>
+          </a:prstGeom>
+        </p:spPr>
+      </p:pic>
+      <p:sp>
+        <p:nvSpPr>
+          <p:cNvPr id="18" name="Text 11"/>
+          <p:cNvSpPr txBox="1"/>
+          <p:nvPr/>
+        </p:nvSpPr>
+        <p:spPr>
+          <a:xfrm>
+            <a:off x="566928" y="2423160"/>
+            <a:ext cx="7315200" cy="365760"/>
           </a:xfrm>
           <a:prstGeom prst="rect">
             <a:avLst/>
@@ -13086,18 +13615,185 @@
           <a:bodyPr wrap="square" lIns="0" tIns="0" rIns="0" bIns="0" rtlCol="0" anchor="ctr"/>
           <a:lstStyle/>
           <a:p>
-            <a:pPr algn="l" indent="0" marL="0">
-              <a:buNone/>
-            </a:pPr>
-            <a:r>
-              <a:rPr lang="en-US" sz="900" dirty="0">
-                <a:solidFill>
-                  <a:srgbClr val="AEC0DA"/>
+            <a:pPr indent="0" marL="0">
+              <a:buNone/>
+            </a:pPr>
+            <a:r>
+              <a:rPr lang="en-US" sz="1500" b="1" spc="300" kern="0" dirty="0">
+                <a:solidFill>
+                  <a:srgbClr val="E0392B"/>
                 </a:solidFill>
                 <a:latin typeface="Calibri" pitchFamily="34" charset="0"/>
                 <a:ea typeface="Calibri" pitchFamily="34" charset="-122"/>
                 <a:cs typeface="Calibri" pitchFamily="34" charset="-120"/>
               </a:rPr>
+              <a:t>TEMA 5</a:t>
+            </a:r>
+            <a:endParaRPr lang="en-US" sz="1500" dirty="0"/>
+          </a:p>
+        </p:txBody>
+      </p:sp>
+      <p:sp>
+        <p:nvSpPr>
+          <p:cNvPr id="19" name="Text 12"/>
+          <p:cNvSpPr txBox="1"/>
+          <p:nvPr/>
+        </p:nvSpPr>
+        <p:spPr>
+          <a:xfrm>
+            <a:off x="566928" y="2788920"/>
+            <a:ext cx="7406640" cy="1554480"/>
+          </a:xfrm>
+          <a:prstGeom prst="rect">
+            <a:avLst/>
+          </a:prstGeom>
+          <a:noFill/>
+          <a:ln/>
+        </p:spPr>
+        <p:txBody>
+          <a:bodyPr wrap="square" lIns="0" tIns="0" rIns="0" bIns="0" rtlCol="0" anchor="ctr"/>
+          <a:lstStyle/>
+          <a:p>
+            <a:pPr indent="0" marL="0">
+              <a:lnSpc>
+                <a:spcPct val="105000"/>
+              </a:lnSpc>
+              <a:buNone/>
+            </a:pPr>
+            <a:r>
+              <a:rPr lang="en-US" sz="3200" b="1" dirty="0">
+                <a:solidFill>
+                  <a:srgbClr val="FFFFFF"/>
+                </a:solidFill>
+                <a:latin typeface="Cambria" pitchFamily="34" charset="0"/>
+                <a:ea typeface="Cambria" pitchFamily="34" charset="-122"/>
+                <a:cs typeface="Cambria" pitchFamily="34" charset="-120"/>
+              </a:rPr>
+              <a:t>FRAUDE Y ERRORES:</a:t>
+            </a:r>
+            <a:endParaRPr lang="en-US" sz="3200" dirty="0"/>
+          </a:p>
+          <a:p>
+            <a:pPr indent="0" marL="0">
+              <a:lnSpc>
+                <a:spcPct val="105000"/>
+              </a:lnSpc>
+              <a:buNone/>
+            </a:pPr>
+            <a:r>
+              <a:rPr lang="en-US" sz="3200" b="1" dirty="0">
+                <a:solidFill>
+                  <a:srgbClr val="FFFFFF"/>
+                </a:solidFill>
+                <a:latin typeface="Cambria" pitchFamily="34" charset="0"/>
+                <a:ea typeface="Cambria" pitchFamily="34" charset="-122"/>
+                <a:cs typeface="Cambria" pitchFamily="34" charset="-120"/>
+              </a:rPr>
+              <a:t>APRENDAMOS A PREVENIRLOS</a:t>
+            </a:r>
+            <a:endParaRPr lang="en-US" sz="3200" dirty="0"/>
+          </a:p>
+        </p:txBody>
+      </p:sp>
+      <p:sp>
+        <p:nvSpPr>
+          <p:cNvPr id="20" name="Text 13"/>
+          <p:cNvSpPr txBox="1"/>
+          <p:nvPr/>
+        </p:nvSpPr>
+        <p:spPr>
+          <a:xfrm>
+            <a:off x="566928" y="4206240"/>
+            <a:ext cx="7223760" cy="822960"/>
+          </a:xfrm>
+          <a:prstGeom prst="rect">
+            <a:avLst/>
+          </a:prstGeom>
+          <a:noFill/>
+          <a:ln/>
+        </p:spPr>
+        <p:txBody>
+          <a:bodyPr wrap="square" lIns="0" tIns="0" rIns="0" bIns="0" rtlCol="0" anchor="ctr"/>
+          <a:lstStyle/>
+          <a:p>
+            <a:pPr indent="0" marL="0">
+              <a:lnSpc>
+                <a:spcPct val="118000"/>
+              </a:lnSpc>
+              <a:buNone/>
+            </a:pPr>
+            <a:r>
+              <a:rPr lang="en-US" sz="1550" i="1" dirty="0">
+                <a:solidFill>
+                  <a:srgbClr val="D7E1F0"/>
+                </a:solidFill>
+                <a:latin typeface="Calibri" pitchFamily="34" charset="0"/>
+                <a:ea typeface="Calibri" pitchFamily="34" charset="-122"/>
+                <a:cs typeface="Calibri" pitchFamily="34" charset="-120"/>
+              </a:rPr>
+              <a:t>Distinguirlos es el primer paso para prevenirlos.</a:t>
+            </a:r>
+            <a:endParaRPr lang="en-US" sz="1550" dirty="0"/>
+          </a:p>
+        </p:txBody>
+      </p:sp>
+      <p:pic>
+        <p:nvPicPr>
+          <p:cNvPr id="21" name="Image 4" descr="/tmp/claude-0/-home-user-riesgo/0ff9ff46-1396-5bd8-b3ac-2280dfbbbc55/scratchpad/work/gen/logo_white.png">    </p:cNvPr>
+          <p:cNvPicPr>
+            <a:picLocks noChangeAspect="1"/>
+          </p:cNvPicPr>
+          <p:nvPr/>
+        </p:nvPicPr>
+        <p:blipFill>
+          <a:blip r:embed="rId5"/>
+          <a:stretch>
+            <a:fillRect/>
+          </a:stretch>
+        </p:blipFill>
+        <p:spPr>
+          <a:xfrm>
+            <a:off x="566928" y="5989320"/>
+            <a:ext cx="1417320" cy="398267"/>
+          </a:xfrm>
+          <a:prstGeom prst="rect">
+            <a:avLst/>
+          </a:prstGeom>
+        </p:spPr>
+      </p:pic>
+      <p:sp>
+        <p:nvSpPr>
+          <p:cNvPr id="22" name="Text 14"/>
+          <p:cNvSpPr txBox="1"/>
+          <p:nvPr/>
+        </p:nvSpPr>
+        <p:spPr>
+          <a:xfrm>
+            <a:off x="566928" y="6473952"/>
+            <a:ext cx="7315200" cy="274320"/>
+          </a:xfrm>
+          <a:prstGeom prst="rect">
+            <a:avLst/>
+          </a:prstGeom>
+          <a:noFill/>
+          <a:ln/>
+        </p:spPr>
+        <p:txBody>
+          <a:bodyPr wrap="square" lIns="0" tIns="0" rIns="0" bIns="0" rtlCol="0" anchor="ctr"/>
+          <a:lstStyle/>
+          <a:p>
+            <a:pPr algn="l" indent="0" marL="0">
+              <a:buNone/>
+            </a:pPr>
+            <a:r>
+              <a:rPr lang="en-US" sz="900" dirty="0">
+                <a:solidFill>
+                  <a:srgbClr val="AEC0DA"/>
+                </a:solidFill>
+                <a:latin typeface="Calibri" pitchFamily="34" charset="0"/>
+                <a:ea typeface="Calibri" pitchFamily="34" charset="-122"/>
+                <a:cs typeface="Calibri" pitchFamily="34" charset="-120"/>
+              </a:rPr>
               <a:t>GESTIÓN INTEGRAL DE RIESGOS  ·  COMEDICA DE R.L.</a:t>
             </a:r>
             <a:endParaRPr lang="en-US" sz="900" dirty="0"/>
@@ -13106,7 +13802,7 @@
       </p:sp>
       <p:sp>
         <p:nvSpPr>
-          <p:cNvPr id="12" name="Text 7"/>
+          <p:cNvPr id="23" name="Text 15"/>
           <p:cNvSpPr txBox="1"/>
           <p:nvPr/>
         </p:nvSpPr>
@@ -13202,7 +13898,7 @@
             <a:r>
               <a:rPr lang="en-US" sz="1300" b="1" spc="200" kern="0" dirty="0">
                 <a:solidFill>
-                  <a:srgbClr val="E3A73B"/>
+                  <a:srgbClr val="E0392B"/>
                 </a:solidFill>
                 <a:latin typeface="Calibri" pitchFamily="34" charset="0"/>
                 <a:ea typeface="Calibri" pitchFamily="34" charset="-122"/>
@@ -13295,7 +13991,7 @@
             </a:avLst>
           </a:prstGeom>
           <a:solidFill>
-            <a:srgbClr val="E3A73B"/>
+            <a:srgbClr val="F0AD35"/>
           </a:solidFill>
           <a:ln/>
         </p:spPr>
@@ -13315,7 +14011,7 @@
             <a:avLst/>
           </a:prstGeom>
           <a:solidFill>
-            <a:srgbClr val="E3A73B"/>
+            <a:srgbClr val="F0AD35"/>
           </a:solidFill>
           <a:ln/>
         </p:spPr>
@@ -13335,7 +14031,7 @@
             <a:avLst/>
           </a:prstGeom>
           <a:solidFill>
-            <a:srgbClr val="E3A73B"/>
+            <a:srgbClr val="F0AD35"/>
           </a:solidFill>
           <a:ln/>
         </p:spPr>
@@ -13430,7 +14126,7 @@
             <a:r>
               <a:rPr lang="en-US" sz="1250" b="1" spc="120" kern="0" dirty="0">
                 <a:solidFill>
-                  <a:srgbClr val="E3A73B"/>
+                  <a:srgbClr val="F0AD35"/>
                 </a:solidFill>
                 <a:latin typeface="Calibri" pitchFamily="34" charset="0"/>
                 <a:ea typeface="Calibri" pitchFamily="34" charset="-122"/>
@@ -13523,7 +14219,7 @@
             </a:avLst>
           </a:prstGeom>
           <a:solidFill>
-            <a:srgbClr val="C0392B"/>
+            <a:srgbClr val="E0392B"/>
           </a:solidFill>
           <a:ln/>
         </p:spPr>
@@ -13543,7 +14239,7 @@
             <a:avLst/>
           </a:prstGeom>
           <a:solidFill>
-            <a:srgbClr val="C0392B"/>
+            <a:srgbClr val="E0392B"/>
           </a:solidFill>
           <a:ln/>
         </p:spPr>
@@ -13563,7 +14259,7 @@
             <a:avLst/>
           </a:prstGeom>
           <a:solidFill>
-            <a:srgbClr val="C0392B"/>
+            <a:srgbClr val="E0392B"/>
           </a:solidFill>
           <a:ln/>
         </p:spPr>
@@ -13658,7 +14354,7 @@
             <a:r>
               <a:rPr lang="en-US" sz="1250" b="1" spc="120" kern="0" dirty="0">
                 <a:solidFill>
-                  <a:srgbClr val="C0392B"/>
+                  <a:srgbClr val="E0392B"/>
                 </a:solidFill>
                 <a:latin typeface="Calibri" pitchFamily="34" charset="0"/>
                 <a:ea typeface="Calibri" pitchFamily="34" charset="-122"/>
@@ -13749,7 +14445,7 @@
             <a:avLst/>
           </a:prstGeom>
           <a:solidFill>
-            <a:srgbClr val="E3A73B"/>
+            <a:srgbClr val="F0AD35"/>
           </a:solidFill>
           <a:ln/>
         </p:spPr>
@@ -13847,7 +14543,7 @@
             <a:r>
               <a:rPr lang="en-US" sz="900" dirty="0">
                 <a:solidFill>
-                  <a:srgbClr val="8FA0B5"/>
+                  <a:srgbClr val="5B6B82"/>
                 </a:solidFill>
                 <a:latin typeface="Calibri" pitchFamily="34" charset="0"/>
                 <a:ea typeface="Calibri" pitchFamily="34" charset="-122"/>
@@ -13886,7 +14582,7 @@
             <a:r>
               <a:rPr lang="en-US" sz="900" dirty="0">
                 <a:solidFill>
-                  <a:srgbClr val="8FA0B5"/>
+                  <a:srgbClr val="5B6B82"/>
                 </a:solidFill>
                 <a:latin typeface="Calibri" pitchFamily="34" charset="0"/>
                 <a:ea typeface="Calibri" pitchFamily="34" charset="-122"/>
@@ -13957,7 +14653,7 @@
             <a:r>
               <a:rPr lang="en-US" sz="1300" b="1" spc="200" kern="0" dirty="0">
                 <a:solidFill>
-                  <a:srgbClr val="E3A73B"/>
+                  <a:srgbClr val="E0392B"/>
                 </a:solidFill>
                 <a:latin typeface="Calibri" pitchFamily="34" charset="0"/>
                 <a:ea typeface="Calibri" pitchFamily="34" charset="-122"/>
@@ -14087,7 +14783,7 @@
             <a:avLst/>
           </a:prstGeom>
           <a:solidFill>
-            <a:srgbClr val="133B6C"/>
+            <a:srgbClr val="E0392B"/>
           </a:solidFill>
           <a:ln/>
         </p:spPr>
@@ -14222,7 +14918,7 @@
             <a:r>
               <a:rPr lang="en-US" sz="1050" b="1" dirty="0">
                 <a:solidFill>
-                  <a:srgbClr val="8FA0B5"/>
+                  <a:srgbClr val="5B6B82"/>
                 </a:solidFill>
                 <a:latin typeface="Calibri" pitchFamily="34" charset="0"/>
                 <a:ea typeface="Calibri" pitchFamily="34" charset="-122"/>
@@ -14283,7 +14979,7 @@
             <a:r>
               <a:rPr lang="en-US" sz="1050" b="1" dirty="0">
                 <a:solidFill>
-                  <a:srgbClr val="8FA0B5"/>
+                  <a:srgbClr val="5B6B82"/>
                 </a:solidFill>
                 <a:latin typeface="Calibri" pitchFamily="34" charset="0"/>
                 <a:ea typeface="Calibri" pitchFamily="34" charset="-122"/>
@@ -14332,7 +15028,7 @@
             <a:avLst/>
           </a:prstGeom>
           <a:solidFill>
-            <a:srgbClr val="133B6C"/>
+            <a:srgbClr val="E0392B"/>
           </a:solidFill>
           <a:ln/>
         </p:spPr>
@@ -14467,7 +15163,7 @@
             <a:r>
               <a:rPr lang="en-US" sz="1050" b="1" dirty="0">
                 <a:solidFill>
-                  <a:srgbClr val="8FA0B5"/>
+                  <a:srgbClr val="5B6B82"/>
                 </a:solidFill>
                 <a:latin typeface="Calibri" pitchFamily="34" charset="0"/>
                 <a:ea typeface="Calibri" pitchFamily="34" charset="-122"/>
@@ -14528,7 +15224,7 @@
             <a:r>
               <a:rPr lang="en-US" sz="1050" b="1" dirty="0">
                 <a:solidFill>
-                  <a:srgbClr val="8FA0B5"/>
+                  <a:srgbClr val="5B6B82"/>
                 </a:solidFill>
                 <a:latin typeface="Calibri" pitchFamily="34" charset="0"/>
                 <a:ea typeface="Calibri" pitchFamily="34" charset="-122"/>
@@ -14577,7 +15273,7 @@
             <a:avLst/>
           </a:prstGeom>
           <a:solidFill>
-            <a:srgbClr val="133B6C"/>
+            <a:srgbClr val="E0392B"/>
           </a:solidFill>
           <a:ln/>
         </p:spPr>
@@ -14712,7 +15408,7 @@
             <a:r>
               <a:rPr lang="en-US" sz="1050" b="1" dirty="0">
                 <a:solidFill>
-                  <a:srgbClr val="8FA0B5"/>
+                  <a:srgbClr val="5B6B82"/>
                 </a:solidFill>
                 <a:latin typeface="Calibri" pitchFamily="34" charset="0"/>
                 <a:ea typeface="Calibri" pitchFamily="34" charset="-122"/>
@@ -14773,7 +15469,7 @@
             <a:r>
               <a:rPr lang="en-US" sz="1050" b="1" dirty="0">
                 <a:solidFill>
-                  <a:srgbClr val="8FA0B5"/>
+                  <a:srgbClr val="5B6B82"/>
                 </a:solidFill>
                 <a:latin typeface="Calibri" pitchFamily="34" charset="0"/>
                 <a:ea typeface="Calibri" pitchFamily="34" charset="-122"/>
@@ -14822,7 +15518,7 @@
             <a:avLst/>
           </a:prstGeom>
           <a:solidFill>
-            <a:srgbClr val="133B6C"/>
+            <a:srgbClr val="E0392B"/>
           </a:solidFill>
           <a:ln/>
         </p:spPr>
@@ -14957,7 +15653,7 @@
             <a:r>
               <a:rPr lang="en-US" sz="1050" b="1" dirty="0">
                 <a:solidFill>
-                  <a:srgbClr val="8FA0B5"/>
+                  <a:srgbClr val="5B6B82"/>
                 </a:solidFill>
                 <a:latin typeface="Calibri" pitchFamily="34" charset="0"/>
                 <a:ea typeface="Calibri" pitchFamily="34" charset="-122"/>
@@ -15018,7 +15714,7 @@
             <a:r>
               <a:rPr lang="en-US" sz="1050" b="1" dirty="0">
                 <a:solidFill>
-                  <a:srgbClr val="8FA0B5"/>
+                  <a:srgbClr val="5B6B82"/>
                 </a:solidFill>
                 <a:latin typeface="Calibri" pitchFamily="34" charset="0"/>
                 <a:ea typeface="Calibri" pitchFamily="34" charset="-122"/>
@@ -15057,7 +15753,7 @@
             <a:r>
               <a:rPr lang="en-US" sz="900" dirty="0">
                 <a:solidFill>
-                  <a:srgbClr val="8FA0B5"/>
+                  <a:srgbClr val="5B6B82"/>
                 </a:solidFill>
                 <a:latin typeface="Calibri" pitchFamily="34" charset="0"/>
                 <a:ea typeface="Calibri" pitchFamily="34" charset="-122"/>
@@ -15096,7 +15792,7 @@
             <a:r>
               <a:rPr lang="en-US" sz="900" dirty="0">
                 <a:solidFill>
-                  <a:srgbClr val="8FA0B5"/>
+                  <a:srgbClr val="5B6B82"/>
                 </a:solidFill>
                 <a:latin typeface="Calibri" pitchFamily="34" charset="0"/>
                 <a:ea typeface="Calibri" pitchFamily="34" charset="-122"/>
@@ -15167,7 +15863,7 @@
             <a:r>
               <a:rPr lang="en-US" sz="1300" b="1" spc="200" kern="0" dirty="0">
                 <a:solidFill>
-                  <a:srgbClr val="E3A73B"/>
+                  <a:srgbClr val="E0392B"/>
                 </a:solidFill>
                 <a:latin typeface="Calibri" pitchFamily="34" charset="0"/>
                 <a:ea typeface="Calibri" pitchFamily="34" charset="-122"/>
@@ -15302,7 +15998,7 @@
             </a:avLst>
           </a:prstGeom>
           <a:solidFill>
-            <a:srgbClr val="E3A73B"/>
+            <a:srgbClr val="F0AD35"/>
           </a:solidFill>
           <a:ln/>
         </p:spPr>
@@ -15427,7 +16123,7 @@
             </a:avLst>
           </a:prstGeom>
           <a:solidFill>
-            <a:srgbClr val="C0392B"/>
+            <a:srgbClr val="E0392B"/>
           </a:solidFill>
           <a:ln/>
         </p:spPr>
@@ -15552,7 +16248,7 @@
             </a:avLst>
           </a:prstGeom>
           <a:solidFill>
-            <a:srgbClr val="E3A73B"/>
+            <a:srgbClr val="F0AD35"/>
           </a:solidFill>
           <a:ln/>
         </p:spPr>
@@ -15677,7 +16373,7 @@
             </a:avLst>
           </a:prstGeom>
           <a:solidFill>
-            <a:srgbClr val="C0392B"/>
+            <a:srgbClr val="E0392B"/>
           </a:solidFill>
           <a:ln/>
         </p:spPr>
@@ -15748,7 +16444,7 @@
             <a:r>
               <a:rPr lang="en-US" sz="900" dirty="0">
                 <a:solidFill>
-                  <a:srgbClr val="8FA0B5"/>
+                  <a:srgbClr val="5B6B82"/>
                 </a:solidFill>
                 <a:latin typeface="Calibri" pitchFamily="34" charset="0"/>
                 <a:ea typeface="Calibri" pitchFamily="34" charset="-122"/>
@@ -15787,7 +16483,7 @@
             <a:r>
               <a:rPr lang="en-US" sz="900" dirty="0">
                 <a:solidFill>
-                  <a:srgbClr val="8FA0B5"/>
+                  <a:srgbClr val="5B6B82"/>
                 </a:solidFill>
                 <a:latin typeface="Calibri" pitchFamily="34" charset="0"/>
                 <a:ea typeface="Calibri" pitchFamily="34" charset="-122"/>
@@ -15858,7 +16554,7 @@
             <a:r>
               <a:rPr lang="en-US" sz="1300" b="1" spc="200" kern="0" dirty="0">
                 <a:solidFill>
-                  <a:srgbClr val="E3A73B"/>
+                  <a:srgbClr val="E0392B"/>
                 </a:solidFill>
                 <a:latin typeface="Calibri" pitchFamily="34" charset="0"/>
                 <a:ea typeface="Calibri" pitchFamily="34" charset="-122"/>
@@ -15949,7 +16645,7 @@
             <a:avLst/>
           </a:prstGeom>
           <a:solidFill>
-            <a:srgbClr val="C0392B"/>
+            <a:srgbClr val="E0392B"/>
           </a:solidFill>
           <a:ln/>
         </p:spPr>
@@ -16099,7 +16795,7 @@
             <a:avLst/>
           </a:prstGeom>
           <a:solidFill>
-            <a:srgbClr val="C0392B"/>
+            <a:srgbClr val="E0392B"/>
           </a:solidFill>
           <a:ln/>
         </p:spPr>
@@ -16249,7 +16945,7 @@
             <a:avLst/>
           </a:prstGeom>
           <a:solidFill>
-            <a:srgbClr val="2E9E5B"/>
+            <a:srgbClr val="2FAE60"/>
           </a:solidFill>
           <a:ln/>
         </p:spPr>
@@ -16399,7 +17095,7 @@
             <a:avLst/>
           </a:prstGeom>
           <a:solidFill>
-            <a:srgbClr val="2E9E5B"/>
+            <a:srgbClr val="2FAE60"/>
           </a:solidFill>
           <a:ln/>
         </p:spPr>
@@ -16539,7 +17235,7 @@
             <a:r>
               <a:rPr lang="en-US" sz="900" dirty="0">
                 <a:solidFill>
-                  <a:srgbClr val="8FA0B5"/>
+                  <a:srgbClr val="5B6B82"/>
                 </a:solidFill>
                 <a:latin typeface="Calibri" pitchFamily="34" charset="0"/>
                 <a:ea typeface="Calibri" pitchFamily="34" charset="-122"/>
@@ -16578,7 +17274,7 @@
             <a:r>
               <a:rPr lang="en-US" sz="900" dirty="0">
                 <a:solidFill>
-                  <a:srgbClr val="8FA0B5"/>
+                  <a:srgbClr val="5B6B82"/>
                 </a:solidFill>
                 <a:latin typeface="Calibri" pitchFamily="34" charset="0"/>
                 <a:ea typeface="Calibri" pitchFamily="34" charset="-122"/>
@@ -16629,9 +17325,49 @@
           <p:nvPr/>
         </p:nvSpPr>
         <p:spPr>
-          <a:xfrm>
-            <a:off x="-2926080" y="2926080"/>
-            <a:ext cx="7772400" cy="7772400"/>
+          <a:xfrm rot="720000">
+            <a:off x="7955280" y="-457200"/>
+            <a:ext cx="5669280" cy="7772400"/>
+          </a:xfrm>
+          <a:prstGeom prst="rect">
+            <a:avLst/>
+          </a:prstGeom>
+          <a:solidFill>
+            <a:srgbClr val="2E5EAA"/>
+          </a:solidFill>
+          <a:ln/>
+        </p:spPr>
+      </p:sp>
+      <p:sp>
+        <p:nvSpPr>
+          <p:cNvPr id="4" name="Shape 1"/>
+          <p:cNvSpPr/>
+          <p:nvPr/>
+        </p:nvSpPr>
+        <p:spPr>
+          <a:xfrm>
+            <a:off x="0" y="0"/>
+            <a:ext cx="8275320" cy="6858000"/>
+          </a:xfrm>
+          <a:prstGeom prst="rect">
+            <a:avLst/>
+          </a:prstGeom>
+          <a:solidFill>
+            <a:srgbClr val="0A1F3B"/>
+          </a:solidFill>
+          <a:ln/>
+        </p:spPr>
+      </p:sp>
+      <p:sp>
+        <p:nvSpPr>
+          <p:cNvPr id="5" name="Shape 2"/>
+          <p:cNvSpPr/>
+          <p:nvPr/>
+        </p:nvSpPr>
+        <p:spPr>
+          <a:xfrm>
+            <a:off x="-3108960" y="3291840"/>
+            <a:ext cx="7498080" cy="7498080"/>
           </a:xfrm>
           <a:prstGeom prst="ellipse">
             <a:avLst/>
@@ -16644,14 +17380,14 @@
       </p:sp>
       <p:sp>
         <p:nvSpPr>
-          <p:cNvPr id="4" name="Text 1"/>
-          <p:cNvSpPr txBox="1"/>
-          <p:nvPr/>
-        </p:nvSpPr>
-        <p:spPr>
-          <a:xfrm>
-            <a:off x="7498080" y="-777240"/>
-            <a:ext cx="5120640" cy="3840480"/>
+          <p:cNvPr id="6" name="Text 3"/>
+          <p:cNvSpPr txBox="1"/>
+          <p:nvPr/>
+        </p:nvSpPr>
+        <p:spPr>
+          <a:xfrm>
+            <a:off x="-274320" y="-914400"/>
+            <a:ext cx="5852160" cy="4023360"/>
           </a:xfrm>
           <a:prstGeom prst="rect">
             <a:avLst/>
@@ -16663,13 +17399,13 @@
           <a:bodyPr wrap="square" lIns="0" tIns="0" rIns="0" bIns="0" rtlCol="0" anchor="ctr"/>
           <a:lstStyle/>
           <a:p>
-            <a:pPr algn="r" indent="0" marL="0">
+            <a:pPr algn="l" indent="0" marL="0">
               <a:buNone/>
             </a:pPr>
             <a:r>
               <a:rPr lang="en-US" sz="26000" b="1" dirty="0">
                 <a:solidFill>
-                  <a:srgbClr val="15294A"/>
+                  <a:srgbClr val="133B6C"/>
                 </a:solidFill>
                 <a:latin typeface="Cambria" pitchFamily="34" charset="0"/>
                 <a:ea typeface="Cambria" pitchFamily="34" charset="-122"/>
@@ -16683,27 +17419,87 @@
       </p:sp>
       <p:sp>
         <p:nvSpPr>
-          <p:cNvPr id="5" name="Shape 2"/>
-          <p:cNvSpPr/>
-          <p:nvPr/>
-        </p:nvSpPr>
-        <p:spPr>
-          <a:xfrm>
-            <a:off x="566928" y="1828800"/>
-            <a:ext cx="1188720" cy="1188720"/>
+          <p:cNvPr id="7" name="Shape 4"/>
+          <p:cNvSpPr/>
+          <p:nvPr/>
+        </p:nvSpPr>
+        <p:spPr>
+          <a:xfrm>
+            <a:off x="8686800" y="2011680"/>
+            <a:ext cx="2834640" cy="2834640"/>
           </a:xfrm>
           <a:prstGeom prst="ellipse">
             <a:avLst/>
           </a:prstGeom>
           <a:solidFill>
-            <a:srgbClr val="E3A73B"/>
+            <a:srgbClr val="0A1F3B"/>
+          </a:solidFill>
+          <a:ln/>
+        </p:spPr>
+      </p:sp>
+      <p:sp>
+        <p:nvSpPr>
+          <p:cNvPr id="8" name="Shape 5"/>
+          <p:cNvSpPr/>
+          <p:nvPr/>
+        </p:nvSpPr>
+        <p:spPr>
+          <a:xfrm>
+            <a:off x="9784080" y="3931920"/>
+            <a:ext cx="1371600" cy="1371600"/>
+          </a:xfrm>
+          <a:prstGeom prst="ellipse">
+            <a:avLst/>
+          </a:prstGeom>
+          <a:solidFill>
+            <a:srgbClr val="FFFFFF"/>
+          </a:solidFill>
+          <a:ln/>
+        </p:spPr>
+      </p:sp>
+      <p:sp>
+        <p:nvSpPr>
+          <p:cNvPr id="9" name="Shape 6"/>
+          <p:cNvSpPr/>
+          <p:nvPr/>
+        </p:nvSpPr>
+        <p:spPr>
+          <a:xfrm>
+            <a:off x="10698480" y="2011680"/>
+            <a:ext cx="960120" cy="960120"/>
+          </a:xfrm>
+          <a:prstGeom prst="ellipse">
+            <a:avLst/>
+          </a:prstGeom>
+          <a:solidFill>
+            <a:srgbClr val="0D2847"/>
+          </a:solidFill>
+          <a:ln/>
+        </p:spPr>
+      </p:sp>
+      <p:sp>
+        <p:nvSpPr>
+          <p:cNvPr id="10" name="Shape 7"/>
+          <p:cNvSpPr/>
+          <p:nvPr/>
+        </p:nvSpPr>
+        <p:spPr>
+          <a:xfrm>
+            <a:off x="9075420" y="2217420"/>
+            <a:ext cx="1051560" cy="1051560"/>
+          </a:xfrm>
+          <a:prstGeom prst="ellipse">
+            <a:avLst/>
+          </a:prstGeom>
+          <a:solidFill>
+            <a:srgbClr val="FFFFFF"/>
           </a:solidFill>
           <a:ln/>
         </p:spPr>
       </p:sp>
       <p:pic>
         <p:nvPicPr>
-          <p:cNvPr id="6" name="Image 0" descr="/tmp/claude-0/-home-user-riesgo/0ff9ff46-1396-5bd8-b3ac-2280dfbbbc55/scratchpad/work/gen/icons/bank_navy.png">    </p:cNvPr>
+          <p:cNvPr id="11" name="Image 0" descr="/tmp/claude-0/-home-user-riesgo/0ff9ff46-1396-5bd8-b3ac-2280dfbbbc55/scratchpad/work/gen/icons/bank_indigo.png">    </p:cNvPr>
           <p:cNvPicPr>
             <a:picLocks noChangeAspect="1"/>
           </p:cNvPicPr>
@@ -16717,8 +17513,8 @@
         </p:blipFill>
         <p:spPr>
           <a:xfrm>
-            <a:off x="852221" y="2114093"/>
-            <a:ext cx="618134" cy="618134"/>
+            <a:off x="9338310" y="2480310"/>
+            <a:ext cx="525780" cy="525780"/>
           </a:xfrm>
           <a:prstGeom prst="rect">
             <a:avLst/>
@@ -16727,150 +17523,27 @@
       </p:pic>
       <p:sp>
         <p:nvSpPr>
-          <p:cNvPr id="7" name="Text 3"/>
-          <p:cNvSpPr txBox="1"/>
-          <p:nvPr/>
-        </p:nvSpPr>
-        <p:spPr>
-          <a:xfrm>
-            <a:off x="566928" y="2880360"/>
-            <a:ext cx="9601200" cy="365760"/>
-          </a:xfrm>
-          <a:prstGeom prst="rect">
-            <a:avLst/>
-          </a:prstGeom>
-          <a:noFill/>
-          <a:ln/>
-        </p:spPr>
-        <p:txBody>
-          <a:bodyPr wrap="square" lIns="0" tIns="0" rIns="0" bIns="0" rtlCol="0" anchor="ctr"/>
-          <a:lstStyle/>
-          <a:p>
-            <a:pPr indent="0" marL="0">
-              <a:buNone/>
-            </a:pPr>
-            <a:r>
-              <a:rPr lang="en-US" sz="1500" b="1" spc="300" kern="0" dirty="0">
-                <a:solidFill>
-                  <a:srgbClr val="E3A73B"/>
-                </a:solidFill>
-                <a:latin typeface="Calibri" pitchFamily="34" charset="0"/>
-                <a:ea typeface="Calibri" pitchFamily="34" charset="-122"/>
-                <a:cs typeface="Calibri" pitchFamily="34" charset="-120"/>
-              </a:rPr>
-              <a:t>TEMA 6</a:t>
-            </a:r>
-            <a:endParaRPr lang="en-US" sz="1500" dirty="0"/>
-          </a:p>
-        </p:txBody>
-      </p:sp>
-      <p:sp>
-        <p:nvSpPr>
-          <p:cNvPr id="8" name="Text 4"/>
-          <p:cNvSpPr txBox="1"/>
-          <p:nvPr/>
-        </p:nvSpPr>
-        <p:spPr>
-          <a:xfrm>
-            <a:off x="566928" y="3246120"/>
-            <a:ext cx="10424160" cy="1554480"/>
-          </a:xfrm>
-          <a:prstGeom prst="rect">
-            <a:avLst/>
-          </a:prstGeom>
-          <a:noFill/>
-          <a:ln/>
-        </p:spPr>
-        <p:txBody>
-          <a:bodyPr wrap="square" lIns="0" tIns="0" rIns="0" bIns="0" rtlCol="0" anchor="ctr"/>
-          <a:lstStyle/>
-          <a:p>
-            <a:pPr indent="0" marL="0">
-              <a:lnSpc>
-                <a:spcPct val="105000"/>
-              </a:lnSpc>
-              <a:buNone/>
-            </a:pPr>
-            <a:r>
-              <a:rPr lang="en-US" sz="3400" b="1" dirty="0">
-                <a:solidFill>
-                  <a:srgbClr val="FFFFFF"/>
-                </a:solidFill>
-                <a:latin typeface="Cambria" pitchFamily="34" charset="0"/>
-                <a:ea typeface="Cambria" pitchFamily="34" charset="-122"/>
-                <a:cs typeface="Cambria" pitchFamily="34" charset="-120"/>
-              </a:rPr>
-              <a:t>EL RIESGO CREDITICIO NO ES SOLO</a:t>
-            </a:r>
-            <a:endParaRPr lang="en-US" sz="3400" dirty="0"/>
-          </a:p>
-          <a:p>
-            <a:pPr indent="0" marL="0">
-              <a:lnSpc>
-                <a:spcPct val="105000"/>
-              </a:lnSpc>
-              <a:buNone/>
-            </a:pPr>
-            <a:r>
-              <a:rPr lang="en-US" sz="3400" b="1" dirty="0">
-                <a:solidFill>
-                  <a:srgbClr val="FFFFFF"/>
-                </a:solidFill>
-                <a:latin typeface="Cambria" pitchFamily="34" charset="0"/>
-                <a:ea typeface="Cambria" pitchFamily="34" charset="-122"/>
-                <a:cs typeface="Cambria" pitchFamily="34" charset="-120"/>
-              </a:rPr>
-              <a:t>RESPONSABILIDAD DE CRÉDITOS</a:t>
-            </a:r>
-            <a:endParaRPr lang="en-US" sz="3400" dirty="0"/>
-          </a:p>
-        </p:txBody>
-      </p:sp>
-      <p:sp>
-        <p:nvSpPr>
-          <p:cNvPr id="9" name="Text 5"/>
-          <p:cNvSpPr txBox="1"/>
-          <p:nvPr/>
-        </p:nvSpPr>
-        <p:spPr>
-          <a:xfrm>
-            <a:off x="566928" y="4663440"/>
-            <a:ext cx="9692640" cy="822960"/>
-          </a:xfrm>
-          <a:prstGeom prst="rect">
-            <a:avLst/>
-          </a:prstGeom>
-          <a:noFill/>
-          <a:ln/>
-        </p:spPr>
-        <p:txBody>
-          <a:bodyPr wrap="square" lIns="0" tIns="0" rIns="0" bIns="0" rtlCol="0" anchor="ctr"/>
-          <a:lstStyle/>
-          <a:p>
-            <a:pPr indent="0" marL="0">
-              <a:lnSpc>
-                <a:spcPct val="115000"/>
-              </a:lnSpc>
-              <a:buNone/>
-            </a:pPr>
-            <a:r>
-              <a:rPr lang="en-US" sz="1600" i="1" dirty="0">
-                <a:solidFill>
-                  <a:srgbClr val="C7D3E5"/>
-                </a:solidFill>
-                <a:latin typeface="Calibri" pitchFamily="34" charset="0"/>
-                <a:ea typeface="Calibri" pitchFamily="34" charset="-122"/>
-                <a:cs typeface="Calibri" pitchFamily="34" charset="-120"/>
-              </a:rPr>
-              <a:t>El crédito es un proceso. El riesgo puede aparecer en cualquier etapa.</a:t>
-            </a:r>
-            <a:endParaRPr lang="en-US" sz="1600" dirty="0"/>
-          </a:p>
-        </p:txBody>
+          <p:cNvPr id="12" name="Shape 8"/>
+          <p:cNvSpPr/>
+          <p:nvPr/>
+        </p:nvSpPr>
+        <p:spPr>
+          <a:xfrm>
+            <a:off x="10447020" y="2948940"/>
+            <a:ext cx="868680" cy="868680"/>
+          </a:xfrm>
+          <a:prstGeom prst="ellipse">
+            <a:avLst/>
+          </a:prstGeom>
+          <a:solidFill>
+            <a:srgbClr val="0A1F3B"/>
+          </a:solidFill>
+          <a:ln/>
+        </p:spPr>
       </p:sp>
       <p:pic>
         <p:nvPicPr>
-          <p:cNvPr id="10" name="Image 1" descr="/tmp/claude-0/-home-user-riesgo/0ff9ff46-1396-5bd8-b3ac-2280dfbbbc55/scratchpad/work/gen/logo_white.png">    </p:cNvPr>
+          <p:cNvPr id="13" name="Image 1" descr="/tmp/claude-0/-home-user-riesgo/0ff9ff46-1396-5bd8-b3ac-2280dfbbbc55/scratchpad/work/gen/icons/coins_white.png">    </p:cNvPr>
           <p:cNvPicPr>
             <a:picLocks noChangeAspect="1"/>
           </p:cNvPicPr>
@@ -16884,8 +17557,8 @@
         </p:blipFill>
         <p:spPr>
           <a:xfrm>
-            <a:off x="10161727" y="5961888"/>
-            <a:ext cx="1463040" cy="411114"/>
+            <a:off x="10664190" y="3166110"/>
+            <a:ext cx="434340" cy="434340"/>
           </a:xfrm>
           <a:prstGeom prst="rect">
             <a:avLst/>
@@ -16894,14 +17567,102 @@
       </p:pic>
       <p:sp>
         <p:nvSpPr>
-          <p:cNvPr id="11" name="Text 6"/>
-          <p:cNvSpPr txBox="1"/>
-          <p:nvPr/>
-        </p:nvSpPr>
-        <p:spPr>
-          <a:xfrm>
-            <a:off x="566928" y="6473952"/>
-            <a:ext cx="7315200" cy="274320"/>
+          <p:cNvPr id="14" name="Shape 9"/>
+          <p:cNvSpPr/>
+          <p:nvPr/>
+        </p:nvSpPr>
+        <p:spPr>
+          <a:xfrm>
+            <a:off x="9578340" y="3909060"/>
+            <a:ext cx="777240" cy="777240"/>
+          </a:xfrm>
+          <a:prstGeom prst="ellipse">
+            <a:avLst/>
+          </a:prstGeom>
+          <a:solidFill>
+            <a:srgbClr val="FFFFFF"/>
+          </a:solidFill>
+          <a:ln/>
+        </p:spPr>
+      </p:sp>
+      <p:pic>
+        <p:nvPicPr>
+          <p:cNvPr id="15" name="Image 2" descr="/tmp/claude-0/-home-user-riesgo/0ff9ff46-1396-5bd8-b3ac-2280dfbbbc55/scratchpad/work/gen/icons/form_navy.png">    </p:cNvPr>
+          <p:cNvPicPr>
+            <a:picLocks noChangeAspect="1"/>
+          </p:cNvPicPr>
+          <p:nvPr/>
+        </p:nvPicPr>
+        <p:blipFill>
+          <a:blip r:embed="rId3"/>
+          <a:stretch>
+            <a:fillRect/>
+          </a:stretch>
+        </p:blipFill>
+        <p:spPr>
+          <a:xfrm>
+            <a:off x="9772650" y="4103370"/>
+            <a:ext cx="388620" cy="388620"/>
+          </a:xfrm>
+          <a:prstGeom prst="rect">
+            <a:avLst/>
+          </a:prstGeom>
+        </p:spPr>
+      </p:pic>
+      <p:sp>
+        <p:nvSpPr>
+          <p:cNvPr id="16" name="Shape 10"/>
+          <p:cNvSpPr/>
+          <p:nvPr/>
+        </p:nvSpPr>
+        <p:spPr>
+          <a:xfrm>
+            <a:off x="10689336" y="4105656"/>
+            <a:ext cx="658368" cy="658368"/>
+          </a:xfrm>
+          <a:prstGeom prst="ellipse">
+            <a:avLst/>
+          </a:prstGeom>
+          <a:solidFill>
+            <a:srgbClr val="0A1F3B"/>
+          </a:solidFill>
+          <a:ln/>
+        </p:spPr>
+      </p:sp>
+      <p:pic>
+        <p:nvPicPr>
+          <p:cNvPr id="17" name="Image 3" descr="/tmp/claude-0/-home-user-riesgo/0ff9ff46-1396-5bd8-b3ac-2280dfbbbc55/scratchpad/work/gen/icons/chart_up_indigo.png">    </p:cNvPr>
+          <p:cNvPicPr>
+            <a:picLocks noChangeAspect="1"/>
+          </p:cNvPicPr>
+          <p:nvPr/>
+        </p:nvPicPr>
+        <p:blipFill>
+          <a:blip r:embed="rId4"/>
+          <a:stretch>
+            <a:fillRect/>
+          </a:stretch>
+        </p:blipFill>
+        <p:spPr>
+          <a:xfrm>
+            <a:off x="10853928" y="4270248"/>
+            <a:ext cx="329184" cy="329184"/>
+          </a:xfrm>
+          <a:prstGeom prst="rect">
+            <a:avLst/>
+          </a:prstGeom>
+        </p:spPr>
+      </p:pic>
+      <p:sp>
+        <p:nvSpPr>
+          <p:cNvPr id="18" name="Text 11"/>
+          <p:cNvSpPr txBox="1"/>
+          <p:nvPr/>
+        </p:nvSpPr>
+        <p:spPr>
+          <a:xfrm>
+            <a:off x="566928" y="2423160"/>
+            <a:ext cx="7315200" cy="365760"/>
           </a:xfrm>
           <a:prstGeom prst="rect">
             <a:avLst/>
@@ -16913,18 +17674,185 @@
           <a:bodyPr wrap="square" lIns="0" tIns="0" rIns="0" bIns="0" rtlCol="0" anchor="ctr"/>
           <a:lstStyle/>
           <a:p>
-            <a:pPr algn="l" indent="0" marL="0">
-              <a:buNone/>
-            </a:pPr>
-            <a:r>
-              <a:rPr lang="en-US" sz="900" dirty="0">
-                <a:solidFill>
-                  <a:srgbClr val="AEC0DA"/>
+            <a:pPr indent="0" marL="0">
+              <a:buNone/>
+            </a:pPr>
+            <a:r>
+              <a:rPr lang="en-US" sz="1500" b="1" spc="300" kern="0" dirty="0">
+                <a:solidFill>
+                  <a:srgbClr val="2E5EAA"/>
                 </a:solidFill>
                 <a:latin typeface="Calibri" pitchFamily="34" charset="0"/>
                 <a:ea typeface="Calibri" pitchFamily="34" charset="-122"/>
                 <a:cs typeface="Calibri" pitchFamily="34" charset="-120"/>
               </a:rPr>
+              <a:t>TEMA 6</a:t>
+            </a:r>
+            <a:endParaRPr lang="en-US" sz="1500" dirty="0"/>
+          </a:p>
+        </p:txBody>
+      </p:sp>
+      <p:sp>
+        <p:nvSpPr>
+          <p:cNvPr id="19" name="Text 12"/>
+          <p:cNvSpPr txBox="1"/>
+          <p:nvPr/>
+        </p:nvSpPr>
+        <p:spPr>
+          <a:xfrm>
+            <a:off x="566928" y="2788920"/>
+            <a:ext cx="7406640" cy="1554480"/>
+          </a:xfrm>
+          <a:prstGeom prst="rect">
+            <a:avLst/>
+          </a:prstGeom>
+          <a:noFill/>
+          <a:ln/>
+        </p:spPr>
+        <p:txBody>
+          <a:bodyPr wrap="square" lIns="0" tIns="0" rIns="0" bIns="0" rtlCol="0" anchor="ctr"/>
+          <a:lstStyle/>
+          <a:p>
+            <a:pPr indent="0" marL="0">
+              <a:lnSpc>
+                <a:spcPct val="105000"/>
+              </a:lnSpc>
+              <a:buNone/>
+            </a:pPr>
+            <a:r>
+              <a:rPr lang="en-US" sz="3200" b="1" dirty="0">
+                <a:solidFill>
+                  <a:srgbClr val="FFFFFF"/>
+                </a:solidFill>
+                <a:latin typeface="Cambria" pitchFamily="34" charset="0"/>
+                <a:ea typeface="Cambria" pitchFamily="34" charset="-122"/>
+                <a:cs typeface="Cambria" pitchFamily="34" charset="-120"/>
+              </a:rPr>
+              <a:t>EL RIESGO CREDITICIO NO ES SOLO</a:t>
+            </a:r>
+            <a:endParaRPr lang="en-US" sz="3200" dirty="0"/>
+          </a:p>
+          <a:p>
+            <a:pPr indent="0" marL="0">
+              <a:lnSpc>
+                <a:spcPct val="105000"/>
+              </a:lnSpc>
+              <a:buNone/>
+            </a:pPr>
+            <a:r>
+              <a:rPr lang="en-US" sz="3200" b="1" dirty="0">
+                <a:solidFill>
+                  <a:srgbClr val="FFFFFF"/>
+                </a:solidFill>
+                <a:latin typeface="Cambria" pitchFamily="34" charset="0"/>
+                <a:ea typeface="Cambria" pitchFamily="34" charset="-122"/>
+                <a:cs typeface="Cambria" pitchFamily="34" charset="-120"/>
+              </a:rPr>
+              <a:t>RESPONSABILIDAD DE CRÉDITOS</a:t>
+            </a:r>
+            <a:endParaRPr lang="en-US" sz="3200" dirty="0"/>
+          </a:p>
+        </p:txBody>
+      </p:sp>
+      <p:sp>
+        <p:nvSpPr>
+          <p:cNvPr id="20" name="Text 13"/>
+          <p:cNvSpPr txBox="1"/>
+          <p:nvPr/>
+        </p:nvSpPr>
+        <p:spPr>
+          <a:xfrm>
+            <a:off x="566928" y="4206240"/>
+            <a:ext cx="7223760" cy="822960"/>
+          </a:xfrm>
+          <a:prstGeom prst="rect">
+            <a:avLst/>
+          </a:prstGeom>
+          <a:noFill/>
+          <a:ln/>
+        </p:spPr>
+        <p:txBody>
+          <a:bodyPr wrap="square" lIns="0" tIns="0" rIns="0" bIns="0" rtlCol="0" anchor="ctr"/>
+          <a:lstStyle/>
+          <a:p>
+            <a:pPr indent="0" marL="0">
+              <a:lnSpc>
+                <a:spcPct val="118000"/>
+              </a:lnSpc>
+              <a:buNone/>
+            </a:pPr>
+            <a:r>
+              <a:rPr lang="en-US" sz="1550" i="1" dirty="0">
+                <a:solidFill>
+                  <a:srgbClr val="D7E1F0"/>
+                </a:solidFill>
+                <a:latin typeface="Calibri" pitchFamily="34" charset="0"/>
+                <a:ea typeface="Calibri" pitchFamily="34" charset="-122"/>
+                <a:cs typeface="Calibri" pitchFamily="34" charset="-120"/>
+              </a:rPr>
+              <a:t>El crédito es un proceso. El riesgo puede aparecer en cualquier etapa.</a:t>
+            </a:r>
+            <a:endParaRPr lang="en-US" sz="1550" dirty="0"/>
+          </a:p>
+        </p:txBody>
+      </p:sp>
+      <p:pic>
+        <p:nvPicPr>
+          <p:cNvPr id="21" name="Image 4" descr="/tmp/claude-0/-home-user-riesgo/0ff9ff46-1396-5bd8-b3ac-2280dfbbbc55/scratchpad/work/gen/logo_white.png">    </p:cNvPr>
+          <p:cNvPicPr>
+            <a:picLocks noChangeAspect="1"/>
+          </p:cNvPicPr>
+          <p:nvPr/>
+        </p:nvPicPr>
+        <p:blipFill>
+          <a:blip r:embed="rId5"/>
+          <a:stretch>
+            <a:fillRect/>
+          </a:stretch>
+        </p:blipFill>
+        <p:spPr>
+          <a:xfrm>
+            <a:off x="566928" y="5989320"/>
+            <a:ext cx="1417320" cy="398267"/>
+          </a:xfrm>
+          <a:prstGeom prst="rect">
+            <a:avLst/>
+          </a:prstGeom>
+        </p:spPr>
+      </p:pic>
+      <p:sp>
+        <p:nvSpPr>
+          <p:cNvPr id="22" name="Text 14"/>
+          <p:cNvSpPr txBox="1"/>
+          <p:nvPr/>
+        </p:nvSpPr>
+        <p:spPr>
+          <a:xfrm>
+            <a:off x="566928" y="6473952"/>
+            <a:ext cx="7315200" cy="274320"/>
+          </a:xfrm>
+          <a:prstGeom prst="rect">
+            <a:avLst/>
+          </a:prstGeom>
+          <a:noFill/>
+          <a:ln/>
+        </p:spPr>
+        <p:txBody>
+          <a:bodyPr wrap="square" lIns="0" tIns="0" rIns="0" bIns="0" rtlCol="0" anchor="ctr"/>
+          <a:lstStyle/>
+          <a:p>
+            <a:pPr algn="l" indent="0" marL="0">
+              <a:buNone/>
+            </a:pPr>
+            <a:r>
+              <a:rPr lang="en-US" sz="900" dirty="0">
+                <a:solidFill>
+                  <a:srgbClr val="AEC0DA"/>
+                </a:solidFill>
+                <a:latin typeface="Calibri" pitchFamily="34" charset="0"/>
+                <a:ea typeface="Calibri" pitchFamily="34" charset="-122"/>
+                <a:cs typeface="Calibri" pitchFamily="34" charset="-120"/>
+              </a:rPr>
               <a:t>GESTIÓN INTEGRAL DE RIESGOS  ·  COMEDICA DE R.L.</a:t>
             </a:r>
             <a:endParaRPr lang="en-US" sz="900" dirty="0"/>
@@ -16933,7 +17861,7 @@
       </p:sp>
       <p:sp>
         <p:nvSpPr>
-          <p:cNvPr id="12" name="Text 7"/>
+          <p:cNvPr id="23" name="Text 15"/>
           <p:cNvSpPr txBox="1"/>
           <p:nvPr/>
         </p:nvSpPr>
@@ -17029,7 +17957,7 @@
             <a:r>
               <a:rPr lang="en-US" sz="1300" b="1" spc="200" kern="0" dirty="0">
                 <a:solidFill>
-                  <a:srgbClr val="E3A73B"/>
+                  <a:srgbClr val="2E5EAA"/>
                 </a:solidFill>
                 <a:latin typeface="Calibri" pitchFamily="34" charset="0"/>
                 <a:ea typeface="Calibri" pitchFamily="34" charset="-122"/>
@@ -17098,7 +18026,7 @@
             <a:avLst/>
           </a:prstGeom>
           <a:solidFill>
-            <a:srgbClr val="133B6C"/>
+            <a:srgbClr val="2E5EAA"/>
           </a:solidFill>
           <a:ln/>
         </p:spPr>
@@ -17208,7 +18136,7 @@
             <a:avLst/>
           </a:prstGeom>
           <a:solidFill>
-            <a:srgbClr val="133B6C"/>
+            <a:srgbClr val="2E5EAA"/>
           </a:solidFill>
           <a:ln/>
         </p:spPr>
@@ -17318,7 +18246,7 @@
             <a:avLst/>
           </a:prstGeom>
           <a:solidFill>
-            <a:srgbClr val="133B6C"/>
+            <a:srgbClr val="2E5EAA"/>
           </a:solidFill>
           <a:ln/>
         </p:spPr>
@@ -17428,7 +18356,7 @@
             <a:avLst/>
           </a:prstGeom>
           <a:solidFill>
-            <a:srgbClr val="133B6C"/>
+            <a:srgbClr val="2E5EAA"/>
           </a:solidFill>
           <a:ln/>
         </p:spPr>
@@ -17538,7 +18466,7 @@
             <a:avLst/>
           </a:prstGeom>
           <a:solidFill>
-            <a:srgbClr val="133B6C"/>
+            <a:srgbClr val="2E5EAA"/>
           </a:solidFill>
           <a:ln/>
         </p:spPr>
@@ -17648,7 +18576,7 @@
             <a:avLst/>
           </a:prstGeom>
           <a:solidFill>
-            <a:srgbClr val="133B6C"/>
+            <a:srgbClr val="2E5EAA"/>
           </a:solidFill>
           <a:ln/>
         </p:spPr>
@@ -17758,7 +18686,7 @@
             <a:avLst/>
           </a:prstGeom>
           <a:solidFill>
-            <a:srgbClr val="133B6C"/>
+            <a:srgbClr val="2E5EAA"/>
           </a:solidFill>
           <a:ln/>
         </p:spPr>
@@ -17868,7 +18796,7 @@
             <a:avLst/>
           </a:prstGeom>
           <a:solidFill>
-            <a:srgbClr val="133B6C"/>
+            <a:srgbClr val="2E5EAA"/>
           </a:solidFill>
           <a:ln/>
         </p:spPr>
@@ -17966,7 +18894,7 @@
             <a:r>
               <a:rPr lang="en-US" sz="900" dirty="0">
                 <a:solidFill>
-                  <a:srgbClr val="8FA0B5"/>
+                  <a:srgbClr val="5B6B82"/>
                 </a:solidFill>
                 <a:latin typeface="Calibri" pitchFamily="34" charset="0"/>
                 <a:ea typeface="Calibri" pitchFamily="34" charset="-122"/>
@@ -18005,7 +18933,7 @@
             <a:r>
               <a:rPr lang="en-US" sz="900" dirty="0">
                 <a:solidFill>
-                  <a:srgbClr val="8FA0B5"/>
+                  <a:srgbClr val="5B6B82"/>
                 </a:solidFill>
                 <a:latin typeface="Calibri" pitchFamily="34" charset="0"/>
                 <a:ea typeface="Calibri" pitchFamily="34" charset="-122"/>
@@ -18096,7 +19024,7 @@
             <a:r>
               <a:rPr lang="en-US" sz="1400" b="1" spc="300" kern="0" dirty="0">
                 <a:solidFill>
-                  <a:srgbClr val="E3A73B"/>
+                  <a:srgbClr val="2E5EAA"/>
                 </a:solidFill>
                 <a:latin typeface="Calibri" pitchFamily="34" charset="0"/>
                 <a:ea typeface="Calibri" pitchFamily="34" charset="-122"/>
@@ -18138,7 +19066,7 @@
             <a:r>
               <a:rPr lang="en-US" sz="4400" b="1" dirty="0">
                 <a:solidFill>
-                  <a:srgbClr val="E3A73B"/>
+                  <a:srgbClr val="F0AD35"/>
                 </a:solidFill>
                 <a:latin typeface="Cambria" pitchFamily="34" charset="0"/>
                 <a:ea typeface="Cambria" pitchFamily="34" charset="-122"/>
@@ -18326,7 +19254,7 @@
             <a:r>
               <a:rPr lang="en-US" sz="1300" b="1" spc="200" kern="0" dirty="0">
                 <a:solidFill>
-                  <a:srgbClr val="E3A73B"/>
+                  <a:srgbClr val="2E5EAA"/>
                 </a:solidFill>
                 <a:latin typeface="Calibri" pitchFamily="34" charset="0"/>
                 <a:ea typeface="Calibri" pitchFamily="34" charset="-122"/>
@@ -18456,7 +19384,7 @@
             <a:avLst/>
           </a:prstGeom>
           <a:solidFill>
-            <a:srgbClr val="133B6C"/>
+            <a:srgbClr val="2E5EAA"/>
           </a:solidFill>
           <a:ln/>
         </p:spPr>
@@ -18606,7 +19534,7 @@
             <a:avLst/>
           </a:prstGeom>
           <a:solidFill>
-            <a:srgbClr val="133B6C"/>
+            <a:srgbClr val="2E5EAA"/>
           </a:solidFill>
           <a:ln/>
         </p:spPr>
@@ -18756,7 +19684,7 @@
             <a:avLst/>
           </a:prstGeom>
           <a:solidFill>
-            <a:srgbClr val="133B6C"/>
+            <a:srgbClr val="2E5EAA"/>
           </a:solidFill>
           <a:ln/>
         </p:spPr>
@@ -18896,7 +19824,7 @@
             <a:r>
               <a:rPr lang="en-US" sz="900" dirty="0">
                 <a:solidFill>
-                  <a:srgbClr val="8FA0B5"/>
+                  <a:srgbClr val="5B6B82"/>
                 </a:solidFill>
                 <a:latin typeface="Calibri" pitchFamily="34" charset="0"/>
                 <a:ea typeface="Calibri" pitchFamily="34" charset="-122"/>
@@ -18935,7 +19863,7 @@
             <a:r>
               <a:rPr lang="en-US" sz="900" dirty="0">
                 <a:solidFill>
-                  <a:srgbClr val="8FA0B5"/>
+                  <a:srgbClr val="5B6B82"/>
                 </a:solidFill>
                 <a:latin typeface="Calibri" pitchFamily="34" charset="0"/>
                 <a:ea typeface="Calibri" pitchFamily="34" charset="-122"/>
@@ -18986,9 +19914,49 @@
           <p:nvPr/>
         </p:nvSpPr>
         <p:spPr>
-          <a:xfrm>
-            <a:off x="-2926080" y="2926080"/>
-            <a:ext cx="7772400" cy="7772400"/>
+          <a:xfrm rot="720000">
+            <a:off x="7955280" y="-457200"/>
+            <a:ext cx="5669280" cy="7772400"/>
+          </a:xfrm>
+          <a:prstGeom prst="rect">
+            <a:avLst/>
+          </a:prstGeom>
+          <a:solidFill>
+            <a:srgbClr val="2FAE60"/>
+          </a:solidFill>
+          <a:ln/>
+        </p:spPr>
+      </p:sp>
+      <p:sp>
+        <p:nvSpPr>
+          <p:cNvPr id="4" name="Shape 1"/>
+          <p:cNvSpPr/>
+          <p:nvPr/>
+        </p:nvSpPr>
+        <p:spPr>
+          <a:xfrm>
+            <a:off x="0" y="0"/>
+            <a:ext cx="8275320" cy="6858000"/>
+          </a:xfrm>
+          <a:prstGeom prst="rect">
+            <a:avLst/>
+          </a:prstGeom>
+          <a:solidFill>
+            <a:srgbClr val="0A1F3B"/>
+          </a:solidFill>
+          <a:ln/>
+        </p:spPr>
+      </p:sp>
+      <p:sp>
+        <p:nvSpPr>
+          <p:cNvPr id="5" name="Shape 2"/>
+          <p:cNvSpPr/>
+          <p:nvPr/>
+        </p:nvSpPr>
+        <p:spPr>
+          <a:xfrm>
+            <a:off x="-3108960" y="3291840"/>
+            <a:ext cx="7498080" cy="7498080"/>
           </a:xfrm>
           <a:prstGeom prst="ellipse">
             <a:avLst/>
@@ -19001,14 +19969,14 @@
       </p:sp>
       <p:sp>
         <p:nvSpPr>
-          <p:cNvPr id="4" name="Text 1"/>
-          <p:cNvSpPr txBox="1"/>
-          <p:nvPr/>
-        </p:nvSpPr>
-        <p:spPr>
-          <a:xfrm>
-            <a:off x="7498080" y="-777240"/>
-            <a:ext cx="5120640" cy="3840480"/>
+          <p:cNvPr id="6" name="Text 3"/>
+          <p:cNvSpPr txBox="1"/>
+          <p:nvPr/>
+        </p:nvSpPr>
+        <p:spPr>
+          <a:xfrm>
+            <a:off x="-274320" y="-914400"/>
+            <a:ext cx="5852160" cy="4023360"/>
           </a:xfrm>
           <a:prstGeom prst="rect">
             <a:avLst/>
@@ -19020,13 +19988,13 @@
           <a:bodyPr wrap="square" lIns="0" tIns="0" rIns="0" bIns="0" rtlCol="0" anchor="ctr"/>
           <a:lstStyle/>
           <a:p>
-            <a:pPr algn="r" indent="0" marL="0">
+            <a:pPr algn="l" indent="0" marL="0">
               <a:buNone/>
             </a:pPr>
             <a:r>
               <a:rPr lang="en-US" sz="26000" b="1" dirty="0">
                 <a:solidFill>
-                  <a:srgbClr val="15294A"/>
+                  <a:srgbClr val="133B6C"/>
                 </a:solidFill>
                 <a:latin typeface="Cambria" pitchFamily="34" charset="0"/>
                 <a:ea typeface="Cambria" pitchFamily="34" charset="-122"/>
@@ -19040,27 +20008,87 @@
       </p:sp>
       <p:sp>
         <p:nvSpPr>
-          <p:cNvPr id="5" name="Shape 2"/>
-          <p:cNvSpPr/>
-          <p:nvPr/>
-        </p:nvSpPr>
-        <p:spPr>
-          <a:xfrm>
-            <a:off x="566928" y="1828800"/>
-            <a:ext cx="1188720" cy="1188720"/>
+          <p:cNvPr id="7" name="Shape 4"/>
+          <p:cNvSpPr/>
+          <p:nvPr/>
+        </p:nvSpPr>
+        <p:spPr>
+          <a:xfrm>
+            <a:off x="8686800" y="2011680"/>
+            <a:ext cx="2834640" cy="2834640"/>
           </a:xfrm>
           <a:prstGeom prst="ellipse">
             <a:avLst/>
           </a:prstGeom>
           <a:solidFill>
-            <a:srgbClr val="E3A73B"/>
+            <a:srgbClr val="0A1F3B"/>
+          </a:solidFill>
+          <a:ln/>
+        </p:spPr>
+      </p:sp>
+      <p:sp>
+        <p:nvSpPr>
+          <p:cNvPr id="8" name="Shape 5"/>
+          <p:cNvSpPr/>
+          <p:nvPr/>
+        </p:nvSpPr>
+        <p:spPr>
+          <a:xfrm>
+            <a:off x="9784080" y="3931920"/>
+            <a:ext cx="1371600" cy="1371600"/>
+          </a:xfrm>
+          <a:prstGeom prst="ellipse">
+            <a:avLst/>
+          </a:prstGeom>
+          <a:solidFill>
+            <a:srgbClr val="FFFFFF"/>
+          </a:solidFill>
+          <a:ln/>
+        </p:spPr>
+      </p:sp>
+      <p:sp>
+        <p:nvSpPr>
+          <p:cNvPr id="9" name="Shape 6"/>
+          <p:cNvSpPr/>
+          <p:nvPr/>
+        </p:nvSpPr>
+        <p:spPr>
+          <a:xfrm>
+            <a:off x="10698480" y="2011680"/>
+            <a:ext cx="960120" cy="960120"/>
+          </a:xfrm>
+          <a:prstGeom prst="ellipse">
+            <a:avLst/>
+          </a:prstGeom>
+          <a:solidFill>
+            <a:srgbClr val="0D2847"/>
+          </a:solidFill>
+          <a:ln/>
+        </p:spPr>
+      </p:sp>
+      <p:sp>
+        <p:nvSpPr>
+          <p:cNvPr id="10" name="Shape 7"/>
+          <p:cNvSpPr/>
+          <p:nvPr/>
+        </p:nvSpPr>
+        <p:spPr>
+          <a:xfrm>
+            <a:off x="9075420" y="2217420"/>
+            <a:ext cx="1051560" cy="1051560"/>
+          </a:xfrm>
+          <a:prstGeom prst="ellipse">
+            <a:avLst/>
+          </a:prstGeom>
+          <a:solidFill>
+            <a:srgbClr val="FFFFFF"/>
           </a:solidFill>
           <a:ln/>
         </p:spPr>
       </p:sp>
       <p:pic>
         <p:nvPicPr>
-          <p:cNvPr id="6" name="Image 0" descr="/tmp/claude-0/-home-user-riesgo/0ff9ff46-1396-5bd8-b3ac-2280dfbbbc55/scratchpad/work/gen/icons/handshake_navy.png">    </p:cNvPr>
+          <p:cNvPr id="11" name="Image 0" descr="/tmp/claude-0/-home-user-riesgo/0ff9ff46-1396-5bd8-b3ac-2280dfbbbc55/scratchpad/work/gen/icons/handshake_green.png">    </p:cNvPr>
           <p:cNvPicPr>
             <a:picLocks noChangeAspect="1"/>
           </p:cNvPicPr>
@@ -19074,8 +20102,8 @@
         </p:blipFill>
         <p:spPr>
           <a:xfrm>
-            <a:off x="852221" y="2114093"/>
-            <a:ext cx="618134" cy="618134"/>
+            <a:off x="9338310" y="2480310"/>
+            <a:ext cx="525780" cy="525780"/>
           </a:xfrm>
           <a:prstGeom prst="rect">
             <a:avLst/>
@@ -19084,150 +20112,27 @@
       </p:pic>
       <p:sp>
         <p:nvSpPr>
-          <p:cNvPr id="7" name="Text 3"/>
-          <p:cNvSpPr txBox="1"/>
-          <p:nvPr/>
-        </p:nvSpPr>
-        <p:spPr>
-          <a:xfrm>
-            <a:off x="566928" y="2880360"/>
-            <a:ext cx="9601200" cy="365760"/>
-          </a:xfrm>
-          <a:prstGeom prst="rect">
-            <a:avLst/>
-          </a:prstGeom>
-          <a:noFill/>
-          <a:ln/>
-        </p:spPr>
-        <p:txBody>
-          <a:bodyPr wrap="square" lIns="0" tIns="0" rIns="0" bIns="0" rtlCol="0" anchor="ctr"/>
-          <a:lstStyle/>
-          <a:p>
-            <a:pPr indent="0" marL="0">
-              <a:buNone/>
-            </a:pPr>
-            <a:r>
-              <a:rPr lang="en-US" sz="1500" b="1" spc="300" kern="0" dirty="0">
-                <a:solidFill>
-                  <a:srgbClr val="E3A73B"/>
-                </a:solidFill>
-                <a:latin typeface="Calibri" pitchFamily="34" charset="0"/>
-                <a:ea typeface="Calibri" pitchFamily="34" charset="-122"/>
-                <a:cs typeface="Calibri" pitchFamily="34" charset="-120"/>
-              </a:rPr>
-              <a:t>TEMA 7</a:t>
-            </a:r>
-            <a:endParaRPr lang="en-US" sz="1500" dirty="0"/>
-          </a:p>
-        </p:txBody>
-      </p:sp>
-      <p:sp>
-        <p:nvSpPr>
-          <p:cNvPr id="8" name="Text 4"/>
-          <p:cNvSpPr txBox="1"/>
-          <p:nvPr/>
-        </p:nvSpPr>
-        <p:spPr>
-          <a:xfrm>
-            <a:off x="566928" y="3246120"/>
-            <a:ext cx="10424160" cy="1554480"/>
-          </a:xfrm>
-          <a:prstGeom prst="rect">
-            <a:avLst/>
-          </a:prstGeom>
-          <a:noFill/>
-          <a:ln/>
-        </p:spPr>
-        <p:txBody>
-          <a:bodyPr wrap="square" lIns="0" tIns="0" rIns="0" bIns="0" rtlCol="0" anchor="ctr"/>
-          <a:lstStyle/>
-          <a:p>
-            <a:pPr indent="0" marL="0">
-              <a:lnSpc>
-                <a:spcPct val="105000"/>
-              </a:lnSpc>
-              <a:buNone/>
-            </a:pPr>
-            <a:r>
-              <a:rPr lang="en-US" sz="3400" b="1" dirty="0">
-                <a:solidFill>
-                  <a:srgbClr val="FFFFFF"/>
-                </a:solidFill>
-                <a:latin typeface="Cambria" pitchFamily="34" charset="0"/>
-                <a:ea typeface="Cambria" pitchFamily="34" charset="-122"/>
-                <a:cs typeface="Cambria" pitchFamily="34" charset="-120"/>
-              </a:rPr>
-              <a:t>¿QUIÉN ES RESPONSABLE DE</a:t>
-            </a:r>
-            <a:endParaRPr lang="en-US" sz="3400" dirty="0"/>
-          </a:p>
-          <a:p>
-            <a:pPr indent="0" marL="0">
-              <a:lnSpc>
-                <a:spcPct val="105000"/>
-              </a:lnSpc>
-              <a:buNone/>
-            </a:pPr>
-            <a:r>
-              <a:rPr lang="en-US" sz="3400" b="1" dirty="0">
-                <a:solidFill>
-                  <a:srgbClr val="FFFFFF"/>
-                </a:solidFill>
-                <a:latin typeface="Cambria" pitchFamily="34" charset="0"/>
-                <a:ea typeface="Cambria" pitchFamily="34" charset="-122"/>
-                <a:cs typeface="Cambria" pitchFamily="34" charset="-120"/>
-              </a:rPr>
-              <a:t>GESTIONAR LOS RIESGOS?</a:t>
-            </a:r>
-            <a:endParaRPr lang="en-US" sz="3400" dirty="0"/>
-          </a:p>
-        </p:txBody>
-      </p:sp>
-      <p:sp>
-        <p:nvSpPr>
-          <p:cNvPr id="9" name="Text 5"/>
-          <p:cNvSpPr txBox="1"/>
-          <p:nvPr/>
-        </p:nvSpPr>
-        <p:spPr>
-          <a:xfrm>
-            <a:off x="566928" y="4663440"/>
-            <a:ext cx="9692640" cy="822960"/>
-          </a:xfrm>
-          <a:prstGeom prst="rect">
-            <a:avLst/>
-          </a:prstGeom>
-          <a:noFill/>
-          <a:ln/>
-        </p:spPr>
-        <p:txBody>
-          <a:bodyPr wrap="square" lIns="0" tIns="0" rIns="0" bIns="0" rtlCol="0" anchor="ctr"/>
-          <a:lstStyle/>
-          <a:p>
-            <a:pPr indent="0" marL="0">
-              <a:lnSpc>
-                <a:spcPct val="115000"/>
-              </a:lnSpc>
-              <a:buNone/>
-            </a:pPr>
-            <a:r>
-              <a:rPr lang="en-US" sz="1600" i="1" dirty="0">
-                <a:solidFill>
-                  <a:srgbClr val="C7D3E5"/>
-                </a:solidFill>
-                <a:latin typeface="Calibri" pitchFamily="34" charset="0"/>
-                <a:ea typeface="Calibri" pitchFamily="34" charset="-122"/>
-                <a:cs typeface="Calibri" pitchFamily="34" charset="-120"/>
-              </a:rPr>
-              <a:t>Gestionar riesgos es parte de nuestro trabajo.</a:t>
-            </a:r>
-            <a:endParaRPr lang="en-US" sz="1600" dirty="0"/>
-          </a:p>
-        </p:txBody>
+          <p:cNvPr id="12" name="Shape 8"/>
+          <p:cNvSpPr/>
+          <p:nvPr/>
+        </p:nvSpPr>
+        <p:spPr>
+          <a:xfrm>
+            <a:off x="10447020" y="2948940"/>
+            <a:ext cx="868680" cy="868680"/>
+          </a:xfrm>
+          <a:prstGeom prst="ellipse">
+            <a:avLst/>
+          </a:prstGeom>
+          <a:solidFill>
+            <a:srgbClr val="0A1F3B"/>
+          </a:solidFill>
+          <a:ln/>
+        </p:spPr>
       </p:sp>
       <p:pic>
         <p:nvPicPr>
-          <p:cNvPr id="10" name="Image 1" descr="/tmp/claude-0/-home-user-riesgo/0ff9ff46-1396-5bd8-b3ac-2280dfbbbc55/scratchpad/work/gen/logo_white.png">    </p:cNvPr>
+          <p:cNvPr id="13" name="Image 1" descr="/tmp/claude-0/-home-user-riesgo/0ff9ff46-1396-5bd8-b3ac-2280dfbbbc55/scratchpad/work/gen/icons/people_group_white.png">    </p:cNvPr>
           <p:cNvPicPr>
             <a:picLocks noChangeAspect="1"/>
           </p:cNvPicPr>
@@ -19241,8 +20146,8 @@
         </p:blipFill>
         <p:spPr>
           <a:xfrm>
-            <a:off x="10161727" y="5961888"/>
-            <a:ext cx="1463040" cy="411114"/>
+            <a:off x="10664190" y="3166110"/>
+            <a:ext cx="434340" cy="434340"/>
           </a:xfrm>
           <a:prstGeom prst="rect">
             <a:avLst/>
@@ -19251,14 +20156,102 @@
       </p:pic>
       <p:sp>
         <p:nvSpPr>
-          <p:cNvPr id="11" name="Text 6"/>
-          <p:cNvSpPr txBox="1"/>
-          <p:nvPr/>
-        </p:nvSpPr>
-        <p:spPr>
-          <a:xfrm>
-            <a:off x="566928" y="6473952"/>
-            <a:ext cx="7315200" cy="274320"/>
+          <p:cNvPr id="14" name="Shape 9"/>
+          <p:cNvSpPr/>
+          <p:nvPr/>
+        </p:nvSpPr>
+        <p:spPr>
+          <a:xfrm>
+            <a:off x="9578340" y="3909060"/>
+            <a:ext cx="777240" cy="777240"/>
+          </a:xfrm>
+          <a:prstGeom prst="ellipse">
+            <a:avLst/>
+          </a:prstGeom>
+          <a:solidFill>
+            <a:srgbClr val="FFFFFF"/>
+          </a:solidFill>
+          <a:ln/>
+        </p:spPr>
+      </p:sp>
+      <p:pic>
+        <p:nvPicPr>
+          <p:cNvPr id="15" name="Image 2" descr="/tmp/claude-0/-home-user-riesgo/0ff9ff46-1396-5bd8-b3ac-2280dfbbbc55/scratchpad/work/gen/icons/briefcase_navy.png">    </p:cNvPr>
+          <p:cNvPicPr>
+            <a:picLocks noChangeAspect="1"/>
+          </p:cNvPicPr>
+          <p:nvPr/>
+        </p:nvPicPr>
+        <p:blipFill>
+          <a:blip r:embed="rId3"/>
+          <a:stretch>
+            <a:fillRect/>
+          </a:stretch>
+        </p:blipFill>
+        <p:spPr>
+          <a:xfrm>
+            <a:off x="9772650" y="4103370"/>
+            <a:ext cx="388620" cy="388620"/>
+          </a:xfrm>
+          <a:prstGeom prst="rect">
+            <a:avLst/>
+          </a:prstGeom>
+        </p:spPr>
+      </p:pic>
+      <p:sp>
+        <p:nvSpPr>
+          <p:cNvPr id="16" name="Shape 10"/>
+          <p:cNvSpPr/>
+          <p:nvPr/>
+        </p:nvSpPr>
+        <p:spPr>
+          <a:xfrm>
+            <a:off x="10689336" y="4105656"/>
+            <a:ext cx="658368" cy="658368"/>
+          </a:xfrm>
+          <a:prstGeom prst="ellipse">
+            <a:avLst/>
+          </a:prstGeom>
+          <a:solidFill>
+            <a:srgbClr val="0A1F3B"/>
+          </a:solidFill>
+          <a:ln/>
+        </p:spPr>
+      </p:sp>
+      <p:pic>
+        <p:nvPicPr>
+          <p:cNvPr id="17" name="Image 3" descr="/tmp/claude-0/-home-user-riesgo/0ff9ff46-1396-5bd8-b3ac-2280dfbbbc55/scratchpad/work/gen/icons/shield_check_green.png">    </p:cNvPr>
+          <p:cNvPicPr>
+            <a:picLocks noChangeAspect="1"/>
+          </p:cNvPicPr>
+          <p:nvPr/>
+        </p:nvPicPr>
+        <p:blipFill>
+          <a:blip r:embed="rId4"/>
+          <a:stretch>
+            <a:fillRect/>
+          </a:stretch>
+        </p:blipFill>
+        <p:spPr>
+          <a:xfrm>
+            <a:off x="10853928" y="4270248"/>
+            <a:ext cx="329184" cy="329184"/>
+          </a:xfrm>
+          <a:prstGeom prst="rect">
+            <a:avLst/>
+          </a:prstGeom>
+        </p:spPr>
+      </p:pic>
+      <p:sp>
+        <p:nvSpPr>
+          <p:cNvPr id="18" name="Text 11"/>
+          <p:cNvSpPr txBox="1"/>
+          <p:nvPr/>
+        </p:nvSpPr>
+        <p:spPr>
+          <a:xfrm>
+            <a:off x="566928" y="2423160"/>
+            <a:ext cx="7315200" cy="365760"/>
           </a:xfrm>
           <a:prstGeom prst="rect">
             <a:avLst/>
@@ -19270,18 +20263,185 @@
           <a:bodyPr wrap="square" lIns="0" tIns="0" rIns="0" bIns="0" rtlCol="0" anchor="ctr"/>
           <a:lstStyle/>
           <a:p>
-            <a:pPr algn="l" indent="0" marL="0">
-              <a:buNone/>
-            </a:pPr>
-            <a:r>
-              <a:rPr lang="en-US" sz="900" dirty="0">
-                <a:solidFill>
-                  <a:srgbClr val="AEC0DA"/>
+            <a:pPr indent="0" marL="0">
+              <a:buNone/>
+            </a:pPr>
+            <a:r>
+              <a:rPr lang="en-US" sz="1500" b="1" spc="300" kern="0" dirty="0">
+                <a:solidFill>
+                  <a:srgbClr val="2FAE60"/>
                 </a:solidFill>
                 <a:latin typeface="Calibri" pitchFamily="34" charset="0"/>
                 <a:ea typeface="Calibri" pitchFamily="34" charset="-122"/>
                 <a:cs typeface="Calibri" pitchFamily="34" charset="-120"/>
               </a:rPr>
+              <a:t>TEMA 7</a:t>
+            </a:r>
+            <a:endParaRPr lang="en-US" sz="1500" dirty="0"/>
+          </a:p>
+        </p:txBody>
+      </p:sp>
+      <p:sp>
+        <p:nvSpPr>
+          <p:cNvPr id="19" name="Text 12"/>
+          <p:cNvSpPr txBox="1"/>
+          <p:nvPr/>
+        </p:nvSpPr>
+        <p:spPr>
+          <a:xfrm>
+            <a:off x="566928" y="2788920"/>
+            <a:ext cx="7406640" cy="1554480"/>
+          </a:xfrm>
+          <a:prstGeom prst="rect">
+            <a:avLst/>
+          </a:prstGeom>
+          <a:noFill/>
+          <a:ln/>
+        </p:spPr>
+        <p:txBody>
+          <a:bodyPr wrap="square" lIns="0" tIns="0" rIns="0" bIns="0" rtlCol="0" anchor="ctr"/>
+          <a:lstStyle/>
+          <a:p>
+            <a:pPr indent="0" marL="0">
+              <a:lnSpc>
+                <a:spcPct val="105000"/>
+              </a:lnSpc>
+              <a:buNone/>
+            </a:pPr>
+            <a:r>
+              <a:rPr lang="en-US" sz="3200" b="1" dirty="0">
+                <a:solidFill>
+                  <a:srgbClr val="FFFFFF"/>
+                </a:solidFill>
+                <a:latin typeface="Cambria" pitchFamily="34" charset="0"/>
+                <a:ea typeface="Cambria" pitchFamily="34" charset="-122"/>
+                <a:cs typeface="Cambria" pitchFamily="34" charset="-120"/>
+              </a:rPr>
+              <a:t>¿QUIÉN ES RESPONSABLE DE</a:t>
+            </a:r>
+            <a:endParaRPr lang="en-US" sz="3200" dirty="0"/>
+          </a:p>
+          <a:p>
+            <a:pPr indent="0" marL="0">
+              <a:lnSpc>
+                <a:spcPct val="105000"/>
+              </a:lnSpc>
+              <a:buNone/>
+            </a:pPr>
+            <a:r>
+              <a:rPr lang="en-US" sz="3200" b="1" dirty="0">
+                <a:solidFill>
+                  <a:srgbClr val="FFFFFF"/>
+                </a:solidFill>
+                <a:latin typeface="Cambria" pitchFamily="34" charset="0"/>
+                <a:ea typeface="Cambria" pitchFamily="34" charset="-122"/>
+                <a:cs typeface="Cambria" pitchFamily="34" charset="-120"/>
+              </a:rPr>
+              <a:t>GESTIONAR LOS RIESGOS?</a:t>
+            </a:r>
+            <a:endParaRPr lang="en-US" sz="3200" dirty="0"/>
+          </a:p>
+        </p:txBody>
+      </p:sp>
+      <p:sp>
+        <p:nvSpPr>
+          <p:cNvPr id="20" name="Text 13"/>
+          <p:cNvSpPr txBox="1"/>
+          <p:nvPr/>
+        </p:nvSpPr>
+        <p:spPr>
+          <a:xfrm>
+            <a:off x="566928" y="4206240"/>
+            <a:ext cx="7223760" cy="822960"/>
+          </a:xfrm>
+          <a:prstGeom prst="rect">
+            <a:avLst/>
+          </a:prstGeom>
+          <a:noFill/>
+          <a:ln/>
+        </p:spPr>
+        <p:txBody>
+          <a:bodyPr wrap="square" lIns="0" tIns="0" rIns="0" bIns="0" rtlCol="0" anchor="ctr"/>
+          <a:lstStyle/>
+          <a:p>
+            <a:pPr indent="0" marL="0">
+              <a:lnSpc>
+                <a:spcPct val="118000"/>
+              </a:lnSpc>
+              <a:buNone/>
+            </a:pPr>
+            <a:r>
+              <a:rPr lang="en-US" sz="1550" i="1" dirty="0">
+                <a:solidFill>
+                  <a:srgbClr val="D7E1F0"/>
+                </a:solidFill>
+                <a:latin typeface="Calibri" pitchFamily="34" charset="0"/>
+                <a:ea typeface="Calibri" pitchFamily="34" charset="-122"/>
+                <a:cs typeface="Calibri" pitchFamily="34" charset="-120"/>
+              </a:rPr>
+              <a:t>Gestionar riesgos es parte de nuestro trabajo.</a:t>
+            </a:r>
+            <a:endParaRPr lang="en-US" sz="1550" dirty="0"/>
+          </a:p>
+        </p:txBody>
+      </p:sp>
+      <p:pic>
+        <p:nvPicPr>
+          <p:cNvPr id="21" name="Image 4" descr="/tmp/claude-0/-home-user-riesgo/0ff9ff46-1396-5bd8-b3ac-2280dfbbbc55/scratchpad/work/gen/logo_white.png">    </p:cNvPr>
+          <p:cNvPicPr>
+            <a:picLocks noChangeAspect="1"/>
+          </p:cNvPicPr>
+          <p:nvPr/>
+        </p:nvPicPr>
+        <p:blipFill>
+          <a:blip r:embed="rId5"/>
+          <a:stretch>
+            <a:fillRect/>
+          </a:stretch>
+        </p:blipFill>
+        <p:spPr>
+          <a:xfrm>
+            <a:off x="566928" y="5989320"/>
+            <a:ext cx="1417320" cy="398267"/>
+          </a:xfrm>
+          <a:prstGeom prst="rect">
+            <a:avLst/>
+          </a:prstGeom>
+        </p:spPr>
+      </p:pic>
+      <p:sp>
+        <p:nvSpPr>
+          <p:cNvPr id="22" name="Text 14"/>
+          <p:cNvSpPr txBox="1"/>
+          <p:nvPr/>
+        </p:nvSpPr>
+        <p:spPr>
+          <a:xfrm>
+            <a:off x="566928" y="6473952"/>
+            <a:ext cx="7315200" cy="274320"/>
+          </a:xfrm>
+          <a:prstGeom prst="rect">
+            <a:avLst/>
+          </a:prstGeom>
+          <a:noFill/>
+          <a:ln/>
+        </p:spPr>
+        <p:txBody>
+          <a:bodyPr wrap="square" lIns="0" tIns="0" rIns="0" bIns="0" rtlCol="0" anchor="ctr"/>
+          <a:lstStyle/>
+          <a:p>
+            <a:pPr algn="l" indent="0" marL="0">
+              <a:buNone/>
+            </a:pPr>
+            <a:r>
+              <a:rPr lang="en-US" sz="900" dirty="0">
+                <a:solidFill>
+                  <a:srgbClr val="AEC0DA"/>
+                </a:solidFill>
+                <a:latin typeface="Calibri" pitchFamily="34" charset="0"/>
+                <a:ea typeface="Calibri" pitchFamily="34" charset="-122"/>
+                <a:cs typeface="Calibri" pitchFamily="34" charset="-120"/>
+              </a:rPr>
               <a:t>GESTIÓN INTEGRAL DE RIESGOS  ·  COMEDICA DE R.L.</a:t>
             </a:r>
             <a:endParaRPr lang="en-US" sz="900" dirty="0"/>
@@ -19290,7 +20450,7 @@
       </p:sp>
       <p:sp>
         <p:nvSpPr>
-          <p:cNvPr id="12" name="Text 7"/>
+          <p:cNvPr id="23" name="Text 15"/>
           <p:cNvSpPr txBox="1"/>
           <p:nvPr/>
         </p:nvSpPr>
@@ -19386,7 +20546,7 @@
             <a:r>
               <a:rPr lang="en-US" sz="1300" b="1" spc="200" kern="0" dirty="0">
                 <a:solidFill>
-                  <a:srgbClr val="E3A73B"/>
+                  <a:srgbClr val="F0AD35"/>
                 </a:solidFill>
                 <a:latin typeface="Calibri" pitchFamily="34" charset="0"/>
                 <a:ea typeface="Calibri" pitchFamily="34" charset="-122"/>
@@ -19516,14 +20676,14 @@
             <a:avLst/>
           </a:prstGeom>
           <a:solidFill>
-            <a:srgbClr val="FFFFFF"/>
+            <a:srgbClr val="133B6C"/>
           </a:solidFill>
           <a:ln/>
         </p:spPr>
       </p:sp>
       <p:pic>
         <p:nvPicPr>
-          <p:cNvPr id="8" name="Image 0" descr="/tmp/claude-0/-home-user-riesgo/0ff9ff46-1396-5bd8-b3ac-2280dfbbbc55/scratchpad/work/gen/icons/document_navy.png">    </p:cNvPr>
+          <p:cNvPr id="8" name="Image 0" descr="/tmp/claude-0/-home-user-riesgo/0ff9ff46-1396-5bd8-b3ac-2280dfbbbc55/scratchpad/work/gen/icons/document_white.png">    </p:cNvPr>
           <p:cNvPicPr>
             <a:picLocks noChangeAspect="1"/>
           </p:cNvPicPr>
@@ -19560,7 +20720,7 @@
             <a:avLst/>
           </a:prstGeom>
           <a:solidFill>
-            <a:srgbClr val="E3A73B"/>
+            <a:srgbClr val="F0AD35"/>
           </a:solidFill>
           <a:ln/>
         </p:spPr>
@@ -19619,14 +20779,14 @@
             <a:avLst/>
           </a:prstGeom>
           <a:solidFill>
-            <a:srgbClr val="FFFFFF"/>
+            <a:srgbClr val="133B6C"/>
           </a:solidFill>
           <a:ln/>
         </p:spPr>
       </p:sp>
       <p:pic>
         <p:nvPicPr>
-          <p:cNvPr id="12" name="Image 1" descr="/tmp/claude-0/-home-user-riesgo/0ff9ff46-1396-5bd8-b3ac-2280dfbbbc55/scratchpad/work/gen/icons/cable_navy.png">    </p:cNvPr>
+          <p:cNvPr id="12" name="Image 1" descr="/tmp/claude-0/-home-user-riesgo/0ff9ff46-1396-5bd8-b3ac-2280dfbbbc55/scratchpad/work/gen/icons/cable_white.png">    </p:cNvPr>
           <p:cNvPicPr>
             <a:picLocks noChangeAspect="1"/>
           </p:cNvPicPr>
@@ -19663,7 +20823,7 @@
             <a:avLst/>
           </a:prstGeom>
           <a:solidFill>
-            <a:srgbClr val="E3A73B"/>
+            <a:srgbClr val="F0AD35"/>
           </a:solidFill>
           <a:ln/>
         </p:spPr>
@@ -19722,14 +20882,14 @@
             <a:avLst/>
           </a:prstGeom>
           <a:solidFill>
-            <a:srgbClr val="FFFFFF"/>
+            <a:srgbClr val="133B6C"/>
           </a:solidFill>
           <a:ln/>
         </p:spPr>
       </p:sp>
       <p:pic>
         <p:nvPicPr>
-          <p:cNvPr id="16" name="Image 2" descr="/tmp/claude-0/-home-user-riesgo/0ff9ff46-1396-5bd8-b3ac-2280dfbbbc55/scratchpad/work/gen/icons/password_navy.png">    </p:cNvPr>
+          <p:cNvPr id="16" name="Image 2" descr="/tmp/claude-0/-home-user-riesgo/0ff9ff46-1396-5bd8-b3ac-2280dfbbbc55/scratchpad/work/gen/icons/password_white.png">    </p:cNvPr>
           <p:cNvPicPr>
             <a:picLocks noChangeAspect="1"/>
           </p:cNvPicPr>
@@ -19766,7 +20926,7 @@
             <a:avLst/>
           </a:prstGeom>
           <a:solidFill>
-            <a:srgbClr val="E3A73B"/>
+            <a:srgbClr val="F0AD35"/>
           </a:solidFill>
           <a:ln/>
         </p:spPr>
@@ -19825,14 +20985,14 @@
             <a:avLst/>
           </a:prstGeom>
           <a:solidFill>
-            <a:srgbClr val="FFFFFF"/>
+            <a:srgbClr val="133B6C"/>
           </a:solidFill>
           <a:ln/>
         </p:spPr>
       </p:sp>
       <p:pic>
         <p:nvPicPr>
-          <p:cNvPr id="20" name="Image 3" descr="/tmp/claude-0/-home-user-riesgo/0ff9ff46-1396-5bd8-b3ac-2280dfbbbc55/scratchpad/work/gen/icons/door_open_navy.png">    </p:cNvPr>
+          <p:cNvPr id="20" name="Image 3" descr="/tmp/claude-0/-home-user-riesgo/0ff9ff46-1396-5bd8-b3ac-2280dfbbbc55/scratchpad/work/gen/icons/door_open_white.png">    </p:cNvPr>
           <p:cNvPicPr>
             <a:picLocks noChangeAspect="1"/>
           </p:cNvPicPr>
@@ -19869,7 +21029,7 @@
             <a:avLst/>
           </a:prstGeom>
           <a:solidFill>
-            <a:srgbClr val="E3A73B"/>
+            <a:srgbClr val="F0AD35"/>
           </a:solidFill>
           <a:ln/>
         </p:spPr>
@@ -19928,14 +21088,14 @@
             <a:avLst/>
           </a:prstGeom>
           <a:solidFill>
-            <a:srgbClr val="FFFFFF"/>
+            <a:srgbClr val="133B6C"/>
           </a:solidFill>
           <a:ln/>
         </p:spPr>
       </p:sp>
       <p:pic>
         <p:nvPicPr>
-          <p:cNvPr id="24" name="Image 4" descr="/tmp/claude-0/-home-user-riesgo/0ff9ff46-1396-5bd8-b3ac-2280dfbbbc55/scratchpad/work/gen/icons/x_circle_navy.png">    </p:cNvPr>
+          <p:cNvPr id="24" name="Image 4" descr="/tmp/claude-0/-home-user-riesgo/0ff9ff46-1396-5bd8-b3ac-2280dfbbbc55/scratchpad/work/gen/icons/x_circle_white.png">    </p:cNvPr>
           <p:cNvPicPr>
             <a:picLocks noChangeAspect="1"/>
           </p:cNvPicPr>
@@ -19972,7 +21132,7 @@
             <a:avLst/>
           </a:prstGeom>
           <a:solidFill>
-            <a:srgbClr val="E3A73B"/>
+            <a:srgbClr val="F0AD35"/>
           </a:solidFill>
           <a:ln/>
         </p:spPr>
@@ -20031,14 +21191,14 @@
             <a:avLst/>
           </a:prstGeom>
           <a:solidFill>
-            <a:srgbClr val="FFFFFF"/>
+            <a:srgbClr val="133B6C"/>
           </a:solidFill>
           <a:ln/>
         </p:spPr>
       </p:sp>
       <p:pic>
         <p:nvPicPr>
-          <p:cNvPr id="28" name="Image 5" descr="/tmp/claude-0/-home-user-riesgo/0ff9ff46-1396-5bd8-b3ac-2280dfbbbc55/scratchpad/work/gen/icons/computer_navy.png">    </p:cNvPr>
+          <p:cNvPr id="28" name="Image 5" descr="/tmp/claude-0/-home-user-riesgo/0ff9ff46-1396-5bd8-b3ac-2280dfbbbc55/scratchpad/work/gen/icons/computer_white.png">    </p:cNvPr>
           <p:cNvPicPr>
             <a:picLocks noChangeAspect="1"/>
           </p:cNvPicPr>
@@ -20075,7 +21235,7 @@
             <a:avLst/>
           </a:prstGeom>
           <a:solidFill>
-            <a:srgbClr val="E3A73B"/>
+            <a:srgbClr val="F0AD35"/>
           </a:solidFill>
           <a:ln/>
         </p:spPr>
@@ -20134,14 +21294,14 @@
             <a:avLst/>
           </a:prstGeom>
           <a:solidFill>
-            <a:srgbClr val="FFFFFF"/>
+            <a:srgbClr val="133B6C"/>
           </a:solidFill>
           <a:ln/>
         </p:spPr>
       </p:sp>
       <p:pic>
         <p:nvPicPr>
-          <p:cNvPr id="32" name="Image 6" descr="/tmp/claude-0/-home-user-riesgo/0ff9ff46-1396-5bd8-b3ac-2280dfbbbc55/scratchpad/work/gen/icons/chat_navy.png">    </p:cNvPr>
+          <p:cNvPr id="32" name="Image 6" descr="/tmp/claude-0/-home-user-riesgo/0ff9ff46-1396-5bd8-b3ac-2280dfbbbc55/scratchpad/work/gen/icons/chat_white.png">    </p:cNvPr>
           <p:cNvPicPr>
             <a:picLocks noChangeAspect="1"/>
           </p:cNvPicPr>
@@ -20178,7 +21338,7 @@
             <a:avLst/>
           </a:prstGeom>
           <a:solidFill>
-            <a:srgbClr val="E3A73B"/>
+            <a:srgbClr val="F0AD35"/>
           </a:solidFill>
           <a:ln/>
         </p:spPr>
@@ -20237,14 +21397,14 @@
             <a:avLst/>
           </a:prstGeom>
           <a:solidFill>
-            <a:srgbClr val="FFFFFF"/>
+            <a:srgbClr val="133B6C"/>
           </a:solidFill>
           <a:ln/>
         </p:spPr>
       </p:sp>
       <p:pic>
         <p:nvPicPr>
-          <p:cNvPr id="36" name="Image 7" descr="/tmp/claude-0/-home-user-riesgo/0ff9ff46-1396-5bd8-b3ac-2280dfbbbc55/scratchpad/work/gen/icons/id_card_navy.png">    </p:cNvPr>
+          <p:cNvPr id="36" name="Image 7" descr="/tmp/claude-0/-home-user-riesgo/0ff9ff46-1396-5bd8-b3ac-2280dfbbbc55/scratchpad/work/gen/icons/id_card_white.png">    </p:cNvPr>
           <p:cNvPicPr>
             <a:picLocks noChangeAspect="1"/>
           </p:cNvPicPr>
@@ -20281,7 +21441,7 @@
             <a:avLst/>
           </a:prstGeom>
           <a:solidFill>
-            <a:srgbClr val="E3A73B"/>
+            <a:srgbClr val="F0AD35"/>
           </a:solidFill>
           <a:ln/>
         </p:spPr>
@@ -20391,7 +21551,7 @@
             <a:r>
               <a:rPr lang="en-US" sz="900" dirty="0">
                 <a:solidFill>
-                  <a:srgbClr val="8FA0B5"/>
+                  <a:srgbClr val="5B6B82"/>
                 </a:solidFill>
                 <a:latin typeface="Calibri" pitchFamily="34" charset="0"/>
                 <a:ea typeface="Calibri" pitchFamily="34" charset="-122"/>
@@ -20430,7 +21590,7 @@
             <a:r>
               <a:rPr lang="en-US" sz="900" dirty="0">
                 <a:solidFill>
-                  <a:srgbClr val="8FA0B5"/>
+                  <a:srgbClr val="5B6B82"/>
                 </a:solidFill>
                 <a:latin typeface="Calibri" pitchFamily="34" charset="0"/>
                 <a:ea typeface="Calibri" pitchFamily="34" charset="-122"/>
@@ -20501,7 +21661,7 @@
             <a:r>
               <a:rPr lang="en-US" sz="1300" b="1" spc="200" kern="0" dirty="0">
                 <a:solidFill>
-                  <a:srgbClr val="E3A73B"/>
+                  <a:srgbClr val="2FAE60"/>
                 </a:solidFill>
                 <a:latin typeface="Calibri" pitchFamily="34" charset="0"/>
                 <a:ea typeface="Calibri" pitchFamily="34" charset="-122"/>
@@ -21115,7 +22275,7 @@
             <a:avLst/>
           </a:prstGeom>
           <a:solidFill>
-            <a:srgbClr val="E3A73B"/>
+            <a:srgbClr val="2FAE60"/>
           </a:solidFill>
           <a:ln/>
           <a:effectLst>
@@ -21232,7 +22392,7 @@
             <a:r>
               <a:rPr lang="en-US" sz="900" dirty="0">
                 <a:solidFill>
-                  <a:srgbClr val="8FA0B5"/>
+                  <a:srgbClr val="5B6B82"/>
                 </a:solidFill>
                 <a:latin typeface="Calibri" pitchFamily="34" charset="0"/>
                 <a:ea typeface="Calibri" pitchFamily="34" charset="-122"/>
@@ -21271,7 +22431,7 @@
             <a:r>
               <a:rPr lang="en-US" sz="900" dirty="0">
                 <a:solidFill>
-                  <a:srgbClr val="8FA0B5"/>
+                  <a:srgbClr val="5B6B82"/>
                 </a:solidFill>
                 <a:latin typeface="Calibri" pitchFamily="34" charset="0"/>
                 <a:ea typeface="Calibri" pitchFamily="34" charset="-122"/>
@@ -21322,9 +22482,49 @@
           <p:nvPr/>
         </p:nvSpPr>
         <p:spPr>
-          <a:xfrm>
-            <a:off x="-2926080" y="2926080"/>
-            <a:ext cx="7772400" cy="7772400"/>
+          <a:xfrm rot="720000">
+            <a:off x="7955280" y="-457200"/>
+            <a:ext cx="5669280" cy="7772400"/>
+          </a:xfrm>
+          <a:prstGeom prst="rect">
+            <a:avLst/>
+          </a:prstGeom>
+          <a:solidFill>
+            <a:srgbClr val="129E82"/>
+          </a:solidFill>
+          <a:ln/>
+        </p:spPr>
+      </p:sp>
+      <p:sp>
+        <p:nvSpPr>
+          <p:cNvPr id="4" name="Shape 1"/>
+          <p:cNvSpPr/>
+          <p:nvPr/>
+        </p:nvSpPr>
+        <p:spPr>
+          <a:xfrm>
+            <a:off x="0" y="0"/>
+            <a:ext cx="8275320" cy="6858000"/>
+          </a:xfrm>
+          <a:prstGeom prst="rect">
+            <a:avLst/>
+          </a:prstGeom>
+          <a:solidFill>
+            <a:srgbClr val="0A1F3B"/>
+          </a:solidFill>
+          <a:ln/>
+        </p:spPr>
+      </p:sp>
+      <p:sp>
+        <p:nvSpPr>
+          <p:cNvPr id="5" name="Shape 2"/>
+          <p:cNvSpPr/>
+          <p:nvPr/>
+        </p:nvSpPr>
+        <p:spPr>
+          <a:xfrm>
+            <a:off x="-3108960" y="3291840"/>
+            <a:ext cx="7498080" cy="7498080"/>
           </a:xfrm>
           <a:prstGeom prst="ellipse">
             <a:avLst/>
@@ -21337,14 +22537,14 @@
       </p:sp>
       <p:sp>
         <p:nvSpPr>
-          <p:cNvPr id="4" name="Text 1"/>
-          <p:cNvSpPr txBox="1"/>
-          <p:nvPr/>
-        </p:nvSpPr>
-        <p:spPr>
-          <a:xfrm>
-            <a:off x="7498080" y="-777240"/>
-            <a:ext cx="5120640" cy="3840480"/>
+          <p:cNvPr id="6" name="Text 3"/>
+          <p:cNvSpPr txBox="1"/>
+          <p:nvPr/>
+        </p:nvSpPr>
+        <p:spPr>
+          <a:xfrm>
+            <a:off x="-274320" y="-914400"/>
+            <a:ext cx="5852160" cy="4023360"/>
           </a:xfrm>
           <a:prstGeom prst="rect">
             <a:avLst/>
@@ -21356,13 +22556,13 @@
           <a:bodyPr wrap="square" lIns="0" tIns="0" rIns="0" bIns="0" rtlCol="0" anchor="ctr"/>
           <a:lstStyle/>
           <a:p>
-            <a:pPr algn="r" indent="0" marL="0">
+            <a:pPr algn="l" indent="0" marL="0">
               <a:buNone/>
             </a:pPr>
             <a:r>
               <a:rPr lang="en-US" sz="26000" b="1" dirty="0">
                 <a:solidFill>
-                  <a:srgbClr val="15294A"/>
+                  <a:srgbClr val="133B6C"/>
                 </a:solidFill>
                 <a:latin typeface="Cambria" pitchFamily="34" charset="0"/>
                 <a:ea typeface="Cambria" pitchFamily="34" charset="-122"/>
@@ -21376,27 +22576,87 @@
       </p:sp>
       <p:sp>
         <p:nvSpPr>
-          <p:cNvPr id="5" name="Shape 2"/>
-          <p:cNvSpPr/>
-          <p:nvPr/>
-        </p:nvSpPr>
-        <p:spPr>
-          <a:xfrm>
-            <a:off x="566928" y="1828800"/>
-            <a:ext cx="1188720" cy="1188720"/>
+          <p:cNvPr id="7" name="Shape 4"/>
+          <p:cNvSpPr/>
+          <p:nvPr/>
+        </p:nvSpPr>
+        <p:spPr>
+          <a:xfrm>
+            <a:off x="8686800" y="2011680"/>
+            <a:ext cx="2834640" cy="2834640"/>
           </a:xfrm>
           <a:prstGeom prst="ellipse">
             <a:avLst/>
           </a:prstGeom>
           <a:solidFill>
-            <a:srgbClr val="E3A73B"/>
+            <a:srgbClr val="0A1F3B"/>
+          </a:solidFill>
+          <a:ln/>
+        </p:spPr>
+      </p:sp>
+      <p:sp>
+        <p:nvSpPr>
+          <p:cNvPr id="8" name="Shape 5"/>
+          <p:cNvSpPr/>
+          <p:nvPr/>
+        </p:nvSpPr>
+        <p:spPr>
+          <a:xfrm>
+            <a:off x="9784080" y="3931920"/>
+            <a:ext cx="1371600" cy="1371600"/>
+          </a:xfrm>
+          <a:prstGeom prst="ellipse">
+            <a:avLst/>
+          </a:prstGeom>
+          <a:solidFill>
+            <a:srgbClr val="FFFFFF"/>
+          </a:solidFill>
+          <a:ln/>
+        </p:spPr>
+      </p:sp>
+      <p:sp>
+        <p:nvSpPr>
+          <p:cNvPr id="9" name="Shape 6"/>
+          <p:cNvSpPr/>
+          <p:nvPr/>
+        </p:nvSpPr>
+        <p:spPr>
+          <a:xfrm>
+            <a:off x="10698480" y="2011680"/>
+            <a:ext cx="960120" cy="960120"/>
+          </a:xfrm>
+          <a:prstGeom prst="ellipse">
+            <a:avLst/>
+          </a:prstGeom>
+          <a:solidFill>
+            <a:srgbClr val="0D2847"/>
+          </a:solidFill>
+          <a:ln/>
+        </p:spPr>
+      </p:sp>
+      <p:sp>
+        <p:nvSpPr>
+          <p:cNvPr id="10" name="Shape 7"/>
+          <p:cNvSpPr/>
+          <p:nvPr/>
+        </p:nvSpPr>
+        <p:spPr>
+          <a:xfrm>
+            <a:off x="9075420" y="2217420"/>
+            <a:ext cx="1051560" cy="1051560"/>
+          </a:xfrm>
+          <a:prstGeom prst="ellipse">
+            <a:avLst/>
+          </a:prstGeom>
+          <a:solidFill>
+            <a:srgbClr val="FFFFFF"/>
           </a:solidFill>
           <a:ln/>
         </p:spPr>
       </p:sp>
       <p:pic>
         <p:nvPicPr>
-          <p:cNvPr id="6" name="Image 0" descr="/tmp/claude-0/-home-user-riesgo/0ff9ff46-1396-5bd8-b3ac-2280dfbbbc55/scratchpad/work/gen/icons/globe_navy.png">    </p:cNvPr>
+          <p:cNvPr id="11" name="Image 0" descr="/tmp/claude-0/-home-user-riesgo/0ff9ff46-1396-5bd8-b3ac-2280dfbbbc55/scratchpad/work/gen/icons/globe_tealgreen.png">    </p:cNvPr>
           <p:cNvPicPr>
             <a:picLocks noChangeAspect="1"/>
           </p:cNvPicPr>
@@ -21410,8 +22670,8 @@
         </p:blipFill>
         <p:spPr>
           <a:xfrm>
-            <a:off x="852221" y="2114093"/>
-            <a:ext cx="618134" cy="618134"/>
+            <a:off x="9338310" y="2480310"/>
+            <a:ext cx="525780" cy="525780"/>
           </a:xfrm>
           <a:prstGeom prst="rect">
             <a:avLst/>
@@ -21420,150 +22680,27 @@
       </p:pic>
       <p:sp>
         <p:nvSpPr>
-          <p:cNvPr id="7" name="Text 3"/>
-          <p:cNvSpPr txBox="1"/>
-          <p:nvPr/>
-        </p:nvSpPr>
-        <p:spPr>
-          <a:xfrm>
-            <a:off x="566928" y="2880360"/>
-            <a:ext cx="9601200" cy="365760"/>
-          </a:xfrm>
-          <a:prstGeom prst="rect">
-            <a:avLst/>
-          </a:prstGeom>
-          <a:noFill/>
-          <a:ln/>
-        </p:spPr>
-        <p:txBody>
-          <a:bodyPr wrap="square" lIns="0" tIns="0" rIns="0" bIns="0" rtlCol="0" anchor="ctr"/>
-          <a:lstStyle/>
-          <a:p>
-            <a:pPr indent="0" marL="0">
-              <a:buNone/>
-            </a:pPr>
-            <a:r>
-              <a:rPr lang="en-US" sz="1500" b="1" spc="300" kern="0" dirty="0">
-                <a:solidFill>
-                  <a:srgbClr val="E3A73B"/>
-                </a:solidFill>
-                <a:latin typeface="Calibri" pitchFamily="34" charset="0"/>
-                <a:ea typeface="Calibri" pitchFamily="34" charset="-122"/>
-                <a:cs typeface="Calibri" pitchFamily="34" charset="-120"/>
-              </a:rPr>
-              <a:t>TEMA 8</a:t>
-            </a:r>
-            <a:endParaRPr lang="en-US" sz="1500" dirty="0"/>
-          </a:p>
-        </p:txBody>
-      </p:sp>
-      <p:sp>
-        <p:nvSpPr>
-          <p:cNvPr id="8" name="Text 4"/>
-          <p:cNvSpPr txBox="1"/>
-          <p:nvPr/>
-        </p:nvSpPr>
-        <p:spPr>
-          <a:xfrm>
-            <a:off x="566928" y="3246120"/>
-            <a:ext cx="10424160" cy="1554480"/>
-          </a:xfrm>
-          <a:prstGeom prst="rect">
-            <a:avLst/>
-          </a:prstGeom>
-          <a:noFill/>
-          <a:ln/>
-        </p:spPr>
-        <p:txBody>
-          <a:bodyPr wrap="square" lIns="0" tIns="0" rIns="0" bIns="0" rtlCol="0" anchor="ctr"/>
-          <a:lstStyle/>
-          <a:p>
-            <a:pPr indent="0" marL="0">
-              <a:lnSpc>
-                <a:spcPct val="105000"/>
-              </a:lnSpc>
-              <a:buNone/>
-            </a:pPr>
-            <a:r>
-              <a:rPr lang="en-US" sz="3400" b="1" dirty="0">
-                <a:solidFill>
-                  <a:srgbClr val="FFFFFF"/>
-                </a:solidFill>
-                <a:latin typeface="Cambria" pitchFamily="34" charset="0"/>
-                <a:ea typeface="Cambria" pitchFamily="34" charset="-122"/>
-                <a:cs typeface="Cambria" pitchFamily="34" charset="-120"/>
-              </a:rPr>
-              <a:t>RIESGOS AMBIENTALES Y SOCIALES:</a:t>
-            </a:r>
-            <a:endParaRPr lang="en-US" sz="3400" dirty="0"/>
-          </a:p>
-          <a:p>
-            <a:pPr indent="0" marL="0">
-              <a:lnSpc>
-                <a:spcPct val="105000"/>
-              </a:lnSpc>
-              <a:buNone/>
-            </a:pPr>
-            <a:r>
-              <a:rPr lang="en-US" sz="3400" b="1" dirty="0">
-                <a:solidFill>
-                  <a:srgbClr val="FFFFFF"/>
-                </a:solidFill>
-                <a:latin typeface="Cambria" pitchFamily="34" charset="0"/>
-                <a:ea typeface="Cambria" pitchFamily="34" charset="-122"/>
-                <a:cs typeface="Cambria" pitchFamily="34" charset="-120"/>
-              </a:rPr>
-              <a:t>TAMBIÉN SON RIESGOS FINANCIEROS</a:t>
-            </a:r>
-            <a:endParaRPr lang="en-US" sz="3400" dirty="0"/>
-          </a:p>
-        </p:txBody>
-      </p:sp>
-      <p:sp>
-        <p:nvSpPr>
-          <p:cNvPr id="9" name="Text 5"/>
-          <p:cNvSpPr txBox="1"/>
-          <p:nvPr/>
-        </p:nvSpPr>
-        <p:spPr>
-          <a:xfrm>
-            <a:off x="566928" y="4663440"/>
-            <a:ext cx="9692640" cy="822960"/>
-          </a:xfrm>
-          <a:prstGeom prst="rect">
-            <a:avLst/>
-          </a:prstGeom>
-          <a:noFill/>
-          <a:ln/>
-        </p:spPr>
-        <p:txBody>
-          <a:bodyPr wrap="square" lIns="0" tIns="0" rIns="0" bIns="0" rtlCol="0" anchor="ctr"/>
-          <a:lstStyle/>
-          <a:p>
-            <a:pPr indent="0" marL="0">
-              <a:lnSpc>
-                <a:spcPct val="115000"/>
-              </a:lnSpc>
-              <a:buNone/>
-            </a:pPr>
-            <a:r>
-              <a:rPr lang="en-US" sz="1600" i="1" dirty="0">
-                <a:solidFill>
-                  <a:srgbClr val="C7D3E5"/>
-                </a:solidFill>
-                <a:latin typeface="Calibri" pitchFamily="34" charset="0"/>
-                <a:ea typeface="Calibri" pitchFamily="34" charset="-122"/>
-                <a:cs typeface="Calibri" pitchFamily="34" charset="-120"/>
-              </a:rPr>
-              <a:t>Ambiente + sociedad + negocio + finanzas: una misma cadena.</a:t>
-            </a:r>
-            <a:endParaRPr lang="en-US" sz="1600" dirty="0"/>
-          </a:p>
-        </p:txBody>
+          <p:cNvPr id="12" name="Shape 8"/>
+          <p:cNvSpPr/>
+          <p:nvPr/>
+        </p:nvSpPr>
+        <p:spPr>
+          <a:xfrm>
+            <a:off x="10447020" y="2948940"/>
+            <a:ext cx="868680" cy="868680"/>
+          </a:xfrm>
+          <a:prstGeom prst="ellipse">
+            <a:avLst/>
+          </a:prstGeom>
+          <a:solidFill>
+            <a:srgbClr val="0A1F3B"/>
+          </a:solidFill>
+          <a:ln/>
+        </p:spPr>
       </p:sp>
       <p:pic>
         <p:nvPicPr>
-          <p:cNvPr id="10" name="Image 1" descr="/tmp/claude-0/-home-user-riesgo/0ff9ff46-1396-5bd8-b3ac-2280dfbbbc55/scratchpad/work/gen/logo_white.png">    </p:cNvPr>
+          <p:cNvPr id="13" name="Image 1" descr="/tmp/claude-0/-home-user-riesgo/0ff9ff46-1396-5bd8-b3ac-2280dfbbbc55/scratchpad/work/gen/icons/leaf_white.png">    </p:cNvPr>
           <p:cNvPicPr>
             <a:picLocks noChangeAspect="1"/>
           </p:cNvPicPr>
@@ -21577,8 +22714,8 @@
         </p:blipFill>
         <p:spPr>
           <a:xfrm>
-            <a:off x="10161727" y="5961888"/>
-            <a:ext cx="1463040" cy="411114"/>
+            <a:off x="10664190" y="3166110"/>
+            <a:ext cx="434340" cy="434340"/>
           </a:xfrm>
           <a:prstGeom prst="rect">
             <a:avLst/>
@@ -21587,14 +22724,102 @@
       </p:pic>
       <p:sp>
         <p:nvSpPr>
-          <p:cNvPr id="11" name="Text 6"/>
-          <p:cNvSpPr txBox="1"/>
-          <p:nvPr/>
-        </p:nvSpPr>
-        <p:spPr>
-          <a:xfrm>
-            <a:off x="566928" y="6473952"/>
-            <a:ext cx="7315200" cy="274320"/>
+          <p:cNvPr id="14" name="Shape 9"/>
+          <p:cNvSpPr/>
+          <p:nvPr/>
+        </p:nvSpPr>
+        <p:spPr>
+          <a:xfrm>
+            <a:off x="9578340" y="3909060"/>
+            <a:ext cx="777240" cy="777240"/>
+          </a:xfrm>
+          <a:prstGeom prst="ellipse">
+            <a:avLst/>
+          </a:prstGeom>
+          <a:solidFill>
+            <a:srgbClr val="FFFFFF"/>
+          </a:solidFill>
+          <a:ln/>
+        </p:spPr>
+      </p:sp>
+      <p:pic>
+        <p:nvPicPr>
+          <p:cNvPr id="15" name="Image 2" descr="/tmp/claude-0/-home-user-riesgo/0ff9ff46-1396-5bd8-b3ac-2280dfbbbc55/scratchpad/work/gen/icons/cloud_rain_navy.png">    </p:cNvPr>
+          <p:cNvPicPr>
+            <a:picLocks noChangeAspect="1"/>
+          </p:cNvPicPr>
+          <p:nvPr/>
+        </p:nvPicPr>
+        <p:blipFill>
+          <a:blip r:embed="rId3"/>
+          <a:stretch>
+            <a:fillRect/>
+          </a:stretch>
+        </p:blipFill>
+        <p:spPr>
+          <a:xfrm>
+            <a:off x="9772650" y="4103370"/>
+            <a:ext cx="388620" cy="388620"/>
+          </a:xfrm>
+          <a:prstGeom prst="rect">
+            <a:avLst/>
+          </a:prstGeom>
+        </p:spPr>
+      </p:pic>
+      <p:sp>
+        <p:nvSpPr>
+          <p:cNvPr id="16" name="Shape 10"/>
+          <p:cNvSpPr/>
+          <p:nvPr/>
+        </p:nvSpPr>
+        <p:spPr>
+          <a:xfrm>
+            <a:off x="10689336" y="4105656"/>
+            <a:ext cx="658368" cy="658368"/>
+          </a:xfrm>
+          <a:prstGeom prst="ellipse">
+            <a:avLst/>
+          </a:prstGeom>
+          <a:solidFill>
+            <a:srgbClr val="0A1F3B"/>
+          </a:solidFill>
+          <a:ln/>
+        </p:spPr>
+      </p:sp>
+      <p:pic>
+        <p:nvPicPr>
+          <p:cNvPr id="17" name="Image 3" descr="/tmp/claude-0/-home-user-riesgo/0ff9ff46-1396-5bd8-b3ac-2280dfbbbc55/scratchpad/work/gen/icons/umbrella_tealgreen.png">    </p:cNvPr>
+          <p:cNvPicPr>
+            <a:picLocks noChangeAspect="1"/>
+          </p:cNvPicPr>
+          <p:nvPr/>
+        </p:nvPicPr>
+        <p:blipFill>
+          <a:blip r:embed="rId4"/>
+          <a:stretch>
+            <a:fillRect/>
+          </a:stretch>
+        </p:blipFill>
+        <p:spPr>
+          <a:xfrm>
+            <a:off x="10853928" y="4270248"/>
+            <a:ext cx="329184" cy="329184"/>
+          </a:xfrm>
+          <a:prstGeom prst="rect">
+            <a:avLst/>
+          </a:prstGeom>
+        </p:spPr>
+      </p:pic>
+      <p:sp>
+        <p:nvSpPr>
+          <p:cNvPr id="18" name="Text 11"/>
+          <p:cNvSpPr txBox="1"/>
+          <p:nvPr/>
+        </p:nvSpPr>
+        <p:spPr>
+          <a:xfrm>
+            <a:off x="566928" y="2423160"/>
+            <a:ext cx="7315200" cy="365760"/>
           </a:xfrm>
           <a:prstGeom prst="rect">
             <a:avLst/>
@@ -21606,18 +22831,185 @@
           <a:bodyPr wrap="square" lIns="0" tIns="0" rIns="0" bIns="0" rtlCol="0" anchor="ctr"/>
           <a:lstStyle/>
           <a:p>
-            <a:pPr algn="l" indent="0" marL="0">
-              <a:buNone/>
-            </a:pPr>
-            <a:r>
-              <a:rPr lang="en-US" sz="900" dirty="0">
-                <a:solidFill>
-                  <a:srgbClr val="AEC0DA"/>
+            <a:pPr indent="0" marL="0">
+              <a:buNone/>
+            </a:pPr>
+            <a:r>
+              <a:rPr lang="en-US" sz="1500" b="1" spc="300" kern="0" dirty="0">
+                <a:solidFill>
+                  <a:srgbClr val="129E82"/>
                 </a:solidFill>
                 <a:latin typeface="Calibri" pitchFamily="34" charset="0"/>
                 <a:ea typeface="Calibri" pitchFamily="34" charset="-122"/>
                 <a:cs typeface="Calibri" pitchFamily="34" charset="-120"/>
               </a:rPr>
+              <a:t>TEMA 8</a:t>
+            </a:r>
+            <a:endParaRPr lang="en-US" sz="1500" dirty="0"/>
+          </a:p>
+        </p:txBody>
+      </p:sp>
+      <p:sp>
+        <p:nvSpPr>
+          <p:cNvPr id="19" name="Text 12"/>
+          <p:cNvSpPr txBox="1"/>
+          <p:nvPr/>
+        </p:nvSpPr>
+        <p:spPr>
+          <a:xfrm>
+            <a:off x="566928" y="2788920"/>
+            <a:ext cx="7406640" cy="1554480"/>
+          </a:xfrm>
+          <a:prstGeom prst="rect">
+            <a:avLst/>
+          </a:prstGeom>
+          <a:noFill/>
+          <a:ln/>
+        </p:spPr>
+        <p:txBody>
+          <a:bodyPr wrap="square" lIns="0" tIns="0" rIns="0" bIns="0" rtlCol="0" anchor="ctr"/>
+          <a:lstStyle/>
+          <a:p>
+            <a:pPr indent="0" marL="0">
+              <a:lnSpc>
+                <a:spcPct val="105000"/>
+              </a:lnSpc>
+              <a:buNone/>
+            </a:pPr>
+            <a:r>
+              <a:rPr lang="en-US" sz="3200" b="1" dirty="0">
+                <a:solidFill>
+                  <a:srgbClr val="FFFFFF"/>
+                </a:solidFill>
+                <a:latin typeface="Cambria" pitchFamily="34" charset="0"/>
+                <a:ea typeface="Cambria" pitchFamily="34" charset="-122"/>
+                <a:cs typeface="Cambria" pitchFamily="34" charset="-120"/>
+              </a:rPr>
+              <a:t>RIESGOS AMBIENTALES Y SOCIALES:</a:t>
+            </a:r>
+            <a:endParaRPr lang="en-US" sz="3200" dirty="0"/>
+          </a:p>
+          <a:p>
+            <a:pPr indent="0" marL="0">
+              <a:lnSpc>
+                <a:spcPct val="105000"/>
+              </a:lnSpc>
+              <a:buNone/>
+            </a:pPr>
+            <a:r>
+              <a:rPr lang="en-US" sz="3200" b="1" dirty="0">
+                <a:solidFill>
+                  <a:srgbClr val="FFFFFF"/>
+                </a:solidFill>
+                <a:latin typeface="Cambria" pitchFamily="34" charset="0"/>
+                <a:ea typeface="Cambria" pitchFamily="34" charset="-122"/>
+                <a:cs typeface="Cambria" pitchFamily="34" charset="-120"/>
+              </a:rPr>
+              <a:t>TAMBIÉN SON RIESGOS FINANCIEROS</a:t>
+            </a:r>
+            <a:endParaRPr lang="en-US" sz="3200" dirty="0"/>
+          </a:p>
+        </p:txBody>
+      </p:sp>
+      <p:sp>
+        <p:nvSpPr>
+          <p:cNvPr id="20" name="Text 13"/>
+          <p:cNvSpPr txBox="1"/>
+          <p:nvPr/>
+        </p:nvSpPr>
+        <p:spPr>
+          <a:xfrm>
+            <a:off x="566928" y="4206240"/>
+            <a:ext cx="7223760" cy="822960"/>
+          </a:xfrm>
+          <a:prstGeom prst="rect">
+            <a:avLst/>
+          </a:prstGeom>
+          <a:noFill/>
+          <a:ln/>
+        </p:spPr>
+        <p:txBody>
+          <a:bodyPr wrap="square" lIns="0" tIns="0" rIns="0" bIns="0" rtlCol="0" anchor="ctr"/>
+          <a:lstStyle/>
+          <a:p>
+            <a:pPr indent="0" marL="0">
+              <a:lnSpc>
+                <a:spcPct val="118000"/>
+              </a:lnSpc>
+              <a:buNone/>
+            </a:pPr>
+            <a:r>
+              <a:rPr lang="en-US" sz="1550" i="1" dirty="0">
+                <a:solidFill>
+                  <a:srgbClr val="D7E1F0"/>
+                </a:solidFill>
+                <a:latin typeface="Calibri" pitchFamily="34" charset="0"/>
+                <a:ea typeface="Calibri" pitchFamily="34" charset="-122"/>
+                <a:cs typeface="Calibri" pitchFamily="34" charset="-120"/>
+              </a:rPr>
+              <a:t>Ambiente + sociedad + negocio + finanzas: una misma cadena.</a:t>
+            </a:r>
+            <a:endParaRPr lang="en-US" sz="1550" dirty="0"/>
+          </a:p>
+        </p:txBody>
+      </p:sp>
+      <p:pic>
+        <p:nvPicPr>
+          <p:cNvPr id="21" name="Image 4" descr="/tmp/claude-0/-home-user-riesgo/0ff9ff46-1396-5bd8-b3ac-2280dfbbbc55/scratchpad/work/gen/logo_white.png">    </p:cNvPr>
+          <p:cNvPicPr>
+            <a:picLocks noChangeAspect="1"/>
+          </p:cNvPicPr>
+          <p:nvPr/>
+        </p:nvPicPr>
+        <p:blipFill>
+          <a:blip r:embed="rId5"/>
+          <a:stretch>
+            <a:fillRect/>
+          </a:stretch>
+        </p:blipFill>
+        <p:spPr>
+          <a:xfrm>
+            <a:off x="566928" y="5989320"/>
+            <a:ext cx="1417320" cy="398267"/>
+          </a:xfrm>
+          <a:prstGeom prst="rect">
+            <a:avLst/>
+          </a:prstGeom>
+        </p:spPr>
+      </p:pic>
+      <p:sp>
+        <p:nvSpPr>
+          <p:cNvPr id="22" name="Text 14"/>
+          <p:cNvSpPr txBox="1"/>
+          <p:nvPr/>
+        </p:nvSpPr>
+        <p:spPr>
+          <a:xfrm>
+            <a:off x="566928" y="6473952"/>
+            <a:ext cx="7315200" cy="274320"/>
+          </a:xfrm>
+          <a:prstGeom prst="rect">
+            <a:avLst/>
+          </a:prstGeom>
+          <a:noFill/>
+          <a:ln/>
+        </p:spPr>
+        <p:txBody>
+          <a:bodyPr wrap="square" lIns="0" tIns="0" rIns="0" bIns="0" rtlCol="0" anchor="ctr"/>
+          <a:lstStyle/>
+          <a:p>
+            <a:pPr algn="l" indent="0" marL="0">
+              <a:buNone/>
+            </a:pPr>
+            <a:r>
+              <a:rPr lang="en-US" sz="900" dirty="0">
+                <a:solidFill>
+                  <a:srgbClr val="AEC0DA"/>
+                </a:solidFill>
+                <a:latin typeface="Calibri" pitchFamily="34" charset="0"/>
+                <a:ea typeface="Calibri" pitchFamily="34" charset="-122"/>
+                <a:cs typeface="Calibri" pitchFamily="34" charset="-120"/>
+              </a:rPr>
               <a:t>GESTIÓN INTEGRAL DE RIESGOS  ·  COMEDICA DE R.L.</a:t>
             </a:r>
             <a:endParaRPr lang="en-US" sz="900" dirty="0"/>
@@ -21626,7 +23018,7 @@
       </p:sp>
       <p:sp>
         <p:nvSpPr>
-          <p:cNvPr id="12" name="Text 7"/>
+          <p:cNvPr id="23" name="Text 15"/>
           <p:cNvSpPr txBox="1"/>
           <p:nvPr/>
         </p:nvSpPr>
@@ -21722,7 +23114,7 @@
             <a:r>
               <a:rPr lang="en-US" sz="1300" b="1" spc="200" kern="0" dirty="0">
                 <a:solidFill>
-                  <a:srgbClr val="E3A73B"/>
+                  <a:srgbClr val="129E82"/>
                 </a:solidFill>
                 <a:latin typeface="Calibri" pitchFamily="34" charset="0"/>
                 <a:ea typeface="Calibri" pitchFamily="34" charset="-122"/>
@@ -21830,7 +23222,7 @@
             <a:avLst/>
           </a:prstGeom>
           <a:solidFill>
-            <a:srgbClr val="E3A73B"/>
+            <a:srgbClr val="F0AD35"/>
           </a:solidFill>
           <a:ln/>
         </p:spPr>
@@ -21940,7 +23332,7 @@
             <a:avLst/>
           </a:prstGeom>
           <a:solidFill>
-            <a:srgbClr val="133B6C"/>
+            <a:srgbClr val="129E82"/>
           </a:solidFill>
           <a:ln/>
         </p:spPr>
@@ -22050,7 +23442,7 @@
             <a:avLst/>
           </a:prstGeom>
           <a:solidFill>
-            <a:srgbClr val="133B6C"/>
+            <a:srgbClr val="129E82"/>
           </a:solidFill>
           <a:ln/>
         </p:spPr>
@@ -22160,7 +23552,7 @@
             <a:avLst/>
           </a:prstGeom>
           <a:solidFill>
-            <a:srgbClr val="133B6C"/>
+            <a:srgbClr val="129E82"/>
           </a:solidFill>
           <a:ln/>
         </p:spPr>
@@ -22270,7 +23662,7 @@
             <a:avLst/>
           </a:prstGeom>
           <a:solidFill>
-            <a:srgbClr val="C0392B"/>
+            <a:srgbClr val="E0392B"/>
           </a:solidFill>
           <a:ln/>
         </p:spPr>
@@ -22368,7 +23760,7 @@
             <a:r>
               <a:rPr lang="en-US" sz="900" dirty="0">
                 <a:solidFill>
-                  <a:srgbClr val="8FA0B5"/>
+                  <a:srgbClr val="5B6B82"/>
                 </a:solidFill>
                 <a:latin typeface="Calibri" pitchFamily="34" charset="0"/>
                 <a:ea typeface="Calibri" pitchFamily="34" charset="-122"/>
@@ -22407,7 +23799,7 @@
             <a:r>
               <a:rPr lang="en-US" sz="900" dirty="0">
                 <a:solidFill>
-                  <a:srgbClr val="8FA0B5"/>
+                  <a:srgbClr val="5B6B82"/>
                 </a:solidFill>
                 <a:latin typeface="Calibri" pitchFamily="34" charset="0"/>
                 <a:ea typeface="Calibri" pitchFamily="34" charset="-122"/>
@@ -22478,7 +23870,7 @@
             <a:r>
               <a:rPr lang="en-US" sz="1300" b="1" spc="200" kern="0" dirty="0">
                 <a:solidFill>
-                  <a:srgbClr val="E3A73B"/>
+                  <a:srgbClr val="129E82"/>
                 </a:solidFill>
                 <a:latin typeface="Calibri" pitchFamily="34" charset="0"/>
                 <a:ea typeface="Calibri" pitchFamily="34" charset="-122"/>
@@ -22569,7 +23961,7 @@
             <a:avLst/>
           </a:prstGeom>
           <a:solidFill>
-            <a:srgbClr val="133B6C"/>
+            <a:srgbClr val="129E82"/>
           </a:solidFill>
           <a:ln/>
         </p:spPr>
@@ -22677,7 +24069,7 @@
             <a:avLst/>
           </a:prstGeom>
           <a:solidFill>
-            <a:srgbClr val="133B6C"/>
+            <a:srgbClr val="129E82"/>
           </a:solidFill>
           <a:ln/>
         </p:spPr>
@@ -22785,7 +24177,7 @@
             <a:avLst/>
           </a:prstGeom>
           <a:solidFill>
-            <a:srgbClr val="133B6C"/>
+            <a:srgbClr val="129E82"/>
           </a:solidFill>
           <a:ln/>
         </p:spPr>
@@ -22893,7 +24285,7 @@
             <a:avLst/>
           </a:prstGeom>
           <a:solidFill>
-            <a:srgbClr val="133B6C"/>
+            <a:srgbClr val="129E82"/>
           </a:solidFill>
           <a:ln/>
         </p:spPr>
@@ -23001,7 +24393,7 @@
             <a:avLst/>
           </a:prstGeom>
           <a:solidFill>
-            <a:srgbClr val="133B6C"/>
+            <a:srgbClr val="129E82"/>
           </a:solidFill>
           <a:ln/>
         </p:spPr>
@@ -23099,7 +24491,7 @@
             <a:r>
               <a:rPr lang="en-US" sz="900" dirty="0">
                 <a:solidFill>
-                  <a:srgbClr val="8FA0B5"/>
+                  <a:srgbClr val="5B6B82"/>
                 </a:solidFill>
                 <a:latin typeface="Calibri" pitchFamily="34" charset="0"/>
                 <a:ea typeface="Calibri" pitchFamily="34" charset="-122"/>
@@ -23138,7 +24530,7 @@
             <a:r>
               <a:rPr lang="en-US" sz="900" dirty="0">
                 <a:solidFill>
-                  <a:srgbClr val="8FA0B5"/>
+                  <a:srgbClr val="5B6B82"/>
                 </a:solidFill>
                 <a:latin typeface="Calibri" pitchFamily="34" charset="0"/>
                 <a:ea typeface="Calibri" pitchFamily="34" charset="-122"/>
@@ -23189,9 +24581,49 @@
           <p:nvPr/>
         </p:nvSpPr>
         <p:spPr>
-          <a:xfrm>
-            <a:off x="-2926080" y="2926080"/>
-            <a:ext cx="7772400" cy="7772400"/>
+          <a:xfrm rot="720000">
+            <a:off x="7955280" y="-457200"/>
+            <a:ext cx="5669280" cy="7772400"/>
+          </a:xfrm>
+          <a:prstGeom prst="rect">
+            <a:avLst/>
+          </a:prstGeom>
+          <a:solidFill>
+            <a:srgbClr val="7B4FCF"/>
+          </a:solidFill>
+          <a:ln/>
+        </p:spPr>
+      </p:sp>
+      <p:sp>
+        <p:nvSpPr>
+          <p:cNvPr id="4" name="Shape 1"/>
+          <p:cNvSpPr/>
+          <p:nvPr/>
+        </p:nvSpPr>
+        <p:spPr>
+          <a:xfrm>
+            <a:off x="0" y="0"/>
+            <a:ext cx="8275320" cy="6858000"/>
+          </a:xfrm>
+          <a:prstGeom prst="rect">
+            <a:avLst/>
+          </a:prstGeom>
+          <a:solidFill>
+            <a:srgbClr val="0A1F3B"/>
+          </a:solidFill>
+          <a:ln/>
+        </p:spPr>
+      </p:sp>
+      <p:sp>
+        <p:nvSpPr>
+          <p:cNvPr id="5" name="Shape 2"/>
+          <p:cNvSpPr/>
+          <p:nvPr/>
+        </p:nvSpPr>
+        <p:spPr>
+          <a:xfrm>
+            <a:off x="-3108960" y="3291840"/>
+            <a:ext cx="7498080" cy="7498080"/>
           </a:xfrm>
           <a:prstGeom prst="ellipse">
             <a:avLst/>
@@ -23204,27 +24636,87 @@
       </p:sp>
       <p:sp>
         <p:nvSpPr>
-          <p:cNvPr id="4" name="Shape 1"/>
-          <p:cNvSpPr/>
-          <p:nvPr/>
-        </p:nvSpPr>
-        <p:spPr>
-          <a:xfrm>
-            <a:off x="566928" y="1828800"/>
-            <a:ext cx="1188720" cy="1188720"/>
+          <p:cNvPr id="6" name="Shape 3"/>
+          <p:cNvSpPr/>
+          <p:nvPr/>
+        </p:nvSpPr>
+        <p:spPr>
+          <a:xfrm>
+            <a:off x="8686800" y="2011680"/>
+            <a:ext cx="2834640" cy="2834640"/>
           </a:xfrm>
           <a:prstGeom prst="ellipse">
             <a:avLst/>
           </a:prstGeom>
           <a:solidFill>
-            <a:srgbClr val="E3A73B"/>
+            <a:srgbClr val="0A1F3B"/>
+          </a:solidFill>
+          <a:ln/>
+        </p:spPr>
+      </p:sp>
+      <p:sp>
+        <p:nvSpPr>
+          <p:cNvPr id="7" name="Shape 4"/>
+          <p:cNvSpPr/>
+          <p:nvPr/>
+        </p:nvSpPr>
+        <p:spPr>
+          <a:xfrm>
+            <a:off x="9784080" y="3931920"/>
+            <a:ext cx="1371600" cy="1371600"/>
+          </a:xfrm>
+          <a:prstGeom prst="ellipse">
+            <a:avLst/>
+          </a:prstGeom>
+          <a:solidFill>
+            <a:srgbClr val="FFFFFF"/>
+          </a:solidFill>
+          <a:ln/>
+        </p:spPr>
+      </p:sp>
+      <p:sp>
+        <p:nvSpPr>
+          <p:cNvPr id="8" name="Shape 5"/>
+          <p:cNvSpPr/>
+          <p:nvPr/>
+        </p:nvSpPr>
+        <p:spPr>
+          <a:xfrm>
+            <a:off x="10698480" y="2011680"/>
+            <a:ext cx="960120" cy="960120"/>
+          </a:xfrm>
+          <a:prstGeom prst="ellipse">
+            <a:avLst/>
+          </a:prstGeom>
+          <a:solidFill>
+            <a:srgbClr val="0D2847"/>
+          </a:solidFill>
+          <a:ln/>
+        </p:spPr>
+      </p:sp>
+      <p:sp>
+        <p:nvSpPr>
+          <p:cNvPr id="9" name="Shape 6"/>
+          <p:cNvSpPr/>
+          <p:nvPr/>
+        </p:nvSpPr>
+        <p:spPr>
+          <a:xfrm>
+            <a:off x="9075420" y="2217420"/>
+            <a:ext cx="1051560" cy="1051560"/>
+          </a:xfrm>
+          <a:prstGeom prst="ellipse">
+            <a:avLst/>
+          </a:prstGeom>
+          <a:solidFill>
+            <a:srgbClr val="FFFFFF"/>
           </a:solidFill>
           <a:ln/>
         </p:spPr>
       </p:sp>
       <p:pic>
         <p:nvPicPr>
-          <p:cNvPr id="5" name="Image 0" descr="/tmp/claude-0/-home-user-riesgo/0ff9ff46-1396-5bd8-b3ac-2280dfbbbc55/scratchpad/work/gen/icons/clipboard_check_navy.png">    </p:cNvPr>
+          <p:cNvPr id="10" name="Image 0" descr="/tmp/claude-0/-home-user-riesgo/0ff9ff46-1396-5bd8-b3ac-2280dfbbbc55/scratchpad/work/gen/icons/clipboard_check_violet.png">    </p:cNvPr>
           <p:cNvPicPr>
             <a:picLocks noChangeAspect="1"/>
           </p:cNvPicPr>
@@ -23238,8 +24730,8 @@
         </p:blipFill>
         <p:spPr>
           <a:xfrm>
-            <a:off x="852221" y="2114093"/>
-            <a:ext cx="618134" cy="618134"/>
+            <a:off x="9338310" y="2480310"/>
+            <a:ext cx="525780" cy="525780"/>
           </a:xfrm>
           <a:prstGeom prst="rect">
             <a:avLst/>
@@ -23248,130 +24740,27 @@
       </p:pic>
       <p:sp>
         <p:nvSpPr>
-          <p:cNvPr id="6" name="Text 2"/>
-          <p:cNvSpPr txBox="1"/>
-          <p:nvPr/>
-        </p:nvSpPr>
-        <p:spPr>
-          <a:xfrm>
-            <a:off x="566928" y="2880360"/>
-            <a:ext cx="9601200" cy="365760"/>
-          </a:xfrm>
-          <a:prstGeom prst="rect">
-            <a:avLst/>
-          </a:prstGeom>
-          <a:noFill/>
-          <a:ln/>
-        </p:spPr>
-        <p:txBody>
-          <a:bodyPr wrap="square" lIns="0" tIns="0" rIns="0" bIns="0" rtlCol="0" anchor="ctr"/>
-          <a:lstStyle/>
-          <a:p>
-            <a:pPr indent="0" marL="0">
-              <a:buNone/>
-            </a:pPr>
-            <a:r>
-              <a:rPr lang="en-US" sz="1500" b="1" spc="300" kern="0" dirty="0">
-                <a:solidFill>
-                  <a:srgbClr val="E3A73B"/>
-                </a:solidFill>
-                <a:latin typeface="Calibri" pitchFamily="34" charset="0"/>
-                <a:ea typeface="Calibri" pitchFamily="34" charset="-122"/>
-                <a:cs typeface="Calibri" pitchFamily="34" charset="-120"/>
-              </a:rPr>
-              <a:t>INTEGRACIÓN</a:t>
-            </a:r>
-            <a:endParaRPr lang="en-US" sz="1500" dirty="0"/>
-          </a:p>
-        </p:txBody>
-      </p:sp>
-      <p:sp>
-        <p:nvSpPr>
-          <p:cNvPr id="7" name="Text 3"/>
-          <p:cNvSpPr txBox="1"/>
-          <p:nvPr/>
-        </p:nvSpPr>
-        <p:spPr>
-          <a:xfrm>
-            <a:off x="566928" y="3246120"/>
-            <a:ext cx="10424160" cy="1554480"/>
-          </a:xfrm>
-          <a:prstGeom prst="rect">
-            <a:avLst/>
-          </a:prstGeom>
-          <a:noFill/>
-          <a:ln/>
-        </p:spPr>
-        <p:txBody>
-          <a:bodyPr wrap="square" lIns="0" tIns="0" rIns="0" bIns="0" rtlCol="0" anchor="ctr"/>
-          <a:lstStyle/>
-          <a:p>
-            <a:pPr indent="0" marL="0">
-              <a:lnSpc>
-                <a:spcPct val="105000"/>
-              </a:lnSpc>
-              <a:buNone/>
-            </a:pPr>
-            <a:r>
-              <a:rPr lang="en-US" sz="3400" b="1" dirty="0">
-                <a:solidFill>
-                  <a:srgbClr val="FFFFFF"/>
-                </a:solidFill>
-                <a:latin typeface="Cambria" pitchFamily="34" charset="0"/>
-                <a:ea typeface="Cambria" pitchFamily="34" charset="-122"/>
-                <a:cs typeface="Cambria" pitchFamily="34" charset="-120"/>
-              </a:rPr>
-              <a:t>CASOS INTEGRADORES</a:t>
-            </a:r>
-            <a:endParaRPr lang="en-US" sz="3400" dirty="0"/>
-          </a:p>
-        </p:txBody>
-      </p:sp>
-      <p:sp>
-        <p:nvSpPr>
-          <p:cNvPr id="8" name="Text 4"/>
-          <p:cNvSpPr txBox="1"/>
-          <p:nvPr/>
-        </p:nvSpPr>
-        <p:spPr>
-          <a:xfrm>
-            <a:off x="566928" y="4663440"/>
-            <a:ext cx="9692640" cy="822960"/>
-          </a:xfrm>
-          <a:prstGeom prst="rect">
-            <a:avLst/>
-          </a:prstGeom>
-          <a:noFill/>
-          <a:ln/>
-        </p:spPr>
-        <p:txBody>
-          <a:bodyPr wrap="square" lIns="0" tIns="0" rIns="0" bIns="0" rtlCol="0" anchor="ctr"/>
-          <a:lstStyle/>
-          <a:p>
-            <a:pPr indent="0" marL="0">
-              <a:lnSpc>
-                <a:spcPct val="115000"/>
-              </a:lnSpc>
-              <a:buNone/>
-            </a:pPr>
-            <a:r>
-              <a:rPr lang="en-US" sz="1600" i="1" dirty="0">
-                <a:solidFill>
-                  <a:srgbClr val="C7D3E5"/>
-                </a:solidFill>
-                <a:latin typeface="Calibri" pitchFamily="34" charset="0"/>
-                <a:ea typeface="Calibri" pitchFamily="34" charset="-122"/>
-                <a:cs typeface="Calibri" pitchFamily="34" charset="-120"/>
-              </a:rPr>
-              <a:t>Cuatro situaciones reales de una cooperativa financiera para aplicar todo lo aprendido.</a:t>
-            </a:r>
-            <a:endParaRPr lang="en-US" sz="1600" dirty="0"/>
-          </a:p>
-        </p:txBody>
+          <p:cNvPr id="11" name="Shape 7"/>
+          <p:cNvSpPr/>
+          <p:nvPr/>
+        </p:nvSpPr>
+        <p:spPr>
+          <a:xfrm>
+            <a:off x="10447020" y="2948940"/>
+            <a:ext cx="868680" cy="868680"/>
+          </a:xfrm>
+          <a:prstGeom prst="ellipse">
+            <a:avLst/>
+          </a:prstGeom>
+          <a:solidFill>
+            <a:srgbClr val="0A1F3B"/>
+          </a:solidFill>
+          <a:ln/>
+        </p:spPr>
       </p:sp>
       <p:pic>
         <p:nvPicPr>
-          <p:cNvPr id="9" name="Image 1" descr="/tmp/claude-0/-home-user-riesgo/0ff9ff46-1396-5bd8-b3ac-2280dfbbbc55/scratchpad/work/gen/logo_white.png">    </p:cNvPr>
+          <p:cNvPr id="12" name="Image 1" descr="/tmp/claude-0/-home-user-riesgo/0ff9ff46-1396-5bd8-b3ac-2280dfbbbc55/scratchpad/work/gen/icons/search_doc_white.png">    </p:cNvPr>
           <p:cNvPicPr>
             <a:picLocks noChangeAspect="1"/>
           </p:cNvPicPr>
@@ -23385,8 +24774,8 @@
         </p:blipFill>
         <p:spPr>
           <a:xfrm>
-            <a:off x="10161727" y="5961888"/>
-            <a:ext cx="1463040" cy="411114"/>
+            <a:off x="10664190" y="3166110"/>
+            <a:ext cx="434340" cy="434340"/>
           </a:xfrm>
           <a:prstGeom prst="rect">
             <a:avLst/>
@@ -23395,14 +24784,102 @@
       </p:pic>
       <p:sp>
         <p:nvSpPr>
-          <p:cNvPr id="10" name="Text 5"/>
-          <p:cNvSpPr txBox="1"/>
-          <p:nvPr/>
-        </p:nvSpPr>
-        <p:spPr>
-          <a:xfrm>
-            <a:off x="566928" y="6473952"/>
-            <a:ext cx="7315200" cy="274320"/>
+          <p:cNvPr id="13" name="Shape 8"/>
+          <p:cNvSpPr/>
+          <p:nvPr/>
+        </p:nvSpPr>
+        <p:spPr>
+          <a:xfrm>
+            <a:off x="9578340" y="3909060"/>
+            <a:ext cx="777240" cy="777240"/>
+          </a:xfrm>
+          <a:prstGeom prst="ellipse">
+            <a:avLst/>
+          </a:prstGeom>
+          <a:solidFill>
+            <a:srgbClr val="FFFFFF"/>
+          </a:solidFill>
+          <a:ln/>
+        </p:spPr>
+      </p:sp>
+      <p:pic>
+        <p:nvPicPr>
+          <p:cNvPr id="14" name="Image 2" descr="/tmp/claude-0/-home-user-riesgo/0ff9ff46-1396-5bd8-b3ac-2280dfbbbc55/scratchpad/work/gen/icons/question_navy.png">    </p:cNvPr>
+          <p:cNvPicPr>
+            <a:picLocks noChangeAspect="1"/>
+          </p:cNvPicPr>
+          <p:nvPr/>
+        </p:nvPicPr>
+        <p:blipFill>
+          <a:blip r:embed="rId3"/>
+          <a:stretch>
+            <a:fillRect/>
+          </a:stretch>
+        </p:blipFill>
+        <p:spPr>
+          <a:xfrm>
+            <a:off x="9772650" y="4103370"/>
+            <a:ext cx="388620" cy="388620"/>
+          </a:xfrm>
+          <a:prstGeom prst="rect">
+            <a:avLst/>
+          </a:prstGeom>
+        </p:spPr>
+      </p:pic>
+      <p:sp>
+        <p:nvSpPr>
+          <p:cNvPr id="15" name="Shape 9"/>
+          <p:cNvSpPr/>
+          <p:nvPr/>
+        </p:nvSpPr>
+        <p:spPr>
+          <a:xfrm>
+            <a:off x="10689336" y="4105656"/>
+            <a:ext cx="658368" cy="658368"/>
+          </a:xfrm>
+          <a:prstGeom prst="ellipse">
+            <a:avLst/>
+          </a:prstGeom>
+          <a:solidFill>
+            <a:srgbClr val="0A1F3B"/>
+          </a:solidFill>
+          <a:ln/>
+        </p:spPr>
+      </p:sp>
+      <p:pic>
+        <p:nvPicPr>
+          <p:cNvPr id="16" name="Image 3" descr="/tmp/claude-0/-home-user-riesgo/0ff9ff46-1396-5bd8-b3ac-2280dfbbbc55/scratchpad/work/gen/icons/flag_check_violet.png">    </p:cNvPr>
+          <p:cNvPicPr>
+            <a:picLocks noChangeAspect="1"/>
+          </p:cNvPicPr>
+          <p:nvPr/>
+        </p:nvPicPr>
+        <p:blipFill>
+          <a:blip r:embed="rId4"/>
+          <a:stretch>
+            <a:fillRect/>
+          </a:stretch>
+        </p:blipFill>
+        <p:spPr>
+          <a:xfrm>
+            <a:off x="10853928" y="4270248"/>
+            <a:ext cx="329184" cy="329184"/>
+          </a:xfrm>
+          <a:prstGeom prst="rect">
+            <a:avLst/>
+          </a:prstGeom>
+        </p:spPr>
+      </p:pic>
+      <p:sp>
+        <p:nvSpPr>
+          <p:cNvPr id="17" name="Text 10"/>
+          <p:cNvSpPr txBox="1"/>
+          <p:nvPr/>
+        </p:nvSpPr>
+        <p:spPr>
+          <a:xfrm>
+            <a:off x="566928" y="2423160"/>
+            <a:ext cx="7315200" cy="365760"/>
           </a:xfrm>
           <a:prstGeom prst="rect">
             <a:avLst/>
@@ -23414,18 +24891,165 @@
           <a:bodyPr wrap="square" lIns="0" tIns="0" rIns="0" bIns="0" rtlCol="0" anchor="ctr"/>
           <a:lstStyle/>
           <a:p>
-            <a:pPr algn="l" indent="0" marL="0">
-              <a:buNone/>
-            </a:pPr>
-            <a:r>
-              <a:rPr lang="en-US" sz="900" dirty="0">
-                <a:solidFill>
-                  <a:srgbClr val="AEC0DA"/>
+            <a:pPr indent="0" marL="0">
+              <a:buNone/>
+            </a:pPr>
+            <a:r>
+              <a:rPr lang="en-US" sz="1500" b="1" spc="300" kern="0" dirty="0">
+                <a:solidFill>
+                  <a:srgbClr val="7B4FCF"/>
                 </a:solidFill>
                 <a:latin typeface="Calibri" pitchFamily="34" charset="0"/>
                 <a:ea typeface="Calibri" pitchFamily="34" charset="-122"/>
                 <a:cs typeface="Calibri" pitchFamily="34" charset="-120"/>
               </a:rPr>
+              <a:t>INTEGRACIÓN</a:t>
+            </a:r>
+            <a:endParaRPr lang="en-US" sz="1500" dirty="0"/>
+          </a:p>
+        </p:txBody>
+      </p:sp>
+      <p:sp>
+        <p:nvSpPr>
+          <p:cNvPr id="18" name="Text 11"/>
+          <p:cNvSpPr txBox="1"/>
+          <p:nvPr/>
+        </p:nvSpPr>
+        <p:spPr>
+          <a:xfrm>
+            <a:off x="566928" y="2788920"/>
+            <a:ext cx="7406640" cy="1554480"/>
+          </a:xfrm>
+          <a:prstGeom prst="rect">
+            <a:avLst/>
+          </a:prstGeom>
+          <a:noFill/>
+          <a:ln/>
+        </p:spPr>
+        <p:txBody>
+          <a:bodyPr wrap="square" lIns="0" tIns="0" rIns="0" bIns="0" rtlCol="0" anchor="ctr"/>
+          <a:lstStyle/>
+          <a:p>
+            <a:pPr indent="0" marL="0">
+              <a:lnSpc>
+                <a:spcPct val="105000"/>
+              </a:lnSpc>
+              <a:buNone/>
+            </a:pPr>
+            <a:r>
+              <a:rPr lang="en-US" sz="3200" b="1" dirty="0">
+                <a:solidFill>
+                  <a:srgbClr val="FFFFFF"/>
+                </a:solidFill>
+                <a:latin typeface="Cambria" pitchFamily="34" charset="0"/>
+                <a:ea typeface="Cambria" pitchFamily="34" charset="-122"/>
+                <a:cs typeface="Cambria" pitchFamily="34" charset="-120"/>
+              </a:rPr>
+              <a:t>CASOS INTEGRADORES</a:t>
+            </a:r>
+            <a:endParaRPr lang="en-US" sz="3200" dirty="0"/>
+          </a:p>
+        </p:txBody>
+      </p:sp>
+      <p:sp>
+        <p:nvSpPr>
+          <p:cNvPr id="19" name="Text 12"/>
+          <p:cNvSpPr txBox="1"/>
+          <p:nvPr/>
+        </p:nvSpPr>
+        <p:spPr>
+          <a:xfrm>
+            <a:off x="566928" y="4206240"/>
+            <a:ext cx="7223760" cy="822960"/>
+          </a:xfrm>
+          <a:prstGeom prst="rect">
+            <a:avLst/>
+          </a:prstGeom>
+          <a:noFill/>
+          <a:ln/>
+        </p:spPr>
+        <p:txBody>
+          <a:bodyPr wrap="square" lIns="0" tIns="0" rIns="0" bIns="0" rtlCol="0" anchor="ctr"/>
+          <a:lstStyle/>
+          <a:p>
+            <a:pPr indent="0" marL="0">
+              <a:lnSpc>
+                <a:spcPct val="118000"/>
+              </a:lnSpc>
+              <a:buNone/>
+            </a:pPr>
+            <a:r>
+              <a:rPr lang="en-US" sz="1550" i="1" dirty="0">
+                <a:solidFill>
+                  <a:srgbClr val="D7E1F0"/>
+                </a:solidFill>
+                <a:latin typeface="Calibri" pitchFamily="34" charset="0"/>
+                <a:ea typeface="Calibri" pitchFamily="34" charset="-122"/>
+                <a:cs typeface="Calibri" pitchFamily="34" charset="-120"/>
+              </a:rPr>
+              <a:t>Cuatro situaciones reales de una cooperativa financiera para aplicar todo lo aprendido.</a:t>
+            </a:r>
+            <a:endParaRPr lang="en-US" sz="1550" dirty="0"/>
+          </a:p>
+        </p:txBody>
+      </p:sp>
+      <p:pic>
+        <p:nvPicPr>
+          <p:cNvPr id="20" name="Image 4" descr="/tmp/claude-0/-home-user-riesgo/0ff9ff46-1396-5bd8-b3ac-2280dfbbbc55/scratchpad/work/gen/logo_white.png">    </p:cNvPr>
+          <p:cNvPicPr>
+            <a:picLocks noChangeAspect="1"/>
+          </p:cNvPicPr>
+          <p:nvPr/>
+        </p:nvPicPr>
+        <p:blipFill>
+          <a:blip r:embed="rId5"/>
+          <a:stretch>
+            <a:fillRect/>
+          </a:stretch>
+        </p:blipFill>
+        <p:spPr>
+          <a:xfrm>
+            <a:off x="566928" y="5989320"/>
+            <a:ext cx="1417320" cy="398267"/>
+          </a:xfrm>
+          <a:prstGeom prst="rect">
+            <a:avLst/>
+          </a:prstGeom>
+        </p:spPr>
+      </p:pic>
+      <p:sp>
+        <p:nvSpPr>
+          <p:cNvPr id="21" name="Text 13"/>
+          <p:cNvSpPr txBox="1"/>
+          <p:nvPr/>
+        </p:nvSpPr>
+        <p:spPr>
+          <a:xfrm>
+            <a:off x="566928" y="6473952"/>
+            <a:ext cx="7315200" cy="274320"/>
+          </a:xfrm>
+          <a:prstGeom prst="rect">
+            <a:avLst/>
+          </a:prstGeom>
+          <a:noFill/>
+          <a:ln/>
+        </p:spPr>
+        <p:txBody>
+          <a:bodyPr wrap="square" lIns="0" tIns="0" rIns="0" bIns="0" rtlCol="0" anchor="ctr"/>
+          <a:lstStyle/>
+          <a:p>
+            <a:pPr algn="l" indent="0" marL="0">
+              <a:buNone/>
+            </a:pPr>
+            <a:r>
+              <a:rPr lang="en-US" sz="900" dirty="0">
+                <a:solidFill>
+                  <a:srgbClr val="AEC0DA"/>
+                </a:solidFill>
+                <a:latin typeface="Calibri" pitchFamily="34" charset="0"/>
+                <a:ea typeface="Calibri" pitchFamily="34" charset="-122"/>
+                <a:cs typeface="Calibri" pitchFamily="34" charset="-120"/>
+              </a:rPr>
               <a:t>GESTIÓN INTEGRAL DE RIESGOS  ·  COMEDICA DE R.L.</a:t>
             </a:r>
             <a:endParaRPr lang="en-US" sz="900" dirty="0"/>
@@ -23434,7 +25058,7 @@
       </p:sp>
       <p:sp>
         <p:nvSpPr>
-          <p:cNvPr id="11" name="Text 6"/>
+          <p:cNvPr id="22" name="Text 14"/>
           <p:cNvSpPr txBox="1"/>
           <p:nvPr/>
         </p:nvSpPr>
@@ -23530,7 +25154,7 @@
             <a:r>
               <a:rPr lang="en-US" sz="1300" b="1" spc="200" kern="0" dirty="0">
                 <a:solidFill>
-                  <a:srgbClr val="E3A73B"/>
+                  <a:srgbClr val="0EA5A0"/>
                 </a:solidFill>
                 <a:latin typeface="Calibri" pitchFamily="34" charset="0"/>
                 <a:ea typeface="Calibri" pitchFamily="34" charset="-122"/>
@@ -23621,14 +25245,14 @@
             <a:avLst/>
           </a:prstGeom>
           <a:solidFill>
-            <a:srgbClr val="E3A73B"/>
+            <a:srgbClr val="0EA5A0"/>
           </a:solidFill>
           <a:ln/>
         </p:spPr>
       </p:sp>
       <p:pic>
         <p:nvPicPr>
-          <p:cNvPr id="7" name="Image 0" descr="/tmp/claude-0/-home-user-riesgo/0ff9ff46-1396-5bd8-b3ac-2280dfbbbc55/scratchpad/work/gen/icons/server_navy.png">    </p:cNvPr>
+          <p:cNvPr id="7" name="Image 0" descr="/tmp/claude-0/-home-user-riesgo/0ff9ff46-1396-5bd8-b3ac-2280dfbbbc55/scratchpad/work/gen/icons/server_white.png">    </p:cNvPr>
           <p:cNvPicPr>
             <a:picLocks noChangeAspect="1"/>
           </p:cNvPicPr>
@@ -23677,7 +25301,7 @@
             <a:r>
               <a:rPr lang="en-US" sz="1200" b="1" spc="200" kern="0" dirty="0">
                 <a:solidFill>
-                  <a:srgbClr val="E3A73B"/>
+                  <a:srgbClr val="0EA5A0"/>
                 </a:solidFill>
                 <a:latin typeface="Calibri" pitchFamily="34" charset="0"/>
                 <a:ea typeface="Calibri" pitchFamily="34" charset="-122"/>
@@ -24190,7 +25814,7 @@
             <a:r>
               <a:rPr lang="en-US" sz="900" dirty="0">
                 <a:solidFill>
-                  <a:srgbClr val="8FA0B5"/>
+                  <a:srgbClr val="5B6B82"/>
                 </a:solidFill>
                 <a:latin typeface="Calibri" pitchFamily="34" charset="0"/>
                 <a:ea typeface="Calibri" pitchFamily="34" charset="-122"/>
@@ -24229,7 +25853,7 @@
             <a:r>
               <a:rPr lang="en-US" sz="900" dirty="0">
                 <a:solidFill>
-                  <a:srgbClr val="8FA0B5"/>
+                  <a:srgbClr val="5B6B82"/>
                 </a:solidFill>
                 <a:latin typeface="Calibri" pitchFamily="34" charset="0"/>
                 <a:ea typeface="Calibri" pitchFamily="34" charset="-122"/>
@@ -24300,7 +25924,7 @@
             <a:r>
               <a:rPr lang="en-US" sz="1300" b="1" spc="200" kern="0" dirty="0">
                 <a:solidFill>
-                  <a:srgbClr val="E3A73B"/>
+                  <a:srgbClr val="0EA5A0"/>
                 </a:solidFill>
                 <a:latin typeface="Calibri" pitchFamily="34" charset="0"/>
                 <a:ea typeface="Calibri" pitchFamily="34" charset="-122"/>
@@ -24410,7 +26034,7 @@
             </a:avLst>
           </a:prstGeom>
           <a:solidFill>
-            <a:srgbClr val="133B6C"/>
+            <a:srgbClr val="0EA5A0"/>
           </a:solidFill>
           <a:ln/>
         </p:spPr>
@@ -24471,7 +26095,7 @@
             </a:avLst>
           </a:prstGeom>
           <a:solidFill>
-            <a:srgbClr val="133B6C"/>
+            <a:srgbClr val="0EA5A0"/>
           </a:solidFill>
           <a:ln/>
         </p:spPr>
@@ -24552,7 +26176,7 @@
             <a:avLst/>
           </a:prstGeom>
           <a:solidFill>
-            <a:srgbClr val="2E9E5B"/>
+            <a:srgbClr val="2FAE60"/>
           </a:solidFill>
           <a:ln/>
         </p:spPr>
@@ -24608,7 +26232,7 @@
             <a:r>
               <a:rPr lang="en-US" sz="1150" b="1" spc="50" kern="0" dirty="0">
                 <a:solidFill>
-                  <a:srgbClr val="2E9E5B"/>
+                  <a:srgbClr val="2FAE60"/>
                 </a:solidFill>
                 <a:latin typeface="Calibri" pitchFamily="34" charset="0"/>
                 <a:ea typeface="Calibri" pitchFamily="34" charset="-122"/>
@@ -24846,7 +26470,7 @@
             <a:avLst/>
           </a:prstGeom>
           <a:solidFill>
-            <a:srgbClr val="C0392B"/>
+            <a:srgbClr val="E0392B"/>
           </a:solidFill>
           <a:ln/>
         </p:spPr>
@@ -24902,7 +26526,7 @@
             <a:r>
               <a:rPr lang="en-US" sz="1150" b="1" spc="50" kern="0" dirty="0">
                 <a:solidFill>
-                  <a:srgbClr val="C0392B"/>
+                  <a:srgbClr val="E0392B"/>
                 </a:solidFill>
                 <a:latin typeface="Calibri" pitchFamily="34" charset="0"/>
                 <a:ea typeface="Calibri" pitchFamily="34" charset="-122"/>
@@ -24983,7 +26607,7 @@
             <a:r>
               <a:rPr lang="en-US" sz="900" dirty="0">
                 <a:solidFill>
-                  <a:srgbClr val="8FA0B5"/>
+                  <a:srgbClr val="5B6B82"/>
                 </a:solidFill>
                 <a:latin typeface="Calibri" pitchFamily="34" charset="0"/>
                 <a:ea typeface="Calibri" pitchFamily="34" charset="-122"/>
@@ -25022,7 +26646,7 @@
             <a:r>
               <a:rPr lang="en-US" sz="900" dirty="0">
                 <a:solidFill>
-                  <a:srgbClr val="8FA0B5"/>
+                  <a:srgbClr val="5B6B82"/>
                 </a:solidFill>
                 <a:latin typeface="Calibri" pitchFamily="34" charset="0"/>
                 <a:ea typeface="Calibri" pitchFamily="34" charset="-122"/>
@@ -25093,7 +26717,7 @@
             <a:r>
               <a:rPr lang="en-US" sz="1300" b="1" spc="200" kern="0" dirty="0">
                 <a:solidFill>
-                  <a:srgbClr val="E3A73B"/>
+                  <a:srgbClr val="C2185B"/>
                 </a:solidFill>
                 <a:latin typeface="Calibri" pitchFamily="34" charset="0"/>
                 <a:ea typeface="Calibri" pitchFamily="34" charset="-122"/>
@@ -25184,14 +26808,14 @@
             <a:avLst/>
           </a:prstGeom>
           <a:solidFill>
-            <a:srgbClr val="E3A73B"/>
+            <a:srgbClr val="C2185B"/>
           </a:solidFill>
           <a:ln/>
         </p:spPr>
       </p:sp>
       <p:pic>
         <p:nvPicPr>
-          <p:cNvPr id="7" name="Image 0" descr="/tmp/claude-0/-home-user-riesgo/0ff9ff46-1396-5bd8-b3ac-2280dfbbbc55/scratchpad/work/gen/icons/social_navy.png">    </p:cNvPr>
+          <p:cNvPr id="7" name="Image 0" descr="/tmp/claude-0/-home-user-riesgo/0ff9ff46-1396-5bd8-b3ac-2280dfbbbc55/scratchpad/work/gen/icons/social_white.png">    </p:cNvPr>
           <p:cNvPicPr>
             <a:picLocks noChangeAspect="1"/>
           </p:cNvPicPr>
@@ -25240,7 +26864,7 @@
             <a:r>
               <a:rPr lang="en-US" sz="1200" b="1" spc="200" kern="0" dirty="0">
                 <a:solidFill>
-                  <a:srgbClr val="E3A73B"/>
+                  <a:srgbClr val="C2185B"/>
                 </a:solidFill>
                 <a:latin typeface="Calibri" pitchFamily="34" charset="0"/>
                 <a:ea typeface="Calibri" pitchFamily="34" charset="-122"/>
@@ -25753,7 +27377,7 @@
             <a:r>
               <a:rPr lang="en-US" sz="900" dirty="0">
                 <a:solidFill>
-                  <a:srgbClr val="8FA0B5"/>
+                  <a:srgbClr val="5B6B82"/>
                 </a:solidFill>
                 <a:latin typeface="Calibri" pitchFamily="34" charset="0"/>
                 <a:ea typeface="Calibri" pitchFamily="34" charset="-122"/>
@@ -25792,7 +27416,7 @@
             <a:r>
               <a:rPr lang="en-US" sz="900" dirty="0">
                 <a:solidFill>
-                  <a:srgbClr val="8FA0B5"/>
+                  <a:srgbClr val="5B6B82"/>
                 </a:solidFill>
                 <a:latin typeface="Calibri" pitchFamily="34" charset="0"/>
                 <a:ea typeface="Calibri" pitchFamily="34" charset="-122"/>
@@ -25863,7 +27487,7 @@
             <a:r>
               <a:rPr lang="en-US" sz="1300" b="1" spc="200" kern="0" dirty="0">
                 <a:solidFill>
-                  <a:srgbClr val="E3A73B"/>
+                  <a:srgbClr val="C2185B"/>
                 </a:solidFill>
                 <a:latin typeface="Calibri" pitchFamily="34" charset="0"/>
                 <a:ea typeface="Calibri" pitchFamily="34" charset="-122"/>
@@ -25973,7 +27597,7 @@
             </a:avLst>
           </a:prstGeom>
           <a:solidFill>
-            <a:srgbClr val="133B6C"/>
+            <a:srgbClr val="C2185B"/>
           </a:solidFill>
           <a:ln/>
         </p:spPr>
@@ -26054,7 +27678,7 @@
             <a:avLst/>
           </a:prstGeom>
           <a:solidFill>
-            <a:srgbClr val="2E9E5B"/>
+            <a:srgbClr val="2FAE60"/>
           </a:solidFill>
           <a:ln/>
         </p:spPr>
@@ -26110,7 +27734,7 @@
             <a:r>
               <a:rPr lang="en-US" sz="1150" b="1" spc="50" kern="0" dirty="0">
                 <a:solidFill>
-                  <a:srgbClr val="2E9E5B"/>
+                  <a:srgbClr val="2FAE60"/>
                 </a:solidFill>
                 <a:latin typeface="Calibri" pitchFamily="34" charset="0"/>
                 <a:ea typeface="Calibri" pitchFamily="34" charset="-122"/>
@@ -26348,7 +27972,7 @@
             <a:avLst/>
           </a:prstGeom>
           <a:solidFill>
-            <a:srgbClr val="C0392B"/>
+            <a:srgbClr val="E0392B"/>
           </a:solidFill>
           <a:ln/>
         </p:spPr>
@@ -26404,7 +28028,7 @@
             <a:r>
               <a:rPr lang="en-US" sz="1150" b="1" spc="50" kern="0" dirty="0">
                 <a:solidFill>
-                  <a:srgbClr val="C0392B"/>
+                  <a:srgbClr val="E0392B"/>
                 </a:solidFill>
                 <a:latin typeface="Calibri" pitchFamily="34" charset="0"/>
                 <a:ea typeface="Calibri" pitchFamily="34" charset="-122"/>
@@ -26485,7 +28109,7 @@
             <a:r>
               <a:rPr lang="en-US" sz="900" dirty="0">
                 <a:solidFill>
-                  <a:srgbClr val="8FA0B5"/>
+                  <a:srgbClr val="5B6B82"/>
                 </a:solidFill>
                 <a:latin typeface="Calibri" pitchFamily="34" charset="0"/>
                 <a:ea typeface="Calibri" pitchFamily="34" charset="-122"/>
@@ -26524,7 +28148,7 @@
             <a:r>
               <a:rPr lang="en-US" sz="900" dirty="0">
                 <a:solidFill>
-                  <a:srgbClr val="8FA0B5"/>
+                  <a:srgbClr val="5B6B82"/>
                 </a:solidFill>
                 <a:latin typeface="Calibri" pitchFamily="34" charset="0"/>
                 <a:ea typeface="Calibri" pitchFamily="34" charset="-122"/>
@@ -26595,7 +28219,7 @@
             <a:r>
               <a:rPr lang="en-US" sz="1300" b="1" spc="200" kern="0" dirty="0">
                 <a:solidFill>
-                  <a:srgbClr val="E3A73B"/>
+                  <a:srgbClr val="E0392B"/>
                 </a:solidFill>
                 <a:latin typeface="Calibri" pitchFamily="34" charset="0"/>
                 <a:ea typeface="Calibri" pitchFamily="34" charset="-122"/>
@@ -26686,14 +28310,14 @@
             <a:avLst/>
           </a:prstGeom>
           <a:solidFill>
-            <a:srgbClr val="E3A73B"/>
+            <a:srgbClr val="E0392B"/>
           </a:solidFill>
           <a:ln/>
         </p:spPr>
       </p:sp>
       <p:pic>
         <p:nvPicPr>
-          <p:cNvPr id="7" name="Image 0" descr="/tmp/claude-0/-home-user-riesgo/0ff9ff46-1396-5bd8-b3ac-2280dfbbbc55/scratchpad/work/gen/icons/search_doc_navy.png">    </p:cNvPr>
+          <p:cNvPr id="7" name="Image 0" descr="/tmp/claude-0/-home-user-riesgo/0ff9ff46-1396-5bd8-b3ac-2280dfbbbc55/scratchpad/work/gen/icons/search_doc_white.png">    </p:cNvPr>
           <p:cNvPicPr>
             <a:picLocks noChangeAspect="1"/>
           </p:cNvPicPr>
@@ -26742,7 +28366,7 @@
             <a:r>
               <a:rPr lang="en-US" sz="1200" b="1" spc="200" kern="0" dirty="0">
                 <a:solidFill>
-                  <a:srgbClr val="E3A73B"/>
+                  <a:srgbClr val="E0392B"/>
                 </a:solidFill>
                 <a:latin typeface="Calibri" pitchFamily="34" charset="0"/>
                 <a:ea typeface="Calibri" pitchFamily="34" charset="-122"/>
@@ -27255,7 +28879,7 @@
             <a:r>
               <a:rPr lang="en-US" sz="900" dirty="0">
                 <a:solidFill>
-                  <a:srgbClr val="8FA0B5"/>
+                  <a:srgbClr val="5B6B82"/>
                 </a:solidFill>
                 <a:latin typeface="Calibri" pitchFamily="34" charset="0"/>
                 <a:ea typeface="Calibri" pitchFamily="34" charset="-122"/>
@@ -27294,7 +28918,7 @@
             <a:r>
               <a:rPr lang="en-US" sz="900" dirty="0">
                 <a:solidFill>
-                  <a:srgbClr val="8FA0B5"/>
+                  <a:srgbClr val="5B6B82"/>
                 </a:solidFill>
                 <a:latin typeface="Calibri" pitchFamily="34" charset="0"/>
                 <a:ea typeface="Calibri" pitchFamily="34" charset="-122"/>
@@ -27365,7 +28989,7 @@
             <a:r>
               <a:rPr lang="en-US" sz="1300" b="1" spc="200" kern="0" dirty="0">
                 <a:solidFill>
-                  <a:srgbClr val="E3A73B"/>
+                  <a:srgbClr val="F0AD35"/>
                 </a:solidFill>
                 <a:latin typeface="Calibri" pitchFamily="34" charset="0"/>
                 <a:ea typeface="Calibri" pitchFamily="34" charset="-122"/>
@@ -27502,7 +29126,7 @@
             <a:avLst/>
           </a:prstGeom>
           <a:solidFill>
-            <a:srgbClr val="E3A73B"/>
+            <a:srgbClr val="F0AD35"/>
           </a:solidFill>
           <a:ln/>
         </p:spPr>
@@ -27656,7 +29280,7 @@
             <a:avLst/>
           </a:prstGeom>
           <a:solidFill>
-            <a:srgbClr val="E3A73B"/>
+            <a:srgbClr val="F0AD35"/>
           </a:solidFill>
           <a:ln/>
         </p:spPr>
@@ -27810,7 +29434,7 @@
             <a:avLst/>
           </a:prstGeom>
           <a:solidFill>
-            <a:srgbClr val="E3A73B"/>
+            <a:srgbClr val="F0AD35"/>
           </a:solidFill>
           <a:ln/>
         </p:spPr>
@@ -27964,7 +29588,7 @@
             <a:avLst/>
           </a:prstGeom>
           <a:solidFill>
-            <a:srgbClr val="E3A73B"/>
+            <a:srgbClr val="F0AD35"/>
           </a:solidFill>
           <a:ln/>
         </p:spPr>
@@ -28118,7 +29742,7 @@
             <a:avLst/>
           </a:prstGeom>
           <a:solidFill>
-            <a:srgbClr val="E3A73B"/>
+            <a:srgbClr val="F0AD35"/>
           </a:solidFill>
           <a:ln/>
         </p:spPr>
@@ -28272,7 +29896,7 @@
             <a:avLst/>
           </a:prstGeom>
           <a:solidFill>
-            <a:srgbClr val="E3A73B"/>
+            <a:srgbClr val="F0AD35"/>
           </a:solidFill>
           <a:ln/>
         </p:spPr>
@@ -28426,7 +30050,7 @@
             <a:avLst/>
           </a:prstGeom>
           <a:solidFill>
-            <a:srgbClr val="E3A73B"/>
+            <a:srgbClr val="F0AD35"/>
           </a:solidFill>
           <a:ln/>
         </p:spPr>
@@ -28580,7 +30204,7 @@
             <a:avLst/>
           </a:prstGeom>
           <a:solidFill>
-            <a:srgbClr val="E3A73B"/>
+            <a:srgbClr val="F0AD35"/>
           </a:solidFill>
           <a:ln/>
         </p:spPr>
@@ -28717,7 +30341,7 @@
             <a:r>
               <a:rPr lang="en-US" sz="900" dirty="0">
                 <a:solidFill>
-                  <a:srgbClr val="8FA0B5"/>
+                  <a:srgbClr val="5B6B82"/>
                 </a:solidFill>
                 <a:latin typeface="Calibri" pitchFamily="34" charset="0"/>
                 <a:ea typeface="Calibri" pitchFamily="34" charset="-122"/>
@@ -28756,7 +30380,7 @@
             <a:r>
               <a:rPr lang="en-US" sz="900" dirty="0">
                 <a:solidFill>
-                  <a:srgbClr val="8FA0B5"/>
+                  <a:srgbClr val="5B6B82"/>
                 </a:solidFill>
                 <a:latin typeface="Calibri" pitchFamily="34" charset="0"/>
                 <a:ea typeface="Calibri" pitchFamily="34" charset="-122"/>
@@ -28827,7 +30451,7 @@
             <a:r>
               <a:rPr lang="en-US" sz="1300" b="1" spc="200" kern="0" dirty="0">
                 <a:solidFill>
-                  <a:srgbClr val="E3A73B"/>
+                  <a:srgbClr val="E0392B"/>
                 </a:solidFill>
                 <a:latin typeface="Calibri" pitchFamily="34" charset="0"/>
                 <a:ea typeface="Calibri" pitchFamily="34" charset="-122"/>
@@ -28937,7 +30561,7 @@
             </a:avLst>
           </a:prstGeom>
           <a:solidFill>
-            <a:srgbClr val="133B6C"/>
+            <a:srgbClr val="E0392B"/>
           </a:solidFill>
           <a:ln/>
         </p:spPr>
@@ -28998,7 +30622,7 @@
             </a:avLst>
           </a:prstGeom>
           <a:solidFill>
-            <a:srgbClr val="133B6C"/>
+            <a:srgbClr val="E0392B"/>
           </a:solidFill>
           <a:ln/>
         </p:spPr>
@@ -29079,7 +30703,7 @@
             <a:avLst/>
           </a:prstGeom>
           <a:solidFill>
-            <a:srgbClr val="2E9E5B"/>
+            <a:srgbClr val="2FAE60"/>
           </a:solidFill>
           <a:ln/>
         </p:spPr>
@@ -29135,7 +30759,7 @@
             <a:r>
               <a:rPr lang="en-US" sz="1150" b="1" spc="50" kern="0" dirty="0">
                 <a:solidFill>
-                  <a:srgbClr val="2E9E5B"/>
+                  <a:srgbClr val="2FAE60"/>
                 </a:solidFill>
                 <a:latin typeface="Calibri" pitchFamily="34" charset="0"/>
                 <a:ea typeface="Calibri" pitchFamily="34" charset="-122"/>
@@ -29373,7 +30997,7 @@
             <a:avLst/>
           </a:prstGeom>
           <a:solidFill>
-            <a:srgbClr val="C0392B"/>
+            <a:srgbClr val="E0392B"/>
           </a:solidFill>
           <a:ln/>
         </p:spPr>
@@ -29429,7 +31053,7 @@
             <a:r>
               <a:rPr lang="en-US" sz="1150" b="1" spc="50" kern="0" dirty="0">
                 <a:solidFill>
-                  <a:srgbClr val="C0392B"/>
+                  <a:srgbClr val="E0392B"/>
                 </a:solidFill>
                 <a:latin typeface="Calibri" pitchFamily="34" charset="0"/>
                 <a:ea typeface="Calibri" pitchFamily="34" charset="-122"/>
@@ -29510,7 +31134,7 @@
             <a:r>
               <a:rPr lang="en-US" sz="900" dirty="0">
                 <a:solidFill>
-                  <a:srgbClr val="8FA0B5"/>
+                  <a:srgbClr val="5B6B82"/>
                 </a:solidFill>
                 <a:latin typeface="Calibri" pitchFamily="34" charset="0"/>
                 <a:ea typeface="Calibri" pitchFamily="34" charset="-122"/>
@@ -29549,7 +31173,7 @@
             <a:r>
               <a:rPr lang="en-US" sz="900" dirty="0">
                 <a:solidFill>
-                  <a:srgbClr val="8FA0B5"/>
+                  <a:srgbClr val="5B6B82"/>
                 </a:solidFill>
                 <a:latin typeface="Calibri" pitchFamily="34" charset="0"/>
                 <a:ea typeface="Calibri" pitchFamily="34" charset="-122"/>
@@ -29620,7 +31244,7 @@
             <a:r>
               <a:rPr lang="en-US" sz="1300" b="1" spc="200" kern="0" dirty="0">
                 <a:solidFill>
-                  <a:srgbClr val="E3A73B"/>
+                  <a:srgbClr val="2E5EAA"/>
                 </a:solidFill>
                 <a:latin typeface="Calibri" pitchFamily="34" charset="0"/>
                 <a:ea typeface="Calibri" pitchFamily="34" charset="-122"/>
@@ -29711,14 +31335,14 @@
             <a:avLst/>
           </a:prstGeom>
           <a:solidFill>
-            <a:srgbClr val="E3A73B"/>
+            <a:srgbClr val="2E5EAA"/>
           </a:solidFill>
           <a:ln/>
         </p:spPr>
       </p:sp>
       <p:pic>
         <p:nvPicPr>
-          <p:cNvPr id="7" name="Image 0" descr="/tmp/claude-0/-home-user-riesgo/0ff9ff46-1396-5bd8-b3ac-2280dfbbbc55/scratchpad/work/gen/icons/form_navy.png">    </p:cNvPr>
+          <p:cNvPr id="7" name="Image 0" descr="/tmp/claude-0/-home-user-riesgo/0ff9ff46-1396-5bd8-b3ac-2280dfbbbc55/scratchpad/work/gen/icons/form_white.png">    </p:cNvPr>
           <p:cNvPicPr>
             <a:picLocks noChangeAspect="1"/>
           </p:cNvPicPr>
@@ -29767,7 +31391,7 @@
             <a:r>
               <a:rPr lang="en-US" sz="1200" b="1" spc="200" kern="0" dirty="0">
                 <a:solidFill>
-                  <a:srgbClr val="E3A73B"/>
+                  <a:srgbClr val="2E5EAA"/>
                 </a:solidFill>
                 <a:latin typeface="Calibri" pitchFamily="34" charset="0"/>
                 <a:ea typeface="Calibri" pitchFamily="34" charset="-122"/>
@@ -30280,7 +31904,7 @@
             <a:r>
               <a:rPr lang="en-US" sz="900" dirty="0">
                 <a:solidFill>
-                  <a:srgbClr val="8FA0B5"/>
+                  <a:srgbClr val="5B6B82"/>
                 </a:solidFill>
                 <a:latin typeface="Calibri" pitchFamily="34" charset="0"/>
                 <a:ea typeface="Calibri" pitchFamily="34" charset="-122"/>
@@ -30319,7 +31943,7 @@
             <a:r>
               <a:rPr lang="en-US" sz="900" dirty="0">
                 <a:solidFill>
-                  <a:srgbClr val="8FA0B5"/>
+                  <a:srgbClr val="5B6B82"/>
                 </a:solidFill>
                 <a:latin typeface="Calibri" pitchFamily="34" charset="0"/>
                 <a:ea typeface="Calibri" pitchFamily="34" charset="-122"/>
@@ -30390,7 +32014,7 @@
             <a:r>
               <a:rPr lang="en-US" sz="1300" b="1" spc="200" kern="0" dirty="0">
                 <a:solidFill>
-                  <a:srgbClr val="E3A73B"/>
+                  <a:srgbClr val="2E5EAA"/>
                 </a:solidFill>
                 <a:latin typeface="Calibri" pitchFamily="34" charset="0"/>
                 <a:ea typeface="Calibri" pitchFamily="34" charset="-122"/>
@@ -30500,7 +32124,7 @@
             </a:avLst>
           </a:prstGeom>
           <a:solidFill>
-            <a:srgbClr val="133B6C"/>
+            <a:srgbClr val="2E5EAA"/>
           </a:solidFill>
           <a:ln/>
         </p:spPr>
@@ -30561,7 +32185,7 @@
             </a:avLst>
           </a:prstGeom>
           <a:solidFill>
-            <a:srgbClr val="133B6C"/>
+            <a:srgbClr val="2E5EAA"/>
           </a:solidFill>
           <a:ln/>
         </p:spPr>
@@ -30642,7 +32266,7 @@
             <a:avLst/>
           </a:prstGeom>
           <a:solidFill>
-            <a:srgbClr val="2E9E5B"/>
+            <a:srgbClr val="2FAE60"/>
           </a:solidFill>
           <a:ln/>
         </p:spPr>
@@ -30698,7 +32322,7 @@
             <a:r>
               <a:rPr lang="en-US" sz="1150" b="1" spc="50" kern="0" dirty="0">
                 <a:solidFill>
-                  <a:srgbClr val="2E9E5B"/>
+                  <a:srgbClr val="2FAE60"/>
                 </a:solidFill>
                 <a:latin typeface="Calibri" pitchFamily="34" charset="0"/>
                 <a:ea typeface="Calibri" pitchFamily="34" charset="-122"/>
@@ -30936,7 +32560,7 @@
             <a:avLst/>
           </a:prstGeom>
           <a:solidFill>
-            <a:srgbClr val="C0392B"/>
+            <a:srgbClr val="E0392B"/>
           </a:solidFill>
           <a:ln/>
         </p:spPr>
@@ -30992,7 +32616,7 @@
             <a:r>
               <a:rPr lang="en-US" sz="1150" b="1" spc="50" kern="0" dirty="0">
                 <a:solidFill>
-                  <a:srgbClr val="C0392B"/>
+                  <a:srgbClr val="E0392B"/>
                 </a:solidFill>
                 <a:latin typeface="Calibri" pitchFamily="34" charset="0"/>
                 <a:ea typeface="Calibri" pitchFamily="34" charset="-122"/>
@@ -31073,7 +32697,7 @@
             <a:r>
               <a:rPr lang="en-US" sz="900" dirty="0">
                 <a:solidFill>
-                  <a:srgbClr val="8FA0B5"/>
+                  <a:srgbClr val="5B6B82"/>
                 </a:solidFill>
                 <a:latin typeface="Calibri" pitchFamily="34" charset="0"/>
                 <a:ea typeface="Calibri" pitchFamily="34" charset="-122"/>
@@ -31112,7 +32736,7 @@
             <a:r>
               <a:rPr lang="en-US" sz="900" dirty="0">
                 <a:solidFill>
-                  <a:srgbClr val="8FA0B5"/>
+                  <a:srgbClr val="5B6B82"/>
                 </a:solidFill>
                 <a:latin typeface="Calibri" pitchFamily="34" charset="0"/>
                 <a:ea typeface="Calibri" pitchFamily="34" charset="-122"/>
@@ -31163,9 +32787,49 @@
           <p:nvPr/>
         </p:nvSpPr>
         <p:spPr>
-          <a:xfrm>
-            <a:off x="-2926080" y="2926080"/>
-            <a:ext cx="7772400" cy="7772400"/>
+          <a:xfrm rot="720000">
+            <a:off x="7955280" y="-457200"/>
+            <a:ext cx="5669280" cy="7772400"/>
+          </a:xfrm>
+          <a:prstGeom prst="rect">
+            <a:avLst/>
+          </a:prstGeom>
+          <a:solidFill>
+            <a:srgbClr val="F2994A"/>
+          </a:solidFill>
+          <a:ln/>
+        </p:spPr>
+      </p:sp>
+      <p:sp>
+        <p:nvSpPr>
+          <p:cNvPr id="4" name="Shape 1"/>
+          <p:cNvSpPr/>
+          <p:nvPr/>
+        </p:nvSpPr>
+        <p:spPr>
+          <a:xfrm>
+            <a:off x="0" y="0"/>
+            <a:ext cx="8275320" cy="6858000"/>
+          </a:xfrm>
+          <a:prstGeom prst="rect">
+            <a:avLst/>
+          </a:prstGeom>
+          <a:solidFill>
+            <a:srgbClr val="0A1F3B"/>
+          </a:solidFill>
+          <a:ln/>
+        </p:spPr>
+      </p:sp>
+      <p:sp>
+        <p:nvSpPr>
+          <p:cNvPr id="5" name="Shape 2"/>
+          <p:cNvSpPr/>
+          <p:nvPr/>
+        </p:nvSpPr>
+        <p:spPr>
+          <a:xfrm>
+            <a:off x="-3108960" y="3291840"/>
+            <a:ext cx="7498080" cy="7498080"/>
           </a:xfrm>
           <a:prstGeom prst="ellipse">
             <a:avLst/>
@@ -31178,27 +32842,87 @@
       </p:sp>
       <p:sp>
         <p:nvSpPr>
-          <p:cNvPr id="4" name="Shape 1"/>
-          <p:cNvSpPr/>
-          <p:nvPr/>
-        </p:nvSpPr>
-        <p:spPr>
-          <a:xfrm>
-            <a:off x="566928" y="1828800"/>
-            <a:ext cx="1188720" cy="1188720"/>
+          <p:cNvPr id="6" name="Shape 3"/>
+          <p:cNvSpPr/>
+          <p:nvPr/>
+        </p:nvSpPr>
+        <p:spPr>
+          <a:xfrm>
+            <a:off x="8686800" y="2011680"/>
+            <a:ext cx="2834640" cy="2834640"/>
           </a:xfrm>
           <a:prstGeom prst="ellipse">
             <a:avLst/>
           </a:prstGeom>
           <a:solidFill>
-            <a:srgbClr val="E3A73B"/>
+            <a:srgbClr val="0A1F3B"/>
+          </a:solidFill>
+          <a:ln/>
+        </p:spPr>
+      </p:sp>
+      <p:sp>
+        <p:nvSpPr>
+          <p:cNvPr id="7" name="Shape 4"/>
+          <p:cNvSpPr/>
+          <p:nvPr/>
+        </p:nvSpPr>
+        <p:spPr>
+          <a:xfrm>
+            <a:off x="9784080" y="3931920"/>
+            <a:ext cx="1371600" cy="1371600"/>
+          </a:xfrm>
+          <a:prstGeom prst="ellipse">
+            <a:avLst/>
+          </a:prstGeom>
+          <a:solidFill>
+            <a:srgbClr val="FFFFFF"/>
+          </a:solidFill>
+          <a:ln/>
+        </p:spPr>
+      </p:sp>
+      <p:sp>
+        <p:nvSpPr>
+          <p:cNvPr id="8" name="Shape 5"/>
+          <p:cNvSpPr/>
+          <p:nvPr/>
+        </p:nvSpPr>
+        <p:spPr>
+          <a:xfrm>
+            <a:off x="10698480" y="2011680"/>
+            <a:ext cx="960120" cy="960120"/>
+          </a:xfrm>
+          <a:prstGeom prst="ellipse">
+            <a:avLst/>
+          </a:prstGeom>
+          <a:solidFill>
+            <a:srgbClr val="0D2847"/>
+          </a:solidFill>
+          <a:ln/>
+        </p:spPr>
+      </p:sp>
+      <p:sp>
+        <p:nvSpPr>
+          <p:cNvPr id="9" name="Shape 6"/>
+          <p:cNvSpPr/>
+          <p:nvPr/>
+        </p:nvSpPr>
+        <p:spPr>
+          <a:xfrm>
+            <a:off x="9075420" y="2217420"/>
+            <a:ext cx="1051560" cy="1051560"/>
+          </a:xfrm>
+          <a:prstGeom prst="ellipse">
+            <a:avLst/>
+          </a:prstGeom>
+          <a:solidFill>
+            <a:srgbClr val="FFFFFF"/>
           </a:solidFill>
           <a:ln/>
         </p:spPr>
       </p:sp>
       <p:pic>
         <p:nvPicPr>
-          <p:cNvPr id="5" name="Image 0" descr="/tmp/claude-0/-home-user-riesgo/0ff9ff46-1396-5bd8-b3ac-2280dfbbbc55/scratchpad/work/gen/icons/timer30_navy.png">    </p:cNvPr>
+          <p:cNvPr id="10" name="Image 0" descr="/tmp/claude-0/-home-user-riesgo/0ff9ff46-1396-5bd8-b3ac-2280dfbbbc55/scratchpad/work/gen/icons/timer30_orange.png">    </p:cNvPr>
           <p:cNvPicPr>
             <a:picLocks noChangeAspect="1"/>
           </p:cNvPicPr>
@@ -31212,8 +32936,8 @@
         </p:blipFill>
         <p:spPr>
           <a:xfrm>
-            <a:off x="852221" y="2114093"/>
-            <a:ext cx="618134" cy="618134"/>
+            <a:off x="9338310" y="2480310"/>
+            <a:ext cx="525780" cy="525780"/>
           </a:xfrm>
           <a:prstGeom prst="rect">
             <a:avLst/>
@@ -31222,130 +32946,27 @@
       </p:pic>
       <p:sp>
         <p:nvSpPr>
-          <p:cNvPr id="6" name="Text 2"/>
-          <p:cNvSpPr txBox="1"/>
-          <p:nvPr/>
-        </p:nvSpPr>
-        <p:spPr>
-          <a:xfrm>
-            <a:off x="566928" y="2880360"/>
-            <a:ext cx="9601200" cy="365760"/>
-          </a:xfrm>
-          <a:prstGeom prst="rect">
-            <a:avLst/>
-          </a:prstGeom>
-          <a:noFill/>
-          <a:ln/>
-        </p:spPr>
-        <p:txBody>
-          <a:bodyPr wrap="square" lIns="0" tIns="0" rIns="0" bIns="0" rtlCol="0" anchor="ctr"/>
-          <a:lstStyle/>
-          <a:p>
-            <a:pPr indent="0" marL="0">
-              <a:buNone/>
-            </a:pPr>
-            <a:r>
-              <a:rPr lang="en-US" sz="1500" b="1" spc="300" kern="0" dirty="0">
-                <a:solidFill>
-                  <a:srgbClr val="E3A73B"/>
-                </a:solidFill>
-                <a:latin typeface="Calibri" pitchFamily="34" charset="0"/>
-                <a:ea typeface="Calibri" pitchFamily="34" charset="-122"/>
-                <a:cs typeface="Calibri" pitchFamily="34" charset="-120"/>
-              </a:rPr>
-              <a:t>GRAN ACTIVIDAD FINAL</a:t>
-            </a:r>
-            <a:endParaRPr lang="en-US" sz="1500" dirty="0"/>
-          </a:p>
-        </p:txBody>
-      </p:sp>
-      <p:sp>
-        <p:nvSpPr>
-          <p:cNvPr id="7" name="Text 3"/>
-          <p:cNvSpPr txBox="1"/>
-          <p:nvPr/>
-        </p:nvSpPr>
-        <p:spPr>
-          <a:xfrm>
-            <a:off x="566928" y="3246120"/>
-            <a:ext cx="10424160" cy="1554480"/>
-          </a:xfrm>
-          <a:prstGeom prst="rect">
-            <a:avLst/>
-          </a:prstGeom>
-          <a:noFill/>
-          <a:ln/>
-        </p:spPr>
-        <p:txBody>
-          <a:bodyPr wrap="square" lIns="0" tIns="0" rIns="0" bIns="0" rtlCol="0" anchor="ctr"/>
-          <a:lstStyle/>
-          <a:p>
-            <a:pPr indent="0" marL="0">
-              <a:lnSpc>
-                <a:spcPct val="105000"/>
-              </a:lnSpc>
-              <a:buNone/>
-            </a:pPr>
-            <a:r>
-              <a:rPr lang="en-US" sz="3400" b="1" dirty="0">
-                <a:solidFill>
-                  <a:srgbClr val="FFFFFF"/>
-                </a:solidFill>
-                <a:latin typeface="Cambria" pitchFamily="34" charset="0"/>
-                <a:ea typeface="Cambria" pitchFamily="34" charset="-122"/>
-                <a:cs typeface="Cambria" pitchFamily="34" charset="-120"/>
-              </a:rPr>
-              <a:t>DETECTA EL RIESGO</a:t>
-            </a:r>
-            <a:endParaRPr lang="en-US" sz="3400" dirty="0"/>
-          </a:p>
-        </p:txBody>
-      </p:sp>
-      <p:sp>
-        <p:nvSpPr>
-          <p:cNvPr id="8" name="Text 4"/>
-          <p:cNvSpPr txBox="1"/>
-          <p:nvPr/>
-        </p:nvSpPr>
-        <p:spPr>
-          <a:xfrm>
-            <a:off x="566928" y="4663440"/>
-            <a:ext cx="9692640" cy="822960"/>
-          </a:xfrm>
-          <a:prstGeom prst="rect">
-            <a:avLst/>
-          </a:prstGeom>
-          <a:noFill/>
-          <a:ln/>
-        </p:spPr>
-        <p:txBody>
-          <a:bodyPr wrap="square" lIns="0" tIns="0" rIns="0" bIns="0" rtlCol="0" anchor="ctr"/>
-          <a:lstStyle/>
-          <a:p>
-            <a:pPr indent="0" marL="0">
-              <a:lnSpc>
-                <a:spcPct val="115000"/>
-              </a:lnSpc>
-              <a:buNone/>
-            </a:pPr>
-            <a:r>
-              <a:rPr lang="en-US" sz="1600" i="1" dirty="0">
-                <a:solidFill>
-                  <a:srgbClr val="C7D3E5"/>
-                </a:solidFill>
-                <a:latin typeface="Calibri" pitchFamily="34" charset="0"/>
-                <a:ea typeface="Calibri" pitchFamily="34" charset="-122"/>
-                <a:cs typeface="Calibri" pitchFamily="34" charset="-120"/>
-              </a:rPr>
-              <a:t>Pon a prueba todo lo aprendido en esta capacitación.</a:t>
-            </a:r>
-            <a:endParaRPr lang="en-US" sz="1600" dirty="0"/>
-          </a:p>
-        </p:txBody>
+          <p:cNvPr id="11" name="Shape 7"/>
+          <p:cNvSpPr/>
+          <p:nvPr/>
+        </p:nvSpPr>
+        <p:spPr>
+          <a:xfrm>
+            <a:off x="10447020" y="2948940"/>
+            <a:ext cx="868680" cy="868680"/>
+          </a:xfrm>
+          <a:prstGeom prst="ellipse">
+            <a:avLst/>
+          </a:prstGeom>
+          <a:solidFill>
+            <a:srgbClr val="0A1F3B"/>
+          </a:solidFill>
+          <a:ln/>
+        </p:spPr>
       </p:sp>
       <p:pic>
         <p:nvPicPr>
-          <p:cNvPr id="9" name="Image 1" descr="/tmp/claude-0/-home-user-riesgo/0ff9ff46-1396-5bd8-b3ac-2280dfbbbc55/scratchpad/work/gen/logo_white.png">    </p:cNvPr>
+          <p:cNvPr id="12" name="Image 1" descr="/tmp/claude-0/-home-user-riesgo/0ff9ff46-1396-5bd8-b3ac-2280dfbbbc55/scratchpad/work/gen/icons/binoculars_white.png">    </p:cNvPr>
           <p:cNvPicPr>
             <a:picLocks noChangeAspect="1"/>
           </p:cNvPicPr>
@@ -31359,8 +32980,8 @@
         </p:blipFill>
         <p:spPr>
           <a:xfrm>
-            <a:off x="10161727" y="5961888"/>
-            <a:ext cx="1463040" cy="411114"/>
+            <a:off x="10664190" y="3166110"/>
+            <a:ext cx="434340" cy="434340"/>
           </a:xfrm>
           <a:prstGeom prst="rect">
             <a:avLst/>
@@ -31369,14 +32990,102 @@
       </p:pic>
       <p:sp>
         <p:nvSpPr>
-          <p:cNvPr id="10" name="Text 5"/>
-          <p:cNvSpPr txBox="1"/>
-          <p:nvPr/>
-        </p:nvSpPr>
-        <p:spPr>
-          <a:xfrm>
-            <a:off x="566928" y="6473952"/>
-            <a:ext cx="7315200" cy="274320"/>
+          <p:cNvPr id="13" name="Shape 8"/>
+          <p:cNvSpPr/>
+          <p:nvPr/>
+        </p:nvSpPr>
+        <p:spPr>
+          <a:xfrm>
+            <a:off x="9578340" y="3909060"/>
+            <a:ext cx="777240" cy="777240"/>
+          </a:xfrm>
+          <a:prstGeom prst="ellipse">
+            <a:avLst/>
+          </a:prstGeom>
+          <a:solidFill>
+            <a:srgbClr val="FFFFFF"/>
+          </a:solidFill>
+          <a:ln/>
+        </p:spPr>
+      </p:sp>
+      <p:pic>
+        <p:nvPicPr>
+          <p:cNvPr id="14" name="Image 2" descr="/tmp/claude-0/-home-user-riesgo/0ff9ff46-1396-5bd8-b3ac-2280dfbbbc55/scratchpad/work/gen/icons/magnifier_navy.png">    </p:cNvPr>
+          <p:cNvPicPr>
+            <a:picLocks noChangeAspect="1"/>
+          </p:cNvPicPr>
+          <p:nvPr/>
+        </p:nvPicPr>
+        <p:blipFill>
+          <a:blip r:embed="rId3"/>
+          <a:stretch>
+            <a:fillRect/>
+          </a:stretch>
+        </p:blipFill>
+        <p:spPr>
+          <a:xfrm>
+            <a:off x="9772650" y="4103370"/>
+            <a:ext cx="388620" cy="388620"/>
+          </a:xfrm>
+          <a:prstGeom prst="rect">
+            <a:avLst/>
+          </a:prstGeom>
+        </p:spPr>
+      </p:pic>
+      <p:sp>
+        <p:nvSpPr>
+          <p:cNvPr id="15" name="Shape 9"/>
+          <p:cNvSpPr/>
+          <p:nvPr/>
+        </p:nvSpPr>
+        <p:spPr>
+          <a:xfrm>
+            <a:off x="10689336" y="4105656"/>
+            <a:ext cx="658368" cy="658368"/>
+          </a:xfrm>
+          <a:prstGeom prst="ellipse">
+            <a:avLst/>
+          </a:prstGeom>
+          <a:solidFill>
+            <a:srgbClr val="0A1F3B"/>
+          </a:solidFill>
+          <a:ln/>
+        </p:spPr>
+      </p:sp>
+      <p:pic>
+        <p:nvPicPr>
+          <p:cNvPr id="16" name="Image 3" descr="/tmp/claude-0/-home-user-riesgo/0ff9ff46-1396-5bd8-b3ac-2280dfbbbc55/scratchpad/work/gen/icons/target_orange.png">    </p:cNvPr>
+          <p:cNvPicPr>
+            <a:picLocks noChangeAspect="1"/>
+          </p:cNvPicPr>
+          <p:nvPr/>
+        </p:nvPicPr>
+        <p:blipFill>
+          <a:blip r:embed="rId4"/>
+          <a:stretch>
+            <a:fillRect/>
+          </a:stretch>
+        </p:blipFill>
+        <p:spPr>
+          <a:xfrm>
+            <a:off x="10853928" y="4270248"/>
+            <a:ext cx="329184" cy="329184"/>
+          </a:xfrm>
+          <a:prstGeom prst="rect">
+            <a:avLst/>
+          </a:prstGeom>
+        </p:spPr>
+      </p:pic>
+      <p:sp>
+        <p:nvSpPr>
+          <p:cNvPr id="17" name="Text 10"/>
+          <p:cNvSpPr txBox="1"/>
+          <p:nvPr/>
+        </p:nvSpPr>
+        <p:spPr>
+          <a:xfrm>
+            <a:off x="566928" y="2423160"/>
+            <a:ext cx="7315200" cy="365760"/>
           </a:xfrm>
           <a:prstGeom prst="rect">
             <a:avLst/>
@@ -31388,18 +33097,165 @@
           <a:bodyPr wrap="square" lIns="0" tIns="0" rIns="0" bIns="0" rtlCol="0" anchor="ctr"/>
           <a:lstStyle/>
           <a:p>
-            <a:pPr algn="l" indent="0" marL="0">
-              <a:buNone/>
-            </a:pPr>
-            <a:r>
-              <a:rPr lang="en-US" sz="900" dirty="0">
-                <a:solidFill>
-                  <a:srgbClr val="AEC0DA"/>
+            <a:pPr indent="0" marL="0">
+              <a:buNone/>
+            </a:pPr>
+            <a:r>
+              <a:rPr lang="en-US" sz="1500" b="1" spc="300" kern="0" dirty="0">
+                <a:solidFill>
+                  <a:srgbClr val="F2994A"/>
                 </a:solidFill>
                 <a:latin typeface="Calibri" pitchFamily="34" charset="0"/>
                 <a:ea typeface="Calibri" pitchFamily="34" charset="-122"/>
                 <a:cs typeface="Calibri" pitchFamily="34" charset="-120"/>
               </a:rPr>
+              <a:t>GRAN ACTIVIDAD FINAL</a:t>
+            </a:r>
+            <a:endParaRPr lang="en-US" sz="1500" dirty="0"/>
+          </a:p>
+        </p:txBody>
+      </p:sp>
+      <p:sp>
+        <p:nvSpPr>
+          <p:cNvPr id="18" name="Text 11"/>
+          <p:cNvSpPr txBox="1"/>
+          <p:nvPr/>
+        </p:nvSpPr>
+        <p:spPr>
+          <a:xfrm>
+            <a:off x="566928" y="2788920"/>
+            <a:ext cx="7406640" cy="1554480"/>
+          </a:xfrm>
+          <a:prstGeom prst="rect">
+            <a:avLst/>
+          </a:prstGeom>
+          <a:noFill/>
+          <a:ln/>
+        </p:spPr>
+        <p:txBody>
+          <a:bodyPr wrap="square" lIns="0" tIns="0" rIns="0" bIns="0" rtlCol="0" anchor="ctr"/>
+          <a:lstStyle/>
+          <a:p>
+            <a:pPr indent="0" marL="0">
+              <a:lnSpc>
+                <a:spcPct val="105000"/>
+              </a:lnSpc>
+              <a:buNone/>
+            </a:pPr>
+            <a:r>
+              <a:rPr lang="en-US" sz="3200" b="1" dirty="0">
+                <a:solidFill>
+                  <a:srgbClr val="FFFFFF"/>
+                </a:solidFill>
+                <a:latin typeface="Cambria" pitchFamily="34" charset="0"/>
+                <a:ea typeface="Cambria" pitchFamily="34" charset="-122"/>
+                <a:cs typeface="Cambria" pitchFamily="34" charset="-120"/>
+              </a:rPr>
+              <a:t>DETECTA EL RIESGO</a:t>
+            </a:r>
+            <a:endParaRPr lang="en-US" sz="3200" dirty="0"/>
+          </a:p>
+        </p:txBody>
+      </p:sp>
+      <p:sp>
+        <p:nvSpPr>
+          <p:cNvPr id="19" name="Text 12"/>
+          <p:cNvSpPr txBox="1"/>
+          <p:nvPr/>
+        </p:nvSpPr>
+        <p:spPr>
+          <a:xfrm>
+            <a:off x="566928" y="4206240"/>
+            <a:ext cx="7223760" cy="822960"/>
+          </a:xfrm>
+          <a:prstGeom prst="rect">
+            <a:avLst/>
+          </a:prstGeom>
+          <a:noFill/>
+          <a:ln/>
+        </p:spPr>
+        <p:txBody>
+          <a:bodyPr wrap="square" lIns="0" tIns="0" rIns="0" bIns="0" rtlCol="0" anchor="ctr"/>
+          <a:lstStyle/>
+          <a:p>
+            <a:pPr indent="0" marL="0">
+              <a:lnSpc>
+                <a:spcPct val="118000"/>
+              </a:lnSpc>
+              <a:buNone/>
+            </a:pPr>
+            <a:r>
+              <a:rPr lang="en-US" sz="1550" i="1" dirty="0">
+                <a:solidFill>
+                  <a:srgbClr val="D7E1F0"/>
+                </a:solidFill>
+                <a:latin typeface="Calibri" pitchFamily="34" charset="0"/>
+                <a:ea typeface="Calibri" pitchFamily="34" charset="-122"/>
+                <a:cs typeface="Calibri" pitchFamily="34" charset="-120"/>
+              </a:rPr>
+              <a:t>Pon a prueba todo lo aprendido en esta capacitación.</a:t>
+            </a:r>
+            <a:endParaRPr lang="en-US" sz="1550" dirty="0"/>
+          </a:p>
+        </p:txBody>
+      </p:sp>
+      <p:pic>
+        <p:nvPicPr>
+          <p:cNvPr id="20" name="Image 4" descr="/tmp/claude-0/-home-user-riesgo/0ff9ff46-1396-5bd8-b3ac-2280dfbbbc55/scratchpad/work/gen/logo_white.png">    </p:cNvPr>
+          <p:cNvPicPr>
+            <a:picLocks noChangeAspect="1"/>
+          </p:cNvPicPr>
+          <p:nvPr/>
+        </p:nvPicPr>
+        <p:blipFill>
+          <a:blip r:embed="rId5"/>
+          <a:stretch>
+            <a:fillRect/>
+          </a:stretch>
+        </p:blipFill>
+        <p:spPr>
+          <a:xfrm>
+            <a:off x="566928" y="5989320"/>
+            <a:ext cx="1417320" cy="398267"/>
+          </a:xfrm>
+          <a:prstGeom prst="rect">
+            <a:avLst/>
+          </a:prstGeom>
+        </p:spPr>
+      </p:pic>
+      <p:sp>
+        <p:nvSpPr>
+          <p:cNvPr id="21" name="Text 13"/>
+          <p:cNvSpPr txBox="1"/>
+          <p:nvPr/>
+        </p:nvSpPr>
+        <p:spPr>
+          <a:xfrm>
+            <a:off x="566928" y="6473952"/>
+            <a:ext cx="7315200" cy="274320"/>
+          </a:xfrm>
+          <a:prstGeom prst="rect">
+            <a:avLst/>
+          </a:prstGeom>
+          <a:noFill/>
+          <a:ln/>
+        </p:spPr>
+        <p:txBody>
+          <a:bodyPr wrap="square" lIns="0" tIns="0" rIns="0" bIns="0" rtlCol="0" anchor="ctr"/>
+          <a:lstStyle/>
+          <a:p>
+            <a:pPr algn="l" indent="0" marL="0">
+              <a:buNone/>
+            </a:pPr>
+            <a:r>
+              <a:rPr lang="en-US" sz="900" dirty="0">
+                <a:solidFill>
+                  <a:srgbClr val="AEC0DA"/>
+                </a:solidFill>
+                <a:latin typeface="Calibri" pitchFamily="34" charset="0"/>
+                <a:ea typeface="Calibri" pitchFamily="34" charset="-122"/>
+                <a:cs typeface="Calibri" pitchFamily="34" charset="-120"/>
+              </a:rPr>
               <a:t>GESTIÓN INTEGRAL DE RIESGOS  ·  COMEDICA DE R.L.</a:t>
             </a:r>
             <a:endParaRPr lang="en-US" sz="900" dirty="0"/>
@@ -31408,7 +33264,7 @@
       </p:sp>
       <p:sp>
         <p:nvSpPr>
-          <p:cNvPr id="11" name="Text 6"/>
+          <p:cNvPr id="22" name="Text 14"/>
           <p:cNvSpPr txBox="1"/>
           <p:nvPr/>
         </p:nvSpPr>
@@ -31504,7 +33360,7 @@
             <a:r>
               <a:rPr lang="en-US" sz="1300" b="1" spc="200" kern="0" dirty="0">
                 <a:solidFill>
-                  <a:srgbClr val="E3A73B"/>
+                  <a:srgbClr val="F2994A"/>
                 </a:solidFill>
                 <a:latin typeface="Calibri" pitchFamily="34" charset="0"/>
                 <a:ea typeface="Calibri" pitchFamily="34" charset="-122"/>
@@ -31634,14 +33490,14 @@
             <a:avLst/>
           </a:prstGeom>
           <a:solidFill>
-            <a:srgbClr val="FFFFFF"/>
+            <a:srgbClr val="133B6C"/>
           </a:solidFill>
           <a:ln/>
         </p:spPr>
       </p:sp>
       <p:pic>
         <p:nvPicPr>
-          <p:cNvPr id="8" name="Image 0" descr="/tmp/claude-0/-home-user-riesgo/0ff9ff46-1396-5bd8-b3ac-2280dfbbbc55/scratchpad/work/gen/icons/lock_open_navy.png">    </p:cNvPr>
+          <p:cNvPr id="8" name="Image 0" descr="/tmp/claude-0/-home-user-riesgo/0ff9ff46-1396-5bd8-b3ac-2280dfbbbc55/scratchpad/work/gen/icons/lock_open_white.png">    </p:cNvPr>
           <p:cNvPicPr>
             <a:picLocks noChangeAspect="1"/>
           </p:cNvPicPr>
@@ -31678,7 +33534,7 @@
             <a:avLst/>
           </a:prstGeom>
           <a:solidFill>
-            <a:srgbClr val="E3A73B"/>
+            <a:srgbClr val="F2994A"/>
           </a:solidFill>
           <a:ln/>
         </p:spPr>
@@ -31737,14 +33593,14 @@
             <a:avLst/>
           </a:prstGeom>
           <a:solidFill>
-            <a:srgbClr val="FFFFFF"/>
+            <a:srgbClr val="133B6C"/>
           </a:solidFill>
           <a:ln/>
         </p:spPr>
       </p:sp>
       <p:pic>
         <p:nvPicPr>
-          <p:cNvPr id="12" name="Image 1" descr="/tmp/claude-0/-home-user-riesgo/0ff9ff46-1396-5bd8-b3ac-2280dfbbbc55/scratchpad/work/gen/icons/usb_navy.png">    </p:cNvPr>
+          <p:cNvPr id="12" name="Image 1" descr="/tmp/claude-0/-home-user-riesgo/0ff9ff46-1396-5bd8-b3ac-2280dfbbbc55/scratchpad/work/gen/icons/usb_white.png">    </p:cNvPr>
           <p:cNvPicPr>
             <a:picLocks noChangeAspect="1"/>
           </p:cNvPicPr>
@@ -31781,7 +33637,7 @@
             <a:avLst/>
           </a:prstGeom>
           <a:solidFill>
-            <a:srgbClr val="E3A73B"/>
+            <a:srgbClr val="F2994A"/>
           </a:solidFill>
           <a:ln/>
         </p:spPr>
@@ -31840,14 +33696,14 @@
             <a:avLst/>
           </a:prstGeom>
           <a:solidFill>
-            <a:srgbClr val="FFFFFF"/>
+            <a:srgbClr val="133B6C"/>
           </a:solidFill>
           <a:ln/>
         </p:spPr>
       </p:sp>
       <p:pic>
         <p:nvPicPr>
-          <p:cNvPr id="16" name="Image 2" descr="/tmp/claude-0/-home-user-riesgo/0ff9ff46-1396-5bd8-b3ac-2280dfbbbc55/scratchpad/work/gen/icons/wifi_off_navy.png">    </p:cNvPr>
+          <p:cNvPr id="16" name="Image 2" descr="/tmp/claude-0/-home-user-riesgo/0ff9ff46-1396-5bd8-b3ac-2280dfbbbc55/scratchpad/work/gen/icons/wifi_off_white.png">    </p:cNvPr>
           <p:cNvPicPr>
             <a:picLocks noChangeAspect="1"/>
           </p:cNvPicPr>
@@ -31884,7 +33740,7 @@
             <a:avLst/>
           </a:prstGeom>
           <a:solidFill>
-            <a:srgbClr val="E3A73B"/>
+            <a:srgbClr val="F2994A"/>
           </a:solidFill>
           <a:ln/>
         </p:spPr>
@@ -31943,14 +33799,14 @@
             <a:avLst/>
           </a:prstGeom>
           <a:solidFill>
-            <a:srgbClr val="FFFFFF"/>
+            <a:srgbClr val="133B6C"/>
           </a:solidFill>
           <a:ln/>
         </p:spPr>
       </p:sp>
       <p:pic>
         <p:nvPicPr>
-          <p:cNvPr id="20" name="Image 3" descr="/tmp/claude-0/-home-user-riesgo/0ff9ff46-1396-5bd8-b3ac-2280dfbbbc55/scratchpad/work/gen/icons/trash_navy.png">    </p:cNvPr>
+          <p:cNvPr id="20" name="Image 3" descr="/tmp/claude-0/-home-user-riesgo/0ff9ff46-1396-5bd8-b3ac-2280dfbbbc55/scratchpad/work/gen/icons/trash_white.png">    </p:cNvPr>
           <p:cNvPicPr>
             <a:picLocks noChangeAspect="1"/>
           </p:cNvPicPr>
@@ -31987,7 +33843,7 @@
             <a:avLst/>
           </a:prstGeom>
           <a:solidFill>
-            <a:srgbClr val="E3A73B"/>
+            <a:srgbClr val="F2994A"/>
           </a:solidFill>
           <a:ln/>
         </p:spPr>
@@ -32046,14 +33902,14 @@
             <a:avLst/>
           </a:prstGeom>
           <a:solidFill>
-            <a:srgbClr val="FFFFFF"/>
+            <a:srgbClr val="133B6C"/>
           </a:solidFill>
           <a:ln/>
         </p:spPr>
       </p:sp>
       <p:pic>
         <p:nvPicPr>
-          <p:cNvPr id="24" name="Image 4" descr="/tmp/claude-0/-home-user-riesgo/0ff9ff46-1396-5bd8-b3ac-2280dfbbbc55/scratchpad/work/gen/icons/bell_alert_navy.png">    </p:cNvPr>
+          <p:cNvPr id="24" name="Image 4" descr="/tmp/claude-0/-home-user-riesgo/0ff9ff46-1396-5bd8-b3ac-2280dfbbbc55/scratchpad/work/gen/icons/bell_alert_white.png">    </p:cNvPr>
           <p:cNvPicPr>
             <a:picLocks noChangeAspect="1"/>
           </p:cNvPicPr>
@@ -32090,7 +33946,7 @@
             <a:avLst/>
           </a:prstGeom>
           <a:solidFill>
-            <a:srgbClr val="E3A73B"/>
+            <a:srgbClr val="F2994A"/>
           </a:solidFill>
           <a:ln/>
         </p:spPr>
@@ -32149,14 +34005,14 @@
             <a:avLst/>
           </a:prstGeom>
           <a:solidFill>
-            <a:srgbClr val="FFFFFF"/>
+            <a:srgbClr val="133B6C"/>
           </a:solidFill>
           <a:ln/>
         </p:spPr>
       </p:sp>
       <p:pic>
         <p:nvPicPr>
-          <p:cNvPr id="28" name="Image 5" descr="/tmp/claude-0/-home-user-riesgo/0ff9ff46-1396-5bd8-b3ac-2280dfbbbc55/scratchpad/work/gen/icons/hand_stop_navy.png">    </p:cNvPr>
+          <p:cNvPr id="28" name="Image 5" descr="/tmp/claude-0/-home-user-riesgo/0ff9ff46-1396-5bd8-b3ac-2280dfbbbc55/scratchpad/work/gen/icons/hand_stop_white.png">    </p:cNvPr>
           <p:cNvPicPr>
             <a:picLocks noChangeAspect="1"/>
           </p:cNvPicPr>
@@ -32193,7 +34049,7 @@
             <a:avLst/>
           </a:prstGeom>
           <a:solidFill>
-            <a:srgbClr val="E3A73B"/>
+            <a:srgbClr val="F2994A"/>
           </a:solidFill>
           <a:ln/>
         </p:spPr>
@@ -32252,14 +34108,14 @@
             <a:avLst/>
           </a:prstGeom>
           <a:solidFill>
-            <a:srgbClr val="FFFFFF"/>
+            <a:srgbClr val="133B6C"/>
           </a:solidFill>
           <a:ln/>
         </p:spPr>
       </p:sp>
       <p:pic>
         <p:nvPicPr>
-          <p:cNvPr id="32" name="Image 6" descr="/tmp/claude-0/-home-user-riesgo/0ff9ff46-1396-5bd8-b3ac-2280dfbbbc55/scratchpad/work/gen/icons/cctv_navy.png">    </p:cNvPr>
+          <p:cNvPr id="32" name="Image 6" descr="/tmp/claude-0/-home-user-riesgo/0ff9ff46-1396-5bd8-b3ac-2280dfbbbc55/scratchpad/work/gen/icons/cctv_white.png">    </p:cNvPr>
           <p:cNvPicPr>
             <a:picLocks noChangeAspect="1"/>
           </p:cNvPicPr>
@@ -32296,7 +34152,7 @@
             <a:avLst/>
           </a:prstGeom>
           <a:solidFill>
-            <a:srgbClr val="E3A73B"/>
+            <a:srgbClr val="F2994A"/>
           </a:solidFill>
           <a:ln/>
         </p:spPr>
@@ -32355,14 +34211,14 @@
             <a:avLst/>
           </a:prstGeom>
           <a:solidFill>
-            <a:srgbClr val="FFFFFF"/>
+            <a:srgbClr val="133B6C"/>
           </a:solidFill>
           <a:ln/>
         </p:spPr>
       </p:sp>
       <p:pic>
         <p:nvPicPr>
-          <p:cNvPr id="36" name="Image 7" descr="/tmp/claude-0/-home-user-riesgo/0ff9ff46-1396-5bd8-b3ac-2280dfbbbc55/scratchpad/work/gen/icons/key_navy.png">    </p:cNvPr>
+          <p:cNvPr id="36" name="Image 7" descr="/tmp/claude-0/-home-user-riesgo/0ff9ff46-1396-5bd8-b3ac-2280dfbbbc55/scratchpad/work/gen/icons/key_white.png">    </p:cNvPr>
           <p:cNvPicPr>
             <a:picLocks noChangeAspect="1"/>
           </p:cNvPicPr>
@@ -32399,7 +34255,7 @@
             <a:avLst/>
           </a:prstGeom>
           <a:solidFill>
-            <a:srgbClr val="E3A73B"/>
+            <a:srgbClr val="F2994A"/>
           </a:solidFill>
           <a:ln/>
         </p:spPr>
@@ -32458,14 +34314,14 @@
             <a:avLst/>
           </a:prstGeom>
           <a:solidFill>
-            <a:srgbClr val="FFFFFF"/>
+            <a:srgbClr val="133B6C"/>
           </a:solidFill>
           <a:ln/>
         </p:spPr>
       </p:sp>
       <p:pic>
         <p:nvPicPr>
-          <p:cNvPr id="40" name="Image 8" descr="/tmp/claude-0/-home-user-riesgo/0ff9ff46-1396-5bd8-b3ac-2280dfbbbc55/scratchpad/work/gen/icons/social_navy.png">    </p:cNvPr>
+          <p:cNvPr id="40" name="Image 8" descr="/tmp/claude-0/-home-user-riesgo/0ff9ff46-1396-5bd8-b3ac-2280dfbbbc55/scratchpad/work/gen/icons/social_white.png">    </p:cNvPr>
           <p:cNvPicPr>
             <a:picLocks noChangeAspect="1"/>
           </p:cNvPicPr>
@@ -32502,7 +34358,7 @@
             <a:avLst/>
           </a:prstGeom>
           <a:solidFill>
-            <a:srgbClr val="E3A73B"/>
+            <a:srgbClr val="F2994A"/>
           </a:solidFill>
           <a:ln/>
         </p:spPr>
@@ -32612,7 +34468,7 @@
             <a:r>
               <a:rPr lang="en-US" sz="900" dirty="0">
                 <a:solidFill>
-                  <a:srgbClr val="8FA0B5"/>
+                  <a:srgbClr val="5B6B82"/>
                 </a:solidFill>
                 <a:latin typeface="Calibri" pitchFamily="34" charset="0"/>
                 <a:ea typeface="Calibri" pitchFamily="34" charset="-122"/>
@@ -32651,7 +34507,7 @@
             <a:r>
               <a:rPr lang="en-US" sz="900" dirty="0">
                 <a:solidFill>
-                  <a:srgbClr val="8FA0B5"/>
+                  <a:srgbClr val="5B6B82"/>
                 </a:solidFill>
                 <a:latin typeface="Calibri" pitchFamily="34" charset="0"/>
                 <a:ea typeface="Calibri" pitchFamily="34" charset="-122"/>
@@ -32722,7 +34578,7 @@
             <a:r>
               <a:rPr lang="en-US" sz="1300" b="1" spc="200" kern="0" dirty="0">
                 <a:solidFill>
-                  <a:srgbClr val="E3A73B"/>
+                  <a:srgbClr val="F2994A"/>
                 </a:solidFill>
                 <a:latin typeface="Calibri" pitchFamily="34" charset="0"/>
                 <a:ea typeface="Calibri" pitchFamily="34" charset="-122"/>
@@ -32820,7 +34676,7 @@
             <a:avLst/>
           </a:prstGeom>
           <a:solidFill>
-            <a:srgbClr val="E3A73B"/>
+            <a:srgbClr val="F2994A"/>
           </a:solidFill>
           <a:ln/>
         </p:spPr>
@@ -32974,7 +34830,7 @@
             <a:avLst/>
           </a:prstGeom>
           <a:solidFill>
-            <a:srgbClr val="E3A73B"/>
+            <a:srgbClr val="F2994A"/>
           </a:solidFill>
           <a:ln/>
         </p:spPr>
@@ -33128,7 +34984,7 @@
             <a:avLst/>
           </a:prstGeom>
           <a:solidFill>
-            <a:srgbClr val="E3A73B"/>
+            <a:srgbClr val="F2994A"/>
           </a:solidFill>
           <a:ln/>
         </p:spPr>
@@ -33282,7 +35138,7 @@
             <a:avLst/>
           </a:prstGeom>
           <a:solidFill>
-            <a:srgbClr val="E3A73B"/>
+            <a:srgbClr val="F2994A"/>
           </a:solidFill>
           <a:ln/>
         </p:spPr>
@@ -33436,7 +35292,7 @@
             <a:avLst/>
           </a:prstGeom>
           <a:solidFill>
-            <a:srgbClr val="E3A73B"/>
+            <a:srgbClr val="F2994A"/>
           </a:solidFill>
           <a:ln/>
         </p:spPr>
@@ -33590,7 +35446,7 @@
             <a:avLst/>
           </a:prstGeom>
           <a:solidFill>
-            <a:srgbClr val="E3A73B"/>
+            <a:srgbClr val="F2994A"/>
           </a:solidFill>
           <a:ln/>
         </p:spPr>
@@ -33744,7 +35600,7 @@
             <a:avLst/>
           </a:prstGeom>
           <a:solidFill>
-            <a:srgbClr val="E3A73B"/>
+            <a:srgbClr val="F2994A"/>
           </a:solidFill>
           <a:ln/>
         </p:spPr>
@@ -33898,7 +35754,7 @@
             <a:avLst/>
           </a:prstGeom>
           <a:solidFill>
-            <a:srgbClr val="E3A73B"/>
+            <a:srgbClr val="F2994A"/>
           </a:solidFill>
           <a:ln/>
         </p:spPr>
@@ -34052,7 +35908,7 @@
             <a:avLst/>
           </a:prstGeom>
           <a:solidFill>
-            <a:srgbClr val="E3A73B"/>
+            <a:srgbClr val="F2994A"/>
           </a:solidFill>
           <a:ln/>
         </p:spPr>
@@ -34189,7 +36045,7 @@
             <a:r>
               <a:rPr lang="en-US" sz="900" dirty="0">
                 <a:solidFill>
-                  <a:srgbClr val="8FA0B5"/>
+                  <a:srgbClr val="5B6B82"/>
                 </a:solidFill>
                 <a:latin typeface="Calibri" pitchFamily="34" charset="0"/>
                 <a:ea typeface="Calibri" pitchFamily="34" charset="-122"/>
@@ -34228,7 +36084,7 @@
             <a:r>
               <a:rPr lang="en-US" sz="900" dirty="0">
                 <a:solidFill>
-                  <a:srgbClr val="8FA0B5"/>
+                  <a:srgbClr val="5B6B82"/>
                 </a:solidFill>
                 <a:latin typeface="Calibri" pitchFamily="34" charset="0"/>
                 <a:ea typeface="Calibri" pitchFamily="34" charset="-122"/>
@@ -34385,7 +36241,7 @@
             <a:avLst/>
           </a:prstGeom>
           <a:solidFill>
-            <a:srgbClr val="E3A73B"/>
+            <a:srgbClr val="F0AD35"/>
           </a:solidFill>
           <a:ln/>
         </p:spPr>
@@ -34492,7 +36348,7 @@
             <a:avLst/>
           </a:prstGeom>
           <a:solidFill>
-            <a:srgbClr val="E3A73B"/>
+            <a:srgbClr val="F0AD35"/>
           </a:solidFill>
           <a:ln/>
         </p:spPr>
@@ -34599,7 +36455,7 @@
             <a:avLst/>
           </a:prstGeom>
           <a:solidFill>
-            <a:srgbClr val="E3A73B"/>
+            <a:srgbClr val="F0AD35"/>
           </a:solidFill>
           <a:ln/>
         </p:spPr>
@@ -34706,7 +36562,7 @@
             <a:avLst/>
           </a:prstGeom>
           <a:solidFill>
-            <a:srgbClr val="E3A73B"/>
+            <a:srgbClr val="F0AD35"/>
           </a:solidFill>
           <a:ln/>
         </p:spPr>
@@ -34813,7 +36669,7 @@
             <a:avLst/>
           </a:prstGeom>
           <a:solidFill>
-            <a:srgbClr val="E3A73B"/>
+            <a:srgbClr val="F0AD35"/>
           </a:solidFill>
           <a:ln/>
         </p:spPr>
@@ -34908,7 +36764,7 @@
             <a:r>
               <a:rPr lang="en-US" sz="2000" b="1" spc="100" kern="0" dirty="0">
                 <a:solidFill>
-                  <a:srgbClr val="E3A73B"/>
+                  <a:srgbClr val="F0AD35"/>
                 </a:solidFill>
                 <a:latin typeface="Calibri" pitchFamily="34" charset="0"/>
                 <a:ea typeface="Calibri" pitchFamily="34" charset="-122"/>
@@ -35316,9 +37172,49 @@
           <p:nvPr/>
         </p:nvSpPr>
         <p:spPr>
-          <a:xfrm>
-            <a:off x="-2926080" y="2926080"/>
-            <a:ext cx="7772400" cy="7772400"/>
+          <a:xfrm rot="720000">
+            <a:off x="7955280" y="-457200"/>
+            <a:ext cx="5669280" cy="7772400"/>
+          </a:xfrm>
+          <a:prstGeom prst="rect">
+            <a:avLst/>
+          </a:prstGeom>
+          <a:solidFill>
+            <a:srgbClr val="F0AD35"/>
+          </a:solidFill>
+          <a:ln/>
+        </p:spPr>
+      </p:sp>
+      <p:sp>
+        <p:nvSpPr>
+          <p:cNvPr id="4" name="Shape 1"/>
+          <p:cNvSpPr/>
+          <p:nvPr/>
+        </p:nvSpPr>
+        <p:spPr>
+          <a:xfrm>
+            <a:off x="0" y="0"/>
+            <a:ext cx="8275320" cy="6858000"/>
+          </a:xfrm>
+          <a:prstGeom prst="rect">
+            <a:avLst/>
+          </a:prstGeom>
+          <a:solidFill>
+            <a:srgbClr val="0A1F3B"/>
+          </a:solidFill>
+          <a:ln/>
+        </p:spPr>
+      </p:sp>
+      <p:sp>
+        <p:nvSpPr>
+          <p:cNvPr id="5" name="Shape 2"/>
+          <p:cNvSpPr/>
+          <p:nvPr/>
+        </p:nvSpPr>
+        <p:spPr>
+          <a:xfrm>
+            <a:off x="-3108960" y="3291840"/>
+            <a:ext cx="7498080" cy="7498080"/>
           </a:xfrm>
           <a:prstGeom prst="ellipse">
             <a:avLst/>
@@ -35331,14 +37227,14 @@
       </p:sp>
       <p:sp>
         <p:nvSpPr>
-          <p:cNvPr id="4" name="Text 1"/>
-          <p:cNvSpPr txBox="1"/>
-          <p:nvPr/>
-        </p:nvSpPr>
-        <p:spPr>
-          <a:xfrm>
-            <a:off x="7498080" y="-777240"/>
-            <a:ext cx="5120640" cy="3840480"/>
+          <p:cNvPr id="6" name="Text 3"/>
+          <p:cNvSpPr txBox="1"/>
+          <p:nvPr/>
+        </p:nvSpPr>
+        <p:spPr>
+          <a:xfrm>
+            <a:off x="-274320" y="-914400"/>
+            <a:ext cx="5852160" cy="4023360"/>
           </a:xfrm>
           <a:prstGeom prst="rect">
             <a:avLst/>
@@ -35350,13 +37246,13 @@
           <a:bodyPr wrap="square" lIns="0" tIns="0" rIns="0" bIns="0" rtlCol="0" anchor="ctr"/>
           <a:lstStyle/>
           <a:p>
-            <a:pPr algn="r" indent="0" marL="0">
+            <a:pPr algn="l" indent="0" marL="0">
               <a:buNone/>
             </a:pPr>
             <a:r>
               <a:rPr lang="en-US" sz="26000" b="1" dirty="0">
                 <a:solidFill>
-                  <a:srgbClr val="15294A"/>
+                  <a:srgbClr val="133B6C"/>
                 </a:solidFill>
                 <a:latin typeface="Cambria" pitchFamily="34" charset="0"/>
                 <a:ea typeface="Cambria" pitchFamily="34" charset="-122"/>
@@ -35370,27 +37266,87 @@
       </p:sp>
       <p:sp>
         <p:nvSpPr>
-          <p:cNvPr id="5" name="Shape 2"/>
-          <p:cNvSpPr/>
-          <p:nvPr/>
-        </p:nvSpPr>
-        <p:spPr>
-          <a:xfrm>
-            <a:off x="566928" y="1828800"/>
-            <a:ext cx="1188720" cy="1188720"/>
+          <p:cNvPr id="7" name="Shape 4"/>
+          <p:cNvSpPr/>
+          <p:nvPr/>
+        </p:nvSpPr>
+        <p:spPr>
+          <a:xfrm>
+            <a:off x="8686800" y="2011680"/>
+            <a:ext cx="2834640" cy="2834640"/>
           </a:xfrm>
           <a:prstGeom prst="ellipse">
             <a:avLst/>
           </a:prstGeom>
           <a:solidFill>
-            <a:srgbClr val="E3A73B"/>
+            <a:srgbClr val="0A1F3B"/>
+          </a:solidFill>
+          <a:ln/>
+        </p:spPr>
+      </p:sp>
+      <p:sp>
+        <p:nvSpPr>
+          <p:cNvPr id="8" name="Shape 5"/>
+          <p:cNvSpPr/>
+          <p:nvPr/>
+        </p:nvSpPr>
+        <p:spPr>
+          <a:xfrm>
+            <a:off x="9784080" y="3931920"/>
+            <a:ext cx="1371600" cy="1371600"/>
+          </a:xfrm>
+          <a:prstGeom prst="ellipse">
+            <a:avLst/>
+          </a:prstGeom>
+          <a:solidFill>
+            <a:srgbClr val="FFFFFF"/>
+          </a:solidFill>
+          <a:ln/>
+        </p:spPr>
+      </p:sp>
+      <p:sp>
+        <p:nvSpPr>
+          <p:cNvPr id="9" name="Shape 6"/>
+          <p:cNvSpPr/>
+          <p:nvPr/>
+        </p:nvSpPr>
+        <p:spPr>
+          <a:xfrm>
+            <a:off x="10698480" y="2011680"/>
+            <a:ext cx="960120" cy="960120"/>
+          </a:xfrm>
+          <a:prstGeom prst="ellipse">
+            <a:avLst/>
+          </a:prstGeom>
+          <a:solidFill>
+            <a:srgbClr val="0D2847"/>
+          </a:solidFill>
+          <a:ln/>
+        </p:spPr>
+      </p:sp>
+      <p:sp>
+        <p:nvSpPr>
+          <p:cNvPr id="10" name="Shape 7"/>
+          <p:cNvSpPr/>
+          <p:nvPr/>
+        </p:nvSpPr>
+        <p:spPr>
+          <a:xfrm>
+            <a:off x="9075420" y="2217420"/>
+            <a:ext cx="1051560" cy="1051560"/>
+          </a:xfrm>
+          <a:prstGeom prst="ellipse">
+            <a:avLst/>
+          </a:prstGeom>
+          <a:solidFill>
+            <a:srgbClr val="FFFFFF"/>
           </a:solidFill>
           <a:ln/>
         </p:spPr>
       </p:sp>
       <p:pic>
         <p:nvPicPr>
-          <p:cNvPr id="6" name="Image 0" descr="/tmp/claude-0/-home-user-riesgo/0ff9ff46-1396-5bd8-b3ac-2280dfbbbc55/scratchpad/work/gen/icons/people_group_navy.png">    </p:cNvPr>
+          <p:cNvPr id="11" name="Image 0" descr="/tmp/claude-0/-home-user-riesgo/0ff9ff46-1396-5bd8-b3ac-2280dfbbbc55/scratchpad/work/gen/icons/people_group_gold.png">    </p:cNvPr>
           <p:cNvPicPr>
             <a:picLocks noChangeAspect="1"/>
           </p:cNvPicPr>
@@ -35404,8 +37360,8 @@
         </p:blipFill>
         <p:spPr>
           <a:xfrm>
-            <a:off x="852221" y="2114093"/>
-            <a:ext cx="618134" cy="618134"/>
+            <a:off x="9338310" y="2480310"/>
+            <a:ext cx="525780" cy="525780"/>
           </a:xfrm>
           <a:prstGeom prst="rect">
             <a:avLst/>
@@ -35414,150 +37370,27 @@
       </p:pic>
       <p:sp>
         <p:nvSpPr>
-          <p:cNvPr id="7" name="Text 3"/>
-          <p:cNvSpPr txBox="1"/>
-          <p:nvPr/>
-        </p:nvSpPr>
-        <p:spPr>
-          <a:xfrm>
-            <a:off x="566928" y="2880360"/>
-            <a:ext cx="9601200" cy="365760"/>
-          </a:xfrm>
-          <a:prstGeom prst="rect">
-            <a:avLst/>
-          </a:prstGeom>
-          <a:noFill/>
-          <a:ln/>
-        </p:spPr>
-        <p:txBody>
-          <a:bodyPr wrap="square" lIns="0" tIns="0" rIns="0" bIns="0" rtlCol="0" anchor="ctr"/>
-          <a:lstStyle/>
-          <a:p>
-            <a:pPr indent="0" marL="0">
-              <a:buNone/>
-            </a:pPr>
-            <a:r>
-              <a:rPr lang="en-US" sz="1500" b="1" spc="300" kern="0" dirty="0">
-                <a:solidFill>
-                  <a:srgbClr val="E3A73B"/>
-                </a:solidFill>
-                <a:latin typeface="Calibri" pitchFamily="34" charset="0"/>
-                <a:ea typeface="Calibri" pitchFamily="34" charset="-122"/>
-                <a:cs typeface="Calibri" pitchFamily="34" charset="-120"/>
-              </a:rPr>
-              <a:t>TEMA 1</a:t>
-            </a:r>
-            <a:endParaRPr lang="en-US" sz="1500" dirty="0"/>
-          </a:p>
-        </p:txBody>
-      </p:sp>
-      <p:sp>
-        <p:nvSpPr>
-          <p:cNvPr id="8" name="Text 4"/>
-          <p:cNvSpPr txBox="1"/>
-          <p:nvPr/>
-        </p:nvSpPr>
-        <p:spPr>
-          <a:xfrm>
-            <a:off x="566928" y="3246120"/>
-            <a:ext cx="10424160" cy="1554480"/>
-          </a:xfrm>
-          <a:prstGeom prst="rect">
-            <a:avLst/>
-          </a:prstGeom>
-          <a:noFill/>
-          <a:ln/>
-        </p:spPr>
-        <p:txBody>
-          <a:bodyPr wrap="square" lIns="0" tIns="0" rIns="0" bIns="0" rtlCol="0" anchor="ctr"/>
-          <a:lstStyle/>
-          <a:p>
-            <a:pPr indent="0" marL="0">
-              <a:lnSpc>
-                <a:spcPct val="105000"/>
-              </a:lnSpc>
-              <a:buNone/>
-            </a:pPr>
-            <a:r>
-              <a:rPr lang="en-US" sz="3400" b="1" dirty="0">
-                <a:solidFill>
-                  <a:srgbClr val="FFFFFF"/>
-                </a:solidFill>
-                <a:latin typeface="Cambria" pitchFamily="34" charset="0"/>
-                <a:ea typeface="Cambria" pitchFamily="34" charset="-122"/>
-                <a:cs typeface="Cambria" pitchFamily="34" charset="-120"/>
-              </a:rPr>
-              <a:t>TODOS SOMOS GESTORES</a:t>
-            </a:r>
-            <a:endParaRPr lang="en-US" sz="3400" dirty="0"/>
-          </a:p>
-          <a:p>
-            <a:pPr indent="0" marL="0">
-              <a:lnSpc>
-                <a:spcPct val="105000"/>
-              </a:lnSpc>
-              <a:buNone/>
-            </a:pPr>
-            <a:r>
-              <a:rPr lang="en-US" sz="3400" b="1" dirty="0">
-                <a:solidFill>
-                  <a:srgbClr val="FFFFFF"/>
-                </a:solidFill>
-                <a:latin typeface="Cambria" pitchFamily="34" charset="0"/>
-                <a:ea typeface="Cambria" pitchFamily="34" charset="-122"/>
-                <a:cs typeface="Cambria" pitchFamily="34" charset="-120"/>
-              </a:rPr>
-              <a:t>DE RIESGOS</a:t>
-            </a:r>
-            <a:endParaRPr lang="en-US" sz="3400" dirty="0"/>
-          </a:p>
-        </p:txBody>
-      </p:sp>
-      <p:sp>
-        <p:nvSpPr>
-          <p:cNvPr id="9" name="Text 5"/>
-          <p:cNvSpPr txBox="1"/>
-          <p:nvPr/>
-        </p:nvSpPr>
-        <p:spPr>
-          <a:xfrm>
-            <a:off x="566928" y="4663440"/>
-            <a:ext cx="9692640" cy="822960"/>
-          </a:xfrm>
-          <a:prstGeom prst="rect">
-            <a:avLst/>
-          </a:prstGeom>
-          <a:noFill/>
-          <a:ln/>
-        </p:spPr>
-        <p:txBody>
-          <a:bodyPr wrap="square" lIns="0" tIns="0" rIns="0" bIns="0" rtlCol="0" anchor="ctr"/>
-          <a:lstStyle/>
-          <a:p>
-            <a:pPr indent="0" marL="0">
-              <a:lnSpc>
-                <a:spcPct val="115000"/>
-              </a:lnSpc>
-              <a:buNone/>
-            </a:pPr>
-            <a:r>
-              <a:rPr lang="en-US" sz="1600" i="1" dirty="0">
-                <a:solidFill>
-                  <a:srgbClr val="C7D3E5"/>
-                </a:solidFill>
-                <a:latin typeface="Calibri" pitchFamily="34" charset="0"/>
-                <a:ea typeface="Calibri" pitchFamily="34" charset="-122"/>
-                <a:cs typeface="Calibri" pitchFamily="34" charset="-120"/>
-              </a:rPr>
-              <a:t>La gestión de riesgos no es responsabilidad de un solo departamento.</a:t>
-            </a:r>
-            <a:endParaRPr lang="en-US" sz="1600" dirty="0"/>
-          </a:p>
-        </p:txBody>
+          <p:cNvPr id="12" name="Shape 8"/>
+          <p:cNvSpPr/>
+          <p:nvPr/>
+        </p:nvSpPr>
+        <p:spPr>
+          <a:xfrm>
+            <a:off x="10447020" y="2948940"/>
+            <a:ext cx="868680" cy="868680"/>
+          </a:xfrm>
+          <a:prstGeom prst="ellipse">
+            <a:avLst/>
+          </a:prstGeom>
+          <a:solidFill>
+            <a:srgbClr val="0A1F3B"/>
+          </a:solidFill>
+          <a:ln/>
+        </p:spPr>
       </p:sp>
       <p:pic>
         <p:nvPicPr>
-          <p:cNvPr id="10" name="Image 1" descr="/tmp/claude-0/-home-user-riesgo/0ff9ff46-1396-5bd8-b3ac-2280dfbbbc55/scratchpad/work/gen/logo_white.png">    </p:cNvPr>
+          <p:cNvPr id="13" name="Image 1" descr="/tmp/claude-0/-home-user-riesgo/0ff9ff46-1396-5bd8-b3ac-2280dfbbbc55/scratchpad/work/gen/icons/handshake_white.png">    </p:cNvPr>
           <p:cNvPicPr>
             <a:picLocks noChangeAspect="1"/>
           </p:cNvPicPr>
@@ -35571,8 +37404,8 @@
         </p:blipFill>
         <p:spPr>
           <a:xfrm>
-            <a:off x="10161727" y="5961888"/>
-            <a:ext cx="1463040" cy="411114"/>
+            <a:off x="10664190" y="3166110"/>
+            <a:ext cx="434340" cy="434340"/>
           </a:xfrm>
           <a:prstGeom prst="rect">
             <a:avLst/>
@@ -35581,14 +37414,102 @@
       </p:pic>
       <p:sp>
         <p:nvSpPr>
-          <p:cNvPr id="11" name="Text 6"/>
-          <p:cNvSpPr txBox="1"/>
-          <p:nvPr/>
-        </p:nvSpPr>
-        <p:spPr>
-          <a:xfrm>
-            <a:off x="566928" y="6473952"/>
-            <a:ext cx="7315200" cy="274320"/>
+          <p:cNvPr id="14" name="Shape 9"/>
+          <p:cNvSpPr/>
+          <p:nvPr/>
+        </p:nvSpPr>
+        <p:spPr>
+          <a:xfrm>
+            <a:off x="9578340" y="3909060"/>
+            <a:ext cx="777240" cy="777240"/>
+          </a:xfrm>
+          <a:prstGeom prst="ellipse">
+            <a:avLst/>
+          </a:prstGeom>
+          <a:solidFill>
+            <a:srgbClr val="FFFFFF"/>
+          </a:solidFill>
+          <a:ln/>
+        </p:spPr>
+      </p:sp>
+      <p:pic>
+        <p:nvPicPr>
+          <p:cNvPr id="15" name="Image 2" descr="/tmp/claude-0/-home-user-riesgo/0ff9ff46-1396-5bd8-b3ac-2280dfbbbc55/scratchpad/work/gen/icons/shield_check_navy.png">    </p:cNvPr>
+          <p:cNvPicPr>
+            <a:picLocks noChangeAspect="1"/>
+          </p:cNvPicPr>
+          <p:nvPr/>
+        </p:nvPicPr>
+        <p:blipFill>
+          <a:blip r:embed="rId3"/>
+          <a:stretch>
+            <a:fillRect/>
+          </a:stretch>
+        </p:blipFill>
+        <p:spPr>
+          <a:xfrm>
+            <a:off x="9772650" y="4103370"/>
+            <a:ext cx="388620" cy="388620"/>
+          </a:xfrm>
+          <a:prstGeom prst="rect">
+            <a:avLst/>
+          </a:prstGeom>
+        </p:spPr>
+      </p:pic>
+      <p:sp>
+        <p:nvSpPr>
+          <p:cNvPr id="16" name="Shape 10"/>
+          <p:cNvSpPr/>
+          <p:nvPr/>
+        </p:nvSpPr>
+        <p:spPr>
+          <a:xfrm>
+            <a:off x="10689336" y="4105656"/>
+            <a:ext cx="658368" cy="658368"/>
+          </a:xfrm>
+          <a:prstGeom prst="ellipse">
+            <a:avLst/>
+          </a:prstGeom>
+          <a:solidFill>
+            <a:srgbClr val="0A1F3B"/>
+          </a:solidFill>
+          <a:ln/>
+        </p:spPr>
+      </p:sp>
+      <p:pic>
+        <p:nvPicPr>
+          <p:cNvPr id="17" name="Image 3" descr="/tmp/claude-0/-home-user-riesgo/0ff9ff46-1396-5bd8-b3ac-2280dfbbbc55/scratchpad/work/gen/icons/briefcase_gold.png">    </p:cNvPr>
+          <p:cNvPicPr>
+            <a:picLocks noChangeAspect="1"/>
+          </p:cNvPicPr>
+          <p:nvPr/>
+        </p:nvPicPr>
+        <p:blipFill>
+          <a:blip r:embed="rId4"/>
+          <a:stretch>
+            <a:fillRect/>
+          </a:stretch>
+        </p:blipFill>
+        <p:spPr>
+          <a:xfrm>
+            <a:off x="10853928" y="4270248"/>
+            <a:ext cx="329184" cy="329184"/>
+          </a:xfrm>
+          <a:prstGeom prst="rect">
+            <a:avLst/>
+          </a:prstGeom>
+        </p:spPr>
+      </p:pic>
+      <p:sp>
+        <p:nvSpPr>
+          <p:cNvPr id="18" name="Text 11"/>
+          <p:cNvSpPr txBox="1"/>
+          <p:nvPr/>
+        </p:nvSpPr>
+        <p:spPr>
+          <a:xfrm>
+            <a:off x="566928" y="2423160"/>
+            <a:ext cx="7315200" cy="365760"/>
           </a:xfrm>
           <a:prstGeom prst="rect">
             <a:avLst/>
@@ -35600,18 +37521,185 @@
           <a:bodyPr wrap="square" lIns="0" tIns="0" rIns="0" bIns="0" rtlCol="0" anchor="ctr"/>
           <a:lstStyle/>
           <a:p>
-            <a:pPr algn="l" indent="0" marL="0">
-              <a:buNone/>
-            </a:pPr>
-            <a:r>
-              <a:rPr lang="en-US" sz="900" dirty="0">
-                <a:solidFill>
-                  <a:srgbClr val="AEC0DA"/>
+            <a:pPr indent="0" marL="0">
+              <a:buNone/>
+            </a:pPr>
+            <a:r>
+              <a:rPr lang="en-US" sz="1500" b="1" spc="300" kern="0" dirty="0">
+                <a:solidFill>
+                  <a:srgbClr val="F0AD35"/>
                 </a:solidFill>
                 <a:latin typeface="Calibri" pitchFamily="34" charset="0"/>
                 <a:ea typeface="Calibri" pitchFamily="34" charset="-122"/>
                 <a:cs typeface="Calibri" pitchFamily="34" charset="-120"/>
               </a:rPr>
+              <a:t>TEMA 1</a:t>
+            </a:r>
+            <a:endParaRPr lang="en-US" sz="1500" dirty="0"/>
+          </a:p>
+        </p:txBody>
+      </p:sp>
+      <p:sp>
+        <p:nvSpPr>
+          <p:cNvPr id="19" name="Text 12"/>
+          <p:cNvSpPr txBox="1"/>
+          <p:nvPr/>
+        </p:nvSpPr>
+        <p:spPr>
+          <a:xfrm>
+            <a:off x="566928" y="2788920"/>
+            <a:ext cx="7406640" cy="1554480"/>
+          </a:xfrm>
+          <a:prstGeom prst="rect">
+            <a:avLst/>
+          </a:prstGeom>
+          <a:noFill/>
+          <a:ln/>
+        </p:spPr>
+        <p:txBody>
+          <a:bodyPr wrap="square" lIns="0" tIns="0" rIns="0" bIns="0" rtlCol="0" anchor="ctr"/>
+          <a:lstStyle/>
+          <a:p>
+            <a:pPr indent="0" marL="0">
+              <a:lnSpc>
+                <a:spcPct val="105000"/>
+              </a:lnSpc>
+              <a:buNone/>
+            </a:pPr>
+            <a:r>
+              <a:rPr lang="en-US" sz="3200" b="1" dirty="0">
+                <a:solidFill>
+                  <a:srgbClr val="FFFFFF"/>
+                </a:solidFill>
+                <a:latin typeface="Cambria" pitchFamily="34" charset="0"/>
+                <a:ea typeface="Cambria" pitchFamily="34" charset="-122"/>
+                <a:cs typeface="Cambria" pitchFamily="34" charset="-120"/>
+              </a:rPr>
+              <a:t>TODOS SOMOS GESTORES</a:t>
+            </a:r>
+            <a:endParaRPr lang="en-US" sz="3200" dirty="0"/>
+          </a:p>
+          <a:p>
+            <a:pPr indent="0" marL="0">
+              <a:lnSpc>
+                <a:spcPct val="105000"/>
+              </a:lnSpc>
+              <a:buNone/>
+            </a:pPr>
+            <a:r>
+              <a:rPr lang="en-US" sz="3200" b="1" dirty="0">
+                <a:solidFill>
+                  <a:srgbClr val="FFFFFF"/>
+                </a:solidFill>
+                <a:latin typeface="Cambria" pitchFamily="34" charset="0"/>
+                <a:ea typeface="Cambria" pitchFamily="34" charset="-122"/>
+                <a:cs typeface="Cambria" pitchFamily="34" charset="-120"/>
+              </a:rPr>
+              <a:t>DE RIESGOS</a:t>
+            </a:r>
+            <a:endParaRPr lang="en-US" sz="3200" dirty="0"/>
+          </a:p>
+        </p:txBody>
+      </p:sp>
+      <p:sp>
+        <p:nvSpPr>
+          <p:cNvPr id="20" name="Text 13"/>
+          <p:cNvSpPr txBox="1"/>
+          <p:nvPr/>
+        </p:nvSpPr>
+        <p:spPr>
+          <a:xfrm>
+            <a:off x="566928" y="4206240"/>
+            <a:ext cx="7223760" cy="822960"/>
+          </a:xfrm>
+          <a:prstGeom prst="rect">
+            <a:avLst/>
+          </a:prstGeom>
+          <a:noFill/>
+          <a:ln/>
+        </p:spPr>
+        <p:txBody>
+          <a:bodyPr wrap="square" lIns="0" tIns="0" rIns="0" bIns="0" rtlCol="0" anchor="ctr"/>
+          <a:lstStyle/>
+          <a:p>
+            <a:pPr indent="0" marL="0">
+              <a:lnSpc>
+                <a:spcPct val="118000"/>
+              </a:lnSpc>
+              <a:buNone/>
+            </a:pPr>
+            <a:r>
+              <a:rPr lang="en-US" sz="1550" i="1" dirty="0">
+                <a:solidFill>
+                  <a:srgbClr val="D7E1F0"/>
+                </a:solidFill>
+                <a:latin typeface="Calibri" pitchFamily="34" charset="0"/>
+                <a:ea typeface="Calibri" pitchFamily="34" charset="-122"/>
+                <a:cs typeface="Calibri" pitchFamily="34" charset="-120"/>
+              </a:rPr>
+              <a:t>La gestión de riesgos no es responsabilidad de un solo departamento.</a:t>
+            </a:r>
+            <a:endParaRPr lang="en-US" sz="1550" dirty="0"/>
+          </a:p>
+        </p:txBody>
+      </p:sp>
+      <p:pic>
+        <p:nvPicPr>
+          <p:cNvPr id="21" name="Image 4" descr="/tmp/claude-0/-home-user-riesgo/0ff9ff46-1396-5bd8-b3ac-2280dfbbbc55/scratchpad/work/gen/logo_white.png">    </p:cNvPr>
+          <p:cNvPicPr>
+            <a:picLocks noChangeAspect="1"/>
+          </p:cNvPicPr>
+          <p:nvPr/>
+        </p:nvPicPr>
+        <p:blipFill>
+          <a:blip r:embed="rId5"/>
+          <a:stretch>
+            <a:fillRect/>
+          </a:stretch>
+        </p:blipFill>
+        <p:spPr>
+          <a:xfrm>
+            <a:off x="566928" y="5989320"/>
+            <a:ext cx="1417320" cy="398267"/>
+          </a:xfrm>
+          <a:prstGeom prst="rect">
+            <a:avLst/>
+          </a:prstGeom>
+        </p:spPr>
+      </p:pic>
+      <p:sp>
+        <p:nvSpPr>
+          <p:cNvPr id="22" name="Text 14"/>
+          <p:cNvSpPr txBox="1"/>
+          <p:nvPr/>
+        </p:nvSpPr>
+        <p:spPr>
+          <a:xfrm>
+            <a:off x="566928" y="6473952"/>
+            <a:ext cx="7315200" cy="274320"/>
+          </a:xfrm>
+          <a:prstGeom prst="rect">
+            <a:avLst/>
+          </a:prstGeom>
+          <a:noFill/>
+          <a:ln/>
+        </p:spPr>
+        <p:txBody>
+          <a:bodyPr wrap="square" lIns="0" tIns="0" rIns="0" bIns="0" rtlCol="0" anchor="ctr"/>
+          <a:lstStyle/>
+          <a:p>
+            <a:pPr algn="l" indent="0" marL="0">
+              <a:buNone/>
+            </a:pPr>
+            <a:r>
+              <a:rPr lang="en-US" sz="900" dirty="0">
+                <a:solidFill>
+                  <a:srgbClr val="AEC0DA"/>
+                </a:solidFill>
+                <a:latin typeface="Calibri" pitchFamily="34" charset="0"/>
+                <a:ea typeface="Calibri" pitchFamily="34" charset="-122"/>
+                <a:cs typeface="Calibri" pitchFamily="34" charset="-120"/>
+              </a:rPr>
               <a:t>GESTIÓN INTEGRAL DE RIESGOS  ·  COMEDICA DE R.L.</a:t>
             </a:r>
             <a:endParaRPr lang="en-US" sz="900" dirty="0"/>
@@ -35620,7 +37708,7 @@
       </p:sp>
       <p:sp>
         <p:nvSpPr>
-          <p:cNvPr id="12" name="Text 7"/>
+          <p:cNvPr id="23" name="Text 15"/>
           <p:cNvSpPr txBox="1"/>
           <p:nvPr/>
         </p:nvSpPr>
@@ -35716,7 +37804,7 @@
             <a:r>
               <a:rPr lang="en-US" sz="1300" b="1" spc="200" kern="0" dirty="0">
                 <a:solidFill>
-                  <a:srgbClr val="E3A73B"/>
+                  <a:srgbClr val="F0AD35"/>
                 </a:solidFill>
                 <a:latin typeface="Calibri" pitchFamily="34" charset="0"/>
                 <a:ea typeface="Calibri" pitchFamily="34" charset="-122"/>
@@ -35846,7 +37934,7 @@
             <a:avLst/>
           </a:prstGeom>
           <a:solidFill>
-            <a:srgbClr val="133B6C"/>
+            <a:srgbClr val="F0AD35"/>
           </a:solidFill>
           <a:ln/>
         </p:spPr>
@@ -35954,7 +38042,7 @@
             <a:avLst/>
           </a:prstGeom>
           <a:solidFill>
-            <a:srgbClr val="133B6C"/>
+            <a:srgbClr val="F0AD35"/>
           </a:solidFill>
           <a:ln/>
         </p:spPr>
@@ -36062,7 +38150,7 @@
             <a:avLst/>
           </a:prstGeom>
           <a:solidFill>
-            <a:srgbClr val="133B6C"/>
+            <a:srgbClr val="F0AD35"/>
           </a:solidFill>
           <a:ln/>
         </p:spPr>
@@ -36170,7 +38258,7 @@
             <a:avLst/>
           </a:prstGeom>
           <a:solidFill>
-            <a:srgbClr val="133B6C"/>
+            <a:srgbClr val="F0AD35"/>
           </a:solidFill>
           <a:ln/>
         </p:spPr>
@@ -36278,7 +38366,7 @@
             <a:avLst/>
           </a:prstGeom>
           <a:solidFill>
-            <a:srgbClr val="133B6C"/>
+            <a:srgbClr val="F0AD35"/>
           </a:solidFill>
           <a:ln/>
         </p:spPr>
@@ -36386,7 +38474,7 @@
             <a:avLst/>
           </a:prstGeom>
           <a:solidFill>
-            <a:srgbClr val="133B6C"/>
+            <a:srgbClr val="F0AD35"/>
           </a:solidFill>
           <a:ln/>
         </p:spPr>
@@ -36484,7 +38572,7 @@
             <a:r>
               <a:rPr lang="en-US" sz="900" dirty="0">
                 <a:solidFill>
-                  <a:srgbClr val="8FA0B5"/>
+                  <a:srgbClr val="5B6B82"/>
                 </a:solidFill>
                 <a:latin typeface="Calibri" pitchFamily="34" charset="0"/>
                 <a:ea typeface="Calibri" pitchFamily="34" charset="-122"/>
@@ -36523,7 +38611,7 @@
             <a:r>
               <a:rPr lang="en-US" sz="900" dirty="0">
                 <a:solidFill>
-                  <a:srgbClr val="8FA0B5"/>
+                  <a:srgbClr val="5B6B82"/>
                 </a:solidFill>
                 <a:latin typeface="Calibri" pitchFamily="34" charset="0"/>
                 <a:ea typeface="Calibri" pitchFamily="34" charset="-122"/>
@@ -36657,7 +38745,7 @@
             <a:r>
               <a:rPr lang="en-US" sz="3400" b="1" dirty="0">
                 <a:solidFill>
-                  <a:srgbClr val="E3A73B"/>
+                  <a:srgbClr val="F0AD35"/>
                 </a:solidFill>
                 <a:latin typeface="Cambria" pitchFamily="34" charset="0"/>
                 <a:ea typeface="Cambria" pitchFamily="34" charset="-122"/>
@@ -36786,9 +38874,49 @@
           <p:nvPr/>
         </p:nvSpPr>
         <p:spPr>
-          <a:xfrm>
-            <a:off x="-2926080" y="2926080"/>
-            <a:ext cx="7772400" cy="7772400"/>
+          <a:xfrm rot="720000">
+            <a:off x="7955280" y="-457200"/>
+            <a:ext cx="5669280" cy="7772400"/>
+          </a:xfrm>
+          <a:prstGeom prst="rect">
+            <a:avLst/>
+          </a:prstGeom>
+          <a:solidFill>
+            <a:srgbClr val="E8543E"/>
+          </a:solidFill>
+          <a:ln/>
+        </p:spPr>
+      </p:sp>
+      <p:sp>
+        <p:nvSpPr>
+          <p:cNvPr id="4" name="Shape 1"/>
+          <p:cNvSpPr/>
+          <p:nvPr/>
+        </p:nvSpPr>
+        <p:spPr>
+          <a:xfrm>
+            <a:off x="0" y="0"/>
+            <a:ext cx="8275320" cy="6858000"/>
+          </a:xfrm>
+          <a:prstGeom prst="rect">
+            <a:avLst/>
+          </a:prstGeom>
+          <a:solidFill>
+            <a:srgbClr val="0A1F3B"/>
+          </a:solidFill>
+          <a:ln/>
+        </p:spPr>
+      </p:sp>
+      <p:sp>
+        <p:nvSpPr>
+          <p:cNvPr id="5" name="Shape 2"/>
+          <p:cNvSpPr/>
+          <p:nvPr/>
+        </p:nvSpPr>
+        <p:spPr>
+          <a:xfrm>
+            <a:off x="-3108960" y="3291840"/>
+            <a:ext cx="7498080" cy="7498080"/>
           </a:xfrm>
           <a:prstGeom prst="ellipse">
             <a:avLst/>
@@ -36801,14 +38929,14 @@
       </p:sp>
       <p:sp>
         <p:nvSpPr>
-          <p:cNvPr id="4" name="Text 1"/>
-          <p:cNvSpPr txBox="1"/>
-          <p:nvPr/>
-        </p:nvSpPr>
-        <p:spPr>
-          <a:xfrm>
-            <a:off x="7498080" y="-777240"/>
-            <a:ext cx="5120640" cy="3840480"/>
+          <p:cNvPr id="6" name="Text 3"/>
+          <p:cNvSpPr txBox="1"/>
+          <p:nvPr/>
+        </p:nvSpPr>
+        <p:spPr>
+          <a:xfrm>
+            <a:off x="-274320" y="-914400"/>
+            <a:ext cx="5852160" cy="4023360"/>
           </a:xfrm>
           <a:prstGeom prst="rect">
             <a:avLst/>
@@ -36820,13 +38948,13 @@
           <a:bodyPr wrap="square" lIns="0" tIns="0" rIns="0" bIns="0" rtlCol="0" anchor="ctr"/>
           <a:lstStyle/>
           <a:p>
-            <a:pPr algn="r" indent="0" marL="0">
+            <a:pPr algn="l" indent="0" marL="0">
               <a:buNone/>
             </a:pPr>
             <a:r>
               <a:rPr lang="en-US" sz="26000" b="1" dirty="0">
                 <a:solidFill>
-                  <a:srgbClr val="15294A"/>
+                  <a:srgbClr val="133B6C"/>
                 </a:solidFill>
                 <a:latin typeface="Cambria" pitchFamily="34" charset="0"/>
                 <a:ea typeface="Cambria" pitchFamily="34" charset="-122"/>
@@ -36840,27 +38968,87 @@
       </p:sp>
       <p:sp>
         <p:nvSpPr>
-          <p:cNvPr id="5" name="Shape 2"/>
-          <p:cNvSpPr/>
-          <p:nvPr/>
-        </p:nvSpPr>
-        <p:spPr>
-          <a:xfrm>
-            <a:off x="566928" y="1828800"/>
-            <a:ext cx="1188720" cy="1188720"/>
+          <p:cNvPr id="7" name="Shape 4"/>
+          <p:cNvSpPr/>
+          <p:nvPr/>
+        </p:nvSpPr>
+        <p:spPr>
+          <a:xfrm>
+            <a:off x="8686800" y="2011680"/>
+            <a:ext cx="2834640" cy="2834640"/>
           </a:xfrm>
           <a:prstGeom prst="ellipse">
             <a:avLst/>
           </a:prstGeom>
           <a:solidFill>
-            <a:srgbClr val="E3A73B"/>
+            <a:srgbClr val="0A1F3B"/>
+          </a:solidFill>
+          <a:ln/>
+        </p:spPr>
+      </p:sp>
+      <p:sp>
+        <p:nvSpPr>
+          <p:cNvPr id="8" name="Shape 5"/>
+          <p:cNvSpPr/>
+          <p:nvPr/>
+        </p:nvSpPr>
+        <p:spPr>
+          <a:xfrm>
+            <a:off x="9784080" y="3931920"/>
+            <a:ext cx="1371600" cy="1371600"/>
+          </a:xfrm>
+          <a:prstGeom prst="ellipse">
+            <a:avLst/>
+          </a:prstGeom>
+          <a:solidFill>
+            <a:srgbClr val="FFFFFF"/>
+          </a:solidFill>
+          <a:ln/>
+        </p:spPr>
+      </p:sp>
+      <p:sp>
+        <p:nvSpPr>
+          <p:cNvPr id="9" name="Shape 6"/>
+          <p:cNvSpPr/>
+          <p:nvPr/>
+        </p:nvSpPr>
+        <p:spPr>
+          <a:xfrm>
+            <a:off x="10698480" y="2011680"/>
+            <a:ext cx="960120" cy="960120"/>
+          </a:xfrm>
+          <a:prstGeom prst="ellipse">
+            <a:avLst/>
+          </a:prstGeom>
+          <a:solidFill>
+            <a:srgbClr val="0D2847"/>
+          </a:solidFill>
+          <a:ln/>
+        </p:spPr>
+      </p:sp>
+      <p:sp>
+        <p:nvSpPr>
+          <p:cNvPr id="10" name="Shape 7"/>
+          <p:cNvSpPr/>
+          <p:nvPr/>
+        </p:nvSpPr>
+        <p:spPr>
+          <a:xfrm>
+            <a:off x="9075420" y="2217420"/>
+            <a:ext cx="1051560" cy="1051560"/>
+          </a:xfrm>
+          <a:prstGeom prst="ellipse">
+            <a:avLst/>
+          </a:prstGeom>
+          <a:solidFill>
+            <a:srgbClr val="FFFFFF"/>
           </a:solidFill>
           <a:ln/>
         </p:spPr>
       </p:sp>
       <p:pic>
         <p:nvPicPr>
-          <p:cNvPr id="6" name="Image 0" descr="/tmp/claude-0/-home-user-riesgo/0ff9ff46-1396-5bd8-b3ac-2280dfbbbc55/scratchpad/work/gen/icons/megaphone_navy.png">    </p:cNvPr>
+          <p:cNvPr id="11" name="Image 0" descr="/tmp/claude-0/-home-user-riesgo/0ff9ff46-1396-5bd8-b3ac-2280dfbbbc55/scratchpad/work/gen/icons/megaphone_coral.png">    </p:cNvPr>
           <p:cNvPicPr>
             <a:picLocks noChangeAspect="1"/>
           </p:cNvPicPr>
@@ -36874,8 +39062,8 @@
         </p:blipFill>
         <p:spPr>
           <a:xfrm>
-            <a:off x="852221" y="2114093"/>
-            <a:ext cx="618134" cy="618134"/>
+            <a:off x="9338310" y="2480310"/>
+            <a:ext cx="525780" cy="525780"/>
           </a:xfrm>
           <a:prstGeom prst="rect">
             <a:avLst/>
@@ -36884,150 +39072,27 @@
       </p:pic>
       <p:sp>
         <p:nvSpPr>
-          <p:cNvPr id="7" name="Text 3"/>
-          <p:cNvSpPr txBox="1"/>
-          <p:nvPr/>
-        </p:nvSpPr>
-        <p:spPr>
-          <a:xfrm>
-            <a:off x="566928" y="2880360"/>
-            <a:ext cx="9601200" cy="365760"/>
-          </a:xfrm>
-          <a:prstGeom prst="rect">
-            <a:avLst/>
-          </a:prstGeom>
-          <a:noFill/>
-          <a:ln/>
-        </p:spPr>
-        <p:txBody>
-          <a:bodyPr wrap="square" lIns="0" tIns="0" rIns="0" bIns="0" rtlCol="0" anchor="ctr"/>
-          <a:lstStyle/>
-          <a:p>
-            <a:pPr indent="0" marL="0">
-              <a:buNone/>
-            </a:pPr>
-            <a:r>
-              <a:rPr lang="en-US" sz="1500" b="1" spc="300" kern="0" dirty="0">
-                <a:solidFill>
-                  <a:srgbClr val="E3A73B"/>
-                </a:solidFill>
-                <a:latin typeface="Calibri" pitchFamily="34" charset="0"/>
-                <a:ea typeface="Calibri" pitchFamily="34" charset="-122"/>
-                <a:cs typeface="Calibri" pitchFamily="34" charset="-120"/>
-              </a:rPr>
-              <a:t>TEMA 2</a:t>
-            </a:r>
-            <a:endParaRPr lang="en-US" sz="1500" dirty="0"/>
-          </a:p>
-        </p:txBody>
-      </p:sp>
-      <p:sp>
-        <p:nvSpPr>
-          <p:cNvPr id="8" name="Text 4"/>
-          <p:cNvSpPr txBox="1"/>
-          <p:nvPr/>
-        </p:nvSpPr>
-        <p:spPr>
-          <a:xfrm>
-            <a:off x="566928" y="3246120"/>
-            <a:ext cx="10424160" cy="1554480"/>
-          </a:xfrm>
-          <a:prstGeom prst="rect">
-            <a:avLst/>
-          </a:prstGeom>
-          <a:noFill/>
-          <a:ln/>
-        </p:spPr>
-        <p:txBody>
-          <a:bodyPr wrap="square" lIns="0" tIns="0" rIns="0" bIns="0" rtlCol="0" anchor="ctr"/>
-          <a:lstStyle/>
-          <a:p>
-            <a:pPr indent="0" marL="0">
-              <a:lnSpc>
-                <a:spcPct val="105000"/>
-              </a:lnSpc>
-              <a:buNone/>
-            </a:pPr>
-            <a:r>
-              <a:rPr lang="en-US" sz="3400" b="1" dirty="0">
-                <a:solidFill>
-                  <a:srgbClr val="FFFFFF"/>
-                </a:solidFill>
-                <a:latin typeface="Cambria" pitchFamily="34" charset="0"/>
-                <a:ea typeface="Cambria" pitchFamily="34" charset="-122"/>
-                <a:cs typeface="Cambria" pitchFamily="34" charset="-120"/>
-              </a:rPr>
-              <a:t>¿VES UN RIESGO?</a:t>
-            </a:r>
-            <a:endParaRPr lang="en-US" sz="3400" dirty="0"/>
-          </a:p>
-          <a:p>
-            <a:pPr indent="0" marL="0">
-              <a:lnSpc>
-                <a:spcPct val="105000"/>
-              </a:lnSpc>
-              <a:buNone/>
-            </a:pPr>
-            <a:r>
-              <a:rPr lang="en-US" sz="3400" b="1" dirty="0">
-                <a:solidFill>
-                  <a:srgbClr val="FFFFFF"/>
-                </a:solidFill>
-                <a:latin typeface="Cambria" pitchFamily="34" charset="0"/>
-                <a:ea typeface="Cambria" pitchFamily="34" charset="-122"/>
-                <a:cs typeface="Cambria" pitchFamily="34" charset="-120"/>
-              </a:rPr>
-              <a:t>¡REPÓRTALO!</a:t>
-            </a:r>
-            <a:endParaRPr lang="en-US" sz="3400" dirty="0"/>
-          </a:p>
-        </p:txBody>
-      </p:sp>
-      <p:sp>
-        <p:nvSpPr>
-          <p:cNvPr id="9" name="Text 5"/>
-          <p:cNvSpPr txBox="1"/>
-          <p:nvPr/>
-        </p:nvSpPr>
-        <p:spPr>
-          <a:xfrm>
-            <a:off x="566928" y="4663440"/>
-            <a:ext cx="9692640" cy="822960"/>
-          </a:xfrm>
-          <a:prstGeom prst="rect">
-            <a:avLst/>
-          </a:prstGeom>
-          <a:noFill/>
-          <a:ln/>
-        </p:spPr>
-        <p:txBody>
-          <a:bodyPr wrap="square" lIns="0" tIns="0" rIns="0" bIns="0" rtlCol="0" anchor="ctr"/>
-          <a:lstStyle/>
-          <a:p>
-            <a:pPr indent="0" marL="0">
-              <a:lnSpc>
-                <a:spcPct val="115000"/>
-              </a:lnSpc>
-              <a:buNone/>
-            </a:pPr>
-            <a:r>
-              <a:rPr lang="en-US" sz="1600" i="1" dirty="0">
-                <a:solidFill>
-                  <a:srgbClr val="C7D3E5"/>
-                </a:solidFill>
-                <a:latin typeface="Calibri" pitchFamily="34" charset="0"/>
-                <a:ea typeface="Calibri" pitchFamily="34" charset="-122"/>
-                <a:cs typeface="Calibri" pitchFamily="34" charset="-120"/>
-              </a:rPr>
-              <a:t>Uno de los hábitos más importantes que puedes construir en tu día a día.</a:t>
-            </a:r>
-            <a:endParaRPr lang="en-US" sz="1600" dirty="0"/>
-          </a:p>
-        </p:txBody>
+          <p:cNvPr id="12" name="Shape 8"/>
+          <p:cNvSpPr/>
+          <p:nvPr/>
+        </p:nvSpPr>
+        <p:spPr>
+          <a:xfrm>
+            <a:off x="10447020" y="2948940"/>
+            <a:ext cx="868680" cy="868680"/>
+          </a:xfrm>
+          <a:prstGeom prst="ellipse">
+            <a:avLst/>
+          </a:prstGeom>
+          <a:solidFill>
+            <a:srgbClr val="0A1F3B"/>
+          </a:solidFill>
+          <a:ln/>
+        </p:spPr>
       </p:sp>
       <p:pic>
         <p:nvPicPr>
-          <p:cNvPr id="10" name="Image 1" descr="/tmp/claude-0/-home-user-riesgo/0ff9ff46-1396-5bd8-b3ac-2280dfbbbc55/scratchpad/work/gen/logo_white.png">    </p:cNvPr>
+          <p:cNvPr id="13" name="Image 1" descr="/tmp/claude-0/-home-user-riesgo/0ff9ff46-1396-5bd8-b3ac-2280dfbbbc55/scratchpad/work/gen/icons/eye_white.png">    </p:cNvPr>
           <p:cNvPicPr>
             <a:picLocks noChangeAspect="1"/>
           </p:cNvPicPr>
@@ -37041,8 +39106,8 @@
         </p:blipFill>
         <p:spPr>
           <a:xfrm>
-            <a:off x="10161727" y="5961888"/>
-            <a:ext cx="1463040" cy="411114"/>
+            <a:off x="10664190" y="3166110"/>
+            <a:ext cx="434340" cy="434340"/>
           </a:xfrm>
           <a:prstGeom prst="rect">
             <a:avLst/>
@@ -37051,14 +39116,102 @@
       </p:pic>
       <p:sp>
         <p:nvSpPr>
-          <p:cNvPr id="11" name="Text 6"/>
-          <p:cNvSpPr txBox="1"/>
-          <p:nvPr/>
-        </p:nvSpPr>
-        <p:spPr>
-          <a:xfrm>
-            <a:off x="566928" y="6473952"/>
-            <a:ext cx="7315200" cy="274320"/>
+          <p:cNvPr id="14" name="Shape 9"/>
+          <p:cNvSpPr/>
+          <p:nvPr/>
+        </p:nvSpPr>
+        <p:spPr>
+          <a:xfrm>
+            <a:off x="9578340" y="3909060"/>
+            <a:ext cx="777240" cy="777240"/>
+          </a:xfrm>
+          <a:prstGeom prst="ellipse">
+            <a:avLst/>
+          </a:prstGeom>
+          <a:solidFill>
+            <a:srgbClr val="FFFFFF"/>
+          </a:solidFill>
+          <a:ln/>
+        </p:spPr>
+      </p:sp>
+      <p:pic>
+        <p:nvPicPr>
+          <p:cNvPr id="15" name="Image 2" descr="/tmp/claude-0/-home-user-riesgo/0ff9ff46-1396-5bd8-b3ac-2280dfbbbc55/scratchpad/work/gen/icons/mail_navy.png">    </p:cNvPr>
+          <p:cNvPicPr>
+            <a:picLocks noChangeAspect="1"/>
+          </p:cNvPicPr>
+          <p:nvPr/>
+        </p:nvPicPr>
+        <p:blipFill>
+          <a:blip r:embed="rId3"/>
+          <a:stretch>
+            <a:fillRect/>
+          </a:stretch>
+        </p:blipFill>
+        <p:spPr>
+          <a:xfrm>
+            <a:off x="9772650" y="4103370"/>
+            <a:ext cx="388620" cy="388620"/>
+          </a:xfrm>
+          <a:prstGeom prst="rect">
+            <a:avLst/>
+          </a:prstGeom>
+        </p:spPr>
+      </p:pic>
+      <p:sp>
+        <p:nvSpPr>
+          <p:cNvPr id="16" name="Shape 10"/>
+          <p:cNvSpPr/>
+          <p:nvPr/>
+        </p:nvSpPr>
+        <p:spPr>
+          <a:xfrm>
+            <a:off x="10689336" y="4105656"/>
+            <a:ext cx="658368" cy="658368"/>
+          </a:xfrm>
+          <a:prstGeom prst="ellipse">
+            <a:avLst/>
+          </a:prstGeom>
+          <a:solidFill>
+            <a:srgbClr val="0A1F3B"/>
+          </a:solidFill>
+          <a:ln/>
+        </p:spPr>
+      </p:sp>
+      <p:pic>
+        <p:nvPicPr>
+          <p:cNvPr id="17" name="Image 3" descr="/tmp/claude-0/-home-user-riesgo/0ff9ff46-1396-5bd8-b3ac-2280dfbbbc55/scratchpad/work/gen/icons/bell_alert_coral.png">    </p:cNvPr>
+          <p:cNvPicPr>
+            <a:picLocks noChangeAspect="1"/>
+          </p:cNvPicPr>
+          <p:nvPr/>
+        </p:nvPicPr>
+        <p:blipFill>
+          <a:blip r:embed="rId4"/>
+          <a:stretch>
+            <a:fillRect/>
+          </a:stretch>
+        </p:blipFill>
+        <p:spPr>
+          <a:xfrm>
+            <a:off x="10853928" y="4270248"/>
+            <a:ext cx="329184" cy="329184"/>
+          </a:xfrm>
+          <a:prstGeom prst="rect">
+            <a:avLst/>
+          </a:prstGeom>
+        </p:spPr>
+      </p:pic>
+      <p:sp>
+        <p:nvSpPr>
+          <p:cNvPr id="18" name="Text 11"/>
+          <p:cNvSpPr txBox="1"/>
+          <p:nvPr/>
+        </p:nvSpPr>
+        <p:spPr>
+          <a:xfrm>
+            <a:off x="566928" y="2423160"/>
+            <a:ext cx="7315200" cy="365760"/>
           </a:xfrm>
           <a:prstGeom prst="rect">
             <a:avLst/>
@@ -37070,18 +39223,185 @@
           <a:bodyPr wrap="square" lIns="0" tIns="0" rIns="0" bIns="0" rtlCol="0" anchor="ctr"/>
           <a:lstStyle/>
           <a:p>
-            <a:pPr algn="l" indent="0" marL="0">
-              <a:buNone/>
-            </a:pPr>
-            <a:r>
-              <a:rPr lang="en-US" sz="900" dirty="0">
-                <a:solidFill>
-                  <a:srgbClr val="AEC0DA"/>
+            <a:pPr indent="0" marL="0">
+              <a:buNone/>
+            </a:pPr>
+            <a:r>
+              <a:rPr lang="en-US" sz="1500" b="1" spc="300" kern="0" dirty="0">
+                <a:solidFill>
+                  <a:srgbClr val="E8543E"/>
                 </a:solidFill>
                 <a:latin typeface="Calibri" pitchFamily="34" charset="0"/>
                 <a:ea typeface="Calibri" pitchFamily="34" charset="-122"/>
                 <a:cs typeface="Calibri" pitchFamily="34" charset="-120"/>
               </a:rPr>
+              <a:t>TEMA 2</a:t>
+            </a:r>
+            <a:endParaRPr lang="en-US" sz="1500" dirty="0"/>
+          </a:p>
+        </p:txBody>
+      </p:sp>
+      <p:sp>
+        <p:nvSpPr>
+          <p:cNvPr id="19" name="Text 12"/>
+          <p:cNvSpPr txBox="1"/>
+          <p:nvPr/>
+        </p:nvSpPr>
+        <p:spPr>
+          <a:xfrm>
+            <a:off x="566928" y="2788920"/>
+            <a:ext cx="7406640" cy="1554480"/>
+          </a:xfrm>
+          <a:prstGeom prst="rect">
+            <a:avLst/>
+          </a:prstGeom>
+          <a:noFill/>
+          <a:ln/>
+        </p:spPr>
+        <p:txBody>
+          <a:bodyPr wrap="square" lIns="0" tIns="0" rIns="0" bIns="0" rtlCol="0" anchor="ctr"/>
+          <a:lstStyle/>
+          <a:p>
+            <a:pPr indent="0" marL="0">
+              <a:lnSpc>
+                <a:spcPct val="105000"/>
+              </a:lnSpc>
+              <a:buNone/>
+            </a:pPr>
+            <a:r>
+              <a:rPr lang="en-US" sz="3200" b="1" dirty="0">
+                <a:solidFill>
+                  <a:srgbClr val="FFFFFF"/>
+                </a:solidFill>
+                <a:latin typeface="Cambria" pitchFamily="34" charset="0"/>
+                <a:ea typeface="Cambria" pitchFamily="34" charset="-122"/>
+                <a:cs typeface="Cambria" pitchFamily="34" charset="-120"/>
+              </a:rPr>
+              <a:t>¿VES UN RIESGO?</a:t>
+            </a:r>
+            <a:endParaRPr lang="en-US" sz="3200" dirty="0"/>
+          </a:p>
+          <a:p>
+            <a:pPr indent="0" marL="0">
+              <a:lnSpc>
+                <a:spcPct val="105000"/>
+              </a:lnSpc>
+              <a:buNone/>
+            </a:pPr>
+            <a:r>
+              <a:rPr lang="en-US" sz="3200" b="1" dirty="0">
+                <a:solidFill>
+                  <a:srgbClr val="FFFFFF"/>
+                </a:solidFill>
+                <a:latin typeface="Cambria" pitchFamily="34" charset="0"/>
+                <a:ea typeface="Cambria" pitchFamily="34" charset="-122"/>
+                <a:cs typeface="Cambria" pitchFamily="34" charset="-120"/>
+              </a:rPr>
+              <a:t>¡REPÓRTALO!</a:t>
+            </a:r>
+            <a:endParaRPr lang="en-US" sz="3200" dirty="0"/>
+          </a:p>
+        </p:txBody>
+      </p:sp>
+      <p:sp>
+        <p:nvSpPr>
+          <p:cNvPr id="20" name="Text 13"/>
+          <p:cNvSpPr txBox="1"/>
+          <p:nvPr/>
+        </p:nvSpPr>
+        <p:spPr>
+          <a:xfrm>
+            <a:off x="566928" y="4206240"/>
+            <a:ext cx="7223760" cy="822960"/>
+          </a:xfrm>
+          <a:prstGeom prst="rect">
+            <a:avLst/>
+          </a:prstGeom>
+          <a:noFill/>
+          <a:ln/>
+        </p:spPr>
+        <p:txBody>
+          <a:bodyPr wrap="square" lIns="0" tIns="0" rIns="0" bIns="0" rtlCol="0" anchor="ctr"/>
+          <a:lstStyle/>
+          <a:p>
+            <a:pPr indent="0" marL="0">
+              <a:lnSpc>
+                <a:spcPct val="118000"/>
+              </a:lnSpc>
+              <a:buNone/>
+            </a:pPr>
+            <a:r>
+              <a:rPr lang="en-US" sz="1550" i="1" dirty="0">
+                <a:solidFill>
+                  <a:srgbClr val="D7E1F0"/>
+                </a:solidFill>
+                <a:latin typeface="Calibri" pitchFamily="34" charset="0"/>
+                <a:ea typeface="Calibri" pitchFamily="34" charset="-122"/>
+                <a:cs typeface="Calibri" pitchFamily="34" charset="-120"/>
+              </a:rPr>
+              <a:t>Uno de los hábitos más importantes que puedes construir en tu día a día.</a:t>
+            </a:r>
+            <a:endParaRPr lang="en-US" sz="1550" dirty="0"/>
+          </a:p>
+        </p:txBody>
+      </p:sp>
+      <p:pic>
+        <p:nvPicPr>
+          <p:cNvPr id="21" name="Image 4" descr="/tmp/claude-0/-home-user-riesgo/0ff9ff46-1396-5bd8-b3ac-2280dfbbbc55/scratchpad/work/gen/logo_white.png">    </p:cNvPr>
+          <p:cNvPicPr>
+            <a:picLocks noChangeAspect="1"/>
+          </p:cNvPicPr>
+          <p:nvPr/>
+        </p:nvPicPr>
+        <p:blipFill>
+          <a:blip r:embed="rId5"/>
+          <a:stretch>
+            <a:fillRect/>
+          </a:stretch>
+        </p:blipFill>
+        <p:spPr>
+          <a:xfrm>
+            <a:off x="566928" y="5989320"/>
+            <a:ext cx="1417320" cy="398267"/>
+          </a:xfrm>
+          <a:prstGeom prst="rect">
+            <a:avLst/>
+          </a:prstGeom>
+        </p:spPr>
+      </p:pic>
+      <p:sp>
+        <p:nvSpPr>
+          <p:cNvPr id="22" name="Text 14"/>
+          <p:cNvSpPr txBox="1"/>
+          <p:nvPr/>
+        </p:nvSpPr>
+        <p:spPr>
+          <a:xfrm>
+            <a:off x="566928" y="6473952"/>
+            <a:ext cx="7315200" cy="274320"/>
+          </a:xfrm>
+          <a:prstGeom prst="rect">
+            <a:avLst/>
+          </a:prstGeom>
+          <a:noFill/>
+          <a:ln/>
+        </p:spPr>
+        <p:txBody>
+          <a:bodyPr wrap="square" lIns="0" tIns="0" rIns="0" bIns="0" rtlCol="0" anchor="ctr"/>
+          <a:lstStyle/>
+          <a:p>
+            <a:pPr algn="l" indent="0" marL="0">
+              <a:buNone/>
+            </a:pPr>
+            <a:r>
+              <a:rPr lang="en-US" sz="900" dirty="0">
+                <a:solidFill>
+                  <a:srgbClr val="AEC0DA"/>
+                </a:solidFill>
+                <a:latin typeface="Calibri" pitchFamily="34" charset="0"/>
+                <a:ea typeface="Calibri" pitchFamily="34" charset="-122"/>
+                <a:cs typeface="Calibri" pitchFamily="34" charset="-120"/>
+              </a:rPr>
               <a:t>GESTIÓN INTEGRAL DE RIESGOS  ·  COMEDICA DE R.L.</a:t>
             </a:r>
             <a:endParaRPr lang="en-US" sz="900" dirty="0"/>
@@ -37090,7 +39410,7 @@
       </p:sp>
       <p:sp>
         <p:nvSpPr>
-          <p:cNvPr id="12" name="Text 7"/>
+          <p:cNvPr id="23" name="Text 15"/>
           <p:cNvSpPr txBox="1"/>
           <p:nvPr/>
         </p:nvSpPr>
@@ -37186,7 +39506,7 @@
             <a:r>
               <a:rPr lang="en-US" sz="1300" b="1" spc="200" kern="0" dirty="0">
                 <a:solidFill>
-                  <a:srgbClr val="E3A73B"/>
+                  <a:srgbClr val="E8543E"/>
                 </a:solidFill>
                 <a:latin typeface="Calibri" pitchFamily="34" charset="0"/>
                 <a:ea typeface="Calibri" pitchFamily="34" charset="-122"/>
@@ -37255,7 +39575,7 @@
             <a:avLst/>
           </a:prstGeom>
           <a:solidFill>
-            <a:srgbClr val="133B6C"/>
+            <a:srgbClr val="E8543E"/>
           </a:solidFill>
           <a:ln/>
         </p:spPr>
@@ -37407,7 +39727,7 @@
             <a:avLst/>
           </a:prstGeom>
           <a:solidFill>
-            <a:srgbClr val="133B6C"/>
+            <a:srgbClr val="E8543E"/>
           </a:solidFill>
           <a:ln/>
         </p:spPr>
@@ -37559,7 +39879,7 @@
             <a:avLst/>
           </a:prstGeom>
           <a:solidFill>
-            <a:srgbClr val="133B6C"/>
+            <a:srgbClr val="E8543E"/>
           </a:solidFill>
           <a:ln/>
         </p:spPr>
@@ -37711,7 +40031,7 @@
             <a:avLst/>
           </a:prstGeom>
           <a:solidFill>
-            <a:srgbClr val="E3A73B"/>
+            <a:srgbClr val="133B6C"/>
           </a:solidFill>
           <a:ln/>
         </p:spPr>
@@ -37851,7 +40171,7 @@
             <a:r>
               <a:rPr lang="en-US" sz="900" dirty="0">
                 <a:solidFill>
-                  <a:srgbClr val="8FA0B5"/>
+                  <a:srgbClr val="5B6B82"/>
                 </a:solidFill>
                 <a:latin typeface="Calibri" pitchFamily="34" charset="0"/>
                 <a:ea typeface="Calibri" pitchFamily="34" charset="-122"/>
@@ -37890,7 +40210,7 @@
             <a:r>
               <a:rPr lang="en-US" sz="900" dirty="0">
                 <a:solidFill>
-                  <a:srgbClr val="8FA0B5"/>
+                  <a:srgbClr val="5B6B82"/>
                 </a:solidFill>
                 <a:latin typeface="Calibri" pitchFamily="34" charset="0"/>
                 <a:ea typeface="Calibri" pitchFamily="34" charset="-122"/>

--- a/capacitacion-riesgos-2025/CAPACITACION_RIESGOS_2025.pptx
+++ b/capacitacion-riesgos-2025/CAPACITACION_RIESGOS_2025.pptx
@@ -2572,7 +2572,7 @@
           <a:p>
             <a:r>
               <a:rPr lang="en-US" dirty="0"/>
-              <a:t>Recorre cada rol alrededor de "TODOS" con una frase corta sobre su función. No te extiendas demasiado en ninguno: el punto es que el grupo se vea reflejado en el centro del diagrama.</a:t>
+              <a:t>Recorre cada rol de izquierda a derecha con una frase corta sobre su función. No te extiendas demasiado en ninguno: el punto es que todos los roles se vean bajo el mismo mensaje de "todos somos responsables".</a:t>
             </a:r>
             <a:endParaRPr lang="en-US" dirty="0"/>
           </a:p>
@@ -5659,7 +5659,7 @@
             <a:r>
               <a:rPr lang="en-US" sz="1200" b="1" spc="200" kern="0" dirty="0">
                 <a:solidFill>
-                  <a:srgbClr val="2E86C7"/>
+                  <a:srgbClr val="A1C9E6"/>
                 </a:solidFill>
                 <a:latin typeface="Calibri" pitchFamily="34" charset="0"/>
                 <a:ea typeface="Calibri" pitchFamily="34" charset="-122"/>
@@ -10282,7 +10282,7 @@
             <a:r>
               <a:rPr lang="en-US" sz="1200" b="1" spc="200" kern="0" dirty="0">
                 <a:solidFill>
-                  <a:srgbClr val="3A6EA5"/>
+                  <a:srgbClr val="A6BED7"/>
                 </a:solidFill>
                 <a:latin typeface="Calibri" pitchFamily="34" charset="0"/>
                 <a:ea typeface="Calibri" pitchFamily="34" charset="-122"/>
@@ -20767,44 +20767,59 @@
           <p:nvPr/>
         </p:nvSpPr>
         <p:spPr>
-          <a:xfrm flipV="1">
-            <a:off x="6095848" y="2304288"/>
-            <a:ext cx="9144" cy="1600200"/>
-          </a:xfrm>
-          <a:prstGeom prst="line">
-            <a:avLst/>
-          </a:prstGeom>
-          <a:noFill/>
-          <a:ln w="19050">
-            <a:solidFill>
-              <a:srgbClr val="E3E8EF"/>
-            </a:solidFill>
-            <a:prstDash val="solid"/>
-          </a:ln>
-        </p:spPr>
-      </p:sp>
-      <p:sp>
-        <p:nvSpPr>
-          <p:cNvPr id="6" name="Shape 3"/>
-          <p:cNvSpPr/>
-          <p:nvPr/>
-        </p:nvSpPr>
-        <p:spPr>
-          <a:xfrm flipV="1">
-            <a:off x="6095848" y="3409999"/>
-            <a:ext cx="1521881" cy="494489"/>
-          </a:xfrm>
-          <a:prstGeom prst="line">
-            <a:avLst/>
-          </a:prstGeom>
-          <a:noFill/>
-          <a:ln w="19050">
-            <a:solidFill>
-              <a:srgbClr val="E3E8EF"/>
-            </a:solidFill>
-            <a:prstDash val="solid"/>
-          </a:ln>
-        </p:spPr>
+          <a:xfrm>
+            <a:off x="566928" y="1965960"/>
+            <a:ext cx="11057839" cy="566928"/>
+          </a:xfrm>
+          <a:prstGeom prst="roundRect">
+            <a:avLst>
+              <a:gd name="adj" fmla="val 16129"/>
+            </a:avLst>
+          </a:prstGeom>
+          <a:solidFill>
+            <a:srgbClr val="1FB6C9"/>
+          </a:solidFill>
+          <a:ln/>
+        </p:spPr>
+      </p:sp>
+      <p:sp>
+        <p:nvSpPr>
+          <p:cNvPr id="6" name="Text 3"/>
+          <p:cNvSpPr txBox="1"/>
+          <p:nvPr/>
+        </p:nvSpPr>
+        <p:spPr>
+          <a:xfrm>
+            <a:off x="566928" y="1965960"/>
+            <a:ext cx="11057839" cy="566928"/>
+          </a:xfrm>
+          <a:prstGeom prst="rect">
+            <a:avLst/>
+          </a:prstGeom>
+          <a:noFill/>
+          <a:ln/>
+        </p:spPr>
+        <p:txBody>
+          <a:bodyPr wrap="square" lIns="0" tIns="0" rIns="0" bIns="0" rtlCol="0" anchor="ctr"/>
+          <a:lstStyle/>
+          <a:p>
+            <a:pPr algn="ctr" indent="0" marL="0">
+              <a:buNone/>
+            </a:pPr>
+            <a:r>
+              <a:rPr lang="en-US" sz="1900" b="1" spc="300" kern="0" dirty="0">
+                <a:solidFill>
+                  <a:srgbClr val="FFFFFF"/>
+                </a:solidFill>
+                <a:latin typeface="Cambria" pitchFamily="34" charset="0"/>
+                <a:ea typeface="Cambria" pitchFamily="34" charset="-122"/>
+                <a:cs typeface="Cambria" pitchFamily="34" charset="-120"/>
+              </a:rPr>
+              <a:t>TODOS SOMOS RESPONSABLES</a:t>
+            </a:r>
+            <a:endParaRPr lang="en-US" sz="1900" dirty="0"/>
+          </a:p>
+        </p:txBody>
       </p:sp>
       <p:sp>
         <p:nvSpPr>
@@ -20814,77 +20829,8 @@
         </p:nvSpPr>
         <p:spPr>
           <a:xfrm>
-            <a:off x="6095848" y="3904488"/>
-            <a:ext cx="940574" cy="1294589"/>
-          </a:xfrm>
-          <a:prstGeom prst="line">
-            <a:avLst/>
-          </a:prstGeom>
-          <a:noFill/>
-          <a:ln w="19050">
-            <a:solidFill>
-              <a:srgbClr val="E3E8EF"/>
-            </a:solidFill>
-            <a:prstDash val="solid"/>
-          </a:ln>
-        </p:spPr>
-      </p:sp>
-      <p:sp>
-        <p:nvSpPr>
-          <p:cNvPr id="8" name="Shape 5"/>
-          <p:cNvSpPr/>
-          <p:nvPr/>
-        </p:nvSpPr>
-        <p:spPr>
-          <a:xfrm flipH="1">
-            <a:off x="5155274" y="3904488"/>
-            <a:ext cx="940574" cy="1294589"/>
-          </a:xfrm>
-          <a:prstGeom prst="line">
-            <a:avLst/>
-          </a:prstGeom>
-          <a:noFill/>
-          <a:ln w="19050">
-            <a:solidFill>
-              <a:srgbClr val="E3E8EF"/>
-            </a:solidFill>
-            <a:prstDash val="solid"/>
-          </a:ln>
-        </p:spPr>
-      </p:sp>
-      <p:sp>
-        <p:nvSpPr>
-          <p:cNvPr id="9" name="Shape 6"/>
-          <p:cNvSpPr/>
-          <p:nvPr/>
-        </p:nvSpPr>
-        <p:spPr>
-          <a:xfrm flipH="1" flipV="1">
-            <a:off x="4573967" y="3409999"/>
-            <a:ext cx="1521881" cy="494489"/>
-          </a:xfrm>
-          <a:prstGeom prst="line">
-            <a:avLst/>
-          </a:prstGeom>
-          <a:noFill/>
-          <a:ln w="19050">
-            <a:solidFill>
-              <a:srgbClr val="E3E8EF"/>
-            </a:solidFill>
-            <a:prstDash val="solid"/>
-          </a:ln>
-        </p:spPr>
-      </p:sp>
-      <p:sp>
-        <p:nvSpPr>
-          <p:cNvPr id="10" name="Shape 7"/>
-          <p:cNvSpPr/>
-          <p:nvPr/>
-        </p:nvSpPr>
-        <p:spPr>
-          <a:xfrm>
-            <a:off x="5707228" y="1915668"/>
-            <a:ext cx="777240" cy="777240"/>
+            <a:off x="1213683" y="3680460"/>
+            <a:ext cx="713232" cy="713232"/>
           </a:xfrm>
           <a:prstGeom prst="ellipse">
             <a:avLst/>
@@ -20897,7 +20843,7 @@
       </p:sp>
       <p:pic>
         <p:nvPicPr>
-          <p:cNvPr id="11" name="Image 0" descr="/tmp/claude-0/-home-user-riesgo/0ff9ff46-1396-5bd8-b3ac-2280dfbbbc55/scratchpad/work/gen/icons/person_white.png">    </p:cNvPr>
+          <p:cNvPr id="8" name="Image 0" descr="/tmp/claude-0/-home-user-riesgo/0ff9ff46-1396-5bd8-b3ac-2280dfbbbc55/scratchpad/work/gen/icons/person_white.png">    </p:cNvPr>
           <p:cNvPicPr>
             <a:picLocks noChangeAspect="1"/>
           </p:cNvPicPr>
@@ -20911,8 +20857,8 @@
         </p:blipFill>
         <p:spPr>
           <a:xfrm>
-            <a:off x="5901538" y="2109978"/>
-            <a:ext cx="388620" cy="388620"/>
+            <a:off x="1391991" y="3858768"/>
+            <a:ext cx="356616" cy="356616"/>
           </a:xfrm>
           <a:prstGeom prst="rect">
             <a:avLst/>
@@ -20921,14 +20867,14 @@
       </p:pic>
       <p:sp>
         <p:nvSpPr>
-          <p:cNvPr id="12" name="Text 8"/>
-          <p:cNvSpPr txBox="1"/>
-          <p:nvPr/>
-        </p:nvSpPr>
-        <p:spPr>
-          <a:xfrm>
-            <a:off x="5227168" y="2775204"/>
-            <a:ext cx="1737360" cy="457200"/>
+          <p:cNvPr id="9" name="Text 5"/>
+          <p:cNvSpPr txBox="1"/>
+          <p:nvPr/>
+        </p:nvSpPr>
+        <p:spPr>
+          <a:xfrm>
+            <a:off x="612648" y="4539996"/>
+            <a:ext cx="1915302" cy="548640"/>
           </a:xfrm>
           <a:prstGeom prst="rect">
             <a:avLst/>
@@ -20942,7 +20888,7 @@
           <a:p>
             <a:pPr algn="ctr" indent="0" marL="0">
               <a:lnSpc>
-                <a:spcPct val="95000"/>
+                <a:spcPct val="98000"/>
               </a:lnSpc>
               <a:buNone/>
             </a:pPr>
@@ -20963,14 +20909,14 @@
       </p:sp>
       <p:sp>
         <p:nvSpPr>
-          <p:cNvPr id="13" name="Shape 9"/>
+          <p:cNvPr id="10" name="Shape 6"/>
           <p:cNvSpPr/>
           <p:nvPr/>
         </p:nvSpPr>
         <p:spPr>
           <a:xfrm>
-            <a:off x="7229108" y="3021379"/>
-            <a:ext cx="777240" cy="777240"/>
+            <a:off x="3476457" y="3680460"/>
+            <a:ext cx="713232" cy="713232"/>
           </a:xfrm>
           <a:prstGeom prst="ellipse">
             <a:avLst/>
@@ -20983,7 +20929,7 @@
       </p:sp>
       <p:pic>
         <p:nvPicPr>
-          <p:cNvPr id="14" name="Image 1" descr="/tmp/claude-0/-home-user-riesgo/0ff9ff46-1396-5bd8-b3ac-2280dfbbbc55/scratchpad/work/gen/icons/briefcase_white.png">    </p:cNvPr>
+          <p:cNvPr id="11" name="Image 1" descr="/tmp/claude-0/-home-user-riesgo/0ff9ff46-1396-5bd8-b3ac-2280dfbbbc55/scratchpad/work/gen/icons/briefcase_white.png">    </p:cNvPr>
           <p:cNvPicPr>
             <a:picLocks noChangeAspect="1"/>
           </p:cNvPicPr>
@@ -20997,8 +20943,8 @@
         </p:blipFill>
         <p:spPr>
           <a:xfrm>
-            <a:off x="7423418" y="3215689"/>
-            <a:ext cx="388620" cy="388620"/>
+            <a:off x="3654765" y="3858768"/>
+            <a:ext cx="356616" cy="356616"/>
           </a:xfrm>
           <a:prstGeom prst="rect">
             <a:avLst/>
@@ -21007,14 +20953,14 @@
       </p:pic>
       <p:sp>
         <p:nvSpPr>
-          <p:cNvPr id="15" name="Text 10"/>
-          <p:cNvSpPr txBox="1"/>
-          <p:nvPr/>
-        </p:nvSpPr>
-        <p:spPr>
-          <a:xfrm>
-            <a:off x="6749048" y="3880915"/>
-            <a:ext cx="1737360" cy="457200"/>
+          <p:cNvPr id="12" name="Text 7"/>
+          <p:cNvSpPr txBox="1"/>
+          <p:nvPr/>
+        </p:nvSpPr>
+        <p:spPr>
+          <a:xfrm>
+            <a:off x="2875422" y="4539996"/>
+            <a:ext cx="1915302" cy="548640"/>
           </a:xfrm>
           <a:prstGeom prst="rect">
             <a:avLst/>
@@ -21028,7 +20974,7 @@
           <a:p>
             <a:pPr algn="ctr" indent="0" marL="0">
               <a:lnSpc>
-                <a:spcPct val="95000"/>
+                <a:spcPct val="98000"/>
               </a:lnSpc>
               <a:buNone/>
             </a:pPr>
@@ -21049,14 +20995,14 @@
       </p:sp>
       <p:sp>
         <p:nvSpPr>
-          <p:cNvPr id="16" name="Shape 11"/>
+          <p:cNvPr id="13" name="Shape 8"/>
           <p:cNvSpPr/>
           <p:nvPr/>
         </p:nvSpPr>
         <p:spPr>
           <a:xfrm>
-            <a:off x="6647802" y="4810457"/>
-            <a:ext cx="777240" cy="777240"/>
+            <a:off x="5739232" y="3680460"/>
+            <a:ext cx="713232" cy="713232"/>
           </a:xfrm>
           <a:prstGeom prst="ellipse">
             <a:avLst/>
@@ -21069,7 +21015,7 @@
       </p:sp>
       <p:pic>
         <p:nvPicPr>
-          <p:cNvPr id="17" name="Image 2" descr="/tmp/claude-0/-home-user-riesgo/0ff9ff46-1396-5bd8-b3ac-2280dfbbbc55/scratchpad/work/gen/icons/crown_white.png">    </p:cNvPr>
+          <p:cNvPr id="14" name="Image 2" descr="/tmp/claude-0/-home-user-riesgo/0ff9ff46-1396-5bd8-b3ac-2280dfbbbc55/scratchpad/work/gen/icons/crown_white.png">    </p:cNvPr>
           <p:cNvPicPr>
             <a:picLocks noChangeAspect="1"/>
           </p:cNvPicPr>
@@ -21083,8 +21029,8 @@
         </p:blipFill>
         <p:spPr>
           <a:xfrm>
-            <a:off x="6842112" y="5004767"/>
-            <a:ext cx="388620" cy="388620"/>
+            <a:off x="5917540" y="3858768"/>
+            <a:ext cx="356616" cy="356616"/>
           </a:xfrm>
           <a:prstGeom prst="rect">
             <a:avLst/>
@@ -21093,14 +21039,14 @@
       </p:pic>
       <p:sp>
         <p:nvSpPr>
-          <p:cNvPr id="18" name="Text 12"/>
-          <p:cNvSpPr txBox="1"/>
-          <p:nvPr/>
-        </p:nvSpPr>
-        <p:spPr>
-          <a:xfrm>
-            <a:off x="6167742" y="5669993"/>
-            <a:ext cx="1737360" cy="457200"/>
+          <p:cNvPr id="15" name="Text 9"/>
+          <p:cNvSpPr txBox="1"/>
+          <p:nvPr/>
+        </p:nvSpPr>
+        <p:spPr>
+          <a:xfrm>
+            <a:off x="5138196" y="4539996"/>
+            <a:ext cx="1915302" cy="548640"/>
           </a:xfrm>
           <a:prstGeom prst="rect">
             <a:avLst/>
@@ -21114,7 +21060,7 @@
           <a:p>
             <a:pPr algn="ctr" indent="0" marL="0">
               <a:lnSpc>
-                <a:spcPct val="95000"/>
+                <a:spcPct val="98000"/>
               </a:lnSpc>
               <a:buNone/>
             </a:pPr>
@@ -21135,14 +21081,14 @@
       </p:sp>
       <p:sp>
         <p:nvSpPr>
-          <p:cNvPr id="19" name="Shape 13"/>
+          <p:cNvPr id="16" name="Shape 10"/>
           <p:cNvSpPr/>
           <p:nvPr/>
         </p:nvSpPr>
         <p:spPr>
           <a:xfrm>
-            <a:off x="4766654" y="4810457"/>
-            <a:ext cx="777240" cy="777240"/>
+            <a:off x="8002006" y="3680460"/>
+            <a:ext cx="713232" cy="713232"/>
           </a:xfrm>
           <a:prstGeom prst="ellipse">
             <a:avLst/>
@@ -21155,7 +21101,7 @@
       </p:sp>
       <p:pic>
         <p:nvPicPr>
-          <p:cNvPr id="20" name="Image 3" descr="/tmp/claude-0/-home-user-riesgo/0ff9ff46-1396-5bd8-b3ac-2280dfbbbc55/scratchpad/work/gen/icons/shield_check_white.png">    </p:cNvPr>
+          <p:cNvPr id="17" name="Image 3" descr="/tmp/claude-0/-home-user-riesgo/0ff9ff46-1396-5bd8-b3ac-2280dfbbbc55/scratchpad/work/gen/icons/shield_check_white.png">    </p:cNvPr>
           <p:cNvPicPr>
             <a:picLocks noChangeAspect="1"/>
           </p:cNvPicPr>
@@ -21169,8 +21115,8 @@
         </p:blipFill>
         <p:spPr>
           <a:xfrm>
-            <a:off x="4960964" y="5004767"/>
-            <a:ext cx="388620" cy="388620"/>
+            <a:off x="8180314" y="3858768"/>
+            <a:ext cx="356616" cy="356616"/>
           </a:xfrm>
           <a:prstGeom prst="rect">
             <a:avLst/>
@@ -21179,14 +21125,14 @@
       </p:pic>
       <p:sp>
         <p:nvSpPr>
-          <p:cNvPr id="21" name="Text 14"/>
-          <p:cNvSpPr txBox="1"/>
-          <p:nvPr/>
-        </p:nvSpPr>
-        <p:spPr>
-          <a:xfrm>
-            <a:off x="4286594" y="5669993"/>
-            <a:ext cx="1737360" cy="457200"/>
+          <p:cNvPr id="18" name="Text 11"/>
+          <p:cNvSpPr txBox="1"/>
+          <p:nvPr/>
+        </p:nvSpPr>
+        <p:spPr>
+          <a:xfrm>
+            <a:off x="7400971" y="4539996"/>
+            <a:ext cx="1915302" cy="548640"/>
           </a:xfrm>
           <a:prstGeom prst="rect">
             <a:avLst/>
@@ -21200,7 +21146,7 @@
           <a:p>
             <a:pPr algn="ctr" indent="0" marL="0">
               <a:lnSpc>
-                <a:spcPct val="95000"/>
+                <a:spcPct val="98000"/>
               </a:lnSpc>
               <a:buNone/>
             </a:pPr>
@@ -21221,14 +21167,14 @@
       </p:sp>
       <p:sp>
         <p:nvSpPr>
-          <p:cNvPr id="22" name="Shape 15"/>
+          <p:cNvPr id="19" name="Shape 12"/>
           <p:cNvSpPr/>
           <p:nvPr/>
         </p:nvSpPr>
         <p:spPr>
           <a:xfrm>
-            <a:off x="4185347" y="3021379"/>
-            <a:ext cx="777240" cy="777240"/>
+            <a:off x="10264780" y="3680460"/>
+            <a:ext cx="713232" cy="713232"/>
           </a:xfrm>
           <a:prstGeom prst="ellipse">
             <a:avLst/>
@@ -21241,7 +21187,7 @@
       </p:sp>
       <p:pic>
         <p:nvPicPr>
-          <p:cNvPr id="23" name="Image 4" descr="/tmp/claude-0/-home-user-riesgo/0ff9ff46-1396-5bd8-b3ac-2280dfbbbc55/scratchpad/work/gen/icons/clipboard_check_white.png">    </p:cNvPr>
+          <p:cNvPr id="20" name="Image 4" descr="/tmp/claude-0/-home-user-riesgo/0ff9ff46-1396-5bd8-b3ac-2280dfbbbc55/scratchpad/work/gen/icons/clipboard_check_white.png">    </p:cNvPr>
           <p:cNvPicPr>
             <a:picLocks noChangeAspect="1"/>
           </p:cNvPicPr>
@@ -21255,8 +21201,8 @@
         </p:blipFill>
         <p:spPr>
           <a:xfrm>
-            <a:off x="4379657" y="3215689"/>
-            <a:ext cx="388620" cy="388620"/>
+            <a:off x="10443088" y="3858768"/>
+            <a:ext cx="356616" cy="356616"/>
           </a:xfrm>
           <a:prstGeom prst="rect">
             <a:avLst/>
@@ -21265,14 +21211,14 @@
       </p:pic>
       <p:sp>
         <p:nvSpPr>
-          <p:cNvPr id="24" name="Text 16"/>
-          <p:cNvSpPr txBox="1"/>
-          <p:nvPr/>
-        </p:nvSpPr>
-        <p:spPr>
-          <a:xfrm>
-            <a:off x="3705287" y="3880915"/>
-            <a:ext cx="1737360" cy="457200"/>
+          <p:cNvPr id="21" name="Text 13"/>
+          <p:cNvSpPr txBox="1"/>
+          <p:nvPr/>
+        </p:nvSpPr>
+        <p:spPr>
+          <a:xfrm>
+            <a:off x="9663745" y="4539996"/>
+            <a:ext cx="1915302" cy="548640"/>
           </a:xfrm>
           <a:prstGeom prst="rect">
             <a:avLst/>
@@ -21286,7 +21232,7 @@
           <a:p>
             <a:pPr algn="ctr" indent="0" marL="0">
               <a:lnSpc>
-                <a:spcPct val="95000"/>
+                <a:spcPct val="98000"/>
               </a:lnSpc>
               <a:buNone/>
             </a:pPr>
@@ -21307,73 +21253,7 @@
       </p:sp>
       <p:sp>
         <p:nvSpPr>
-          <p:cNvPr id="25" name="Shape 17"/>
-          <p:cNvSpPr/>
-          <p:nvPr/>
-        </p:nvSpPr>
-        <p:spPr>
-          <a:xfrm>
-            <a:off x="5432908" y="3241548"/>
-            <a:ext cx="1325880" cy="1325880"/>
-          </a:xfrm>
-          <a:prstGeom prst="ellipse">
-            <a:avLst/>
-          </a:prstGeom>
-          <a:solidFill>
-            <a:srgbClr val="1FB6C9"/>
-          </a:solidFill>
-          <a:ln/>
-          <a:effectLst>
-            <a:outerShdw sx="100000" sy="100000" kx="0" ky="0" algn="bl" rotWithShape="0" blurRad="127000" dist="38100" dir="5400000">
-              <a:srgbClr val="17223A">
-                <a:alpha val="18000"/>
-              </a:srgbClr>
-            </a:outerShdw>
-          </a:effectLst>
-        </p:spPr>
-      </p:sp>
-      <p:sp>
-        <p:nvSpPr>
-          <p:cNvPr id="26" name="Text 18"/>
-          <p:cNvSpPr txBox="1"/>
-          <p:nvPr/>
-        </p:nvSpPr>
-        <p:spPr>
-          <a:xfrm>
-            <a:off x="5432908" y="3648456"/>
-            <a:ext cx="1325880" cy="512064"/>
-          </a:xfrm>
-          <a:prstGeom prst="rect">
-            <a:avLst/>
-          </a:prstGeom>
-          <a:noFill/>
-          <a:ln/>
-        </p:spPr>
-        <p:txBody>
-          <a:bodyPr wrap="square" lIns="0" tIns="0" rIns="0" bIns="0" rtlCol="0" anchor="ctr"/>
-          <a:lstStyle/>
-          <a:p>
-            <a:pPr algn="ctr" indent="0" marL="0">
-              <a:buNone/>
-            </a:pPr>
-            <a:r>
-              <a:rPr lang="en-US" sz="1900" b="1" dirty="0">
-                <a:solidFill>
-                  <a:srgbClr val="0A1F3B"/>
-                </a:solidFill>
-                <a:latin typeface="Cambria" pitchFamily="34" charset="0"/>
-                <a:ea typeface="Cambria" pitchFamily="34" charset="-122"/>
-                <a:cs typeface="Cambria" pitchFamily="34" charset="-120"/>
-              </a:rPr>
-              <a:t>TODOS</a:t>
-            </a:r>
-            <a:endParaRPr lang="en-US" sz="1900" dirty="0"/>
-          </a:p>
-        </p:txBody>
-      </p:sp>
-      <p:sp>
-        <p:nvSpPr>
-          <p:cNvPr id="27" name="Text 19"/>
+          <p:cNvPr id="22" name="Text 14"/>
           <p:cNvSpPr txBox="1"/>
           <p:nvPr/>
         </p:nvSpPr>
@@ -21412,7 +21292,7 @@
       </p:sp>
       <p:sp>
         <p:nvSpPr>
-          <p:cNvPr id="28" name="Text 20"/>
+          <p:cNvPr id="23" name="Text 15"/>
           <p:cNvSpPr txBox="1"/>
           <p:nvPr/>
         </p:nvSpPr>
@@ -21451,7 +21331,7 @@
       </p:sp>
       <p:sp>
         <p:nvSpPr>
-          <p:cNvPr id="29" name="Text 21"/>
+          <p:cNvPr id="24" name="Text 16"/>
           <p:cNvSpPr txBox="1"/>
           <p:nvPr/>
         </p:nvSpPr>
@@ -24042,7 +23922,7 @@
             <a:r>
               <a:rPr lang="en-US" sz="1200" b="1" spc="200" kern="0" dirty="0">
                 <a:solidFill>
-                  <a:srgbClr val="17A9B0"/>
+                  <a:srgbClr val="97D8DB"/>
                 </a:solidFill>
                 <a:latin typeface="Calibri" pitchFamily="34" charset="0"/>
                 <a:ea typeface="Calibri" pitchFamily="34" charset="-122"/>
@@ -25605,7 +25485,7 @@
             <a:r>
               <a:rPr lang="en-US" sz="1200" b="1" spc="200" kern="0" dirty="0">
                 <a:solidFill>
-                  <a:srgbClr val="3A6EA5"/>
+                  <a:srgbClr val="A6BED7"/>
                 </a:solidFill>
                 <a:latin typeface="Calibri" pitchFamily="34" charset="0"/>
                 <a:ea typeface="Calibri" pitchFamily="34" charset="-122"/>
@@ -27107,7 +26987,7 @@
             <a:r>
               <a:rPr lang="en-US" sz="1200" b="1" spc="200" kern="0" dirty="0">
                 <a:solidFill>
-                  <a:srgbClr val="1B4F91"/>
+                  <a:srgbClr val="98B0CE"/>
                 </a:solidFill>
                 <a:latin typeface="Calibri" pitchFamily="34" charset="0"/>
                 <a:ea typeface="Calibri" pitchFamily="34" charset="-122"/>
@@ -30132,7 +30012,7 @@
             <a:r>
               <a:rPr lang="en-US" sz="1200" b="1" spc="200" kern="0" dirty="0">
                 <a:solidFill>
-                  <a:srgbClr val="2E5EAA"/>
+                  <a:srgbClr val="A1B7D9"/>
                 </a:solidFill>
                 <a:latin typeface="Calibri" pitchFamily="34" charset="0"/>
                 <a:ea typeface="Calibri" pitchFamily="34" charset="-122"/>

--- a/capacitacion-riesgos-2025/CAPACITACION_RIESGOS_2025.pptx
+++ b/capacitacion-riesgos-2025/CAPACITACION_RIESGOS_2025.pptx
@@ -7652,6 +7652,129 @@
             </a:avLst>
           </a:prstGeom>
           <a:solidFill>
+            <a:srgbClr val="F2F5F9"/>
+          </a:solidFill>
+          <a:ln/>
+        </p:spPr>
+      </p:sp>
+      <p:sp>
+        <p:nvSpPr>
+          <p:cNvPr id="20" name="Shape 16"/>
+          <p:cNvSpPr/>
+          <p:nvPr/>
+        </p:nvSpPr>
+        <p:spPr>
+          <a:xfrm>
+            <a:off x="768096" y="4253484"/>
+            <a:ext cx="402336" cy="402336"/>
+          </a:xfrm>
+          <a:prstGeom prst="ellipse">
+            <a:avLst/>
+          </a:prstGeom>
+          <a:solidFill>
+            <a:srgbClr val="133B6C"/>
+          </a:solidFill>
+          <a:ln/>
+        </p:spPr>
+      </p:sp>
+      <p:sp>
+        <p:nvSpPr>
+          <p:cNvPr id="21" name="Text 17"/>
+          <p:cNvSpPr txBox="1"/>
+          <p:nvPr/>
+        </p:nvSpPr>
+        <p:spPr>
+          <a:xfrm>
+            <a:off x="768096" y="4244340"/>
+            <a:ext cx="402336" cy="402336"/>
+          </a:xfrm>
+          <a:prstGeom prst="rect">
+            <a:avLst/>
+          </a:prstGeom>
+          <a:noFill/>
+          <a:ln/>
+        </p:spPr>
+        <p:txBody>
+          <a:bodyPr wrap="square" lIns="0" tIns="0" rIns="0" bIns="0" rtlCol="0" anchor="ctr"/>
+          <a:lstStyle/>
+          <a:p>
+            <a:pPr algn="ctr" indent="0" marL="0">
+              <a:buNone/>
+            </a:pPr>
+            <a:r>
+              <a:rPr lang="en-US" sz="1496" b="1" dirty="0">
+                <a:solidFill>
+                  <a:srgbClr val="FFFFFF"/>
+                </a:solidFill>
+                <a:latin typeface="Cambria" pitchFamily="34" charset="0"/>
+                <a:ea typeface="Cambria" pitchFamily="34" charset="-122"/>
+                <a:cs typeface="Cambria" pitchFamily="34" charset="-120"/>
+              </a:rPr>
+              <a:t>C</a:t>
+            </a:r>
+            <a:endParaRPr lang="en-US" sz="1496" dirty="0"/>
+          </a:p>
+        </p:txBody>
+      </p:sp>
+      <p:sp>
+        <p:nvSpPr>
+          <p:cNvPr id="22" name="Text 18"/>
+          <p:cNvSpPr txBox="1"/>
+          <p:nvPr/>
+        </p:nvSpPr>
+        <p:spPr>
+          <a:xfrm>
+            <a:off x="1344168" y="4200144"/>
+            <a:ext cx="10051999" cy="509016"/>
+          </a:xfrm>
+          <a:prstGeom prst="rect">
+            <a:avLst/>
+          </a:prstGeom>
+          <a:noFill/>
+          <a:ln/>
+        </p:spPr>
+        <p:txBody>
+          <a:bodyPr wrap="square" lIns="0" tIns="0" rIns="0" bIns="0" rtlCol="0" anchor="ctr"/>
+          <a:lstStyle/>
+          <a:p>
+            <a:pPr indent="0" marL="0">
+              <a:lnSpc>
+                <a:spcPct val="102000"/>
+              </a:lnSpc>
+              <a:buNone/>
+            </a:pPr>
+            <a:r>
+              <a:rPr lang="en-US" sz="1200" dirty="0">
+                <a:solidFill>
+                  <a:srgbClr val="243044"/>
+                </a:solidFill>
+                <a:latin typeface="Calibri" pitchFamily="34" charset="0"/>
+                <a:ea typeface="Calibri" pitchFamily="34" charset="-122"/>
+                <a:cs typeface="Calibri" pitchFamily="34" charset="-120"/>
+              </a:rPr>
+              <a:t>Escuchar al asociado, dar un buen servicio y canalizar el caso a quien corresponde dentro de la Cooperativa.</a:t>
+            </a:r>
+            <a:endParaRPr lang="en-US" sz="1200" dirty="0"/>
+          </a:p>
+        </p:txBody>
+      </p:sp>
+      <p:sp>
+        <p:nvSpPr>
+          <p:cNvPr id="23" name="REVEAL_sq_opt"/>
+          <p:cNvSpPr/>
+          <p:nvPr/>
+        </p:nvSpPr>
+        <p:spPr>
+          <a:xfrm>
+            <a:off x="566928" y="4200144"/>
+            <a:ext cx="11057839" cy="509016"/>
+          </a:xfrm>
+          <a:prstGeom prst="roundRect">
+            <a:avLst>
+              <a:gd name="adj" fmla="val 16168"/>
+            </a:avLst>
+          </a:prstGeom>
+          <a:solidFill>
             <a:srgbClr val="E2F4E9"/>
           </a:solidFill>
           <a:ln/>
@@ -7659,7 +7782,7 @@
       </p:sp>
       <p:sp>
         <p:nvSpPr>
-          <p:cNvPr id="20" name="Shape 16"/>
+          <p:cNvPr id="24" name="REVEAL_sq_optbadge"/>
           <p:cNvSpPr/>
           <p:nvPr/>
         </p:nvSpPr>
@@ -7679,7 +7802,7 @@
       </p:sp>
       <p:pic>
         <p:nvPicPr>
-          <p:cNvPr id="21" name="Image 1" descr="/tmp/claude-0/-home-user-riesgo/0ff9ff46-1396-5bd8-b3ac-2280dfbbbc55/scratchpad/work/gen/icons/check_circle_white.png">    </p:cNvPr>
+          <p:cNvPr id="25" name="REVEAL_sq_optbadge_ic" descr="/tmp/claude-0/-home-user-riesgo/0ff9ff46-1396-5bd8-b3ac-2280dfbbbc55/scratchpad/work/gen/icons/check_circle_white.png">    </p:cNvPr>
           <p:cNvPicPr>
             <a:picLocks noChangeAspect="1"/>
           </p:cNvPicPr>
@@ -7703,7 +7826,7 @@
       </p:pic>
       <p:sp>
         <p:nvSpPr>
-          <p:cNvPr id="22" name="Text 17"/>
+          <p:cNvPr id="26" name="REVEAL_sq_opttext"/>
           <p:cNvSpPr txBox="1"/>
           <p:nvPr/>
         </p:nvSpPr>
@@ -7745,7 +7868,7 @@
       </p:sp>
       <p:sp>
         <p:nvSpPr>
-          <p:cNvPr id="23" name="Text 18"/>
+          <p:cNvPr id="27" name="REVEAL_sq_whylabel"/>
           <p:cNvSpPr txBox="1"/>
           <p:nvPr/>
         </p:nvSpPr>
@@ -7784,7 +7907,7 @@
       </p:sp>
       <p:sp>
         <p:nvSpPr>
-          <p:cNvPr id="24" name="Shape 19"/>
+          <p:cNvPr id="28" name="REVEAL_sq_whycard"/>
           <p:cNvSpPr/>
           <p:nvPr/>
         </p:nvSpPr>
@@ -7806,7 +7929,7 @@
       </p:sp>
       <p:sp>
         <p:nvSpPr>
-          <p:cNvPr id="25" name="Text 20"/>
+          <p:cNvPr id="29" name="REVEAL_sq_whytext"/>
           <p:cNvSpPr txBox="1"/>
           <p:nvPr/>
         </p:nvSpPr>
@@ -7848,7 +7971,7 @@
       </p:sp>
       <p:sp>
         <p:nvSpPr>
-          <p:cNvPr id="26" name="Text 21"/>
+          <p:cNvPr id="30" name="Text 25"/>
           <p:cNvSpPr txBox="1"/>
           <p:nvPr/>
         </p:nvSpPr>
@@ -7887,7 +8010,7 @@
       </p:sp>
       <p:sp>
         <p:nvSpPr>
-          <p:cNvPr id="27" name="Text 22"/>
+          <p:cNvPr id="31" name="Text 26"/>
           <p:cNvSpPr txBox="1"/>
           <p:nvPr/>
         </p:nvSpPr>
@@ -7929,6 +8052,175 @@
   <p:clrMapOvr>
     <a:masterClrMapping/>
   </p:clrMapOvr>
+  <p:timing>
+    <p:tnLst>
+      <p:par>
+        <p:cTn id="1" dur="indefinite" restart="never" nodeType="tmRoot">
+          <p:childTnLst>
+            <p:seq concurrent="1" nextAc="seek">
+              <p:cTn id="2" dur="indefinite" nodeType="mainSeq">
+                <p:childTnLst>
+                  <p:par>
+                    <p:cTn id="3" fill="hold">
+                      <p:stCondLst>
+                        <p:cond delay="indefinite"/>
+                      </p:stCondLst>
+                      <p:childTnLst>
+                        <p:par>
+                          <p:cTn id="4" presetID="2" presetClass="entr" presetSubtype="0" fill="hold" nodeType="clickEffect">
+                            <p:stCondLst>
+                              <p:cond delay="0"/>
+                            </p:stCondLst>
+                            <p:childTnLst>
+                              <p:set>
+                                <p:cBhvr>
+                                  <p:cTn id="5" dur="1" fill="hold">
+                                    <p:stCondLst>
+                                      <p:cond delay="0"/>
+                                    </p:stCondLst>
+                                  </p:cTn>
+                                  <p:tgtEl>
+                                    <p:spTgt spid="23"/>
+                                  </p:tgtEl>
+                                  <p:attrNameLst>
+                                    <p:attrName>style.visibility</p:attrName>
+                                  </p:attrNameLst>
+                                </p:cBhvr>
+                                <p:to>
+                                  <p:strVal val="visible"/>
+                                </p:to>
+                              </p:set>
+                              <p:set>
+                                <p:cBhvr>
+                                  <p:cTn id="6" dur="1" fill="hold">
+                                    <p:stCondLst>
+                                      <p:cond delay="0"/>
+                                    </p:stCondLst>
+                                  </p:cTn>
+                                  <p:tgtEl>
+                                    <p:spTgt spid="24"/>
+                                  </p:tgtEl>
+                                  <p:attrNameLst>
+                                    <p:attrName>style.visibility</p:attrName>
+                                  </p:attrNameLst>
+                                </p:cBhvr>
+                                <p:to>
+                                  <p:strVal val="visible"/>
+                                </p:to>
+                              </p:set>
+                              <p:set>
+                                <p:cBhvr>
+                                  <p:cTn id="7" dur="1" fill="hold">
+                                    <p:stCondLst>
+                                      <p:cond delay="0"/>
+                                    </p:stCondLst>
+                                  </p:cTn>
+                                  <p:tgtEl>
+                                    <p:spTgt spid="25"/>
+                                  </p:tgtEl>
+                                  <p:attrNameLst>
+                                    <p:attrName>style.visibility</p:attrName>
+                                  </p:attrNameLst>
+                                </p:cBhvr>
+                                <p:to>
+                                  <p:strVal val="visible"/>
+                                </p:to>
+                              </p:set>
+                              <p:set>
+                                <p:cBhvr>
+                                  <p:cTn id="8" dur="1" fill="hold">
+                                    <p:stCondLst>
+                                      <p:cond delay="0"/>
+                                    </p:stCondLst>
+                                  </p:cTn>
+                                  <p:tgtEl>
+                                    <p:spTgt spid="26"/>
+                                  </p:tgtEl>
+                                  <p:attrNameLst>
+                                    <p:attrName>style.visibility</p:attrName>
+                                  </p:attrNameLst>
+                                </p:cBhvr>
+                                <p:to>
+                                  <p:strVal val="visible"/>
+                                </p:to>
+                              </p:set>
+                              <p:set>
+                                <p:cBhvr>
+                                  <p:cTn id="9" dur="1" fill="hold">
+                                    <p:stCondLst>
+                                      <p:cond delay="0"/>
+                                    </p:stCondLst>
+                                  </p:cTn>
+                                  <p:tgtEl>
+                                    <p:spTgt spid="27"/>
+                                  </p:tgtEl>
+                                  <p:attrNameLst>
+                                    <p:attrName>style.visibility</p:attrName>
+                                  </p:attrNameLst>
+                                </p:cBhvr>
+                                <p:to>
+                                  <p:strVal val="visible"/>
+                                </p:to>
+                              </p:set>
+                              <p:set>
+                                <p:cBhvr>
+                                  <p:cTn id="10" dur="1" fill="hold">
+                                    <p:stCondLst>
+                                      <p:cond delay="0"/>
+                                    </p:stCondLst>
+                                  </p:cTn>
+                                  <p:tgtEl>
+                                    <p:spTgt spid="28"/>
+                                  </p:tgtEl>
+                                  <p:attrNameLst>
+                                    <p:attrName>style.visibility</p:attrName>
+                                  </p:attrNameLst>
+                                </p:cBhvr>
+                                <p:to>
+                                  <p:strVal val="visible"/>
+                                </p:to>
+                              </p:set>
+                              <p:set>
+                                <p:cBhvr>
+                                  <p:cTn id="11" dur="1" fill="hold">
+                                    <p:stCondLst>
+                                      <p:cond delay="0"/>
+                                    </p:stCondLst>
+                                  </p:cTn>
+                                  <p:tgtEl>
+                                    <p:spTgt spid="29"/>
+                                  </p:tgtEl>
+                                  <p:attrNameLst>
+                                    <p:attrName>style.visibility</p:attrName>
+                                  </p:attrNameLst>
+                                </p:cBhvr>
+                                <p:to>
+                                  <p:strVal val="visible"/>
+                                </p:to>
+                              </p:set>
+                            </p:childTnLst>
+                          </p:cTn>
+                        </p:par>
+                      </p:childTnLst>
+                    </p:cTn>
+                  </p:par>
+                </p:childTnLst>
+              </p:cTn>
+            </p:seq>
+          </p:childTnLst>
+        </p:cTn>
+      </p:par>
+    </p:tnLst>
+    <p:bldLst>
+      <p:bldP spid="23" grpId="0"/>
+      <p:bldP spid="24" grpId="0"/>
+      <p:bldP spid="25" grpId="0"/>
+      <p:bldP spid="26" grpId="0"/>
+      <p:bldP spid="27" grpId="0"/>
+      <p:bldP spid="28" grpId="0"/>
+      <p:bldP spid="29" grpId="0"/>
+    </p:bldLst>
+  </p:timing>
 </p:sld>
 </file>
 
@@ -9431,7 +9723,7 @@
             </a:avLst>
           </a:prstGeom>
           <a:solidFill>
-            <a:srgbClr val="F0AD35"/>
+            <a:srgbClr val="FFFFFF"/>
           </a:solidFill>
           <a:ln/>
         </p:spPr>
@@ -9463,7 +9755,7 @@
             <a:r>
               <a:rPr lang="en-US" sz="1050" b="1" dirty="0">
                 <a:solidFill>
-                  <a:srgbClr val="FFFFFF"/>
+                  <a:srgbClr val="8FA0B5"/>
                 </a:solidFill>
                 <a:latin typeface="Calibri" pitchFamily="34" charset="0"/>
                 <a:ea typeface="Calibri" pitchFamily="34" charset="-122"/>
@@ -9538,7 +9830,68 @@
       </p:sp>
       <p:sp>
         <p:nvSpPr>
-          <p:cNvPr id="14" name="Shape 11"/>
+          <p:cNvPr id="14" name="REVEAL_gq_0"/>
+          <p:cNvSpPr/>
+          <p:nvPr/>
+        </p:nvSpPr>
+        <p:spPr>
+          <a:xfrm>
+            <a:off x="8744407" y="2526030"/>
+            <a:ext cx="1325880" cy="365760"/>
+          </a:xfrm>
+          <a:prstGeom prst="roundRect">
+            <a:avLst>
+              <a:gd name="adj" fmla="val 50000"/>
+            </a:avLst>
+          </a:prstGeom>
+          <a:solidFill>
+            <a:srgbClr val="F0AD35"/>
+          </a:solidFill>
+          <a:ln/>
+        </p:spPr>
+      </p:sp>
+      <p:sp>
+        <p:nvSpPr>
+          <p:cNvPr id="15" name="REVEAL_gq_0_tx"/>
+          <p:cNvSpPr txBox="1"/>
+          <p:nvPr/>
+        </p:nvSpPr>
+        <p:spPr>
+          <a:xfrm>
+            <a:off x="8744407" y="2526030"/>
+            <a:ext cx="1325880" cy="365760"/>
+          </a:xfrm>
+          <a:prstGeom prst="rect">
+            <a:avLst/>
+          </a:prstGeom>
+          <a:noFill/>
+          <a:ln/>
+        </p:spPr>
+        <p:txBody>
+          <a:bodyPr wrap="square" lIns="0" tIns="0" rIns="0" bIns="0" rtlCol="0" anchor="ctr"/>
+          <a:lstStyle/>
+          <a:p>
+            <a:pPr algn="ctr" indent="0" marL="0">
+              <a:buNone/>
+            </a:pPr>
+            <a:r>
+              <a:rPr lang="en-US" sz="1050" b="1" dirty="0">
+                <a:solidFill>
+                  <a:srgbClr val="FFFFFF"/>
+                </a:solidFill>
+                <a:latin typeface="Calibri" pitchFamily="34" charset="0"/>
+                <a:ea typeface="Calibri" pitchFamily="34" charset="-122"/>
+                <a:cs typeface="Calibri" pitchFamily="34" charset="-120"/>
+              </a:rPr>
+              <a:t>ERROR</a:t>
+            </a:r>
+            <a:endParaRPr lang="en-US" sz="1050" dirty="0"/>
+          </a:p>
+        </p:txBody>
+      </p:sp>
+      <p:sp>
+        <p:nvSpPr>
+          <p:cNvPr id="16" name="Shape 13"/>
           <p:cNvSpPr/>
           <p:nvPr/>
         </p:nvSpPr>
@@ -9560,7 +9913,7 @@
       </p:sp>
       <p:sp>
         <p:nvSpPr>
-          <p:cNvPr id="15" name="Shape 12"/>
+          <p:cNvPr id="17" name="Shape 14"/>
           <p:cNvSpPr/>
           <p:nvPr/>
         </p:nvSpPr>
@@ -9580,7 +9933,7 @@
       </p:sp>
       <p:sp>
         <p:nvSpPr>
-          <p:cNvPr id="16" name="Text 13"/>
+          <p:cNvPr id="18" name="Text 15"/>
           <p:cNvSpPr txBox="1"/>
           <p:nvPr/>
         </p:nvSpPr>
@@ -9619,7 +9972,7 @@
       </p:sp>
       <p:sp>
         <p:nvSpPr>
-          <p:cNvPr id="17" name="Text 14"/>
+          <p:cNvPr id="19" name="Text 16"/>
           <p:cNvSpPr txBox="1"/>
           <p:nvPr/>
         </p:nvSpPr>
@@ -9661,7 +10014,7 @@
       </p:sp>
       <p:sp>
         <p:nvSpPr>
-          <p:cNvPr id="18" name="Shape 15"/>
+          <p:cNvPr id="20" name="Shape 17"/>
           <p:cNvSpPr/>
           <p:nvPr/>
         </p:nvSpPr>
@@ -9683,7 +10036,7 @@
       </p:sp>
       <p:sp>
         <p:nvSpPr>
-          <p:cNvPr id="19" name="Text 16"/>
+          <p:cNvPr id="21" name="Text 18"/>
           <p:cNvSpPr txBox="1"/>
           <p:nvPr/>
         </p:nvSpPr>
@@ -9722,7 +10075,7 @@
       </p:sp>
       <p:sp>
         <p:nvSpPr>
-          <p:cNvPr id="20" name="Shape 17"/>
+          <p:cNvPr id="22" name="Shape 19"/>
           <p:cNvSpPr/>
           <p:nvPr/>
         </p:nvSpPr>
@@ -9737,14 +10090,14 @@
             </a:avLst>
           </a:prstGeom>
           <a:solidFill>
-            <a:srgbClr val="E0392B"/>
+            <a:srgbClr val="FFFFFF"/>
           </a:solidFill>
           <a:ln/>
         </p:spPr>
       </p:sp>
       <p:sp>
         <p:nvSpPr>
-          <p:cNvPr id="21" name="Text 18"/>
+          <p:cNvPr id="23" name="Text 20"/>
           <p:cNvSpPr txBox="1"/>
           <p:nvPr/>
         </p:nvSpPr>
@@ -9769,7 +10122,7 @@
             <a:r>
               <a:rPr lang="en-US" sz="1050" b="1" dirty="0">
                 <a:solidFill>
-                  <a:srgbClr val="FFFFFF"/>
+                  <a:srgbClr val="8FA0B5"/>
                 </a:solidFill>
                 <a:latin typeface="Calibri" pitchFamily="34" charset="0"/>
                 <a:ea typeface="Calibri" pitchFamily="34" charset="-122"/>
@@ -9783,7 +10136,68 @@
       </p:sp>
       <p:sp>
         <p:nvSpPr>
-          <p:cNvPr id="22" name="Shape 19"/>
+          <p:cNvPr id="24" name="REVEAL_gq_1"/>
+          <p:cNvSpPr/>
+          <p:nvPr/>
+        </p:nvSpPr>
+        <p:spPr>
+          <a:xfrm>
+            <a:off x="10161727" y="3518154"/>
+            <a:ext cx="1371600" cy="365760"/>
+          </a:xfrm>
+          <a:prstGeom prst="roundRect">
+            <a:avLst>
+              <a:gd name="adj" fmla="val 50000"/>
+            </a:avLst>
+          </a:prstGeom>
+          <a:solidFill>
+            <a:srgbClr val="E0392B"/>
+          </a:solidFill>
+          <a:ln/>
+        </p:spPr>
+      </p:sp>
+      <p:sp>
+        <p:nvSpPr>
+          <p:cNvPr id="25" name="REVEAL_gq_1_tx"/>
+          <p:cNvSpPr txBox="1"/>
+          <p:nvPr/>
+        </p:nvSpPr>
+        <p:spPr>
+          <a:xfrm>
+            <a:off x="10161727" y="3518154"/>
+            <a:ext cx="1371600" cy="365760"/>
+          </a:xfrm>
+          <a:prstGeom prst="rect">
+            <a:avLst/>
+          </a:prstGeom>
+          <a:noFill/>
+          <a:ln/>
+        </p:spPr>
+        <p:txBody>
+          <a:bodyPr wrap="square" lIns="0" tIns="0" rIns="0" bIns="0" rtlCol="0" anchor="ctr"/>
+          <a:lstStyle/>
+          <a:p>
+            <a:pPr algn="ctr" indent="0" marL="0">
+              <a:buNone/>
+            </a:pPr>
+            <a:r>
+              <a:rPr lang="en-US" sz="1050" b="1" dirty="0">
+                <a:solidFill>
+                  <a:srgbClr val="FFFFFF"/>
+                </a:solidFill>
+                <a:latin typeface="Calibri" pitchFamily="34" charset="0"/>
+                <a:ea typeface="Calibri" pitchFamily="34" charset="-122"/>
+                <a:cs typeface="Calibri" pitchFamily="34" charset="-120"/>
+              </a:rPr>
+              <a:t>FRAUDE</a:t>
+            </a:r>
+            <a:endParaRPr lang="en-US" sz="1050" dirty="0"/>
+          </a:p>
+        </p:txBody>
+      </p:sp>
+      <p:sp>
+        <p:nvSpPr>
+          <p:cNvPr id="26" name="Shape 23"/>
           <p:cNvSpPr/>
           <p:nvPr/>
         </p:nvSpPr>
@@ -9805,7 +10219,7 @@
       </p:sp>
       <p:sp>
         <p:nvSpPr>
-          <p:cNvPr id="23" name="Shape 20"/>
+          <p:cNvPr id="27" name="Shape 24"/>
           <p:cNvSpPr/>
           <p:nvPr/>
         </p:nvSpPr>
@@ -9825,7 +10239,7 @@
       </p:sp>
       <p:sp>
         <p:nvSpPr>
-          <p:cNvPr id="24" name="Text 21"/>
+          <p:cNvPr id="28" name="Text 25"/>
           <p:cNvSpPr txBox="1"/>
           <p:nvPr/>
         </p:nvSpPr>
@@ -9864,7 +10278,7 @@
       </p:sp>
       <p:sp>
         <p:nvSpPr>
-          <p:cNvPr id="25" name="Text 22"/>
+          <p:cNvPr id="29" name="Text 26"/>
           <p:cNvSpPr txBox="1"/>
           <p:nvPr/>
         </p:nvSpPr>
@@ -9906,7 +10320,7 @@
       </p:sp>
       <p:sp>
         <p:nvSpPr>
-          <p:cNvPr id="26" name="Shape 23"/>
+          <p:cNvPr id="30" name="Shape 27"/>
           <p:cNvSpPr/>
           <p:nvPr/>
         </p:nvSpPr>
@@ -9921,14 +10335,14 @@
             </a:avLst>
           </a:prstGeom>
           <a:solidFill>
-            <a:srgbClr val="F0AD35"/>
+            <a:srgbClr val="FFFFFF"/>
           </a:solidFill>
           <a:ln/>
         </p:spPr>
       </p:sp>
       <p:sp>
         <p:nvSpPr>
-          <p:cNvPr id="27" name="Text 24"/>
+          <p:cNvPr id="31" name="Text 28"/>
           <p:cNvSpPr txBox="1"/>
           <p:nvPr/>
         </p:nvSpPr>
@@ -9953,7 +10367,7 @@
             <a:r>
               <a:rPr lang="en-US" sz="1050" b="1" dirty="0">
                 <a:solidFill>
-                  <a:srgbClr val="FFFFFF"/>
+                  <a:srgbClr val="8FA0B5"/>
                 </a:solidFill>
                 <a:latin typeface="Calibri" pitchFamily="34" charset="0"/>
                 <a:ea typeface="Calibri" pitchFamily="34" charset="-122"/>
@@ -9967,7 +10381,7 @@
       </p:sp>
       <p:sp>
         <p:nvSpPr>
-          <p:cNvPr id="28" name="Shape 25"/>
+          <p:cNvPr id="32" name="Shape 29"/>
           <p:cNvSpPr/>
           <p:nvPr/>
         </p:nvSpPr>
@@ -9989,7 +10403,7 @@
       </p:sp>
       <p:sp>
         <p:nvSpPr>
-          <p:cNvPr id="29" name="Text 26"/>
+          <p:cNvPr id="33" name="Text 30"/>
           <p:cNvSpPr txBox="1"/>
           <p:nvPr/>
         </p:nvSpPr>
@@ -10028,7 +10442,68 @@
       </p:sp>
       <p:sp>
         <p:nvSpPr>
-          <p:cNvPr id="30" name="Shape 27"/>
+          <p:cNvPr id="34" name="REVEAL_gq_2"/>
+          <p:cNvSpPr/>
+          <p:nvPr/>
+        </p:nvSpPr>
+        <p:spPr>
+          <a:xfrm>
+            <a:off x="8744407" y="4510278"/>
+            <a:ext cx="1325880" cy="365760"/>
+          </a:xfrm>
+          <a:prstGeom prst="roundRect">
+            <a:avLst>
+              <a:gd name="adj" fmla="val 50000"/>
+            </a:avLst>
+          </a:prstGeom>
+          <a:solidFill>
+            <a:srgbClr val="F0AD35"/>
+          </a:solidFill>
+          <a:ln/>
+        </p:spPr>
+      </p:sp>
+      <p:sp>
+        <p:nvSpPr>
+          <p:cNvPr id="35" name="REVEAL_gq_2_tx"/>
+          <p:cNvSpPr txBox="1"/>
+          <p:nvPr/>
+        </p:nvSpPr>
+        <p:spPr>
+          <a:xfrm>
+            <a:off x="8744407" y="4510278"/>
+            <a:ext cx="1325880" cy="365760"/>
+          </a:xfrm>
+          <a:prstGeom prst="rect">
+            <a:avLst/>
+          </a:prstGeom>
+          <a:noFill/>
+          <a:ln/>
+        </p:spPr>
+        <p:txBody>
+          <a:bodyPr wrap="square" lIns="0" tIns="0" rIns="0" bIns="0" rtlCol="0" anchor="ctr"/>
+          <a:lstStyle/>
+          <a:p>
+            <a:pPr algn="ctr" indent="0" marL="0">
+              <a:buNone/>
+            </a:pPr>
+            <a:r>
+              <a:rPr lang="en-US" sz="1050" b="1" dirty="0">
+                <a:solidFill>
+                  <a:srgbClr val="FFFFFF"/>
+                </a:solidFill>
+                <a:latin typeface="Calibri" pitchFamily="34" charset="0"/>
+                <a:ea typeface="Calibri" pitchFamily="34" charset="-122"/>
+                <a:cs typeface="Calibri" pitchFamily="34" charset="-120"/>
+              </a:rPr>
+              <a:t>ERROR</a:t>
+            </a:r>
+            <a:endParaRPr lang="en-US" sz="1050" dirty="0"/>
+          </a:p>
+        </p:txBody>
+      </p:sp>
+      <p:sp>
+        <p:nvSpPr>
+          <p:cNvPr id="36" name="Shape 33"/>
           <p:cNvSpPr/>
           <p:nvPr/>
         </p:nvSpPr>
@@ -10050,7 +10525,7 @@
       </p:sp>
       <p:sp>
         <p:nvSpPr>
-          <p:cNvPr id="31" name="Shape 28"/>
+          <p:cNvPr id="37" name="Shape 34"/>
           <p:cNvSpPr/>
           <p:nvPr/>
         </p:nvSpPr>
@@ -10070,7 +10545,7 @@
       </p:sp>
       <p:sp>
         <p:nvSpPr>
-          <p:cNvPr id="32" name="Text 29"/>
+          <p:cNvPr id="38" name="Text 35"/>
           <p:cNvSpPr txBox="1"/>
           <p:nvPr/>
         </p:nvSpPr>
@@ -10109,7 +10584,7 @@
       </p:sp>
       <p:sp>
         <p:nvSpPr>
-          <p:cNvPr id="33" name="Text 30"/>
+          <p:cNvPr id="39" name="Text 36"/>
           <p:cNvSpPr txBox="1"/>
           <p:nvPr/>
         </p:nvSpPr>
@@ -10151,7 +10626,7 @@
       </p:sp>
       <p:sp>
         <p:nvSpPr>
-          <p:cNvPr id="34" name="Shape 31"/>
+          <p:cNvPr id="40" name="Shape 37"/>
           <p:cNvSpPr/>
           <p:nvPr/>
         </p:nvSpPr>
@@ -10173,7 +10648,7 @@
       </p:sp>
       <p:sp>
         <p:nvSpPr>
-          <p:cNvPr id="35" name="Text 32"/>
+          <p:cNvPr id="41" name="Text 38"/>
           <p:cNvSpPr txBox="1"/>
           <p:nvPr/>
         </p:nvSpPr>
@@ -10212,7 +10687,7 @@
       </p:sp>
       <p:sp>
         <p:nvSpPr>
-          <p:cNvPr id="36" name="Shape 33"/>
+          <p:cNvPr id="42" name="Shape 39"/>
           <p:cNvSpPr/>
           <p:nvPr/>
         </p:nvSpPr>
@@ -10227,14 +10702,14 @@
             </a:avLst>
           </a:prstGeom>
           <a:solidFill>
-            <a:srgbClr val="E0392B"/>
+            <a:srgbClr val="FFFFFF"/>
           </a:solidFill>
           <a:ln/>
         </p:spPr>
       </p:sp>
       <p:sp>
         <p:nvSpPr>
-          <p:cNvPr id="37" name="Text 34"/>
+          <p:cNvPr id="43" name="Text 40"/>
           <p:cNvSpPr txBox="1"/>
           <p:nvPr/>
         </p:nvSpPr>
@@ -10259,7 +10734,7 @@
             <a:r>
               <a:rPr lang="en-US" sz="1050" b="1" dirty="0">
                 <a:solidFill>
-                  <a:srgbClr val="FFFFFF"/>
+                  <a:srgbClr val="8FA0B5"/>
                 </a:solidFill>
                 <a:latin typeface="Calibri" pitchFamily="34" charset="0"/>
                 <a:ea typeface="Calibri" pitchFamily="34" charset="-122"/>
@@ -10273,14 +10748,36 @@
       </p:sp>
       <p:sp>
         <p:nvSpPr>
-          <p:cNvPr id="38" name="Text 35"/>
-          <p:cNvSpPr txBox="1"/>
-          <p:nvPr/>
-        </p:nvSpPr>
-        <p:spPr>
-          <a:xfrm>
-            <a:off x="566928" y="6473952"/>
-            <a:ext cx="7315200" cy="274320"/>
+          <p:cNvPr id="44" name="REVEAL_gq_3"/>
+          <p:cNvSpPr/>
+          <p:nvPr/>
+        </p:nvSpPr>
+        <p:spPr>
+          <a:xfrm>
+            <a:off x="10161727" y="5502402"/>
+            <a:ext cx="1371600" cy="365760"/>
+          </a:xfrm>
+          <a:prstGeom prst="roundRect">
+            <a:avLst>
+              <a:gd name="adj" fmla="val 50000"/>
+            </a:avLst>
+          </a:prstGeom>
+          <a:solidFill>
+            <a:srgbClr val="E0392B"/>
+          </a:solidFill>
+          <a:ln/>
+        </p:spPr>
+      </p:sp>
+      <p:sp>
+        <p:nvSpPr>
+          <p:cNvPr id="45" name="REVEAL_gq_3_tx"/>
+          <p:cNvSpPr txBox="1"/>
+          <p:nvPr/>
+        </p:nvSpPr>
+        <p:spPr>
+          <a:xfrm>
+            <a:off x="10161727" y="5502402"/>
+            <a:ext cx="1371600" cy="365760"/>
           </a:xfrm>
           <a:prstGeom prst="rect">
             <a:avLst/>
@@ -10292,18 +10789,57 @@
           <a:bodyPr wrap="square" lIns="0" tIns="0" rIns="0" bIns="0" rtlCol="0" anchor="ctr"/>
           <a:lstStyle/>
           <a:p>
-            <a:pPr algn="l" indent="0" marL="0">
-              <a:buNone/>
-            </a:pPr>
-            <a:r>
-              <a:rPr lang="en-US" sz="900" dirty="0">
-                <a:solidFill>
-                  <a:srgbClr val="5B6B82"/>
+            <a:pPr algn="ctr" indent="0" marL="0">
+              <a:buNone/>
+            </a:pPr>
+            <a:r>
+              <a:rPr lang="en-US" sz="1050" b="1" dirty="0">
+                <a:solidFill>
+                  <a:srgbClr val="FFFFFF"/>
                 </a:solidFill>
                 <a:latin typeface="Calibri" pitchFamily="34" charset="0"/>
                 <a:ea typeface="Calibri" pitchFamily="34" charset="-122"/>
                 <a:cs typeface="Calibri" pitchFamily="34" charset="-120"/>
               </a:rPr>
+              <a:t>FRAUDE</a:t>
+            </a:r>
+            <a:endParaRPr lang="en-US" sz="1050" dirty="0"/>
+          </a:p>
+        </p:txBody>
+      </p:sp>
+      <p:sp>
+        <p:nvSpPr>
+          <p:cNvPr id="46" name="Text 43"/>
+          <p:cNvSpPr txBox="1"/>
+          <p:nvPr/>
+        </p:nvSpPr>
+        <p:spPr>
+          <a:xfrm>
+            <a:off x="566928" y="6473952"/>
+            <a:ext cx="7315200" cy="274320"/>
+          </a:xfrm>
+          <a:prstGeom prst="rect">
+            <a:avLst/>
+          </a:prstGeom>
+          <a:noFill/>
+          <a:ln/>
+        </p:spPr>
+        <p:txBody>
+          <a:bodyPr wrap="square" lIns="0" tIns="0" rIns="0" bIns="0" rtlCol="0" anchor="ctr"/>
+          <a:lstStyle/>
+          <a:p>
+            <a:pPr algn="l" indent="0" marL="0">
+              <a:buNone/>
+            </a:pPr>
+            <a:r>
+              <a:rPr lang="en-US" sz="900" dirty="0">
+                <a:solidFill>
+                  <a:srgbClr val="5B6B82"/>
+                </a:solidFill>
+                <a:latin typeface="Calibri" pitchFamily="34" charset="0"/>
+                <a:ea typeface="Calibri" pitchFamily="34" charset="-122"/>
+                <a:cs typeface="Calibri" pitchFamily="34" charset="-120"/>
+              </a:rPr>
               <a:t>GESTIÓN INTEGRAL DE RIESGOS  ·  COMEDICA DE R.L.</a:t>
             </a:r>
             <a:endParaRPr lang="en-US" sz="900" dirty="0"/>
@@ -10312,7 +10848,7 @@
       </p:sp>
       <p:sp>
         <p:nvSpPr>
-          <p:cNvPr id="39" name="Text 36"/>
+          <p:cNvPr id="47" name="Text 44"/>
           <p:cNvSpPr txBox="1"/>
           <p:nvPr/>
         </p:nvSpPr>
@@ -10354,6 +10890,194 @@
   <p:clrMapOvr>
     <a:masterClrMapping/>
   </p:clrMapOvr>
+  <p:timing>
+    <p:tnLst>
+      <p:par>
+        <p:cTn id="1" dur="indefinite" restart="never" nodeType="tmRoot">
+          <p:childTnLst>
+            <p:seq concurrent="1" nextAc="seek">
+              <p:cTn id="2" dur="indefinite" nodeType="mainSeq">
+                <p:childTnLst>
+                  <p:par>
+                    <p:cTn id="3" fill="hold">
+                      <p:stCondLst>
+                        <p:cond delay="indefinite"/>
+                      </p:stCondLst>
+                      <p:childTnLst>
+                        <p:par>
+                          <p:cTn id="4" presetID="2" presetClass="entr" presetSubtype="0" fill="hold" nodeType="clickEffect">
+                            <p:stCondLst>
+                              <p:cond delay="0"/>
+                            </p:stCondLst>
+                            <p:childTnLst>
+                              <p:set>
+                                <p:cBhvr>
+                                  <p:cTn id="5" dur="1" fill="hold">
+                                    <p:stCondLst>
+                                      <p:cond delay="0"/>
+                                    </p:stCondLst>
+                                  </p:cTn>
+                                  <p:tgtEl>
+                                    <p:spTgt spid="14"/>
+                                  </p:tgtEl>
+                                  <p:attrNameLst>
+                                    <p:attrName>style.visibility</p:attrName>
+                                  </p:attrNameLst>
+                                </p:cBhvr>
+                                <p:to>
+                                  <p:strVal val="visible"/>
+                                </p:to>
+                              </p:set>
+                              <p:set>
+                                <p:cBhvr>
+                                  <p:cTn id="6" dur="1" fill="hold">
+                                    <p:stCondLst>
+                                      <p:cond delay="0"/>
+                                    </p:stCondLst>
+                                  </p:cTn>
+                                  <p:tgtEl>
+                                    <p:spTgt spid="15"/>
+                                  </p:tgtEl>
+                                  <p:attrNameLst>
+                                    <p:attrName>style.visibility</p:attrName>
+                                  </p:attrNameLst>
+                                </p:cBhvr>
+                                <p:to>
+                                  <p:strVal val="visible"/>
+                                </p:to>
+                              </p:set>
+                              <p:set>
+                                <p:cBhvr>
+                                  <p:cTn id="7" dur="1" fill="hold">
+                                    <p:stCondLst>
+                                      <p:cond delay="0"/>
+                                    </p:stCondLst>
+                                  </p:cTn>
+                                  <p:tgtEl>
+                                    <p:spTgt spid="24"/>
+                                  </p:tgtEl>
+                                  <p:attrNameLst>
+                                    <p:attrName>style.visibility</p:attrName>
+                                  </p:attrNameLst>
+                                </p:cBhvr>
+                                <p:to>
+                                  <p:strVal val="visible"/>
+                                </p:to>
+                              </p:set>
+                              <p:set>
+                                <p:cBhvr>
+                                  <p:cTn id="8" dur="1" fill="hold">
+                                    <p:stCondLst>
+                                      <p:cond delay="0"/>
+                                    </p:stCondLst>
+                                  </p:cTn>
+                                  <p:tgtEl>
+                                    <p:spTgt spid="25"/>
+                                  </p:tgtEl>
+                                  <p:attrNameLst>
+                                    <p:attrName>style.visibility</p:attrName>
+                                  </p:attrNameLst>
+                                </p:cBhvr>
+                                <p:to>
+                                  <p:strVal val="visible"/>
+                                </p:to>
+                              </p:set>
+                              <p:set>
+                                <p:cBhvr>
+                                  <p:cTn id="9" dur="1" fill="hold">
+                                    <p:stCondLst>
+                                      <p:cond delay="0"/>
+                                    </p:stCondLst>
+                                  </p:cTn>
+                                  <p:tgtEl>
+                                    <p:spTgt spid="34"/>
+                                  </p:tgtEl>
+                                  <p:attrNameLst>
+                                    <p:attrName>style.visibility</p:attrName>
+                                  </p:attrNameLst>
+                                </p:cBhvr>
+                                <p:to>
+                                  <p:strVal val="visible"/>
+                                </p:to>
+                              </p:set>
+                              <p:set>
+                                <p:cBhvr>
+                                  <p:cTn id="10" dur="1" fill="hold">
+                                    <p:stCondLst>
+                                      <p:cond delay="0"/>
+                                    </p:stCondLst>
+                                  </p:cTn>
+                                  <p:tgtEl>
+                                    <p:spTgt spid="35"/>
+                                  </p:tgtEl>
+                                  <p:attrNameLst>
+                                    <p:attrName>style.visibility</p:attrName>
+                                  </p:attrNameLst>
+                                </p:cBhvr>
+                                <p:to>
+                                  <p:strVal val="visible"/>
+                                </p:to>
+                              </p:set>
+                              <p:set>
+                                <p:cBhvr>
+                                  <p:cTn id="11" dur="1" fill="hold">
+                                    <p:stCondLst>
+                                      <p:cond delay="0"/>
+                                    </p:stCondLst>
+                                  </p:cTn>
+                                  <p:tgtEl>
+                                    <p:spTgt spid="44"/>
+                                  </p:tgtEl>
+                                  <p:attrNameLst>
+                                    <p:attrName>style.visibility</p:attrName>
+                                  </p:attrNameLst>
+                                </p:cBhvr>
+                                <p:to>
+                                  <p:strVal val="visible"/>
+                                </p:to>
+                              </p:set>
+                              <p:set>
+                                <p:cBhvr>
+                                  <p:cTn id="12" dur="1" fill="hold">
+                                    <p:stCondLst>
+                                      <p:cond delay="0"/>
+                                    </p:stCondLst>
+                                  </p:cTn>
+                                  <p:tgtEl>
+                                    <p:spTgt spid="45"/>
+                                  </p:tgtEl>
+                                  <p:attrNameLst>
+                                    <p:attrName>style.visibility</p:attrName>
+                                  </p:attrNameLst>
+                                </p:cBhvr>
+                                <p:to>
+                                  <p:strVal val="visible"/>
+                                </p:to>
+                              </p:set>
+                            </p:childTnLst>
+                          </p:cTn>
+                        </p:par>
+                      </p:childTnLst>
+                    </p:cTn>
+                  </p:par>
+                </p:childTnLst>
+              </p:cTn>
+            </p:seq>
+          </p:childTnLst>
+        </p:cTn>
+      </p:par>
+    </p:tnLst>
+    <p:bldLst>
+      <p:bldP spid="14" grpId="0"/>
+      <p:bldP spid="15" grpId="0"/>
+      <p:bldP spid="24" grpId="0"/>
+      <p:bldP spid="25" grpId="0"/>
+      <p:bldP spid="34" grpId="0"/>
+      <p:bldP spid="35" grpId="0"/>
+      <p:bldP spid="44" grpId="0"/>
+      <p:bldP spid="45" grpId="0"/>
+    </p:bldLst>
+  </p:timing>
 </p:sld>
 </file>
 
@@ -18195,21 +18919,65 @@
         </p:nvSpPr>
         <p:spPr>
           <a:xfrm>
-            <a:off x="2102053" y="3840480"/>
-            <a:ext cx="457200" cy="457200"/>
+            <a:off x="4332122" y="3675888"/>
+            <a:ext cx="3527450" cy="2377440"/>
+          </a:xfrm>
+          <a:prstGeom prst="roundRect">
+            <a:avLst>
+              <a:gd name="adj" fmla="val 3846"/>
+            </a:avLst>
+          </a:prstGeom>
+          <a:solidFill>
+            <a:srgbClr val="F2F5F9"/>
+          </a:solidFill>
+          <a:ln/>
+        </p:spPr>
+      </p:sp>
+      <p:sp>
+        <p:nvSpPr>
+          <p:cNvPr id="18" name="Shape 14"/>
+          <p:cNvSpPr/>
+          <p:nvPr/>
+        </p:nvSpPr>
+        <p:spPr>
+          <a:xfrm>
+            <a:off x="8097317" y="3675888"/>
+            <a:ext cx="3527450" cy="2377440"/>
+          </a:xfrm>
+          <a:prstGeom prst="roundRect">
+            <a:avLst>
+              <a:gd name="adj" fmla="val 3846"/>
+            </a:avLst>
+          </a:prstGeom>
+          <a:solidFill>
+            <a:srgbClr val="F2F5F9"/>
+          </a:solidFill>
+          <a:ln/>
+        </p:spPr>
+      </p:sp>
+      <p:sp>
+        <p:nvSpPr>
+          <p:cNvPr id="19" name="Shape 15"/>
+          <p:cNvSpPr/>
+          <p:nvPr/>
+        </p:nvSpPr>
+        <p:spPr>
+          <a:xfrm>
+            <a:off x="5848960" y="4178808"/>
+            <a:ext cx="493776" cy="493776"/>
           </a:xfrm>
           <a:prstGeom prst="ellipse">
             <a:avLst/>
           </a:prstGeom>
           <a:solidFill>
-            <a:srgbClr val="2FAE60"/>
+            <a:srgbClr val="8FA0B5"/>
           </a:solidFill>
           <a:ln/>
         </p:spPr>
       </p:sp>
       <p:pic>
         <p:nvPicPr>
-          <p:cNvPr id="18" name="Image 1" descr="/tmp/claude-0/-home-user-riesgo/0ff9ff46-1396-5bd8-b3ac-2280dfbbbc55/scratchpad/work/gen/icons/check_circle_white.png">    </p:cNvPr>
+          <p:cNvPr id="20" name="Image 1" descr="/tmp/claude-0/-home-user-riesgo/0ff9ff46-1396-5bd8-b3ac-2280dfbbbc55/scratchpad/work/gen/icons/question_white.png">    </p:cNvPr>
           <p:cNvPicPr>
             <a:picLocks noChangeAspect="1"/>
           </p:cNvPicPr>
@@ -18223,8 +18991,8 @@
         </p:blipFill>
         <p:spPr>
           <a:xfrm>
-            <a:off x="2211781" y="3950208"/>
-            <a:ext cx="237744" cy="237744"/>
+            <a:off x="5960059" y="4289908"/>
+            <a:ext cx="271577" cy="271577"/>
           </a:xfrm>
           <a:prstGeom prst="rect">
             <a:avLst/>
@@ -18233,14 +19001,14 @@
       </p:pic>
       <p:sp>
         <p:nvSpPr>
-          <p:cNvPr id="19" name="Text 14"/>
-          <p:cNvSpPr txBox="1"/>
-          <p:nvPr/>
-        </p:nvSpPr>
-        <p:spPr>
-          <a:xfrm>
-            <a:off x="713232" y="4389120"/>
-            <a:ext cx="3234842" cy="384048"/>
+          <p:cNvPr id="21" name="Text 16"/>
+          <p:cNvSpPr txBox="1"/>
+          <p:nvPr/>
+        </p:nvSpPr>
+        <p:spPr>
+          <a:xfrm>
+            <a:off x="4469282" y="4791456"/>
+            <a:ext cx="3253130" cy="640080"/>
           </a:xfrm>
           <a:prstGeom prst="rect">
             <a:avLst/>
@@ -18253,74 +19021,55 @@
           <a:lstStyle/>
           <a:p>
             <a:pPr algn="ctr" indent="0" marL="0">
-              <a:buNone/>
-            </a:pPr>
-            <a:r>
-              <a:rPr lang="en-US" sz="1050" b="1" spc="30" kern="0" dirty="0">
-                <a:solidFill>
-                  <a:srgbClr val="2FAE60"/>
+              <a:lnSpc>
+                <a:spcPct val="120000"/>
+              </a:lnSpc>
+              <a:buNone/>
+            </a:pPr>
+            <a:r>
+              <a:rPr lang="en-US" sz="1150" i="1" dirty="0">
+                <a:solidFill>
+                  <a:srgbClr val="5B6B82"/>
                 </a:solidFill>
                 <a:latin typeface="Calibri" pitchFamily="34" charset="0"/>
                 <a:ea typeface="Calibri" pitchFamily="34" charset="-122"/>
                 <a:cs typeface="Calibri" pitchFamily="34" charset="-120"/>
               </a:rPr>
-              <a:t>ACCIÓN RECOMENDADA</a:t>
-            </a:r>
-            <a:endParaRPr lang="en-US" sz="1050" dirty="0"/>
-          </a:p>
-        </p:txBody>
-      </p:sp>
-      <p:sp>
-        <p:nvSpPr>
-          <p:cNvPr id="20" name="Text 15"/>
-          <p:cNvSpPr txBox="1"/>
-          <p:nvPr/>
-        </p:nvSpPr>
-        <p:spPr>
-          <a:xfrm>
-            <a:off x="749808" y="4791456"/>
-            <a:ext cx="3161690" cy="1152144"/>
-          </a:xfrm>
-          <a:prstGeom prst="rect">
-            <a:avLst/>
-          </a:prstGeom>
-          <a:noFill/>
-          <a:ln/>
-        </p:spPr>
-        <p:txBody>
-          <a:bodyPr wrap="square" lIns="0" tIns="0" rIns="0" bIns="0" rtlCol="0" anchor="ctr"/>
-          <a:lstStyle/>
+              <a:t>Da tiempo al grupo para discutir.</a:t>
+            </a:r>
+            <a:endParaRPr lang="en-US" sz="1150" dirty="0"/>
+          </a:p>
           <a:p>
             <a:pPr algn="ctr" indent="0" marL="0">
               <a:lnSpc>
-                <a:spcPct val="112000"/>
+                <a:spcPct val="120000"/>
               </a:lnSpc>
               <a:buNone/>
             </a:pPr>
             <a:r>
-              <a:rPr lang="en-US" sz="1080" dirty="0">
-                <a:solidFill>
-                  <a:srgbClr val="243044"/>
+              <a:rPr lang="en-US" sz="1150" i="1" dirty="0">
+                <a:solidFill>
+                  <a:srgbClr val="5B6B82"/>
                 </a:solidFill>
                 <a:latin typeface="Calibri" pitchFamily="34" charset="0"/>
                 <a:ea typeface="Calibri" pitchFamily="34" charset="-122"/>
                 <a:cs typeface="Calibri" pitchFamily="34" charset="-120"/>
               </a:rPr>
-              <a:t>Detener el registro manual improvisado y reportar la falla de inmediato para que sea atendida y documentada.</a:t>
-            </a:r>
-            <a:endParaRPr lang="en-US" sz="1080" dirty="0"/>
-          </a:p>
-        </p:txBody>
-      </p:sp>
-      <p:sp>
-        <p:nvSpPr>
-          <p:cNvPr id="21" name="Shape 16"/>
+              <a:t>Haz clic para revelar la respuesta.</a:t>
+            </a:r>
+            <a:endParaRPr lang="en-US" sz="1150" dirty="0"/>
+          </a:p>
+        </p:txBody>
+      </p:sp>
+      <p:sp>
+        <p:nvSpPr>
+          <p:cNvPr id="22" name="REVEAL_case1_0_bg"/>
           <p:cNvSpPr/>
           <p:nvPr/>
         </p:nvSpPr>
         <p:spPr>
           <a:xfrm>
-            <a:off x="4332122" y="3675888"/>
+            <a:off x="566928" y="3675888"/>
             <a:ext cx="3527450" cy="2377440"/>
           </a:xfrm>
           <a:prstGeom prst="roundRect">
@@ -18336,27 +19085,27 @@
       </p:sp>
       <p:sp>
         <p:nvSpPr>
-          <p:cNvPr id="22" name="Shape 17"/>
+          <p:cNvPr id="23" name="REVEAL_case1_0_ic"/>
           <p:cNvSpPr/>
           <p:nvPr/>
         </p:nvSpPr>
         <p:spPr>
           <a:xfrm>
-            <a:off x="5867248" y="3840480"/>
+            <a:off x="2102053" y="3840480"/>
             <a:ext cx="457200" cy="457200"/>
           </a:xfrm>
           <a:prstGeom prst="ellipse">
             <a:avLst/>
           </a:prstGeom>
           <a:solidFill>
-            <a:srgbClr val="133B6C"/>
+            <a:srgbClr val="2FAE60"/>
           </a:solidFill>
           <a:ln/>
         </p:spPr>
       </p:sp>
       <p:pic>
         <p:nvPicPr>
-          <p:cNvPr id="23" name="Image 2" descr="/tmp/claude-0/-home-user-riesgo/0ff9ff46-1396-5bd8-b3ac-2280dfbbbc55/scratchpad/work/gen/icons/people_group_white.png">    </p:cNvPr>
+          <p:cNvPr id="24" name="REVEAL_case1_0_ic_ic" descr="/tmp/claude-0/-home-user-riesgo/0ff9ff46-1396-5bd8-b3ac-2280dfbbbc55/scratchpad/work/gen/icons/check_circle_white.png">    </p:cNvPr>
           <p:cNvPicPr>
             <a:picLocks noChangeAspect="1"/>
           </p:cNvPicPr>
@@ -18370,7 +19119,7 @@
         </p:blipFill>
         <p:spPr>
           <a:xfrm>
-            <a:off x="5976976" y="3950208"/>
+            <a:off x="2211781" y="3950208"/>
             <a:ext cx="237744" cy="237744"/>
           </a:xfrm>
           <a:prstGeom prst="rect">
@@ -18380,13 +19129,13 @@
       </p:pic>
       <p:sp>
         <p:nvSpPr>
-          <p:cNvPr id="24" name="Text 18"/>
-          <p:cNvSpPr txBox="1"/>
-          <p:nvPr/>
-        </p:nvSpPr>
-        <p:spPr>
-          <a:xfrm>
-            <a:off x="4478426" y="4389120"/>
+          <p:cNvPr id="25" name="REVEAL_case1_0_lbl"/>
+          <p:cNvSpPr txBox="1"/>
+          <p:nvPr/>
+        </p:nvSpPr>
+        <p:spPr>
+          <a:xfrm>
+            <a:off x="713232" y="4389120"/>
             <a:ext cx="3234842" cy="384048"/>
           </a:xfrm>
           <a:prstGeom prst="rect">
@@ -18405,13 +19154,13 @@
             <a:r>
               <a:rPr lang="en-US" sz="1050" b="1" spc="30" kern="0" dirty="0">
                 <a:solidFill>
-                  <a:srgbClr val="133B6C"/>
+                  <a:srgbClr val="2FAE60"/>
                 </a:solidFill>
                 <a:latin typeface="Calibri" pitchFamily="34" charset="0"/>
                 <a:ea typeface="Calibri" pitchFamily="34" charset="-122"/>
                 <a:cs typeface="Calibri" pitchFamily="34" charset="-120"/>
               </a:rPr>
-              <a:t>RESPONSABLE DE ACTUAR</a:t>
+              <a:t>ACCIÓN RECOMENDADA</a:t>
             </a:r>
             <a:endParaRPr lang="en-US" sz="1050" dirty="0"/>
           </a:p>
@@ -18419,13 +19168,13 @@
       </p:sp>
       <p:sp>
         <p:nvSpPr>
-          <p:cNvPr id="25" name="Text 19"/>
-          <p:cNvSpPr txBox="1"/>
-          <p:nvPr/>
-        </p:nvSpPr>
-        <p:spPr>
-          <a:xfrm>
-            <a:off x="4515002" y="4791456"/>
+          <p:cNvPr id="26" name="REVEAL_case1_0_txt"/>
+          <p:cNvSpPr txBox="1"/>
+          <p:nvPr/>
+        </p:nvSpPr>
+        <p:spPr>
+          <a:xfrm>
+            <a:off x="749808" y="4791456"/>
             <a:ext cx="3161690" cy="1152144"/>
           </a:xfrm>
           <a:prstGeom prst="rect">
@@ -18453,7 +19202,7 @@
                 <a:ea typeface="Calibri" pitchFamily="34" charset="-122"/>
                 <a:cs typeface="Calibri" pitchFamily="34" charset="-120"/>
               </a:rPr>
-              <a:t>El colaborador que detecta la falla, apoyado por su jefatura y las áreas técnicas correspondientes.</a:t>
+              <a:t>Detener el registro manual improvisado y reportar la falla de inmediato para que sea atendida y documentada.</a:t>
             </a:r>
             <a:endParaRPr lang="en-US" sz="1080" dirty="0"/>
           </a:p>
@@ -18461,13 +19210,13 @@
       </p:sp>
       <p:sp>
         <p:nvSpPr>
-          <p:cNvPr id="26" name="Shape 20"/>
+          <p:cNvPr id="27" name="REVEAL_case1_1_bg"/>
           <p:cNvSpPr/>
           <p:nvPr/>
         </p:nvSpPr>
         <p:spPr>
           <a:xfrm>
-            <a:off x="8097317" y="3675888"/>
+            <a:off x="4332122" y="3675888"/>
             <a:ext cx="3527450" cy="2377440"/>
           </a:xfrm>
           <a:prstGeom prst="roundRect">
@@ -18483,27 +19232,27 @@
       </p:sp>
       <p:sp>
         <p:nvSpPr>
-          <p:cNvPr id="27" name="Shape 21"/>
+          <p:cNvPr id="28" name="REVEAL_case1_1_ic"/>
           <p:cNvSpPr/>
           <p:nvPr/>
         </p:nvSpPr>
         <p:spPr>
           <a:xfrm>
-            <a:off x="9632442" y="3840480"/>
+            <a:off x="5867248" y="3840480"/>
             <a:ext cx="457200" cy="457200"/>
           </a:xfrm>
           <a:prstGeom prst="ellipse">
             <a:avLst/>
           </a:prstGeom>
           <a:solidFill>
-            <a:srgbClr val="E0392B"/>
+            <a:srgbClr val="133B6C"/>
           </a:solidFill>
           <a:ln/>
         </p:spPr>
       </p:sp>
       <p:pic>
         <p:nvPicPr>
-          <p:cNvPr id="28" name="Image 3" descr="/tmp/claude-0/-home-user-riesgo/0ff9ff46-1396-5bd8-b3ac-2280dfbbbc55/scratchpad/work/gen/icons/warning_triangle_white.png">    </p:cNvPr>
+          <p:cNvPr id="29" name="REVEAL_case1_1_ic_ic" descr="/tmp/claude-0/-home-user-riesgo/0ff9ff46-1396-5bd8-b3ac-2280dfbbbc55/scratchpad/work/gen/icons/people_group_white.png">    </p:cNvPr>
           <p:cNvPicPr>
             <a:picLocks noChangeAspect="1"/>
           </p:cNvPicPr>
@@ -18517,7 +19266,7 @@
         </p:blipFill>
         <p:spPr>
           <a:xfrm>
-            <a:off x="9742170" y="3950208"/>
+            <a:off x="5976976" y="3950208"/>
             <a:ext cx="237744" cy="237744"/>
           </a:xfrm>
           <a:prstGeom prst="rect">
@@ -18527,13 +19276,13 @@
       </p:pic>
       <p:sp>
         <p:nvSpPr>
-          <p:cNvPr id="29" name="Text 22"/>
-          <p:cNvSpPr txBox="1"/>
-          <p:nvPr/>
-        </p:nvSpPr>
-        <p:spPr>
-          <a:xfrm>
-            <a:off x="8243621" y="4389120"/>
+          <p:cNvPr id="30" name="REVEAL_case1_1_lbl"/>
+          <p:cNvSpPr txBox="1"/>
+          <p:nvPr/>
+        </p:nvSpPr>
+        <p:spPr>
+          <a:xfrm>
+            <a:off x="4478426" y="4389120"/>
             <a:ext cx="3234842" cy="384048"/>
           </a:xfrm>
           <a:prstGeom prst="rect">
@@ -18552,13 +19301,13 @@
             <a:r>
               <a:rPr lang="en-US" sz="1050" b="1" spc="30" kern="0" dirty="0">
                 <a:solidFill>
-                  <a:srgbClr val="E0392B"/>
+                  <a:srgbClr val="133B6C"/>
                 </a:solidFill>
                 <a:latin typeface="Calibri" pitchFamily="34" charset="0"/>
                 <a:ea typeface="Calibri" pitchFamily="34" charset="-122"/>
                 <a:cs typeface="Calibri" pitchFamily="34" charset="-120"/>
               </a:rPr>
-              <a:t>SI NO ACTUAMOS</a:t>
+              <a:t>RESPONSABLE DE ACTUAR</a:t>
             </a:r>
             <a:endParaRPr lang="en-US" sz="1050" dirty="0"/>
           </a:p>
@@ -18566,13 +19315,13 @@
       </p:sp>
       <p:sp>
         <p:nvSpPr>
-          <p:cNvPr id="30" name="Text 23"/>
-          <p:cNvSpPr txBox="1"/>
-          <p:nvPr/>
-        </p:nvSpPr>
-        <p:spPr>
-          <a:xfrm>
-            <a:off x="8280197" y="4791456"/>
+          <p:cNvPr id="31" name="REVEAL_case1_1_txt"/>
+          <p:cNvSpPr txBox="1"/>
+          <p:nvPr/>
+        </p:nvSpPr>
+        <p:spPr>
+          <a:xfrm>
+            <a:off x="4515002" y="4791456"/>
             <a:ext cx="3161690" cy="1152144"/>
           </a:xfrm>
           <a:prstGeom prst="rect">
@@ -18600,7 +19349,7 @@
                 <a:ea typeface="Calibri" pitchFamily="34" charset="-122"/>
                 <a:cs typeface="Calibri" pitchFamily="34" charset="-120"/>
               </a:rPr>
-              <a:t>Registros duplicados o incompletos, pérdida de información y decisiones basadas en datos incorrectos.</a:t>
+              <a:t>El colaborador que detecta la falla, apoyado por su jefatura y las áreas técnicas correspondientes.</a:t>
             </a:r>
             <a:endParaRPr lang="en-US" sz="1080" dirty="0"/>
           </a:p>
@@ -18608,14 +19357,80 @@
       </p:sp>
       <p:sp>
         <p:nvSpPr>
-          <p:cNvPr id="31" name="Text 24"/>
-          <p:cNvSpPr txBox="1"/>
-          <p:nvPr/>
-        </p:nvSpPr>
-        <p:spPr>
-          <a:xfrm>
-            <a:off x="566928" y="6473952"/>
-            <a:ext cx="7315200" cy="274320"/>
+          <p:cNvPr id="32" name="REVEAL_case1_2_bg"/>
+          <p:cNvSpPr/>
+          <p:nvPr/>
+        </p:nvSpPr>
+        <p:spPr>
+          <a:xfrm>
+            <a:off x="8097317" y="3675888"/>
+            <a:ext cx="3527450" cy="2377440"/>
+          </a:xfrm>
+          <a:prstGeom prst="roundRect">
+            <a:avLst>
+              <a:gd name="adj" fmla="val 3846"/>
+            </a:avLst>
+          </a:prstGeom>
+          <a:solidFill>
+            <a:srgbClr val="F2F5F9"/>
+          </a:solidFill>
+          <a:ln/>
+        </p:spPr>
+      </p:sp>
+      <p:sp>
+        <p:nvSpPr>
+          <p:cNvPr id="33" name="REVEAL_case1_2_ic"/>
+          <p:cNvSpPr/>
+          <p:nvPr/>
+        </p:nvSpPr>
+        <p:spPr>
+          <a:xfrm>
+            <a:off x="9632442" y="3840480"/>
+            <a:ext cx="457200" cy="457200"/>
+          </a:xfrm>
+          <a:prstGeom prst="ellipse">
+            <a:avLst/>
+          </a:prstGeom>
+          <a:solidFill>
+            <a:srgbClr val="E0392B"/>
+          </a:solidFill>
+          <a:ln/>
+        </p:spPr>
+      </p:sp>
+      <p:pic>
+        <p:nvPicPr>
+          <p:cNvPr id="34" name="REVEAL_case1_2_ic_ic" descr="/tmp/claude-0/-home-user-riesgo/0ff9ff46-1396-5bd8-b3ac-2280dfbbbc55/scratchpad/work/gen/icons/warning_triangle_white.png">    </p:cNvPr>
+          <p:cNvPicPr>
+            <a:picLocks noChangeAspect="1"/>
+          </p:cNvPicPr>
+          <p:nvPr/>
+        </p:nvPicPr>
+        <p:blipFill>
+          <a:blip r:embed="rId5"/>
+          <a:stretch>
+            <a:fillRect/>
+          </a:stretch>
+        </p:blipFill>
+        <p:spPr>
+          <a:xfrm>
+            <a:off x="9742170" y="3950208"/>
+            <a:ext cx="237744" cy="237744"/>
+          </a:xfrm>
+          <a:prstGeom prst="rect">
+            <a:avLst/>
+          </a:prstGeom>
+        </p:spPr>
+      </p:pic>
+      <p:sp>
+        <p:nvSpPr>
+          <p:cNvPr id="35" name="REVEAL_case1_2_lbl"/>
+          <p:cNvSpPr txBox="1"/>
+          <p:nvPr/>
+        </p:nvSpPr>
+        <p:spPr>
+          <a:xfrm>
+            <a:off x="8243621" y="4389120"/>
+            <a:ext cx="3234842" cy="384048"/>
           </a:xfrm>
           <a:prstGeom prst="rect">
             <a:avLst/>
@@ -18627,18 +19442,99 @@
           <a:bodyPr wrap="square" lIns="0" tIns="0" rIns="0" bIns="0" rtlCol="0" anchor="ctr"/>
           <a:lstStyle/>
           <a:p>
-            <a:pPr algn="l" indent="0" marL="0">
-              <a:buNone/>
-            </a:pPr>
-            <a:r>
-              <a:rPr lang="en-US" sz="900" dirty="0">
-                <a:solidFill>
-                  <a:srgbClr val="5B6B82"/>
+            <a:pPr algn="ctr" indent="0" marL="0">
+              <a:buNone/>
+            </a:pPr>
+            <a:r>
+              <a:rPr lang="en-US" sz="1050" b="1" spc="30" kern="0" dirty="0">
+                <a:solidFill>
+                  <a:srgbClr val="E0392B"/>
                 </a:solidFill>
                 <a:latin typeface="Calibri" pitchFamily="34" charset="0"/>
                 <a:ea typeface="Calibri" pitchFamily="34" charset="-122"/>
                 <a:cs typeface="Calibri" pitchFamily="34" charset="-120"/>
               </a:rPr>
+              <a:t>SI NO ACTUAMOS</a:t>
+            </a:r>
+            <a:endParaRPr lang="en-US" sz="1050" dirty="0"/>
+          </a:p>
+        </p:txBody>
+      </p:sp>
+      <p:sp>
+        <p:nvSpPr>
+          <p:cNvPr id="36" name="REVEAL_case1_2_txt"/>
+          <p:cNvSpPr txBox="1"/>
+          <p:nvPr/>
+        </p:nvSpPr>
+        <p:spPr>
+          <a:xfrm>
+            <a:off x="8280197" y="4791456"/>
+            <a:ext cx="3161690" cy="1152144"/>
+          </a:xfrm>
+          <a:prstGeom prst="rect">
+            <a:avLst/>
+          </a:prstGeom>
+          <a:noFill/>
+          <a:ln/>
+        </p:spPr>
+        <p:txBody>
+          <a:bodyPr wrap="square" lIns="0" tIns="0" rIns="0" bIns="0" rtlCol="0" anchor="ctr"/>
+          <a:lstStyle/>
+          <a:p>
+            <a:pPr algn="ctr" indent="0" marL="0">
+              <a:lnSpc>
+                <a:spcPct val="112000"/>
+              </a:lnSpc>
+              <a:buNone/>
+            </a:pPr>
+            <a:r>
+              <a:rPr lang="en-US" sz="1080" dirty="0">
+                <a:solidFill>
+                  <a:srgbClr val="243044"/>
+                </a:solidFill>
+                <a:latin typeface="Calibri" pitchFamily="34" charset="0"/>
+                <a:ea typeface="Calibri" pitchFamily="34" charset="-122"/>
+                <a:cs typeface="Calibri" pitchFamily="34" charset="-120"/>
+              </a:rPr>
+              <a:t>Registros duplicados o incompletos, pérdida de información y decisiones basadas en datos incorrectos.</a:t>
+            </a:r>
+            <a:endParaRPr lang="en-US" sz="1080" dirty="0"/>
+          </a:p>
+        </p:txBody>
+      </p:sp>
+      <p:sp>
+        <p:nvSpPr>
+          <p:cNvPr id="37" name="Text 29"/>
+          <p:cNvSpPr txBox="1"/>
+          <p:nvPr/>
+        </p:nvSpPr>
+        <p:spPr>
+          <a:xfrm>
+            <a:off x="566928" y="6473952"/>
+            <a:ext cx="7315200" cy="274320"/>
+          </a:xfrm>
+          <a:prstGeom prst="rect">
+            <a:avLst/>
+          </a:prstGeom>
+          <a:noFill/>
+          <a:ln/>
+        </p:spPr>
+        <p:txBody>
+          <a:bodyPr wrap="square" lIns="0" tIns="0" rIns="0" bIns="0" rtlCol="0" anchor="ctr"/>
+          <a:lstStyle/>
+          <a:p>
+            <a:pPr algn="l" indent="0" marL="0">
+              <a:buNone/>
+            </a:pPr>
+            <a:r>
+              <a:rPr lang="en-US" sz="900" dirty="0">
+                <a:solidFill>
+                  <a:srgbClr val="5B6B82"/>
+                </a:solidFill>
+                <a:latin typeface="Calibri" pitchFamily="34" charset="0"/>
+                <a:ea typeface="Calibri" pitchFamily="34" charset="-122"/>
+                <a:cs typeface="Calibri" pitchFamily="34" charset="-120"/>
+              </a:rPr>
               <a:t>GESTIÓN INTEGRAL DE RIESGOS  ·  COMEDICA DE R.L.</a:t>
             </a:r>
             <a:endParaRPr lang="en-US" sz="900" dirty="0"/>
@@ -18647,7 +19543,7 @@
       </p:sp>
       <p:sp>
         <p:nvSpPr>
-          <p:cNvPr id="32" name="Text 25"/>
+          <p:cNvPr id="38" name="Text 30"/>
           <p:cNvSpPr txBox="1"/>
           <p:nvPr/>
         </p:nvSpPr>
@@ -18689,6 +19585,327 @@
   <p:clrMapOvr>
     <a:masterClrMapping/>
   </p:clrMapOvr>
+  <p:timing>
+    <p:tnLst>
+      <p:par>
+        <p:cTn id="1" dur="indefinite" restart="never" nodeType="tmRoot">
+          <p:childTnLst>
+            <p:seq concurrent="1" nextAc="seek">
+              <p:cTn id="2" dur="indefinite" nodeType="mainSeq">
+                <p:childTnLst>
+                  <p:par>
+                    <p:cTn id="3" fill="hold">
+                      <p:stCondLst>
+                        <p:cond delay="indefinite"/>
+                      </p:stCondLst>
+                      <p:childTnLst>
+                        <p:par>
+                          <p:cTn id="4" presetID="2" presetClass="entr" presetSubtype="0" fill="hold" nodeType="clickEffect">
+                            <p:stCondLst>
+                              <p:cond delay="0"/>
+                            </p:stCondLst>
+                            <p:childTnLst>
+                              <p:set>
+                                <p:cBhvr>
+                                  <p:cTn id="5" dur="1" fill="hold">
+                                    <p:stCondLst>
+                                      <p:cond delay="0"/>
+                                    </p:stCondLst>
+                                  </p:cTn>
+                                  <p:tgtEl>
+                                    <p:spTgt spid="22"/>
+                                  </p:tgtEl>
+                                  <p:attrNameLst>
+                                    <p:attrName>style.visibility</p:attrName>
+                                  </p:attrNameLst>
+                                </p:cBhvr>
+                                <p:to>
+                                  <p:strVal val="visible"/>
+                                </p:to>
+                              </p:set>
+                              <p:set>
+                                <p:cBhvr>
+                                  <p:cTn id="6" dur="1" fill="hold">
+                                    <p:stCondLst>
+                                      <p:cond delay="0"/>
+                                    </p:stCondLst>
+                                  </p:cTn>
+                                  <p:tgtEl>
+                                    <p:spTgt spid="23"/>
+                                  </p:tgtEl>
+                                  <p:attrNameLst>
+                                    <p:attrName>style.visibility</p:attrName>
+                                  </p:attrNameLst>
+                                </p:cBhvr>
+                                <p:to>
+                                  <p:strVal val="visible"/>
+                                </p:to>
+                              </p:set>
+                              <p:set>
+                                <p:cBhvr>
+                                  <p:cTn id="7" dur="1" fill="hold">
+                                    <p:stCondLst>
+                                      <p:cond delay="0"/>
+                                    </p:stCondLst>
+                                  </p:cTn>
+                                  <p:tgtEl>
+                                    <p:spTgt spid="24"/>
+                                  </p:tgtEl>
+                                  <p:attrNameLst>
+                                    <p:attrName>style.visibility</p:attrName>
+                                  </p:attrNameLst>
+                                </p:cBhvr>
+                                <p:to>
+                                  <p:strVal val="visible"/>
+                                </p:to>
+                              </p:set>
+                              <p:set>
+                                <p:cBhvr>
+                                  <p:cTn id="8" dur="1" fill="hold">
+                                    <p:stCondLst>
+                                      <p:cond delay="0"/>
+                                    </p:stCondLst>
+                                  </p:cTn>
+                                  <p:tgtEl>
+                                    <p:spTgt spid="25"/>
+                                  </p:tgtEl>
+                                  <p:attrNameLst>
+                                    <p:attrName>style.visibility</p:attrName>
+                                  </p:attrNameLst>
+                                </p:cBhvr>
+                                <p:to>
+                                  <p:strVal val="visible"/>
+                                </p:to>
+                              </p:set>
+                              <p:set>
+                                <p:cBhvr>
+                                  <p:cTn id="9" dur="1" fill="hold">
+                                    <p:stCondLst>
+                                      <p:cond delay="0"/>
+                                    </p:stCondLst>
+                                  </p:cTn>
+                                  <p:tgtEl>
+                                    <p:spTgt spid="26"/>
+                                  </p:tgtEl>
+                                  <p:attrNameLst>
+                                    <p:attrName>style.visibility</p:attrName>
+                                  </p:attrNameLst>
+                                </p:cBhvr>
+                                <p:to>
+                                  <p:strVal val="visible"/>
+                                </p:to>
+                              </p:set>
+                              <p:set>
+                                <p:cBhvr>
+                                  <p:cTn id="10" dur="1" fill="hold">
+                                    <p:stCondLst>
+                                      <p:cond delay="0"/>
+                                    </p:stCondLst>
+                                  </p:cTn>
+                                  <p:tgtEl>
+                                    <p:spTgt spid="27"/>
+                                  </p:tgtEl>
+                                  <p:attrNameLst>
+                                    <p:attrName>style.visibility</p:attrName>
+                                  </p:attrNameLst>
+                                </p:cBhvr>
+                                <p:to>
+                                  <p:strVal val="visible"/>
+                                </p:to>
+                              </p:set>
+                              <p:set>
+                                <p:cBhvr>
+                                  <p:cTn id="11" dur="1" fill="hold">
+                                    <p:stCondLst>
+                                      <p:cond delay="0"/>
+                                    </p:stCondLst>
+                                  </p:cTn>
+                                  <p:tgtEl>
+                                    <p:spTgt spid="28"/>
+                                  </p:tgtEl>
+                                  <p:attrNameLst>
+                                    <p:attrName>style.visibility</p:attrName>
+                                  </p:attrNameLst>
+                                </p:cBhvr>
+                                <p:to>
+                                  <p:strVal val="visible"/>
+                                </p:to>
+                              </p:set>
+                              <p:set>
+                                <p:cBhvr>
+                                  <p:cTn id="12" dur="1" fill="hold">
+                                    <p:stCondLst>
+                                      <p:cond delay="0"/>
+                                    </p:stCondLst>
+                                  </p:cTn>
+                                  <p:tgtEl>
+                                    <p:spTgt spid="29"/>
+                                  </p:tgtEl>
+                                  <p:attrNameLst>
+                                    <p:attrName>style.visibility</p:attrName>
+                                  </p:attrNameLst>
+                                </p:cBhvr>
+                                <p:to>
+                                  <p:strVal val="visible"/>
+                                </p:to>
+                              </p:set>
+                              <p:set>
+                                <p:cBhvr>
+                                  <p:cTn id="13" dur="1" fill="hold">
+                                    <p:stCondLst>
+                                      <p:cond delay="0"/>
+                                    </p:stCondLst>
+                                  </p:cTn>
+                                  <p:tgtEl>
+                                    <p:spTgt spid="30"/>
+                                  </p:tgtEl>
+                                  <p:attrNameLst>
+                                    <p:attrName>style.visibility</p:attrName>
+                                  </p:attrNameLst>
+                                </p:cBhvr>
+                                <p:to>
+                                  <p:strVal val="visible"/>
+                                </p:to>
+                              </p:set>
+                              <p:set>
+                                <p:cBhvr>
+                                  <p:cTn id="14" dur="1" fill="hold">
+                                    <p:stCondLst>
+                                      <p:cond delay="0"/>
+                                    </p:stCondLst>
+                                  </p:cTn>
+                                  <p:tgtEl>
+                                    <p:spTgt spid="31"/>
+                                  </p:tgtEl>
+                                  <p:attrNameLst>
+                                    <p:attrName>style.visibility</p:attrName>
+                                  </p:attrNameLst>
+                                </p:cBhvr>
+                                <p:to>
+                                  <p:strVal val="visible"/>
+                                </p:to>
+                              </p:set>
+                              <p:set>
+                                <p:cBhvr>
+                                  <p:cTn id="15" dur="1" fill="hold">
+                                    <p:stCondLst>
+                                      <p:cond delay="0"/>
+                                    </p:stCondLst>
+                                  </p:cTn>
+                                  <p:tgtEl>
+                                    <p:spTgt spid="32"/>
+                                  </p:tgtEl>
+                                  <p:attrNameLst>
+                                    <p:attrName>style.visibility</p:attrName>
+                                  </p:attrNameLst>
+                                </p:cBhvr>
+                                <p:to>
+                                  <p:strVal val="visible"/>
+                                </p:to>
+                              </p:set>
+                              <p:set>
+                                <p:cBhvr>
+                                  <p:cTn id="16" dur="1" fill="hold">
+                                    <p:stCondLst>
+                                      <p:cond delay="0"/>
+                                    </p:stCondLst>
+                                  </p:cTn>
+                                  <p:tgtEl>
+                                    <p:spTgt spid="33"/>
+                                  </p:tgtEl>
+                                  <p:attrNameLst>
+                                    <p:attrName>style.visibility</p:attrName>
+                                  </p:attrNameLst>
+                                </p:cBhvr>
+                                <p:to>
+                                  <p:strVal val="visible"/>
+                                </p:to>
+                              </p:set>
+                              <p:set>
+                                <p:cBhvr>
+                                  <p:cTn id="17" dur="1" fill="hold">
+                                    <p:stCondLst>
+                                      <p:cond delay="0"/>
+                                    </p:stCondLst>
+                                  </p:cTn>
+                                  <p:tgtEl>
+                                    <p:spTgt spid="34"/>
+                                  </p:tgtEl>
+                                  <p:attrNameLst>
+                                    <p:attrName>style.visibility</p:attrName>
+                                  </p:attrNameLst>
+                                </p:cBhvr>
+                                <p:to>
+                                  <p:strVal val="visible"/>
+                                </p:to>
+                              </p:set>
+                              <p:set>
+                                <p:cBhvr>
+                                  <p:cTn id="18" dur="1" fill="hold">
+                                    <p:stCondLst>
+                                      <p:cond delay="0"/>
+                                    </p:stCondLst>
+                                  </p:cTn>
+                                  <p:tgtEl>
+                                    <p:spTgt spid="35"/>
+                                  </p:tgtEl>
+                                  <p:attrNameLst>
+                                    <p:attrName>style.visibility</p:attrName>
+                                  </p:attrNameLst>
+                                </p:cBhvr>
+                                <p:to>
+                                  <p:strVal val="visible"/>
+                                </p:to>
+                              </p:set>
+                              <p:set>
+                                <p:cBhvr>
+                                  <p:cTn id="19" dur="1" fill="hold">
+                                    <p:stCondLst>
+                                      <p:cond delay="0"/>
+                                    </p:stCondLst>
+                                  </p:cTn>
+                                  <p:tgtEl>
+                                    <p:spTgt spid="36"/>
+                                  </p:tgtEl>
+                                  <p:attrNameLst>
+                                    <p:attrName>style.visibility</p:attrName>
+                                  </p:attrNameLst>
+                                </p:cBhvr>
+                                <p:to>
+                                  <p:strVal val="visible"/>
+                                </p:to>
+                              </p:set>
+                            </p:childTnLst>
+                          </p:cTn>
+                        </p:par>
+                      </p:childTnLst>
+                    </p:cTn>
+                  </p:par>
+                </p:childTnLst>
+              </p:cTn>
+            </p:seq>
+          </p:childTnLst>
+        </p:cTn>
+      </p:par>
+    </p:tnLst>
+    <p:bldLst>
+      <p:bldP spid="22" grpId="0"/>
+      <p:bldP spid="23" grpId="0"/>
+      <p:bldP spid="24" grpId="0"/>
+      <p:bldP spid="25" grpId="0"/>
+      <p:bldP spid="26" grpId="0"/>
+      <p:bldP spid="27" grpId="0"/>
+      <p:bldP spid="28" grpId="0"/>
+      <p:bldP spid="29" grpId="0"/>
+      <p:bldP spid="30" grpId="0"/>
+      <p:bldP spid="31" grpId="0"/>
+      <p:bldP spid="32" grpId="0"/>
+      <p:bldP spid="33" grpId="0"/>
+      <p:bldP spid="34" grpId="0"/>
+      <p:bldP spid="35" grpId="0"/>
+      <p:bldP spid="36" grpId="0"/>
+    </p:bldLst>
+  </p:timing>
 </p:sld>
 </file>
 
@@ -19074,21 +20291,65 @@
         </p:nvSpPr>
         <p:spPr>
           <a:xfrm>
-            <a:off x="2102053" y="3456432"/>
-            <a:ext cx="457200" cy="457200"/>
+            <a:off x="4332122" y="3291840"/>
+            <a:ext cx="3527450" cy="2761488"/>
+          </a:xfrm>
+          <a:prstGeom prst="roundRect">
+            <a:avLst>
+              <a:gd name="adj" fmla="val 3311"/>
+            </a:avLst>
+          </a:prstGeom>
+          <a:solidFill>
+            <a:srgbClr val="F2F5F9"/>
+          </a:solidFill>
+          <a:ln/>
+        </p:spPr>
+      </p:sp>
+      <p:sp>
+        <p:nvSpPr>
+          <p:cNvPr id="15" name="Shape 11"/>
+          <p:cNvSpPr/>
+          <p:nvPr/>
+        </p:nvSpPr>
+        <p:spPr>
+          <a:xfrm>
+            <a:off x="8097317" y="3291840"/>
+            <a:ext cx="3527450" cy="2761488"/>
+          </a:xfrm>
+          <a:prstGeom prst="roundRect">
+            <a:avLst>
+              <a:gd name="adj" fmla="val 3311"/>
+            </a:avLst>
+          </a:prstGeom>
+          <a:solidFill>
+            <a:srgbClr val="F2F5F9"/>
+          </a:solidFill>
+          <a:ln/>
+        </p:spPr>
+      </p:sp>
+      <p:sp>
+        <p:nvSpPr>
+          <p:cNvPr id="16" name="Shape 12"/>
+          <p:cNvSpPr/>
+          <p:nvPr/>
+        </p:nvSpPr>
+        <p:spPr>
+          <a:xfrm>
+            <a:off x="5848960" y="3986784"/>
+            <a:ext cx="493776" cy="493776"/>
           </a:xfrm>
           <a:prstGeom prst="ellipse">
             <a:avLst/>
           </a:prstGeom>
           <a:solidFill>
-            <a:srgbClr val="2FAE60"/>
+            <a:srgbClr val="8FA0B5"/>
           </a:solidFill>
           <a:ln/>
         </p:spPr>
       </p:sp>
       <p:pic>
         <p:nvPicPr>
-          <p:cNvPr id="15" name="Image 1" descr="/tmp/claude-0/-home-user-riesgo/0ff9ff46-1396-5bd8-b3ac-2280dfbbbc55/scratchpad/work/gen/icons/check_circle_white.png">    </p:cNvPr>
+          <p:cNvPr id="17" name="Image 1" descr="/tmp/claude-0/-home-user-riesgo/0ff9ff46-1396-5bd8-b3ac-2280dfbbbc55/scratchpad/work/gen/icons/question_white.png">    </p:cNvPr>
           <p:cNvPicPr>
             <a:picLocks noChangeAspect="1"/>
           </p:cNvPicPr>
@@ -19102,8 +20363,8 @@
         </p:blipFill>
         <p:spPr>
           <a:xfrm>
-            <a:off x="2211781" y="3566160"/>
-            <a:ext cx="237744" cy="237744"/>
+            <a:off x="5960059" y="4097884"/>
+            <a:ext cx="271577" cy="271577"/>
           </a:xfrm>
           <a:prstGeom prst="rect">
             <a:avLst/>
@@ -19112,14 +20373,14 @@
       </p:pic>
       <p:sp>
         <p:nvSpPr>
-          <p:cNvPr id="16" name="Text 11"/>
-          <p:cNvSpPr txBox="1"/>
-          <p:nvPr/>
-        </p:nvSpPr>
-        <p:spPr>
-          <a:xfrm>
-            <a:off x="713232" y="4005072"/>
-            <a:ext cx="3234842" cy="384048"/>
+          <p:cNvPr id="18" name="Text 13"/>
+          <p:cNvSpPr txBox="1"/>
+          <p:nvPr/>
+        </p:nvSpPr>
+        <p:spPr>
+          <a:xfrm>
+            <a:off x="4469282" y="4599432"/>
+            <a:ext cx="3253130" cy="640080"/>
           </a:xfrm>
           <a:prstGeom prst="rect">
             <a:avLst/>
@@ -19132,74 +20393,55 @@
           <a:lstStyle/>
           <a:p>
             <a:pPr algn="ctr" indent="0" marL="0">
-              <a:buNone/>
-            </a:pPr>
-            <a:r>
-              <a:rPr lang="en-US" sz="1050" b="1" spc="30" kern="0" dirty="0">
-                <a:solidFill>
-                  <a:srgbClr val="2FAE60"/>
+              <a:lnSpc>
+                <a:spcPct val="120000"/>
+              </a:lnSpc>
+              <a:buNone/>
+            </a:pPr>
+            <a:r>
+              <a:rPr lang="en-US" sz="1150" i="1" dirty="0">
+                <a:solidFill>
+                  <a:srgbClr val="5B6B82"/>
                 </a:solidFill>
                 <a:latin typeface="Calibri" pitchFamily="34" charset="0"/>
                 <a:ea typeface="Calibri" pitchFamily="34" charset="-122"/>
                 <a:cs typeface="Calibri" pitchFamily="34" charset="-120"/>
               </a:rPr>
-              <a:t>ACCIÓN RECOMENDADA</a:t>
-            </a:r>
-            <a:endParaRPr lang="en-US" sz="1050" dirty="0"/>
-          </a:p>
-        </p:txBody>
-      </p:sp>
-      <p:sp>
-        <p:nvSpPr>
-          <p:cNvPr id="17" name="Text 12"/>
-          <p:cNvSpPr txBox="1"/>
-          <p:nvPr/>
-        </p:nvSpPr>
-        <p:spPr>
-          <a:xfrm>
-            <a:off x="749808" y="4407408"/>
-            <a:ext cx="3161690" cy="1536192"/>
-          </a:xfrm>
-          <a:prstGeom prst="rect">
-            <a:avLst/>
-          </a:prstGeom>
-          <a:noFill/>
-          <a:ln/>
-        </p:spPr>
-        <p:txBody>
-          <a:bodyPr wrap="square" lIns="0" tIns="0" rIns="0" bIns="0" rtlCol="0" anchor="ctr"/>
-          <a:lstStyle/>
+              <a:t>Da tiempo al grupo para discutir.</a:t>
+            </a:r>
+            <a:endParaRPr lang="en-US" sz="1150" dirty="0"/>
+          </a:p>
           <a:p>
             <a:pPr algn="ctr" indent="0" marL="0">
               <a:lnSpc>
-                <a:spcPct val="112000"/>
+                <a:spcPct val="120000"/>
               </a:lnSpc>
               <a:buNone/>
             </a:pPr>
             <a:r>
-              <a:rPr lang="en-US" sz="1080" dirty="0">
-                <a:solidFill>
-                  <a:srgbClr val="243044"/>
+              <a:rPr lang="en-US" sz="1150" i="1" dirty="0">
+                <a:solidFill>
+                  <a:srgbClr val="5B6B82"/>
                 </a:solidFill>
                 <a:latin typeface="Calibri" pitchFamily="34" charset="0"/>
                 <a:ea typeface="Calibri" pitchFamily="34" charset="-122"/>
                 <a:cs typeface="Calibri" pitchFamily="34" charset="-120"/>
               </a:rPr>
-              <a:t>Escuchar al asociado, brindar una atención oportuna y canalizar el caso a quien corresponde dentro de la Cooperativa.</a:t>
-            </a:r>
-            <a:endParaRPr lang="en-US" sz="1080" dirty="0"/>
-          </a:p>
-        </p:txBody>
-      </p:sp>
-      <p:sp>
-        <p:nvSpPr>
-          <p:cNvPr id="18" name="Shape 13"/>
+              <a:t>Haz clic para revelar la respuesta.</a:t>
+            </a:r>
+            <a:endParaRPr lang="en-US" sz="1150" dirty="0"/>
+          </a:p>
+        </p:txBody>
+      </p:sp>
+      <p:sp>
+        <p:nvSpPr>
+          <p:cNvPr id="19" name="REVEAL_case2_0_bg"/>
           <p:cNvSpPr/>
           <p:nvPr/>
         </p:nvSpPr>
         <p:spPr>
           <a:xfrm>
-            <a:off x="4332122" y="3291840"/>
+            <a:off x="566928" y="3291840"/>
             <a:ext cx="3527450" cy="2761488"/>
           </a:xfrm>
           <a:prstGeom prst="roundRect">
@@ -19215,27 +20457,27 @@
       </p:sp>
       <p:sp>
         <p:nvSpPr>
-          <p:cNvPr id="19" name="Shape 14"/>
+          <p:cNvPr id="20" name="REVEAL_case2_0_ic"/>
           <p:cNvSpPr/>
           <p:nvPr/>
         </p:nvSpPr>
         <p:spPr>
           <a:xfrm>
-            <a:off x="5867248" y="3456432"/>
+            <a:off x="2102053" y="3456432"/>
             <a:ext cx="457200" cy="457200"/>
           </a:xfrm>
           <a:prstGeom prst="ellipse">
             <a:avLst/>
           </a:prstGeom>
           <a:solidFill>
-            <a:srgbClr val="133B6C"/>
+            <a:srgbClr val="2FAE60"/>
           </a:solidFill>
           <a:ln/>
         </p:spPr>
       </p:sp>
       <p:pic>
         <p:nvPicPr>
-          <p:cNvPr id="20" name="Image 2" descr="/tmp/claude-0/-home-user-riesgo/0ff9ff46-1396-5bd8-b3ac-2280dfbbbc55/scratchpad/work/gen/icons/people_group_white.png">    </p:cNvPr>
+          <p:cNvPr id="21" name="REVEAL_case2_0_ic_ic" descr="/tmp/claude-0/-home-user-riesgo/0ff9ff46-1396-5bd8-b3ac-2280dfbbbc55/scratchpad/work/gen/icons/check_circle_white.png">    </p:cNvPr>
           <p:cNvPicPr>
             <a:picLocks noChangeAspect="1"/>
           </p:cNvPicPr>
@@ -19249,7 +20491,7 @@
         </p:blipFill>
         <p:spPr>
           <a:xfrm>
-            <a:off x="5976976" y="3566160"/>
+            <a:off x="2211781" y="3566160"/>
             <a:ext cx="237744" cy="237744"/>
           </a:xfrm>
           <a:prstGeom prst="rect">
@@ -19259,13 +20501,13 @@
       </p:pic>
       <p:sp>
         <p:nvSpPr>
-          <p:cNvPr id="21" name="Text 15"/>
-          <p:cNvSpPr txBox="1"/>
-          <p:nvPr/>
-        </p:nvSpPr>
-        <p:spPr>
-          <a:xfrm>
-            <a:off x="4478426" y="4005072"/>
+          <p:cNvPr id="22" name="REVEAL_case2_0_lbl"/>
+          <p:cNvSpPr txBox="1"/>
+          <p:nvPr/>
+        </p:nvSpPr>
+        <p:spPr>
+          <a:xfrm>
+            <a:off x="713232" y="4005072"/>
             <a:ext cx="3234842" cy="384048"/>
           </a:xfrm>
           <a:prstGeom prst="rect">
@@ -19284,13 +20526,13 @@
             <a:r>
               <a:rPr lang="en-US" sz="1050" b="1" spc="30" kern="0" dirty="0">
                 <a:solidFill>
-                  <a:srgbClr val="133B6C"/>
+                  <a:srgbClr val="2FAE60"/>
                 </a:solidFill>
                 <a:latin typeface="Calibri" pitchFamily="34" charset="0"/>
                 <a:ea typeface="Calibri" pitchFamily="34" charset="-122"/>
                 <a:cs typeface="Calibri" pitchFamily="34" charset="-120"/>
               </a:rPr>
-              <a:t>RESPONSABLE DE ACTUAR</a:t>
+              <a:t>ACCIÓN RECOMENDADA</a:t>
             </a:r>
             <a:endParaRPr lang="en-US" sz="1050" dirty="0"/>
           </a:p>
@@ -19298,13 +20540,13 @@
       </p:sp>
       <p:sp>
         <p:nvSpPr>
-          <p:cNvPr id="22" name="Text 16"/>
-          <p:cNvSpPr txBox="1"/>
-          <p:nvPr/>
-        </p:nvSpPr>
-        <p:spPr>
-          <a:xfrm>
-            <a:off x="4515002" y="4407408"/>
+          <p:cNvPr id="23" name="REVEAL_case2_0_txt"/>
+          <p:cNvSpPr txBox="1"/>
+          <p:nvPr/>
+        </p:nvSpPr>
+        <p:spPr>
+          <a:xfrm>
+            <a:off x="749808" y="4407408"/>
             <a:ext cx="3161690" cy="1536192"/>
           </a:xfrm>
           <a:prstGeom prst="rect">
@@ -19332,7 +20574,7 @@
                 <a:ea typeface="Calibri" pitchFamily="34" charset="-122"/>
                 <a:cs typeface="Calibri" pitchFamily="34" charset="-120"/>
               </a:rPr>
-              <a:t>El colaborador que atiende al asociado, con apoyo de su jefatura ante situaciones que lo requieran.</a:t>
+              <a:t>Escuchar al asociado, brindar una atención oportuna y canalizar el caso a quien corresponde dentro de la Cooperativa.</a:t>
             </a:r>
             <a:endParaRPr lang="en-US" sz="1080" dirty="0"/>
           </a:p>
@@ -19340,13 +20582,13 @@
       </p:sp>
       <p:sp>
         <p:nvSpPr>
-          <p:cNvPr id="23" name="Shape 17"/>
+          <p:cNvPr id="24" name="REVEAL_case2_1_bg"/>
           <p:cNvSpPr/>
           <p:nvPr/>
         </p:nvSpPr>
         <p:spPr>
           <a:xfrm>
-            <a:off x="8097317" y="3291840"/>
+            <a:off x="4332122" y="3291840"/>
             <a:ext cx="3527450" cy="2761488"/>
           </a:xfrm>
           <a:prstGeom prst="roundRect">
@@ -19362,27 +20604,27 @@
       </p:sp>
       <p:sp>
         <p:nvSpPr>
-          <p:cNvPr id="24" name="Shape 18"/>
+          <p:cNvPr id="25" name="REVEAL_case2_1_ic"/>
           <p:cNvSpPr/>
           <p:nvPr/>
         </p:nvSpPr>
         <p:spPr>
           <a:xfrm>
-            <a:off x="9632442" y="3456432"/>
+            <a:off x="5867248" y="3456432"/>
             <a:ext cx="457200" cy="457200"/>
           </a:xfrm>
           <a:prstGeom prst="ellipse">
             <a:avLst/>
           </a:prstGeom>
           <a:solidFill>
-            <a:srgbClr val="E0392B"/>
+            <a:srgbClr val="133B6C"/>
           </a:solidFill>
           <a:ln/>
         </p:spPr>
       </p:sp>
       <p:pic>
         <p:nvPicPr>
-          <p:cNvPr id="25" name="Image 3" descr="/tmp/claude-0/-home-user-riesgo/0ff9ff46-1396-5bd8-b3ac-2280dfbbbc55/scratchpad/work/gen/icons/warning_triangle_white.png">    </p:cNvPr>
+          <p:cNvPr id="26" name="REVEAL_case2_1_ic_ic" descr="/tmp/claude-0/-home-user-riesgo/0ff9ff46-1396-5bd8-b3ac-2280dfbbbc55/scratchpad/work/gen/icons/people_group_white.png">    </p:cNvPr>
           <p:cNvPicPr>
             <a:picLocks noChangeAspect="1"/>
           </p:cNvPicPr>
@@ -19396,7 +20638,7 @@
         </p:blipFill>
         <p:spPr>
           <a:xfrm>
-            <a:off x="9742170" y="3566160"/>
+            <a:off x="5976976" y="3566160"/>
             <a:ext cx="237744" cy="237744"/>
           </a:xfrm>
           <a:prstGeom prst="rect">
@@ -19406,13 +20648,13 @@
       </p:pic>
       <p:sp>
         <p:nvSpPr>
-          <p:cNvPr id="26" name="Text 19"/>
-          <p:cNvSpPr txBox="1"/>
-          <p:nvPr/>
-        </p:nvSpPr>
-        <p:spPr>
-          <a:xfrm>
-            <a:off x="8243621" y="4005072"/>
+          <p:cNvPr id="27" name="REVEAL_case2_1_lbl"/>
+          <p:cNvSpPr txBox="1"/>
+          <p:nvPr/>
+        </p:nvSpPr>
+        <p:spPr>
+          <a:xfrm>
+            <a:off x="4478426" y="4005072"/>
             <a:ext cx="3234842" cy="384048"/>
           </a:xfrm>
           <a:prstGeom prst="rect">
@@ -19431,13 +20673,13 @@
             <a:r>
               <a:rPr lang="en-US" sz="1050" b="1" spc="30" kern="0" dirty="0">
                 <a:solidFill>
-                  <a:srgbClr val="E0392B"/>
+                  <a:srgbClr val="133B6C"/>
                 </a:solidFill>
                 <a:latin typeface="Calibri" pitchFamily="34" charset="0"/>
                 <a:ea typeface="Calibri" pitchFamily="34" charset="-122"/>
                 <a:cs typeface="Calibri" pitchFamily="34" charset="-120"/>
               </a:rPr>
-              <a:t>SI NO ACTUAMOS</a:t>
+              <a:t>RESPONSABLE DE ACTUAR</a:t>
             </a:r>
             <a:endParaRPr lang="en-US" sz="1050" dirty="0"/>
           </a:p>
@@ -19445,13 +20687,13 @@
       </p:sp>
       <p:sp>
         <p:nvSpPr>
-          <p:cNvPr id="27" name="Text 20"/>
-          <p:cNvSpPr txBox="1"/>
-          <p:nvPr/>
-        </p:nvSpPr>
-        <p:spPr>
-          <a:xfrm>
-            <a:off x="8280197" y="4407408"/>
+          <p:cNvPr id="28" name="REVEAL_case2_1_txt"/>
+          <p:cNvSpPr txBox="1"/>
+          <p:nvPr/>
+        </p:nvSpPr>
+        <p:spPr>
+          <a:xfrm>
+            <a:off x="4515002" y="4407408"/>
             <a:ext cx="3161690" cy="1536192"/>
           </a:xfrm>
           <a:prstGeom prst="rect">
@@ -19479,7 +20721,7 @@
                 <a:ea typeface="Calibri" pitchFamily="34" charset="-122"/>
                 <a:cs typeface="Calibri" pitchFamily="34" charset="-120"/>
               </a:rPr>
-              <a:t>La queja gana más visibilidad y erosiona la confianza de otros asociados y de la comunidad.</a:t>
+              <a:t>El colaborador que atiende al asociado, con apoyo de su jefatura ante situaciones que lo requieran.</a:t>
             </a:r>
             <a:endParaRPr lang="en-US" sz="1080" dirty="0"/>
           </a:p>
@@ -19487,14 +20729,80 @@
       </p:sp>
       <p:sp>
         <p:nvSpPr>
-          <p:cNvPr id="28" name="Text 21"/>
-          <p:cNvSpPr txBox="1"/>
-          <p:nvPr/>
-        </p:nvSpPr>
-        <p:spPr>
-          <a:xfrm>
-            <a:off x="566928" y="6473952"/>
-            <a:ext cx="7315200" cy="274320"/>
+          <p:cNvPr id="29" name="REVEAL_case2_2_bg"/>
+          <p:cNvSpPr/>
+          <p:nvPr/>
+        </p:nvSpPr>
+        <p:spPr>
+          <a:xfrm>
+            <a:off x="8097317" y="3291840"/>
+            <a:ext cx="3527450" cy="2761488"/>
+          </a:xfrm>
+          <a:prstGeom prst="roundRect">
+            <a:avLst>
+              <a:gd name="adj" fmla="val 3311"/>
+            </a:avLst>
+          </a:prstGeom>
+          <a:solidFill>
+            <a:srgbClr val="F2F5F9"/>
+          </a:solidFill>
+          <a:ln/>
+        </p:spPr>
+      </p:sp>
+      <p:sp>
+        <p:nvSpPr>
+          <p:cNvPr id="30" name="REVEAL_case2_2_ic"/>
+          <p:cNvSpPr/>
+          <p:nvPr/>
+        </p:nvSpPr>
+        <p:spPr>
+          <a:xfrm>
+            <a:off x="9632442" y="3456432"/>
+            <a:ext cx="457200" cy="457200"/>
+          </a:xfrm>
+          <a:prstGeom prst="ellipse">
+            <a:avLst/>
+          </a:prstGeom>
+          <a:solidFill>
+            <a:srgbClr val="E0392B"/>
+          </a:solidFill>
+          <a:ln/>
+        </p:spPr>
+      </p:sp>
+      <p:pic>
+        <p:nvPicPr>
+          <p:cNvPr id="31" name="REVEAL_case2_2_ic_ic" descr="/tmp/claude-0/-home-user-riesgo/0ff9ff46-1396-5bd8-b3ac-2280dfbbbc55/scratchpad/work/gen/icons/warning_triangle_white.png">    </p:cNvPr>
+          <p:cNvPicPr>
+            <a:picLocks noChangeAspect="1"/>
+          </p:cNvPicPr>
+          <p:nvPr/>
+        </p:nvPicPr>
+        <p:blipFill>
+          <a:blip r:embed="rId5"/>
+          <a:stretch>
+            <a:fillRect/>
+          </a:stretch>
+        </p:blipFill>
+        <p:spPr>
+          <a:xfrm>
+            <a:off x="9742170" y="3566160"/>
+            <a:ext cx="237744" cy="237744"/>
+          </a:xfrm>
+          <a:prstGeom prst="rect">
+            <a:avLst/>
+          </a:prstGeom>
+        </p:spPr>
+      </p:pic>
+      <p:sp>
+        <p:nvSpPr>
+          <p:cNvPr id="32" name="REVEAL_case2_2_lbl"/>
+          <p:cNvSpPr txBox="1"/>
+          <p:nvPr/>
+        </p:nvSpPr>
+        <p:spPr>
+          <a:xfrm>
+            <a:off x="8243621" y="4005072"/>
+            <a:ext cx="3234842" cy="384048"/>
           </a:xfrm>
           <a:prstGeom prst="rect">
             <a:avLst/>
@@ -19506,18 +20814,99 @@
           <a:bodyPr wrap="square" lIns="0" tIns="0" rIns="0" bIns="0" rtlCol="0" anchor="ctr"/>
           <a:lstStyle/>
           <a:p>
-            <a:pPr algn="l" indent="0" marL="0">
-              <a:buNone/>
-            </a:pPr>
-            <a:r>
-              <a:rPr lang="en-US" sz="900" dirty="0">
-                <a:solidFill>
-                  <a:srgbClr val="5B6B82"/>
+            <a:pPr algn="ctr" indent="0" marL="0">
+              <a:buNone/>
+            </a:pPr>
+            <a:r>
+              <a:rPr lang="en-US" sz="1050" b="1" spc="30" kern="0" dirty="0">
+                <a:solidFill>
+                  <a:srgbClr val="E0392B"/>
                 </a:solidFill>
                 <a:latin typeface="Calibri" pitchFamily="34" charset="0"/>
                 <a:ea typeface="Calibri" pitchFamily="34" charset="-122"/>
                 <a:cs typeface="Calibri" pitchFamily="34" charset="-120"/>
               </a:rPr>
+              <a:t>SI NO ACTUAMOS</a:t>
+            </a:r>
+            <a:endParaRPr lang="en-US" sz="1050" dirty="0"/>
+          </a:p>
+        </p:txBody>
+      </p:sp>
+      <p:sp>
+        <p:nvSpPr>
+          <p:cNvPr id="33" name="REVEAL_case2_2_txt"/>
+          <p:cNvSpPr txBox="1"/>
+          <p:nvPr/>
+        </p:nvSpPr>
+        <p:spPr>
+          <a:xfrm>
+            <a:off x="8280197" y="4407408"/>
+            <a:ext cx="3161690" cy="1536192"/>
+          </a:xfrm>
+          <a:prstGeom prst="rect">
+            <a:avLst/>
+          </a:prstGeom>
+          <a:noFill/>
+          <a:ln/>
+        </p:spPr>
+        <p:txBody>
+          <a:bodyPr wrap="square" lIns="0" tIns="0" rIns="0" bIns="0" rtlCol="0" anchor="ctr"/>
+          <a:lstStyle/>
+          <a:p>
+            <a:pPr algn="ctr" indent="0" marL="0">
+              <a:lnSpc>
+                <a:spcPct val="112000"/>
+              </a:lnSpc>
+              <a:buNone/>
+            </a:pPr>
+            <a:r>
+              <a:rPr lang="en-US" sz="1080" dirty="0">
+                <a:solidFill>
+                  <a:srgbClr val="243044"/>
+                </a:solidFill>
+                <a:latin typeface="Calibri" pitchFamily="34" charset="0"/>
+                <a:ea typeface="Calibri" pitchFamily="34" charset="-122"/>
+                <a:cs typeface="Calibri" pitchFamily="34" charset="-120"/>
+              </a:rPr>
+              <a:t>La queja gana más visibilidad y erosiona la confianza de otros asociados y de la comunidad.</a:t>
+            </a:r>
+            <a:endParaRPr lang="en-US" sz="1080" dirty="0"/>
+          </a:p>
+        </p:txBody>
+      </p:sp>
+      <p:sp>
+        <p:nvSpPr>
+          <p:cNvPr id="34" name="Text 26"/>
+          <p:cNvSpPr txBox="1"/>
+          <p:nvPr/>
+        </p:nvSpPr>
+        <p:spPr>
+          <a:xfrm>
+            <a:off x="566928" y="6473952"/>
+            <a:ext cx="7315200" cy="274320"/>
+          </a:xfrm>
+          <a:prstGeom prst="rect">
+            <a:avLst/>
+          </a:prstGeom>
+          <a:noFill/>
+          <a:ln/>
+        </p:spPr>
+        <p:txBody>
+          <a:bodyPr wrap="square" lIns="0" tIns="0" rIns="0" bIns="0" rtlCol="0" anchor="ctr"/>
+          <a:lstStyle/>
+          <a:p>
+            <a:pPr algn="l" indent="0" marL="0">
+              <a:buNone/>
+            </a:pPr>
+            <a:r>
+              <a:rPr lang="en-US" sz="900" dirty="0">
+                <a:solidFill>
+                  <a:srgbClr val="5B6B82"/>
+                </a:solidFill>
+                <a:latin typeface="Calibri" pitchFamily="34" charset="0"/>
+                <a:ea typeface="Calibri" pitchFamily="34" charset="-122"/>
+                <a:cs typeface="Calibri" pitchFamily="34" charset="-120"/>
+              </a:rPr>
               <a:t>GESTIÓN INTEGRAL DE RIESGOS  ·  COMEDICA DE R.L.</a:t>
             </a:r>
             <a:endParaRPr lang="en-US" sz="900" dirty="0"/>
@@ -19526,7 +20915,7 @@
       </p:sp>
       <p:sp>
         <p:nvSpPr>
-          <p:cNvPr id="29" name="Text 22"/>
+          <p:cNvPr id="35" name="Text 27"/>
           <p:cNvSpPr txBox="1"/>
           <p:nvPr/>
         </p:nvSpPr>
@@ -19568,6 +20957,327 @@
   <p:clrMapOvr>
     <a:masterClrMapping/>
   </p:clrMapOvr>
+  <p:timing>
+    <p:tnLst>
+      <p:par>
+        <p:cTn id="1" dur="indefinite" restart="never" nodeType="tmRoot">
+          <p:childTnLst>
+            <p:seq concurrent="1" nextAc="seek">
+              <p:cTn id="2" dur="indefinite" nodeType="mainSeq">
+                <p:childTnLst>
+                  <p:par>
+                    <p:cTn id="3" fill="hold">
+                      <p:stCondLst>
+                        <p:cond delay="indefinite"/>
+                      </p:stCondLst>
+                      <p:childTnLst>
+                        <p:par>
+                          <p:cTn id="4" presetID="2" presetClass="entr" presetSubtype="0" fill="hold" nodeType="clickEffect">
+                            <p:stCondLst>
+                              <p:cond delay="0"/>
+                            </p:stCondLst>
+                            <p:childTnLst>
+                              <p:set>
+                                <p:cBhvr>
+                                  <p:cTn id="5" dur="1" fill="hold">
+                                    <p:stCondLst>
+                                      <p:cond delay="0"/>
+                                    </p:stCondLst>
+                                  </p:cTn>
+                                  <p:tgtEl>
+                                    <p:spTgt spid="19"/>
+                                  </p:tgtEl>
+                                  <p:attrNameLst>
+                                    <p:attrName>style.visibility</p:attrName>
+                                  </p:attrNameLst>
+                                </p:cBhvr>
+                                <p:to>
+                                  <p:strVal val="visible"/>
+                                </p:to>
+                              </p:set>
+                              <p:set>
+                                <p:cBhvr>
+                                  <p:cTn id="6" dur="1" fill="hold">
+                                    <p:stCondLst>
+                                      <p:cond delay="0"/>
+                                    </p:stCondLst>
+                                  </p:cTn>
+                                  <p:tgtEl>
+                                    <p:spTgt spid="20"/>
+                                  </p:tgtEl>
+                                  <p:attrNameLst>
+                                    <p:attrName>style.visibility</p:attrName>
+                                  </p:attrNameLst>
+                                </p:cBhvr>
+                                <p:to>
+                                  <p:strVal val="visible"/>
+                                </p:to>
+                              </p:set>
+                              <p:set>
+                                <p:cBhvr>
+                                  <p:cTn id="7" dur="1" fill="hold">
+                                    <p:stCondLst>
+                                      <p:cond delay="0"/>
+                                    </p:stCondLst>
+                                  </p:cTn>
+                                  <p:tgtEl>
+                                    <p:spTgt spid="21"/>
+                                  </p:tgtEl>
+                                  <p:attrNameLst>
+                                    <p:attrName>style.visibility</p:attrName>
+                                  </p:attrNameLst>
+                                </p:cBhvr>
+                                <p:to>
+                                  <p:strVal val="visible"/>
+                                </p:to>
+                              </p:set>
+                              <p:set>
+                                <p:cBhvr>
+                                  <p:cTn id="8" dur="1" fill="hold">
+                                    <p:stCondLst>
+                                      <p:cond delay="0"/>
+                                    </p:stCondLst>
+                                  </p:cTn>
+                                  <p:tgtEl>
+                                    <p:spTgt spid="22"/>
+                                  </p:tgtEl>
+                                  <p:attrNameLst>
+                                    <p:attrName>style.visibility</p:attrName>
+                                  </p:attrNameLst>
+                                </p:cBhvr>
+                                <p:to>
+                                  <p:strVal val="visible"/>
+                                </p:to>
+                              </p:set>
+                              <p:set>
+                                <p:cBhvr>
+                                  <p:cTn id="9" dur="1" fill="hold">
+                                    <p:stCondLst>
+                                      <p:cond delay="0"/>
+                                    </p:stCondLst>
+                                  </p:cTn>
+                                  <p:tgtEl>
+                                    <p:spTgt spid="23"/>
+                                  </p:tgtEl>
+                                  <p:attrNameLst>
+                                    <p:attrName>style.visibility</p:attrName>
+                                  </p:attrNameLst>
+                                </p:cBhvr>
+                                <p:to>
+                                  <p:strVal val="visible"/>
+                                </p:to>
+                              </p:set>
+                              <p:set>
+                                <p:cBhvr>
+                                  <p:cTn id="10" dur="1" fill="hold">
+                                    <p:stCondLst>
+                                      <p:cond delay="0"/>
+                                    </p:stCondLst>
+                                  </p:cTn>
+                                  <p:tgtEl>
+                                    <p:spTgt spid="24"/>
+                                  </p:tgtEl>
+                                  <p:attrNameLst>
+                                    <p:attrName>style.visibility</p:attrName>
+                                  </p:attrNameLst>
+                                </p:cBhvr>
+                                <p:to>
+                                  <p:strVal val="visible"/>
+                                </p:to>
+                              </p:set>
+                              <p:set>
+                                <p:cBhvr>
+                                  <p:cTn id="11" dur="1" fill="hold">
+                                    <p:stCondLst>
+                                      <p:cond delay="0"/>
+                                    </p:stCondLst>
+                                  </p:cTn>
+                                  <p:tgtEl>
+                                    <p:spTgt spid="25"/>
+                                  </p:tgtEl>
+                                  <p:attrNameLst>
+                                    <p:attrName>style.visibility</p:attrName>
+                                  </p:attrNameLst>
+                                </p:cBhvr>
+                                <p:to>
+                                  <p:strVal val="visible"/>
+                                </p:to>
+                              </p:set>
+                              <p:set>
+                                <p:cBhvr>
+                                  <p:cTn id="12" dur="1" fill="hold">
+                                    <p:stCondLst>
+                                      <p:cond delay="0"/>
+                                    </p:stCondLst>
+                                  </p:cTn>
+                                  <p:tgtEl>
+                                    <p:spTgt spid="26"/>
+                                  </p:tgtEl>
+                                  <p:attrNameLst>
+                                    <p:attrName>style.visibility</p:attrName>
+                                  </p:attrNameLst>
+                                </p:cBhvr>
+                                <p:to>
+                                  <p:strVal val="visible"/>
+                                </p:to>
+                              </p:set>
+                              <p:set>
+                                <p:cBhvr>
+                                  <p:cTn id="13" dur="1" fill="hold">
+                                    <p:stCondLst>
+                                      <p:cond delay="0"/>
+                                    </p:stCondLst>
+                                  </p:cTn>
+                                  <p:tgtEl>
+                                    <p:spTgt spid="27"/>
+                                  </p:tgtEl>
+                                  <p:attrNameLst>
+                                    <p:attrName>style.visibility</p:attrName>
+                                  </p:attrNameLst>
+                                </p:cBhvr>
+                                <p:to>
+                                  <p:strVal val="visible"/>
+                                </p:to>
+                              </p:set>
+                              <p:set>
+                                <p:cBhvr>
+                                  <p:cTn id="14" dur="1" fill="hold">
+                                    <p:stCondLst>
+                                      <p:cond delay="0"/>
+                                    </p:stCondLst>
+                                  </p:cTn>
+                                  <p:tgtEl>
+                                    <p:spTgt spid="28"/>
+                                  </p:tgtEl>
+                                  <p:attrNameLst>
+                                    <p:attrName>style.visibility</p:attrName>
+                                  </p:attrNameLst>
+                                </p:cBhvr>
+                                <p:to>
+                                  <p:strVal val="visible"/>
+                                </p:to>
+                              </p:set>
+                              <p:set>
+                                <p:cBhvr>
+                                  <p:cTn id="15" dur="1" fill="hold">
+                                    <p:stCondLst>
+                                      <p:cond delay="0"/>
+                                    </p:stCondLst>
+                                  </p:cTn>
+                                  <p:tgtEl>
+                                    <p:spTgt spid="29"/>
+                                  </p:tgtEl>
+                                  <p:attrNameLst>
+                                    <p:attrName>style.visibility</p:attrName>
+                                  </p:attrNameLst>
+                                </p:cBhvr>
+                                <p:to>
+                                  <p:strVal val="visible"/>
+                                </p:to>
+                              </p:set>
+                              <p:set>
+                                <p:cBhvr>
+                                  <p:cTn id="16" dur="1" fill="hold">
+                                    <p:stCondLst>
+                                      <p:cond delay="0"/>
+                                    </p:stCondLst>
+                                  </p:cTn>
+                                  <p:tgtEl>
+                                    <p:spTgt spid="30"/>
+                                  </p:tgtEl>
+                                  <p:attrNameLst>
+                                    <p:attrName>style.visibility</p:attrName>
+                                  </p:attrNameLst>
+                                </p:cBhvr>
+                                <p:to>
+                                  <p:strVal val="visible"/>
+                                </p:to>
+                              </p:set>
+                              <p:set>
+                                <p:cBhvr>
+                                  <p:cTn id="17" dur="1" fill="hold">
+                                    <p:stCondLst>
+                                      <p:cond delay="0"/>
+                                    </p:stCondLst>
+                                  </p:cTn>
+                                  <p:tgtEl>
+                                    <p:spTgt spid="31"/>
+                                  </p:tgtEl>
+                                  <p:attrNameLst>
+                                    <p:attrName>style.visibility</p:attrName>
+                                  </p:attrNameLst>
+                                </p:cBhvr>
+                                <p:to>
+                                  <p:strVal val="visible"/>
+                                </p:to>
+                              </p:set>
+                              <p:set>
+                                <p:cBhvr>
+                                  <p:cTn id="18" dur="1" fill="hold">
+                                    <p:stCondLst>
+                                      <p:cond delay="0"/>
+                                    </p:stCondLst>
+                                  </p:cTn>
+                                  <p:tgtEl>
+                                    <p:spTgt spid="32"/>
+                                  </p:tgtEl>
+                                  <p:attrNameLst>
+                                    <p:attrName>style.visibility</p:attrName>
+                                  </p:attrNameLst>
+                                </p:cBhvr>
+                                <p:to>
+                                  <p:strVal val="visible"/>
+                                </p:to>
+                              </p:set>
+                              <p:set>
+                                <p:cBhvr>
+                                  <p:cTn id="19" dur="1" fill="hold">
+                                    <p:stCondLst>
+                                      <p:cond delay="0"/>
+                                    </p:stCondLst>
+                                  </p:cTn>
+                                  <p:tgtEl>
+                                    <p:spTgt spid="33"/>
+                                  </p:tgtEl>
+                                  <p:attrNameLst>
+                                    <p:attrName>style.visibility</p:attrName>
+                                  </p:attrNameLst>
+                                </p:cBhvr>
+                                <p:to>
+                                  <p:strVal val="visible"/>
+                                </p:to>
+                              </p:set>
+                            </p:childTnLst>
+                          </p:cTn>
+                        </p:par>
+                      </p:childTnLst>
+                    </p:cTn>
+                  </p:par>
+                </p:childTnLst>
+              </p:cTn>
+            </p:seq>
+          </p:childTnLst>
+        </p:cTn>
+      </p:par>
+    </p:tnLst>
+    <p:bldLst>
+      <p:bldP spid="19" grpId="0"/>
+      <p:bldP spid="20" grpId="0"/>
+      <p:bldP spid="21" grpId="0"/>
+      <p:bldP spid="22" grpId="0"/>
+      <p:bldP spid="23" grpId="0"/>
+      <p:bldP spid="24" grpId="0"/>
+      <p:bldP spid="25" grpId="0"/>
+      <p:bldP spid="26" grpId="0"/>
+      <p:bldP spid="27" grpId="0"/>
+      <p:bldP spid="28" grpId="0"/>
+      <p:bldP spid="29" grpId="0"/>
+      <p:bldP spid="30" grpId="0"/>
+      <p:bldP spid="31" grpId="0"/>
+      <p:bldP spid="32" grpId="0"/>
+      <p:bldP spid="33" grpId="0"/>
+    </p:bldLst>
+  </p:timing>
 </p:sld>
 </file>
 
@@ -20014,21 +21724,65 @@
         </p:nvSpPr>
         <p:spPr>
           <a:xfrm>
-            <a:off x="2102053" y="3456432"/>
-            <a:ext cx="457200" cy="457200"/>
+            <a:off x="4332122" y="3291840"/>
+            <a:ext cx="3527450" cy="2761488"/>
+          </a:xfrm>
+          <a:prstGeom prst="roundRect">
+            <a:avLst>
+              <a:gd name="adj" fmla="val 3311"/>
+            </a:avLst>
+          </a:prstGeom>
+          <a:solidFill>
+            <a:srgbClr val="F2F5F9"/>
+          </a:solidFill>
+          <a:ln/>
+        </p:spPr>
+      </p:sp>
+      <p:sp>
+        <p:nvSpPr>
+          <p:cNvPr id="17" name="Shape 13"/>
+          <p:cNvSpPr/>
+          <p:nvPr/>
+        </p:nvSpPr>
+        <p:spPr>
+          <a:xfrm>
+            <a:off x="8097317" y="3291840"/>
+            <a:ext cx="3527450" cy="2761488"/>
+          </a:xfrm>
+          <a:prstGeom prst="roundRect">
+            <a:avLst>
+              <a:gd name="adj" fmla="val 3311"/>
+            </a:avLst>
+          </a:prstGeom>
+          <a:solidFill>
+            <a:srgbClr val="F2F5F9"/>
+          </a:solidFill>
+          <a:ln/>
+        </p:spPr>
+      </p:sp>
+      <p:sp>
+        <p:nvSpPr>
+          <p:cNvPr id="18" name="Shape 14"/>
+          <p:cNvSpPr/>
+          <p:nvPr/>
+        </p:nvSpPr>
+        <p:spPr>
+          <a:xfrm>
+            <a:off x="5848960" y="3986784"/>
+            <a:ext cx="493776" cy="493776"/>
           </a:xfrm>
           <a:prstGeom prst="ellipse">
             <a:avLst/>
           </a:prstGeom>
           <a:solidFill>
-            <a:srgbClr val="2FAE60"/>
+            <a:srgbClr val="8FA0B5"/>
           </a:solidFill>
           <a:ln/>
         </p:spPr>
       </p:sp>
       <p:pic>
         <p:nvPicPr>
-          <p:cNvPr id="17" name="Image 1" descr="/tmp/claude-0/-home-user-riesgo/0ff9ff46-1396-5bd8-b3ac-2280dfbbbc55/scratchpad/work/gen/icons/check_circle_white.png">    </p:cNvPr>
+          <p:cNvPr id="19" name="Image 1" descr="/tmp/claude-0/-home-user-riesgo/0ff9ff46-1396-5bd8-b3ac-2280dfbbbc55/scratchpad/work/gen/icons/question_white.png">    </p:cNvPr>
           <p:cNvPicPr>
             <a:picLocks noChangeAspect="1"/>
           </p:cNvPicPr>
@@ -20042,8 +21796,8 @@
         </p:blipFill>
         <p:spPr>
           <a:xfrm>
-            <a:off x="2211781" y="3566160"/>
-            <a:ext cx="237744" cy="237744"/>
+            <a:off x="5960059" y="4097884"/>
+            <a:ext cx="271577" cy="271577"/>
           </a:xfrm>
           <a:prstGeom prst="rect">
             <a:avLst/>
@@ -20052,14 +21806,14 @@
       </p:pic>
       <p:sp>
         <p:nvSpPr>
-          <p:cNvPr id="18" name="Text 13"/>
-          <p:cNvSpPr txBox="1"/>
-          <p:nvPr/>
-        </p:nvSpPr>
-        <p:spPr>
-          <a:xfrm>
-            <a:off x="713232" y="4005072"/>
-            <a:ext cx="3234842" cy="384048"/>
+          <p:cNvPr id="20" name="Text 15"/>
+          <p:cNvSpPr txBox="1"/>
+          <p:nvPr/>
+        </p:nvSpPr>
+        <p:spPr>
+          <a:xfrm>
+            <a:off x="4469282" y="4599432"/>
+            <a:ext cx="3253130" cy="640080"/>
           </a:xfrm>
           <a:prstGeom prst="rect">
             <a:avLst/>
@@ -20072,74 +21826,55 @@
           <a:lstStyle/>
           <a:p>
             <a:pPr algn="ctr" indent="0" marL="0">
-              <a:buNone/>
-            </a:pPr>
-            <a:r>
-              <a:rPr lang="en-US" sz="1050" b="1" spc="30" kern="0" dirty="0">
-                <a:solidFill>
-                  <a:srgbClr val="2FAE60"/>
+              <a:lnSpc>
+                <a:spcPct val="120000"/>
+              </a:lnSpc>
+              <a:buNone/>
+            </a:pPr>
+            <a:r>
+              <a:rPr lang="en-US" sz="1150" i="1" dirty="0">
+                <a:solidFill>
+                  <a:srgbClr val="5B6B82"/>
                 </a:solidFill>
                 <a:latin typeface="Calibri" pitchFamily="34" charset="0"/>
                 <a:ea typeface="Calibri" pitchFamily="34" charset="-122"/>
                 <a:cs typeface="Calibri" pitchFamily="34" charset="-120"/>
               </a:rPr>
-              <a:t>ACCIÓN RECOMENDADA</a:t>
-            </a:r>
-            <a:endParaRPr lang="en-US" sz="1050" dirty="0"/>
-          </a:p>
-        </p:txBody>
-      </p:sp>
-      <p:sp>
-        <p:nvSpPr>
-          <p:cNvPr id="19" name="Text 14"/>
-          <p:cNvSpPr txBox="1"/>
-          <p:nvPr/>
-        </p:nvSpPr>
-        <p:spPr>
-          <a:xfrm>
-            <a:off x="749808" y="4407408"/>
-            <a:ext cx="3161690" cy="1536192"/>
-          </a:xfrm>
-          <a:prstGeom prst="rect">
-            <a:avLst/>
-          </a:prstGeom>
-          <a:noFill/>
-          <a:ln/>
-        </p:spPr>
-        <p:txBody>
-          <a:bodyPr wrap="square" lIns="0" tIns="0" rIns="0" bIns="0" rtlCol="0" anchor="ctr"/>
-          <a:lstStyle/>
+              <a:t>Da tiempo al grupo para discutir.</a:t>
+            </a:r>
+            <a:endParaRPr lang="en-US" sz="1150" dirty="0"/>
+          </a:p>
           <a:p>
             <a:pPr algn="ctr" indent="0" marL="0">
               <a:lnSpc>
-                <a:spcPct val="112000"/>
+                <a:spcPct val="120000"/>
               </a:lnSpc>
               <a:buNone/>
             </a:pPr>
             <a:r>
-              <a:rPr lang="en-US" sz="1080" dirty="0">
-                <a:solidFill>
-                  <a:srgbClr val="243044"/>
+              <a:rPr lang="en-US" sz="1150" i="1" dirty="0">
+                <a:solidFill>
+                  <a:srgbClr val="5B6B82"/>
                 </a:solidFill>
                 <a:latin typeface="Calibri" pitchFamily="34" charset="0"/>
                 <a:ea typeface="Calibri" pitchFamily="34" charset="-122"/>
                 <a:cs typeface="Calibri" pitchFamily="34" charset="-120"/>
               </a:rPr>
-              <a:t>Documentar la diferencia encontrada y reportarla, sin asumir por su cuenta si fue error o algo intencional.</a:t>
-            </a:r>
-            <a:endParaRPr lang="en-US" sz="1080" dirty="0"/>
-          </a:p>
-        </p:txBody>
-      </p:sp>
-      <p:sp>
-        <p:nvSpPr>
-          <p:cNvPr id="20" name="Shape 15"/>
+              <a:t>Haz clic para revelar la respuesta.</a:t>
+            </a:r>
+            <a:endParaRPr lang="en-US" sz="1150" dirty="0"/>
+          </a:p>
+        </p:txBody>
+      </p:sp>
+      <p:sp>
+        <p:nvSpPr>
+          <p:cNvPr id="21" name="REVEAL_case3_0_bg"/>
           <p:cNvSpPr/>
           <p:nvPr/>
         </p:nvSpPr>
         <p:spPr>
           <a:xfrm>
-            <a:off x="4332122" y="3291840"/>
+            <a:off x="566928" y="3291840"/>
             <a:ext cx="3527450" cy="2761488"/>
           </a:xfrm>
           <a:prstGeom prst="roundRect">
@@ -20155,27 +21890,27 @@
       </p:sp>
       <p:sp>
         <p:nvSpPr>
-          <p:cNvPr id="21" name="Shape 16"/>
+          <p:cNvPr id="22" name="REVEAL_case3_0_ic"/>
           <p:cNvSpPr/>
           <p:nvPr/>
         </p:nvSpPr>
         <p:spPr>
           <a:xfrm>
-            <a:off x="5867248" y="3456432"/>
+            <a:off x="2102053" y="3456432"/>
             <a:ext cx="457200" cy="457200"/>
           </a:xfrm>
           <a:prstGeom prst="ellipse">
             <a:avLst/>
           </a:prstGeom>
           <a:solidFill>
-            <a:srgbClr val="133B6C"/>
+            <a:srgbClr val="2FAE60"/>
           </a:solidFill>
           <a:ln/>
         </p:spPr>
       </p:sp>
       <p:pic>
         <p:nvPicPr>
-          <p:cNvPr id="22" name="Image 2" descr="/tmp/claude-0/-home-user-riesgo/0ff9ff46-1396-5bd8-b3ac-2280dfbbbc55/scratchpad/work/gen/icons/people_group_white.png">    </p:cNvPr>
+          <p:cNvPr id="23" name="REVEAL_case3_0_ic_ic" descr="/tmp/claude-0/-home-user-riesgo/0ff9ff46-1396-5bd8-b3ac-2280dfbbbc55/scratchpad/work/gen/icons/check_circle_white.png">    </p:cNvPr>
           <p:cNvPicPr>
             <a:picLocks noChangeAspect="1"/>
           </p:cNvPicPr>
@@ -20189,7 +21924,7 @@
         </p:blipFill>
         <p:spPr>
           <a:xfrm>
-            <a:off x="5976976" y="3566160"/>
+            <a:off x="2211781" y="3566160"/>
             <a:ext cx="237744" cy="237744"/>
           </a:xfrm>
           <a:prstGeom prst="rect">
@@ -20199,13 +21934,13 @@
       </p:pic>
       <p:sp>
         <p:nvSpPr>
-          <p:cNvPr id="23" name="Text 17"/>
-          <p:cNvSpPr txBox="1"/>
-          <p:nvPr/>
-        </p:nvSpPr>
-        <p:spPr>
-          <a:xfrm>
-            <a:off x="4478426" y="4005072"/>
+          <p:cNvPr id="24" name="REVEAL_case3_0_lbl"/>
+          <p:cNvSpPr txBox="1"/>
+          <p:nvPr/>
+        </p:nvSpPr>
+        <p:spPr>
+          <a:xfrm>
+            <a:off x="713232" y="4005072"/>
             <a:ext cx="3234842" cy="384048"/>
           </a:xfrm>
           <a:prstGeom prst="rect">
@@ -20224,13 +21959,13 @@
             <a:r>
               <a:rPr lang="en-US" sz="1050" b="1" spc="30" kern="0" dirty="0">
                 <a:solidFill>
-                  <a:srgbClr val="133B6C"/>
+                  <a:srgbClr val="2FAE60"/>
                 </a:solidFill>
                 <a:latin typeface="Calibri" pitchFamily="34" charset="0"/>
                 <a:ea typeface="Calibri" pitchFamily="34" charset="-122"/>
                 <a:cs typeface="Calibri" pitchFamily="34" charset="-120"/>
               </a:rPr>
-              <a:t>RESPONSABLE DE ACTUAR</a:t>
+              <a:t>ACCIÓN RECOMENDADA</a:t>
             </a:r>
             <a:endParaRPr lang="en-US" sz="1050" dirty="0"/>
           </a:p>
@@ -20238,13 +21973,13 @@
       </p:sp>
       <p:sp>
         <p:nvSpPr>
-          <p:cNvPr id="24" name="Text 18"/>
-          <p:cNvSpPr txBox="1"/>
-          <p:nvPr/>
-        </p:nvSpPr>
-        <p:spPr>
-          <a:xfrm>
-            <a:off x="4515002" y="4407408"/>
+          <p:cNvPr id="25" name="REVEAL_case3_0_txt"/>
+          <p:cNvSpPr txBox="1"/>
+          <p:nvPr/>
+        </p:nvSpPr>
+        <p:spPr>
+          <a:xfrm>
+            <a:off x="749808" y="4407408"/>
             <a:ext cx="3161690" cy="1536192"/>
           </a:xfrm>
           <a:prstGeom prst="rect">
@@ -20272,7 +22007,7 @@
                 <a:ea typeface="Calibri" pitchFamily="34" charset="-122"/>
                 <a:cs typeface="Calibri" pitchFamily="34" charset="-120"/>
               </a:rPr>
-              <a:t>El colaborador que la detecta, y el Departamento de Administración de Riesgos para su análisis.</a:t>
+              <a:t>Documentar la diferencia encontrada y reportarla, sin asumir por su cuenta si fue error o algo intencional.</a:t>
             </a:r>
             <a:endParaRPr lang="en-US" sz="1080" dirty="0"/>
           </a:p>
@@ -20280,13 +22015,13 @@
       </p:sp>
       <p:sp>
         <p:nvSpPr>
-          <p:cNvPr id="25" name="Shape 19"/>
+          <p:cNvPr id="26" name="REVEAL_case3_1_bg"/>
           <p:cNvSpPr/>
           <p:nvPr/>
         </p:nvSpPr>
         <p:spPr>
           <a:xfrm>
-            <a:off x="8097317" y="3291840"/>
+            <a:off x="4332122" y="3291840"/>
             <a:ext cx="3527450" cy="2761488"/>
           </a:xfrm>
           <a:prstGeom prst="roundRect">
@@ -20302,27 +22037,27 @@
       </p:sp>
       <p:sp>
         <p:nvSpPr>
-          <p:cNvPr id="26" name="Shape 20"/>
+          <p:cNvPr id="27" name="REVEAL_case3_1_ic"/>
           <p:cNvSpPr/>
           <p:nvPr/>
         </p:nvSpPr>
         <p:spPr>
           <a:xfrm>
-            <a:off x="9632442" y="3456432"/>
+            <a:off x="5867248" y="3456432"/>
             <a:ext cx="457200" cy="457200"/>
           </a:xfrm>
           <a:prstGeom prst="ellipse">
             <a:avLst/>
           </a:prstGeom>
           <a:solidFill>
-            <a:srgbClr val="E0392B"/>
+            <a:srgbClr val="133B6C"/>
           </a:solidFill>
           <a:ln/>
         </p:spPr>
       </p:sp>
       <p:pic>
         <p:nvPicPr>
-          <p:cNvPr id="27" name="Image 3" descr="/tmp/claude-0/-home-user-riesgo/0ff9ff46-1396-5bd8-b3ac-2280dfbbbc55/scratchpad/work/gen/icons/warning_triangle_white.png">    </p:cNvPr>
+          <p:cNvPr id="28" name="REVEAL_case3_1_ic_ic" descr="/tmp/claude-0/-home-user-riesgo/0ff9ff46-1396-5bd8-b3ac-2280dfbbbc55/scratchpad/work/gen/icons/people_group_white.png">    </p:cNvPr>
           <p:cNvPicPr>
             <a:picLocks noChangeAspect="1"/>
           </p:cNvPicPr>
@@ -20336,7 +22071,7 @@
         </p:blipFill>
         <p:spPr>
           <a:xfrm>
-            <a:off x="9742170" y="3566160"/>
+            <a:off x="5976976" y="3566160"/>
             <a:ext cx="237744" cy="237744"/>
           </a:xfrm>
           <a:prstGeom prst="rect">
@@ -20346,13 +22081,13 @@
       </p:pic>
       <p:sp>
         <p:nvSpPr>
-          <p:cNvPr id="28" name="Text 21"/>
-          <p:cNvSpPr txBox="1"/>
-          <p:nvPr/>
-        </p:nvSpPr>
-        <p:spPr>
-          <a:xfrm>
-            <a:off x="8243621" y="4005072"/>
+          <p:cNvPr id="29" name="REVEAL_case3_1_lbl"/>
+          <p:cNvSpPr txBox="1"/>
+          <p:nvPr/>
+        </p:nvSpPr>
+        <p:spPr>
+          <a:xfrm>
+            <a:off x="4478426" y="4005072"/>
             <a:ext cx="3234842" cy="384048"/>
           </a:xfrm>
           <a:prstGeom prst="rect">
@@ -20371,13 +22106,13 @@
             <a:r>
               <a:rPr lang="en-US" sz="1050" b="1" spc="30" kern="0" dirty="0">
                 <a:solidFill>
-                  <a:srgbClr val="E0392B"/>
+                  <a:srgbClr val="133B6C"/>
                 </a:solidFill>
                 <a:latin typeface="Calibri" pitchFamily="34" charset="0"/>
                 <a:ea typeface="Calibri" pitchFamily="34" charset="-122"/>
                 <a:cs typeface="Calibri" pitchFamily="34" charset="-120"/>
               </a:rPr>
-              <a:t>SI NO ACTUAMOS</a:t>
+              <a:t>RESPONSABLE DE ACTUAR</a:t>
             </a:r>
             <a:endParaRPr lang="en-US" sz="1050" dirty="0"/>
           </a:p>
@@ -20385,13 +22120,13 @@
       </p:sp>
       <p:sp>
         <p:nvSpPr>
-          <p:cNvPr id="29" name="Text 22"/>
-          <p:cNvSpPr txBox="1"/>
-          <p:nvPr/>
-        </p:nvSpPr>
-        <p:spPr>
-          <a:xfrm>
-            <a:off x="8280197" y="4407408"/>
+          <p:cNvPr id="30" name="REVEAL_case3_1_txt"/>
+          <p:cNvSpPr txBox="1"/>
+          <p:nvPr/>
+        </p:nvSpPr>
+        <p:spPr>
+          <a:xfrm>
+            <a:off x="4515002" y="4407408"/>
             <a:ext cx="3161690" cy="1536192"/>
           </a:xfrm>
           <a:prstGeom prst="rect">
@@ -20419,7 +22154,7 @@
                 <a:ea typeface="Calibri" pitchFamily="34" charset="-122"/>
                 <a:cs typeface="Calibri" pitchFamily="34" charset="-120"/>
               </a:rPr>
-              <a:t>La diferencia queda sin explicación, y un posible error —o algo más grave— pasa desapercibido.</a:t>
+              <a:t>El colaborador que la detecta, y el Departamento de Administración de Riesgos para su análisis.</a:t>
             </a:r>
             <a:endParaRPr lang="en-US" sz="1080" dirty="0"/>
           </a:p>
@@ -20427,14 +22162,80 @@
       </p:sp>
       <p:sp>
         <p:nvSpPr>
-          <p:cNvPr id="30" name="Text 23"/>
-          <p:cNvSpPr txBox="1"/>
-          <p:nvPr/>
-        </p:nvSpPr>
-        <p:spPr>
-          <a:xfrm>
-            <a:off x="566928" y="6473952"/>
-            <a:ext cx="7315200" cy="274320"/>
+          <p:cNvPr id="31" name="REVEAL_case3_2_bg"/>
+          <p:cNvSpPr/>
+          <p:nvPr/>
+        </p:nvSpPr>
+        <p:spPr>
+          <a:xfrm>
+            <a:off x="8097317" y="3291840"/>
+            <a:ext cx="3527450" cy="2761488"/>
+          </a:xfrm>
+          <a:prstGeom prst="roundRect">
+            <a:avLst>
+              <a:gd name="adj" fmla="val 3311"/>
+            </a:avLst>
+          </a:prstGeom>
+          <a:solidFill>
+            <a:srgbClr val="F2F5F9"/>
+          </a:solidFill>
+          <a:ln/>
+        </p:spPr>
+      </p:sp>
+      <p:sp>
+        <p:nvSpPr>
+          <p:cNvPr id="32" name="REVEAL_case3_2_ic"/>
+          <p:cNvSpPr/>
+          <p:nvPr/>
+        </p:nvSpPr>
+        <p:spPr>
+          <a:xfrm>
+            <a:off x="9632442" y="3456432"/>
+            <a:ext cx="457200" cy="457200"/>
+          </a:xfrm>
+          <a:prstGeom prst="ellipse">
+            <a:avLst/>
+          </a:prstGeom>
+          <a:solidFill>
+            <a:srgbClr val="E0392B"/>
+          </a:solidFill>
+          <a:ln/>
+        </p:spPr>
+      </p:sp>
+      <p:pic>
+        <p:nvPicPr>
+          <p:cNvPr id="33" name="REVEAL_case3_2_ic_ic" descr="/tmp/claude-0/-home-user-riesgo/0ff9ff46-1396-5bd8-b3ac-2280dfbbbc55/scratchpad/work/gen/icons/warning_triangle_white.png">    </p:cNvPr>
+          <p:cNvPicPr>
+            <a:picLocks noChangeAspect="1"/>
+          </p:cNvPicPr>
+          <p:nvPr/>
+        </p:nvPicPr>
+        <p:blipFill>
+          <a:blip r:embed="rId5"/>
+          <a:stretch>
+            <a:fillRect/>
+          </a:stretch>
+        </p:blipFill>
+        <p:spPr>
+          <a:xfrm>
+            <a:off x="9742170" y="3566160"/>
+            <a:ext cx="237744" cy="237744"/>
+          </a:xfrm>
+          <a:prstGeom prst="rect">
+            <a:avLst/>
+          </a:prstGeom>
+        </p:spPr>
+      </p:pic>
+      <p:sp>
+        <p:nvSpPr>
+          <p:cNvPr id="34" name="REVEAL_case3_2_lbl"/>
+          <p:cNvSpPr txBox="1"/>
+          <p:nvPr/>
+        </p:nvSpPr>
+        <p:spPr>
+          <a:xfrm>
+            <a:off x="8243621" y="4005072"/>
+            <a:ext cx="3234842" cy="384048"/>
           </a:xfrm>
           <a:prstGeom prst="rect">
             <a:avLst/>
@@ -20446,18 +22247,99 @@
           <a:bodyPr wrap="square" lIns="0" tIns="0" rIns="0" bIns="0" rtlCol="0" anchor="ctr"/>
           <a:lstStyle/>
           <a:p>
-            <a:pPr algn="l" indent="0" marL="0">
-              <a:buNone/>
-            </a:pPr>
-            <a:r>
-              <a:rPr lang="en-US" sz="900" dirty="0">
-                <a:solidFill>
-                  <a:srgbClr val="5B6B82"/>
+            <a:pPr algn="ctr" indent="0" marL="0">
+              <a:buNone/>
+            </a:pPr>
+            <a:r>
+              <a:rPr lang="en-US" sz="1050" b="1" spc="30" kern="0" dirty="0">
+                <a:solidFill>
+                  <a:srgbClr val="E0392B"/>
                 </a:solidFill>
                 <a:latin typeface="Calibri" pitchFamily="34" charset="0"/>
                 <a:ea typeface="Calibri" pitchFamily="34" charset="-122"/>
                 <a:cs typeface="Calibri" pitchFamily="34" charset="-120"/>
               </a:rPr>
+              <a:t>SI NO ACTUAMOS</a:t>
+            </a:r>
+            <a:endParaRPr lang="en-US" sz="1050" dirty="0"/>
+          </a:p>
+        </p:txBody>
+      </p:sp>
+      <p:sp>
+        <p:nvSpPr>
+          <p:cNvPr id="35" name="REVEAL_case3_2_txt"/>
+          <p:cNvSpPr txBox="1"/>
+          <p:nvPr/>
+        </p:nvSpPr>
+        <p:spPr>
+          <a:xfrm>
+            <a:off x="8280197" y="4407408"/>
+            <a:ext cx="3161690" cy="1536192"/>
+          </a:xfrm>
+          <a:prstGeom prst="rect">
+            <a:avLst/>
+          </a:prstGeom>
+          <a:noFill/>
+          <a:ln/>
+        </p:spPr>
+        <p:txBody>
+          <a:bodyPr wrap="square" lIns="0" tIns="0" rIns="0" bIns="0" rtlCol="0" anchor="ctr"/>
+          <a:lstStyle/>
+          <a:p>
+            <a:pPr algn="ctr" indent="0" marL="0">
+              <a:lnSpc>
+                <a:spcPct val="112000"/>
+              </a:lnSpc>
+              <a:buNone/>
+            </a:pPr>
+            <a:r>
+              <a:rPr lang="en-US" sz="1080" dirty="0">
+                <a:solidFill>
+                  <a:srgbClr val="243044"/>
+                </a:solidFill>
+                <a:latin typeface="Calibri" pitchFamily="34" charset="0"/>
+                <a:ea typeface="Calibri" pitchFamily="34" charset="-122"/>
+                <a:cs typeface="Calibri" pitchFamily="34" charset="-120"/>
+              </a:rPr>
+              <a:t>La diferencia queda sin explicación, y un posible error —o algo más grave— pasa desapercibido.</a:t>
+            </a:r>
+            <a:endParaRPr lang="en-US" sz="1080" dirty="0"/>
+          </a:p>
+        </p:txBody>
+      </p:sp>
+      <p:sp>
+        <p:nvSpPr>
+          <p:cNvPr id="36" name="Text 28"/>
+          <p:cNvSpPr txBox="1"/>
+          <p:nvPr/>
+        </p:nvSpPr>
+        <p:spPr>
+          <a:xfrm>
+            <a:off x="566928" y="6473952"/>
+            <a:ext cx="7315200" cy="274320"/>
+          </a:xfrm>
+          <a:prstGeom prst="rect">
+            <a:avLst/>
+          </a:prstGeom>
+          <a:noFill/>
+          <a:ln/>
+        </p:spPr>
+        <p:txBody>
+          <a:bodyPr wrap="square" lIns="0" tIns="0" rIns="0" bIns="0" rtlCol="0" anchor="ctr"/>
+          <a:lstStyle/>
+          <a:p>
+            <a:pPr algn="l" indent="0" marL="0">
+              <a:buNone/>
+            </a:pPr>
+            <a:r>
+              <a:rPr lang="en-US" sz="900" dirty="0">
+                <a:solidFill>
+                  <a:srgbClr val="5B6B82"/>
+                </a:solidFill>
+                <a:latin typeface="Calibri" pitchFamily="34" charset="0"/>
+                <a:ea typeface="Calibri" pitchFamily="34" charset="-122"/>
+                <a:cs typeface="Calibri" pitchFamily="34" charset="-120"/>
+              </a:rPr>
               <a:t>GESTIÓN INTEGRAL DE RIESGOS  ·  COMEDICA DE R.L.</a:t>
             </a:r>
             <a:endParaRPr lang="en-US" sz="900" dirty="0"/>
@@ -20466,7 +22348,7 @@
       </p:sp>
       <p:sp>
         <p:nvSpPr>
-          <p:cNvPr id="31" name="Text 24"/>
+          <p:cNvPr id="37" name="Text 29"/>
           <p:cNvSpPr txBox="1"/>
           <p:nvPr/>
         </p:nvSpPr>
@@ -20508,6 +22390,327 @@
   <p:clrMapOvr>
     <a:masterClrMapping/>
   </p:clrMapOvr>
+  <p:timing>
+    <p:tnLst>
+      <p:par>
+        <p:cTn id="1" dur="indefinite" restart="never" nodeType="tmRoot">
+          <p:childTnLst>
+            <p:seq concurrent="1" nextAc="seek">
+              <p:cTn id="2" dur="indefinite" nodeType="mainSeq">
+                <p:childTnLst>
+                  <p:par>
+                    <p:cTn id="3" fill="hold">
+                      <p:stCondLst>
+                        <p:cond delay="indefinite"/>
+                      </p:stCondLst>
+                      <p:childTnLst>
+                        <p:par>
+                          <p:cTn id="4" presetID="2" presetClass="entr" presetSubtype="0" fill="hold" nodeType="clickEffect">
+                            <p:stCondLst>
+                              <p:cond delay="0"/>
+                            </p:stCondLst>
+                            <p:childTnLst>
+                              <p:set>
+                                <p:cBhvr>
+                                  <p:cTn id="5" dur="1" fill="hold">
+                                    <p:stCondLst>
+                                      <p:cond delay="0"/>
+                                    </p:stCondLst>
+                                  </p:cTn>
+                                  <p:tgtEl>
+                                    <p:spTgt spid="21"/>
+                                  </p:tgtEl>
+                                  <p:attrNameLst>
+                                    <p:attrName>style.visibility</p:attrName>
+                                  </p:attrNameLst>
+                                </p:cBhvr>
+                                <p:to>
+                                  <p:strVal val="visible"/>
+                                </p:to>
+                              </p:set>
+                              <p:set>
+                                <p:cBhvr>
+                                  <p:cTn id="6" dur="1" fill="hold">
+                                    <p:stCondLst>
+                                      <p:cond delay="0"/>
+                                    </p:stCondLst>
+                                  </p:cTn>
+                                  <p:tgtEl>
+                                    <p:spTgt spid="22"/>
+                                  </p:tgtEl>
+                                  <p:attrNameLst>
+                                    <p:attrName>style.visibility</p:attrName>
+                                  </p:attrNameLst>
+                                </p:cBhvr>
+                                <p:to>
+                                  <p:strVal val="visible"/>
+                                </p:to>
+                              </p:set>
+                              <p:set>
+                                <p:cBhvr>
+                                  <p:cTn id="7" dur="1" fill="hold">
+                                    <p:stCondLst>
+                                      <p:cond delay="0"/>
+                                    </p:stCondLst>
+                                  </p:cTn>
+                                  <p:tgtEl>
+                                    <p:spTgt spid="23"/>
+                                  </p:tgtEl>
+                                  <p:attrNameLst>
+                                    <p:attrName>style.visibility</p:attrName>
+                                  </p:attrNameLst>
+                                </p:cBhvr>
+                                <p:to>
+                                  <p:strVal val="visible"/>
+                                </p:to>
+                              </p:set>
+                              <p:set>
+                                <p:cBhvr>
+                                  <p:cTn id="8" dur="1" fill="hold">
+                                    <p:stCondLst>
+                                      <p:cond delay="0"/>
+                                    </p:stCondLst>
+                                  </p:cTn>
+                                  <p:tgtEl>
+                                    <p:spTgt spid="24"/>
+                                  </p:tgtEl>
+                                  <p:attrNameLst>
+                                    <p:attrName>style.visibility</p:attrName>
+                                  </p:attrNameLst>
+                                </p:cBhvr>
+                                <p:to>
+                                  <p:strVal val="visible"/>
+                                </p:to>
+                              </p:set>
+                              <p:set>
+                                <p:cBhvr>
+                                  <p:cTn id="9" dur="1" fill="hold">
+                                    <p:stCondLst>
+                                      <p:cond delay="0"/>
+                                    </p:stCondLst>
+                                  </p:cTn>
+                                  <p:tgtEl>
+                                    <p:spTgt spid="25"/>
+                                  </p:tgtEl>
+                                  <p:attrNameLst>
+                                    <p:attrName>style.visibility</p:attrName>
+                                  </p:attrNameLst>
+                                </p:cBhvr>
+                                <p:to>
+                                  <p:strVal val="visible"/>
+                                </p:to>
+                              </p:set>
+                              <p:set>
+                                <p:cBhvr>
+                                  <p:cTn id="10" dur="1" fill="hold">
+                                    <p:stCondLst>
+                                      <p:cond delay="0"/>
+                                    </p:stCondLst>
+                                  </p:cTn>
+                                  <p:tgtEl>
+                                    <p:spTgt spid="26"/>
+                                  </p:tgtEl>
+                                  <p:attrNameLst>
+                                    <p:attrName>style.visibility</p:attrName>
+                                  </p:attrNameLst>
+                                </p:cBhvr>
+                                <p:to>
+                                  <p:strVal val="visible"/>
+                                </p:to>
+                              </p:set>
+                              <p:set>
+                                <p:cBhvr>
+                                  <p:cTn id="11" dur="1" fill="hold">
+                                    <p:stCondLst>
+                                      <p:cond delay="0"/>
+                                    </p:stCondLst>
+                                  </p:cTn>
+                                  <p:tgtEl>
+                                    <p:spTgt spid="27"/>
+                                  </p:tgtEl>
+                                  <p:attrNameLst>
+                                    <p:attrName>style.visibility</p:attrName>
+                                  </p:attrNameLst>
+                                </p:cBhvr>
+                                <p:to>
+                                  <p:strVal val="visible"/>
+                                </p:to>
+                              </p:set>
+                              <p:set>
+                                <p:cBhvr>
+                                  <p:cTn id="12" dur="1" fill="hold">
+                                    <p:stCondLst>
+                                      <p:cond delay="0"/>
+                                    </p:stCondLst>
+                                  </p:cTn>
+                                  <p:tgtEl>
+                                    <p:spTgt spid="28"/>
+                                  </p:tgtEl>
+                                  <p:attrNameLst>
+                                    <p:attrName>style.visibility</p:attrName>
+                                  </p:attrNameLst>
+                                </p:cBhvr>
+                                <p:to>
+                                  <p:strVal val="visible"/>
+                                </p:to>
+                              </p:set>
+                              <p:set>
+                                <p:cBhvr>
+                                  <p:cTn id="13" dur="1" fill="hold">
+                                    <p:stCondLst>
+                                      <p:cond delay="0"/>
+                                    </p:stCondLst>
+                                  </p:cTn>
+                                  <p:tgtEl>
+                                    <p:spTgt spid="29"/>
+                                  </p:tgtEl>
+                                  <p:attrNameLst>
+                                    <p:attrName>style.visibility</p:attrName>
+                                  </p:attrNameLst>
+                                </p:cBhvr>
+                                <p:to>
+                                  <p:strVal val="visible"/>
+                                </p:to>
+                              </p:set>
+                              <p:set>
+                                <p:cBhvr>
+                                  <p:cTn id="14" dur="1" fill="hold">
+                                    <p:stCondLst>
+                                      <p:cond delay="0"/>
+                                    </p:stCondLst>
+                                  </p:cTn>
+                                  <p:tgtEl>
+                                    <p:spTgt spid="30"/>
+                                  </p:tgtEl>
+                                  <p:attrNameLst>
+                                    <p:attrName>style.visibility</p:attrName>
+                                  </p:attrNameLst>
+                                </p:cBhvr>
+                                <p:to>
+                                  <p:strVal val="visible"/>
+                                </p:to>
+                              </p:set>
+                              <p:set>
+                                <p:cBhvr>
+                                  <p:cTn id="15" dur="1" fill="hold">
+                                    <p:stCondLst>
+                                      <p:cond delay="0"/>
+                                    </p:stCondLst>
+                                  </p:cTn>
+                                  <p:tgtEl>
+                                    <p:spTgt spid="31"/>
+                                  </p:tgtEl>
+                                  <p:attrNameLst>
+                                    <p:attrName>style.visibility</p:attrName>
+                                  </p:attrNameLst>
+                                </p:cBhvr>
+                                <p:to>
+                                  <p:strVal val="visible"/>
+                                </p:to>
+                              </p:set>
+                              <p:set>
+                                <p:cBhvr>
+                                  <p:cTn id="16" dur="1" fill="hold">
+                                    <p:stCondLst>
+                                      <p:cond delay="0"/>
+                                    </p:stCondLst>
+                                  </p:cTn>
+                                  <p:tgtEl>
+                                    <p:spTgt spid="32"/>
+                                  </p:tgtEl>
+                                  <p:attrNameLst>
+                                    <p:attrName>style.visibility</p:attrName>
+                                  </p:attrNameLst>
+                                </p:cBhvr>
+                                <p:to>
+                                  <p:strVal val="visible"/>
+                                </p:to>
+                              </p:set>
+                              <p:set>
+                                <p:cBhvr>
+                                  <p:cTn id="17" dur="1" fill="hold">
+                                    <p:stCondLst>
+                                      <p:cond delay="0"/>
+                                    </p:stCondLst>
+                                  </p:cTn>
+                                  <p:tgtEl>
+                                    <p:spTgt spid="33"/>
+                                  </p:tgtEl>
+                                  <p:attrNameLst>
+                                    <p:attrName>style.visibility</p:attrName>
+                                  </p:attrNameLst>
+                                </p:cBhvr>
+                                <p:to>
+                                  <p:strVal val="visible"/>
+                                </p:to>
+                              </p:set>
+                              <p:set>
+                                <p:cBhvr>
+                                  <p:cTn id="18" dur="1" fill="hold">
+                                    <p:stCondLst>
+                                      <p:cond delay="0"/>
+                                    </p:stCondLst>
+                                  </p:cTn>
+                                  <p:tgtEl>
+                                    <p:spTgt spid="34"/>
+                                  </p:tgtEl>
+                                  <p:attrNameLst>
+                                    <p:attrName>style.visibility</p:attrName>
+                                  </p:attrNameLst>
+                                </p:cBhvr>
+                                <p:to>
+                                  <p:strVal val="visible"/>
+                                </p:to>
+                              </p:set>
+                              <p:set>
+                                <p:cBhvr>
+                                  <p:cTn id="19" dur="1" fill="hold">
+                                    <p:stCondLst>
+                                      <p:cond delay="0"/>
+                                    </p:stCondLst>
+                                  </p:cTn>
+                                  <p:tgtEl>
+                                    <p:spTgt spid="35"/>
+                                  </p:tgtEl>
+                                  <p:attrNameLst>
+                                    <p:attrName>style.visibility</p:attrName>
+                                  </p:attrNameLst>
+                                </p:cBhvr>
+                                <p:to>
+                                  <p:strVal val="visible"/>
+                                </p:to>
+                              </p:set>
+                            </p:childTnLst>
+                          </p:cTn>
+                        </p:par>
+                      </p:childTnLst>
+                    </p:cTn>
+                  </p:par>
+                </p:childTnLst>
+              </p:cTn>
+            </p:seq>
+          </p:childTnLst>
+        </p:cTn>
+      </p:par>
+    </p:tnLst>
+    <p:bldLst>
+      <p:bldP spid="21" grpId="0"/>
+      <p:bldP spid="22" grpId="0"/>
+      <p:bldP spid="23" grpId="0"/>
+      <p:bldP spid="24" grpId="0"/>
+      <p:bldP spid="25" grpId="0"/>
+      <p:bldP spid="26" grpId="0"/>
+      <p:bldP spid="27" grpId="0"/>
+      <p:bldP spid="28" grpId="0"/>
+      <p:bldP spid="29" grpId="0"/>
+      <p:bldP spid="30" grpId="0"/>
+      <p:bldP spid="31" grpId="0"/>
+      <p:bldP spid="32" grpId="0"/>
+      <p:bldP spid="33" grpId="0"/>
+      <p:bldP spid="34" grpId="0"/>
+      <p:bldP spid="35" grpId="0"/>
+    </p:bldLst>
+  </p:timing>
 </p:sld>
 </file>
 
@@ -20954,21 +23157,65 @@
         </p:nvSpPr>
         <p:spPr>
           <a:xfrm>
-            <a:off x="2102053" y="3456432"/>
-            <a:ext cx="457200" cy="457200"/>
+            <a:off x="4332122" y="3291840"/>
+            <a:ext cx="3527450" cy="2761488"/>
+          </a:xfrm>
+          <a:prstGeom prst="roundRect">
+            <a:avLst>
+              <a:gd name="adj" fmla="val 3311"/>
+            </a:avLst>
+          </a:prstGeom>
+          <a:solidFill>
+            <a:srgbClr val="F2F5F9"/>
+          </a:solidFill>
+          <a:ln/>
+        </p:spPr>
+      </p:sp>
+      <p:sp>
+        <p:nvSpPr>
+          <p:cNvPr id="17" name="Shape 13"/>
+          <p:cNvSpPr/>
+          <p:nvPr/>
+        </p:nvSpPr>
+        <p:spPr>
+          <a:xfrm>
+            <a:off x="8097317" y="3291840"/>
+            <a:ext cx="3527450" cy="2761488"/>
+          </a:xfrm>
+          <a:prstGeom prst="roundRect">
+            <a:avLst>
+              <a:gd name="adj" fmla="val 3311"/>
+            </a:avLst>
+          </a:prstGeom>
+          <a:solidFill>
+            <a:srgbClr val="F2F5F9"/>
+          </a:solidFill>
+          <a:ln/>
+        </p:spPr>
+      </p:sp>
+      <p:sp>
+        <p:nvSpPr>
+          <p:cNvPr id="18" name="Shape 14"/>
+          <p:cNvSpPr/>
+          <p:nvPr/>
+        </p:nvSpPr>
+        <p:spPr>
+          <a:xfrm>
+            <a:off x="5848960" y="3986784"/>
+            <a:ext cx="493776" cy="493776"/>
           </a:xfrm>
           <a:prstGeom prst="ellipse">
             <a:avLst/>
           </a:prstGeom>
           <a:solidFill>
-            <a:srgbClr val="2FAE60"/>
+            <a:srgbClr val="8FA0B5"/>
           </a:solidFill>
           <a:ln/>
         </p:spPr>
       </p:sp>
       <p:pic>
         <p:nvPicPr>
-          <p:cNvPr id="17" name="Image 1" descr="/tmp/claude-0/-home-user-riesgo/0ff9ff46-1396-5bd8-b3ac-2280dfbbbc55/scratchpad/work/gen/icons/check_circle_white.png">    </p:cNvPr>
+          <p:cNvPr id="19" name="Image 1" descr="/tmp/claude-0/-home-user-riesgo/0ff9ff46-1396-5bd8-b3ac-2280dfbbbc55/scratchpad/work/gen/icons/question_white.png">    </p:cNvPr>
           <p:cNvPicPr>
             <a:picLocks noChangeAspect="1"/>
           </p:cNvPicPr>
@@ -20982,8 +23229,8 @@
         </p:blipFill>
         <p:spPr>
           <a:xfrm>
-            <a:off x="2211781" y="3566160"/>
-            <a:ext cx="237744" cy="237744"/>
+            <a:off x="5960059" y="4097884"/>
+            <a:ext cx="271577" cy="271577"/>
           </a:xfrm>
           <a:prstGeom prst="rect">
             <a:avLst/>
@@ -20992,14 +23239,14 @@
       </p:pic>
       <p:sp>
         <p:nvSpPr>
-          <p:cNvPr id="18" name="Text 13"/>
-          <p:cNvSpPr txBox="1"/>
-          <p:nvPr/>
-        </p:nvSpPr>
-        <p:spPr>
-          <a:xfrm>
-            <a:off x="713232" y="4005072"/>
-            <a:ext cx="3234842" cy="384048"/>
+          <p:cNvPr id="20" name="Text 15"/>
+          <p:cNvSpPr txBox="1"/>
+          <p:nvPr/>
+        </p:nvSpPr>
+        <p:spPr>
+          <a:xfrm>
+            <a:off x="4469282" y="4599432"/>
+            <a:ext cx="3253130" cy="640080"/>
           </a:xfrm>
           <a:prstGeom prst="rect">
             <a:avLst/>
@@ -21012,74 +23259,55 @@
           <a:lstStyle/>
           <a:p>
             <a:pPr algn="ctr" indent="0" marL="0">
-              <a:buNone/>
-            </a:pPr>
-            <a:r>
-              <a:rPr lang="en-US" sz="1050" b="1" spc="30" kern="0" dirty="0">
-                <a:solidFill>
-                  <a:srgbClr val="2FAE60"/>
+              <a:lnSpc>
+                <a:spcPct val="120000"/>
+              </a:lnSpc>
+              <a:buNone/>
+            </a:pPr>
+            <a:r>
+              <a:rPr lang="en-US" sz="1150" i="1" dirty="0">
+                <a:solidFill>
+                  <a:srgbClr val="5B6B82"/>
                 </a:solidFill>
                 <a:latin typeface="Calibri" pitchFamily="34" charset="0"/>
                 <a:ea typeface="Calibri" pitchFamily="34" charset="-122"/>
                 <a:cs typeface="Calibri" pitchFamily="34" charset="-120"/>
               </a:rPr>
-              <a:t>ACCIÓN RECOMENDADA</a:t>
-            </a:r>
-            <a:endParaRPr lang="en-US" sz="1050" dirty="0"/>
-          </a:p>
-        </p:txBody>
-      </p:sp>
-      <p:sp>
-        <p:nvSpPr>
-          <p:cNvPr id="19" name="Text 14"/>
-          <p:cNvSpPr txBox="1"/>
-          <p:nvPr/>
-        </p:nvSpPr>
-        <p:spPr>
-          <a:xfrm>
-            <a:off x="749808" y="4407408"/>
-            <a:ext cx="3161690" cy="1536192"/>
-          </a:xfrm>
-          <a:prstGeom prst="rect">
-            <a:avLst/>
-          </a:prstGeom>
-          <a:noFill/>
-          <a:ln/>
-        </p:spPr>
-        <p:txBody>
-          <a:bodyPr wrap="square" lIns="0" tIns="0" rIns="0" bIns="0" rtlCol="0" anchor="ctr"/>
-          <a:lstStyle/>
+              <a:t>Da tiempo al grupo para discutir.</a:t>
+            </a:r>
+            <a:endParaRPr lang="en-US" sz="1150" dirty="0"/>
+          </a:p>
           <a:p>
             <a:pPr algn="ctr" indent="0" marL="0">
               <a:lnSpc>
-                <a:spcPct val="112000"/>
+                <a:spcPct val="120000"/>
               </a:lnSpc>
               <a:buNone/>
             </a:pPr>
             <a:r>
-              <a:rPr lang="en-US" sz="1080" dirty="0">
-                <a:solidFill>
-                  <a:srgbClr val="243044"/>
+              <a:rPr lang="en-US" sz="1150" i="1" dirty="0">
+                <a:solidFill>
+                  <a:srgbClr val="5B6B82"/>
                 </a:solidFill>
                 <a:latin typeface="Calibri" pitchFamily="34" charset="0"/>
                 <a:ea typeface="Calibri" pitchFamily="34" charset="-122"/>
                 <a:cs typeface="Calibri" pitchFamily="34" charset="-120"/>
               </a:rPr>
-              <a:t>Verificar la inconsistencia con el solicitante y la documentación antes de continuar con el proceso.</a:t>
-            </a:r>
-            <a:endParaRPr lang="en-US" sz="1080" dirty="0"/>
-          </a:p>
-        </p:txBody>
-      </p:sp>
-      <p:sp>
-        <p:nvSpPr>
-          <p:cNvPr id="20" name="Shape 15"/>
+              <a:t>Haz clic para revelar la respuesta.</a:t>
+            </a:r>
+            <a:endParaRPr lang="en-US" sz="1150" dirty="0"/>
+          </a:p>
+        </p:txBody>
+      </p:sp>
+      <p:sp>
+        <p:nvSpPr>
+          <p:cNvPr id="21" name="REVEAL_case4_0_bg"/>
           <p:cNvSpPr/>
           <p:nvPr/>
         </p:nvSpPr>
         <p:spPr>
           <a:xfrm>
-            <a:off x="4332122" y="3291840"/>
+            <a:off x="566928" y="3291840"/>
             <a:ext cx="3527450" cy="2761488"/>
           </a:xfrm>
           <a:prstGeom prst="roundRect">
@@ -21095,27 +23323,27 @@
       </p:sp>
       <p:sp>
         <p:nvSpPr>
-          <p:cNvPr id="21" name="Shape 16"/>
+          <p:cNvPr id="22" name="REVEAL_case4_0_ic"/>
           <p:cNvSpPr/>
           <p:nvPr/>
         </p:nvSpPr>
         <p:spPr>
           <a:xfrm>
-            <a:off x="5867248" y="3456432"/>
+            <a:off x="2102053" y="3456432"/>
             <a:ext cx="457200" cy="457200"/>
           </a:xfrm>
           <a:prstGeom prst="ellipse">
             <a:avLst/>
           </a:prstGeom>
           <a:solidFill>
-            <a:srgbClr val="133B6C"/>
+            <a:srgbClr val="2FAE60"/>
           </a:solidFill>
           <a:ln/>
         </p:spPr>
       </p:sp>
       <p:pic>
         <p:nvPicPr>
-          <p:cNvPr id="22" name="Image 2" descr="/tmp/claude-0/-home-user-riesgo/0ff9ff46-1396-5bd8-b3ac-2280dfbbbc55/scratchpad/work/gen/icons/people_group_white.png">    </p:cNvPr>
+          <p:cNvPr id="23" name="REVEAL_case4_0_ic_ic" descr="/tmp/claude-0/-home-user-riesgo/0ff9ff46-1396-5bd8-b3ac-2280dfbbbc55/scratchpad/work/gen/icons/check_circle_white.png">    </p:cNvPr>
           <p:cNvPicPr>
             <a:picLocks noChangeAspect="1"/>
           </p:cNvPicPr>
@@ -21129,7 +23357,7 @@
         </p:blipFill>
         <p:spPr>
           <a:xfrm>
-            <a:off x="5976976" y="3566160"/>
+            <a:off x="2211781" y="3566160"/>
             <a:ext cx="237744" cy="237744"/>
           </a:xfrm>
           <a:prstGeom prst="rect">
@@ -21139,13 +23367,13 @@
       </p:pic>
       <p:sp>
         <p:nvSpPr>
-          <p:cNvPr id="23" name="Text 17"/>
-          <p:cNvSpPr txBox="1"/>
-          <p:nvPr/>
-        </p:nvSpPr>
-        <p:spPr>
-          <a:xfrm>
-            <a:off x="4478426" y="4005072"/>
+          <p:cNvPr id="24" name="REVEAL_case4_0_lbl"/>
+          <p:cNvSpPr txBox="1"/>
+          <p:nvPr/>
+        </p:nvSpPr>
+        <p:spPr>
+          <a:xfrm>
+            <a:off x="713232" y="4005072"/>
             <a:ext cx="3234842" cy="384048"/>
           </a:xfrm>
           <a:prstGeom prst="rect">
@@ -21164,13 +23392,13 @@
             <a:r>
               <a:rPr lang="en-US" sz="1050" b="1" spc="30" kern="0" dirty="0">
                 <a:solidFill>
-                  <a:srgbClr val="133B6C"/>
+                  <a:srgbClr val="2FAE60"/>
                 </a:solidFill>
                 <a:latin typeface="Calibri" pitchFamily="34" charset="0"/>
                 <a:ea typeface="Calibri" pitchFamily="34" charset="-122"/>
                 <a:cs typeface="Calibri" pitchFamily="34" charset="-120"/>
               </a:rPr>
-              <a:t>RESPONSABLE DE ACTUAR</a:t>
+              <a:t>ACCIÓN RECOMENDADA</a:t>
             </a:r>
             <a:endParaRPr lang="en-US" sz="1050" dirty="0"/>
           </a:p>
@@ -21178,13 +23406,13 @@
       </p:sp>
       <p:sp>
         <p:nvSpPr>
-          <p:cNvPr id="24" name="Text 18"/>
-          <p:cNvSpPr txBox="1"/>
-          <p:nvPr/>
-        </p:nvSpPr>
-        <p:spPr>
-          <a:xfrm>
-            <a:off x="4515002" y="4407408"/>
+          <p:cNvPr id="25" name="REVEAL_case4_0_txt"/>
+          <p:cNvSpPr txBox="1"/>
+          <p:nvPr/>
+        </p:nvSpPr>
+        <p:spPr>
+          <a:xfrm>
+            <a:off x="749808" y="4407408"/>
             <a:ext cx="3161690" cy="1536192"/>
           </a:xfrm>
           <a:prstGeom prst="rect">
@@ -21212,7 +23440,7 @@
                 <a:ea typeface="Calibri" pitchFamily="34" charset="-122"/>
                 <a:cs typeface="Calibri" pitchFamily="34" charset="-120"/>
               </a:rPr>
-              <a:t>Quien evalúa la solicitud, con el respaldo de su jefatura para validar la información.</a:t>
+              <a:t>Verificar la inconsistencia con el solicitante y la documentación antes de continuar con el proceso.</a:t>
             </a:r>
             <a:endParaRPr lang="en-US" sz="1080" dirty="0"/>
           </a:p>
@@ -21220,13 +23448,13 @@
       </p:sp>
       <p:sp>
         <p:nvSpPr>
-          <p:cNvPr id="25" name="Shape 19"/>
+          <p:cNvPr id="26" name="REVEAL_case4_1_bg"/>
           <p:cNvSpPr/>
           <p:nvPr/>
         </p:nvSpPr>
         <p:spPr>
           <a:xfrm>
-            <a:off x="8097317" y="3291840"/>
+            <a:off x="4332122" y="3291840"/>
             <a:ext cx="3527450" cy="2761488"/>
           </a:xfrm>
           <a:prstGeom prst="roundRect">
@@ -21242,27 +23470,27 @@
       </p:sp>
       <p:sp>
         <p:nvSpPr>
-          <p:cNvPr id="26" name="Shape 20"/>
+          <p:cNvPr id="27" name="REVEAL_case4_1_ic"/>
           <p:cNvSpPr/>
           <p:nvPr/>
         </p:nvSpPr>
         <p:spPr>
           <a:xfrm>
-            <a:off x="9632442" y="3456432"/>
+            <a:off x="5867248" y="3456432"/>
             <a:ext cx="457200" cy="457200"/>
           </a:xfrm>
           <a:prstGeom prst="ellipse">
             <a:avLst/>
           </a:prstGeom>
           <a:solidFill>
-            <a:srgbClr val="E0392B"/>
+            <a:srgbClr val="133B6C"/>
           </a:solidFill>
           <a:ln/>
         </p:spPr>
       </p:sp>
       <p:pic>
         <p:nvPicPr>
-          <p:cNvPr id="27" name="Image 3" descr="/tmp/claude-0/-home-user-riesgo/0ff9ff46-1396-5bd8-b3ac-2280dfbbbc55/scratchpad/work/gen/icons/warning_triangle_white.png">    </p:cNvPr>
+          <p:cNvPr id="28" name="REVEAL_case4_1_ic_ic" descr="/tmp/claude-0/-home-user-riesgo/0ff9ff46-1396-5bd8-b3ac-2280dfbbbc55/scratchpad/work/gen/icons/people_group_white.png">    </p:cNvPr>
           <p:cNvPicPr>
             <a:picLocks noChangeAspect="1"/>
           </p:cNvPicPr>
@@ -21276,7 +23504,7 @@
         </p:blipFill>
         <p:spPr>
           <a:xfrm>
-            <a:off x="9742170" y="3566160"/>
+            <a:off x="5976976" y="3566160"/>
             <a:ext cx="237744" cy="237744"/>
           </a:xfrm>
           <a:prstGeom prst="rect">
@@ -21286,13 +23514,13 @@
       </p:pic>
       <p:sp>
         <p:nvSpPr>
-          <p:cNvPr id="28" name="Text 21"/>
-          <p:cNvSpPr txBox="1"/>
-          <p:nvPr/>
-        </p:nvSpPr>
-        <p:spPr>
-          <a:xfrm>
-            <a:off x="8243621" y="4005072"/>
+          <p:cNvPr id="29" name="REVEAL_case4_1_lbl"/>
+          <p:cNvSpPr txBox="1"/>
+          <p:nvPr/>
+        </p:nvSpPr>
+        <p:spPr>
+          <a:xfrm>
+            <a:off x="4478426" y="4005072"/>
             <a:ext cx="3234842" cy="384048"/>
           </a:xfrm>
           <a:prstGeom prst="rect">
@@ -21311,13 +23539,13 @@
             <a:r>
               <a:rPr lang="en-US" sz="1050" b="1" spc="30" kern="0" dirty="0">
                 <a:solidFill>
-                  <a:srgbClr val="E0392B"/>
+                  <a:srgbClr val="133B6C"/>
                 </a:solidFill>
                 <a:latin typeface="Calibri" pitchFamily="34" charset="0"/>
                 <a:ea typeface="Calibri" pitchFamily="34" charset="-122"/>
                 <a:cs typeface="Calibri" pitchFamily="34" charset="-120"/>
               </a:rPr>
-              <a:t>SI NO ACTUAMOS</a:t>
+              <a:t>RESPONSABLE DE ACTUAR</a:t>
             </a:r>
             <a:endParaRPr lang="en-US" sz="1050" dirty="0"/>
           </a:p>
@@ -21325,13 +23553,13 @@
       </p:sp>
       <p:sp>
         <p:nvSpPr>
-          <p:cNvPr id="29" name="Text 22"/>
-          <p:cNvSpPr txBox="1"/>
-          <p:nvPr/>
-        </p:nvSpPr>
-        <p:spPr>
-          <a:xfrm>
-            <a:off x="8280197" y="4407408"/>
+          <p:cNvPr id="30" name="REVEAL_case4_1_txt"/>
+          <p:cNvSpPr txBox="1"/>
+          <p:nvPr/>
+        </p:nvSpPr>
+        <p:spPr>
+          <a:xfrm>
+            <a:off x="4515002" y="4407408"/>
             <a:ext cx="3161690" cy="1536192"/>
           </a:xfrm>
           <a:prstGeom prst="rect">
@@ -21359,7 +23587,7 @@
                 <a:ea typeface="Calibri" pitchFamily="34" charset="-122"/>
                 <a:cs typeface="Calibri" pitchFamily="34" charset="-120"/>
               </a:rPr>
-              <a:t>La Cooperativa podría asumir un riesgo crediticio mayor al que realmente cree estar asumiendo.</a:t>
+              <a:t>Quien evalúa la solicitud, con el respaldo de su jefatura para validar la información.</a:t>
             </a:r>
             <a:endParaRPr lang="en-US" sz="1080" dirty="0"/>
           </a:p>
@@ -21367,14 +23595,80 @@
       </p:sp>
       <p:sp>
         <p:nvSpPr>
-          <p:cNvPr id="30" name="Text 23"/>
-          <p:cNvSpPr txBox="1"/>
-          <p:nvPr/>
-        </p:nvSpPr>
-        <p:spPr>
-          <a:xfrm>
-            <a:off x="566928" y="6473952"/>
-            <a:ext cx="7315200" cy="274320"/>
+          <p:cNvPr id="31" name="REVEAL_case4_2_bg"/>
+          <p:cNvSpPr/>
+          <p:nvPr/>
+        </p:nvSpPr>
+        <p:spPr>
+          <a:xfrm>
+            <a:off x="8097317" y="3291840"/>
+            <a:ext cx="3527450" cy="2761488"/>
+          </a:xfrm>
+          <a:prstGeom prst="roundRect">
+            <a:avLst>
+              <a:gd name="adj" fmla="val 3311"/>
+            </a:avLst>
+          </a:prstGeom>
+          <a:solidFill>
+            <a:srgbClr val="F2F5F9"/>
+          </a:solidFill>
+          <a:ln/>
+        </p:spPr>
+      </p:sp>
+      <p:sp>
+        <p:nvSpPr>
+          <p:cNvPr id="32" name="REVEAL_case4_2_ic"/>
+          <p:cNvSpPr/>
+          <p:nvPr/>
+        </p:nvSpPr>
+        <p:spPr>
+          <a:xfrm>
+            <a:off x="9632442" y="3456432"/>
+            <a:ext cx="457200" cy="457200"/>
+          </a:xfrm>
+          <a:prstGeom prst="ellipse">
+            <a:avLst/>
+          </a:prstGeom>
+          <a:solidFill>
+            <a:srgbClr val="E0392B"/>
+          </a:solidFill>
+          <a:ln/>
+        </p:spPr>
+      </p:sp>
+      <p:pic>
+        <p:nvPicPr>
+          <p:cNvPr id="33" name="REVEAL_case4_2_ic_ic" descr="/tmp/claude-0/-home-user-riesgo/0ff9ff46-1396-5bd8-b3ac-2280dfbbbc55/scratchpad/work/gen/icons/warning_triangle_white.png">    </p:cNvPr>
+          <p:cNvPicPr>
+            <a:picLocks noChangeAspect="1"/>
+          </p:cNvPicPr>
+          <p:nvPr/>
+        </p:nvPicPr>
+        <p:blipFill>
+          <a:blip r:embed="rId5"/>
+          <a:stretch>
+            <a:fillRect/>
+          </a:stretch>
+        </p:blipFill>
+        <p:spPr>
+          <a:xfrm>
+            <a:off x="9742170" y="3566160"/>
+            <a:ext cx="237744" cy="237744"/>
+          </a:xfrm>
+          <a:prstGeom prst="rect">
+            <a:avLst/>
+          </a:prstGeom>
+        </p:spPr>
+      </p:pic>
+      <p:sp>
+        <p:nvSpPr>
+          <p:cNvPr id="34" name="REVEAL_case4_2_lbl"/>
+          <p:cNvSpPr txBox="1"/>
+          <p:nvPr/>
+        </p:nvSpPr>
+        <p:spPr>
+          <a:xfrm>
+            <a:off x="8243621" y="4005072"/>
+            <a:ext cx="3234842" cy="384048"/>
           </a:xfrm>
           <a:prstGeom prst="rect">
             <a:avLst/>
@@ -21386,18 +23680,99 @@
           <a:bodyPr wrap="square" lIns="0" tIns="0" rIns="0" bIns="0" rtlCol="0" anchor="ctr"/>
           <a:lstStyle/>
           <a:p>
-            <a:pPr algn="l" indent="0" marL="0">
-              <a:buNone/>
-            </a:pPr>
-            <a:r>
-              <a:rPr lang="en-US" sz="900" dirty="0">
-                <a:solidFill>
-                  <a:srgbClr val="5B6B82"/>
+            <a:pPr algn="ctr" indent="0" marL="0">
+              <a:buNone/>
+            </a:pPr>
+            <a:r>
+              <a:rPr lang="en-US" sz="1050" b="1" spc="30" kern="0" dirty="0">
+                <a:solidFill>
+                  <a:srgbClr val="E0392B"/>
                 </a:solidFill>
                 <a:latin typeface="Calibri" pitchFamily="34" charset="0"/>
                 <a:ea typeface="Calibri" pitchFamily="34" charset="-122"/>
                 <a:cs typeface="Calibri" pitchFamily="34" charset="-120"/>
               </a:rPr>
+              <a:t>SI NO ACTUAMOS</a:t>
+            </a:r>
+            <a:endParaRPr lang="en-US" sz="1050" dirty="0"/>
+          </a:p>
+        </p:txBody>
+      </p:sp>
+      <p:sp>
+        <p:nvSpPr>
+          <p:cNvPr id="35" name="REVEAL_case4_2_txt"/>
+          <p:cNvSpPr txBox="1"/>
+          <p:nvPr/>
+        </p:nvSpPr>
+        <p:spPr>
+          <a:xfrm>
+            <a:off x="8280197" y="4407408"/>
+            <a:ext cx="3161690" cy="1536192"/>
+          </a:xfrm>
+          <a:prstGeom prst="rect">
+            <a:avLst/>
+          </a:prstGeom>
+          <a:noFill/>
+          <a:ln/>
+        </p:spPr>
+        <p:txBody>
+          <a:bodyPr wrap="square" lIns="0" tIns="0" rIns="0" bIns="0" rtlCol="0" anchor="ctr"/>
+          <a:lstStyle/>
+          <a:p>
+            <a:pPr algn="ctr" indent="0" marL="0">
+              <a:lnSpc>
+                <a:spcPct val="112000"/>
+              </a:lnSpc>
+              <a:buNone/>
+            </a:pPr>
+            <a:r>
+              <a:rPr lang="en-US" sz="1080" dirty="0">
+                <a:solidFill>
+                  <a:srgbClr val="243044"/>
+                </a:solidFill>
+                <a:latin typeface="Calibri" pitchFamily="34" charset="0"/>
+                <a:ea typeface="Calibri" pitchFamily="34" charset="-122"/>
+                <a:cs typeface="Calibri" pitchFamily="34" charset="-120"/>
+              </a:rPr>
+              <a:t>La Cooperativa podría asumir un riesgo crediticio mayor al que realmente cree estar asumiendo.</a:t>
+            </a:r>
+            <a:endParaRPr lang="en-US" sz="1080" dirty="0"/>
+          </a:p>
+        </p:txBody>
+      </p:sp>
+      <p:sp>
+        <p:nvSpPr>
+          <p:cNvPr id="36" name="Text 28"/>
+          <p:cNvSpPr txBox="1"/>
+          <p:nvPr/>
+        </p:nvSpPr>
+        <p:spPr>
+          <a:xfrm>
+            <a:off x="566928" y="6473952"/>
+            <a:ext cx="7315200" cy="274320"/>
+          </a:xfrm>
+          <a:prstGeom prst="rect">
+            <a:avLst/>
+          </a:prstGeom>
+          <a:noFill/>
+          <a:ln/>
+        </p:spPr>
+        <p:txBody>
+          <a:bodyPr wrap="square" lIns="0" tIns="0" rIns="0" bIns="0" rtlCol="0" anchor="ctr"/>
+          <a:lstStyle/>
+          <a:p>
+            <a:pPr algn="l" indent="0" marL="0">
+              <a:buNone/>
+            </a:pPr>
+            <a:r>
+              <a:rPr lang="en-US" sz="900" dirty="0">
+                <a:solidFill>
+                  <a:srgbClr val="5B6B82"/>
+                </a:solidFill>
+                <a:latin typeface="Calibri" pitchFamily="34" charset="0"/>
+                <a:ea typeface="Calibri" pitchFamily="34" charset="-122"/>
+                <a:cs typeface="Calibri" pitchFamily="34" charset="-120"/>
+              </a:rPr>
               <a:t>GESTIÓN INTEGRAL DE RIESGOS  ·  COMEDICA DE R.L.</a:t>
             </a:r>
             <a:endParaRPr lang="en-US" sz="900" dirty="0"/>
@@ -21406,7 +23781,7 @@
       </p:sp>
       <p:sp>
         <p:nvSpPr>
-          <p:cNvPr id="31" name="Text 24"/>
+          <p:cNvPr id="37" name="Text 29"/>
           <p:cNvSpPr txBox="1"/>
           <p:nvPr/>
         </p:nvSpPr>
@@ -21448,6 +23823,327 @@
   <p:clrMapOvr>
     <a:masterClrMapping/>
   </p:clrMapOvr>
+  <p:timing>
+    <p:tnLst>
+      <p:par>
+        <p:cTn id="1" dur="indefinite" restart="never" nodeType="tmRoot">
+          <p:childTnLst>
+            <p:seq concurrent="1" nextAc="seek">
+              <p:cTn id="2" dur="indefinite" nodeType="mainSeq">
+                <p:childTnLst>
+                  <p:par>
+                    <p:cTn id="3" fill="hold">
+                      <p:stCondLst>
+                        <p:cond delay="indefinite"/>
+                      </p:stCondLst>
+                      <p:childTnLst>
+                        <p:par>
+                          <p:cTn id="4" presetID="2" presetClass="entr" presetSubtype="0" fill="hold" nodeType="clickEffect">
+                            <p:stCondLst>
+                              <p:cond delay="0"/>
+                            </p:stCondLst>
+                            <p:childTnLst>
+                              <p:set>
+                                <p:cBhvr>
+                                  <p:cTn id="5" dur="1" fill="hold">
+                                    <p:stCondLst>
+                                      <p:cond delay="0"/>
+                                    </p:stCondLst>
+                                  </p:cTn>
+                                  <p:tgtEl>
+                                    <p:spTgt spid="21"/>
+                                  </p:tgtEl>
+                                  <p:attrNameLst>
+                                    <p:attrName>style.visibility</p:attrName>
+                                  </p:attrNameLst>
+                                </p:cBhvr>
+                                <p:to>
+                                  <p:strVal val="visible"/>
+                                </p:to>
+                              </p:set>
+                              <p:set>
+                                <p:cBhvr>
+                                  <p:cTn id="6" dur="1" fill="hold">
+                                    <p:stCondLst>
+                                      <p:cond delay="0"/>
+                                    </p:stCondLst>
+                                  </p:cTn>
+                                  <p:tgtEl>
+                                    <p:spTgt spid="22"/>
+                                  </p:tgtEl>
+                                  <p:attrNameLst>
+                                    <p:attrName>style.visibility</p:attrName>
+                                  </p:attrNameLst>
+                                </p:cBhvr>
+                                <p:to>
+                                  <p:strVal val="visible"/>
+                                </p:to>
+                              </p:set>
+                              <p:set>
+                                <p:cBhvr>
+                                  <p:cTn id="7" dur="1" fill="hold">
+                                    <p:stCondLst>
+                                      <p:cond delay="0"/>
+                                    </p:stCondLst>
+                                  </p:cTn>
+                                  <p:tgtEl>
+                                    <p:spTgt spid="23"/>
+                                  </p:tgtEl>
+                                  <p:attrNameLst>
+                                    <p:attrName>style.visibility</p:attrName>
+                                  </p:attrNameLst>
+                                </p:cBhvr>
+                                <p:to>
+                                  <p:strVal val="visible"/>
+                                </p:to>
+                              </p:set>
+                              <p:set>
+                                <p:cBhvr>
+                                  <p:cTn id="8" dur="1" fill="hold">
+                                    <p:stCondLst>
+                                      <p:cond delay="0"/>
+                                    </p:stCondLst>
+                                  </p:cTn>
+                                  <p:tgtEl>
+                                    <p:spTgt spid="24"/>
+                                  </p:tgtEl>
+                                  <p:attrNameLst>
+                                    <p:attrName>style.visibility</p:attrName>
+                                  </p:attrNameLst>
+                                </p:cBhvr>
+                                <p:to>
+                                  <p:strVal val="visible"/>
+                                </p:to>
+                              </p:set>
+                              <p:set>
+                                <p:cBhvr>
+                                  <p:cTn id="9" dur="1" fill="hold">
+                                    <p:stCondLst>
+                                      <p:cond delay="0"/>
+                                    </p:stCondLst>
+                                  </p:cTn>
+                                  <p:tgtEl>
+                                    <p:spTgt spid="25"/>
+                                  </p:tgtEl>
+                                  <p:attrNameLst>
+                                    <p:attrName>style.visibility</p:attrName>
+                                  </p:attrNameLst>
+                                </p:cBhvr>
+                                <p:to>
+                                  <p:strVal val="visible"/>
+                                </p:to>
+                              </p:set>
+                              <p:set>
+                                <p:cBhvr>
+                                  <p:cTn id="10" dur="1" fill="hold">
+                                    <p:stCondLst>
+                                      <p:cond delay="0"/>
+                                    </p:stCondLst>
+                                  </p:cTn>
+                                  <p:tgtEl>
+                                    <p:spTgt spid="26"/>
+                                  </p:tgtEl>
+                                  <p:attrNameLst>
+                                    <p:attrName>style.visibility</p:attrName>
+                                  </p:attrNameLst>
+                                </p:cBhvr>
+                                <p:to>
+                                  <p:strVal val="visible"/>
+                                </p:to>
+                              </p:set>
+                              <p:set>
+                                <p:cBhvr>
+                                  <p:cTn id="11" dur="1" fill="hold">
+                                    <p:stCondLst>
+                                      <p:cond delay="0"/>
+                                    </p:stCondLst>
+                                  </p:cTn>
+                                  <p:tgtEl>
+                                    <p:spTgt spid="27"/>
+                                  </p:tgtEl>
+                                  <p:attrNameLst>
+                                    <p:attrName>style.visibility</p:attrName>
+                                  </p:attrNameLst>
+                                </p:cBhvr>
+                                <p:to>
+                                  <p:strVal val="visible"/>
+                                </p:to>
+                              </p:set>
+                              <p:set>
+                                <p:cBhvr>
+                                  <p:cTn id="12" dur="1" fill="hold">
+                                    <p:stCondLst>
+                                      <p:cond delay="0"/>
+                                    </p:stCondLst>
+                                  </p:cTn>
+                                  <p:tgtEl>
+                                    <p:spTgt spid="28"/>
+                                  </p:tgtEl>
+                                  <p:attrNameLst>
+                                    <p:attrName>style.visibility</p:attrName>
+                                  </p:attrNameLst>
+                                </p:cBhvr>
+                                <p:to>
+                                  <p:strVal val="visible"/>
+                                </p:to>
+                              </p:set>
+                              <p:set>
+                                <p:cBhvr>
+                                  <p:cTn id="13" dur="1" fill="hold">
+                                    <p:stCondLst>
+                                      <p:cond delay="0"/>
+                                    </p:stCondLst>
+                                  </p:cTn>
+                                  <p:tgtEl>
+                                    <p:spTgt spid="29"/>
+                                  </p:tgtEl>
+                                  <p:attrNameLst>
+                                    <p:attrName>style.visibility</p:attrName>
+                                  </p:attrNameLst>
+                                </p:cBhvr>
+                                <p:to>
+                                  <p:strVal val="visible"/>
+                                </p:to>
+                              </p:set>
+                              <p:set>
+                                <p:cBhvr>
+                                  <p:cTn id="14" dur="1" fill="hold">
+                                    <p:stCondLst>
+                                      <p:cond delay="0"/>
+                                    </p:stCondLst>
+                                  </p:cTn>
+                                  <p:tgtEl>
+                                    <p:spTgt spid="30"/>
+                                  </p:tgtEl>
+                                  <p:attrNameLst>
+                                    <p:attrName>style.visibility</p:attrName>
+                                  </p:attrNameLst>
+                                </p:cBhvr>
+                                <p:to>
+                                  <p:strVal val="visible"/>
+                                </p:to>
+                              </p:set>
+                              <p:set>
+                                <p:cBhvr>
+                                  <p:cTn id="15" dur="1" fill="hold">
+                                    <p:stCondLst>
+                                      <p:cond delay="0"/>
+                                    </p:stCondLst>
+                                  </p:cTn>
+                                  <p:tgtEl>
+                                    <p:spTgt spid="31"/>
+                                  </p:tgtEl>
+                                  <p:attrNameLst>
+                                    <p:attrName>style.visibility</p:attrName>
+                                  </p:attrNameLst>
+                                </p:cBhvr>
+                                <p:to>
+                                  <p:strVal val="visible"/>
+                                </p:to>
+                              </p:set>
+                              <p:set>
+                                <p:cBhvr>
+                                  <p:cTn id="16" dur="1" fill="hold">
+                                    <p:stCondLst>
+                                      <p:cond delay="0"/>
+                                    </p:stCondLst>
+                                  </p:cTn>
+                                  <p:tgtEl>
+                                    <p:spTgt spid="32"/>
+                                  </p:tgtEl>
+                                  <p:attrNameLst>
+                                    <p:attrName>style.visibility</p:attrName>
+                                  </p:attrNameLst>
+                                </p:cBhvr>
+                                <p:to>
+                                  <p:strVal val="visible"/>
+                                </p:to>
+                              </p:set>
+                              <p:set>
+                                <p:cBhvr>
+                                  <p:cTn id="17" dur="1" fill="hold">
+                                    <p:stCondLst>
+                                      <p:cond delay="0"/>
+                                    </p:stCondLst>
+                                  </p:cTn>
+                                  <p:tgtEl>
+                                    <p:spTgt spid="33"/>
+                                  </p:tgtEl>
+                                  <p:attrNameLst>
+                                    <p:attrName>style.visibility</p:attrName>
+                                  </p:attrNameLst>
+                                </p:cBhvr>
+                                <p:to>
+                                  <p:strVal val="visible"/>
+                                </p:to>
+                              </p:set>
+                              <p:set>
+                                <p:cBhvr>
+                                  <p:cTn id="18" dur="1" fill="hold">
+                                    <p:stCondLst>
+                                      <p:cond delay="0"/>
+                                    </p:stCondLst>
+                                  </p:cTn>
+                                  <p:tgtEl>
+                                    <p:spTgt spid="34"/>
+                                  </p:tgtEl>
+                                  <p:attrNameLst>
+                                    <p:attrName>style.visibility</p:attrName>
+                                  </p:attrNameLst>
+                                </p:cBhvr>
+                                <p:to>
+                                  <p:strVal val="visible"/>
+                                </p:to>
+                              </p:set>
+                              <p:set>
+                                <p:cBhvr>
+                                  <p:cTn id="19" dur="1" fill="hold">
+                                    <p:stCondLst>
+                                      <p:cond delay="0"/>
+                                    </p:stCondLst>
+                                  </p:cTn>
+                                  <p:tgtEl>
+                                    <p:spTgt spid="35"/>
+                                  </p:tgtEl>
+                                  <p:attrNameLst>
+                                    <p:attrName>style.visibility</p:attrName>
+                                  </p:attrNameLst>
+                                </p:cBhvr>
+                                <p:to>
+                                  <p:strVal val="visible"/>
+                                </p:to>
+                              </p:set>
+                            </p:childTnLst>
+                          </p:cTn>
+                        </p:par>
+                      </p:childTnLst>
+                    </p:cTn>
+                  </p:par>
+                </p:childTnLst>
+              </p:cTn>
+            </p:seq>
+          </p:childTnLst>
+        </p:cTn>
+      </p:par>
+    </p:tnLst>
+    <p:bldLst>
+      <p:bldP spid="21" grpId="0"/>
+      <p:bldP spid="22" grpId="0"/>
+      <p:bldP spid="23" grpId="0"/>
+      <p:bldP spid="24" grpId="0"/>
+      <p:bldP spid="25" grpId="0"/>
+      <p:bldP spid="26" grpId="0"/>
+      <p:bldP spid="27" grpId="0"/>
+      <p:bldP spid="28" grpId="0"/>
+      <p:bldP spid="29" grpId="0"/>
+      <p:bldP spid="30" grpId="0"/>
+      <p:bldP spid="31" grpId="0"/>
+      <p:bldP spid="32" grpId="0"/>
+      <p:bldP spid="33" grpId="0"/>
+      <p:bldP spid="34" grpId="0"/>
+      <p:bldP spid="35" grpId="0"/>
+    </p:bldLst>
+  </p:timing>
 </p:sld>
 </file>
 
@@ -31030,6 +33726,129 @@
             </a:avLst>
           </a:prstGeom>
           <a:solidFill>
+            <a:srgbClr val="F2F5F9"/>
+          </a:solidFill>
+          <a:ln/>
+        </p:spPr>
+      </p:sp>
+      <p:sp>
+        <p:nvSpPr>
+          <p:cNvPr id="20" name="Shape 16"/>
+          <p:cNvSpPr/>
+          <p:nvPr/>
+        </p:nvSpPr>
+        <p:spPr>
+          <a:xfrm>
+            <a:off x="768096" y="4253484"/>
+            <a:ext cx="402336" cy="402336"/>
+          </a:xfrm>
+          <a:prstGeom prst="ellipse">
+            <a:avLst/>
+          </a:prstGeom>
+          <a:solidFill>
+            <a:srgbClr val="133B6C"/>
+          </a:solidFill>
+          <a:ln/>
+        </p:spPr>
+      </p:sp>
+      <p:sp>
+        <p:nvSpPr>
+          <p:cNvPr id="21" name="Text 17"/>
+          <p:cNvSpPr txBox="1"/>
+          <p:nvPr/>
+        </p:nvSpPr>
+        <p:spPr>
+          <a:xfrm>
+            <a:off x="768096" y="4244340"/>
+            <a:ext cx="402336" cy="402336"/>
+          </a:xfrm>
+          <a:prstGeom prst="rect">
+            <a:avLst/>
+          </a:prstGeom>
+          <a:noFill/>
+          <a:ln/>
+        </p:spPr>
+        <p:txBody>
+          <a:bodyPr wrap="square" lIns="0" tIns="0" rIns="0" bIns="0" rtlCol="0" anchor="ctr"/>
+          <a:lstStyle/>
+          <a:p>
+            <a:pPr algn="ctr" indent="0" marL="0">
+              <a:buNone/>
+            </a:pPr>
+            <a:r>
+              <a:rPr lang="en-US" sz="1496" b="1" dirty="0">
+                <a:solidFill>
+                  <a:srgbClr val="FFFFFF"/>
+                </a:solidFill>
+                <a:latin typeface="Cambria" pitchFamily="34" charset="0"/>
+                <a:ea typeface="Cambria" pitchFamily="34" charset="-122"/>
+                <a:cs typeface="Cambria" pitchFamily="34" charset="-120"/>
+              </a:rPr>
+              <a:t>C</a:t>
+            </a:r>
+            <a:endParaRPr lang="en-US" sz="1496" dirty="0"/>
+          </a:p>
+        </p:txBody>
+      </p:sp>
+      <p:sp>
+        <p:nvSpPr>
+          <p:cNvPr id="22" name="Text 18"/>
+          <p:cNvSpPr txBox="1"/>
+          <p:nvPr/>
+        </p:nvSpPr>
+        <p:spPr>
+          <a:xfrm>
+            <a:off x="1344168" y="4200144"/>
+            <a:ext cx="10051999" cy="509016"/>
+          </a:xfrm>
+          <a:prstGeom prst="rect">
+            <a:avLst/>
+          </a:prstGeom>
+          <a:noFill/>
+          <a:ln/>
+        </p:spPr>
+        <p:txBody>
+          <a:bodyPr wrap="square" lIns="0" tIns="0" rIns="0" bIns="0" rtlCol="0" anchor="ctr"/>
+          <a:lstStyle/>
+          <a:p>
+            <a:pPr indent="0" marL="0">
+              <a:lnSpc>
+                <a:spcPct val="102000"/>
+              </a:lnSpc>
+              <a:buNone/>
+            </a:pPr>
+            <a:r>
+              <a:rPr lang="en-US" sz="1200" dirty="0">
+                <a:solidFill>
+                  <a:srgbClr val="243044"/>
+                </a:solidFill>
+                <a:latin typeface="Calibri" pitchFamily="34" charset="0"/>
+                <a:ea typeface="Calibri" pitchFamily="34" charset="-122"/>
+                <a:cs typeface="Calibri" pitchFamily="34" charset="-120"/>
+              </a:rPr>
+              <a:t>La protejo de la vista de otros y reporto la situación de inmediato.</a:t>
+            </a:r>
+            <a:endParaRPr lang="en-US" sz="1200" dirty="0"/>
+          </a:p>
+        </p:txBody>
+      </p:sp>
+      <p:sp>
+        <p:nvSpPr>
+          <p:cNvPr id="23" name="REVEAL_sq_opt"/>
+          <p:cNvSpPr/>
+          <p:nvPr/>
+        </p:nvSpPr>
+        <p:spPr>
+          <a:xfrm>
+            <a:off x="566928" y="4200144"/>
+            <a:ext cx="11057839" cy="509016"/>
+          </a:xfrm>
+          <a:prstGeom prst="roundRect">
+            <a:avLst>
+              <a:gd name="adj" fmla="val 16168"/>
+            </a:avLst>
+          </a:prstGeom>
+          <a:solidFill>
             <a:srgbClr val="E2F4E9"/>
           </a:solidFill>
           <a:ln/>
@@ -31037,7 +33856,7 @@
       </p:sp>
       <p:sp>
         <p:nvSpPr>
-          <p:cNvPr id="20" name="Shape 16"/>
+          <p:cNvPr id="24" name="REVEAL_sq_optbadge"/>
           <p:cNvSpPr/>
           <p:nvPr/>
         </p:nvSpPr>
@@ -31057,7 +33876,7 @@
       </p:sp>
       <p:pic>
         <p:nvPicPr>
-          <p:cNvPr id="21" name="Image 1" descr="/tmp/claude-0/-home-user-riesgo/0ff9ff46-1396-5bd8-b3ac-2280dfbbbc55/scratchpad/work/gen/icons/check_circle_white.png">    </p:cNvPr>
+          <p:cNvPr id="25" name="REVEAL_sq_optbadge_ic" descr="/tmp/claude-0/-home-user-riesgo/0ff9ff46-1396-5bd8-b3ac-2280dfbbbc55/scratchpad/work/gen/icons/check_circle_white.png">    </p:cNvPr>
           <p:cNvPicPr>
             <a:picLocks noChangeAspect="1"/>
           </p:cNvPicPr>
@@ -31081,7 +33900,7 @@
       </p:pic>
       <p:sp>
         <p:nvSpPr>
-          <p:cNvPr id="22" name="Text 17"/>
+          <p:cNvPr id="26" name="REVEAL_sq_opttext"/>
           <p:cNvSpPr txBox="1"/>
           <p:nvPr/>
         </p:nvSpPr>
@@ -31123,7 +33942,7 @@
       </p:sp>
       <p:sp>
         <p:nvSpPr>
-          <p:cNvPr id="23" name="Text 18"/>
+          <p:cNvPr id="27" name="REVEAL_sq_whylabel"/>
           <p:cNvSpPr txBox="1"/>
           <p:nvPr/>
         </p:nvSpPr>
@@ -31162,7 +33981,7 @@
       </p:sp>
       <p:sp>
         <p:nvSpPr>
-          <p:cNvPr id="24" name="Shape 19"/>
+          <p:cNvPr id="28" name="REVEAL_sq_whycard"/>
           <p:cNvSpPr/>
           <p:nvPr/>
         </p:nvSpPr>
@@ -31184,7 +34003,7 @@
       </p:sp>
       <p:sp>
         <p:nvSpPr>
-          <p:cNvPr id="25" name="Text 20"/>
+          <p:cNvPr id="29" name="REVEAL_sq_whytext"/>
           <p:cNvSpPr txBox="1"/>
           <p:nvPr/>
         </p:nvSpPr>
@@ -31226,7 +34045,7 @@
       </p:sp>
       <p:sp>
         <p:nvSpPr>
-          <p:cNvPr id="26" name="Shape 21"/>
+          <p:cNvPr id="30" name="REVEAL_sq_note"/>
           <p:cNvSpPr/>
           <p:nvPr/>
         </p:nvSpPr>
@@ -31248,7 +34067,7 @@
       </p:sp>
       <p:sp>
         <p:nvSpPr>
-          <p:cNvPr id="27" name="Shape 22"/>
+          <p:cNvPr id="31" name="REVEAL_sq_notebadge"/>
           <p:cNvSpPr/>
           <p:nvPr/>
         </p:nvSpPr>
@@ -31268,7 +34087,7 @@
       </p:sp>
       <p:pic>
         <p:nvPicPr>
-          <p:cNvPr id="28" name="Image 2" descr="/tmp/claude-0/-home-user-riesgo/0ff9ff46-1396-5bd8-b3ac-2280dfbbbc55/scratchpad/work/gen/icons/mail_white.png">    </p:cNvPr>
+          <p:cNvPr id="32" name="REVEAL_sq_notebadge_ic" descr="/tmp/claude-0/-home-user-riesgo/0ff9ff46-1396-5bd8-b3ac-2280dfbbbc55/scratchpad/work/gen/icons/mail_white.png">    </p:cNvPr>
           <p:cNvPicPr>
             <a:picLocks noChangeAspect="1"/>
           </p:cNvPicPr>
@@ -31292,7 +34111,7 @@
       </p:pic>
       <p:sp>
         <p:nvSpPr>
-          <p:cNvPr id="29" name="Text 23"/>
+          <p:cNvPr id="33" name="REVEAL_sq_notetext"/>
           <p:cNvSpPr txBox="1"/>
           <p:nvPr/>
         </p:nvSpPr>
@@ -31334,7 +34153,7 @@
       </p:sp>
       <p:sp>
         <p:nvSpPr>
-          <p:cNvPr id="30" name="Text 24"/>
+          <p:cNvPr id="34" name="Text 28"/>
           <p:cNvSpPr txBox="1"/>
           <p:nvPr/>
         </p:nvSpPr>
@@ -31373,7 +34192,7 @@
       </p:sp>
       <p:sp>
         <p:nvSpPr>
-          <p:cNvPr id="31" name="Text 25"/>
+          <p:cNvPr id="35" name="Text 29"/>
           <p:cNvSpPr txBox="1"/>
           <p:nvPr/>
         </p:nvSpPr>
@@ -31415,6 +34234,251 @@
   <p:clrMapOvr>
     <a:masterClrMapping/>
   </p:clrMapOvr>
+  <p:timing>
+    <p:tnLst>
+      <p:par>
+        <p:cTn id="1" dur="indefinite" restart="never" nodeType="tmRoot">
+          <p:childTnLst>
+            <p:seq concurrent="1" nextAc="seek">
+              <p:cTn id="2" dur="indefinite" nodeType="mainSeq">
+                <p:childTnLst>
+                  <p:par>
+                    <p:cTn id="3" fill="hold">
+                      <p:stCondLst>
+                        <p:cond delay="indefinite"/>
+                      </p:stCondLst>
+                      <p:childTnLst>
+                        <p:par>
+                          <p:cTn id="4" presetID="2" presetClass="entr" presetSubtype="0" fill="hold" nodeType="clickEffect">
+                            <p:stCondLst>
+                              <p:cond delay="0"/>
+                            </p:stCondLst>
+                            <p:childTnLst>
+                              <p:set>
+                                <p:cBhvr>
+                                  <p:cTn id="5" dur="1" fill="hold">
+                                    <p:stCondLst>
+                                      <p:cond delay="0"/>
+                                    </p:stCondLst>
+                                  </p:cTn>
+                                  <p:tgtEl>
+                                    <p:spTgt spid="23"/>
+                                  </p:tgtEl>
+                                  <p:attrNameLst>
+                                    <p:attrName>style.visibility</p:attrName>
+                                  </p:attrNameLst>
+                                </p:cBhvr>
+                                <p:to>
+                                  <p:strVal val="visible"/>
+                                </p:to>
+                              </p:set>
+                              <p:set>
+                                <p:cBhvr>
+                                  <p:cTn id="6" dur="1" fill="hold">
+                                    <p:stCondLst>
+                                      <p:cond delay="0"/>
+                                    </p:stCondLst>
+                                  </p:cTn>
+                                  <p:tgtEl>
+                                    <p:spTgt spid="24"/>
+                                  </p:tgtEl>
+                                  <p:attrNameLst>
+                                    <p:attrName>style.visibility</p:attrName>
+                                  </p:attrNameLst>
+                                </p:cBhvr>
+                                <p:to>
+                                  <p:strVal val="visible"/>
+                                </p:to>
+                              </p:set>
+                              <p:set>
+                                <p:cBhvr>
+                                  <p:cTn id="7" dur="1" fill="hold">
+                                    <p:stCondLst>
+                                      <p:cond delay="0"/>
+                                    </p:stCondLst>
+                                  </p:cTn>
+                                  <p:tgtEl>
+                                    <p:spTgt spid="25"/>
+                                  </p:tgtEl>
+                                  <p:attrNameLst>
+                                    <p:attrName>style.visibility</p:attrName>
+                                  </p:attrNameLst>
+                                </p:cBhvr>
+                                <p:to>
+                                  <p:strVal val="visible"/>
+                                </p:to>
+                              </p:set>
+                              <p:set>
+                                <p:cBhvr>
+                                  <p:cTn id="8" dur="1" fill="hold">
+                                    <p:stCondLst>
+                                      <p:cond delay="0"/>
+                                    </p:stCondLst>
+                                  </p:cTn>
+                                  <p:tgtEl>
+                                    <p:spTgt spid="26"/>
+                                  </p:tgtEl>
+                                  <p:attrNameLst>
+                                    <p:attrName>style.visibility</p:attrName>
+                                  </p:attrNameLst>
+                                </p:cBhvr>
+                                <p:to>
+                                  <p:strVal val="visible"/>
+                                </p:to>
+                              </p:set>
+                              <p:set>
+                                <p:cBhvr>
+                                  <p:cTn id="9" dur="1" fill="hold">
+                                    <p:stCondLst>
+                                      <p:cond delay="0"/>
+                                    </p:stCondLst>
+                                  </p:cTn>
+                                  <p:tgtEl>
+                                    <p:spTgt spid="27"/>
+                                  </p:tgtEl>
+                                  <p:attrNameLst>
+                                    <p:attrName>style.visibility</p:attrName>
+                                  </p:attrNameLst>
+                                </p:cBhvr>
+                                <p:to>
+                                  <p:strVal val="visible"/>
+                                </p:to>
+                              </p:set>
+                              <p:set>
+                                <p:cBhvr>
+                                  <p:cTn id="10" dur="1" fill="hold">
+                                    <p:stCondLst>
+                                      <p:cond delay="0"/>
+                                    </p:stCondLst>
+                                  </p:cTn>
+                                  <p:tgtEl>
+                                    <p:spTgt spid="28"/>
+                                  </p:tgtEl>
+                                  <p:attrNameLst>
+                                    <p:attrName>style.visibility</p:attrName>
+                                  </p:attrNameLst>
+                                </p:cBhvr>
+                                <p:to>
+                                  <p:strVal val="visible"/>
+                                </p:to>
+                              </p:set>
+                              <p:set>
+                                <p:cBhvr>
+                                  <p:cTn id="11" dur="1" fill="hold">
+                                    <p:stCondLst>
+                                      <p:cond delay="0"/>
+                                    </p:stCondLst>
+                                  </p:cTn>
+                                  <p:tgtEl>
+                                    <p:spTgt spid="29"/>
+                                  </p:tgtEl>
+                                  <p:attrNameLst>
+                                    <p:attrName>style.visibility</p:attrName>
+                                  </p:attrNameLst>
+                                </p:cBhvr>
+                                <p:to>
+                                  <p:strVal val="visible"/>
+                                </p:to>
+                              </p:set>
+                              <p:set>
+                                <p:cBhvr>
+                                  <p:cTn id="12" dur="1" fill="hold">
+                                    <p:stCondLst>
+                                      <p:cond delay="0"/>
+                                    </p:stCondLst>
+                                  </p:cTn>
+                                  <p:tgtEl>
+                                    <p:spTgt spid="30"/>
+                                  </p:tgtEl>
+                                  <p:attrNameLst>
+                                    <p:attrName>style.visibility</p:attrName>
+                                  </p:attrNameLst>
+                                </p:cBhvr>
+                                <p:to>
+                                  <p:strVal val="visible"/>
+                                </p:to>
+                              </p:set>
+                              <p:set>
+                                <p:cBhvr>
+                                  <p:cTn id="13" dur="1" fill="hold">
+                                    <p:stCondLst>
+                                      <p:cond delay="0"/>
+                                    </p:stCondLst>
+                                  </p:cTn>
+                                  <p:tgtEl>
+                                    <p:spTgt spid="31"/>
+                                  </p:tgtEl>
+                                  <p:attrNameLst>
+                                    <p:attrName>style.visibility</p:attrName>
+                                  </p:attrNameLst>
+                                </p:cBhvr>
+                                <p:to>
+                                  <p:strVal val="visible"/>
+                                </p:to>
+                              </p:set>
+                              <p:set>
+                                <p:cBhvr>
+                                  <p:cTn id="14" dur="1" fill="hold">
+                                    <p:stCondLst>
+                                      <p:cond delay="0"/>
+                                    </p:stCondLst>
+                                  </p:cTn>
+                                  <p:tgtEl>
+                                    <p:spTgt spid="32"/>
+                                  </p:tgtEl>
+                                  <p:attrNameLst>
+                                    <p:attrName>style.visibility</p:attrName>
+                                  </p:attrNameLst>
+                                </p:cBhvr>
+                                <p:to>
+                                  <p:strVal val="visible"/>
+                                </p:to>
+                              </p:set>
+                              <p:set>
+                                <p:cBhvr>
+                                  <p:cTn id="15" dur="1" fill="hold">
+                                    <p:stCondLst>
+                                      <p:cond delay="0"/>
+                                    </p:stCondLst>
+                                  </p:cTn>
+                                  <p:tgtEl>
+                                    <p:spTgt spid="33"/>
+                                  </p:tgtEl>
+                                  <p:attrNameLst>
+                                    <p:attrName>style.visibility</p:attrName>
+                                  </p:attrNameLst>
+                                </p:cBhvr>
+                                <p:to>
+                                  <p:strVal val="visible"/>
+                                </p:to>
+                              </p:set>
+                            </p:childTnLst>
+                          </p:cTn>
+                        </p:par>
+                      </p:childTnLst>
+                    </p:cTn>
+                  </p:par>
+                </p:childTnLst>
+              </p:cTn>
+            </p:seq>
+          </p:childTnLst>
+        </p:cTn>
+      </p:par>
+    </p:tnLst>
+    <p:bldLst>
+      <p:bldP spid="23" grpId="0"/>
+      <p:bldP spid="24" grpId="0"/>
+      <p:bldP spid="25" grpId="0"/>
+      <p:bldP spid="26" grpId="0"/>
+      <p:bldP spid="27" grpId="0"/>
+      <p:bldP spid="28" grpId="0"/>
+      <p:bldP spid="29" grpId="0"/>
+      <p:bldP spid="30" grpId="0"/>
+      <p:bldP spid="31" grpId="0"/>
+      <p:bldP spid="32" grpId="0"/>
+      <p:bldP spid="33" grpId="0"/>
+    </p:bldLst>
+  </p:timing>
 </p:sld>
 </file>
 

--- a/capacitacion-riesgos-2025/CAPACITACION_RIESGOS_2025.pptx
+++ b/capacitacion-riesgos-2025/CAPACITACION_RIESGOS_2025.pptx
@@ -8067,137 +8067,146 @@
                       </p:stCondLst>
                       <p:childTnLst>
                         <p:par>
-                          <p:cTn id="4" presetID="2" presetClass="entr" presetSubtype="0" fill="hold" nodeType="clickEffect">
+                          <p:cTn id="4" fill="hold">
                             <p:stCondLst>
                               <p:cond delay="0"/>
                             </p:stCondLst>
                             <p:childTnLst>
-                              <p:set>
-                                <p:cBhvr>
-                                  <p:cTn id="5" dur="1" fill="hold">
-                                    <p:stCondLst>
-                                      <p:cond delay="0"/>
-                                    </p:stCondLst>
-                                  </p:cTn>
-                                  <p:tgtEl>
-                                    <p:spTgt spid="23"/>
-                                  </p:tgtEl>
-                                  <p:attrNameLst>
-                                    <p:attrName>style.visibility</p:attrName>
-                                  </p:attrNameLst>
-                                </p:cBhvr>
-                                <p:to>
-                                  <p:strVal val="visible"/>
-                                </p:to>
-                              </p:set>
-                              <p:set>
-                                <p:cBhvr>
-                                  <p:cTn id="6" dur="1" fill="hold">
-                                    <p:stCondLst>
-                                      <p:cond delay="0"/>
-                                    </p:stCondLst>
-                                  </p:cTn>
-                                  <p:tgtEl>
-                                    <p:spTgt spid="24"/>
-                                  </p:tgtEl>
-                                  <p:attrNameLst>
-                                    <p:attrName>style.visibility</p:attrName>
-                                  </p:attrNameLst>
-                                </p:cBhvr>
-                                <p:to>
-                                  <p:strVal val="visible"/>
-                                </p:to>
-                              </p:set>
-                              <p:set>
-                                <p:cBhvr>
-                                  <p:cTn id="7" dur="1" fill="hold">
-                                    <p:stCondLst>
-                                      <p:cond delay="0"/>
-                                    </p:stCondLst>
-                                  </p:cTn>
-                                  <p:tgtEl>
-                                    <p:spTgt spid="25"/>
-                                  </p:tgtEl>
-                                  <p:attrNameLst>
-                                    <p:attrName>style.visibility</p:attrName>
-                                  </p:attrNameLst>
-                                </p:cBhvr>
-                                <p:to>
-                                  <p:strVal val="visible"/>
-                                </p:to>
-                              </p:set>
-                              <p:set>
-                                <p:cBhvr>
-                                  <p:cTn id="8" dur="1" fill="hold">
-                                    <p:stCondLst>
-                                      <p:cond delay="0"/>
-                                    </p:stCondLst>
-                                  </p:cTn>
-                                  <p:tgtEl>
-                                    <p:spTgt spid="26"/>
-                                  </p:tgtEl>
-                                  <p:attrNameLst>
-                                    <p:attrName>style.visibility</p:attrName>
-                                  </p:attrNameLst>
-                                </p:cBhvr>
-                                <p:to>
-                                  <p:strVal val="visible"/>
-                                </p:to>
-                              </p:set>
-                              <p:set>
-                                <p:cBhvr>
-                                  <p:cTn id="9" dur="1" fill="hold">
-                                    <p:stCondLst>
-                                      <p:cond delay="0"/>
-                                    </p:stCondLst>
-                                  </p:cTn>
-                                  <p:tgtEl>
-                                    <p:spTgt spid="27"/>
-                                  </p:tgtEl>
-                                  <p:attrNameLst>
-                                    <p:attrName>style.visibility</p:attrName>
-                                  </p:attrNameLst>
-                                </p:cBhvr>
-                                <p:to>
-                                  <p:strVal val="visible"/>
-                                </p:to>
-                              </p:set>
-                              <p:set>
-                                <p:cBhvr>
-                                  <p:cTn id="10" dur="1" fill="hold">
-                                    <p:stCondLst>
-                                      <p:cond delay="0"/>
-                                    </p:stCondLst>
-                                  </p:cTn>
-                                  <p:tgtEl>
-                                    <p:spTgt spid="28"/>
-                                  </p:tgtEl>
-                                  <p:attrNameLst>
-                                    <p:attrName>style.visibility</p:attrName>
-                                  </p:attrNameLst>
-                                </p:cBhvr>
-                                <p:to>
-                                  <p:strVal val="visible"/>
-                                </p:to>
-                              </p:set>
-                              <p:set>
-                                <p:cBhvr>
-                                  <p:cTn id="11" dur="1" fill="hold">
-                                    <p:stCondLst>
-                                      <p:cond delay="0"/>
-                                    </p:stCondLst>
-                                  </p:cTn>
-                                  <p:tgtEl>
-                                    <p:spTgt spid="29"/>
-                                  </p:tgtEl>
-                                  <p:attrNameLst>
-                                    <p:attrName>style.visibility</p:attrName>
-                                  </p:attrNameLst>
-                                </p:cBhvr>
-                                <p:to>
-                                  <p:strVal val="visible"/>
-                                </p:to>
-                              </p:set>
+                              <p:par>
+                                <p:cTn id="5" presetID="2" presetClass="entr" presetSubtype="0" fill="hold" grpId="0" nodeType="clickEffect">
+                                  <p:stCondLst>
+                                    <p:cond delay="0"/>
+                                  </p:stCondLst>
+                                  <p:childTnLst>
+                                    <p:set>
+                                      <p:cBhvr>
+                                        <p:cTn id="6" dur="1" fill="hold">
+                                          <p:stCondLst>
+                                            <p:cond delay="0"/>
+                                          </p:stCondLst>
+                                        </p:cTn>
+                                        <p:tgtEl>
+                                          <p:spTgt spid="23"/>
+                                        </p:tgtEl>
+                                        <p:attrNameLst>
+                                          <p:attrName>style.visibility</p:attrName>
+                                        </p:attrNameLst>
+                                      </p:cBhvr>
+                                      <p:to>
+                                        <p:strVal val="visible"/>
+                                      </p:to>
+                                    </p:set>
+                                    <p:set>
+                                      <p:cBhvr>
+                                        <p:cTn id="7" dur="1" fill="hold">
+                                          <p:stCondLst>
+                                            <p:cond delay="0"/>
+                                          </p:stCondLst>
+                                        </p:cTn>
+                                        <p:tgtEl>
+                                          <p:spTgt spid="24"/>
+                                        </p:tgtEl>
+                                        <p:attrNameLst>
+                                          <p:attrName>style.visibility</p:attrName>
+                                        </p:attrNameLst>
+                                      </p:cBhvr>
+                                      <p:to>
+                                        <p:strVal val="visible"/>
+                                      </p:to>
+                                    </p:set>
+                                    <p:set>
+                                      <p:cBhvr>
+                                        <p:cTn id="8" dur="1" fill="hold">
+                                          <p:stCondLst>
+                                            <p:cond delay="0"/>
+                                          </p:stCondLst>
+                                        </p:cTn>
+                                        <p:tgtEl>
+                                          <p:spTgt spid="25"/>
+                                        </p:tgtEl>
+                                        <p:attrNameLst>
+                                          <p:attrName>style.visibility</p:attrName>
+                                        </p:attrNameLst>
+                                      </p:cBhvr>
+                                      <p:to>
+                                        <p:strVal val="visible"/>
+                                      </p:to>
+                                    </p:set>
+                                    <p:set>
+                                      <p:cBhvr>
+                                        <p:cTn id="9" dur="1" fill="hold">
+                                          <p:stCondLst>
+                                            <p:cond delay="0"/>
+                                          </p:stCondLst>
+                                        </p:cTn>
+                                        <p:tgtEl>
+                                          <p:spTgt spid="26"/>
+                                        </p:tgtEl>
+                                        <p:attrNameLst>
+                                          <p:attrName>style.visibility</p:attrName>
+                                        </p:attrNameLst>
+                                      </p:cBhvr>
+                                      <p:to>
+                                        <p:strVal val="visible"/>
+                                      </p:to>
+                                    </p:set>
+                                    <p:set>
+                                      <p:cBhvr>
+                                        <p:cTn id="10" dur="1" fill="hold">
+                                          <p:stCondLst>
+                                            <p:cond delay="0"/>
+                                          </p:stCondLst>
+                                        </p:cTn>
+                                        <p:tgtEl>
+                                          <p:spTgt spid="27"/>
+                                        </p:tgtEl>
+                                        <p:attrNameLst>
+                                          <p:attrName>style.visibility</p:attrName>
+                                        </p:attrNameLst>
+                                      </p:cBhvr>
+                                      <p:to>
+                                        <p:strVal val="visible"/>
+                                      </p:to>
+                                    </p:set>
+                                    <p:set>
+                                      <p:cBhvr>
+                                        <p:cTn id="11" dur="1" fill="hold">
+                                          <p:stCondLst>
+                                            <p:cond delay="0"/>
+                                          </p:stCondLst>
+                                        </p:cTn>
+                                        <p:tgtEl>
+                                          <p:spTgt spid="28"/>
+                                        </p:tgtEl>
+                                        <p:attrNameLst>
+                                          <p:attrName>style.visibility</p:attrName>
+                                        </p:attrNameLst>
+                                      </p:cBhvr>
+                                      <p:to>
+                                        <p:strVal val="visible"/>
+                                      </p:to>
+                                    </p:set>
+                                    <p:set>
+                                      <p:cBhvr>
+                                        <p:cTn id="12" dur="1" fill="hold">
+                                          <p:stCondLst>
+                                            <p:cond delay="0"/>
+                                          </p:stCondLst>
+                                        </p:cTn>
+                                        <p:tgtEl>
+                                          <p:spTgt spid="29"/>
+                                        </p:tgtEl>
+                                        <p:attrNameLst>
+                                          <p:attrName>style.visibility</p:attrName>
+                                        </p:attrNameLst>
+                                      </p:cBhvr>
+                                      <p:to>
+                                        <p:strVal val="visible"/>
+                                      </p:to>
+                                    </p:set>
+                                  </p:childTnLst>
+                                </p:cTn>
+                              </p:par>
                             </p:childTnLst>
                           </p:cTn>
                         </p:par>
@@ -8206,6 +8215,20 @@
                   </p:par>
                 </p:childTnLst>
               </p:cTn>
+              <p:prevCondLst>
+                <p:cond evt="onPrev" delay="0">
+                  <p:tgtEl>
+                    <p:sldTgt/>
+                  </p:tgtEl>
+                </p:cond>
+              </p:prevCondLst>
+              <p:nextCondLst>
+                <p:cond evt="onNext" delay="0">
+                  <p:tgtEl>
+                    <p:sldTgt/>
+                  </p:tgtEl>
+                </p:cond>
+              </p:nextCondLst>
             </p:seq>
           </p:childTnLst>
         </p:cTn>
@@ -10905,155 +10928,164 @@
                       </p:stCondLst>
                       <p:childTnLst>
                         <p:par>
-                          <p:cTn id="4" presetID="2" presetClass="entr" presetSubtype="0" fill="hold" nodeType="clickEffect">
+                          <p:cTn id="4" fill="hold">
                             <p:stCondLst>
                               <p:cond delay="0"/>
                             </p:stCondLst>
                             <p:childTnLst>
-                              <p:set>
-                                <p:cBhvr>
-                                  <p:cTn id="5" dur="1" fill="hold">
-                                    <p:stCondLst>
-                                      <p:cond delay="0"/>
-                                    </p:stCondLst>
-                                  </p:cTn>
-                                  <p:tgtEl>
-                                    <p:spTgt spid="14"/>
-                                  </p:tgtEl>
-                                  <p:attrNameLst>
-                                    <p:attrName>style.visibility</p:attrName>
-                                  </p:attrNameLst>
-                                </p:cBhvr>
-                                <p:to>
-                                  <p:strVal val="visible"/>
-                                </p:to>
-                              </p:set>
-                              <p:set>
-                                <p:cBhvr>
-                                  <p:cTn id="6" dur="1" fill="hold">
-                                    <p:stCondLst>
-                                      <p:cond delay="0"/>
-                                    </p:stCondLst>
-                                  </p:cTn>
-                                  <p:tgtEl>
-                                    <p:spTgt spid="15"/>
-                                  </p:tgtEl>
-                                  <p:attrNameLst>
-                                    <p:attrName>style.visibility</p:attrName>
-                                  </p:attrNameLst>
-                                </p:cBhvr>
-                                <p:to>
-                                  <p:strVal val="visible"/>
-                                </p:to>
-                              </p:set>
-                              <p:set>
-                                <p:cBhvr>
-                                  <p:cTn id="7" dur="1" fill="hold">
-                                    <p:stCondLst>
-                                      <p:cond delay="0"/>
-                                    </p:stCondLst>
-                                  </p:cTn>
-                                  <p:tgtEl>
-                                    <p:spTgt spid="24"/>
-                                  </p:tgtEl>
-                                  <p:attrNameLst>
-                                    <p:attrName>style.visibility</p:attrName>
-                                  </p:attrNameLst>
-                                </p:cBhvr>
-                                <p:to>
-                                  <p:strVal val="visible"/>
-                                </p:to>
-                              </p:set>
-                              <p:set>
-                                <p:cBhvr>
-                                  <p:cTn id="8" dur="1" fill="hold">
-                                    <p:stCondLst>
-                                      <p:cond delay="0"/>
-                                    </p:stCondLst>
-                                  </p:cTn>
-                                  <p:tgtEl>
-                                    <p:spTgt spid="25"/>
-                                  </p:tgtEl>
-                                  <p:attrNameLst>
-                                    <p:attrName>style.visibility</p:attrName>
-                                  </p:attrNameLst>
-                                </p:cBhvr>
-                                <p:to>
-                                  <p:strVal val="visible"/>
-                                </p:to>
-                              </p:set>
-                              <p:set>
-                                <p:cBhvr>
-                                  <p:cTn id="9" dur="1" fill="hold">
-                                    <p:stCondLst>
-                                      <p:cond delay="0"/>
-                                    </p:stCondLst>
-                                  </p:cTn>
-                                  <p:tgtEl>
-                                    <p:spTgt spid="34"/>
-                                  </p:tgtEl>
-                                  <p:attrNameLst>
-                                    <p:attrName>style.visibility</p:attrName>
-                                  </p:attrNameLst>
-                                </p:cBhvr>
-                                <p:to>
-                                  <p:strVal val="visible"/>
-                                </p:to>
-                              </p:set>
-                              <p:set>
-                                <p:cBhvr>
-                                  <p:cTn id="10" dur="1" fill="hold">
-                                    <p:stCondLst>
-                                      <p:cond delay="0"/>
-                                    </p:stCondLst>
-                                  </p:cTn>
-                                  <p:tgtEl>
-                                    <p:spTgt spid="35"/>
-                                  </p:tgtEl>
-                                  <p:attrNameLst>
-                                    <p:attrName>style.visibility</p:attrName>
-                                  </p:attrNameLst>
-                                </p:cBhvr>
-                                <p:to>
-                                  <p:strVal val="visible"/>
-                                </p:to>
-                              </p:set>
-                              <p:set>
-                                <p:cBhvr>
-                                  <p:cTn id="11" dur="1" fill="hold">
-                                    <p:stCondLst>
-                                      <p:cond delay="0"/>
-                                    </p:stCondLst>
-                                  </p:cTn>
-                                  <p:tgtEl>
-                                    <p:spTgt spid="44"/>
-                                  </p:tgtEl>
-                                  <p:attrNameLst>
-                                    <p:attrName>style.visibility</p:attrName>
-                                  </p:attrNameLst>
-                                </p:cBhvr>
-                                <p:to>
-                                  <p:strVal val="visible"/>
-                                </p:to>
-                              </p:set>
-                              <p:set>
-                                <p:cBhvr>
-                                  <p:cTn id="12" dur="1" fill="hold">
-                                    <p:stCondLst>
-                                      <p:cond delay="0"/>
-                                    </p:stCondLst>
-                                  </p:cTn>
-                                  <p:tgtEl>
-                                    <p:spTgt spid="45"/>
-                                  </p:tgtEl>
-                                  <p:attrNameLst>
-                                    <p:attrName>style.visibility</p:attrName>
-                                  </p:attrNameLst>
-                                </p:cBhvr>
-                                <p:to>
-                                  <p:strVal val="visible"/>
-                                </p:to>
-                              </p:set>
+                              <p:par>
+                                <p:cTn id="5" presetID="2" presetClass="entr" presetSubtype="0" fill="hold" grpId="0" nodeType="clickEffect">
+                                  <p:stCondLst>
+                                    <p:cond delay="0"/>
+                                  </p:stCondLst>
+                                  <p:childTnLst>
+                                    <p:set>
+                                      <p:cBhvr>
+                                        <p:cTn id="6" dur="1" fill="hold">
+                                          <p:stCondLst>
+                                            <p:cond delay="0"/>
+                                          </p:stCondLst>
+                                        </p:cTn>
+                                        <p:tgtEl>
+                                          <p:spTgt spid="14"/>
+                                        </p:tgtEl>
+                                        <p:attrNameLst>
+                                          <p:attrName>style.visibility</p:attrName>
+                                        </p:attrNameLst>
+                                      </p:cBhvr>
+                                      <p:to>
+                                        <p:strVal val="visible"/>
+                                      </p:to>
+                                    </p:set>
+                                    <p:set>
+                                      <p:cBhvr>
+                                        <p:cTn id="7" dur="1" fill="hold">
+                                          <p:stCondLst>
+                                            <p:cond delay="0"/>
+                                          </p:stCondLst>
+                                        </p:cTn>
+                                        <p:tgtEl>
+                                          <p:spTgt spid="15"/>
+                                        </p:tgtEl>
+                                        <p:attrNameLst>
+                                          <p:attrName>style.visibility</p:attrName>
+                                        </p:attrNameLst>
+                                      </p:cBhvr>
+                                      <p:to>
+                                        <p:strVal val="visible"/>
+                                      </p:to>
+                                    </p:set>
+                                    <p:set>
+                                      <p:cBhvr>
+                                        <p:cTn id="8" dur="1" fill="hold">
+                                          <p:stCondLst>
+                                            <p:cond delay="0"/>
+                                          </p:stCondLst>
+                                        </p:cTn>
+                                        <p:tgtEl>
+                                          <p:spTgt spid="24"/>
+                                        </p:tgtEl>
+                                        <p:attrNameLst>
+                                          <p:attrName>style.visibility</p:attrName>
+                                        </p:attrNameLst>
+                                      </p:cBhvr>
+                                      <p:to>
+                                        <p:strVal val="visible"/>
+                                      </p:to>
+                                    </p:set>
+                                    <p:set>
+                                      <p:cBhvr>
+                                        <p:cTn id="9" dur="1" fill="hold">
+                                          <p:stCondLst>
+                                            <p:cond delay="0"/>
+                                          </p:stCondLst>
+                                        </p:cTn>
+                                        <p:tgtEl>
+                                          <p:spTgt spid="25"/>
+                                        </p:tgtEl>
+                                        <p:attrNameLst>
+                                          <p:attrName>style.visibility</p:attrName>
+                                        </p:attrNameLst>
+                                      </p:cBhvr>
+                                      <p:to>
+                                        <p:strVal val="visible"/>
+                                      </p:to>
+                                    </p:set>
+                                    <p:set>
+                                      <p:cBhvr>
+                                        <p:cTn id="10" dur="1" fill="hold">
+                                          <p:stCondLst>
+                                            <p:cond delay="0"/>
+                                          </p:stCondLst>
+                                        </p:cTn>
+                                        <p:tgtEl>
+                                          <p:spTgt spid="34"/>
+                                        </p:tgtEl>
+                                        <p:attrNameLst>
+                                          <p:attrName>style.visibility</p:attrName>
+                                        </p:attrNameLst>
+                                      </p:cBhvr>
+                                      <p:to>
+                                        <p:strVal val="visible"/>
+                                      </p:to>
+                                    </p:set>
+                                    <p:set>
+                                      <p:cBhvr>
+                                        <p:cTn id="11" dur="1" fill="hold">
+                                          <p:stCondLst>
+                                            <p:cond delay="0"/>
+                                          </p:stCondLst>
+                                        </p:cTn>
+                                        <p:tgtEl>
+                                          <p:spTgt spid="35"/>
+                                        </p:tgtEl>
+                                        <p:attrNameLst>
+                                          <p:attrName>style.visibility</p:attrName>
+                                        </p:attrNameLst>
+                                      </p:cBhvr>
+                                      <p:to>
+                                        <p:strVal val="visible"/>
+                                      </p:to>
+                                    </p:set>
+                                    <p:set>
+                                      <p:cBhvr>
+                                        <p:cTn id="12" dur="1" fill="hold">
+                                          <p:stCondLst>
+                                            <p:cond delay="0"/>
+                                          </p:stCondLst>
+                                        </p:cTn>
+                                        <p:tgtEl>
+                                          <p:spTgt spid="44"/>
+                                        </p:tgtEl>
+                                        <p:attrNameLst>
+                                          <p:attrName>style.visibility</p:attrName>
+                                        </p:attrNameLst>
+                                      </p:cBhvr>
+                                      <p:to>
+                                        <p:strVal val="visible"/>
+                                      </p:to>
+                                    </p:set>
+                                    <p:set>
+                                      <p:cBhvr>
+                                        <p:cTn id="13" dur="1" fill="hold">
+                                          <p:stCondLst>
+                                            <p:cond delay="0"/>
+                                          </p:stCondLst>
+                                        </p:cTn>
+                                        <p:tgtEl>
+                                          <p:spTgt spid="45"/>
+                                        </p:tgtEl>
+                                        <p:attrNameLst>
+                                          <p:attrName>style.visibility</p:attrName>
+                                        </p:attrNameLst>
+                                      </p:cBhvr>
+                                      <p:to>
+                                        <p:strVal val="visible"/>
+                                      </p:to>
+                                    </p:set>
+                                  </p:childTnLst>
+                                </p:cTn>
+                              </p:par>
                             </p:childTnLst>
                           </p:cTn>
                         </p:par>
@@ -11062,6 +11094,20 @@
                   </p:par>
                 </p:childTnLst>
               </p:cTn>
+              <p:prevCondLst>
+                <p:cond evt="onPrev" delay="0">
+                  <p:tgtEl>
+                    <p:sldTgt/>
+                  </p:tgtEl>
+                </p:cond>
+              </p:prevCondLst>
+              <p:nextCondLst>
+                <p:cond evt="onNext" delay="0">
+                  <p:tgtEl>
+                    <p:sldTgt/>
+                  </p:tgtEl>
+                </p:cond>
+              </p:nextCondLst>
             </p:seq>
           </p:childTnLst>
         </p:cTn>
@@ -19600,281 +19646,290 @@
                       </p:stCondLst>
                       <p:childTnLst>
                         <p:par>
-                          <p:cTn id="4" presetID="2" presetClass="entr" presetSubtype="0" fill="hold" nodeType="clickEffect">
+                          <p:cTn id="4" fill="hold">
                             <p:stCondLst>
                               <p:cond delay="0"/>
                             </p:stCondLst>
                             <p:childTnLst>
-                              <p:set>
-                                <p:cBhvr>
-                                  <p:cTn id="5" dur="1" fill="hold">
-                                    <p:stCondLst>
-                                      <p:cond delay="0"/>
-                                    </p:stCondLst>
-                                  </p:cTn>
-                                  <p:tgtEl>
-                                    <p:spTgt spid="22"/>
-                                  </p:tgtEl>
-                                  <p:attrNameLst>
-                                    <p:attrName>style.visibility</p:attrName>
-                                  </p:attrNameLst>
-                                </p:cBhvr>
-                                <p:to>
-                                  <p:strVal val="visible"/>
-                                </p:to>
-                              </p:set>
-                              <p:set>
-                                <p:cBhvr>
-                                  <p:cTn id="6" dur="1" fill="hold">
-                                    <p:stCondLst>
-                                      <p:cond delay="0"/>
-                                    </p:stCondLst>
-                                  </p:cTn>
-                                  <p:tgtEl>
-                                    <p:spTgt spid="23"/>
-                                  </p:tgtEl>
-                                  <p:attrNameLst>
-                                    <p:attrName>style.visibility</p:attrName>
-                                  </p:attrNameLst>
-                                </p:cBhvr>
-                                <p:to>
-                                  <p:strVal val="visible"/>
-                                </p:to>
-                              </p:set>
-                              <p:set>
-                                <p:cBhvr>
-                                  <p:cTn id="7" dur="1" fill="hold">
-                                    <p:stCondLst>
-                                      <p:cond delay="0"/>
-                                    </p:stCondLst>
-                                  </p:cTn>
-                                  <p:tgtEl>
-                                    <p:spTgt spid="24"/>
-                                  </p:tgtEl>
-                                  <p:attrNameLst>
-                                    <p:attrName>style.visibility</p:attrName>
-                                  </p:attrNameLst>
-                                </p:cBhvr>
-                                <p:to>
-                                  <p:strVal val="visible"/>
-                                </p:to>
-                              </p:set>
-                              <p:set>
-                                <p:cBhvr>
-                                  <p:cTn id="8" dur="1" fill="hold">
-                                    <p:stCondLst>
-                                      <p:cond delay="0"/>
-                                    </p:stCondLst>
-                                  </p:cTn>
-                                  <p:tgtEl>
-                                    <p:spTgt spid="25"/>
-                                  </p:tgtEl>
-                                  <p:attrNameLst>
-                                    <p:attrName>style.visibility</p:attrName>
-                                  </p:attrNameLst>
-                                </p:cBhvr>
-                                <p:to>
-                                  <p:strVal val="visible"/>
-                                </p:to>
-                              </p:set>
-                              <p:set>
-                                <p:cBhvr>
-                                  <p:cTn id="9" dur="1" fill="hold">
-                                    <p:stCondLst>
-                                      <p:cond delay="0"/>
-                                    </p:stCondLst>
-                                  </p:cTn>
-                                  <p:tgtEl>
-                                    <p:spTgt spid="26"/>
-                                  </p:tgtEl>
-                                  <p:attrNameLst>
-                                    <p:attrName>style.visibility</p:attrName>
-                                  </p:attrNameLst>
-                                </p:cBhvr>
-                                <p:to>
-                                  <p:strVal val="visible"/>
-                                </p:to>
-                              </p:set>
-                              <p:set>
-                                <p:cBhvr>
-                                  <p:cTn id="10" dur="1" fill="hold">
-                                    <p:stCondLst>
-                                      <p:cond delay="0"/>
-                                    </p:stCondLst>
-                                  </p:cTn>
-                                  <p:tgtEl>
-                                    <p:spTgt spid="27"/>
-                                  </p:tgtEl>
-                                  <p:attrNameLst>
-                                    <p:attrName>style.visibility</p:attrName>
-                                  </p:attrNameLst>
-                                </p:cBhvr>
-                                <p:to>
-                                  <p:strVal val="visible"/>
-                                </p:to>
-                              </p:set>
-                              <p:set>
-                                <p:cBhvr>
-                                  <p:cTn id="11" dur="1" fill="hold">
-                                    <p:stCondLst>
-                                      <p:cond delay="0"/>
-                                    </p:stCondLst>
-                                  </p:cTn>
-                                  <p:tgtEl>
-                                    <p:spTgt spid="28"/>
-                                  </p:tgtEl>
-                                  <p:attrNameLst>
-                                    <p:attrName>style.visibility</p:attrName>
-                                  </p:attrNameLst>
-                                </p:cBhvr>
-                                <p:to>
-                                  <p:strVal val="visible"/>
-                                </p:to>
-                              </p:set>
-                              <p:set>
-                                <p:cBhvr>
-                                  <p:cTn id="12" dur="1" fill="hold">
-                                    <p:stCondLst>
-                                      <p:cond delay="0"/>
-                                    </p:stCondLst>
-                                  </p:cTn>
-                                  <p:tgtEl>
-                                    <p:spTgt spid="29"/>
-                                  </p:tgtEl>
-                                  <p:attrNameLst>
-                                    <p:attrName>style.visibility</p:attrName>
-                                  </p:attrNameLst>
-                                </p:cBhvr>
-                                <p:to>
-                                  <p:strVal val="visible"/>
-                                </p:to>
-                              </p:set>
-                              <p:set>
-                                <p:cBhvr>
-                                  <p:cTn id="13" dur="1" fill="hold">
-                                    <p:stCondLst>
-                                      <p:cond delay="0"/>
-                                    </p:stCondLst>
-                                  </p:cTn>
-                                  <p:tgtEl>
-                                    <p:spTgt spid="30"/>
-                                  </p:tgtEl>
-                                  <p:attrNameLst>
-                                    <p:attrName>style.visibility</p:attrName>
-                                  </p:attrNameLst>
-                                </p:cBhvr>
-                                <p:to>
-                                  <p:strVal val="visible"/>
-                                </p:to>
-                              </p:set>
-                              <p:set>
-                                <p:cBhvr>
-                                  <p:cTn id="14" dur="1" fill="hold">
-                                    <p:stCondLst>
-                                      <p:cond delay="0"/>
-                                    </p:stCondLst>
-                                  </p:cTn>
-                                  <p:tgtEl>
-                                    <p:spTgt spid="31"/>
-                                  </p:tgtEl>
-                                  <p:attrNameLst>
-                                    <p:attrName>style.visibility</p:attrName>
-                                  </p:attrNameLst>
-                                </p:cBhvr>
-                                <p:to>
-                                  <p:strVal val="visible"/>
-                                </p:to>
-                              </p:set>
-                              <p:set>
-                                <p:cBhvr>
-                                  <p:cTn id="15" dur="1" fill="hold">
-                                    <p:stCondLst>
-                                      <p:cond delay="0"/>
-                                    </p:stCondLst>
-                                  </p:cTn>
-                                  <p:tgtEl>
-                                    <p:spTgt spid="32"/>
-                                  </p:tgtEl>
-                                  <p:attrNameLst>
-                                    <p:attrName>style.visibility</p:attrName>
-                                  </p:attrNameLst>
-                                </p:cBhvr>
-                                <p:to>
-                                  <p:strVal val="visible"/>
-                                </p:to>
-                              </p:set>
-                              <p:set>
-                                <p:cBhvr>
-                                  <p:cTn id="16" dur="1" fill="hold">
-                                    <p:stCondLst>
-                                      <p:cond delay="0"/>
-                                    </p:stCondLst>
-                                  </p:cTn>
-                                  <p:tgtEl>
-                                    <p:spTgt spid="33"/>
-                                  </p:tgtEl>
-                                  <p:attrNameLst>
-                                    <p:attrName>style.visibility</p:attrName>
-                                  </p:attrNameLst>
-                                </p:cBhvr>
-                                <p:to>
-                                  <p:strVal val="visible"/>
-                                </p:to>
-                              </p:set>
-                              <p:set>
-                                <p:cBhvr>
-                                  <p:cTn id="17" dur="1" fill="hold">
-                                    <p:stCondLst>
-                                      <p:cond delay="0"/>
-                                    </p:stCondLst>
-                                  </p:cTn>
-                                  <p:tgtEl>
-                                    <p:spTgt spid="34"/>
-                                  </p:tgtEl>
-                                  <p:attrNameLst>
-                                    <p:attrName>style.visibility</p:attrName>
-                                  </p:attrNameLst>
-                                </p:cBhvr>
-                                <p:to>
-                                  <p:strVal val="visible"/>
-                                </p:to>
-                              </p:set>
-                              <p:set>
-                                <p:cBhvr>
-                                  <p:cTn id="18" dur="1" fill="hold">
-                                    <p:stCondLst>
-                                      <p:cond delay="0"/>
-                                    </p:stCondLst>
-                                  </p:cTn>
-                                  <p:tgtEl>
-                                    <p:spTgt spid="35"/>
-                                  </p:tgtEl>
-                                  <p:attrNameLst>
-                                    <p:attrName>style.visibility</p:attrName>
-                                  </p:attrNameLst>
-                                </p:cBhvr>
-                                <p:to>
-                                  <p:strVal val="visible"/>
-                                </p:to>
-                              </p:set>
-                              <p:set>
-                                <p:cBhvr>
-                                  <p:cTn id="19" dur="1" fill="hold">
-                                    <p:stCondLst>
-                                      <p:cond delay="0"/>
-                                    </p:stCondLst>
-                                  </p:cTn>
-                                  <p:tgtEl>
-                                    <p:spTgt spid="36"/>
-                                  </p:tgtEl>
-                                  <p:attrNameLst>
-                                    <p:attrName>style.visibility</p:attrName>
-                                  </p:attrNameLst>
-                                </p:cBhvr>
-                                <p:to>
-                                  <p:strVal val="visible"/>
-                                </p:to>
-                              </p:set>
+                              <p:par>
+                                <p:cTn id="5" presetID="2" presetClass="entr" presetSubtype="0" fill="hold" grpId="0" nodeType="clickEffect">
+                                  <p:stCondLst>
+                                    <p:cond delay="0"/>
+                                  </p:stCondLst>
+                                  <p:childTnLst>
+                                    <p:set>
+                                      <p:cBhvr>
+                                        <p:cTn id="6" dur="1" fill="hold">
+                                          <p:stCondLst>
+                                            <p:cond delay="0"/>
+                                          </p:stCondLst>
+                                        </p:cTn>
+                                        <p:tgtEl>
+                                          <p:spTgt spid="22"/>
+                                        </p:tgtEl>
+                                        <p:attrNameLst>
+                                          <p:attrName>style.visibility</p:attrName>
+                                        </p:attrNameLst>
+                                      </p:cBhvr>
+                                      <p:to>
+                                        <p:strVal val="visible"/>
+                                      </p:to>
+                                    </p:set>
+                                    <p:set>
+                                      <p:cBhvr>
+                                        <p:cTn id="7" dur="1" fill="hold">
+                                          <p:stCondLst>
+                                            <p:cond delay="0"/>
+                                          </p:stCondLst>
+                                        </p:cTn>
+                                        <p:tgtEl>
+                                          <p:spTgt spid="23"/>
+                                        </p:tgtEl>
+                                        <p:attrNameLst>
+                                          <p:attrName>style.visibility</p:attrName>
+                                        </p:attrNameLst>
+                                      </p:cBhvr>
+                                      <p:to>
+                                        <p:strVal val="visible"/>
+                                      </p:to>
+                                    </p:set>
+                                    <p:set>
+                                      <p:cBhvr>
+                                        <p:cTn id="8" dur="1" fill="hold">
+                                          <p:stCondLst>
+                                            <p:cond delay="0"/>
+                                          </p:stCondLst>
+                                        </p:cTn>
+                                        <p:tgtEl>
+                                          <p:spTgt spid="24"/>
+                                        </p:tgtEl>
+                                        <p:attrNameLst>
+                                          <p:attrName>style.visibility</p:attrName>
+                                        </p:attrNameLst>
+                                      </p:cBhvr>
+                                      <p:to>
+                                        <p:strVal val="visible"/>
+                                      </p:to>
+                                    </p:set>
+                                    <p:set>
+                                      <p:cBhvr>
+                                        <p:cTn id="9" dur="1" fill="hold">
+                                          <p:stCondLst>
+                                            <p:cond delay="0"/>
+                                          </p:stCondLst>
+                                        </p:cTn>
+                                        <p:tgtEl>
+                                          <p:spTgt spid="25"/>
+                                        </p:tgtEl>
+                                        <p:attrNameLst>
+                                          <p:attrName>style.visibility</p:attrName>
+                                        </p:attrNameLst>
+                                      </p:cBhvr>
+                                      <p:to>
+                                        <p:strVal val="visible"/>
+                                      </p:to>
+                                    </p:set>
+                                    <p:set>
+                                      <p:cBhvr>
+                                        <p:cTn id="10" dur="1" fill="hold">
+                                          <p:stCondLst>
+                                            <p:cond delay="0"/>
+                                          </p:stCondLst>
+                                        </p:cTn>
+                                        <p:tgtEl>
+                                          <p:spTgt spid="26"/>
+                                        </p:tgtEl>
+                                        <p:attrNameLst>
+                                          <p:attrName>style.visibility</p:attrName>
+                                        </p:attrNameLst>
+                                      </p:cBhvr>
+                                      <p:to>
+                                        <p:strVal val="visible"/>
+                                      </p:to>
+                                    </p:set>
+                                    <p:set>
+                                      <p:cBhvr>
+                                        <p:cTn id="11" dur="1" fill="hold">
+                                          <p:stCondLst>
+                                            <p:cond delay="0"/>
+                                          </p:stCondLst>
+                                        </p:cTn>
+                                        <p:tgtEl>
+                                          <p:spTgt spid="27"/>
+                                        </p:tgtEl>
+                                        <p:attrNameLst>
+                                          <p:attrName>style.visibility</p:attrName>
+                                        </p:attrNameLst>
+                                      </p:cBhvr>
+                                      <p:to>
+                                        <p:strVal val="visible"/>
+                                      </p:to>
+                                    </p:set>
+                                    <p:set>
+                                      <p:cBhvr>
+                                        <p:cTn id="12" dur="1" fill="hold">
+                                          <p:stCondLst>
+                                            <p:cond delay="0"/>
+                                          </p:stCondLst>
+                                        </p:cTn>
+                                        <p:tgtEl>
+                                          <p:spTgt spid="28"/>
+                                        </p:tgtEl>
+                                        <p:attrNameLst>
+                                          <p:attrName>style.visibility</p:attrName>
+                                        </p:attrNameLst>
+                                      </p:cBhvr>
+                                      <p:to>
+                                        <p:strVal val="visible"/>
+                                      </p:to>
+                                    </p:set>
+                                    <p:set>
+                                      <p:cBhvr>
+                                        <p:cTn id="13" dur="1" fill="hold">
+                                          <p:stCondLst>
+                                            <p:cond delay="0"/>
+                                          </p:stCondLst>
+                                        </p:cTn>
+                                        <p:tgtEl>
+                                          <p:spTgt spid="29"/>
+                                        </p:tgtEl>
+                                        <p:attrNameLst>
+                                          <p:attrName>style.visibility</p:attrName>
+                                        </p:attrNameLst>
+                                      </p:cBhvr>
+                                      <p:to>
+                                        <p:strVal val="visible"/>
+                                      </p:to>
+                                    </p:set>
+                                    <p:set>
+                                      <p:cBhvr>
+                                        <p:cTn id="14" dur="1" fill="hold">
+                                          <p:stCondLst>
+                                            <p:cond delay="0"/>
+                                          </p:stCondLst>
+                                        </p:cTn>
+                                        <p:tgtEl>
+                                          <p:spTgt spid="30"/>
+                                        </p:tgtEl>
+                                        <p:attrNameLst>
+                                          <p:attrName>style.visibility</p:attrName>
+                                        </p:attrNameLst>
+                                      </p:cBhvr>
+                                      <p:to>
+                                        <p:strVal val="visible"/>
+                                      </p:to>
+                                    </p:set>
+                                    <p:set>
+                                      <p:cBhvr>
+                                        <p:cTn id="15" dur="1" fill="hold">
+                                          <p:stCondLst>
+                                            <p:cond delay="0"/>
+                                          </p:stCondLst>
+                                        </p:cTn>
+                                        <p:tgtEl>
+                                          <p:spTgt spid="31"/>
+                                        </p:tgtEl>
+                                        <p:attrNameLst>
+                                          <p:attrName>style.visibility</p:attrName>
+                                        </p:attrNameLst>
+                                      </p:cBhvr>
+                                      <p:to>
+                                        <p:strVal val="visible"/>
+                                      </p:to>
+                                    </p:set>
+                                    <p:set>
+                                      <p:cBhvr>
+                                        <p:cTn id="16" dur="1" fill="hold">
+                                          <p:stCondLst>
+                                            <p:cond delay="0"/>
+                                          </p:stCondLst>
+                                        </p:cTn>
+                                        <p:tgtEl>
+                                          <p:spTgt spid="32"/>
+                                        </p:tgtEl>
+                                        <p:attrNameLst>
+                                          <p:attrName>style.visibility</p:attrName>
+                                        </p:attrNameLst>
+                                      </p:cBhvr>
+                                      <p:to>
+                                        <p:strVal val="visible"/>
+                                      </p:to>
+                                    </p:set>
+                                    <p:set>
+                                      <p:cBhvr>
+                                        <p:cTn id="17" dur="1" fill="hold">
+                                          <p:stCondLst>
+                                            <p:cond delay="0"/>
+                                          </p:stCondLst>
+                                        </p:cTn>
+                                        <p:tgtEl>
+                                          <p:spTgt spid="33"/>
+                                        </p:tgtEl>
+                                        <p:attrNameLst>
+                                          <p:attrName>style.visibility</p:attrName>
+                                        </p:attrNameLst>
+                                      </p:cBhvr>
+                                      <p:to>
+                                        <p:strVal val="visible"/>
+                                      </p:to>
+                                    </p:set>
+                                    <p:set>
+                                      <p:cBhvr>
+                                        <p:cTn id="18" dur="1" fill="hold">
+                                          <p:stCondLst>
+                                            <p:cond delay="0"/>
+                                          </p:stCondLst>
+                                        </p:cTn>
+                                        <p:tgtEl>
+                                          <p:spTgt spid="34"/>
+                                        </p:tgtEl>
+                                        <p:attrNameLst>
+                                          <p:attrName>style.visibility</p:attrName>
+                                        </p:attrNameLst>
+                                      </p:cBhvr>
+                                      <p:to>
+                                        <p:strVal val="visible"/>
+                                      </p:to>
+                                    </p:set>
+                                    <p:set>
+                                      <p:cBhvr>
+                                        <p:cTn id="19" dur="1" fill="hold">
+                                          <p:stCondLst>
+                                            <p:cond delay="0"/>
+                                          </p:stCondLst>
+                                        </p:cTn>
+                                        <p:tgtEl>
+                                          <p:spTgt spid="35"/>
+                                        </p:tgtEl>
+                                        <p:attrNameLst>
+                                          <p:attrName>style.visibility</p:attrName>
+                                        </p:attrNameLst>
+                                      </p:cBhvr>
+                                      <p:to>
+                                        <p:strVal val="visible"/>
+                                      </p:to>
+                                    </p:set>
+                                    <p:set>
+                                      <p:cBhvr>
+                                        <p:cTn id="20" dur="1" fill="hold">
+                                          <p:stCondLst>
+                                            <p:cond delay="0"/>
+                                          </p:stCondLst>
+                                        </p:cTn>
+                                        <p:tgtEl>
+                                          <p:spTgt spid="36"/>
+                                        </p:tgtEl>
+                                        <p:attrNameLst>
+                                          <p:attrName>style.visibility</p:attrName>
+                                        </p:attrNameLst>
+                                      </p:cBhvr>
+                                      <p:to>
+                                        <p:strVal val="visible"/>
+                                      </p:to>
+                                    </p:set>
+                                  </p:childTnLst>
+                                </p:cTn>
+                              </p:par>
                             </p:childTnLst>
                           </p:cTn>
                         </p:par>
@@ -19883,6 +19938,20 @@
                   </p:par>
                 </p:childTnLst>
               </p:cTn>
+              <p:prevCondLst>
+                <p:cond evt="onPrev" delay="0">
+                  <p:tgtEl>
+                    <p:sldTgt/>
+                  </p:tgtEl>
+                </p:cond>
+              </p:prevCondLst>
+              <p:nextCondLst>
+                <p:cond evt="onNext" delay="0">
+                  <p:tgtEl>
+                    <p:sldTgt/>
+                  </p:tgtEl>
+                </p:cond>
+              </p:nextCondLst>
             </p:seq>
           </p:childTnLst>
         </p:cTn>
@@ -20972,281 +21041,290 @@
                       </p:stCondLst>
                       <p:childTnLst>
                         <p:par>
-                          <p:cTn id="4" presetID="2" presetClass="entr" presetSubtype="0" fill="hold" nodeType="clickEffect">
+                          <p:cTn id="4" fill="hold">
                             <p:stCondLst>
                               <p:cond delay="0"/>
                             </p:stCondLst>
                             <p:childTnLst>
-                              <p:set>
-                                <p:cBhvr>
-                                  <p:cTn id="5" dur="1" fill="hold">
-                                    <p:stCondLst>
-                                      <p:cond delay="0"/>
-                                    </p:stCondLst>
-                                  </p:cTn>
-                                  <p:tgtEl>
-                                    <p:spTgt spid="19"/>
-                                  </p:tgtEl>
-                                  <p:attrNameLst>
-                                    <p:attrName>style.visibility</p:attrName>
-                                  </p:attrNameLst>
-                                </p:cBhvr>
-                                <p:to>
-                                  <p:strVal val="visible"/>
-                                </p:to>
-                              </p:set>
-                              <p:set>
-                                <p:cBhvr>
-                                  <p:cTn id="6" dur="1" fill="hold">
-                                    <p:stCondLst>
-                                      <p:cond delay="0"/>
-                                    </p:stCondLst>
-                                  </p:cTn>
-                                  <p:tgtEl>
-                                    <p:spTgt spid="20"/>
-                                  </p:tgtEl>
-                                  <p:attrNameLst>
-                                    <p:attrName>style.visibility</p:attrName>
-                                  </p:attrNameLst>
-                                </p:cBhvr>
-                                <p:to>
-                                  <p:strVal val="visible"/>
-                                </p:to>
-                              </p:set>
-                              <p:set>
-                                <p:cBhvr>
-                                  <p:cTn id="7" dur="1" fill="hold">
-                                    <p:stCondLst>
-                                      <p:cond delay="0"/>
-                                    </p:stCondLst>
-                                  </p:cTn>
-                                  <p:tgtEl>
-                                    <p:spTgt spid="21"/>
-                                  </p:tgtEl>
-                                  <p:attrNameLst>
-                                    <p:attrName>style.visibility</p:attrName>
-                                  </p:attrNameLst>
-                                </p:cBhvr>
-                                <p:to>
-                                  <p:strVal val="visible"/>
-                                </p:to>
-                              </p:set>
-                              <p:set>
-                                <p:cBhvr>
-                                  <p:cTn id="8" dur="1" fill="hold">
-                                    <p:stCondLst>
-                                      <p:cond delay="0"/>
-                                    </p:stCondLst>
-                                  </p:cTn>
-                                  <p:tgtEl>
-                                    <p:spTgt spid="22"/>
-                                  </p:tgtEl>
-                                  <p:attrNameLst>
-                                    <p:attrName>style.visibility</p:attrName>
-                                  </p:attrNameLst>
-                                </p:cBhvr>
-                                <p:to>
-                                  <p:strVal val="visible"/>
-                                </p:to>
-                              </p:set>
-                              <p:set>
-                                <p:cBhvr>
-                                  <p:cTn id="9" dur="1" fill="hold">
-                                    <p:stCondLst>
-                                      <p:cond delay="0"/>
-                                    </p:stCondLst>
-                                  </p:cTn>
-                                  <p:tgtEl>
-                                    <p:spTgt spid="23"/>
-                                  </p:tgtEl>
-                                  <p:attrNameLst>
-                                    <p:attrName>style.visibility</p:attrName>
-                                  </p:attrNameLst>
-                                </p:cBhvr>
-                                <p:to>
-                                  <p:strVal val="visible"/>
-                                </p:to>
-                              </p:set>
-                              <p:set>
-                                <p:cBhvr>
-                                  <p:cTn id="10" dur="1" fill="hold">
-                                    <p:stCondLst>
-                                      <p:cond delay="0"/>
-                                    </p:stCondLst>
-                                  </p:cTn>
-                                  <p:tgtEl>
-                                    <p:spTgt spid="24"/>
-                                  </p:tgtEl>
-                                  <p:attrNameLst>
-                                    <p:attrName>style.visibility</p:attrName>
-                                  </p:attrNameLst>
-                                </p:cBhvr>
-                                <p:to>
-                                  <p:strVal val="visible"/>
-                                </p:to>
-                              </p:set>
-                              <p:set>
-                                <p:cBhvr>
-                                  <p:cTn id="11" dur="1" fill="hold">
-                                    <p:stCondLst>
-                                      <p:cond delay="0"/>
-                                    </p:stCondLst>
-                                  </p:cTn>
-                                  <p:tgtEl>
-                                    <p:spTgt spid="25"/>
-                                  </p:tgtEl>
-                                  <p:attrNameLst>
-                                    <p:attrName>style.visibility</p:attrName>
-                                  </p:attrNameLst>
-                                </p:cBhvr>
-                                <p:to>
-                                  <p:strVal val="visible"/>
-                                </p:to>
-                              </p:set>
-                              <p:set>
-                                <p:cBhvr>
-                                  <p:cTn id="12" dur="1" fill="hold">
-                                    <p:stCondLst>
-                                      <p:cond delay="0"/>
-                                    </p:stCondLst>
-                                  </p:cTn>
-                                  <p:tgtEl>
-                                    <p:spTgt spid="26"/>
-                                  </p:tgtEl>
-                                  <p:attrNameLst>
-                                    <p:attrName>style.visibility</p:attrName>
-                                  </p:attrNameLst>
-                                </p:cBhvr>
-                                <p:to>
-                                  <p:strVal val="visible"/>
-                                </p:to>
-                              </p:set>
-                              <p:set>
-                                <p:cBhvr>
-                                  <p:cTn id="13" dur="1" fill="hold">
-                                    <p:stCondLst>
-                                      <p:cond delay="0"/>
-                                    </p:stCondLst>
-                                  </p:cTn>
-                                  <p:tgtEl>
-                                    <p:spTgt spid="27"/>
-                                  </p:tgtEl>
-                                  <p:attrNameLst>
-                                    <p:attrName>style.visibility</p:attrName>
-                                  </p:attrNameLst>
-                                </p:cBhvr>
-                                <p:to>
-                                  <p:strVal val="visible"/>
-                                </p:to>
-                              </p:set>
-                              <p:set>
-                                <p:cBhvr>
-                                  <p:cTn id="14" dur="1" fill="hold">
-                                    <p:stCondLst>
-                                      <p:cond delay="0"/>
-                                    </p:stCondLst>
-                                  </p:cTn>
-                                  <p:tgtEl>
-                                    <p:spTgt spid="28"/>
-                                  </p:tgtEl>
-                                  <p:attrNameLst>
-                                    <p:attrName>style.visibility</p:attrName>
-                                  </p:attrNameLst>
-                                </p:cBhvr>
-                                <p:to>
-                                  <p:strVal val="visible"/>
-                                </p:to>
-                              </p:set>
-                              <p:set>
-                                <p:cBhvr>
-                                  <p:cTn id="15" dur="1" fill="hold">
-                                    <p:stCondLst>
-                                      <p:cond delay="0"/>
-                                    </p:stCondLst>
-                                  </p:cTn>
-                                  <p:tgtEl>
-                                    <p:spTgt spid="29"/>
-                                  </p:tgtEl>
-                                  <p:attrNameLst>
-                                    <p:attrName>style.visibility</p:attrName>
-                                  </p:attrNameLst>
-                                </p:cBhvr>
-                                <p:to>
-                                  <p:strVal val="visible"/>
-                                </p:to>
-                              </p:set>
-                              <p:set>
-                                <p:cBhvr>
-                                  <p:cTn id="16" dur="1" fill="hold">
-                                    <p:stCondLst>
-                                      <p:cond delay="0"/>
-                                    </p:stCondLst>
-                                  </p:cTn>
-                                  <p:tgtEl>
-                                    <p:spTgt spid="30"/>
-                                  </p:tgtEl>
-                                  <p:attrNameLst>
-                                    <p:attrName>style.visibility</p:attrName>
-                                  </p:attrNameLst>
-                                </p:cBhvr>
-                                <p:to>
-                                  <p:strVal val="visible"/>
-                                </p:to>
-                              </p:set>
-                              <p:set>
-                                <p:cBhvr>
-                                  <p:cTn id="17" dur="1" fill="hold">
-                                    <p:stCondLst>
-                                      <p:cond delay="0"/>
-                                    </p:stCondLst>
-                                  </p:cTn>
-                                  <p:tgtEl>
-                                    <p:spTgt spid="31"/>
-                                  </p:tgtEl>
-                                  <p:attrNameLst>
-                                    <p:attrName>style.visibility</p:attrName>
-                                  </p:attrNameLst>
-                                </p:cBhvr>
-                                <p:to>
-                                  <p:strVal val="visible"/>
-                                </p:to>
-                              </p:set>
-                              <p:set>
-                                <p:cBhvr>
-                                  <p:cTn id="18" dur="1" fill="hold">
-                                    <p:stCondLst>
-                                      <p:cond delay="0"/>
-                                    </p:stCondLst>
-                                  </p:cTn>
-                                  <p:tgtEl>
-                                    <p:spTgt spid="32"/>
-                                  </p:tgtEl>
-                                  <p:attrNameLst>
-                                    <p:attrName>style.visibility</p:attrName>
-                                  </p:attrNameLst>
-                                </p:cBhvr>
-                                <p:to>
-                                  <p:strVal val="visible"/>
-                                </p:to>
-                              </p:set>
-                              <p:set>
-                                <p:cBhvr>
-                                  <p:cTn id="19" dur="1" fill="hold">
-                                    <p:stCondLst>
-                                      <p:cond delay="0"/>
-                                    </p:stCondLst>
-                                  </p:cTn>
-                                  <p:tgtEl>
-                                    <p:spTgt spid="33"/>
-                                  </p:tgtEl>
-                                  <p:attrNameLst>
-                                    <p:attrName>style.visibility</p:attrName>
-                                  </p:attrNameLst>
-                                </p:cBhvr>
-                                <p:to>
-                                  <p:strVal val="visible"/>
-                                </p:to>
-                              </p:set>
+                              <p:par>
+                                <p:cTn id="5" presetID="2" presetClass="entr" presetSubtype="0" fill="hold" grpId="0" nodeType="clickEffect">
+                                  <p:stCondLst>
+                                    <p:cond delay="0"/>
+                                  </p:stCondLst>
+                                  <p:childTnLst>
+                                    <p:set>
+                                      <p:cBhvr>
+                                        <p:cTn id="6" dur="1" fill="hold">
+                                          <p:stCondLst>
+                                            <p:cond delay="0"/>
+                                          </p:stCondLst>
+                                        </p:cTn>
+                                        <p:tgtEl>
+                                          <p:spTgt spid="19"/>
+                                        </p:tgtEl>
+                                        <p:attrNameLst>
+                                          <p:attrName>style.visibility</p:attrName>
+                                        </p:attrNameLst>
+                                      </p:cBhvr>
+                                      <p:to>
+                                        <p:strVal val="visible"/>
+                                      </p:to>
+                                    </p:set>
+                                    <p:set>
+                                      <p:cBhvr>
+                                        <p:cTn id="7" dur="1" fill="hold">
+                                          <p:stCondLst>
+                                            <p:cond delay="0"/>
+                                          </p:stCondLst>
+                                        </p:cTn>
+                                        <p:tgtEl>
+                                          <p:spTgt spid="20"/>
+                                        </p:tgtEl>
+                                        <p:attrNameLst>
+                                          <p:attrName>style.visibility</p:attrName>
+                                        </p:attrNameLst>
+                                      </p:cBhvr>
+                                      <p:to>
+                                        <p:strVal val="visible"/>
+                                      </p:to>
+                                    </p:set>
+                                    <p:set>
+                                      <p:cBhvr>
+                                        <p:cTn id="8" dur="1" fill="hold">
+                                          <p:stCondLst>
+                                            <p:cond delay="0"/>
+                                          </p:stCondLst>
+                                        </p:cTn>
+                                        <p:tgtEl>
+                                          <p:spTgt spid="21"/>
+                                        </p:tgtEl>
+                                        <p:attrNameLst>
+                                          <p:attrName>style.visibility</p:attrName>
+                                        </p:attrNameLst>
+                                      </p:cBhvr>
+                                      <p:to>
+                                        <p:strVal val="visible"/>
+                                      </p:to>
+                                    </p:set>
+                                    <p:set>
+                                      <p:cBhvr>
+                                        <p:cTn id="9" dur="1" fill="hold">
+                                          <p:stCondLst>
+                                            <p:cond delay="0"/>
+                                          </p:stCondLst>
+                                        </p:cTn>
+                                        <p:tgtEl>
+                                          <p:spTgt spid="22"/>
+                                        </p:tgtEl>
+                                        <p:attrNameLst>
+                                          <p:attrName>style.visibility</p:attrName>
+                                        </p:attrNameLst>
+                                      </p:cBhvr>
+                                      <p:to>
+                                        <p:strVal val="visible"/>
+                                      </p:to>
+                                    </p:set>
+                                    <p:set>
+                                      <p:cBhvr>
+                                        <p:cTn id="10" dur="1" fill="hold">
+                                          <p:stCondLst>
+                                            <p:cond delay="0"/>
+                                          </p:stCondLst>
+                                        </p:cTn>
+                                        <p:tgtEl>
+                                          <p:spTgt spid="23"/>
+                                        </p:tgtEl>
+                                        <p:attrNameLst>
+                                          <p:attrName>style.visibility</p:attrName>
+                                        </p:attrNameLst>
+                                      </p:cBhvr>
+                                      <p:to>
+                                        <p:strVal val="visible"/>
+                                      </p:to>
+                                    </p:set>
+                                    <p:set>
+                                      <p:cBhvr>
+                                        <p:cTn id="11" dur="1" fill="hold">
+                                          <p:stCondLst>
+                                            <p:cond delay="0"/>
+                                          </p:stCondLst>
+                                        </p:cTn>
+                                        <p:tgtEl>
+                                          <p:spTgt spid="24"/>
+                                        </p:tgtEl>
+                                        <p:attrNameLst>
+                                          <p:attrName>style.visibility</p:attrName>
+                                        </p:attrNameLst>
+                                      </p:cBhvr>
+                                      <p:to>
+                                        <p:strVal val="visible"/>
+                                      </p:to>
+                                    </p:set>
+                                    <p:set>
+                                      <p:cBhvr>
+                                        <p:cTn id="12" dur="1" fill="hold">
+                                          <p:stCondLst>
+                                            <p:cond delay="0"/>
+                                          </p:stCondLst>
+                                        </p:cTn>
+                                        <p:tgtEl>
+                                          <p:spTgt spid="25"/>
+                                        </p:tgtEl>
+                                        <p:attrNameLst>
+                                          <p:attrName>style.visibility</p:attrName>
+                                        </p:attrNameLst>
+                                      </p:cBhvr>
+                                      <p:to>
+                                        <p:strVal val="visible"/>
+                                      </p:to>
+                                    </p:set>
+                                    <p:set>
+                                      <p:cBhvr>
+                                        <p:cTn id="13" dur="1" fill="hold">
+                                          <p:stCondLst>
+                                            <p:cond delay="0"/>
+                                          </p:stCondLst>
+                                        </p:cTn>
+                                        <p:tgtEl>
+                                          <p:spTgt spid="26"/>
+                                        </p:tgtEl>
+                                        <p:attrNameLst>
+                                          <p:attrName>style.visibility</p:attrName>
+                                        </p:attrNameLst>
+                                      </p:cBhvr>
+                                      <p:to>
+                                        <p:strVal val="visible"/>
+                                      </p:to>
+                                    </p:set>
+                                    <p:set>
+                                      <p:cBhvr>
+                                        <p:cTn id="14" dur="1" fill="hold">
+                                          <p:stCondLst>
+                                            <p:cond delay="0"/>
+                                          </p:stCondLst>
+                                        </p:cTn>
+                                        <p:tgtEl>
+                                          <p:spTgt spid="27"/>
+                                        </p:tgtEl>
+                                        <p:attrNameLst>
+                                          <p:attrName>style.visibility</p:attrName>
+                                        </p:attrNameLst>
+                                      </p:cBhvr>
+                                      <p:to>
+                                        <p:strVal val="visible"/>
+                                      </p:to>
+                                    </p:set>
+                                    <p:set>
+                                      <p:cBhvr>
+                                        <p:cTn id="15" dur="1" fill="hold">
+                                          <p:stCondLst>
+                                            <p:cond delay="0"/>
+                                          </p:stCondLst>
+                                        </p:cTn>
+                                        <p:tgtEl>
+                                          <p:spTgt spid="28"/>
+                                        </p:tgtEl>
+                                        <p:attrNameLst>
+                                          <p:attrName>style.visibility</p:attrName>
+                                        </p:attrNameLst>
+                                      </p:cBhvr>
+                                      <p:to>
+                                        <p:strVal val="visible"/>
+                                      </p:to>
+                                    </p:set>
+                                    <p:set>
+                                      <p:cBhvr>
+                                        <p:cTn id="16" dur="1" fill="hold">
+                                          <p:stCondLst>
+                                            <p:cond delay="0"/>
+                                          </p:stCondLst>
+                                        </p:cTn>
+                                        <p:tgtEl>
+                                          <p:spTgt spid="29"/>
+                                        </p:tgtEl>
+                                        <p:attrNameLst>
+                                          <p:attrName>style.visibility</p:attrName>
+                                        </p:attrNameLst>
+                                      </p:cBhvr>
+                                      <p:to>
+                                        <p:strVal val="visible"/>
+                                      </p:to>
+                                    </p:set>
+                                    <p:set>
+                                      <p:cBhvr>
+                                        <p:cTn id="17" dur="1" fill="hold">
+                                          <p:stCondLst>
+                                            <p:cond delay="0"/>
+                                          </p:stCondLst>
+                                        </p:cTn>
+                                        <p:tgtEl>
+                                          <p:spTgt spid="30"/>
+                                        </p:tgtEl>
+                                        <p:attrNameLst>
+                                          <p:attrName>style.visibility</p:attrName>
+                                        </p:attrNameLst>
+                                      </p:cBhvr>
+                                      <p:to>
+                                        <p:strVal val="visible"/>
+                                      </p:to>
+                                    </p:set>
+                                    <p:set>
+                                      <p:cBhvr>
+                                        <p:cTn id="18" dur="1" fill="hold">
+                                          <p:stCondLst>
+                                            <p:cond delay="0"/>
+                                          </p:stCondLst>
+                                        </p:cTn>
+                                        <p:tgtEl>
+                                          <p:spTgt spid="31"/>
+                                        </p:tgtEl>
+                                        <p:attrNameLst>
+                                          <p:attrName>style.visibility</p:attrName>
+                                        </p:attrNameLst>
+                                      </p:cBhvr>
+                                      <p:to>
+                                        <p:strVal val="visible"/>
+                                      </p:to>
+                                    </p:set>
+                                    <p:set>
+                                      <p:cBhvr>
+                                        <p:cTn id="19" dur="1" fill="hold">
+                                          <p:stCondLst>
+                                            <p:cond delay="0"/>
+                                          </p:stCondLst>
+                                        </p:cTn>
+                                        <p:tgtEl>
+                                          <p:spTgt spid="32"/>
+                                        </p:tgtEl>
+                                        <p:attrNameLst>
+                                          <p:attrName>style.visibility</p:attrName>
+                                        </p:attrNameLst>
+                                      </p:cBhvr>
+                                      <p:to>
+                                        <p:strVal val="visible"/>
+                                      </p:to>
+                                    </p:set>
+                                    <p:set>
+                                      <p:cBhvr>
+                                        <p:cTn id="20" dur="1" fill="hold">
+                                          <p:stCondLst>
+                                            <p:cond delay="0"/>
+                                          </p:stCondLst>
+                                        </p:cTn>
+                                        <p:tgtEl>
+                                          <p:spTgt spid="33"/>
+                                        </p:tgtEl>
+                                        <p:attrNameLst>
+                                          <p:attrName>style.visibility</p:attrName>
+                                        </p:attrNameLst>
+                                      </p:cBhvr>
+                                      <p:to>
+                                        <p:strVal val="visible"/>
+                                      </p:to>
+                                    </p:set>
+                                  </p:childTnLst>
+                                </p:cTn>
+                              </p:par>
                             </p:childTnLst>
                           </p:cTn>
                         </p:par>
@@ -21255,6 +21333,20 @@
                   </p:par>
                 </p:childTnLst>
               </p:cTn>
+              <p:prevCondLst>
+                <p:cond evt="onPrev" delay="0">
+                  <p:tgtEl>
+                    <p:sldTgt/>
+                  </p:tgtEl>
+                </p:cond>
+              </p:prevCondLst>
+              <p:nextCondLst>
+                <p:cond evt="onNext" delay="0">
+                  <p:tgtEl>
+                    <p:sldTgt/>
+                  </p:tgtEl>
+                </p:cond>
+              </p:nextCondLst>
             </p:seq>
           </p:childTnLst>
         </p:cTn>
@@ -22405,281 +22497,290 @@
                       </p:stCondLst>
                       <p:childTnLst>
                         <p:par>
-                          <p:cTn id="4" presetID="2" presetClass="entr" presetSubtype="0" fill="hold" nodeType="clickEffect">
+                          <p:cTn id="4" fill="hold">
                             <p:stCondLst>
                               <p:cond delay="0"/>
                             </p:stCondLst>
                             <p:childTnLst>
-                              <p:set>
-                                <p:cBhvr>
-                                  <p:cTn id="5" dur="1" fill="hold">
-                                    <p:stCondLst>
-                                      <p:cond delay="0"/>
-                                    </p:stCondLst>
-                                  </p:cTn>
-                                  <p:tgtEl>
-                                    <p:spTgt spid="21"/>
-                                  </p:tgtEl>
-                                  <p:attrNameLst>
-                                    <p:attrName>style.visibility</p:attrName>
-                                  </p:attrNameLst>
-                                </p:cBhvr>
-                                <p:to>
-                                  <p:strVal val="visible"/>
-                                </p:to>
-                              </p:set>
-                              <p:set>
-                                <p:cBhvr>
-                                  <p:cTn id="6" dur="1" fill="hold">
-                                    <p:stCondLst>
-                                      <p:cond delay="0"/>
-                                    </p:stCondLst>
-                                  </p:cTn>
-                                  <p:tgtEl>
-                                    <p:spTgt spid="22"/>
-                                  </p:tgtEl>
-                                  <p:attrNameLst>
-                                    <p:attrName>style.visibility</p:attrName>
-                                  </p:attrNameLst>
-                                </p:cBhvr>
-                                <p:to>
-                                  <p:strVal val="visible"/>
-                                </p:to>
-                              </p:set>
-                              <p:set>
-                                <p:cBhvr>
-                                  <p:cTn id="7" dur="1" fill="hold">
-                                    <p:stCondLst>
-                                      <p:cond delay="0"/>
-                                    </p:stCondLst>
-                                  </p:cTn>
-                                  <p:tgtEl>
-                                    <p:spTgt spid="23"/>
-                                  </p:tgtEl>
-                                  <p:attrNameLst>
-                                    <p:attrName>style.visibility</p:attrName>
-                                  </p:attrNameLst>
-                                </p:cBhvr>
-                                <p:to>
-                                  <p:strVal val="visible"/>
-                                </p:to>
-                              </p:set>
-                              <p:set>
-                                <p:cBhvr>
-                                  <p:cTn id="8" dur="1" fill="hold">
-                                    <p:stCondLst>
-                                      <p:cond delay="0"/>
-                                    </p:stCondLst>
-                                  </p:cTn>
-                                  <p:tgtEl>
-                                    <p:spTgt spid="24"/>
-                                  </p:tgtEl>
-                                  <p:attrNameLst>
-                                    <p:attrName>style.visibility</p:attrName>
-                                  </p:attrNameLst>
-                                </p:cBhvr>
-                                <p:to>
-                                  <p:strVal val="visible"/>
-                                </p:to>
-                              </p:set>
-                              <p:set>
-                                <p:cBhvr>
-                                  <p:cTn id="9" dur="1" fill="hold">
-                                    <p:stCondLst>
-                                      <p:cond delay="0"/>
-                                    </p:stCondLst>
-                                  </p:cTn>
-                                  <p:tgtEl>
-                                    <p:spTgt spid="25"/>
-                                  </p:tgtEl>
-                                  <p:attrNameLst>
-                                    <p:attrName>style.visibility</p:attrName>
-                                  </p:attrNameLst>
-                                </p:cBhvr>
-                                <p:to>
-                                  <p:strVal val="visible"/>
-                                </p:to>
-                              </p:set>
-                              <p:set>
-                                <p:cBhvr>
-                                  <p:cTn id="10" dur="1" fill="hold">
-                                    <p:stCondLst>
-                                      <p:cond delay="0"/>
-                                    </p:stCondLst>
-                                  </p:cTn>
-                                  <p:tgtEl>
-                                    <p:spTgt spid="26"/>
-                                  </p:tgtEl>
-                                  <p:attrNameLst>
-                                    <p:attrName>style.visibility</p:attrName>
-                                  </p:attrNameLst>
-                                </p:cBhvr>
-                                <p:to>
-                                  <p:strVal val="visible"/>
-                                </p:to>
-                              </p:set>
-                              <p:set>
-                                <p:cBhvr>
-                                  <p:cTn id="11" dur="1" fill="hold">
-                                    <p:stCondLst>
-                                      <p:cond delay="0"/>
-                                    </p:stCondLst>
-                                  </p:cTn>
-                                  <p:tgtEl>
-                                    <p:spTgt spid="27"/>
-                                  </p:tgtEl>
-                                  <p:attrNameLst>
-                                    <p:attrName>style.visibility</p:attrName>
-                                  </p:attrNameLst>
-                                </p:cBhvr>
-                                <p:to>
-                                  <p:strVal val="visible"/>
-                                </p:to>
-                              </p:set>
-                              <p:set>
-                                <p:cBhvr>
-                                  <p:cTn id="12" dur="1" fill="hold">
-                                    <p:stCondLst>
-                                      <p:cond delay="0"/>
-                                    </p:stCondLst>
-                                  </p:cTn>
-                                  <p:tgtEl>
-                                    <p:spTgt spid="28"/>
-                                  </p:tgtEl>
-                                  <p:attrNameLst>
-                                    <p:attrName>style.visibility</p:attrName>
-                                  </p:attrNameLst>
-                                </p:cBhvr>
-                                <p:to>
-                                  <p:strVal val="visible"/>
-                                </p:to>
-                              </p:set>
-                              <p:set>
-                                <p:cBhvr>
-                                  <p:cTn id="13" dur="1" fill="hold">
-                                    <p:stCondLst>
-                                      <p:cond delay="0"/>
-                                    </p:stCondLst>
-                                  </p:cTn>
-                                  <p:tgtEl>
-                                    <p:spTgt spid="29"/>
-                                  </p:tgtEl>
-                                  <p:attrNameLst>
-                                    <p:attrName>style.visibility</p:attrName>
-                                  </p:attrNameLst>
-                                </p:cBhvr>
-                                <p:to>
-                                  <p:strVal val="visible"/>
-                                </p:to>
-                              </p:set>
-                              <p:set>
-                                <p:cBhvr>
-                                  <p:cTn id="14" dur="1" fill="hold">
-                                    <p:stCondLst>
-                                      <p:cond delay="0"/>
-                                    </p:stCondLst>
-                                  </p:cTn>
-                                  <p:tgtEl>
-                                    <p:spTgt spid="30"/>
-                                  </p:tgtEl>
-                                  <p:attrNameLst>
-                                    <p:attrName>style.visibility</p:attrName>
-                                  </p:attrNameLst>
-                                </p:cBhvr>
-                                <p:to>
-                                  <p:strVal val="visible"/>
-                                </p:to>
-                              </p:set>
-                              <p:set>
-                                <p:cBhvr>
-                                  <p:cTn id="15" dur="1" fill="hold">
-                                    <p:stCondLst>
-                                      <p:cond delay="0"/>
-                                    </p:stCondLst>
-                                  </p:cTn>
-                                  <p:tgtEl>
-                                    <p:spTgt spid="31"/>
-                                  </p:tgtEl>
-                                  <p:attrNameLst>
-                                    <p:attrName>style.visibility</p:attrName>
-                                  </p:attrNameLst>
-                                </p:cBhvr>
-                                <p:to>
-                                  <p:strVal val="visible"/>
-                                </p:to>
-                              </p:set>
-                              <p:set>
-                                <p:cBhvr>
-                                  <p:cTn id="16" dur="1" fill="hold">
-                                    <p:stCondLst>
-                                      <p:cond delay="0"/>
-                                    </p:stCondLst>
-                                  </p:cTn>
-                                  <p:tgtEl>
-                                    <p:spTgt spid="32"/>
-                                  </p:tgtEl>
-                                  <p:attrNameLst>
-                                    <p:attrName>style.visibility</p:attrName>
-                                  </p:attrNameLst>
-                                </p:cBhvr>
-                                <p:to>
-                                  <p:strVal val="visible"/>
-                                </p:to>
-                              </p:set>
-                              <p:set>
-                                <p:cBhvr>
-                                  <p:cTn id="17" dur="1" fill="hold">
-                                    <p:stCondLst>
-                                      <p:cond delay="0"/>
-                                    </p:stCondLst>
-                                  </p:cTn>
-                                  <p:tgtEl>
-                                    <p:spTgt spid="33"/>
-                                  </p:tgtEl>
-                                  <p:attrNameLst>
-                                    <p:attrName>style.visibility</p:attrName>
-                                  </p:attrNameLst>
-                                </p:cBhvr>
-                                <p:to>
-                                  <p:strVal val="visible"/>
-                                </p:to>
-                              </p:set>
-                              <p:set>
-                                <p:cBhvr>
-                                  <p:cTn id="18" dur="1" fill="hold">
-                                    <p:stCondLst>
-                                      <p:cond delay="0"/>
-                                    </p:stCondLst>
-                                  </p:cTn>
-                                  <p:tgtEl>
-                                    <p:spTgt spid="34"/>
-                                  </p:tgtEl>
-                                  <p:attrNameLst>
-                                    <p:attrName>style.visibility</p:attrName>
-                                  </p:attrNameLst>
-                                </p:cBhvr>
-                                <p:to>
-                                  <p:strVal val="visible"/>
-                                </p:to>
-                              </p:set>
-                              <p:set>
-                                <p:cBhvr>
-                                  <p:cTn id="19" dur="1" fill="hold">
-                                    <p:stCondLst>
-                                      <p:cond delay="0"/>
-                                    </p:stCondLst>
-                                  </p:cTn>
-                                  <p:tgtEl>
-                                    <p:spTgt spid="35"/>
-                                  </p:tgtEl>
-                                  <p:attrNameLst>
-                                    <p:attrName>style.visibility</p:attrName>
-                                  </p:attrNameLst>
-                                </p:cBhvr>
-                                <p:to>
-                                  <p:strVal val="visible"/>
-                                </p:to>
-                              </p:set>
+                              <p:par>
+                                <p:cTn id="5" presetID="2" presetClass="entr" presetSubtype="0" fill="hold" grpId="0" nodeType="clickEffect">
+                                  <p:stCondLst>
+                                    <p:cond delay="0"/>
+                                  </p:stCondLst>
+                                  <p:childTnLst>
+                                    <p:set>
+                                      <p:cBhvr>
+                                        <p:cTn id="6" dur="1" fill="hold">
+                                          <p:stCondLst>
+                                            <p:cond delay="0"/>
+                                          </p:stCondLst>
+                                        </p:cTn>
+                                        <p:tgtEl>
+                                          <p:spTgt spid="21"/>
+                                        </p:tgtEl>
+                                        <p:attrNameLst>
+                                          <p:attrName>style.visibility</p:attrName>
+                                        </p:attrNameLst>
+                                      </p:cBhvr>
+                                      <p:to>
+                                        <p:strVal val="visible"/>
+                                      </p:to>
+                                    </p:set>
+                                    <p:set>
+                                      <p:cBhvr>
+                                        <p:cTn id="7" dur="1" fill="hold">
+                                          <p:stCondLst>
+                                            <p:cond delay="0"/>
+                                          </p:stCondLst>
+                                        </p:cTn>
+                                        <p:tgtEl>
+                                          <p:spTgt spid="22"/>
+                                        </p:tgtEl>
+                                        <p:attrNameLst>
+                                          <p:attrName>style.visibility</p:attrName>
+                                        </p:attrNameLst>
+                                      </p:cBhvr>
+                                      <p:to>
+                                        <p:strVal val="visible"/>
+                                      </p:to>
+                                    </p:set>
+                                    <p:set>
+                                      <p:cBhvr>
+                                        <p:cTn id="8" dur="1" fill="hold">
+                                          <p:stCondLst>
+                                            <p:cond delay="0"/>
+                                          </p:stCondLst>
+                                        </p:cTn>
+                                        <p:tgtEl>
+                                          <p:spTgt spid="23"/>
+                                        </p:tgtEl>
+                                        <p:attrNameLst>
+                                          <p:attrName>style.visibility</p:attrName>
+                                        </p:attrNameLst>
+                                      </p:cBhvr>
+                                      <p:to>
+                                        <p:strVal val="visible"/>
+                                      </p:to>
+                                    </p:set>
+                                    <p:set>
+                                      <p:cBhvr>
+                                        <p:cTn id="9" dur="1" fill="hold">
+                                          <p:stCondLst>
+                                            <p:cond delay="0"/>
+                                          </p:stCondLst>
+                                        </p:cTn>
+                                        <p:tgtEl>
+                                          <p:spTgt spid="24"/>
+                                        </p:tgtEl>
+                                        <p:attrNameLst>
+                                          <p:attrName>style.visibility</p:attrName>
+                                        </p:attrNameLst>
+                                      </p:cBhvr>
+                                      <p:to>
+                                        <p:strVal val="visible"/>
+                                      </p:to>
+                                    </p:set>
+                                    <p:set>
+                                      <p:cBhvr>
+                                        <p:cTn id="10" dur="1" fill="hold">
+                                          <p:stCondLst>
+                                            <p:cond delay="0"/>
+                                          </p:stCondLst>
+                                        </p:cTn>
+                                        <p:tgtEl>
+                                          <p:spTgt spid="25"/>
+                                        </p:tgtEl>
+                                        <p:attrNameLst>
+                                          <p:attrName>style.visibility</p:attrName>
+                                        </p:attrNameLst>
+                                      </p:cBhvr>
+                                      <p:to>
+                                        <p:strVal val="visible"/>
+                                      </p:to>
+                                    </p:set>
+                                    <p:set>
+                                      <p:cBhvr>
+                                        <p:cTn id="11" dur="1" fill="hold">
+                                          <p:stCondLst>
+                                            <p:cond delay="0"/>
+                                          </p:stCondLst>
+                                        </p:cTn>
+                                        <p:tgtEl>
+                                          <p:spTgt spid="26"/>
+                                        </p:tgtEl>
+                                        <p:attrNameLst>
+                                          <p:attrName>style.visibility</p:attrName>
+                                        </p:attrNameLst>
+                                      </p:cBhvr>
+                                      <p:to>
+                                        <p:strVal val="visible"/>
+                                      </p:to>
+                                    </p:set>
+                                    <p:set>
+                                      <p:cBhvr>
+                                        <p:cTn id="12" dur="1" fill="hold">
+                                          <p:stCondLst>
+                                            <p:cond delay="0"/>
+                                          </p:stCondLst>
+                                        </p:cTn>
+                                        <p:tgtEl>
+                                          <p:spTgt spid="27"/>
+                                        </p:tgtEl>
+                                        <p:attrNameLst>
+                                          <p:attrName>style.visibility</p:attrName>
+                                        </p:attrNameLst>
+                                      </p:cBhvr>
+                                      <p:to>
+                                        <p:strVal val="visible"/>
+                                      </p:to>
+                                    </p:set>
+                                    <p:set>
+                                      <p:cBhvr>
+                                        <p:cTn id="13" dur="1" fill="hold">
+                                          <p:stCondLst>
+                                            <p:cond delay="0"/>
+                                          </p:stCondLst>
+                                        </p:cTn>
+                                        <p:tgtEl>
+                                          <p:spTgt spid="28"/>
+                                        </p:tgtEl>
+                                        <p:attrNameLst>
+                                          <p:attrName>style.visibility</p:attrName>
+                                        </p:attrNameLst>
+                                      </p:cBhvr>
+                                      <p:to>
+                                        <p:strVal val="visible"/>
+                                      </p:to>
+                                    </p:set>
+                                    <p:set>
+                                      <p:cBhvr>
+                                        <p:cTn id="14" dur="1" fill="hold">
+                                          <p:stCondLst>
+                                            <p:cond delay="0"/>
+                                          </p:stCondLst>
+                                        </p:cTn>
+                                        <p:tgtEl>
+                                          <p:spTgt spid="29"/>
+                                        </p:tgtEl>
+                                        <p:attrNameLst>
+                                          <p:attrName>style.visibility</p:attrName>
+                                        </p:attrNameLst>
+                                      </p:cBhvr>
+                                      <p:to>
+                                        <p:strVal val="visible"/>
+                                      </p:to>
+                                    </p:set>
+                                    <p:set>
+                                      <p:cBhvr>
+                                        <p:cTn id="15" dur="1" fill="hold">
+                                          <p:stCondLst>
+                                            <p:cond delay="0"/>
+                                          </p:stCondLst>
+                                        </p:cTn>
+                                        <p:tgtEl>
+                                          <p:spTgt spid="30"/>
+                                        </p:tgtEl>
+                                        <p:attrNameLst>
+                                          <p:attrName>style.visibility</p:attrName>
+                                        </p:attrNameLst>
+                                      </p:cBhvr>
+                                      <p:to>
+                                        <p:strVal val="visible"/>
+                                      </p:to>
+                                    </p:set>
+                                    <p:set>
+                                      <p:cBhvr>
+                                        <p:cTn id="16" dur="1" fill="hold">
+                                          <p:stCondLst>
+                                            <p:cond delay="0"/>
+                                          </p:stCondLst>
+                                        </p:cTn>
+                                        <p:tgtEl>
+                                          <p:spTgt spid="31"/>
+                                        </p:tgtEl>
+                                        <p:attrNameLst>
+                                          <p:attrName>style.visibility</p:attrName>
+                                        </p:attrNameLst>
+                                      </p:cBhvr>
+                                      <p:to>
+                                        <p:strVal val="visible"/>
+                                      </p:to>
+                                    </p:set>
+                                    <p:set>
+                                      <p:cBhvr>
+                                        <p:cTn id="17" dur="1" fill="hold">
+                                          <p:stCondLst>
+                                            <p:cond delay="0"/>
+                                          </p:stCondLst>
+                                        </p:cTn>
+                                        <p:tgtEl>
+                                          <p:spTgt spid="32"/>
+                                        </p:tgtEl>
+                                        <p:attrNameLst>
+                                          <p:attrName>style.visibility</p:attrName>
+                                        </p:attrNameLst>
+                                      </p:cBhvr>
+                                      <p:to>
+                                        <p:strVal val="visible"/>
+                                      </p:to>
+                                    </p:set>
+                                    <p:set>
+                                      <p:cBhvr>
+                                        <p:cTn id="18" dur="1" fill="hold">
+                                          <p:stCondLst>
+                                            <p:cond delay="0"/>
+                                          </p:stCondLst>
+                                        </p:cTn>
+                                        <p:tgtEl>
+                                          <p:spTgt spid="33"/>
+                                        </p:tgtEl>
+                                        <p:attrNameLst>
+                                          <p:attrName>style.visibility</p:attrName>
+                                        </p:attrNameLst>
+                                      </p:cBhvr>
+                                      <p:to>
+                                        <p:strVal val="visible"/>
+                                      </p:to>
+                                    </p:set>
+                                    <p:set>
+                                      <p:cBhvr>
+                                        <p:cTn id="19" dur="1" fill="hold">
+                                          <p:stCondLst>
+                                            <p:cond delay="0"/>
+                                          </p:stCondLst>
+                                        </p:cTn>
+                                        <p:tgtEl>
+                                          <p:spTgt spid="34"/>
+                                        </p:tgtEl>
+                                        <p:attrNameLst>
+                                          <p:attrName>style.visibility</p:attrName>
+                                        </p:attrNameLst>
+                                      </p:cBhvr>
+                                      <p:to>
+                                        <p:strVal val="visible"/>
+                                      </p:to>
+                                    </p:set>
+                                    <p:set>
+                                      <p:cBhvr>
+                                        <p:cTn id="20" dur="1" fill="hold">
+                                          <p:stCondLst>
+                                            <p:cond delay="0"/>
+                                          </p:stCondLst>
+                                        </p:cTn>
+                                        <p:tgtEl>
+                                          <p:spTgt spid="35"/>
+                                        </p:tgtEl>
+                                        <p:attrNameLst>
+                                          <p:attrName>style.visibility</p:attrName>
+                                        </p:attrNameLst>
+                                      </p:cBhvr>
+                                      <p:to>
+                                        <p:strVal val="visible"/>
+                                      </p:to>
+                                    </p:set>
+                                  </p:childTnLst>
+                                </p:cTn>
+                              </p:par>
                             </p:childTnLst>
                           </p:cTn>
                         </p:par>
@@ -22688,6 +22789,20 @@
                   </p:par>
                 </p:childTnLst>
               </p:cTn>
+              <p:prevCondLst>
+                <p:cond evt="onPrev" delay="0">
+                  <p:tgtEl>
+                    <p:sldTgt/>
+                  </p:tgtEl>
+                </p:cond>
+              </p:prevCondLst>
+              <p:nextCondLst>
+                <p:cond evt="onNext" delay="0">
+                  <p:tgtEl>
+                    <p:sldTgt/>
+                  </p:tgtEl>
+                </p:cond>
+              </p:nextCondLst>
             </p:seq>
           </p:childTnLst>
         </p:cTn>
@@ -23838,281 +23953,290 @@
                       </p:stCondLst>
                       <p:childTnLst>
                         <p:par>
-                          <p:cTn id="4" presetID="2" presetClass="entr" presetSubtype="0" fill="hold" nodeType="clickEffect">
+                          <p:cTn id="4" fill="hold">
                             <p:stCondLst>
                               <p:cond delay="0"/>
                             </p:stCondLst>
                             <p:childTnLst>
-                              <p:set>
-                                <p:cBhvr>
-                                  <p:cTn id="5" dur="1" fill="hold">
-                                    <p:stCondLst>
-                                      <p:cond delay="0"/>
-                                    </p:stCondLst>
-                                  </p:cTn>
-                                  <p:tgtEl>
-                                    <p:spTgt spid="21"/>
-                                  </p:tgtEl>
-                                  <p:attrNameLst>
-                                    <p:attrName>style.visibility</p:attrName>
-                                  </p:attrNameLst>
-                                </p:cBhvr>
-                                <p:to>
-                                  <p:strVal val="visible"/>
-                                </p:to>
-                              </p:set>
-                              <p:set>
-                                <p:cBhvr>
-                                  <p:cTn id="6" dur="1" fill="hold">
-                                    <p:stCondLst>
-                                      <p:cond delay="0"/>
-                                    </p:stCondLst>
-                                  </p:cTn>
-                                  <p:tgtEl>
-                                    <p:spTgt spid="22"/>
-                                  </p:tgtEl>
-                                  <p:attrNameLst>
-                                    <p:attrName>style.visibility</p:attrName>
-                                  </p:attrNameLst>
-                                </p:cBhvr>
-                                <p:to>
-                                  <p:strVal val="visible"/>
-                                </p:to>
-                              </p:set>
-                              <p:set>
-                                <p:cBhvr>
-                                  <p:cTn id="7" dur="1" fill="hold">
-                                    <p:stCondLst>
-                                      <p:cond delay="0"/>
-                                    </p:stCondLst>
-                                  </p:cTn>
-                                  <p:tgtEl>
-                                    <p:spTgt spid="23"/>
-                                  </p:tgtEl>
-                                  <p:attrNameLst>
-                                    <p:attrName>style.visibility</p:attrName>
-                                  </p:attrNameLst>
-                                </p:cBhvr>
-                                <p:to>
-                                  <p:strVal val="visible"/>
-                                </p:to>
-                              </p:set>
-                              <p:set>
-                                <p:cBhvr>
-                                  <p:cTn id="8" dur="1" fill="hold">
-                                    <p:stCondLst>
-                                      <p:cond delay="0"/>
-                                    </p:stCondLst>
-                                  </p:cTn>
-                                  <p:tgtEl>
-                                    <p:spTgt spid="24"/>
-                                  </p:tgtEl>
-                                  <p:attrNameLst>
-                                    <p:attrName>style.visibility</p:attrName>
-                                  </p:attrNameLst>
-                                </p:cBhvr>
-                                <p:to>
-                                  <p:strVal val="visible"/>
-                                </p:to>
-                              </p:set>
-                              <p:set>
-                                <p:cBhvr>
-                                  <p:cTn id="9" dur="1" fill="hold">
-                                    <p:stCondLst>
-                                      <p:cond delay="0"/>
-                                    </p:stCondLst>
-                                  </p:cTn>
-                                  <p:tgtEl>
-                                    <p:spTgt spid="25"/>
-                                  </p:tgtEl>
-                                  <p:attrNameLst>
-                                    <p:attrName>style.visibility</p:attrName>
-                                  </p:attrNameLst>
-                                </p:cBhvr>
-                                <p:to>
-                                  <p:strVal val="visible"/>
-                                </p:to>
-                              </p:set>
-                              <p:set>
-                                <p:cBhvr>
-                                  <p:cTn id="10" dur="1" fill="hold">
-                                    <p:stCondLst>
-                                      <p:cond delay="0"/>
-                                    </p:stCondLst>
-                                  </p:cTn>
-                                  <p:tgtEl>
-                                    <p:spTgt spid="26"/>
-                                  </p:tgtEl>
-                                  <p:attrNameLst>
-                                    <p:attrName>style.visibility</p:attrName>
-                                  </p:attrNameLst>
-                                </p:cBhvr>
-                                <p:to>
-                                  <p:strVal val="visible"/>
-                                </p:to>
-                              </p:set>
-                              <p:set>
-                                <p:cBhvr>
-                                  <p:cTn id="11" dur="1" fill="hold">
-                                    <p:stCondLst>
-                                      <p:cond delay="0"/>
-                                    </p:stCondLst>
-                                  </p:cTn>
-                                  <p:tgtEl>
-                                    <p:spTgt spid="27"/>
-                                  </p:tgtEl>
-                                  <p:attrNameLst>
-                                    <p:attrName>style.visibility</p:attrName>
-                                  </p:attrNameLst>
-                                </p:cBhvr>
-                                <p:to>
-                                  <p:strVal val="visible"/>
-                                </p:to>
-                              </p:set>
-                              <p:set>
-                                <p:cBhvr>
-                                  <p:cTn id="12" dur="1" fill="hold">
-                                    <p:stCondLst>
-                                      <p:cond delay="0"/>
-                                    </p:stCondLst>
-                                  </p:cTn>
-                                  <p:tgtEl>
-                                    <p:spTgt spid="28"/>
-                                  </p:tgtEl>
-                                  <p:attrNameLst>
-                                    <p:attrName>style.visibility</p:attrName>
-                                  </p:attrNameLst>
-                                </p:cBhvr>
-                                <p:to>
-                                  <p:strVal val="visible"/>
-                                </p:to>
-                              </p:set>
-                              <p:set>
-                                <p:cBhvr>
-                                  <p:cTn id="13" dur="1" fill="hold">
-                                    <p:stCondLst>
-                                      <p:cond delay="0"/>
-                                    </p:stCondLst>
-                                  </p:cTn>
-                                  <p:tgtEl>
-                                    <p:spTgt spid="29"/>
-                                  </p:tgtEl>
-                                  <p:attrNameLst>
-                                    <p:attrName>style.visibility</p:attrName>
-                                  </p:attrNameLst>
-                                </p:cBhvr>
-                                <p:to>
-                                  <p:strVal val="visible"/>
-                                </p:to>
-                              </p:set>
-                              <p:set>
-                                <p:cBhvr>
-                                  <p:cTn id="14" dur="1" fill="hold">
-                                    <p:stCondLst>
-                                      <p:cond delay="0"/>
-                                    </p:stCondLst>
-                                  </p:cTn>
-                                  <p:tgtEl>
-                                    <p:spTgt spid="30"/>
-                                  </p:tgtEl>
-                                  <p:attrNameLst>
-                                    <p:attrName>style.visibility</p:attrName>
-                                  </p:attrNameLst>
-                                </p:cBhvr>
-                                <p:to>
-                                  <p:strVal val="visible"/>
-                                </p:to>
-                              </p:set>
-                              <p:set>
-                                <p:cBhvr>
-                                  <p:cTn id="15" dur="1" fill="hold">
-                                    <p:stCondLst>
-                                      <p:cond delay="0"/>
-                                    </p:stCondLst>
-                                  </p:cTn>
-                                  <p:tgtEl>
-                                    <p:spTgt spid="31"/>
-                                  </p:tgtEl>
-                                  <p:attrNameLst>
-                                    <p:attrName>style.visibility</p:attrName>
-                                  </p:attrNameLst>
-                                </p:cBhvr>
-                                <p:to>
-                                  <p:strVal val="visible"/>
-                                </p:to>
-                              </p:set>
-                              <p:set>
-                                <p:cBhvr>
-                                  <p:cTn id="16" dur="1" fill="hold">
-                                    <p:stCondLst>
-                                      <p:cond delay="0"/>
-                                    </p:stCondLst>
-                                  </p:cTn>
-                                  <p:tgtEl>
-                                    <p:spTgt spid="32"/>
-                                  </p:tgtEl>
-                                  <p:attrNameLst>
-                                    <p:attrName>style.visibility</p:attrName>
-                                  </p:attrNameLst>
-                                </p:cBhvr>
-                                <p:to>
-                                  <p:strVal val="visible"/>
-                                </p:to>
-                              </p:set>
-                              <p:set>
-                                <p:cBhvr>
-                                  <p:cTn id="17" dur="1" fill="hold">
-                                    <p:stCondLst>
-                                      <p:cond delay="0"/>
-                                    </p:stCondLst>
-                                  </p:cTn>
-                                  <p:tgtEl>
-                                    <p:spTgt spid="33"/>
-                                  </p:tgtEl>
-                                  <p:attrNameLst>
-                                    <p:attrName>style.visibility</p:attrName>
-                                  </p:attrNameLst>
-                                </p:cBhvr>
-                                <p:to>
-                                  <p:strVal val="visible"/>
-                                </p:to>
-                              </p:set>
-                              <p:set>
-                                <p:cBhvr>
-                                  <p:cTn id="18" dur="1" fill="hold">
-                                    <p:stCondLst>
-                                      <p:cond delay="0"/>
-                                    </p:stCondLst>
-                                  </p:cTn>
-                                  <p:tgtEl>
-                                    <p:spTgt spid="34"/>
-                                  </p:tgtEl>
-                                  <p:attrNameLst>
-                                    <p:attrName>style.visibility</p:attrName>
-                                  </p:attrNameLst>
-                                </p:cBhvr>
-                                <p:to>
-                                  <p:strVal val="visible"/>
-                                </p:to>
-                              </p:set>
-                              <p:set>
-                                <p:cBhvr>
-                                  <p:cTn id="19" dur="1" fill="hold">
-                                    <p:stCondLst>
-                                      <p:cond delay="0"/>
-                                    </p:stCondLst>
-                                  </p:cTn>
-                                  <p:tgtEl>
-                                    <p:spTgt spid="35"/>
-                                  </p:tgtEl>
-                                  <p:attrNameLst>
-                                    <p:attrName>style.visibility</p:attrName>
-                                  </p:attrNameLst>
-                                </p:cBhvr>
-                                <p:to>
-                                  <p:strVal val="visible"/>
-                                </p:to>
-                              </p:set>
+                              <p:par>
+                                <p:cTn id="5" presetID="2" presetClass="entr" presetSubtype="0" fill="hold" grpId="0" nodeType="clickEffect">
+                                  <p:stCondLst>
+                                    <p:cond delay="0"/>
+                                  </p:stCondLst>
+                                  <p:childTnLst>
+                                    <p:set>
+                                      <p:cBhvr>
+                                        <p:cTn id="6" dur="1" fill="hold">
+                                          <p:stCondLst>
+                                            <p:cond delay="0"/>
+                                          </p:stCondLst>
+                                        </p:cTn>
+                                        <p:tgtEl>
+                                          <p:spTgt spid="21"/>
+                                        </p:tgtEl>
+                                        <p:attrNameLst>
+                                          <p:attrName>style.visibility</p:attrName>
+                                        </p:attrNameLst>
+                                      </p:cBhvr>
+                                      <p:to>
+                                        <p:strVal val="visible"/>
+                                      </p:to>
+                                    </p:set>
+                                    <p:set>
+                                      <p:cBhvr>
+                                        <p:cTn id="7" dur="1" fill="hold">
+                                          <p:stCondLst>
+                                            <p:cond delay="0"/>
+                                          </p:stCondLst>
+                                        </p:cTn>
+                                        <p:tgtEl>
+                                          <p:spTgt spid="22"/>
+                                        </p:tgtEl>
+                                        <p:attrNameLst>
+                                          <p:attrName>style.visibility</p:attrName>
+                                        </p:attrNameLst>
+                                      </p:cBhvr>
+                                      <p:to>
+                                        <p:strVal val="visible"/>
+                                      </p:to>
+                                    </p:set>
+                                    <p:set>
+                                      <p:cBhvr>
+                                        <p:cTn id="8" dur="1" fill="hold">
+                                          <p:stCondLst>
+                                            <p:cond delay="0"/>
+                                          </p:stCondLst>
+                                        </p:cTn>
+                                        <p:tgtEl>
+                                          <p:spTgt spid="23"/>
+                                        </p:tgtEl>
+                                        <p:attrNameLst>
+                                          <p:attrName>style.visibility</p:attrName>
+                                        </p:attrNameLst>
+                                      </p:cBhvr>
+                                      <p:to>
+                                        <p:strVal val="visible"/>
+                                      </p:to>
+                                    </p:set>
+                                    <p:set>
+                                      <p:cBhvr>
+                                        <p:cTn id="9" dur="1" fill="hold">
+                                          <p:stCondLst>
+                                            <p:cond delay="0"/>
+                                          </p:stCondLst>
+                                        </p:cTn>
+                                        <p:tgtEl>
+                                          <p:spTgt spid="24"/>
+                                        </p:tgtEl>
+                                        <p:attrNameLst>
+                                          <p:attrName>style.visibility</p:attrName>
+                                        </p:attrNameLst>
+                                      </p:cBhvr>
+                                      <p:to>
+                                        <p:strVal val="visible"/>
+                                      </p:to>
+                                    </p:set>
+                                    <p:set>
+                                      <p:cBhvr>
+                                        <p:cTn id="10" dur="1" fill="hold">
+                                          <p:stCondLst>
+                                            <p:cond delay="0"/>
+                                          </p:stCondLst>
+                                        </p:cTn>
+                                        <p:tgtEl>
+                                          <p:spTgt spid="25"/>
+                                        </p:tgtEl>
+                                        <p:attrNameLst>
+                                          <p:attrName>style.visibility</p:attrName>
+                                        </p:attrNameLst>
+                                      </p:cBhvr>
+                                      <p:to>
+                                        <p:strVal val="visible"/>
+                                      </p:to>
+                                    </p:set>
+                                    <p:set>
+                                      <p:cBhvr>
+                                        <p:cTn id="11" dur="1" fill="hold">
+                                          <p:stCondLst>
+                                            <p:cond delay="0"/>
+                                          </p:stCondLst>
+                                        </p:cTn>
+                                        <p:tgtEl>
+                                          <p:spTgt spid="26"/>
+                                        </p:tgtEl>
+                                        <p:attrNameLst>
+                                          <p:attrName>style.visibility</p:attrName>
+                                        </p:attrNameLst>
+                                      </p:cBhvr>
+                                      <p:to>
+                                        <p:strVal val="visible"/>
+                                      </p:to>
+                                    </p:set>
+                                    <p:set>
+                                      <p:cBhvr>
+                                        <p:cTn id="12" dur="1" fill="hold">
+                                          <p:stCondLst>
+                                            <p:cond delay="0"/>
+                                          </p:stCondLst>
+                                        </p:cTn>
+                                        <p:tgtEl>
+                                          <p:spTgt spid="27"/>
+                                        </p:tgtEl>
+                                        <p:attrNameLst>
+                                          <p:attrName>style.visibility</p:attrName>
+                                        </p:attrNameLst>
+                                      </p:cBhvr>
+                                      <p:to>
+                                        <p:strVal val="visible"/>
+                                      </p:to>
+                                    </p:set>
+                                    <p:set>
+                                      <p:cBhvr>
+                                        <p:cTn id="13" dur="1" fill="hold">
+                                          <p:stCondLst>
+                                            <p:cond delay="0"/>
+                                          </p:stCondLst>
+                                        </p:cTn>
+                                        <p:tgtEl>
+                                          <p:spTgt spid="28"/>
+                                        </p:tgtEl>
+                                        <p:attrNameLst>
+                                          <p:attrName>style.visibility</p:attrName>
+                                        </p:attrNameLst>
+                                      </p:cBhvr>
+                                      <p:to>
+                                        <p:strVal val="visible"/>
+                                      </p:to>
+                                    </p:set>
+                                    <p:set>
+                                      <p:cBhvr>
+                                        <p:cTn id="14" dur="1" fill="hold">
+                                          <p:stCondLst>
+                                            <p:cond delay="0"/>
+                                          </p:stCondLst>
+                                        </p:cTn>
+                                        <p:tgtEl>
+                                          <p:spTgt spid="29"/>
+                                        </p:tgtEl>
+                                        <p:attrNameLst>
+                                          <p:attrName>style.visibility</p:attrName>
+                                        </p:attrNameLst>
+                                      </p:cBhvr>
+                                      <p:to>
+                                        <p:strVal val="visible"/>
+                                      </p:to>
+                                    </p:set>
+                                    <p:set>
+                                      <p:cBhvr>
+                                        <p:cTn id="15" dur="1" fill="hold">
+                                          <p:stCondLst>
+                                            <p:cond delay="0"/>
+                                          </p:stCondLst>
+                                        </p:cTn>
+                                        <p:tgtEl>
+                                          <p:spTgt spid="30"/>
+                                        </p:tgtEl>
+                                        <p:attrNameLst>
+                                          <p:attrName>style.visibility</p:attrName>
+                                        </p:attrNameLst>
+                                      </p:cBhvr>
+                                      <p:to>
+                                        <p:strVal val="visible"/>
+                                      </p:to>
+                                    </p:set>
+                                    <p:set>
+                                      <p:cBhvr>
+                                        <p:cTn id="16" dur="1" fill="hold">
+                                          <p:stCondLst>
+                                            <p:cond delay="0"/>
+                                          </p:stCondLst>
+                                        </p:cTn>
+                                        <p:tgtEl>
+                                          <p:spTgt spid="31"/>
+                                        </p:tgtEl>
+                                        <p:attrNameLst>
+                                          <p:attrName>style.visibility</p:attrName>
+                                        </p:attrNameLst>
+                                      </p:cBhvr>
+                                      <p:to>
+                                        <p:strVal val="visible"/>
+                                      </p:to>
+                                    </p:set>
+                                    <p:set>
+                                      <p:cBhvr>
+                                        <p:cTn id="17" dur="1" fill="hold">
+                                          <p:stCondLst>
+                                            <p:cond delay="0"/>
+                                          </p:stCondLst>
+                                        </p:cTn>
+                                        <p:tgtEl>
+                                          <p:spTgt spid="32"/>
+                                        </p:tgtEl>
+                                        <p:attrNameLst>
+                                          <p:attrName>style.visibility</p:attrName>
+                                        </p:attrNameLst>
+                                      </p:cBhvr>
+                                      <p:to>
+                                        <p:strVal val="visible"/>
+                                      </p:to>
+                                    </p:set>
+                                    <p:set>
+                                      <p:cBhvr>
+                                        <p:cTn id="18" dur="1" fill="hold">
+                                          <p:stCondLst>
+                                            <p:cond delay="0"/>
+                                          </p:stCondLst>
+                                        </p:cTn>
+                                        <p:tgtEl>
+                                          <p:spTgt spid="33"/>
+                                        </p:tgtEl>
+                                        <p:attrNameLst>
+                                          <p:attrName>style.visibility</p:attrName>
+                                        </p:attrNameLst>
+                                      </p:cBhvr>
+                                      <p:to>
+                                        <p:strVal val="visible"/>
+                                      </p:to>
+                                    </p:set>
+                                    <p:set>
+                                      <p:cBhvr>
+                                        <p:cTn id="19" dur="1" fill="hold">
+                                          <p:stCondLst>
+                                            <p:cond delay="0"/>
+                                          </p:stCondLst>
+                                        </p:cTn>
+                                        <p:tgtEl>
+                                          <p:spTgt spid="34"/>
+                                        </p:tgtEl>
+                                        <p:attrNameLst>
+                                          <p:attrName>style.visibility</p:attrName>
+                                        </p:attrNameLst>
+                                      </p:cBhvr>
+                                      <p:to>
+                                        <p:strVal val="visible"/>
+                                      </p:to>
+                                    </p:set>
+                                    <p:set>
+                                      <p:cBhvr>
+                                        <p:cTn id="20" dur="1" fill="hold">
+                                          <p:stCondLst>
+                                            <p:cond delay="0"/>
+                                          </p:stCondLst>
+                                        </p:cTn>
+                                        <p:tgtEl>
+                                          <p:spTgt spid="35"/>
+                                        </p:tgtEl>
+                                        <p:attrNameLst>
+                                          <p:attrName>style.visibility</p:attrName>
+                                        </p:attrNameLst>
+                                      </p:cBhvr>
+                                      <p:to>
+                                        <p:strVal val="visible"/>
+                                      </p:to>
+                                    </p:set>
+                                  </p:childTnLst>
+                                </p:cTn>
+                              </p:par>
                             </p:childTnLst>
                           </p:cTn>
                         </p:par>
@@ -24121,6 +24245,20 @@
                   </p:par>
                 </p:childTnLst>
               </p:cTn>
+              <p:prevCondLst>
+                <p:cond evt="onPrev" delay="0">
+                  <p:tgtEl>
+                    <p:sldTgt/>
+                  </p:tgtEl>
+                </p:cond>
+              </p:prevCondLst>
+              <p:nextCondLst>
+                <p:cond evt="onNext" delay="0">
+                  <p:tgtEl>
+                    <p:sldTgt/>
+                  </p:tgtEl>
+                </p:cond>
+              </p:nextCondLst>
             </p:seq>
           </p:childTnLst>
         </p:cTn>
@@ -34249,209 +34387,218 @@
                       </p:stCondLst>
                       <p:childTnLst>
                         <p:par>
-                          <p:cTn id="4" presetID="2" presetClass="entr" presetSubtype="0" fill="hold" nodeType="clickEffect">
+                          <p:cTn id="4" fill="hold">
                             <p:stCondLst>
                               <p:cond delay="0"/>
                             </p:stCondLst>
                             <p:childTnLst>
-                              <p:set>
-                                <p:cBhvr>
-                                  <p:cTn id="5" dur="1" fill="hold">
-                                    <p:stCondLst>
-                                      <p:cond delay="0"/>
-                                    </p:stCondLst>
-                                  </p:cTn>
-                                  <p:tgtEl>
-                                    <p:spTgt spid="23"/>
-                                  </p:tgtEl>
-                                  <p:attrNameLst>
-                                    <p:attrName>style.visibility</p:attrName>
-                                  </p:attrNameLst>
-                                </p:cBhvr>
-                                <p:to>
-                                  <p:strVal val="visible"/>
-                                </p:to>
-                              </p:set>
-                              <p:set>
-                                <p:cBhvr>
-                                  <p:cTn id="6" dur="1" fill="hold">
-                                    <p:stCondLst>
-                                      <p:cond delay="0"/>
-                                    </p:stCondLst>
-                                  </p:cTn>
-                                  <p:tgtEl>
-                                    <p:spTgt spid="24"/>
-                                  </p:tgtEl>
-                                  <p:attrNameLst>
-                                    <p:attrName>style.visibility</p:attrName>
-                                  </p:attrNameLst>
-                                </p:cBhvr>
-                                <p:to>
-                                  <p:strVal val="visible"/>
-                                </p:to>
-                              </p:set>
-                              <p:set>
-                                <p:cBhvr>
-                                  <p:cTn id="7" dur="1" fill="hold">
-                                    <p:stCondLst>
-                                      <p:cond delay="0"/>
-                                    </p:stCondLst>
-                                  </p:cTn>
-                                  <p:tgtEl>
-                                    <p:spTgt spid="25"/>
-                                  </p:tgtEl>
-                                  <p:attrNameLst>
-                                    <p:attrName>style.visibility</p:attrName>
-                                  </p:attrNameLst>
-                                </p:cBhvr>
-                                <p:to>
-                                  <p:strVal val="visible"/>
-                                </p:to>
-                              </p:set>
-                              <p:set>
-                                <p:cBhvr>
-                                  <p:cTn id="8" dur="1" fill="hold">
-                                    <p:stCondLst>
-                                      <p:cond delay="0"/>
-                                    </p:stCondLst>
-                                  </p:cTn>
-                                  <p:tgtEl>
-                                    <p:spTgt spid="26"/>
-                                  </p:tgtEl>
-                                  <p:attrNameLst>
-                                    <p:attrName>style.visibility</p:attrName>
-                                  </p:attrNameLst>
-                                </p:cBhvr>
-                                <p:to>
-                                  <p:strVal val="visible"/>
-                                </p:to>
-                              </p:set>
-                              <p:set>
-                                <p:cBhvr>
-                                  <p:cTn id="9" dur="1" fill="hold">
-                                    <p:stCondLst>
-                                      <p:cond delay="0"/>
-                                    </p:stCondLst>
-                                  </p:cTn>
-                                  <p:tgtEl>
-                                    <p:spTgt spid="27"/>
-                                  </p:tgtEl>
-                                  <p:attrNameLst>
-                                    <p:attrName>style.visibility</p:attrName>
-                                  </p:attrNameLst>
-                                </p:cBhvr>
-                                <p:to>
-                                  <p:strVal val="visible"/>
-                                </p:to>
-                              </p:set>
-                              <p:set>
-                                <p:cBhvr>
-                                  <p:cTn id="10" dur="1" fill="hold">
-                                    <p:stCondLst>
-                                      <p:cond delay="0"/>
-                                    </p:stCondLst>
-                                  </p:cTn>
-                                  <p:tgtEl>
-                                    <p:spTgt spid="28"/>
-                                  </p:tgtEl>
-                                  <p:attrNameLst>
-                                    <p:attrName>style.visibility</p:attrName>
-                                  </p:attrNameLst>
-                                </p:cBhvr>
-                                <p:to>
-                                  <p:strVal val="visible"/>
-                                </p:to>
-                              </p:set>
-                              <p:set>
-                                <p:cBhvr>
-                                  <p:cTn id="11" dur="1" fill="hold">
-                                    <p:stCondLst>
-                                      <p:cond delay="0"/>
-                                    </p:stCondLst>
-                                  </p:cTn>
-                                  <p:tgtEl>
-                                    <p:spTgt spid="29"/>
-                                  </p:tgtEl>
-                                  <p:attrNameLst>
-                                    <p:attrName>style.visibility</p:attrName>
-                                  </p:attrNameLst>
-                                </p:cBhvr>
-                                <p:to>
-                                  <p:strVal val="visible"/>
-                                </p:to>
-                              </p:set>
-                              <p:set>
-                                <p:cBhvr>
-                                  <p:cTn id="12" dur="1" fill="hold">
-                                    <p:stCondLst>
-                                      <p:cond delay="0"/>
-                                    </p:stCondLst>
-                                  </p:cTn>
-                                  <p:tgtEl>
-                                    <p:spTgt spid="30"/>
-                                  </p:tgtEl>
-                                  <p:attrNameLst>
-                                    <p:attrName>style.visibility</p:attrName>
-                                  </p:attrNameLst>
-                                </p:cBhvr>
-                                <p:to>
-                                  <p:strVal val="visible"/>
-                                </p:to>
-                              </p:set>
-                              <p:set>
-                                <p:cBhvr>
-                                  <p:cTn id="13" dur="1" fill="hold">
-                                    <p:stCondLst>
-                                      <p:cond delay="0"/>
-                                    </p:stCondLst>
-                                  </p:cTn>
-                                  <p:tgtEl>
-                                    <p:spTgt spid="31"/>
-                                  </p:tgtEl>
-                                  <p:attrNameLst>
-                                    <p:attrName>style.visibility</p:attrName>
-                                  </p:attrNameLst>
-                                </p:cBhvr>
-                                <p:to>
-                                  <p:strVal val="visible"/>
-                                </p:to>
-                              </p:set>
-                              <p:set>
-                                <p:cBhvr>
-                                  <p:cTn id="14" dur="1" fill="hold">
-                                    <p:stCondLst>
-                                      <p:cond delay="0"/>
-                                    </p:stCondLst>
-                                  </p:cTn>
-                                  <p:tgtEl>
-                                    <p:spTgt spid="32"/>
-                                  </p:tgtEl>
-                                  <p:attrNameLst>
-                                    <p:attrName>style.visibility</p:attrName>
-                                  </p:attrNameLst>
-                                </p:cBhvr>
-                                <p:to>
-                                  <p:strVal val="visible"/>
-                                </p:to>
-                              </p:set>
-                              <p:set>
-                                <p:cBhvr>
-                                  <p:cTn id="15" dur="1" fill="hold">
-                                    <p:stCondLst>
-                                      <p:cond delay="0"/>
-                                    </p:stCondLst>
-                                  </p:cTn>
-                                  <p:tgtEl>
-                                    <p:spTgt spid="33"/>
-                                  </p:tgtEl>
-                                  <p:attrNameLst>
-                                    <p:attrName>style.visibility</p:attrName>
-                                  </p:attrNameLst>
-                                </p:cBhvr>
-                                <p:to>
-                                  <p:strVal val="visible"/>
-                                </p:to>
-                              </p:set>
+                              <p:par>
+                                <p:cTn id="5" presetID="2" presetClass="entr" presetSubtype="0" fill="hold" grpId="0" nodeType="clickEffect">
+                                  <p:stCondLst>
+                                    <p:cond delay="0"/>
+                                  </p:stCondLst>
+                                  <p:childTnLst>
+                                    <p:set>
+                                      <p:cBhvr>
+                                        <p:cTn id="6" dur="1" fill="hold">
+                                          <p:stCondLst>
+                                            <p:cond delay="0"/>
+                                          </p:stCondLst>
+                                        </p:cTn>
+                                        <p:tgtEl>
+                                          <p:spTgt spid="23"/>
+                                        </p:tgtEl>
+                                        <p:attrNameLst>
+                                          <p:attrName>style.visibility</p:attrName>
+                                        </p:attrNameLst>
+                                      </p:cBhvr>
+                                      <p:to>
+                                        <p:strVal val="visible"/>
+                                      </p:to>
+                                    </p:set>
+                                    <p:set>
+                                      <p:cBhvr>
+                                        <p:cTn id="7" dur="1" fill="hold">
+                                          <p:stCondLst>
+                                            <p:cond delay="0"/>
+                                          </p:stCondLst>
+                                        </p:cTn>
+                                        <p:tgtEl>
+                                          <p:spTgt spid="24"/>
+                                        </p:tgtEl>
+                                        <p:attrNameLst>
+                                          <p:attrName>style.visibility</p:attrName>
+                                        </p:attrNameLst>
+                                      </p:cBhvr>
+                                      <p:to>
+                                        <p:strVal val="visible"/>
+                                      </p:to>
+                                    </p:set>
+                                    <p:set>
+                                      <p:cBhvr>
+                                        <p:cTn id="8" dur="1" fill="hold">
+                                          <p:stCondLst>
+                                            <p:cond delay="0"/>
+                                          </p:stCondLst>
+                                        </p:cTn>
+                                        <p:tgtEl>
+                                          <p:spTgt spid="25"/>
+                                        </p:tgtEl>
+                                        <p:attrNameLst>
+                                          <p:attrName>style.visibility</p:attrName>
+                                        </p:attrNameLst>
+                                      </p:cBhvr>
+                                      <p:to>
+                                        <p:strVal val="visible"/>
+                                      </p:to>
+                                    </p:set>
+                                    <p:set>
+                                      <p:cBhvr>
+                                        <p:cTn id="9" dur="1" fill="hold">
+                                          <p:stCondLst>
+                                            <p:cond delay="0"/>
+                                          </p:stCondLst>
+                                        </p:cTn>
+                                        <p:tgtEl>
+                                          <p:spTgt spid="26"/>
+                                        </p:tgtEl>
+                                        <p:attrNameLst>
+                                          <p:attrName>style.visibility</p:attrName>
+                                        </p:attrNameLst>
+                                      </p:cBhvr>
+                                      <p:to>
+                                        <p:strVal val="visible"/>
+                                      </p:to>
+                                    </p:set>
+                                    <p:set>
+                                      <p:cBhvr>
+                                        <p:cTn id="10" dur="1" fill="hold">
+                                          <p:stCondLst>
+                                            <p:cond delay="0"/>
+                                          </p:stCondLst>
+                                        </p:cTn>
+                                        <p:tgtEl>
+                                          <p:spTgt spid="27"/>
+                                        </p:tgtEl>
+                                        <p:attrNameLst>
+                                          <p:attrName>style.visibility</p:attrName>
+                                        </p:attrNameLst>
+                                      </p:cBhvr>
+                                      <p:to>
+                                        <p:strVal val="visible"/>
+                                      </p:to>
+                                    </p:set>
+                                    <p:set>
+                                      <p:cBhvr>
+                                        <p:cTn id="11" dur="1" fill="hold">
+                                          <p:stCondLst>
+                                            <p:cond delay="0"/>
+                                          </p:stCondLst>
+                                        </p:cTn>
+                                        <p:tgtEl>
+                                          <p:spTgt spid="28"/>
+                                        </p:tgtEl>
+                                        <p:attrNameLst>
+                                          <p:attrName>style.visibility</p:attrName>
+                                        </p:attrNameLst>
+                                      </p:cBhvr>
+                                      <p:to>
+                                        <p:strVal val="visible"/>
+                                      </p:to>
+                                    </p:set>
+                                    <p:set>
+                                      <p:cBhvr>
+                                        <p:cTn id="12" dur="1" fill="hold">
+                                          <p:stCondLst>
+                                            <p:cond delay="0"/>
+                                          </p:stCondLst>
+                                        </p:cTn>
+                                        <p:tgtEl>
+                                          <p:spTgt spid="29"/>
+                                        </p:tgtEl>
+                                        <p:attrNameLst>
+                                          <p:attrName>style.visibility</p:attrName>
+                                        </p:attrNameLst>
+                                      </p:cBhvr>
+                                      <p:to>
+                                        <p:strVal val="visible"/>
+                                      </p:to>
+                                    </p:set>
+                                    <p:set>
+                                      <p:cBhvr>
+                                        <p:cTn id="13" dur="1" fill="hold">
+                                          <p:stCondLst>
+                                            <p:cond delay="0"/>
+                                          </p:stCondLst>
+                                        </p:cTn>
+                                        <p:tgtEl>
+                                          <p:spTgt spid="30"/>
+                                        </p:tgtEl>
+                                        <p:attrNameLst>
+                                          <p:attrName>style.visibility</p:attrName>
+                                        </p:attrNameLst>
+                                      </p:cBhvr>
+                                      <p:to>
+                                        <p:strVal val="visible"/>
+                                      </p:to>
+                                    </p:set>
+                                    <p:set>
+                                      <p:cBhvr>
+                                        <p:cTn id="14" dur="1" fill="hold">
+                                          <p:stCondLst>
+                                            <p:cond delay="0"/>
+                                          </p:stCondLst>
+                                        </p:cTn>
+                                        <p:tgtEl>
+                                          <p:spTgt spid="31"/>
+                                        </p:tgtEl>
+                                        <p:attrNameLst>
+                                          <p:attrName>style.visibility</p:attrName>
+                                        </p:attrNameLst>
+                                      </p:cBhvr>
+                                      <p:to>
+                                        <p:strVal val="visible"/>
+                                      </p:to>
+                                    </p:set>
+                                    <p:set>
+                                      <p:cBhvr>
+                                        <p:cTn id="15" dur="1" fill="hold">
+                                          <p:stCondLst>
+                                            <p:cond delay="0"/>
+                                          </p:stCondLst>
+                                        </p:cTn>
+                                        <p:tgtEl>
+                                          <p:spTgt spid="32"/>
+                                        </p:tgtEl>
+                                        <p:attrNameLst>
+                                          <p:attrName>style.visibility</p:attrName>
+                                        </p:attrNameLst>
+                                      </p:cBhvr>
+                                      <p:to>
+                                        <p:strVal val="visible"/>
+                                      </p:to>
+                                    </p:set>
+                                    <p:set>
+                                      <p:cBhvr>
+                                        <p:cTn id="16" dur="1" fill="hold">
+                                          <p:stCondLst>
+                                            <p:cond delay="0"/>
+                                          </p:stCondLst>
+                                        </p:cTn>
+                                        <p:tgtEl>
+                                          <p:spTgt spid="33"/>
+                                        </p:tgtEl>
+                                        <p:attrNameLst>
+                                          <p:attrName>style.visibility</p:attrName>
+                                        </p:attrNameLst>
+                                      </p:cBhvr>
+                                      <p:to>
+                                        <p:strVal val="visible"/>
+                                      </p:to>
+                                    </p:set>
+                                  </p:childTnLst>
+                                </p:cTn>
+                              </p:par>
                             </p:childTnLst>
                           </p:cTn>
                         </p:par>
@@ -34460,6 +34607,20 @@
                   </p:par>
                 </p:childTnLst>
               </p:cTn>
+              <p:prevCondLst>
+                <p:cond evt="onPrev" delay="0">
+                  <p:tgtEl>
+                    <p:sldTgt/>
+                  </p:tgtEl>
+                </p:cond>
+              </p:prevCondLst>
+              <p:nextCondLst>
+                <p:cond evt="onNext" delay="0">
+                  <p:tgtEl>
+                    <p:sldTgt/>
+                  </p:tgtEl>
+                </p:cond>
+              </p:nextCondLst>
             </p:seq>
           </p:childTnLst>
         </p:cTn>
